--- a/rdm6300-picorv32-rom-data/document/Bao_Cao_Do_An_RDM6300_PicoRV32_SoC.pptx
+++ b/rdm6300-picorv32-rom-data/document/Bao_Cao_Do_An_RDM6300_PicoRV32_SoC.pptx
@@ -29,6 +29,8 @@
     <p:sldId id="277" r:id="rId28"/>
     <p:sldId id="278" r:id="rId29"/>
     <p:sldId id="279" r:id="rId30"/>
+    <p:sldId id="280" r:id="rId31"/>
+    <p:sldId id="281" r:id="rId32"/>
   </p:sldIdLst>
   <p:sldSz cx="12191695" cy="6858000" type="screen4x3"/>
   <p:notesSz cx="6858000" cy="9144000"/>
@@ -3588,7 +3590,7 @@
               </a:defRPr>
             </a:pPr>
             <a:r>
-              <a:t>10 / 24</a:t>
+              <a:t>10 / 26</a:t>
             </a:r>
           </a:p>
         </p:txBody>
@@ -3605,7 +3607,9 @@
             <a:ext cx="5257800" cy="5029200"/>
           </a:xfrm>
           <a:prstGeom prst="roundRect">
-            <a:avLst/>
+            <a:avLst>
+              <a:gd name="adj" fmla="val 2000"/>
+            </a:avLst>
           </a:prstGeom>
           <a:solidFill>
             <a:srgbClr val="FFFFFF"/>
@@ -3674,7 +3678,9 @@
             <a:ext cx="5285232" cy="5029200"/>
           </a:xfrm>
           <a:prstGeom prst="roundRect">
-            <a:avLst/>
+            <a:avLst>
+              <a:gd name="adj" fmla="val 2000"/>
+            </a:avLst>
           </a:prstGeom>
           <a:solidFill>
             <a:srgbClr val="FFFFFF"/>
@@ -4123,7 +4129,7 @@
               </a:defRPr>
             </a:pPr>
             <a:r>
-              <a:t>11 / 24</a:t>
+              <a:t>11 / 26</a:t>
             </a:r>
           </a:p>
         </p:txBody>
@@ -4140,7 +4146,9 @@
             <a:ext cx="5257800" cy="5029200"/>
           </a:xfrm>
           <a:prstGeom prst="roundRect">
-            <a:avLst/>
+            <a:avLst>
+              <a:gd name="adj" fmla="val 2000"/>
+            </a:avLst>
           </a:prstGeom>
           <a:solidFill>
             <a:srgbClr val="FFFFFF"/>
@@ -4209,7 +4217,9 @@
             <a:ext cx="5285232" cy="5029200"/>
           </a:xfrm>
           <a:prstGeom prst="roundRect">
-            <a:avLst/>
+            <a:avLst>
+              <a:gd name="adj" fmla="val 2000"/>
+            </a:avLst>
           </a:prstGeom>
           <a:solidFill>
             <a:srgbClr val="FFFFFF"/>
@@ -4535,7 +4545,7 @@
               </a:defRPr>
             </a:pPr>
             <a:r>
-              <a:t>PHẦN 4: HỆ THỐNG TESTBENCH &amp; MÔ PHỎNG</a:t>
+              <a:t>PHẦN 3: PHÂN TÍCH KIẾN TRÚC VI HỆ THỐNG</a:t>
             </a:r>
           </a:p>
           <a:p>
@@ -4548,7 +4558,7 @@
               </a:defRPr>
             </a:pPr>
             <a:r>
-              <a:t>Testbench 1: Kiểm Thử Phần Cứng RTL Thuần Cho UART MMIO &amp; FIFO (tb_uart_rtl.v)</a:t>
+              <a:t>So Sánh Kiến Trúc: Thiết Kế UART Trên RTL vs Viết Bằng Firmware C</a:t>
             </a:r>
           </a:p>
         </p:txBody>
@@ -4663,7 +4673,7 @@
               </a:defRPr>
             </a:pPr>
             <a:r>
-              <a:t>12 / 24</a:t>
+              <a:t>12 / 26</a:t>
             </a:r>
           </a:p>
         </p:txBody>
@@ -4677,13 +4687,491 @@
         <p:spPr>
           <a:xfrm>
             <a:off x="731520" y="1234440"/>
-            <a:ext cx="5212080" cy="4937760"/>
+            <a:ext cx="5257800" cy="3886200"/>
           </a:xfrm>
           <a:prstGeom prst="roundRect">
-            <a:avLst/>
+            <a:avLst>
+              <a:gd name="adj" fmla="val 2000"/>
+            </a:avLst>
           </a:prstGeom>
           <a:solidFill>
             <a:srgbClr val="FFFFFF"/>
+          </a:solidFill>
+          <a:ln w="22860">
+            <a:solidFill>
+              <a:srgbClr val="E11D48"/>
+            </a:solidFill>
+          </a:ln>
+        </p:spPr>
+        <p:style>
+          <a:lnRef idx="1">
+            <a:schemeClr val="accent1"/>
+          </a:lnRef>
+          <a:fillRef idx="3">
+            <a:schemeClr val="accent1"/>
+          </a:fillRef>
+          <a:effectRef idx="2">
+            <a:schemeClr val="accent1"/>
+          </a:effectRef>
+          <a:fontRef idx="minor">
+            <a:schemeClr val="lt1"/>
+          </a:fontRef>
+        </p:style>
+        <p:txBody>
+          <a:bodyPr rtlCol="0" anchor="ctr"/>
+          <a:lstStyle/>
+          <a:p>
+            <a:pPr algn="ctr"/>
+          </a:p>
+        </p:txBody>
+      </p:sp>
+      <p:sp>
+        <p:nvSpPr>
+          <p:cNvPr id="9" name="TextBox 8"/>
+          <p:cNvSpPr txBox="1"/>
+          <p:nvPr/>
+        </p:nvSpPr>
+        <p:spPr>
+          <a:xfrm>
+            <a:off x="914400" y="1353312"/>
+            <a:ext cx="4892040" cy="3657600"/>
+          </a:xfrm>
+          <a:prstGeom prst="rect">
+            <a:avLst/>
+          </a:prstGeom>
+          <a:noFill/>
+        </p:spPr>
+        <p:txBody>
+          <a:bodyPr wrap="square" lIns="0" tIns="0" rIns="0" bIns="0">
+            <a:spAutoFit/>
+          </a:bodyPr>
+          <a:lstStyle/>
+          <a:p>
+            <a:pPr>
+              <a:spcAft>
+                <a:spcPts val="600"/>
+              </a:spcAft>
+              <a:defRPr b="1" sz="1150">
+                <a:solidFill>
+                  <a:srgbClr val="E11D48"/>
+                </a:solidFill>
+                <a:latin typeface="Segoe UI"/>
+              </a:defRPr>
+            </a:pPr>
+            <a:r>
+              <a:t>PHƯƠNG ÁN 1: SOFTWARE BIT-BANG TRONG C (NHƯỢC ĐIỂM)</a:t>
+            </a:r>
+          </a:p>
+          <a:p>
+            <a:pPr>
+              <a:spcBef>
+                <a:spcPts val="300"/>
+              </a:spcBef>
+              <a:spcAft>
+                <a:spcPts val="100"/>
+              </a:spcAft>
+              <a:defRPr sz="880" b="1">
+                <a:solidFill>
+                  <a:srgbClr val="E11D48"/>
+                </a:solidFill>
+                <a:latin typeface="Segoe UI"/>
+              </a:defRPr>
+            </a:pPr>
+            <a:r>
+              <a:t>• 1. TREO CPU 100% KHI CHỜ BIT (CPU BLOCKING):</a:t>
+            </a:r>
+          </a:p>
+          <a:p>
+            <a:pPr>
+              <a:lnSpc>
+                <a:spcPct val="112000"/>
+              </a:lnSpc>
+              <a:spcAft>
+                <a:spcPts val="300"/>
+              </a:spcAft>
+              <a:defRPr sz="819">
+                <a:solidFill>
+                  <a:srgbClr val="0F172A"/>
+                </a:solidFill>
+                <a:latin typeface="Segoe UI"/>
+              </a:defRPr>
+            </a:pPr>
+            <a:r>
+              <a:t>  Tại 9600 baud, 1 bit = 104.16 µs; khung thẻ 14 byte (140 bit) mất ~14.5 ms. Vòng lặp delay/polling chiếm dụng 100% CPU, không thể đa nhiệm xử lý tác vụ khác.</a:t>
+            </a:r>
+          </a:p>
+          <a:p>
+            <a:pPr>
+              <a:spcBef>
+                <a:spcPts val="300"/>
+              </a:spcBef>
+              <a:spcAft>
+                <a:spcPts val="100"/>
+              </a:spcAft>
+              <a:defRPr sz="880" b="1">
+                <a:solidFill>
+                  <a:srgbClr val="E11D48"/>
+                </a:solidFill>
+                <a:latin typeface="Segoe UI"/>
+              </a:defRPr>
+            </a:pPr>
+            <a:r>
+              <a:t>• 2. MẤT 100% MÃ THẺ KHI GHI FLASH (FLASH STALL):</a:t>
+            </a:r>
+          </a:p>
+          <a:p>
+            <a:pPr>
+              <a:lnSpc>
+                <a:spcPct val="112000"/>
+              </a:lnSpc>
+              <a:spcAft>
+                <a:spcPts val="300"/>
+              </a:spcAft>
+              <a:defRPr sz="819">
+                <a:solidFill>
+                  <a:srgbClr val="0F172A"/>
+                </a:solidFill>
+                <a:latin typeface="Segoe UI"/>
+              </a:defRPr>
+            </a:pPr>
+            <a:r>
+              <a:t>  Xóa Sector (4KB) mất 20-100 ms, ghi Page mất 1-3 ms. CPU nạp mã vào SRAM bị chiếm dụng; không thể quét GPIO, gây rớt toàn bộ dữ liệu thẻ quẹt!</a:t>
+            </a:r>
+          </a:p>
+          <a:p>
+            <a:pPr>
+              <a:spcBef>
+                <a:spcPts val="300"/>
+              </a:spcBef>
+              <a:spcAft>
+                <a:spcPts val="100"/>
+              </a:spcAft>
+              <a:defRPr sz="880" b="1">
+                <a:solidFill>
+                  <a:srgbClr val="E11D48"/>
+                </a:solidFill>
+                <a:latin typeface="Segoe UI"/>
+              </a:defRPr>
+            </a:pPr>
+            <a:r>
+              <a:t>• 3. RUNG PHA (JITTER) DO TRỄ NẠP MÃ FLASH XIP:</a:t>
+            </a:r>
+          </a:p>
+          <a:p>
+            <a:pPr>
+              <a:lnSpc>
+                <a:spcPct val="112000"/>
+              </a:lnSpc>
+              <a:spcAft>
+                <a:spcPts val="300"/>
+              </a:spcAft>
+              <a:defRPr sz="819">
+                <a:solidFill>
+                  <a:srgbClr val="0F172A"/>
+                </a:solidFill>
+                <a:latin typeface="Segoe UI"/>
+              </a:defRPr>
+            </a:pPr>
+            <a:r>
+              <a:t>  Thực thi lệnh C qua SPI Flash XIP có độ trễ thay đổi (wait-states biến thiên), làm sai lệch chu kỳ hàm delay trong C, gây lỗi định dạng Framing Error.</a:t>
+            </a:r>
+          </a:p>
+          <a:p>
+            <a:pPr>
+              <a:spcBef>
+                <a:spcPts val="300"/>
+              </a:spcBef>
+              <a:spcAft>
+                <a:spcPts val="100"/>
+              </a:spcAft>
+              <a:defRPr sz="880" b="1">
+                <a:solidFill>
+                  <a:srgbClr val="E11D48"/>
+                </a:solidFill>
+                <a:latin typeface="Segoe UI"/>
+              </a:defRPr>
+            </a:pPr>
+            <a:r>
+              <a:t>• 4. BẤT LỰC TRƯỚC LỖI SIÊU ỔN ĐỊNH (METASTABILITY):</a:t>
+            </a:r>
+          </a:p>
+          <a:p>
+            <a:pPr>
+              <a:lnSpc>
+                <a:spcPct val="112000"/>
+              </a:lnSpc>
+              <a:spcAft>
+                <a:spcPts val="300"/>
+              </a:spcAft>
+              <a:defRPr sz="819">
+                <a:solidFill>
+                  <a:srgbClr val="0F172A"/>
+                </a:solidFill>
+                <a:latin typeface="Segoe UI"/>
+              </a:defRPr>
+            </a:pPr>
+            <a:r>
+              <a:t>  Đọc chân GPIO bằng phần mềm không thể giải quyết xung đột miền xung (CDC) và không thể lọc xung gai (glitch) ở mức tín hiệu bán dẫn.</a:t>
+            </a:r>
+          </a:p>
+        </p:txBody>
+      </p:sp>
+      <p:sp>
+        <p:nvSpPr>
+          <p:cNvPr id="10" name="Rounded Rectangle 9"/>
+          <p:cNvSpPr/>
+          <p:nvPr/>
+        </p:nvSpPr>
+        <p:spPr>
+          <a:xfrm>
+            <a:off x="6199632" y="1234440"/>
+            <a:ext cx="5257800" cy="3886200"/>
+          </a:xfrm>
+          <a:prstGeom prst="roundRect">
+            <a:avLst>
+              <a:gd name="adj" fmla="val 2000"/>
+            </a:avLst>
+          </a:prstGeom>
+          <a:solidFill>
+            <a:srgbClr val="FFFFFF"/>
+          </a:solidFill>
+          <a:ln w="22860">
+            <a:solidFill>
+              <a:srgbClr val="10B981"/>
+            </a:solidFill>
+          </a:ln>
+        </p:spPr>
+        <p:style>
+          <a:lnRef idx="1">
+            <a:schemeClr val="accent1"/>
+          </a:lnRef>
+          <a:fillRef idx="3">
+            <a:schemeClr val="accent1"/>
+          </a:fillRef>
+          <a:effectRef idx="2">
+            <a:schemeClr val="accent1"/>
+          </a:effectRef>
+          <a:fontRef idx="minor">
+            <a:schemeClr val="lt1"/>
+          </a:fontRef>
+        </p:style>
+        <p:txBody>
+          <a:bodyPr rtlCol="0" anchor="ctr"/>
+          <a:lstStyle/>
+          <a:p>
+            <a:pPr algn="ctr"/>
+          </a:p>
+        </p:txBody>
+      </p:sp>
+      <p:sp>
+        <p:nvSpPr>
+          <p:cNvPr id="11" name="TextBox 10"/>
+          <p:cNvSpPr txBox="1"/>
+          <p:nvPr/>
+        </p:nvSpPr>
+        <p:spPr>
+          <a:xfrm>
+            <a:off x="6382512" y="1353312"/>
+            <a:ext cx="4892040" cy="3657600"/>
+          </a:xfrm>
+          <a:prstGeom prst="rect">
+            <a:avLst/>
+          </a:prstGeom>
+          <a:noFill/>
+        </p:spPr>
+        <p:txBody>
+          <a:bodyPr wrap="square" lIns="0" tIns="0" rIns="0" bIns="0">
+            <a:spAutoFit/>
+          </a:bodyPr>
+          <a:lstStyle/>
+          <a:p>
+            <a:pPr>
+              <a:spcAft>
+                <a:spcPts val="600"/>
+              </a:spcAft>
+              <a:defRPr b="1" sz="1150">
+                <a:solidFill>
+                  <a:srgbClr val="10B981"/>
+                </a:solidFill>
+                <a:latin typeface="Segoe UI"/>
+              </a:defRPr>
+            </a:pPr>
+            <a:r>
+              <a:t>PHƯƠNG ÁN 2: THIẾT KẾ UART &amp; FIFO TRÊN RTL (TỐI ƯU)</a:t>
+            </a:r>
+          </a:p>
+          <a:p>
+            <a:pPr>
+              <a:spcBef>
+                <a:spcPts val="300"/>
+              </a:spcBef>
+              <a:spcAft>
+                <a:spcPts val="100"/>
+              </a:spcAft>
+              <a:defRPr sz="880" b="1">
+                <a:solidFill>
+                  <a:srgbClr val="10B981"/>
+                </a:solidFill>
+                <a:latin typeface="Segoe UI"/>
+              </a:defRPr>
+            </a:pPr>
+            <a:r>
+              <a:t>• 1. GIẢI PHÓNG 100% CPU (ZERO CPU OVERHEAD):</a:t>
+            </a:r>
+          </a:p>
+          <a:p>
+            <a:pPr>
+              <a:lnSpc>
+                <a:spcPct val="112000"/>
+              </a:lnSpc>
+              <a:spcAft>
+                <a:spcPts val="300"/>
+              </a:spcAft>
+              <a:defRPr sz="819">
+                <a:solidFill>
+                  <a:srgbClr val="0F172A"/>
+                </a:solidFill>
+                <a:latin typeface="Segoe UI"/>
+              </a:defRPr>
+            </a:pPr>
+            <a:r>
+              <a:t>  Mạch UART chạy ngầm hoàn toàn độc lập ở 50 MHz. CPU chỉ mất đúng 1 chu kỳ clock (20 ns) đọc REG_RFID_UART_DAT khi có dữ liệu mới.</a:t>
+            </a:r>
+          </a:p>
+          <a:p>
+            <a:pPr>
+              <a:spcBef>
+                <a:spcPts val="300"/>
+              </a:spcBef>
+              <a:spcAft>
+                <a:spcPts val="100"/>
+              </a:spcAft>
+              <a:defRPr sz="880" b="1">
+                <a:solidFill>
+                  <a:srgbClr val="10B981"/>
+                </a:solidFill>
+                <a:latin typeface="Segoe UI"/>
+              </a:defRPr>
+            </a:pPr>
+            <a:r>
+              <a:t>• 2. HÀNG ĐỢI FIFO 32B CHỐNG TRÀN TUYỆT ĐỐI:</a:t>
+            </a:r>
+          </a:p>
+          <a:p>
+            <a:pPr>
+              <a:lnSpc>
+                <a:spcPct val="112000"/>
+              </a:lnSpc>
+              <a:spcAft>
+                <a:spcPts val="300"/>
+              </a:spcAft>
+              <a:defRPr sz="819">
+                <a:solidFill>
+                  <a:srgbClr val="0F172A"/>
+                </a:solidFill>
+                <a:latin typeface="Segoe UI"/>
+              </a:defRPr>
+            </a:pPr>
+            <a:r>
+              <a:t>  Phần cứng tự động thu nhận và đệm toàn bộ 14 byte chuỗi thẻ vào sync_fifo.v, bảo toàn dữ liệu 100% ngay cả khi CPU đang bận ghi/xóa Flash NVM.</a:t>
+            </a:r>
+          </a:p>
+          <a:p>
+            <a:pPr>
+              <a:spcBef>
+                <a:spcPts val="300"/>
+              </a:spcBef>
+              <a:spcAft>
+                <a:spcPts val="100"/>
+              </a:spcAft>
+              <a:defRPr sz="880" b="1">
+                <a:solidFill>
+                  <a:srgbClr val="10B981"/>
+                </a:solidFill>
+                <a:latin typeface="Segoe UI"/>
+              </a:defRPr>
+            </a:pPr>
+            <a:r>
+              <a:t>• 3. ĐỊNH THỜI CHUẨN XÁC 100% TỪ CLOCK 50 MHZ:</a:t>
+            </a:r>
+          </a:p>
+          <a:p>
+            <a:pPr>
+              <a:lnSpc>
+                <a:spcPct val="112000"/>
+              </a:lnSpc>
+              <a:spcAft>
+                <a:spcPts val="300"/>
+              </a:spcAft>
+              <a:defRPr sz="819">
+                <a:solidFill>
+                  <a:srgbClr val="0F172A"/>
+                </a:solidFill>
+                <a:latin typeface="Segoe UI"/>
+              </a:defRPr>
+            </a:pPr>
+            <a:r>
+              <a:t>  Bộ chia tần cứng (divisor = 5208) tạo chu kỳ baud 9600 bps chính xác tuyệt đối, miễn nhiễm hoàn toàn với độ trễ nạp lệnh Flash XIP.</a:t>
+            </a:r>
+          </a:p>
+          <a:p>
+            <a:pPr>
+              <a:spcBef>
+                <a:spcPts val="300"/>
+              </a:spcBef>
+              <a:spcAft>
+                <a:spcPts val="100"/>
+              </a:spcAft>
+              <a:defRPr sz="880" b="1">
+                <a:solidFill>
+                  <a:srgbClr val="10B981"/>
+                </a:solidFill>
+                <a:latin typeface="Segoe UI"/>
+              </a:defRPr>
+            </a:pPr>
+            <a:r>
+              <a:t>• 4. KHỬ METASTABILITY 2-FF &amp; LỌC NHIỄU 16X:</a:t>
+            </a:r>
+          </a:p>
+          <a:p>
+            <a:pPr>
+              <a:lnSpc>
+                <a:spcPct val="112000"/>
+              </a:lnSpc>
+              <a:spcAft>
+                <a:spcPts val="300"/>
+              </a:spcAft>
+              <a:defRPr sz="819">
+                <a:solidFill>
+                  <a:srgbClr val="0F172A"/>
+                </a:solidFill>
+                <a:latin typeface="Segoe UI"/>
+              </a:defRPr>
+            </a:pPr>
+            <a:r>
+              <a:t>  Tích hợp sync_2ff.v (MTBF &gt; 1.000 năm) và bộ lấy mẫu 16x với thuật toán bầu đa số 3 mẫu triệt tiêu 100% xung gai nhiễu từ ăng-ten.</a:t>
+            </a:r>
+          </a:p>
+        </p:txBody>
+      </p:sp>
+      <p:sp>
+        <p:nvSpPr>
+          <p:cNvPr id="12" name="Rounded Rectangle 11"/>
+          <p:cNvSpPr/>
+          <p:nvPr/>
+        </p:nvSpPr>
+        <p:spPr>
+          <a:xfrm>
+            <a:off x="731520" y="5230368"/>
+            <a:ext cx="10725912" cy="1078992"/>
+          </a:xfrm>
+          <a:prstGeom prst="roundRect">
+            <a:avLst>
+              <a:gd name="adj" fmla="val 2000"/>
+            </a:avLst>
+          </a:prstGeom>
+          <a:solidFill>
+            <a:srgbClr val="F1F5F9"/>
           </a:solidFill>
           <a:ln w="19050">
             <a:solidFill>
@@ -4715,248 +5203,14 @@
       </p:sp>
       <p:sp>
         <p:nvSpPr>
-          <p:cNvPr id="9" name="TextBox 8"/>
+          <p:cNvPr id="13" name="TextBox 12"/>
           <p:cNvSpPr txBox="1"/>
           <p:nvPr/>
         </p:nvSpPr>
         <p:spPr>
           <a:xfrm>
-            <a:off x="914400" y="1371600"/>
-            <a:ext cx="4846320" cy="4663440"/>
-          </a:xfrm>
-          <a:prstGeom prst="rect">
-            <a:avLst/>
-          </a:prstGeom>
-          <a:noFill/>
-        </p:spPr>
-        <p:txBody>
-          <a:bodyPr wrap="square">
-            <a:spAutoFit/>
-          </a:bodyPr>
-          <a:lstStyle/>
-          <a:p>
-            <a:pPr>
-              <a:spcAft>
-                <a:spcPts val="1000"/>
-              </a:spcAft>
-              <a:defRPr sz="1300" b="1">
-                <a:solidFill>
-                  <a:srgbClr val="2563EB"/>
-                </a:solidFill>
-                <a:latin typeface="Segoe UI"/>
-              </a:defRPr>
-            </a:pPr>
-            <a:r>
-              <a:t>5 KỊCH BẢN KIỂM THỬ UART RTL THUẦN</a:t>
-            </a:r>
-          </a:p>
-          <a:p>
-            <a:pPr>
-              <a:lnSpc>
-                <a:spcPct val="115000"/>
-              </a:lnSpc>
-              <a:spcAft>
-                <a:spcPts val="800"/>
-              </a:spcAft>
-              <a:defRPr sz="1050">
-                <a:solidFill>
-                  <a:srgbClr val="0F172A"/>
-                </a:solidFill>
-                <a:latin typeface="Segoe UI"/>
-              </a:defRPr>
-            </a:pPr>
-            <a:r>
-              <a:t>• Mục tiêu: Xác minh tính đúng đắn phần cứng của uart_mmio.v, sync_fifo.v và simpleuart.v mà không cần CPU.</a:t>
-            </a:r>
-          </a:p>
-          <a:p>
-            <a:pPr>
-              <a:lnSpc>
-                <a:spcPct val="115000"/>
-              </a:lnSpc>
-              <a:spcAft>
-                <a:spcPts val="800"/>
-              </a:spcAft>
-              <a:defRPr sz="1050">
-                <a:solidFill>
-                  <a:srgbClr val="0F172A"/>
-                </a:solidFill>
-                <a:latin typeface="Segoe UI"/>
-              </a:defRPr>
-            </a:pPr>
-            <a:r>
-              <a:t>• 1. Default Divider: Kiểm tra thanh ghi Prescaler tại offset 0x00 nạp đúng giá trị mặc định 5208 (9600 baud @ 50MHz).</a:t>
-            </a:r>
-          </a:p>
-          <a:p>
-            <a:pPr>
-              <a:lnSpc>
-                <a:spcPct val="115000"/>
-              </a:lnSpc>
-              <a:spcAft>
-                <a:spcPts val="800"/>
-              </a:spcAft>
-              <a:defRPr sz="1050">
-                <a:solidFill>
-                  <a:srgbClr val="0F172A"/>
-                </a:solidFill>
-                <a:latin typeface="Segoe UI"/>
-              </a:defRPr>
-            </a:pPr>
-            <a:r>
-              <a:t>• 2. Divider Reconfig: Ghi giá trị chia tần mới và đọc lại qua bus MMIO, xác nhận mạch thanh ghi hoạt động chuẩn xác.</a:t>
-            </a:r>
-          </a:p>
-          <a:p>
-            <a:pPr>
-              <a:lnSpc>
-                <a:spcPct val="115000"/>
-              </a:lnSpc>
-              <a:spcAft>
-                <a:spcPts val="800"/>
-              </a:spcAft>
-              <a:defRPr sz="1050">
-                <a:solidFill>
-                  <a:srgbClr val="0F172A"/>
-                </a:solidFill>
-                <a:latin typeface="Segoe UI"/>
-              </a:defRPr>
-            </a:pPr>
-            <a:r>
-              <a:t>• 3. Serial TX Waveform: Ghi ký tự vào offset 0x04, kiểm tra dạng sóng nối tiếp tx_o (Start bit = 0, 8 data bits LSB-first, Stop bit = 1).</a:t>
-            </a:r>
-          </a:p>
-          <a:p>
-            <a:pPr>
-              <a:lnSpc>
-                <a:spcPct val="115000"/>
-              </a:lnSpc>
-              <a:spcAft>
-                <a:spcPts val="800"/>
-              </a:spcAft>
-              <a:defRPr sz="1050">
-                <a:solidFill>
-                  <a:srgbClr val="0F172A"/>
-                </a:solidFill>
-                <a:latin typeface="Segoe UI"/>
-              </a:defRPr>
-            </a:pPr>
-            <a:r>
-              <a:t>• 4. Serial RX &amp; FIFO: Bắn chuỗi bit vào rx_i, cờ rx_activity_o tích cực, kiểm tra dữ liệu nạp vào FIFO và trả về 0xFFFFFFFF khi rỗng.</a:t>
-            </a:r>
-          </a:p>
-          <a:p>
-            <a:pPr>
-              <a:lnSpc>
-                <a:spcPct val="115000"/>
-              </a:lnSpc>
-              <a:spcAft>
-                <a:spcPts val="800"/>
-              </a:spcAft>
-              <a:defRPr sz="1050">
-                <a:solidFill>
-                  <a:srgbClr val="0F172A"/>
-                </a:solidFill>
-                <a:latin typeface="Segoe UI"/>
-              </a:defRPr>
-            </a:pPr>
-            <a:r>
-              <a:t>• 5. Multi-Byte Burst: Bắn liên tiếp chuỗi byte kiểm tra cơ chế chống tràn của hàng đợi FIFO 32 byte.</a:t>
-            </a:r>
-          </a:p>
-        </p:txBody>
-      </p:sp>
-      <p:sp>
-        <p:nvSpPr>
-          <p:cNvPr id="10" name="Rounded Rectangle 9"/>
-          <p:cNvSpPr/>
-          <p:nvPr/>
-        </p:nvSpPr>
-        <p:spPr>
-          <a:xfrm>
-            <a:off x="6217920" y="1234440"/>
-            <a:ext cx="5239512" cy="4937760"/>
-          </a:xfrm>
-          <a:prstGeom prst="roundRect">
-            <a:avLst/>
-          </a:prstGeom>
-          <a:solidFill>
-            <a:srgbClr val="0B132B"/>
-          </a:solidFill>
-          <a:ln w="19050">
-            <a:solidFill>
-              <a:srgbClr val="1C2541"/>
-            </a:solidFill>
-          </a:ln>
-        </p:spPr>
-        <p:style>
-          <a:lnRef idx="1">
-            <a:schemeClr val="accent1"/>
-          </a:lnRef>
-          <a:fillRef idx="3">
-            <a:schemeClr val="accent1"/>
-          </a:fillRef>
-          <a:effectRef idx="2">
-            <a:schemeClr val="accent1"/>
-          </a:effectRef>
-          <a:fontRef idx="minor">
-            <a:schemeClr val="lt1"/>
-          </a:fontRef>
-        </p:style>
-        <p:txBody>
-          <a:bodyPr rtlCol="0" anchor="ctr"/>
-          <a:lstStyle/>
-          <a:p>
-            <a:pPr algn="ctr"/>
-          </a:p>
-        </p:txBody>
-      </p:sp>
-      <p:sp>
-        <p:nvSpPr>
-          <p:cNvPr id="11" name="TextBox 10"/>
-          <p:cNvSpPr txBox="1"/>
-          <p:nvPr/>
-        </p:nvSpPr>
-        <p:spPr>
-          <a:xfrm>
-            <a:off x="6355080" y="1307592"/>
-            <a:ext cx="4965192" cy="292608"/>
-          </a:xfrm>
-          <a:prstGeom prst="rect">
-            <a:avLst/>
-          </a:prstGeom>
-          <a:noFill/>
-        </p:spPr>
-        <p:txBody>
-          <a:bodyPr wrap="none" lIns="0" tIns="0" rIns="0" bIns="0">
-            <a:spAutoFit/>
-          </a:bodyPr>
-          <a:lstStyle/>
-          <a:p>
-            <a:pPr>
-              <a:defRPr sz="950" b="1">
-                <a:solidFill>
-                  <a:srgbClr val="0EA5E9"/>
-                </a:solidFill>
-                <a:latin typeface="Consolas"/>
-              </a:defRPr>
-            </a:pPr>
-            <a:r>
-              <a:t>&gt;_  tb/run_sim_uart.bat output</a:t>
-            </a:r>
-          </a:p>
-        </p:txBody>
-      </p:sp>
-      <p:sp>
-        <p:nvSpPr>
-          <p:cNvPr id="12" name="TextBox 11"/>
-          <p:cNvSpPr txBox="1"/>
-          <p:nvPr/>
-        </p:nvSpPr>
-        <p:spPr>
-          <a:xfrm>
-            <a:off x="6355080" y="1600200"/>
-            <a:ext cx="4965192" cy="4224528"/>
+            <a:off x="868680" y="5276088"/>
+            <a:ext cx="10451592" cy="987552"/>
           </a:xfrm>
           <a:prstGeom prst="rect">
             <a:avLst/>
@@ -4970,377 +5224,50 @@
           <a:lstStyle/>
           <a:p>
             <a:pPr>
-              <a:lnSpc>
-                <a:spcPct val="108000"/>
-              </a:lnSpc>
-              <a:spcAft>
-                <a:spcPts val="0"/>
-              </a:spcAft>
-              <a:defRPr sz="800">
-                <a:solidFill>
-                  <a:srgbClr val="FFFFFF"/>
-                </a:solidFill>
-                <a:latin typeface="Consolas"/>
-              </a:defRPr>
-            </a:pPr>
-            <a:r>
-              <a:t>Vivado Simulator v2025.1 - xelab &amp; xsim</a:t>
-            </a:r>
-          </a:p>
-          <a:p>
-            <a:pPr>
-              <a:lnSpc>
-                <a:spcPct val="108000"/>
-              </a:lnSpc>
-              <a:spcAft>
-                <a:spcPts val="0"/>
-              </a:spcAft>
-              <a:defRPr sz="800">
-                <a:solidFill>
-                  <a:srgbClr val="FFFFFF"/>
-                </a:solidFill>
-                <a:latin typeface="Consolas"/>
-              </a:defRPr>
-            </a:pPr>
-            <a:r>
-              <a:t>Analyzing Verilog file rtl/uart/sync_2ff.v</a:t>
-            </a:r>
-          </a:p>
-          <a:p>
-            <a:pPr>
-              <a:lnSpc>
-                <a:spcPct val="108000"/>
-              </a:lnSpc>
-              <a:spcAft>
-                <a:spcPts val="0"/>
-              </a:spcAft>
-              <a:defRPr sz="800">
-                <a:solidFill>
-                  <a:srgbClr val="93C5FD"/>
-                </a:solidFill>
-                <a:latin typeface="Consolas"/>
-              </a:defRPr>
-            </a:pPr>
-            <a:r>
-              <a:t>Analyzing Verilog file rtl/uart/sync_fifo.v</a:t>
-            </a:r>
-          </a:p>
-          <a:p>
-            <a:pPr>
-              <a:lnSpc>
-                <a:spcPct val="108000"/>
-              </a:lnSpc>
-              <a:spcAft>
-                <a:spcPts val="0"/>
-              </a:spcAft>
-              <a:defRPr sz="800">
-                <a:solidFill>
-                  <a:srgbClr val="FFFFFF"/>
-                </a:solidFill>
-                <a:latin typeface="Consolas"/>
-              </a:defRPr>
-            </a:pPr>
-            <a:r>
-              <a:t>Analyzing Verilog file rtl/uart/simpleuart.v</a:t>
-            </a:r>
-          </a:p>
-          <a:p>
-            <a:pPr>
-              <a:lnSpc>
-                <a:spcPct val="108000"/>
-              </a:lnSpc>
-              <a:spcAft>
-                <a:spcPts val="0"/>
-              </a:spcAft>
-              <a:defRPr sz="800">
-                <a:solidFill>
-                  <a:srgbClr val="FFFFFF"/>
-                </a:solidFill>
-                <a:latin typeface="Consolas"/>
-              </a:defRPr>
-            </a:pPr>
-            <a:r>
-              <a:t>Analyzing Verilog file rtl/uart/uart_mmio.v</a:t>
-            </a:r>
-          </a:p>
-          <a:p>
-            <a:pPr>
-              <a:lnSpc>
-                <a:spcPct val="108000"/>
-              </a:lnSpc>
-              <a:spcAft>
-                <a:spcPts val="0"/>
-              </a:spcAft>
-              <a:defRPr sz="800">
-                <a:solidFill>
-                  <a:srgbClr val="FFFFFF"/>
-                </a:solidFill>
-                <a:latin typeface="Consolas"/>
-              </a:defRPr>
-            </a:pPr>
-            <a:r>
-              <a:t>Analyzing Verilog file tb/tb_uart_rtl.v</a:t>
-            </a:r>
-          </a:p>
-          <a:p>
-            <a:pPr>
-              <a:lnSpc>
-                <a:spcPct val="108000"/>
-              </a:lnSpc>
-              <a:spcAft>
-                <a:spcPts val="0"/>
-              </a:spcAft>
-              <a:defRPr sz="800">
-                <a:solidFill>
-                  <a:srgbClr val="FFFFFF"/>
-                </a:solidFill>
-                <a:latin typeface="Consolas"/>
-              </a:defRPr>
-            </a:pPr>
-          </a:p>
-          <a:p>
-            <a:pPr>
-              <a:lnSpc>
-                <a:spcPct val="108000"/>
-              </a:lnSpc>
-              <a:spcAft>
-                <a:spcPts val="0"/>
-              </a:spcAft>
-              <a:defRPr sz="800" b="1">
-                <a:solidFill>
-                  <a:srgbClr val="0EA5E9"/>
-                </a:solidFill>
-                <a:latin typeface="Consolas"/>
-              </a:defRPr>
-            </a:pPr>
-            <a:r>
-              <a:t>[TEST 1] Checking Default Prescaler Divider...</a:t>
-            </a:r>
-          </a:p>
-          <a:p>
-            <a:pPr>
-              <a:lnSpc>
-                <a:spcPct val="108000"/>
-              </a:lnSpc>
-              <a:spcAft>
-                <a:spcPts val="0"/>
-              </a:spcAft>
-              <a:defRPr sz="800" b="1">
-                <a:solidFill>
-                  <a:srgbClr val="10B981"/>
-                </a:solidFill>
-                <a:latin typeface="Consolas"/>
-              </a:defRPr>
-            </a:pPr>
-            <a:r>
-              <a:t>  [PASS] Prescaler default matches DEFAULT_DIV = 5208</a:t>
-            </a:r>
-          </a:p>
-          <a:p>
-            <a:pPr>
-              <a:lnSpc>
-                <a:spcPct val="108000"/>
-              </a:lnSpc>
-              <a:spcAft>
-                <a:spcPts val="0"/>
-              </a:spcAft>
-              <a:defRPr sz="800" b="1">
-                <a:solidFill>
-                  <a:srgbClr val="0EA5E9"/>
-                </a:solidFill>
-                <a:latin typeface="Consolas"/>
-              </a:defRPr>
-            </a:pPr>
-            <a:r>
-              <a:t>[TEST 2] Reconfiguring Divider to 10416 (4800 baud)...</a:t>
-            </a:r>
-          </a:p>
-          <a:p>
-            <a:pPr>
-              <a:lnSpc>
-                <a:spcPct val="108000"/>
-              </a:lnSpc>
-              <a:spcAft>
-                <a:spcPts val="0"/>
-              </a:spcAft>
-              <a:defRPr sz="800" b="1">
-                <a:solidFill>
-                  <a:srgbClr val="10B981"/>
-                </a:solidFill>
-                <a:latin typeface="Consolas"/>
-              </a:defRPr>
-            </a:pPr>
-            <a:r>
-              <a:t>  [PASS] Read-back matches written value 10416</a:t>
-            </a:r>
-          </a:p>
-          <a:p>
-            <a:pPr>
-              <a:lnSpc>
-                <a:spcPct val="108000"/>
-              </a:lnSpc>
-              <a:spcAft>
-                <a:spcPts val="0"/>
-              </a:spcAft>
-              <a:defRPr sz="800" b="1">
-                <a:solidFill>
-                  <a:srgbClr val="0EA5E9"/>
-                </a:solidFill>
-                <a:latin typeface="Consolas"/>
-              </a:defRPr>
-            </a:pPr>
-            <a:r>
-              <a:t>[TEST 3] Transmitting Byte 0x55 ('U') over TX...</a:t>
-            </a:r>
-          </a:p>
-          <a:p>
-            <a:pPr>
-              <a:lnSpc>
-                <a:spcPct val="108000"/>
-              </a:lnSpc>
-              <a:spcAft>
-                <a:spcPts val="0"/>
-              </a:spcAft>
-              <a:defRPr sz="800" b="1">
-                <a:solidFill>
-                  <a:srgbClr val="10B981"/>
-                </a:solidFill>
-                <a:latin typeface="Consolas"/>
-              </a:defRPr>
-            </a:pPr>
-            <a:r>
-              <a:t>  [PASS] TX Waveform matches 9600-8-N-1 timing!</a:t>
-            </a:r>
-          </a:p>
-          <a:p>
-            <a:pPr>
-              <a:lnSpc>
-                <a:spcPct val="108000"/>
-              </a:lnSpc>
-              <a:spcAft>
-                <a:spcPts val="0"/>
-              </a:spcAft>
-              <a:defRPr sz="800" b="1">
-                <a:solidFill>
-                  <a:srgbClr val="0EA5E9"/>
-                </a:solidFill>
-                <a:latin typeface="Consolas"/>
-              </a:defRPr>
-            </a:pPr>
-            <a:r>
-              <a:t>[TEST 4] Receiving Serial Byte 0xA5 into FIFO...</a:t>
-            </a:r>
-          </a:p>
-          <a:p>
-            <a:pPr>
-              <a:lnSpc>
-                <a:spcPct val="108000"/>
-              </a:lnSpc>
-              <a:spcAft>
-                <a:spcPts val="0"/>
-              </a:spcAft>
-              <a:defRPr sz="800" b="1">
-                <a:solidFill>
-                  <a:srgbClr val="10B981"/>
-                </a:solidFill>
-                <a:latin typeface="Consolas"/>
-              </a:defRPr>
-            </a:pPr>
-            <a:r>
-              <a:t>  [PASS] rx_activity_o asserted! Read 0xA5 cleanly!</a:t>
-            </a:r>
-          </a:p>
-          <a:p>
-            <a:pPr>
-              <a:lnSpc>
-                <a:spcPct val="108000"/>
-              </a:lnSpc>
-              <a:spcAft>
-                <a:spcPts val="0"/>
-              </a:spcAft>
-              <a:defRPr sz="800" b="1">
-                <a:solidFill>
-                  <a:srgbClr val="10B981"/>
-                </a:solidFill>
-                <a:latin typeface="Consolas"/>
-              </a:defRPr>
-            </a:pPr>
-            <a:r>
-              <a:t>  [PASS] FIFO Empty flag returns 0xFFFFFFFF</a:t>
-            </a:r>
-          </a:p>
-          <a:p>
-            <a:pPr>
-              <a:lnSpc>
-                <a:spcPct val="108000"/>
-              </a:lnSpc>
-              <a:spcAft>
-                <a:spcPts val="0"/>
-              </a:spcAft>
-              <a:defRPr sz="800" b="1">
-                <a:solidFill>
-                  <a:srgbClr val="0EA5E9"/>
-                </a:solidFill>
-                <a:latin typeface="Consolas"/>
-              </a:defRPr>
-            </a:pPr>
-            <a:r>
-              <a:t>[TEST 5] Multi-Byte Burst Test (16 bytes)...</a:t>
-            </a:r>
-          </a:p>
-          <a:p>
-            <a:pPr>
-              <a:lnSpc>
-                <a:spcPct val="108000"/>
-              </a:lnSpc>
-              <a:spcAft>
-                <a:spcPts val="0"/>
-              </a:spcAft>
-              <a:defRPr sz="800" b="1">
-                <a:solidFill>
-                  <a:srgbClr val="10B981"/>
-                </a:solidFill>
-                <a:latin typeface="Consolas"/>
-              </a:defRPr>
-            </a:pPr>
-            <a:r>
-              <a:t>  [PASS] All 16 bytes drained without data corruption!</a:t>
-            </a:r>
-          </a:p>
-        </p:txBody>
-      </p:sp>
-      <p:sp>
-        <p:nvSpPr>
-          <p:cNvPr id="13" name="TextBox 12"/>
-          <p:cNvSpPr txBox="1"/>
-          <p:nvPr/>
-        </p:nvSpPr>
-        <p:spPr>
-          <a:xfrm>
-            <a:off x="6355080" y="5788152"/>
-            <a:ext cx="4965192" cy="274320"/>
-          </a:xfrm>
-          <a:prstGeom prst="rect">
-            <a:avLst/>
-          </a:prstGeom>
-          <a:noFill/>
-        </p:spPr>
-        <p:txBody>
-          <a:bodyPr wrap="none" lIns="0" tIns="0" rIns="0" bIns="0">
-            <a:spAutoFit/>
-          </a:bodyPr>
-          <a:lstStyle/>
-          <a:p>
-            <a:pPr>
-              <a:defRPr sz="819" b="1">
-                <a:solidFill>
-                  <a:srgbClr val="10B981"/>
-                </a:solidFill>
-                <a:latin typeface="Segoe UI"/>
-              </a:defRPr>
-            </a:pPr>
-            <a:r>
-              <a:t>=== UART RTL TESTBENCH: 100% PASS ===</a:t>
+              <a:spcAft>
+                <a:spcPts val="200"/>
+              </a:spcAft>
+              <a:defRPr b="1" sz="950">
+                <a:solidFill>
+                  <a:srgbClr val="2563EB"/>
+                </a:solidFill>
+                <a:latin typeface="Segoe UI"/>
+              </a:defRPr>
+            </a:pPr>
+            <a:r>
+              <a:t>TỔNG KẾT SO SÁNH CHỈ SỐ KỸ THUẬT: SOFTWARE C BIT-BANG  vs  HARDWARE RTL UART</a:t>
+            </a:r>
+          </a:p>
+          <a:p>
+            <a:pPr>
+              <a:lnSpc>
+                <a:spcPct val="115000"/>
+              </a:lnSpc>
+              <a:defRPr sz="850">
+                <a:solidFill>
+                  <a:srgbClr val="0F172A"/>
+                </a:solidFill>
+                <a:latin typeface="Segoe UI"/>
+              </a:defRPr>
+            </a:pPr>
+            <a:r>
+              <a:t>• Chiếm dụng CPU: 14.5 ms / thẻ (100% CPU)  ➔  20 ns (1 Chu kỳ clock duy nhất)  |  • An toàn Flash: Rơi mất 100% dữ liệu  ➔  FIFO 32B đệm an toàn tuyệt đối</a:t>
+            </a:r>
+          </a:p>
+          <a:p>
+            <a:pPr>
+              <a:lnSpc>
+                <a:spcPct val="115000"/>
+              </a:lnSpc>
+              <a:defRPr sz="850">
+                <a:solidFill>
+                  <a:srgbClr val="0F172A"/>
+                </a:solidFill>
+                <a:latin typeface="Segoe UI"/>
+              </a:defRPr>
+            </a:pPr>
+            <a:r>
+              <a:t>• Độ ổn định Baudrate: Bị rung pha do trễ Flash XIP  ➔  Chuẩn xác 100% (50MHz / 5208)  |  • Xử lý miền xung CDC: Không hỗ trợ  ➔  2-FF Sync + Lấy mẫu 16x Majority</a:t>
             </a:r>
           </a:p>
         </p:txBody>
@@ -5483,7 +5410,7 @@
               </a:defRPr>
             </a:pPr>
             <a:r>
-              <a:t>PHẦN 4: HỆ THỐNG TESTBENCH &amp; MÔ PHỎNG</a:t>
+              <a:t>PHẦN 3: KIẾN TRÚC KHỐI NGOẠI VI UART</a:t>
             </a:r>
           </a:p>
           <a:p>
@@ -5496,7 +5423,7 @@
               </a:defRPr>
             </a:pPr>
             <a:r>
-              <a:t>Testbench 2: Kiểm Thử Tích Hợp Toàn Diện Top SoC Boot Flash &amp; Ping (tb_uart_ping.v)</a:t>
+              <a:t>Sơ Đồ Khối Kiến Trúc Vi Mạch UART RTL (Draw.io Đen Trắng &amp; Đặc Tả Thiết Kế)</a:t>
             </a:r>
           </a:p>
         </p:txBody>
@@ -5611,7 +5538,7 @@
               </a:defRPr>
             </a:pPr>
             <a:r>
-              <a:t>13 / 24</a:t>
+              <a:t>13 / 26</a:t>
             </a:r>
           </a:p>
         </p:txBody>
@@ -5624,18 +5551,20 @@
         </p:nvSpPr>
         <p:spPr>
           <a:xfrm>
-            <a:off x="731520" y="1234440"/>
-            <a:ext cx="5212080" cy="4937760"/>
+            <a:off x="731520" y="1188720"/>
+            <a:ext cx="5257800" cy="5029200"/>
           </a:xfrm>
           <a:prstGeom prst="roundRect">
-            <a:avLst/>
+            <a:avLst>
+              <a:gd name="adj" fmla="val 2000"/>
+            </a:avLst>
           </a:prstGeom>
           <a:solidFill>
             <a:srgbClr val="FFFFFF"/>
           </a:solidFill>
           <a:ln w="19050">
             <a:solidFill>
-              <a:srgbClr val="10B981"/>
+              <a:srgbClr val="2563EB"/>
             </a:solidFill>
           </a:ln>
         </p:spPr>
@@ -5661,159 +5590,30 @@
           </a:p>
         </p:txBody>
       </p:sp>
-      <p:sp>
-        <p:nvSpPr>
-          <p:cNvPr id="9" name="TextBox 8"/>
-          <p:cNvSpPr txBox="1"/>
-          <p:nvPr/>
-        </p:nvSpPr>
-        <p:spPr>
-          <a:xfrm>
-            <a:off x="914400" y="1371600"/>
-            <a:ext cx="4846320" cy="4663440"/>
-          </a:xfrm>
-          <a:prstGeom prst="rect">
-            <a:avLst/>
-          </a:prstGeom>
-          <a:noFill/>
-        </p:spPr>
-        <p:txBody>
-          <a:bodyPr wrap="square">
-            <a:spAutoFit/>
-          </a:bodyPr>
-          <a:lstStyle/>
-          <a:p>
-            <a:pPr>
-              <a:spcAft>
-                <a:spcPts val="1000"/>
-              </a:spcAft>
-              <a:defRPr sz="1300" b="1">
-                <a:solidFill>
-                  <a:srgbClr val="10B981"/>
-                </a:solidFill>
-                <a:latin typeface="Segoe UI"/>
-              </a:defRPr>
-            </a:pPr>
-            <a:r>
-              <a:t>5 KỊCH BẢN KIỂM THỬ TÍCH HỢP TOP SOC</a:t>
-            </a:r>
-          </a:p>
-          <a:p>
-            <a:pPr>
-              <a:lnSpc>
-                <a:spcPct val="115000"/>
-              </a:lnSpc>
-              <a:spcAft>
-                <a:spcPts val="800"/>
-              </a:spcAft>
-              <a:defRPr sz="1050">
-                <a:solidFill>
-                  <a:srgbClr val="0F172A"/>
-                </a:solidFill>
-                <a:latin typeface="Segoe UI"/>
-              </a:defRPr>
-            </a:pPr>
-            <a:r>
-              <a:t>• Mục tiêu: Xác minh hệ thống Top-level hoàn chỉnh gồm CPU PicoRV32, spimemio, 1KB SRAM, Interconnect và UART.</a:t>
-            </a:r>
-          </a:p>
-          <a:p>
-            <a:pPr>
-              <a:lnSpc>
-                <a:spcPct val="115000"/>
-              </a:lnSpc>
-              <a:spcAft>
-                <a:spcPts val="800"/>
-              </a:spcAft>
-              <a:defRPr sz="1050">
-                <a:solidFill>
-                  <a:srgbClr val="0F172A"/>
-                </a:solidFill>
-                <a:latin typeface="Segoe UI"/>
-              </a:defRPr>
-            </a:pPr>
-            <a:r>
-              <a:t>• 1. Power-On Reset &amp; Boot Flash: PicoRV32 thức dậy tại 0x0025_0000, spimemio kéo từng từ lệnh mã C từ firmware.hex qua XIP.</a:t>
-            </a:r>
-          </a:p>
-          <a:p>
-            <a:pPr>
-              <a:lnSpc>
-                <a:spcPct val="115000"/>
-              </a:lnSpc>
-              <a:spcAft>
-                <a:spcPts val="800"/>
-              </a:spcAft>
-              <a:defRPr sz="1050">
-                <a:solidFill>
-                  <a:srgbClr val="0F172A"/>
-                </a:solidFill>
-                <a:latin typeface="Segoe UI"/>
-              </a:defRPr>
-            </a:pPr>
-            <a:r>
-              <a:t>• 2. C Startup Banner: CPU thực thi mã C trong main.c, khởi tạo ngoại vi và in toàn bộ chuỗi chào mừng ra UART.</a:t>
-            </a:r>
-          </a:p>
-          <a:p>
-            <a:pPr>
-              <a:lnSpc>
-                <a:spcPct val="115000"/>
-              </a:lnSpc>
-              <a:spcAft>
-                <a:spcPts val="800"/>
-              </a:spcAft>
-              <a:defRPr sz="1050">
-                <a:solidFill>
-                  <a:srgbClr val="0F172A"/>
-                </a:solidFill>
-                <a:latin typeface="Segoe UI"/>
-              </a:defRPr>
-            </a:pPr>
-            <a:r>
-              <a:t>• 3. Host Ping Processing: Testbench đóng vai trò PC Host gửi byte lệnh 'P' (0x50) và '\n' (0x0A) qua cổng nối tiếp.</a:t>
-            </a:r>
-          </a:p>
-          <a:p>
-            <a:pPr>
-              <a:lnSpc>
-                <a:spcPct val="115000"/>
-              </a:lnSpc>
-              <a:spcAft>
-                <a:spcPts val="800"/>
-              </a:spcAft>
-              <a:defRPr sz="1050">
-                <a:solidFill>
-                  <a:srgbClr val="0F172A"/>
-                </a:solidFill>
-                <a:latin typeface="Segoe UI"/>
-              </a:defRPr>
-            </a:pPr>
-            <a:r>
-              <a:t>• 4. Response Verification: CPU phản hồi chuỗi 'PONG: PicoRV32 Active', testbench so khớp từng ký tự.</a:t>
-            </a:r>
-          </a:p>
-          <a:p>
-            <a:pPr>
-              <a:lnSpc>
-                <a:spcPct val="115000"/>
-              </a:lnSpc>
-              <a:spcAft>
-                <a:spcPts val="800"/>
-              </a:spcAft>
-              <a:defRPr sz="1050">
-                <a:solidFill>
-                  <a:srgbClr val="0F172A"/>
-                </a:solidFill>
-                <a:latin typeface="Segoe UI"/>
-              </a:defRPr>
-            </a:pPr>
-            <a:r>
-              <a:t>• 5. CPU Health &amp; Zero-Trap: Khẳng định tín hiệu cpu_trap == 0 xuyên suốt quá trình chạy, không bị illegal instruction hay tràn RAM.</a:t>
-            </a:r>
-          </a:p>
-        </p:txBody>
-      </p:sp>
+      <p:pic>
+        <p:nvPicPr>
+          <p:cNvPr id="9" name="Picture 8" descr="uart_architecture_bw_diagram.png"/>
+          <p:cNvPicPr>
+            <a:picLocks noChangeAspect="1"/>
+          </p:cNvPicPr>
+          <p:nvPr/>
+        </p:nvPicPr>
+        <p:blipFill>
+          <a:blip r:embed="rId2"/>
+          <a:stretch>
+            <a:fillRect/>
+          </a:stretch>
+        </p:blipFill>
+        <p:spPr>
+          <a:xfrm>
+            <a:off x="868680" y="1325880"/>
+            <a:ext cx="4983480" cy="4754880"/>
+          </a:xfrm>
+          <a:prstGeom prst="rect">
+            <a:avLst/>
+          </a:prstGeom>
+        </p:spPr>
+      </p:pic>
       <p:sp>
         <p:nvSpPr>
           <p:cNvPr id="10" name="Rounded Rectangle 9"/>
@@ -5822,18 +5622,20 @@
         </p:nvSpPr>
         <p:spPr>
           <a:xfrm>
-            <a:off x="6217920" y="1234440"/>
-            <a:ext cx="5239512" cy="4937760"/>
+            <a:off x="6172200" y="1188720"/>
+            <a:ext cx="5285232" cy="5029200"/>
           </a:xfrm>
           <a:prstGeom prst="roundRect">
-            <a:avLst/>
+            <a:avLst>
+              <a:gd name="adj" fmla="val 2000"/>
+            </a:avLst>
           </a:prstGeom>
           <a:solidFill>
-            <a:srgbClr val="0B132B"/>
+            <a:srgbClr val="FFFFFF"/>
           </a:solidFill>
           <a:ln w="19050">
             <a:solidFill>
-              <a:srgbClr val="1C2541"/>
+              <a:srgbClr val="2563EB"/>
             </a:solidFill>
           </a:ln>
         </p:spPr>
@@ -5867,8 +5669,8 @@
         </p:nvSpPr>
         <p:spPr>
           <a:xfrm>
-            <a:off x="6355080" y="1307592"/>
-            <a:ext cx="4965192" cy="292608"/>
+            <a:off x="6355080" y="1325880"/>
+            <a:ext cx="4919472" cy="4754880"/>
           </a:xfrm>
           <a:prstGeom prst="rect">
             <a:avLst/>
@@ -5876,400 +5678,271 @@
           <a:noFill/>
         </p:spPr>
         <p:txBody>
-          <a:bodyPr wrap="none" lIns="0" tIns="0" rIns="0" bIns="0">
+          <a:bodyPr wrap="square">
             <a:spAutoFit/>
           </a:bodyPr>
           <a:lstStyle/>
           <a:p>
             <a:pPr>
-              <a:defRPr sz="950" b="1">
-                <a:solidFill>
-                  <a:srgbClr val="0EA5E9"/>
-                </a:solidFill>
-                <a:latin typeface="Consolas"/>
-              </a:defRPr>
-            </a:pPr>
-            <a:r>
-              <a:t>&gt;_  tb/run_sim_ping.bat output</a:t>
-            </a:r>
-          </a:p>
-        </p:txBody>
-      </p:sp>
-      <p:sp>
-        <p:nvSpPr>
-          <p:cNvPr id="12" name="TextBox 11"/>
-          <p:cNvSpPr txBox="1"/>
-          <p:nvPr/>
-        </p:nvSpPr>
-        <p:spPr>
-          <a:xfrm>
-            <a:off x="6355080" y="1600200"/>
-            <a:ext cx="4965192" cy="4224528"/>
-          </a:xfrm>
-          <a:prstGeom prst="rect">
-            <a:avLst/>
-          </a:prstGeom>
-          <a:noFill/>
-        </p:spPr>
-        <p:txBody>
-          <a:bodyPr wrap="square" lIns="0" tIns="0" rIns="0" bIns="0">
-            <a:spAutoFit/>
-          </a:bodyPr>
-          <a:lstStyle/>
-          <a:p>
-            <a:pPr>
-              <a:lnSpc>
-                <a:spcPct val="108000"/>
-              </a:lnSpc>
-              <a:spcAft>
-                <a:spcPts val="0"/>
-              </a:spcAft>
-              <a:defRPr sz="800">
-                <a:solidFill>
-                  <a:srgbClr val="FFFFFF"/>
-                </a:solidFill>
-                <a:latin typeface="Consolas"/>
-              </a:defRPr>
-            </a:pPr>
-            <a:r>
-              <a:t>Vivado Simulator v2025.1 - xelab &amp; xsim</a:t>
-            </a:r>
-          </a:p>
-          <a:p>
-            <a:pPr>
-              <a:lnSpc>
-                <a:spcPct val="108000"/>
-              </a:lnSpc>
-              <a:spcAft>
-                <a:spcPts val="0"/>
-              </a:spcAft>
-              <a:defRPr sz="800">
-                <a:solidFill>
-                  <a:srgbClr val="FFFFFF"/>
-                </a:solidFill>
-                <a:latin typeface="Consolas"/>
-              </a:defRPr>
-            </a:pPr>
-            <a:r>
-              <a:t>Analyzing Verilog file rtl/rdm6300_picorv32_soc.v</a:t>
-            </a:r>
-          </a:p>
-          <a:p>
-            <a:pPr>
-              <a:lnSpc>
-                <a:spcPct val="108000"/>
-              </a:lnSpc>
-              <a:spcAft>
-                <a:spcPts val="0"/>
-              </a:spcAft>
-              <a:defRPr sz="800">
-                <a:solidFill>
-                  <a:srgbClr val="FFFFFF"/>
-                </a:solidFill>
-                <a:latin typeface="Consolas"/>
-              </a:defRPr>
-            </a:pPr>
-            <a:r>
-              <a:t>Analyzing Verilog file tb/tb_uart_ping.v</a:t>
-            </a:r>
-          </a:p>
-          <a:p>
-            <a:pPr>
-              <a:lnSpc>
-                <a:spcPct val="108000"/>
-              </a:lnSpc>
-              <a:spcAft>
-                <a:spcPts val="0"/>
-              </a:spcAft>
-              <a:defRPr sz="800">
-                <a:solidFill>
-                  <a:srgbClr val="FFFFFF"/>
-                </a:solidFill>
-                <a:latin typeface="Consolas"/>
-              </a:defRPr>
-            </a:pPr>
-          </a:p>
-          <a:p>
-            <a:pPr>
-              <a:lnSpc>
-                <a:spcPct val="108000"/>
-              </a:lnSpc>
-              <a:spcAft>
-                <a:spcPts val="0"/>
-              </a:spcAft>
-              <a:defRPr sz="800" b="1">
-                <a:solidFill>
-                  <a:srgbClr val="0EA5E9"/>
-                </a:solidFill>
-                <a:latin typeface="Consolas"/>
-              </a:defRPr>
-            </a:pPr>
-            <a:r>
-              <a:t>[BOOT] Releasing CPU Reset...</a:t>
-            </a:r>
-          </a:p>
-          <a:p>
-            <a:pPr>
-              <a:lnSpc>
-                <a:spcPct val="108000"/>
-              </a:lnSpc>
-              <a:spcAft>
-                <a:spcPts val="0"/>
-              </a:spcAft>
-              <a:defRPr sz="800" b="1">
-                <a:solidFill>
-                  <a:srgbClr val="0EA5E9"/>
-                </a:solidFill>
-                <a:latin typeface="Consolas"/>
-              </a:defRPr>
-            </a:pPr>
-            <a:r>
-              <a:t>[BOOT] PicoRV32 woke up at 0x00250000 (Flash XIP)</a:t>
-            </a:r>
-          </a:p>
-          <a:p>
-            <a:pPr>
-              <a:lnSpc>
-                <a:spcPct val="108000"/>
-              </a:lnSpc>
-              <a:spcAft>
-                <a:spcPts val="0"/>
-              </a:spcAft>
-              <a:defRPr sz="800" b="1">
-                <a:solidFill>
-                  <a:srgbClr val="0EA5E9"/>
-                </a:solidFill>
-                <a:latin typeface="Consolas"/>
-              </a:defRPr>
-            </a:pPr>
-            <a:r>
-              <a:t>[EXEC] Loading instructions from firmware.hex...</a:t>
-            </a:r>
-          </a:p>
-          <a:p>
-            <a:pPr>
-              <a:lnSpc>
-                <a:spcPct val="108000"/>
-              </a:lnSpc>
-              <a:spcAft>
-                <a:spcPts val="0"/>
-              </a:spcAft>
-              <a:defRPr sz="800" b="1">
-                <a:solidFill>
-                  <a:srgbClr val="0EA5E9"/>
-                </a:solidFill>
-                <a:latin typeface="Consolas"/>
-              </a:defRPr>
-            </a:pPr>
-            <a:r>
-              <a:t>[UART] Detected Startup Banner:</a:t>
-            </a:r>
-          </a:p>
-          <a:p>
-            <a:pPr>
-              <a:lnSpc>
-                <a:spcPct val="108000"/>
-              </a:lnSpc>
-              <a:spcAft>
-                <a:spcPts val="0"/>
-              </a:spcAft>
-              <a:defRPr sz="800">
-                <a:solidFill>
-                  <a:srgbClr val="FFFFFF"/>
-                </a:solidFill>
-                <a:latin typeface="Consolas"/>
-              </a:defRPr>
-            </a:pPr>
-            <a:r>
-              <a:t>  ================================================</a:t>
-            </a:r>
-          </a:p>
-          <a:p>
-            <a:pPr>
-              <a:lnSpc>
-                <a:spcPct val="108000"/>
-              </a:lnSpc>
-              <a:spcAft>
-                <a:spcPts val="0"/>
-              </a:spcAft>
-              <a:defRPr sz="800">
-                <a:solidFill>
-                  <a:srgbClr val="FFFFFF"/>
-                </a:solidFill>
-                <a:latin typeface="Consolas"/>
-              </a:defRPr>
-            </a:pPr>
-            <a:r>
-              <a:t>    RDM6300 PICORV32 SOC ACCESS CONTROLLER READY  </a:t>
-            </a:r>
-          </a:p>
-          <a:p>
-            <a:pPr>
-              <a:lnSpc>
-                <a:spcPct val="108000"/>
-              </a:lnSpc>
-              <a:spcAft>
-                <a:spcPts val="0"/>
-              </a:spcAft>
-              <a:defRPr sz="800">
-                <a:solidFill>
-                  <a:srgbClr val="FFFFFF"/>
-                </a:solidFill>
-                <a:latin typeface="Consolas"/>
-              </a:defRPr>
-            </a:pPr>
-            <a:r>
-              <a:t>  ================================================</a:t>
-            </a:r>
-          </a:p>
-          <a:p>
-            <a:pPr>
-              <a:lnSpc>
-                <a:spcPct val="108000"/>
-              </a:lnSpc>
-              <a:spcAft>
-                <a:spcPts val="0"/>
-              </a:spcAft>
-              <a:defRPr sz="800" b="1">
-                <a:solidFill>
-                  <a:srgbClr val="0EA5E9"/>
-                </a:solidFill>
-                <a:latin typeface="Consolas"/>
-              </a:defRPr>
-            </a:pPr>
-            <a:r>
-              <a:t>[HOST] Sending Host Command: 'P' (Ping)...</a:t>
-            </a:r>
-          </a:p>
-          <a:p>
-            <a:pPr>
-              <a:lnSpc>
-                <a:spcPct val="108000"/>
-              </a:lnSpc>
-              <a:spcAft>
-                <a:spcPts val="0"/>
-              </a:spcAft>
-              <a:defRPr sz="800">
-                <a:solidFill>
-                  <a:srgbClr val="FFFFFF"/>
-                </a:solidFill>
-                <a:latin typeface="Consolas"/>
-              </a:defRPr>
-            </a:pPr>
-            <a:r>
-              <a:t>[RECV] CPU Response received via UART:</a:t>
-            </a:r>
-          </a:p>
-          <a:p>
-            <a:pPr>
-              <a:lnSpc>
-                <a:spcPct val="108000"/>
-              </a:lnSpc>
-              <a:spcAft>
-                <a:spcPts val="0"/>
-              </a:spcAft>
-              <a:defRPr sz="800">
-                <a:solidFill>
-                  <a:srgbClr val="FFFFFF"/>
-                </a:solidFill>
-                <a:latin typeface="Consolas"/>
-              </a:defRPr>
-            </a:pPr>
-            <a:r>
-              <a:t>  PONG: PicoRV32 Active</a:t>
-            </a:r>
-          </a:p>
-          <a:p>
-            <a:pPr>
-              <a:lnSpc>
-                <a:spcPct val="108000"/>
-              </a:lnSpc>
-              <a:spcAft>
-                <a:spcPts val="0"/>
-              </a:spcAft>
-              <a:defRPr sz="800">
-                <a:solidFill>
-                  <a:srgbClr val="FFFFFF"/>
-                </a:solidFill>
-                <a:latin typeface="Consolas"/>
-              </a:defRPr>
-            </a:pPr>
-            <a:r>
-              <a:t>[VERIFY] String matches expected response!</a:t>
-            </a:r>
-          </a:p>
-          <a:p>
-            <a:pPr>
-              <a:lnSpc>
-                <a:spcPct val="108000"/>
-              </a:lnSpc>
-              <a:spcAft>
-                <a:spcPts val="0"/>
-              </a:spcAft>
-              <a:defRPr sz="800">
-                <a:solidFill>
-                  <a:srgbClr val="FFFFFF"/>
-                </a:solidFill>
-                <a:latin typeface="Consolas"/>
-              </a:defRPr>
-            </a:pPr>
-            <a:r>
-              <a:t>[ASSERT] Checking cpu_trap signal...</a:t>
-            </a:r>
-          </a:p>
-          <a:p>
-            <a:pPr>
-              <a:lnSpc>
-                <a:spcPct val="108000"/>
-              </a:lnSpc>
-              <a:spcAft>
-                <a:spcPts val="0"/>
-              </a:spcAft>
-              <a:defRPr sz="800" b="1">
+              <a:spcAft>
+                <a:spcPts val="400"/>
+              </a:spcAft>
+              <a:defRPr b="1" sz="1150">
+                <a:solidFill>
+                  <a:srgbClr val="2563EB"/>
+                </a:solidFill>
+                <a:latin typeface="Segoe UI"/>
+              </a:defRPr>
+            </a:pPr>
+            <a:r>
+              <a:t>ĐẶC TẢ THIẾT KẾ 5 TẦNG VI MẠCH NGOẠI VI UART RTL</a:t>
+            </a:r>
+          </a:p>
+          <a:p>
+            <a:pPr>
+              <a:spcBef>
+                <a:spcPts val="300"/>
+              </a:spcBef>
+              <a:spcAft>
+                <a:spcPts val="100"/>
+              </a:spcAft>
+              <a:defRPr sz="860" b="1">
+                <a:solidFill>
+                  <a:srgbClr val="E11D48"/>
+                </a:solidFill>
+                <a:latin typeface="Segoe UI"/>
+              </a:defRPr>
+            </a:pPr>
+            <a:r>
+              <a:t>TẦNG 1: ĐỒNG BỘ HÓA MIỀN XUNG 2-FF CDC (sync_2ff.v)</a:t>
+            </a:r>
+          </a:p>
+          <a:p>
+            <a:pPr>
+              <a:lnSpc>
+                <a:spcPct val="110000"/>
+              </a:lnSpc>
+              <a:spcAft>
+                <a:spcPts val="120"/>
+              </a:spcAft>
+              <a:defRPr sz="760">
+                <a:solidFill>
+                  <a:srgbClr val="0F172A"/>
+                </a:solidFill>
+                <a:latin typeface="Segoe UI"/>
+              </a:defRPr>
+            </a:pPr>
+            <a:r>
+              <a:t>• Ngõ vào không đồng bộ rx_i: Tín hiệu nối tiếp từ đầu đọc RDM6300 125kHz hoặc chip USB FT2232 đi qua 2 tầng Flip-Flop.</a:t>
+            </a:r>
+          </a:p>
+          <a:p>
+            <a:pPr>
+              <a:lnSpc>
+                <a:spcPct val="110000"/>
+              </a:lnSpc>
+              <a:spcAft>
+                <a:spcPts val="120"/>
+              </a:spcAft>
+              <a:defRPr sz="760">
+                <a:solidFill>
+                  <a:srgbClr val="0F172A"/>
+                </a:solidFill>
+                <a:latin typeface="Segoe UI"/>
+              </a:defRPr>
+            </a:pPr>
+            <a:r>
+              <a:t>• Chống hiện tượng siêu ổn định: Bảo đảm thời gian trung bình giữa 2 lỗi MTBF &gt; 1.000 năm trên tiến trình SkyWater 130nm.</a:t>
+            </a:r>
+          </a:p>
+          <a:p>
+            <a:pPr>
+              <a:spcBef>
+                <a:spcPts val="300"/>
+              </a:spcBef>
+              <a:spcAft>
+                <a:spcPts val="100"/>
+              </a:spcAft>
+              <a:defRPr sz="860" b="1">
+                <a:solidFill>
+                  <a:srgbClr val="D97706"/>
+                </a:solidFill>
+                <a:latin typeface="Segoe UI"/>
+              </a:defRPr>
+            </a:pPr>
+            <a:r>
+              <a:t>TẦNG 2 &amp; 3: BỘ TẠO BAUD, LẤY MẪU 16X &amp; RX FSM (simpleuart.v)</a:t>
+            </a:r>
+          </a:p>
+          <a:p>
+            <a:pPr>
+              <a:lnSpc>
+                <a:spcPct val="110000"/>
+              </a:lnSpc>
+              <a:spcAft>
+                <a:spcPts val="120"/>
+              </a:spcAft>
+              <a:defRPr sz="760">
+                <a:solidFill>
+                  <a:srgbClr val="0F172A"/>
+                </a:solidFill>
+                <a:latin typeface="Segoe UI"/>
+              </a:defRPr>
+            </a:pPr>
+            <a:r>
+              <a:t>• Chia tần số chuẩn xác: Thanh ghi cfg_divider = 5208 (50 MHz / 9600 bps) tạo chu kỳ định thời phần cứng chính xác 100%.</a:t>
+            </a:r>
+          </a:p>
+          <a:p>
+            <a:pPr>
+              <a:lnSpc>
+                <a:spcPct val="110000"/>
+              </a:lnSpc>
+              <a:spcAft>
+                <a:spcPts val="120"/>
+              </a:spcAft>
+              <a:defRPr sz="760">
+                <a:solidFill>
+                  <a:srgbClr val="0F172A"/>
+                </a:solidFill>
+                <a:latin typeface="Segoe UI"/>
+              </a:defRPr>
+            </a:pPr>
+            <a:r>
+              <a:t>• Bộ lấy mẫu 16x &amp; Bầu đa số 3 mẫu: Lấy mẫu tại tick 7, 8, 9 ở giữa bit, triệt tiêu xung gai nhiễu glitch.</a:t>
+            </a:r>
+          </a:p>
+          <a:p>
+            <a:pPr>
+              <a:lnSpc>
+                <a:spcPct val="110000"/>
+              </a:lnSpc>
+              <a:spcAft>
+                <a:spcPts val="120"/>
+              </a:spcAft>
+              <a:defRPr sz="760">
+                <a:solidFill>
+                  <a:srgbClr val="0F172A"/>
+                </a:solidFill>
+                <a:latin typeface="Segoe UI"/>
+              </a:defRPr>
+            </a:pPr>
+            <a:r>
+              <a:t>• Máy trạng thái RX FSM: Tự động phát hiện Start bit (0), dịch 8-bit dữ liệu LSB-first và kiểm tra Stop bit (1).</a:t>
+            </a:r>
+          </a:p>
+          <a:p>
+            <a:pPr>
+              <a:spcBef>
+                <a:spcPts val="300"/>
+              </a:spcBef>
+              <a:spcAft>
+                <a:spcPts val="100"/>
+              </a:spcAft>
+              <a:defRPr sz="860" b="1">
+                <a:solidFill>
+                  <a:srgbClr val="2563EB"/>
+                </a:solidFill>
+                <a:latin typeface="Segoe UI"/>
+              </a:defRPr>
+            </a:pPr>
+            <a:r>
+              <a:t>TẦNG 4: HÀNG ĐỢI FIFO 32 BYTES ĐỘC LẬP (sync_fifo.v)</a:t>
+            </a:r>
+          </a:p>
+          <a:p>
+            <a:pPr>
+              <a:lnSpc>
+                <a:spcPct val="110000"/>
+              </a:lnSpc>
+              <a:spcAft>
+                <a:spcPts val="120"/>
+              </a:spcAft>
+              <a:defRPr sz="760">
+                <a:solidFill>
+                  <a:srgbClr val="0F172A"/>
+                </a:solidFill>
+                <a:latin typeface="Segoe UI"/>
+              </a:defRPr>
+            </a:pPr>
+            <a:r>
+              <a:t>• Cơ chế đệm độc lập: Quản lý con trỏ ghi wr_ptr và đọc rd_ptr độc lập trên mảng nhớ 32x8-bit.</a:t>
+            </a:r>
+          </a:p>
+          <a:p>
+            <a:pPr>
+              <a:lnSpc>
+                <a:spcPct val="110000"/>
+              </a:lnSpc>
+              <a:spcAft>
+                <a:spcPts val="120"/>
+              </a:spcAft>
+              <a:defRPr sz="760">
+                <a:solidFill>
+                  <a:srgbClr val="0F172A"/>
+                </a:solidFill>
+                <a:latin typeface="Segoe UI"/>
+              </a:defRPr>
+            </a:pPr>
+            <a:r>
+              <a:t>• Bảo vệ chống tràn khi Flash bận: Đệm trọn vẹn 14 byte chuỗi thẻ RFID ngay cả khi CPU bận chạy flashio_worker ghi Flash.</a:t>
+            </a:r>
+          </a:p>
+          <a:p>
+            <a:pPr>
+              <a:spcBef>
+                <a:spcPts val="300"/>
+              </a:spcBef>
+              <a:spcAft>
+                <a:spcPts val="100"/>
+              </a:spcAft>
+              <a:defRPr sz="860" b="1">
                 <a:solidFill>
                   <a:srgbClr val="10B981"/>
                 </a:solidFill>
-                <a:latin typeface="Consolas"/>
-              </a:defRPr>
-            </a:pPr>
-            <a:r>
-              <a:t>  cpu_trap == 0 (CONFIRMED: ZERO CPU TRAPS!)</a:t>
-            </a:r>
-          </a:p>
-        </p:txBody>
-      </p:sp>
-      <p:sp>
-        <p:nvSpPr>
-          <p:cNvPr id="13" name="TextBox 12"/>
-          <p:cNvSpPr txBox="1"/>
-          <p:nvPr/>
-        </p:nvSpPr>
-        <p:spPr>
-          <a:xfrm>
-            <a:off x="6355080" y="5788152"/>
-            <a:ext cx="4965192" cy="274320"/>
-          </a:xfrm>
-          <a:prstGeom prst="rect">
-            <a:avLst/>
-          </a:prstGeom>
-          <a:noFill/>
-        </p:spPr>
-        <p:txBody>
-          <a:bodyPr wrap="none" lIns="0" tIns="0" rIns="0" bIns="0">
-            <a:spAutoFit/>
-          </a:bodyPr>
-          <a:lstStyle/>
-          <a:p>
-            <a:pPr>
-              <a:defRPr sz="819" b="1">
-                <a:solidFill>
-                  <a:srgbClr val="10B981"/>
-                </a:solidFill>
-                <a:latin typeface="Segoe UI"/>
-              </a:defRPr>
-            </a:pPr>
-            <a:r>
-              <a:t>=== TOP SOC PING TESTBENCH: 100% PASS ===</a:t>
+                <a:latin typeface="Segoe UI"/>
+              </a:defRPr>
+            </a:pPr>
+            <a:r>
+              <a:t>TẦNG 5: GIẢI MÃ BUS MMIO &amp; NON-BLOCKING (uart_mmio.v)</a:t>
+            </a:r>
+          </a:p>
+          <a:p>
+            <a:pPr>
+              <a:lnSpc>
+                <a:spcPct val="110000"/>
+              </a:lnSpc>
+              <a:spcAft>
+                <a:spcPts val="120"/>
+              </a:spcAft>
+              <a:defRPr sz="760">
+                <a:solidFill>
+                  <a:srgbClr val="0F172A"/>
+                </a:solidFill>
+                <a:latin typeface="Segoe UI"/>
+              </a:defRPr>
+            </a:pPr>
+            <a:r>
+              <a:t>• Ánh xạ không gian địa chỉ: 0x1000_0000 (Divider Prescaler) và 0x1000_0004 (RX FIFO Data).</a:t>
+            </a:r>
+          </a:p>
+          <a:p>
+            <a:pPr>
+              <a:lnSpc>
+                <a:spcPct val="110000"/>
+              </a:lnSpc>
+              <a:spcAft>
+                <a:spcPts val="120"/>
+              </a:spcAft>
+              <a:defRPr sz="760">
+                <a:solidFill>
+                  <a:srgbClr val="0F172A"/>
+                </a:solidFill>
+                <a:latin typeface="Segoe UI"/>
+              </a:defRPr>
+            </a:pPr>
+            <a:r>
+              <a:t>• Giao tiếp Non-blocking 1 chu kỳ: Nếu FIFO rỗng, trả về ngay 0xFFFFFFFF trong 20 ns, không bao giờ làm treo bus CPU.</a:t>
             </a:r>
           </a:p>
         </p:txBody>
@@ -6540,7 +6213,7 @@
               </a:defRPr>
             </a:pPr>
             <a:r>
-              <a:t>14 / 24</a:t>
+              <a:t>14 / 26</a:t>
             </a:r>
           </a:p>
         </p:txBody>
@@ -6557,7 +6230,9 @@
             <a:ext cx="5257800" cy="5029200"/>
           </a:xfrm>
           <a:prstGeom prst="roundRect">
-            <a:avLst/>
+            <a:avLst>
+              <a:gd name="adj" fmla="val 2000"/>
+            </a:avLst>
           </a:prstGeom>
           <a:solidFill>
             <a:srgbClr val="0B132B"/>
@@ -7201,7 +6876,9 @@
             <a:ext cx="5285232" cy="5029200"/>
           </a:xfrm>
           <a:prstGeom prst="roundRect">
-            <a:avLst/>
+            <a:avLst>
+              <a:gd name="adj" fmla="val 2000"/>
+            </a:avLst>
           </a:prstGeom>
           <a:solidFill>
             <a:srgbClr val="FFFFFF"/>
@@ -7619,7 +7296,7 @@
               </a:defRPr>
             </a:pPr>
             <a:r>
-              <a:t>15 / 24</a:t>
+              <a:t>15 / 26</a:t>
             </a:r>
           </a:p>
         </p:txBody>
@@ -7636,7 +7313,9 @@
             <a:ext cx="5257800" cy="5029200"/>
           </a:xfrm>
           <a:prstGeom prst="roundRect">
-            <a:avLst/>
+            <a:avLst>
+              <a:gd name="adj" fmla="val 2000"/>
+            </a:avLst>
           </a:prstGeom>
           <a:solidFill>
             <a:srgbClr val="0B132B"/>
@@ -8021,7 +7700,11 @@
               </a:defRPr>
             </a:pPr>
             <a:r>
-              <a:t>        if (*str == '\n') uart_putc('\r'); // Chuẩn hóa CRLF</a:t>
+              <a:t>        if (*str == '</a:t>
+            </a:r>
+            <a:br/>
+            <a:r>
+              <a:t>') uart_putc('_x000D_'); // Chuẩn hóa CRLF</a:t>
             </a:r>
           </a:p>
           <a:p>
@@ -8318,7 +8001,9 @@
             <a:ext cx="5285232" cy="5029200"/>
           </a:xfrm>
           <a:prstGeom prst="roundRect">
-            <a:avLst/>
+            <a:avLst>
+              <a:gd name="adj" fmla="val 2000"/>
+            </a:avLst>
           </a:prstGeom>
           <a:solidFill>
             <a:srgbClr val="FFFFFF"/>
@@ -8465,7 +8150,11 @@
               </a:defRPr>
             </a:pPr>
             <a:r>
-              <a:t>• 4. Tối ưu hóa chuỗi ký tự: Hàm uart_puts tự động chèn ký tự CR ('\r') trước LF ('\n') giúp định dạng văn bản chuẩn trên mọi Terminal (Putty, TeraTerm, Python Host Console).</a:t>
+              <a:t>• 4. Tối ưu hóa chuỗi ký tự: Hàm uart_puts tự động chèn ký tự CR ('_x000D_') trước LF ('</a:t>
+            </a:r>
+            <a:br/>
+            <a:r>
+              <a:t>') giúp định dạng văn bản chuẩn trên mọi Terminal (Putty, TeraTerm, Python Host Console).</a:t>
             </a:r>
           </a:p>
         </p:txBody>
@@ -8736,7 +8425,7 @@
               </a:defRPr>
             </a:pPr>
             <a:r>
-              <a:t>16 / 24</a:t>
+              <a:t>16 / 26</a:t>
             </a:r>
           </a:p>
         </p:txBody>
@@ -8753,7 +8442,9 @@
             <a:ext cx="5257800" cy="5029200"/>
           </a:xfrm>
           <a:prstGeom prst="roundRect">
-            <a:avLst/>
+            <a:avLst>
+              <a:gd name="adj" fmla="val 2000"/>
+            </a:avLst>
           </a:prstGeom>
           <a:solidFill>
             <a:srgbClr val="0B132B"/>
@@ -9359,7 +9050,9 @@
             <a:ext cx="5285232" cy="5029200"/>
           </a:xfrm>
           <a:prstGeom prst="roundRect">
-            <a:avLst/>
+            <a:avLst>
+              <a:gd name="adj" fmla="val 2000"/>
+            </a:avLst>
           </a:prstGeom>
           <a:solidFill>
             <a:srgbClr val="FFFFFF"/>
@@ -9785,7 +9478,7 @@
               </a:defRPr>
             </a:pPr>
             <a:r>
-              <a:t>17 / 24</a:t>
+              <a:t>17 / 26</a:t>
             </a:r>
           </a:p>
         </p:txBody>
@@ -9802,7 +9495,9 @@
             <a:ext cx="5257800" cy="5029200"/>
           </a:xfrm>
           <a:prstGeom prst="roundRect">
-            <a:avLst/>
+            <a:avLst>
+              <a:gd name="adj" fmla="val 2000"/>
+            </a:avLst>
           </a:prstGeom>
           <a:solidFill>
             <a:srgbClr val="0B132B"/>
@@ -10490,7 +10185,9 @@
             <a:ext cx="5285232" cy="5029200"/>
           </a:xfrm>
           <a:prstGeom prst="roundRect">
-            <a:avLst/>
+            <a:avLst>
+              <a:gd name="adj" fmla="val 2000"/>
+            </a:avLst>
           </a:prstGeom>
           <a:solidFill>
             <a:srgbClr val="FFFFFF"/>
@@ -10920,7 +10617,7 @@
               </a:defRPr>
             </a:pPr>
             <a:r>
-              <a:t>18 / 24</a:t>
+              <a:t>18 / 26</a:t>
             </a:r>
           </a:p>
         </p:txBody>
@@ -10937,7 +10634,9 @@
             <a:ext cx="5257800" cy="5029200"/>
           </a:xfrm>
           <a:prstGeom prst="roundRect">
-            <a:avLst/>
+            <a:avLst>
+              <a:gd name="adj" fmla="val 2000"/>
+            </a:avLst>
           </a:prstGeom>
           <a:solidFill>
             <a:srgbClr val="0B132B"/>
@@ -11492,7 +11191,9 @@
             <a:ext cx="5285232" cy="5029200"/>
           </a:xfrm>
           <a:prstGeom prst="roundRect">
-            <a:avLst/>
+            <a:avLst>
+              <a:gd name="adj" fmla="val 2000"/>
+            </a:avLst>
           </a:prstGeom>
           <a:solidFill>
             <a:srgbClr val="FFFFFF"/>
@@ -11918,7 +11619,7 @@
               </a:defRPr>
             </a:pPr>
             <a:r>
-              <a:t>19 / 24</a:t>
+              <a:t>19 / 26</a:t>
             </a:r>
           </a:p>
         </p:txBody>
@@ -11935,7 +11636,9 @@
             <a:ext cx="5257800" cy="5029200"/>
           </a:xfrm>
           <a:prstGeom prst="roundRect">
-            <a:avLst/>
+            <a:avLst>
+              <a:gd name="adj" fmla="val 2000"/>
+            </a:avLst>
           </a:prstGeom>
           <a:solidFill>
             <a:srgbClr val="0B132B"/>
@@ -12449,7 +12152,9 @@
             <a:ext cx="5285232" cy="5029200"/>
           </a:xfrm>
           <a:prstGeom prst="roundRect">
-            <a:avLst/>
+            <a:avLst>
+              <a:gd name="adj" fmla="val 2000"/>
+            </a:avLst>
           </a:prstGeom>
           <a:solidFill>
             <a:srgbClr val="FFFFFF"/>
@@ -12863,7 +12568,7 @@
               </a:defRPr>
             </a:pPr>
             <a:r>
-              <a:t>02 / 24</a:t>
+              <a:t>02 / 26</a:t>
             </a:r>
           </a:p>
         </p:txBody>
@@ -12880,7 +12585,9 @@
             <a:ext cx="3429000" cy="2148840"/>
           </a:xfrm>
           <a:prstGeom prst="roundRect">
-            <a:avLst/>
+            <a:avLst>
+              <a:gd name="adj" fmla="val 2000"/>
+            </a:avLst>
           </a:prstGeom>
           <a:solidFill>
             <a:srgbClr val="FFFFFF"/>
@@ -12980,7 +12687,9 @@
             <a:ext cx="3429000" cy="2148840"/>
           </a:xfrm>
           <a:prstGeom prst="roundRect">
-            <a:avLst/>
+            <a:avLst>
+              <a:gd name="adj" fmla="val 2000"/>
+            </a:avLst>
           </a:prstGeom>
           <a:solidFill>
             <a:srgbClr val="FFFFFF"/>
@@ -13080,7 +12789,9 @@
             <a:ext cx="3429000" cy="2148840"/>
           </a:xfrm>
           <a:prstGeom prst="roundRect">
-            <a:avLst/>
+            <a:avLst>
+              <a:gd name="adj" fmla="val 2000"/>
+            </a:avLst>
           </a:prstGeom>
           <a:solidFill>
             <a:srgbClr val="FFFFFF"/>
@@ -13147,7 +12858,7 @@
               </a:defRPr>
             </a:pPr>
             <a:r>
-              <a:t>Phần 3: Quy Trình Thiết Kế SoC (5 Giai Đoạn)</a:t>
+              <a:t>Phần 3: Kiến Trúc SoC &amp; Vi Mạch UART</a:t>
             </a:r>
           </a:p>
           <a:p>
@@ -13163,7 +12874,7 @@
               </a:defRPr>
             </a:pPr>
             <a:r>
-              <a:t>Khối cơ sở -&gt; Cầu bus Interconnect -&gt; Đồng thiết kế Bootstrap -&gt; Mở rộng FIFO -&gt; MMIO C.</a:t>
+              <a:t>Quy trình 5 giai đoạn thiết kế SoC, so sánh RTL vs C và sơ đồ khối 5 tầng vi mạch UART.</a:t>
             </a:r>
           </a:p>
         </p:txBody>
@@ -13180,7 +12891,9 @@
             <a:ext cx="3429000" cy="2148840"/>
           </a:xfrm>
           <a:prstGeom prst="roundRect">
-            <a:avLst/>
+            <a:avLst>
+              <a:gd name="adj" fmla="val 2000"/>
+            </a:avLst>
           </a:prstGeom>
           <a:solidFill>
             <a:srgbClr val="FFFFFF"/>
@@ -13247,7 +12960,7 @@
               </a:defRPr>
             </a:pPr>
             <a:r>
-              <a:t>Phần 4: Testbench &amp; Chi Tiết Biến Địa Chỉ MMIO</a:t>
+              <a:t>Phần 4: Firmware MMIO &amp; Testbench Mô Phỏng</a:t>
             </a:r>
           </a:p>
           <a:p>
@@ -13263,7 +12976,7 @@
               </a:defRPr>
             </a:pPr>
             <a:r>
-              <a:t>Kiểm thử RTL thuần, Top SoC Ping và phân tích 6 biến địa chỉ phần cứng trong mã nguồn C.</a:t>
+              <a:t>Chi tiết 6 biến địa chỉ phần cứng trong C và 2 testbench kiểm thử toàn diện RTL &amp; Top SoC.</a:t>
             </a:r>
           </a:p>
         </p:txBody>
@@ -13280,7 +12993,9 @@
             <a:ext cx="3429000" cy="2148840"/>
           </a:xfrm>
           <a:prstGeom prst="roundRect">
-            <a:avLst/>
+            <a:avLst>
+              <a:gd name="adj" fmla="val 2000"/>
+            </a:avLst>
           </a:prstGeom>
           <a:solidFill>
             <a:srgbClr val="FFFFFF"/>
@@ -13363,7 +13078,7 @@
               </a:defRPr>
             </a:pPr>
             <a:r>
-              <a:t>Tạo mẫu thực tế trên kit Basys 3, giao tiếp UART PC và 4 kịch bản quẹt thẻ RFID thật.</a:t>
+              <a:t>Mạch nguồn 5V &amp; trở 1kΩ, phần mềm Host Console CLI 10 chức năng &amp; kịch bản quẹt thẻ.</a:t>
             </a:r>
           </a:p>
         </p:txBody>
@@ -13380,7 +13095,9 @@
             <a:ext cx="3429000" cy="2148840"/>
           </a:xfrm>
           <a:prstGeom prst="roundRect">
-            <a:avLst/>
+            <a:avLst>
+              <a:gd name="adj" fmla="val 2000"/>
+            </a:avLst>
           </a:prstGeom>
           <a:solidFill>
             <a:srgbClr val="FFFFFF"/>
@@ -13606,7 +13323,7 @@
               </a:defRPr>
             </a:pPr>
             <a:r>
-              <a:t>PHẦN 5: DEMO CHỨC NĂNG SẢN PHẨM</a:t>
+              <a:t>PHẦN 4: HỆ THỐNG TESTBENCH &amp; MÔ PHỎNG</a:t>
             </a:r>
           </a:p>
           <a:p>
@@ -13619,7 +13336,7 @@
               </a:defRPr>
             </a:pPr>
             <a:r>
-              <a:t>Kiểm Chứng Thực Nghiệm Trên FPGA Basys 3: Thiết Lập Kết Nối Phần Cứng</a:t>
+              <a:t>Testbench 1: Kiểm Thử Phần Cứng RTL Thuần Cho UART MMIO &amp; FIFO (tb_uart_rtl.v)</a:t>
             </a:r>
           </a:p>
         </p:txBody>
@@ -13734,7 +13451,7 @@
               </a:defRPr>
             </a:pPr>
             <a:r>
-              <a:t>20 / 24</a:t>
+              <a:t>20 / 26</a:t>
             </a:r>
           </a:p>
         </p:txBody>
@@ -13747,18 +13464,20 @@
         </p:nvSpPr>
         <p:spPr>
           <a:xfrm>
-            <a:off x="731520" y="1280160"/>
-            <a:ext cx="3429000" cy="4846320"/>
+            <a:off x="731520" y="1234440"/>
+            <a:ext cx="5212080" cy="4937760"/>
           </a:xfrm>
           <a:prstGeom prst="roundRect">
-            <a:avLst/>
+            <a:avLst>
+              <a:gd name="adj" fmla="val 2000"/>
+            </a:avLst>
           </a:prstGeom>
           <a:solidFill>
             <a:srgbClr val="FFFFFF"/>
           </a:solidFill>
-          <a:ln w="25400">
+          <a:ln w="19050">
             <a:solidFill>
-              <a:srgbClr val="D97706"/>
+              <a:srgbClr val="2563EB"/>
             </a:solidFill>
           </a:ln>
         </p:spPr>
@@ -13792,8 +13511,8 @@
         </p:nvSpPr>
         <p:spPr>
           <a:xfrm>
-            <a:off x="896112" y="1463040"/>
-            <a:ext cx="3099816" cy="4480560"/>
+            <a:off x="914400" y="1371600"/>
+            <a:ext cx="4846320" cy="4663440"/>
           </a:xfrm>
           <a:prstGeom prst="rect">
             <a:avLst/>
@@ -13808,17 +13527,17 @@
           <a:p>
             <a:pPr>
               <a:spcAft>
-                <a:spcPts val="1200"/>
-              </a:spcAft>
-              <a:defRPr sz="1200" b="1">
-                <a:solidFill>
-                  <a:srgbClr val="D97706"/>
-                </a:solidFill>
-                <a:latin typeface="Segoe UI"/>
-              </a:defRPr>
-            </a:pPr>
-            <a:r>
-              <a:t>KẾT NỐI ĐẦU ĐỌC RFID RDM6300</a:t>
+                <a:spcPts val="1000"/>
+              </a:spcAft>
+              <a:defRPr sz="1300" b="1">
+                <a:solidFill>
+                  <a:srgbClr val="2563EB"/>
+                </a:solidFill>
+                <a:latin typeface="Segoe UI"/>
+              </a:defRPr>
+            </a:pPr>
+            <a:r>
+              <a:t>5 KỊCH BẢN KIỂM THỬ UART RTL THUẦN</a:t>
             </a:r>
           </a:p>
           <a:p>
@@ -13837,7 +13556,7 @@
               </a:defRPr>
             </a:pPr>
             <a:r>
-              <a:t>• Cổng PMOD JA trên Basys 3: Cắm module RDM6300 trực tiếp vào cổng PMOD JA.</a:t>
+              <a:t>• Mục tiêu: Xác minh tính đúng đắn phần cứng của uart_mmio.v, sync_fifo.v và simpleuart.v mà không cần CPU.</a:t>
             </a:r>
           </a:p>
           <a:p>
@@ -13856,7 +13575,7 @@
               </a:defRPr>
             </a:pPr>
             <a:r>
-              <a:t>• Chân JA1 (Pin J1 FPGA): Nhận luồng dữ liệu UART TX 9600-8-N-1 từ RDM6300.</a:t>
+              <a:t>• 1. Default Divider: Kiểm tra thanh ghi Prescaler tại offset 0x00 nạp đúng giá trị mặc định 5208 (9600 baud @ 50MHz).</a:t>
             </a:r>
           </a:p>
           <a:p>
@@ -13875,7 +13594,7 @@
               </a:defRPr>
             </a:pPr>
             <a:r>
-              <a:t>• Nguồn cấp 5V &amp; GND: Lấy trực tiếp từ chân VCC/GND của cổng PMOD bo mạch.</a:t>
+              <a:t>• 2. Divider Reconfig: Ghi giá trị chia tần mới và đọc lại qua bus MMIO, xác nhận mạch thanh ghi hoạt động chuẩn xác.</a:t>
             </a:r>
           </a:p>
           <a:p>
@@ -13894,7 +13613,45 @@
               </a:defRPr>
             </a:pPr>
             <a:r>
-              <a:t>• Ăng-ten cuộn cảm rời: Đặt cách ly chống nhiễu từ trường với các linh kiện số trên bo mạch.</a:t>
+              <a:t>• 3. Serial TX Waveform: Ghi ký tự vào offset 0x04, kiểm tra dạng sóng nối tiếp tx_o (Start bit = 0, 8 data bits LSB-first, Stop bit = 1).</a:t>
+            </a:r>
+          </a:p>
+          <a:p>
+            <a:pPr>
+              <a:lnSpc>
+                <a:spcPct val="115000"/>
+              </a:lnSpc>
+              <a:spcAft>
+                <a:spcPts val="800"/>
+              </a:spcAft>
+              <a:defRPr sz="1050">
+                <a:solidFill>
+                  <a:srgbClr val="0F172A"/>
+                </a:solidFill>
+                <a:latin typeface="Segoe UI"/>
+              </a:defRPr>
+            </a:pPr>
+            <a:r>
+              <a:t>• 4. Serial RX &amp; FIFO: Bắn chuỗi bit vào rx_i, cờ rx_activity_o tích cực, kiểm tra dữ liệu nạp vào FIFO và trả về 0xFFFFFFFF khi rỗng.</a:t>
+            </a:r>
+          </a:p>
+          <a:p>
+            <a:pPr>
+              <a:lnSpc>
+                <a:spcPct val="115000"/>
+              </a:lnSpc>
+              <a:spcAft>
+                <a:spcPts val="800"/>
+              </a:spcAft>
+              <a:defRPr sz="1050">
+                <a:solidFill>
+                  <a:srgbClr val="0F172A"/>
+                </a:solidFill>
+                <a:latin typeface="Segoe UI"/>
+              </a:defRPr>
+            </a:pPr>
+            <a:r>
+              <a:t>• 5. Multi-Byte Burst: Bắn liên tiếp chuỗi byte kiểm tra cơ chế chống tràn của hàng đợi FIFO 32 byte.</a:t>
             </a:r>
           </a:p>
         </p:txBody>
@@ -13907,18 +13664,20 @@
         </p:nvSpPr>
         <p:spPr>
           <a:xfrm>
-            <a:off x="4343400" y="1280160"/>
-            <a:ext cx="3429000" cy="4846320"/>
+            <a:off x="6217920" y="1234440"/>
+            <a:ext cx="5239512" cy="4937760"/>
           </a:xfrm>
           <a:prstGeom prst="roundRect">
-            <a:avLst/>
+            <a:avLst>
+              <a:gd name="adj" fmla="val 2000"/>
+            </a:avLst>
           </a:prstGeom>
           <a:solidFill>
-            <a:srgbClr val="FFFFFF"/>
+            <a:srgbClr val="0B132B"/>
           </a:solidFill>
-          <a:ln w="25400">
+          <a:ln w="19050">
             <a:solidFill>
-              <a:srgbClr val="2563EB"/>
+              <a:srgbClr val="1C2541"/>
             </a:solidFill>
           </a:ln>
         </p:spPr>
@@ -13952,8 +13711,8 @@
         </p:nvSpPr>
         <p:spPr>
           <a:xfrm>
-            <a:off x="4507992" y="1463040"/>
-            <a:ext cx="3099816" cy="4480560"/>
+            <a:off x="6355080" y="1307592"/>
+            <a:ext cx="4965192" cy="292608"/>
           </a:xfrm>
           <a:prstGeom prst="rect">
             <a:avLst/>
@@ -13961,146 +13720,384 @@
           <a:noFill/>
         </p:spPr>
         <p:txBody>
-          <a:bodyPr wrap="square">
+          <a:bodyPr wrap="none" lIns="0" tIns="0" rIns="0" bIns="0">
             <a:spAutoFit/>
           </a:bodyPr>
           <a:lstStyle/>
           <a:p>
             <a:pPr>
-              <a:spcAft>
-                <a:spcPts val="1200"/>
-              </a:spcAft>
-              <a:defRPr sz="1200" b="1">
-                <a:solidFill>
-                  <a:srgbClr val="2563EB"/>
-                </a:solidFill>
-                <a:latin typeface="Segoe UI"/>
-              </a:defRPr>
-            </a:pPr>
-            <a:r>
-              <a:t>KẾT NỐI MÁY TÍNH HOST PC</a:t>
-            </a:r>
-          </a:p>
-          <a:p>
-            <a:pPr>
-              <a:lnSpc>
-                <a:spcPct val="115000"/>
-              </a:lnSpc>
-              <a:spcAft>
-                <a:spcPts val="800"/>
-              </a:spcAft>
-              <a:defRPr sz="1050">
-                <a:solidFill>
-                  <a:srgbClr val="0F172A"/>
-                </a:solidFill>
-                <a:latin typeface="Segoe UI"/>
-              </a:defRPr>
-            </a:pPr>
-            <a:r>
-              <a:t>• Cáp Micro-USB tiêu chuẩn: Vừa cấp nguồn +5V DC vừa mở cổng COM ảo qua chip FTDI.</a:t>
-            </a:r>
-          </a:p>
-          <a:p>
-            <a:pPr>
-              <a:lnSpc>
-                <a:spcPct val="115000"/>
-              </a:lnSpc>
-              <a:spcAft>
-                <a:spcPts val="800"/>
-              </a:spcAft>
-              <a:defRPr sz="1050">
-                <a:solidFill>
-                  <a:srgbClr val="0F172A"/>
-                </a:solidFill>
-                <a:latin typeface="Segoe UI"/>
-              </a:defRPr>
-            </a:pPr>
-            <a:r>
-              <a:t>• Tốc độ baud 9600 bps: Giao tiếp Full-Duplex tin cậy giữa máy tính và SoC PicoRV32.</a:t>
-            </a:r>
-          </a:p>
-          <a:p>
-            <a:pPr>
-              <a:lnSpc>
-                <a:spcPct val="115000"/>
-              </a:lnSpc>
-              <a:spcAft>
-                <a:spcPts val="800"/>
-              </a:spcAft>
-              <a:defRPr sz="1050">
-                <a:solidFill>
-                  <a:srgbClr val="0F172A"/>
-                </a:solidFill>
-                <a:latin typeface="Segoe UI"/>
-              </a:defRPr>
-            </a:pPr>
-            <a:r>
-              <a:t>• Phần mềm Host Console C: Giao diện dòng lệnh tương tác 11 chức năng quản trị cơ sở dữ liệu thẻ.</a:t>
-            </a:r>
-          </a:p>
-          <a:p>
-            <a:pPr>
-              <a:lnSpc>
-                <a:spcPct val="115000"/>
-              </a:lnSpc>
-              <a:spcAft>
-                <a:spcPts val="800"/>
-              </a:spcAft>
-              <a:defRPr sz="1050">
-                <a:solidFill>
-                  <a:srgbClr val="0F172A"/>
-                </a:solidFill>
-                <a:latin typeface="Segoe UI"/>
-              </a:defRPr>
-            </a:pPr>
-            <a:r>
-              <a:t>• Trích xuất dữ liệu tự động: Tự động sao lưu lịch sử quẹt thẻ ra file CSV trên máy tính.</a:t>
-            </a:r>
-          </a:p>
-        </p:txBody>
-      </p:sp>
-      <p:sp>
-        <p:nvSpPr>
-          <p:cNvPr id="12" name="Rounded Rectangle 11"/>
-          <p:cNvSpPr/>
-          <p:nvPr/>
-        </p:nvSpPr>
-        <p:spPr>
-          <a:xfrm>
-            <a:off x="7955280" y="1280160"/>
-            <a:ext cx="3429000" cy="4846320"/>
-          </a:xfrm>
-          <a:prstGeom prst="roundRect">
-            <a:avLst/>
-          </a:prstGeom>
-          <a:solidFill>
-            <a:srgbClr val="FFFFFF"/>
-          </a:solidFill>
-          <a:ln w="25400">
-            <a:solidFill>
-              <a:srgbClr val="7C3AED"/>
-            </a:solidFill>
-          </a:ln>
-        </p:spPr>
-        <p:style>
-          <a:lnRef idx="1">
-            <a:schemeClr val="accent1"/>
-          </a:lnRef>
-          <a:fillRef idx="3">
-            <a:schemeClr val="accent1"/>
-          </a:fillRef>
-          <a:effectRef idx="2">
-            <a:schemeClr val="accent1"/>
-          </a:effectRef>
-          <a:fontRef idx="minor">
-            <a:schemeClr val="lt1"/>
-          </a:fontRef>
-        </p:style>
-        <p:txBody>
-          <a:bodyPr rtlCol="0" anchor="ctr"/>
-          <a:lstStyle/>
-          <a:p>
-            <a:pPr algn="ctr"/>
+              <a:defRPr sz="950" b="1">
+                <a:solidFill>
+                  <a:srgbClr val="0EA5E9"/>
+                </a:solidFill>
+                <a:latin typeface="Consolas"/>
+              </a:defRPr>
+            </a:pPr>
+            <a:r>
+              <a:t>&gt;_  tb/run_sim_uart.bat output</a:t>
+            </a:r>
+          </a:p>
+        </p:txBody>
+      </p:sp>
+      <p:sp>
+        <p:nvSpPr>
+          <p:cNvPr id="12" name="TextBox 11"/>
+          <p:cNvSpPr txBox="1"/>
+          <p:nvPr/>
+        </p:nvSpPr>
+        <p:spPr>
+          <a:xfrm>
+            <a:off x="6355080" y="1600200"/>
+            <a:ext cx="4965192" cy="4224528"/>
+          </a:xfrm>
+          <a:prstGeom prst="rect">
+            <a:avLst/>
+          </a:prstGeom>
+          <a:noFill/>
+        </p:spPr>
+        <p:txBody>
+          <a:bodyPr wrap="square" lIns="0" tIns="0" rIns="0" bIns="0">
+            <a:spAutoFit/>
+          </a:bodyPr>
+          <a:lstStyle/>
+          <a:p>
+            <a:pPr>
+              <a:lnSpc>
+                <a:spcPct val="108000"/>
+              </a:lnSpc>
+              <a:spcAft>
+                <a:spcPts val="0"/>
+              </a:spcAft>
+              <a:defRPr sz="800">
+                <a:solidFill>
+                  <a:srgbClr val="FFFFFF"/>
+                </a:solidFill>
+                <a:latin typeface="Consolas"/>
+              </a:defRPr>
+            </a:pPr>
+            <a:r>
+              <a:t>Vivado Simulator v2025.1 - xelab &amp; xsim</a:t>
+            </a:r>
+          </a:p>
+          <a:p>
+            <a:pPr>
+              <a:lnSpc>
+                <a:spcPct val="108000"/>
+              </a:lnSpc>
+              <a:spcAft>
+                <a:spcPts val="0"/>
+              </a:spcAft>
+              <a:defRPr sz="800">
+                <a:solidFill>
+                  <a:srgbClr val="FFFFFF"/>
+                </a:solidFill>
+                <a:latin typeface="Consolas"/>
+              </a:defRPr>
+            </a:pPr>
+            <a:r>
+              <a:t>Analyzing Verilog file rtl/uart/sync_2ff.v</a:t>
+            </a:r>
+          </a:p>
+          <a:p>
+            <a:pPr>
+              <a:lnSpc>
+                <a:spcPct val="108000"/>
+              </a:lnSpc>
+              <a:spcAft>
+                <a:spcPts val="0"/>
+              </a:spcAft>
+              <a:defRPr sz="800">
+                <a:solidFill>
+                  <a:srgbClr val="93C5FD"/>
+                </a:solidFill>
+                <a:latin typeface="Consolas"/>
+              </a:defRPr>
+            </a:pPr>
+            <a:r>
+              <a:t>Analyzing Verilog file rtl/uart/sync_fifo.v</a:t>
+            </a:r>
+          </a:p>
+          <a:p>
+            <a:pPr>
+              <a:lnSpc>
+                <a:spcPct val="108000"/>
+              </a:lnSpc>
+              <a:spcAft>
+                <a:spcPts val="0"/>
+              </a:spcAft>
+              <a:defRPr sz="800">
+                <a:solidFill>
+                  <a:srgbClr val="FFFFFF"/>
+                </a:solidFill>
+                <a:latin typeface="Consolas"/>
+              </a:defRPr>
+            </a:pPr>
+            <a:r>
+              <a:t>Analyzing Verilog file rtl/uart/simpleuart.v</a:t>
+            </a:r>
+          </a:p>
+          <a:p>
+            <a:pPr>
+              <a:lnSpc>
+                <a:spcPct val="108000"/>
+              </a:lnSpc>
+              <a:spcAft>
+                <a:spcPts val="0"/>
+              </a:spcAft>
+              <a:defRPr sz="800">
+                <a:solidFill>
+                  <a:srgbClr val="FFFFFF"/>
+                </a:solidFill>
+                <a:latin typeface="Consolas"/>
+              </a:defRPr>
+            </a:pPr>
+            <a:r>
+              <a:t>Analyzing Verilog file rtl/uart/uart_mmio.v</a:t>
+            </a:r>
+          </a:p>
+          <a:p>
+            <a:pPr>
+              <a:lnSpc>
+                <a:spcPct val="108000"/>
+              </a:lnSpc>
+              <a:spcAft>
+                <a:spcPts val="0"/>
+              </a:spcAft>
+              <a:defRPr sz="800">
+                <a:solidFill>
+                  <a:srgbClr val="FFFFFF"/>
+                </a:solidFill>
+                <a:latin typeface="Consolas"/>
+              </a:defRPr>
+            </a:pPr>
+            <a:r>
+              <a:t>Analyzing Verilog file tb/tb_uart_rtl.v</a:t>
+            </a:r>
+          </a:p>
+          <a:p>
+            <a:pPr>
+              <a:lnSpc>
+                <a:spcPct val="108000"/>
+              </a:lnSpc>
+              <a:spcAft>
+                <a:spcPts val="0"/>
+              </a:spcAft>
+              <a:defRPr sz="800">
+                <a:solidFill>
+                  <a:srgbClr val="FFFFFF"/>
+                </a:solidFill>
+                <a:latin typeface="Consolas"/>
+              </a:defRPr>
+            </a:pPr>
+          </a:p>
+          <a:p>
+            <a:pPr>
+              <a:lnSpc>
+                <a:spcPct val="108000"/>
+              </a:lnSpc>
+              <a:spcAft>
+                <a:spcPts val="0"/>
+              </a:spcAft>
+              <a:defRPr sz="800" b="1">
+                <a:solidFill>
+                  <a:srgbClr val="0EA5E9"/>
+                </a:solidFill>
+                <a:latin typeface="Consolas"/>
+              </a:defRPr>
+            </a:pPr>
+            <a:r>
+              <a:t>[TEST 1] Checking Default Prescaler Divider...</a:t>
+            </a:r>
+          </a:p>
+          <a:p>
+            <a:pPr>
+              <a:lnSpc>
+                <a:spcPct val="108000"/>
+              </a:lnSpc>
+              <a:spcAft>
+                <a:spcPts val="0"/>
+              </a:spcAft>
+              <a:defRPr sz="800" b="1">
+                <a:solidFill>
+                  <a:srgbClr val="10B981"/>
+                </a:solidFill>
+                <a:latin typeface="Consolas"/>
+              </a:defRPr>
+            </a:pPr>
+            <a:r>
+              <a:t>  [PASS] Prescaler default matches DEFAULT_DIV = 5208</a:t>
+            </a:r>
+          </a:p>
+          <a:p>
+            <a:pPr>
+              <a:lnSpc>
+                <a:spcPct val="108000"/>
+              </a:lnSpc>
+              <a:spcAft>
+                <a:spcPts val="0"/>
+              </a:spcAft>
+              <a:defRPr sz="800" b="1">
+                <a:solidFill>
+                  <a:srgbClr val="0EA5E9"/>
+                </a:solidFill>
+                <a:latin typeface="Consolas"/>
+              </a:defRPr>
+            </a:pPr>
+            <a:r>
+              <a:t>[TEST 2] Reconfiguring Divider to 10416 (4800 baud)...</a:t>
+            </a:r>
+          </a:p>
+          <a:p>
+            <a:pPr>
+              <a:lnSpc>
+                <a:spcPct val="108000"/>
+              </a:lnSpc>
+              <a:spcAft>
+                <a:spcPts val="0"/>
+              </a:spcAft>
+              <a:defRPr sz="800" b="1">
+                <a:solidFill>
+                  <a:srgbClr val="10B981"/>
+                </a:solidFill>
+                <a:latin typeface="Consolas"/>
+              </a:defRPr>
+            </a:pPr>
+            <a:r>
+              <a:t>  [PASS] Read-back matches written value 10416</a:t>
+            </a:r>
+          </a:p>
+          <a:p>
+            <a:pPr>
+              <a:lnSpc>
+                <a:spcPct val="108000"/>
+              </a:lnSpc>
+              <a:spcAft>
+                <a:spcPts val="0"/>
+              </a:spcAft>
+              <a:defRPr sz="800" b="1">
+                <a:solidFill>
+                  <a:srgbClr val="0EA5E9"/>
+                </a:solidFill>
+                <a:latin typeface="Consolas"/>
+              </a:defRPr>
+            </a:pPr>
+            <a:r>
+              <a:t>[TEST 3] Transmitting Byte 0x55 ('U') over TX...</a:t>
+            </a:r>
+          </a:p>
+          <a:p>
+            <a:pPr>
+              <a:lnSpc>
+                <a:spcPct val="108000"/>
+              </a:lnSpc>
+              <a:spcAft>
+                <a:spcPts val="0"/>
+              </a:spcAft>
+              <a:defRPr sz="800" b="1">
+                <a:solidFill>
+                  <a:srgbClr val="10B981"/>
+                </a:solidFill>
+                <a:latin typeface="Consolas"/>
+              </a:defRPr>
+            </a:pPr>
+            <a:r>
+              <a:t>  [PASS] TX Waveform matches 9600-8-N-1 timing!</a:t>
+            </a:r>
+          </a:p>
+          <a:p>
+            <a:pPr>
+              <a:lnSpc>
+                <a:spcPct val="108000"/>
+              </a:lnSpc>
+              <a:spcAft>
+                <a:spcPts val="0"/>
+              </a:spcAft>
+              <a:defRPr sz="800" b="1">
+                <a:solidFill>
+                  <a:srgbClr val="0EA5E9"/>
+                </a:solidFill>
+                <a:latin typeface="Consolas"/>
+              </a:defRPr>
+            </a:pPr>
+            <a:r>
+              <a:t>[TEST 4] Receiving Serial Byte 0xA5 into FIFO...</a:t>
+            </a:r>
+          </a:p>
+          <a:p>
+            <a:pPr>
+              <a:lnSpc>
+                <a:spcPct val="108000"/>
+              </a:lnSpc>
+              <a:spcAft>
+                <a:spcPts val="0"/>
+              </a:spcAft>
+              <a:defRPr sz="800" b="1">
+                <a:solidFill>
+                  <a:srgbClr val="10B981"/>
+                </a:solidFill>
+                <a:latin typeface="Consolas"/>
+              </a:defRPr>
+            </a:pPr>
+            <a:r>
+              <a:t>  [PASS] rx_activity_o asserted! Read 0xA5 cleanly!</a:t>
+            </a:r>
+          </a:p>
+          <a:p>
+            <a:pPr>
+              <a:lnSpc>
+                <a:spcPct val="108000"/>
+              </a:lnSpc>
+              <a:spcAft>
+                <a:spcPts val="0"/>
+              </a:spcAft>
+              <a:defRPr sz="800" b="1">
+                <a:solidFill>
+                  <a:srgbClr val="10B981"/>
+                </a:solidFill>
+                <a:latin typeface="Consolas"/>
+              </a:defRPr>
+            </a:pPr>
+            <a:r>
+              <a:t>  [PASS] FIFO Empty flag returns 0xFFFFFFFF</a:t>
+            </a:r>
+          </a:p>
+          <a:p>
+            <a:pPr>
+              <a:lnSpc>
+                <a:spcPct val="108000"/>
+              </a:lnSpc>
+              <a:spcAft>
+                <a:spcPts val="0"/>
+              </a:spcAft>
+              <a:defRPr sz="800" b="1">
+                <a:solidFill>
+                  <a:srgbClr val="0EA5E9"/>
+                </a:solidFill>
+                <a:latin typeface="Consolas"/>
+              </a:defRPr>
+            </a:pPr>
+            <a:r>
+              <a:t>[TEST 5] Multi-Byte Burst Test (16 bytes)...</a:t>
+            </a:r>
+          </a:p>
+          <a:p>
+            <a:pPr>
+              <a:lnSpc>
+                <a:spcPct val="108000"/>
+              </a:lnSpc>
+              <a:spcAft>
+                <a:spcPts val="0"/>
+              </a:spcAft>
+              <a:defRPr sz="800" b="1">
+                <a:solidFill>
+                  <a:srgbClr val="10B981"/>
+                </a:solidFill>
+                <a:latin typeface="Consolas"/>
+              </a:defRPr>
+            </a:pPr>
+            <a:r>
+              <a:t>  [PASS] All 16 bytes drained without data corruption!</a:t>
+            </a:r>
           </a:p>
         </p:txBody>
       </p:sp>
@@ -14112,8 +14109,8 @@
         </p:nvSpPr>
         <p:spPr>
           <a:xfrm>
-            <a:off x="8119872" y="1463040"/>
-            <a:ext cx="3099816" cy="4480560"/>
+            <a:off x="6355080" y="5788152"/>
+            <a:ext cx="4965192" cy="274320"/>
           </a:xfrm>
           <a:prstGeom prst="rect">
             <a:avLst/>
@@ -14121,100 +14118,21 @@
           <a:noFill/>
         </p:spPr>
         <p:txBody>
-          <a:bodyPr wrap="square">
+          <a:bodyPr wrap="none" lIns="0" tIns="0" rIns="0" bIns="0">
             <a:spAutoFit/>
           </a:bodyPr>
           <a:lstStyle/>
           <a:p>
             <a:pPr>
-              <a:spcAft>
-                <a:spcPts val="1200"/>
-              </a:spcAft>
-              <a:defRPr sz="1200" b="1">
-                <a:solidFill>
-                  <a:srgbClr val="7C3AED"/>
-                </a:solidFill>
-                <a:latin typeface="Segoe UI"/>
-              </a:defRPr>
-            </a:pPr>
-            <a:r>
-              <a:t>ĐIỀU KHIỂN FLASH &amp; HIỂN THỊ LED</a:t>
-            </a:r>
-          </a:p>
-          <a:p>
-            <a:pPr>
-              <a:lnSpc>
-                <a:spcPct val="115000"/>
-              </a:lnSpc>
-              <a:spcAft>
-                <a:spcPts val="800"/>
-              </a:spcAft>
-              <a:defRPr sz="1050">
-                <a:solidFill>
-                  <a:srgbClr val="0F172A"/>
-                </a:solidFill>
-                <a:latin typeface="Segoe UI"/>
-              </a:defRPr>
-            </a:pPr>
-            <a:r>
-              <a:t>• Nguyên thủy STARTUPE2: Đưa xung nhịp Flash SCK vào USRCCLKO để làm chủ chân CCLK nối tới chip Flash.</a:t>
-            </a:r>
-          </a:p>
-          <a:p>
-            <a:pPr>
-              <a:lnSpc>
-                <a:spcPct val="115000"/>
-              </a:lnSpc>
-              <a:spcAft>
-                <a:spcPts val="800"/>
-              </a:spcAft>
-              <a:defRPr sz="1050">
-                <a:solidFill>
-                  <a:srgbClr val="0F172A"/>
-                </a:solidFill>
-                <a:latin typeface="Segoe UI"/>
-              </a:defRPr>
-            </a:pPr>
-            <a:r>
-              <a:t>• Chip Flash Spansion S25FL032P: Lưu trữ bền vững danh mục Whitelist (Sector 48) và Access Logs (Sector 49).</a:t>
-            </a:r>
-          </a:p>
-          <a:p>
-            <a:pPr>
-              <a:lnSpc>
-                <a:spcPct val="115000"/>
-              </a:lnSpc>
-              <a:spcAft>
-                <a:spcPts val="800"/>
-              </a:spcAft>
-              <a:defRPr sz="1050">
-                <a:solidFill>
-                  <a:srgbClr val="0F172A"/>
-                </a:solidFill>
-                <a:latin typeface="Segoe UI"/>
-              </a:defRPr>
-            </a:pPr>
-            <a:r>
-              <a:t>• LED[0] (Heartbeat): Nhấp nháy 1 Hz báo hiệu CPU PicoRV32 đang hoạt động bình thường.</a:t>
-            </a:r>
-          </a:p>
-          <a:p>
-            <a:pPr>
-              <a:lnSpc>
-                <a:spcPct val="115000"/>
-              </a:lnSpc>
-              <a:spcAft>
-                <a:spcPts val="800"/>
-              </a:spcAft>
-              <a:defRPr sz="1050">
-                <a:solidFill>
-                  <a:srgbClr val="0F172A"/>
-                </a:solidFill>
-                <a:latin typeface="Segoe UI"/>
-              </a:defRPr>
-            </a:pPr>
-            <a:r>
-              <a:t>• LED[1] &amp; LED[2]: LED[1] sáng khi chip Flash đang bận ghi; LED[2] sáng khi quẹt thẻ hợp lệ.</a:t>
+              <a:defRPr sz="819" b="1">
+                <a:solidFill>
+                  <a:srgbClr val="10B981"/>
+                </a:solidFill>
+                <a:latin typeface="Segoe UI"/>
+              </a:defRPr>
+            </a:pPr>
+            <a:r>
+              <a:t>=== UART RTL TESTBENCH: 100% PASS ===</a:t>
             </a:r>
           </a:p>
         </p:txBody>
@@ -14357,7 +14275,7 @@
               </a:defRPr>
             </a:pPr>
             <a:r>
-              <a:t>PHẦN 5: DEMO CHỨC NĂNG SẢN PHẨM</a:t>
+              <a:t>PHẦN 4: HỆ THỐNG TESTBENCH &amp; MÔ PHỎNG</a:t>
             </a:r>
           </a:p>
           <a:p>
@@ -14370,7 +14288,7 @@
               </a:defRPr>
             </a:pPr>
             <a:r>
-              <a:t>Các Kịch Bản Thực Nghiệm Quẹt Thẻ Thực Tế Trên FPGA Basys 3</a:t>
+              <a:t>Testbench 2: Kiểm Thử Tích Hợp Toàn Diện Top SoC Boot Flash &amp; Ping (tb_uart_ping.v)</a:t>
             </a:r>
           </a:p>
         </p:txBody>
@@ -14485,7 +14403,7 @@
               </a:defRPr>
             </a:pPr>
             <a:r>
-              <a:t>21 / 24</a:t>
+              <a:t>21 / 26</a:t>
             </a:r>
           </a:p>
         </p:txBody>
@@ -14498,18 +14416,20 @@
         </p:nvSpPr>
         <p:spPr>
           <a:xfrm>
-            <a:off x="731520" y="1280160"/>
-            <a:ext cx="5120640" cy="2148840"/>
+            <a:off x="731520" y="1234440"/>
+            <a:ext cx="5212080" cy="4937760"/>
           </a:xfrm>
           <a:prstGeom prst="roundRect">
-            <a:avLst/>
+            <a:avLst>
+              <a:gd name="adj" fmla="val 2000"/>
+            </a:avLst>
           </a:prstGeom>
           <a:solidFill>
             <a:srgbClr val="FFFFFF"/>
           </a:solidFill>
-          <a:ln w="25400">
+          <a:ln w="19050">
             <a:solidFill>
-              <a:srgbClr val="2563EB"/>
+              <a:srgbClr val="10B981"/>
             </a:solidFill>
           </a:ln>
         </p:spPr>
@@ -14543,8 +14463,8 @@
         </p:nvSpPr>
         <p:spPr>
           <a:xfrm>
-            <a:off x="914400" y="1417320"/>
-            <a:ext cx="4754880" cy="1874520"/>
+            <a:off x="914400" y="1371600"/>
+            <a:ext cx="4846320" cy="4663440"/>
           </a:xfrm>
           <a:prstGeom prst="rect">
             <a:avLst/>
@@ -14559,17 +14479,36 @@
           <a:p>
             <a:pPr>
               <a:spcAft>
+                <a:spcPts val="1000"/>
+              </a:spcAft>
+              <a:defRPr sz="1300" b="1">
+                <a:solidFill>
+                  <a:srgbClr val="10B981"/>
+                </a:solidFill>
+                <a:latin typeface="Segoe UI"/>
+              </a:defRPr>
+            </a:pPr>
+            <a:r>
+              <a:t>5 KỊCH BẢN KIỂM THỬ TÍCH HỢP TOP SOC</a:t>
+            </a:r>
+          </a:p>
+          <a:p>
+            <a:pPr>
+              <a:lnSpc>
+                <a:spcPct val="115000"/>
+              </a:lnSpc>
+              <a:spcAft>
                 <a:spcPts val="800"/>
               </a:spcAft>
-              <a:defRPr sz="1250" b="1">
-                <a:solidFill>
-                  <a:srgbClr val="2563EB"/>
-                </a:solidFill>
-                <a:latin typeface="Segoe UI"/>
-              </a:defRPr>
-            </a:pPr>
-            <a:r>
-              <a:t>KỊCH BẢN 1: PING PHẦN CỨNG</a:t>
+              <a:defRPr sz="1050">
+                <a:solidFill>
+                  <a:srgbClr val="0F172A"/>
+                </a:solidFill>
+                <a:latin typeface="Segoe UI"/>
+              </a:defRPr>
+            </a:pPr>
+            <a:r>
+              <a:t>• Mục tiêu: Xác minh hệ thống Top-level hoàn chỉnh gồm CPU PicoRV32, spimemio, 1KB SRAM, Interconnect và UART.</a:t>
             </a:r>
           </a:p>
           <a:p>
@@ -14578,7 +14517,7 @@
                 <a:spcPct val="115000"/>
               </a:lnSpc>
               <a:spcAft>
-                <a:spcPts val="400"/>
+                <a:spcPts val="800"/>
               </a:spcAft>
               <a:defRPr sz="1050">
                 <a:solidFill>
@@ -14588,7 +14527,7 @@
               </a:defRPr>
             </a:pPr>
             <a:r>
-              <a:t>• Thao tác: Chọn menu [1] trên Host Console gửi lệnh 'P'.</a:t>
+              <a:t>• 1. Power-On Reset &amp; Boot Flash: PicoRV32 thức dậy tại 0x0025_0000, spimemio kéo từng từ lệnh mã C từ firmware.hex qua XIP.</a:t>
             </a:r>
           </a:p>
           <a:p>
@@ -14597,7 +14536,7 @@
                 <a:spcPct val="115000"/>
               </a:lnSpc>
               <a:spcAft>
-                <a:spcPts val="400"/>
+                <a:spcPts val="800"/>
               </a:spcAft>
               <a:defRPr sz="1050">
                 <a:solidFill>
@@ -14607,7 +14546,7 @@
               </a:defRPr>
             </a:pPr>
             <a:r>
-              <a:t>• Kết quả: PicoRV32 phản hồi ngay 'PONG: PicoRV32 Active'.</a:t>
+              <a:t>• 2. C Startup Banner: CPU thực thi mã C trong main.c, khởi tạo ngoại vi và in toàn bộ chuỗi chào mừng ra UART.</a:t>
             </a:r>
           </a:p>
           <a:p>
@@ -14616,7 +14555,7 @@
                 <a:spcPct val="115000"/>
               </a:lnSpc>
               <a:spcAft>
-                <a:spcPts val="400"/>
+                <a:spcPts val="800"/>
               </a:spcAft>
               <a:defRPr sz="1050">
                 <a:solidFill>
@@ -14626,7 +14565,49 @@
               </a:defRPr>
             </a:pPr>
             <a:r>
-              <a:t>• Ý nghĩa: Khẳng định CPU, Interconnect và UART hoạt động thông suốt.</a:t>
+              <a:t>• 3. Host Ping Processing: Testbench đóng vai trò PC Host gửi byte lệnh 'P' (0x50) và '</a:t>
+            </a:r>
+            <a:br/>
+            <a:r>
+              <a:t>' (0x0A) qua cổng nối tiếp.</a:t>
+            </a:r>
+          </a:p>
+          <a:p>
+            <a:pPr>
+              <a:lnSpc>
+                <a:spcPct val="115000"/>
+              </a:lnSpc>
+              <a:spcAft>
+                <a:spcPts val="800"/>
+              </a:spcAft>
+              <a:defRPr sz="1050">
+                <a:solidFill>
+                  <a:srgbClr val="0F172A"/>
+                </a:solidFill>
+                <a:latin typeface="Segoe UI"/>
+              </a:defRPr>
+            </a:pPr>
+            <a:r>
+              <a:t>• 4. Response Verification: CPU phản hồi chuỗi 'PONG: PicoRV32 Active', testbench so khớp từng ký tự.</a:t>
+            </a:r>
+          </a:p>
+          <a:p>
+            <a:pPr>
+              <a:lnSpc>
+                <a:spcPct val="115000"/>
+              </a:lnSpc>
+              <a:spcAft>
+                <a:spcPts val="800"/>
+              </a:spcAft>
+              <a:defRPr sz="1050">
+                <a:solidFill>
+                  <a:srgbClr val="0F172A"/>
+                </a:solidFill>
+                <a:latin typeface="Segoe UI"/>
+              </a:defRPr>
+            </a:pPr>
+            <a:r>
+              <a:t>• 5. CPU Health &amp; Zero-Trap: Khẳng định tín hiệu cpu_trap == 0 xuyên suốt quá trình chạy, không bị illegal instruction hay tràn RAM.</a:t>
             </a:r>
           </a:p>
         </p:txBody>
@@ -14639,18 +14620,20 @@
         </p:nvSpPr>
         <p:spPr>
           <a:xfrm>
-            <a:off x="6126480" y="1280160"/>
-            <a:ext cx="5120640" cy="2148840"/>
+            <a:off x="6217920" y="1234440"/>
+            <a:ext cx="5239512" cy="4937760"/>
           </a:xfrm>
           <a:prstGeom prst="roundRect">
-            <a:avLst/>
+            <a:avLst>
+              <a:gd name="adj" fmla="val 2000"/>
+            </a:avLst>
           </a:prstGeom>
           <a:solidFill>
-            <a:srgbClr val="FFFFFF"/>
+            <a:srgbClr val="0B132B"/>
           </a:solidFill>
-          <a:ln w="25400">
+          <a:ln w="19050">
             <a:solidFill>
-              <a:srgbClr val="E11D48"/>
+              <a:srgbClr val="1C2541"/>
             </a:solidFill>
           </a:ln>
         </p:spPr>
@@ -14684,8 +14667,8 @@
         </p:nvSpPr>
         <p:spPr>
           <a:xfrm>
-            <a:off x="6309360" y="1417320"/>
-            <a:ext cx="4754880" cy="1874520"/>
+            <a:off x="6355080" y="1307592"/>
+            <a:ext cx="4965192" cy="292608"/>
           </a:xfrm>
           <a:prstGeom prst="rect">
             <a:avLst/>
@@ -14693,127 +14676,365 @@
           <a:noFill/>
         </p:spPr>
         <p:txBody>
-          <a:bodyPr wrap="square">
+          <a:bodyPr wrap="none" lIns="0" tIns="0" rIns="0" bIns="0">
             <a:spAutoFit/>
           </a:bodyPr>
           <a:lstStyle/>
           <a:p>
             <a:pPr>
-              <a:spcAft>
-                <a:spcPts val="800"/>
-              </a:spcAft>
-              <a:defRPr sz="1250" b="1">
-                <a:solidFill>
-                  <a:srgbClr val="E11D48"/>
-                </a:solidFill>
-                <a:latin typeface="Segoe UI"/>
-              </a:defRPr>
-            </a:pPr>
-            <a:r>
-              <a:t>KỊCH BẢN 2: THẺ CHƯA ĐĂNG KÝ</a:t>
-            </a:r>
-          </a:p>
-          <a:p>
-            <a:pPr>
-              <a:lnSpc>
-                <a:spcPct val="115000"/>
-              </a:lnSpc>
-              <a:spcAft>
-                <a:spcPts val="400"/>
-              </a:spcAft>
-              <a:defRPr sz="1050">
-                <a:solidFill>
-                  <a:srgbClr val="0F172A"/>
-                </a:solidFill>
-                <a:latin typeface="Segoe UI"/>
-              </a:defRPr>
-            </a:pPr>
-            <a:r>
-              <a:t>• Thao tác: Quẹt thẻ thật 0007508976 chưa có trong Flash.</a:t>
-            </a:r>
-          </a:p>
-          <a:p>
-            <a:pPr>
-              <a:lnSpc>
-                <a:spcPct val="115000"/>
-              </a:lnSpc>
-              <a:spcAft>
-                <a:spcPts val="400"/>
-              </a:spcAft>
-              <a:defRPr sz="1050">
-                <a:solidFill>
-                  <a:srgbClr val="0F172A"/>
-                </a:solidFill>
-                <a:latin typeface="Segoe UI"/>
-              </a:defRPr>
-            </a:pPr>
-            <a:r>
-              <a:t>• Phản hồi: Hệ thống bóc tách UID 00007293F0 -&gt; 'ACCESS:DENIED'.</a:t>
-            </a:r>
-          </a:p>
-          <a:p>
-            <a:pPr>
-              <a:lnSpc>
-                <a:spcPct val="115000"/>
-              </a:lnSpc>
-              <a:spcAft>
-                <a:spcPts val="400"/>
-              </a:spcAft>
-              <a:defRPr sz="1050">
-                <a:solidFill>
-                  <a:srgbClr val="0F172A"/>
-                </a:solidFill>
-                <a:latin typeface="Segoe UI"/>
-              </a:defRPr>
-            </a:pPr>
-            <a:r>
-              <a:t>• Tác động: Nháy LED đỏ cảnh báo, ghi vết FAIL vào Flash Sector 49.</a:t>
-            </a:r>
-          </a:p>
-        </p:txBody>
-      </p:sp>
-      <p:sp>
-        <p:nvSpPr>
-          <p:cNvPr id="12" name="Rounded Rectangle 11"/>
-          <p:cNvSpPr/>
-          <p:nvPr/>
-        </p:nvSpPr>
-        <p:spPr>
-          <a:xfrm>
-            <a:off x="731520" y="3703320"/>
-            <a:ext cx="5120640" cy="2148840"/>
-          </a:xfrm>
-          <a:prstGeom prst="roundRect">
-            <a:avLst/>
-          </a:prstGeom>
-          <a:solidFill>
-            <a:srgbClr val="FFFFFF"/>
-          </a:solidFill>
-          <a:ln w="25400">
-            <a:solidFill>
-              <a:srgbClr val="D97706"/>
-            </a:solidFill>
-          </a:ln>
-        </p:spPr>
-        <p:style>
-          <a:lnRef idx="1">
-            <a:schemeClr val="accent1"/>
-          </a:lnRef>
-          <a:fillRef idx="3">
-            <a:schemeClr val="accent1"/>
-          </a:fillRef>
-          <a:effectRef idx="2">
-            <a:schemeClr val="accent1"/>
-          </a:effectRef>
-          <a:fontRef idx="minor">
-            <a:schemeClr val="lt1"/>
-          </a:fontRef>
-        </p:style>
-        <p:txBody>
-          <a:bodyPr rtlCol="0" anchor="ctr"/>
-          <a:lstStyle/>
-          <a:p>
-            <a:pPr algn="ctr"/>
+              <a:defRPr sz="950" b="1">
+                <a:solidFill>
+                  <a:srgbClr val="0EA5E9"/>
+                </a:solidFill>
+                <a:latin typeface="Consolas"/>
+              </a:defRPr>
+            </a:pPr>
+            <a:r>
+              <a:t>&gt;_  tb/run_sim_ping.bat output</a:t>
+            </a:r>
+          </a:p>
+        </p:txBody>
+      </p:sp>
+      <p:sp>
+        <p:nvSpPr>
+          <p:cNvPr id="12" name="TextBox 11"/>
+          <p:cNvSpPr txBox="1"/>
+          <p:nvPr/>
+        </p:nvSpPr>
+        <p:spPr>
+          <a:xfrm>
+            <a:off x="6355080" y="1600200"/>
+            <a:ext cx="4965192" cy="4224528"/>
+          </a:xfrm>
+          <a:prstGeom prst="rect">
+            <a:avLst/>
+          </a:prstGeom>
+          <a:noFill/>
+        </p:spPr>
+        <p:txBody>
+          <a:bodyPr wrap="square" lIns="0" tIns="0" rIns="0" bIns="0">
+            <a:spAutoFit/>
+          </a:bodyPr>
+          <a:lstStyle/>
+          <a:p>
+            <a:pPr>
+              <a:lnSpc>
+                <a:spcPct val="108000"/>
+              </a:lnSpc>
+              <a:spcAft>
+                <a:spcPts val="0"/>
+              </a:spcAft>
+              <a:defRPr sz="800">
+                <a:solidFill>
+                  <a:srgbClr val="FFFFFF"/>
+                </a:solidFill>
+                <a:latin typeface="Consolas"/>
+              </a:defRPr>
+            </a:pPr>
+            <a:r>
+              <a:t>Vivado Simulator v2025.1 - xelab &amp; xsim</a:t>
+            </a:r>
+          </a:p>
+          <a:p>
+            <a:pPr>
+              <a:lnSpc>
+                <a:spcPct val="108000"/>
+              </a:lnSpc>
+              <a:spcAft>
+                <a:spcPts val="0"/>
+              </a:spcAft>
+              <a:defRPr sz="800">
+                <a:solidFill>
+                  <a:srgbClr val="FFFFFF"/>
+                </a:solidFill>
+                <a:latin typeface="Consolas"/>
+              </a:defRPr>
+            </a:pPr>
+            <a:r>
+              <a:t>Analyzing Verilog file rtl/rdm6300_picorv32_soc.v</a:t>
+            </a:r>
+          </a:p>
+          <a:p>
+            <a:pPr>
+              <a:lnSpc>
+                <a:spcPct val="108000"/>
+              </a:lnSpc>
+              <a:spcAft>
+                <a:spcPts val="0"/>
+              </a:spcAft>
+              <a:defRPr sz="800">
+                <a:solidFill>
+                  <a:srgbClr val="FFFFFF"/>
+                </a:solidFill>
+                <a:latin typeface="Consolas"/>
+              </a:defRPr>
+            </a:pPr>
+            <a:r>
+              <a:t>Analyzing Verilog file tb/tb_uart_ping.v</a:t>
+            </a:r>
+          </a:p>
+          <a:p>
+            <a:pPr>
+              <a:lnSpc>
+                <a:spcPct val="108000"/>
+              </a:lnSpc>
+              <a:spcAft>
+                <a:spcPts val="0"/>
+              </a:spcAft>
+              <a:defRPr sz="800">
+                <a:solidFill>
+                  <a:srgbClr val="FFFFFF"/>
+                </a:solidFill>
+                <a:latin typeface="Consolas"/>
+              </a:defRPr>
+            </a:pPr>
+          </a:p>
+          <a:p>
+            <a:pPr>
+              <a:lnSpc>
+                <a:spcPct val="108000"/>
+              </a:lnSpc>
+              <a:spcAft>
+                <a:spcPts val="0"/>
+              </a:spcAft>
+              <a:defRPr sz="800" b="1">
+                <a:solidFill>
+                  <a:srgbClr val="0EA5E9"/>
+                </a:solidFill>
+                <a:latin typeface="Consolas"/>
+              </a:defRPr>
+            </a:pPr>
+            <a:r>
+              <a:t>[BOOT] Releasing CPU Reset...</a:t>
+            </a:r>
+          </a:p>
+          <a:p>
+            <a:pPr>
+              <a:lnSpc>
+                <a:spcPct val="108000"/>
+              </a:lnSpc>
+              <a:spcAft>
+                <a:spcPts val="0"/>
+              </a:spcAft>
+              <a:defRPr sz="800" b="1">
+                <a:solidFill>
+                  <a:srgbClr val="0EA5E9"/>
+                </a:solidFill>
+                <a:latin typeface="Consolas"/>
+              </a:defRPr>
+            </a:pPr>
+            <a:r>
+              <a:t>[BOOT] PicoRV32 woke up at 0x00250000 (Flash XIP)</a:t>
+            </a:r>
+          </a:p>
+          <a:p>
+            <a:pPr>
+              <a:lnSpc>
+                <a:spcPct val="108000"/>
+              </a:lnSpc>
+              <a:spcAft>
+                <a:spcPts val="0"/>
+              </a:spcAft>
+              <a:defRPr sz="800" b="1">
+                <a:solidFill>
+                  <a:srgbClr val="0EA5E9"/>
+                </a:solidFill>
+                <a:latin typeface="Consolas"/>
+              </a:defRPr>
+            </a:pPr>
+            <a:r>
+              <a:t>[EXEC] Loading instructions from firmware.hex...</a:t>
+            </a:r>
+          </a:p>
+          <a:p>
+            <a:pPr>
+              <a:lnSpc>
+                <a:spcPct val="108000"/>
+              </a:lnSpc>
+              <a:spcAft>
+                <a:spcPts val="0"/>
+              </a:spcAft>
+              <a:defRPr sz="800" b="1">
+                <a:solidFill>
+                  <a:srgbClr val="0EA5E9"/>
+                </a:solidFill>
+                <a:latin typeface="Consolas"/>
+              </a:defRPr>
+            </a:pPr>
+            <a:r>
+              <a:t>[UART] Detected Startup Banner:</a:t>
+            </a:r>
+          </a:p>
+          <a:p>
+            <a:pPr>
+              <a:lnSpc>
+                <a:spcPct val="108000"/>
+              </a:lnSpc>
+              <a:spcAft>
+                <a:spcPts val="0"/>
+              </a:spcAft>
+              <a:defRPr sz="800">
+                <a:solidFill>
+                  <a:srgbClr val="FFFFFF"/>
+                </a:solidFill>
+                <a:latin typeface="Consolas"/>
+              </a:defRPr>
+            </a:pPr>
+            <a:r>
+              <a:t>  ================================================</a:t>
+            </a:r>
+          </a:p>
+          <a:p>
+            <a:pPr>
+              <a:lnSpc>
+                <a:spcPct val="108000"/>
+              </a:lnSpc>
+              <a:spcAft>
+                <a:spcPts val="0"/>
+              </a:spcAft>
+              <a:defRPr sz="800">
+                <a:solidFill>
+                  <a:srgbClr val="FFFFFF"/>
+                </a:solidFill>
+                <a:latin typeface="Consolas"/>
+              </a:defRPr>
+            </a:pPr>
+            <a:r>
+              <a:t>    RDM6300 PICORV32 SOC ACCESS CONTROLLER READY  </a:t>
+            </a:r>
+          </a:p>
+          <a:p>
+            <a:pPr>
+              <a:lnSpc>
+                <a:spcPct val="108000"/>
+              </a:lnSpc>
+              <a:spcAft>
+                <a:spcPts val="0"/>
+              </a:spcAft>
+              <a:defRPr sz="800">
+                <a:solidFill>
+                  <a:srgbClr val="FFFFFF"/>
+                </a:solidFill>
+                <a:latin typeface="Consolas"/>
+              </a:defRPr>
+            </a:pPr>
+            <a:r>
+              <a:t>  ================================================</a:t>
+            </a:r>
+          </a:p>
+          <a:p>
+            <a:pPr>
+              <a:lnSpc>
+                <a:spcPct val="108000"/>
+              </a:lnSpc>
+              <a:spcAft>
+                <a:spcPts val="0"/>
+              </a:spcAft>
+              <a:defRPr sz="800" b="1">
+                <a:solidFill>
+                  <a:srgbClr val="0EA5E9"/>
+                </a:solidFill>
+                <a:latin typeface="Consolas"/>
+              </a:defRPr>
+            </a:pPr>
+            <a:r>
+              <a:t>[HOST] Sending Host Command: 'P' (Ping)...</a:t>
+            </a:r>
+          </a:p>
+          <a:p>
+            <a:pPr>
+              <a:lnSpc>
+                <a:spcPct val="108000"/>
+              </a:lnSpc>
+              <a:spcAft>
+                <a:spcPts val="0"/>
+              </a:spcAft>
+              <a:defRPr sz="800">
+                <a:solidFill>
+                  <a:srgbClr val="FFFFFF"/>
+                </a:solidFill>
+                <a:latin typeface="Consolas"/>
+              </a:defRPr>
+            </a:pPr>
+            <a:r>
+              <a:t>[RECV] CPU Response received via UART:</a:t>
+            </a:r>
+          </a:p>
+          <a:p>
+            <a:pPr>
+              <a:lnSpc>
+                <a:spcPct val="108000"/>
+              </a:lnSpc>
+              <a:spcAft>
+                <a:spcPts val="0"/>
+              </a:spcAft>
+              <a:defRPr sz="800">
+                <a:solidFill>
+                  <a:srgbClr val="FFFFFF"/>
+                </a:solidFill>
+                <a:latin typeface="Consolas"/>
+              </a:defRPr>
+            </a:pPr>
+            <a:r>
+              <a:t>  PONG: PicoRV32 Active</a:t>
+            </a:r>
+          </a:p>
+          <a:p>
+            <a:pPr>
+              <a:lnSpc>
+                <a:spcPct val="108000"/>
+              </a:lnSpc>
+              <a:spcAft>
+                <a:spcPts val="0"/>
+              </a:spcAft>
+              <a:defRPr sz="800">
+                <a:solidFill>
+                  <a:srgbClr val="FFFFFF"/>
+                </a:solidFill>
+                <a:latin typeface="Consolas"/>
+              </a:defRPr>
+            </a:pPr>
+            <a:r>
+              <a:t>[VERIFY] String matches expected response!</a:t>
+            </a:r>
+          </a:p>
+          <a:p>
+            <a:pPr>
+              <a:lnSpc>
+                <a:spcPct val="108000"/>
+              </a:lnSpc>
+              <a:spcAft>
+                <a:spcPts val="0"/>
+              </a:spcAft>
+              <a:defRPr sz="800">
+                <a:solidFill>
+                  <a:srgbClr val="FFFFFF"/>
+                </a:solidFill>
+                <a:latin typeface="Consolas"/>
+              </a:defRPr>
+            </a:pPr>
+            <a:r>
+              <a:t>[ASSERT] Checking cpu_trap signal...</a:t>
+            </a:r>
+          </a:p>
+          <a:p>
+            <a:pPr>
+              <a:lnSpc>
+                <a:spcPct val="108000"/>
+              </a:lnSpc>
+              <a:spcAft>
+                <a:spcPts val="0"/>
+              </a:spcAft>
+              <a:defRPr sz="800" b="1">
+                <a:solidFill>
+                  <a:srgbClr val="10B981"/>
+                </a:solidFill>
+                <a:latin typeface="Consolas"/>
+              </a:defRPr>
+            </a:pPr>
+            <a:r>
+              <a:t>  cpu_trap == 0 (CONFIRMED: ZERO CPU TRAPS!)</a:t>
+            </a:r>
           </a:p>
         </p:txBody>
       </p:sp>
@@ -14825,8 +15046,8 @@
         </p:nvSpPr>
         <p:spPr>
           <a:xfrm>
-            <a:off x="914400" y="3840480"/>
-            <a:ext cx="4754880" cy="1874520"/>
+            <a:off x="6355080" y="5788152"/>
+            <a:ext cx="4965192" cy="274320"/>
           </a:xfrm>
           <a:prstGeom prst="rect">
             <a:avLst/>
@@ -14834,157 +15055,13 @@
           <a:noFill/>
         </p:spPr>
         <p:txBody>
-          <a:bodyPr wrap="square">
+          <a:bodyPr wrap="none" lIns="0" tIns="0" rIns="0" bIns="0">
             <a:spAutoFit/>
           </a:bodyPr>
           <a:lstStyle/>
           <a:p>
             <a:pPr>
-              <a:spcAft>
-                <a:spcPts val="800"/>
-              </a:spcAft>
-              <a:defRPr sz="1250" b="1">
-                <a:solidFill>
-                  <a:srgbClr val="D97706"/>
-                </a:solidFill>
-                <a:latin typeface="Segoe UI"/>
-              </a:defRPr>
-            </a:pPr>
-            <a:r>
-              <a:t>KỊCH BẢN 3: ĐĂNG KÝ THẺ VÀO FLASH</a:t>
-            </a:r>
-          </a:p>
-          <a:p>
-            <a:pPr>
-              <a:lnSpc>
-                <a:spcPct val="115000"/>
-              </a:lnSpc>
-              <a:spcAft>
-                <a:spcPts val="400"/>
-              </a:spcAft>
-              <a:defRPr sz="1050">
-                <a:solidFill>
-                  <a:srgbClr val="0F172A"/>
-                </a:solidFill>
-                <a:latin typeface="Segoe UI"/>
-              </a:defRPr>
-            </a:pPr>
-            <a:r>
-              <a:t>• Thao tác: Chọn menu [2] nhập 10 số in trên thẻ (0007508976).</a:t>
-            </a:r>
-          </a:p>
-          <a:p>
-            <a:pPr>
-              <a:lnSpc>
-                <a:spcPct val="115000"/>
-              </a:lnSpc>
-              <a:spcAft>
-                <a:spcPts val="400"/>
-              </a:spcAft>
-              <a:defRPr sz="1050">
-                <a:solidFill>
-                  <a:srgbClr val="0F172A"/>
-                </a:solidFill>
-                <a:latin typeface="Segoe UI"/>
-              </a:defRPr>
-            </a:pPr>
-            <a:r>
-              <a:t>• Xử lý: CPU nạp flashio_worker vào SRAM ghi vào Sector 48.</a:t>
-            </a:r>
-          </a:p>
-          <a:p>
-            <a:pPr>
-              <a:lnSpc>
-                <a:spcPct val="115000"/>
-              </a:lnSpc>
-              <a:spcAft>
-                <a:spcPts val="400"/>
-              </a:spcAft>
-              <a:defRPr sz="1050">
-                <a:solidFill>
-                  <a:srgbClr val="0F172A"/>
-                </a:solidFill>
-                <a:latin typeface="Segoe UI"/>
-              </a:defRPr>
-            </a:pPr>
-            <a:r>
-              <a:t>• Kết quả: Lưu thành công tại Slot #0 (0x300000), nháy LED Flash.</a:t>
-            </a:r>
-          </a:p>
-        </p:txBody>
-      </p:sp>
-      <p:sp>
-        <p:nvSpPr>
-          <p:cNvPr id="14" name="Rounded Rectangle 13"/>
-          <p:cNvSpPr/>
-          <p:nvPr/>
-        </p:nvSpPr>
-        <p:spPr>
-          <a:xfrm>
-            <a:off x="6126480" y="3703320"/>
-            <a:ext cx="5120640" cy="2148840"/>
-          </a:xfrm>
-          <a:prstGeom prst="roundRect">
-            <a:avLst/>
-          </a:prstGeom>
-          <a:solidFill>
-            <a:srgbClr val="FFFFFF"/>
-          </a:solidFill>
-          <a:ln w="25400">
-            <a:solidFill>
-              <a:srgbClr val="10B981"/>
-            </a:solidFill>
-          </a:ln>
-        </p:spPr>
-        <p:style>
-          <a:lnRef idx="1">
-            <a:schemeClr val="accent1"/>
-          </a:lnRef>
-          <a:fillRef idx="3">
-            <a:schemeClr val="accent1"/>
-          </a:fillRef>
-          <a:effectRef idx="2">
-            <a:schemeClr val="accent1"/>
-          </a:effectRef>
-          <a:fontRef idx="minor">
-            <a:schemeClr val="lt1"/>
-          </a:fontRef>
-        </p:style>
-        <p:txBody>
-          <a:bodyPr rtlCol="0" anchor="ctr"/>
-          <a:lstStyle/>
-          <a:p>
-            <a:pPr algn="ctr"/>
-          </a:p>
-        </p:txBody>
-      </p:sp>
-      <p:sp>
-        <p:nvSpPr>
-          <p:cNvPr id="15" name="TextBox 14"/>
-          <p:cNvSpPr txBox="1"/>
-          <p:nvPr/>
-        </p:nvSpPr>
-        <p:spPr>
-          <a:xfrm>
-            <a:off x="6309360" y="3840480"/>
-            <a:ext cx="4754880" cy="1874520"/>
-          </a:xfrm>
-          <a:prstGeom prst="rect">
-            <a:avLst/>
-          </a:prstGeom>
-          <a:noFill/>
-        </p:spPr>
-        <p:txBody>
-          <a:bodyPr wrap="square">
-            <a:spAutoFit/>
-          </a:bodyPr>
-          <a:lstStyle/>
-          <a:p>
-            <a:pPr>
-              <a:spcAft>
-                <a:spcPts val="800"/>
-              </a:spcAft>
-              <a:defRPr sz="1250" b="1">
+              <a:defRPr sz="819" b="1">
                 <a:solidFill>
                   <a:srgbClr val="10B981"/>
                 </a:solidFill>
@@ -14992,64 +15069,7 @@
               </a:defRPr>
             </a:pPr>
             <a:r>
-              <a:t>KỊCH BẢN 4: QUẸT THẺ HỢP LỆ</a:t>
-            </a:r>
-          </a:p>
-          <a:p>
-            <a:pPr>
-              <a:lnSpc>
-                <a:spcPct val="115000"/>
-              </a:lnSpc>
-              <a:spcAft>
-                <a:spcPts val="400"/>
-              </a:spcAft>
-              <a:defRPr sz="1050">
-                <a:solidFill>
-                  <a:srgbClr val="0F172A"/>
-                </a:solidFill>
-                <a:latin typeface="Segoe UI"/>
-              </a:defRPr>
-            </a:pPr>
-            <a:r>
-              <a:t>• Thao tác: Quẹt lại thẻ 0007508976 lên đầu đọc RDM6300.</a:t>
-            </a:r>
-          </a:p>
-          <a:p>
-            <a:pPr>
-              <a:lnSpc>
-                <a:spcPct val="115000"/>
-              </a:lnSpc>
-              <a:spcAft>
-                <a:spcPts val="400"/>
-              </a:spcAft>
-              <a:defRPr sz="1050">
-                <a:solidFill>
-                  <a:srgbClr val="0F172A"/>
-                </a:solidFill>
-                <a:latin typeface="Segoe UI"/>
-              </a:defRPr>
-            </a:pPr>
-            <a:r>
-              <a:t>• Phản hồi: SoC tra cứu trúng Slot #0 -&gt; 'ACCESS:GRANTED'.</a:t>
-            </a:r>
-          </a:p>
-          <a:p>
-            <a:pPr>
-              <a:lnSpc>
-                <a:spcPct val="115000"/>
-              </a:lnSpc>
-              <a:spcAft>
-                <a:spcPts val="400"/>
-              </a:spcAft>
-              <a:defRPr sz="1050">
-                <a:solidFill>
-                  <a:srgbClr val="0F172A"/>
-                </a:solidFill>
-                <a:latin typeface="Segoe UI"/>
-              </a:defRPr>
-            </a:pPr>
-            <a:r>
-              <a:t>• Tác động: Bật sáng LED xanh mở cửa, ghi vết SUCC vào Flash Sector 49.</a:t>
+              <a:t>=== TOP SOC PING TESTBENCH: 100% PASS ===</a:t>
             </a:r>
           </a:p>
         </p:txBody>
@@ -15192,7 +15212,7 @@
               </a:defRPr>
             </a:pPr>
             <a:r>
-              <a:t>PHẦN 6: THIẾT KẾ VẬT LÝ ASIC</a:t>
+              <a:t>PHẦN 5: DEMO CHỨC NĂNG SẢN PHẨM</a:t>
             </a:r>
           </a:p>
           <a:p>
@@ -15205,7 +15225,7 @@
               </a:defRPr>
             </a:pPr>
             <a:r>
-              <a:t>Quy Trình Thiết Kế Vật Lý Vi Mạch RTL-to-GDSII Trên OpenLane 2</a:t>
+              <a:t>Danh Sách Thiết Bị &amp; Thiết Lập Kết Nối Phần Cứng FPGA Basys 3</a:t>
             </a:r>
           </a:p>
         </p:txBody>
@@ -15320,7 +15340,7 @@
               </a:defRPr>
             </a:pPr>
             <a:r>
-              <a:t>22 / 24</a:t>
+              <a:t>22 / 26</a:t>
             </a:r>
           </a:p>
         </p:txBody>
@@ -15334,17 +15354,19 @@
         <p:spPr>
           <a:xfrm>
             <a:off x="731520" y="1234440"/>
-            <a:ext cx="5212080" cy="4937760"/>
+            <a:ext cx="5257800" cy="5029200"/>
           </a:xfrm>
           <a:prstGeom prst="roundRect">
-            <a:avLst/>
+            <a:avLst>
+              <a:gd name="adj" fmla="val 2000"/>
+            </a:avLst>
           </a:prstGeom>
           <a:solidFill>
-            <a:srgbClr val="0B132B"/>
+            <a:srgbClr val="FFFFFF"/>
           </a:solidFill>
           <a:ln w="19050">
             <a:solidFill>
-              <a:srgbClr val="1C2541"/>
+              <a:srgbClr val="2563EB"/>
             </a:solidFill>
           </a:ln>
         </p:spPr>
@@ -15378,8 +15400,8 @@
         </p:nvSpPr>
         <p:spPr>
           <a:xfrm>
-            <a:off x="868680" y="1307592"/>
-            <a:ext cx="4937760" cy="292608"/>
+            <a:off x="868680" y="1371600"/>
+            <a:ext cx="4983480" cy="274320"/>
           </a:xfrm>
           <a:prstGeom prst="rect">
             <a:avLst/>
@@ -15392,328 +15414,44 @@
           </a:bodyPr>
           <a:lstStyle/>
           <a:p>
-            <a:pPr>
-              <a:defRPr sz="950" b="1">
-                <a:solidFill>
-                  <a:srgbClr val="0EA5E9"/>
-                </a:solidFill>
-                <a:latin typeface="Consolas"/>
-              </a:defRPr>
-            </a:pPr>
-            <a:r>
-              <a:t>&gt;_  Cấu hình config.json chính thức</a:t>
-            </a:r>
-          </a:p>
-        </p:txBody>
-      </p:sp>
-      <p:sp>
-        <p:nvSpPr>
-          <p:cNvPr id="10" name="TextBox 9"/>
-          <p:cNvSpPr txBox="1"/>
-          <p:nvPr/>
-        </p:nvSpPr>
-        <p:spPr>
-          <a:xfrm>
-            <a:off x="868680" y="1600200"/>
-            <a:ext cx="4937760" cy="4526280"/>
-          </a:xfrm>
-          <a:prstGeom prst="rect">
-            <a:avLst/>
-          </a:prstGeom>
-          <a:noFill/>
-        </p:spPr>
-        <p:txBody>
-          <a:bodyPr wrap="square" lIns="0" tIns="0" rIns="0" bIns="0">
-            <a:spAutoFit/>
-          </a:bodyPr>
-          <a:lstStyle/>
-          <a:p>
-            <a:pPr>
-              <a:lnSpc>
-                <a:spcPct val="108000"/>
-              </a:lnSpc>
-              <a:spcAft>
-                <a:spcPts val="0"/>
-              </a:spcAft>
-              <a:defRPr sz="800">
-                <a:solidFill>
-                  <a:srgbClr val="FFFFFF"/>
-                </a:solidFill>
-                <a:latin typeface="Consolas"/>
-              </a:defRPr>
-            </a:pPr>
-            <a:r>
-              <a:t>{</a:t>
-            </a:r>
-          </a:p>
-          <a:p>
-            <a:pPr>
-              <a:lnSpc>
-                <a:spcPct val="108000"/>
-              </a:lnSpc>
-              <a:spcAft>
-                <a:spcPts val="0"/>
-              </a:spcAft>
-              <a:defRPr sz="800">
-                <a:solidFill>
-                  <a:srgbClr val="FFFFFF"/>
-                </a:solidFill>
-                <a:latin typeface="Consolas"/>
-              </a:defRPr>
-            </a:pPr>
-            <a:r>
-              <a:t>  "DESIGN_NAME": "rdm6300_picorv32_soc",</a:t>
-            </a:r>
-          </a:p>
-          <a:p>
-            <a:pPr>
-              <a:lnSpc>
-                <a:spcPct val="108000"/>
-              </a:lnSpc>
-              <a:spcAft>
-                <a:spcPts val="0"/>
-              </a:spcAft>
-              <a:defRPr sz="800">
-                <a:solidFill>
-                  <a:srgbClr val="FFFFFF"/>
-                </a:solidFill>
-                <a:latin typeface="Consolas"/>
-              </a:defRPr>
-            </a:pPr>
-            <a:r>
-              <a:t>  "PDK": "sky130A",</a:t>
-            </a:r>
-          </a:p>
-          <a:p>
-            <a:pPr>
-              <a:lnSpc>
-                <a:spcPct val="108000"/>
-              </a:lnSpc>
-              <a:spcAft>
-                <a:spcPts val="0"/>
-              </a:spcAft>
-              <a:defRPr sz="800">
-                <a:solidFill>
-                  <a:srgbClr val="FFFFFF"/>
-                </a:solidFill>
-                <a:latin typeface="Consolas"/>
-              </a:defRPr>
-            </a:pPr>
-            <a:r>
-              <a:t>  "STD_CELL_LIBRARY": "sky130_fd_sc_hd",</a:t>
-            </a:r>
-          </a:p>
-          <a:p>
-            <a:pPr>
-              <a:lnSpc>
-                <a:spcPct val="108000"/>
-              </a:lnSpc>
-              <a:spcAft>
-                <a:spcPts val="0"/>
-              </a:spcAft>
-              <a:defRPr sz="800">
-                <a:solidFill>
-                  <a:srgbClr val="FFFFFF"/>
-                </a:solidFill>
-                <a:latin typeface="Consolas"/>
-              </a:defRPr>
-            </a:pPr>
-            <a:r>
-              <a:t>  "CLOCK_PORT": "clk",</a:t>
-            </a:r>
-          </a:p>
-          <a:p>
-            <a:pPr>
-              <a:lnSpc>
-                <a:spcPct val="108000"/>
-              </a:lnSpc>
-              <a:spcAft>
-                <a:spcPts val="0"/>
-              </a:spcAft>
-              <a:defRPr sz="800">
-                <a:solidFill>
-                  <a:srgbClr val="FFFFFF"/>
-                </a:solidFill>
-                <a:latin typeface="Consolas"/>
-              </a:defRPr>
-            </a:pPr>
-            <a:r>
-              <a:t>  "CLOCK_PERIOD": 20.0, // 50 MHz</a:t>
-            </a:r>
-          </a:p>
-          <a:p>
-            <a:pPr>
-              <a:lnSpc>
-                <a:spcPct val="108000"/>
-              </a:lnSpc>
-              <a:spcAft>
-                <a:spcPts val="0"/>
-              </a:spcAft>
-              <a:defRPr sz="800">
-                <a:solidFill>
-                  <a:srgbClr val="FFFFFF"/>
-                </a:solidFill>
-                <a:latin typeface="Consolas"/>
-              </a:defRPr>
-            </a:pPr>
-            <a:r>
-              <a:t>  "FP_CORE_UTIL": 26,   // 26% density</a:t>
-            </a:r>
-          </a:p>
-          <a:p>
-            <a:pPr>
-              <a:lnSpc>
-                <a:spcPct val="108000"/>
-              </a:lnSpc>
-              <a:spcAft>
-                <a:spcPts val="0"/>
-              </a:spcAft>
-              <a:defRPr sz="800">
-                <a:solidFill>
-                  <a:srgbClr val="FFFFFF"/>
-                </a:solidFill>
-                <a:latin typeface="Consolas"/>
-              </a:defRPr>
-            </a:pPr>
-            <a:r>
-              <a:t>  "MAX_FANOUT_CONSTRAINT": 12,</a:t>
-            </a:r>
-          </a:p>
-          <a:p>
-            <a:pPr>
-              <a:lnSpc>
-                <a:spcPct val="108000"/>
-              </a:lnSpc>
-              <a:spcAft>
-                <a:spcPts val="0"/>
-              </a:spcAft>
-              <a:defRPr sz="800">
-                <a:solidFill>
-                  <a:srgbClr val="FFFFFF"/>
-                </a:solidFill>
-                <a:latin typeface="Consolas"/>
-              </a:defRPr>
-            </a:pPr>
-            <a:r>
-              <a:t>  "PL_RESIZER_HOLD_SLACK_MARGIN": 0.6,</a:t>
-            </a:r>
-          </a:p>
-          <a:p>
-            <a:pPr>
-              <a:lnSpc>
-                <a:spcPct val="108000"/>
-              </a:lnSpc>
-              <a:spcAft>
-                <a:spcPts val="0"/>
-              </a:spcAft>
-              <a:defRPr sz="800">
-                <a:solidFill>
-                  <a:srgbClr val="FFFFFF"/>
-                </a:solidFill>
-                <a:latin typeface="Consolas"/>
-              </a:defRPr>
-            </a:pPr>
-            <a:r>
-              <a:t>  "RUN_HEURISTIC_DIODE_INSERTION": true,</a:t>
-            </a:r>
-          </a:p>
-          <a:p>
-            <a:pPr>
-              <a:lnSpc>
-                <a:spcPct val="108000"/>
-              </a:lnSpc>
-              <a:spcAft>
-                <a:spcPts val="0"/>
-              </a:spcAft>
-              <a:defRPr sz="800">
-                <a:solidFill>
-                  <a:srgbClr val="FFFFFF"/>
-                </a:solidFill>
-                <a:latin typeface="Consolas"/>
-              </a:defRPr>
-            </a:pPr>
-            <a:r>
-              <a:t>  "HEURISTIC_ANTENNA_THRESHOLD": 24,</a:t>
-            </a:r>
-          </a:p>
-          <a:p>
-            <a:pPr>
-              <a:lnSpc>
-                <a:spcPct val="108000"/>
-              </a:lnSpc>
-              <a:spcAft>
-                <a:spcPts val="0"/>
-              </a:spcAft>
-              <a:defRPr sz="800">
-                <a:solidFill>
-                  <a:srgbClr val="FFFFFF"/>
-                </a:solidFill>
-                <a:latin typeface="Consolas"/>
-              </a:defRPr>
-            </a:pPr>
-            <a:r>
-              <a:t>  "GRT_ANTENNA_ITERS": 35,</a:t>
-            </a:r>
-          </a:p>
-          <a:p>
-            <a:pPr>
-              <a:lnSpc>
-                <a:spcPct val="108000"/>
-              </a:lnSpc>
-              <a:spcAft>
-                <a:spcPts val="0"/>
-              </a:spcAft>
-              <a:defRPr sz="800">
-                <a:solidFill>
-                  <a:srgbClr val="FFFFFF"/>
-                </a:solidFill>
-                <a:latin typeface="Consolas"/>
-              </a:defRPr>
-            </a:pPr>
-            <a:r>
-              <a:t>  "RUN_ANTENNA_REPAIR": true,</a:t>
-            </a:r>
-          </a:p>
-          <a:p>
-            <a:pPr>
-              <a:lnSpc>
-                <a:spcPct val="108000"/>
-              </a:lnSpc>
-              <a:spcAft>
-                <a:spcPts val="0"/>
-              </a:spcAft>
-              <a:defRPr sz="800">
-                <a:solidFill>
-                  <a:srgbClr val="FFFFFF"/>
-                </a:solidFill>
-                <a:latin typeface="Consolas"/>
-              </a:defRPr>
-            </a:pPr>
-            <a:r>
-              <a:t>  "SYNTH_STRATEGY": "AREA 0"</a:t>
-            </a:r>
-          </a:p>
-          <a:p>
-            <a:pPr>
-              <a:lnSpc>
-                <a:spcPct val="108000"/>
-              </a:lnSpc>
-              <a:spcAft>
-                <a:spcPts val="0"/>
-              </a:spcAft>
-              <a:defRPr sz="800">
-                <a:solidFill>
-                  <a:srgbClr val="FFFFFF"/>
-                </a:solidFill>
-                <a:latin typeface="Consolas"/>
-              </a:defRPr>
-            </a:pPr>
-            <a:r>
-              <a:t>}</a:t>
-            </a:r>
-          </a:p>
-        </p:txBody>
-      </p:sp>
+            <a:pPr algn="ctr">
+              <a:defRPr sz="1100" b="1">
+                <a:solidFill>
+                  <a:srgbClr val="2563EB"/>
+                </a:solidFill>
+                <a:latin typeface="Segoe UI"/>
+              </a:defRPr>
+            </a:pPr>
+            <a:r>
+              <a:t>HỆ THỐNG THỰC NGHIỆM THỰC TẾ (DEVICE SETUP)</a:t>
+            </a:r>
+          </a:p>
+        </p:txBody>
+      </p:sp>
+      <p:pic>
+        <p:nvPicPr>
+          <p:cNvPr id="10" name="Picture 9" descr="Device.jpg"/>
+          <p:cNvPicPr>
+            <a:picLocks noChangeAspect="1"/>
+          </p:cNvPicPr>
+          <p:nvPr/>
+        </p:nvPicPr>
+        <p:blipFill>
+          <a:blip r:embed="rId2"/>
+          <a:stretch>
+            <a:fillRect/>
+          </a:stretch>
+        </p:blipFill>
+        <p:spPr>
+          <a:xfrm>
+            <a:off x="960120" y="1682496"/>
+            <a:ext cx="4800600" cy="3593592"/>
+          </a:xfrm>
+          <a:prstGeom prst="rect">
+            <a:avLst/>
+          </a:prstGeom>
+        </p:spPr>
+      </p:pic>
       <p:sp>
         <p:nvSpPr>
           <p:cNvPr id="11" name="Rounded Rectangle 10"/>
@@ -15722,18 +15460,20 @@
         </p:nvSpPr>
         <p:spPr>
           <a:xfrm>
-            <a:off x="6217920" y="1234440"/>
-            <a:ext cx="5239512" cy="4937760"/>
+            <a:off x="960120" y="5376672"/>
+            <a:ext cx="4800600" cy="749808"/>
           </a:xfrm>
           <a:prstGeom prst="roundRect">
-            <a:avLst/>
+            <a:avLst>
+              <a:gd name="adj" fmla="val 2000"/>
+            </a:avLst>
           </a:prstGeom>
           <a:solidFill>
-            <a:srgbClr val="FFFFFF"/>
+            <a:srgbClr val="F1F5F9"/>
           </a:solidFill>
-          <a:ln w="25400">
+          <a:ln w="12700">
             <a:solidFill>
-              <a:srgbClr val="E11D48"/>
+              <a:srgbClr val="CBD5E1"/>
             </a:solidFill>
           </a:ln>
         </p:spPr>
@@ -15767,8 +15507,8 @@
         </p:nvSpPr>
         <p:spPr>
           <a:xfrm>
-            <a:off x="6400800" y="1371600"/>
-            <a:ext cx="4873752" cy="4663440"/>
+            <a:off x="1078992" y="5413248"/>
+            <a:ext cx="4572000" cy="658368"/>
           </a:xfrm>
           <a:prstGeom prst="rect">
             <a:avLst/>
@@ -15776,16 +15516,293 @@
           <a:noFill/>
         </p:spPr>
         <p:txBody>
-          <a:bodyPr wrap="square">
+          <a:bodyPr wrap="square" lIns="0" tIns="0" rIns="0" bIns="0">
             <a:spAutoFit/>
           </a:bodyPr>
           <a:lstStyle/>
           <a:p>
             <a:pPr>
               <a:spcAft>
-                <a:spcPts val="1000"/>
-              </a:spcAft>
-              <a:defRPr sz="1300" b="1">
+                <a:spcPts val="200"/>
+              </a:spcAft>
+              <a:defRPr sz="819" b="1">
+                <a:solidFill>
+                  <a:srgbClr val="2563EB"/>
+                </a:solidFill>
+                <a:latin typeface="Segoe UI"/>
+              </a:defRPr>
+            </a:pPr>
+            <a:r>
+              <a:t>ĐIỂM NỔI BẬT TRONG THIẾT KẾ PHẦN CỨNG THỰC TẾ:</a:t>
+            </a:r>
+          </a:p>
+          <a:p>
+            <a:pPr>
+              <a:lnSpc>
+                <a:spcPct val="115000"/>
+              </a:lnSpc>
+              <a:defRPr sz="780">
+                <a:solidFill>
+                  <a:srgbClr val="0F172A"/>
+                </a:solidFill>
+                <a:latin typeface="Segoe UI"/>
+              </a:defRPr>
+            </a:pPr>
+            <a:r>
+              <a:t>• Mạch nguồn MB102 cấp riêng 5V DC cho RDM6300 (PMOD chỉ có 3.3V, chung mass GND).</a:t>
+            </a:r>
+            <a:br/>
+            <a:r>
+              <a:t>• Điện trở đệm 1kΩ mắc nối tiếp chân TX RDM6300 sang JA1 Basys 3 bảo vệ I/O 3.3V FPGA.</a:t>
+            </a:r>
+          </a:p>
+        </p:txBody>
+      </p:sp>
+      <p:sp>
+        <p:nvSpPr>
+          <p:cNvPr id="13" name="Rounded Rectangle 12"/>
+          <p:cNvSpPr/>
+          <p:nvPr/>
+        </p:nvSpPr>
+        <p:spPr>
+          <a:xfrm>
+            <a:off x="6172200" y="1234440"/>
+            <a:ext cx="5285232" cy="5029200"/>
+          </a:xfrm>
+          <a:prstGeom prst="roundRect">
+            <a:avLst>
+              <a:gd name="adj" fmla="val 2000"/>
+            </a:avLst>
+          </a:prstGeom>
+          <a:solidFill>
+            <a:srgbClr val="FFFFFF"/>
+          </a:solidFill>
+          <a:ln w="19050">
+            <a:solidFill>
+              <a:srgbClr val="2563EB"/>
+            </a:solidFill>
+          </a:ln>
+        </p:spPr>
+        <p:style>
+          <a:lnRef idx="1">
+            <a:schemeClr val="accent1"/>
+          </a:lnRef>
+          <a:fillRef idx="3">
+            <a:schemeClr val="accent1"/>
+          </a:fillRef>
+          <a:effectRef idx="2">
+            <a:schemeClr val="accent1"/>
+          </a:effectRef>
+          <a:fontRef idx="minor">
+            <a:schemeClr val="lt1"/>
+          </a:fontRef>
+        </p:style>
+        <p:txBody>
+          <a:bodyPr rtlCol="0" anchor="ctr"/>
+          <a:lstStyle/>
+          <a:p>
+            <a:pPr algn="ctr"/>
+          </a:p>
+        </p:txBody>
+      </p:sp>
+      <p:sp>
+        <p:nvSpPr>
+          <p:cNvPr id="14" name="TextBox 13"/>
+          <p:cNvSpPr txBox="1"/>
+          <p:nvPr/>
+        </p:nvSpPr>
+        <p:spPr>
+          <a:xfrm>
+            <a:off x="6446520" y="1371600"/>
+            <a:ext cx="4800600" cy="4754880"/>
+          </a:xfrm>
+          <a:prstGeom prst="rect">
+            <a:avLst/>
+          </a:prstGeom>
+          <a:noFill/>
+        </p:spPr>
+        <p:txBody>
+          <a:bodyPr wrap="square" lIns="0" tIns="0" rIns="0" bIns="0">
+            <a:spAutoFit/>
+          </a:bodyPr>
+          <a:lstStyle/>
+          <a:p>
+            <a:pPr>
+              <a:spcAft>
+                <a:spcPts val="400"/>
+              </a:spcAft>
+              <a:defRPr b="1" sz="1150">
+                <a:solidFill>
+                  <a:srgbClr val="2563EB"/>
+                </a:solidFill>
+                <a:latin typeface="Segoe UI"/>
+              </a:defRPr>
+            </a:pPr>
+            <a:r>
+              <a:t>DANH SÁCH THIẾT BỊ &amp; NGUYÊN LÝ PHỐI HỢP MỨC ĐIỆN ÁP</a:t>
+            </a:r>
+          </a:p>
+          <a:p>
+            <a:pPr>
+              <a:spcBef>
+                <a:spcPts val="300"/>
+              </a:spcBef>
+              <a:spcAft>
+                <a:spcPts val="100"/>
+              </a:spcAft>
+              <a:defRPr sz="880" b="1">
+                <a:solidFill>
+                  <a:srgbClr val="1C2541"/>
+                </a:solidFill>
+                <a:latin typeface="Segoe UI"/>
+              </a:defRPr>
+            </a:pPr>
+            <a:r>
+              <a:t>1. DANH SÁCH THIẾT BỊ THỰC NGHIỆM (BOM)</a:t>
+            </a:r>
+          </a:p>
+          <a:p>
+            <a:pPr>
+              <a:lnSpc>
+                <a:spcPct val="110000"/>
+              </a:lnSpc>
+              <a:spcAft>
+                <a:spcPts val="150"/>
+              </a:spcAft>
+              <a:defRPr sz="780">
+                <a:solidFill>
+                  <a:srgbClr val="0F172A"/>
+                </a:solidFill>
+                <a:latin typeface="Segoe UI"/>
+              </a:defRPr>
+            </a:pPr>
+            <a:r>
+              <a:t>• Bo mạch FPGA Digilent Basys 3: Xilinx Artix-7 XC7A35T, 32Mbit SPI Flash S25FL032P, mạch nạp &amp; UART FTDI qua cổng Micro-USB.</a:t>
+            </a:r>
+          </a:p>
+          <a:p>
+            <a:pPr>
+              <a:lnSpc>
+                <a:spcPct val="110000"/>
+              </a:lnSpc>
+              <a:spcAft>
+                <a:spcPts val="150"/>
+              </a:spcAft>
+              <a:defRPr sz="780">
+                <a:solidFill>
+                  <a:srgbClr val="0F172A"/>
+                </a:solidFill>
+                <a:latin typeface="Segoe UI"/>
+              </a:defRPr>
+            </a:pPr>
+            <a:r>
+              <a:t>• Module RFID RDM6300 (125 kHz): Giải mã thẻ EM4100, kèm cuộn cảm ăng-ten rời phát sóng điện từ 125 kHz.</a:t>
+            </a:r>
+          </a:p>
+          <a:p>
+            <a:pPr>
+              <a:lnSpc>
+                <a:spcPct val="110000"/>
+              </a:lnSpc>
+              <a:spcAft>
+                <a:spcPts val="150"/>
+              </a:spcAft>
+              <a:defRPr sz="780">
+                <a:solidFill>
+                  <a:srgbClr val="0F172A"/>
+                </a:solidFill>
+                <a:latin typeface="Segoe UI"/>
+              </a:defRPr>
+            </a:pPr>
+            <a:r>
+              <a:t>• Mạch nguồn 5V DC độc lập: Module nguồn Breadboard MB102 + Adapter DC ngoài cung cấp nguồn 5V ổn định cho RDM6300.</a:t>
+            </a:r>
+          </a:p>
+          <a:p>
+            <a:pPr>
+              <a:lnSpc>
+                <a:spcPct val="110000"/>
+              </a:lnSpc>
+              <a:spcAft>
+                <a:spcPts val="150"/>
+              </a:spcAft>
+              <a:defRPr sz="780">
+                <a:solidFill>
+                  <a:srgbClr val="0F172A"/>
+                </a:solidFill>
+                <a:latin typeface="Segoe UI"/>
+              </a:defRPr>
+            </a:pPr>
+            <a:r>
+              <a:t>• Điện trở bảo vệ 1kΩ &amp; Phụ kiện: Điện trở 1kΩ hạn dòng, Breadboard mini, tập dây nối cắm mạch và thẻ từ RFID 125 kHz mẫu.</a:t>
+            </a:r>
+          </a:p>
+          <a:p>
+            <a:pPr>
+              <a:spcBef>
+                <a:spcPts val="300"/>
+              </a:spcBef>
+              <a:spcAft>
+                <a:spcPts val="100"/>
+              </a:spcAft>
+              <a:defRPr sz="880" b="1">
+                <a:solidFill>
+                  <a:srgbClr val="D97706"/>
+                </a:solidFill>
+                <a:latin typeface="Segoe UI"/>
+              </a:defRPr>
+            </a:pPr>
+            <a:r>
+              <a:t>2. TẠI SAO CẦN MẠCH NGUỒN 5V RIÊNG CHO RDM6300?</a:t>
+            </a:r>
+          </a:p>
+          <a:p>
+            <a:pPr>
+              <a:lnSpc>
+                <a:spcPct val="110000"/>
+              </a:lnSpc>
+              <a:spcAft>
+                <a:spcPts val="150"/>
+              </a:spcAft>
+              <a:defRPr sz="780">
+                <a:solidFill>
+                  <a:srgbClr val="0F172A"/>
+                </a:solidFill>
+                <a:latin typeface="Segoe UI"/>
+              </a:defRPr>
+            </a:pPr>
+            <a:r>
+              <a:t>• PMOD Basys 3 chỉ cấp 3.3V: Không đủ điện áp để mạch dao động LC trên RDM6300 phát từ trường kích hoạt chip thẻ RFID (ở 3.3V module hoàn toàn không nhận diện được thẻ).</a:t>
+            </a:r>
+          </a:p>
+          <a:p>
+            <a:pPr>
+              <a:lnSpc>
+                <a:spcPct val="110000"/>
+              </a:lnSpc>
+              <a:spcAft>
+                <a:spcPts val="150"/>
+              </a:spcAft>
+              <a:defRPr sz="780">
+                <a:solidFill>
+                  <a:srgbClr val="0F172A"/>
+                </a:solidFill>
+                <a:latin typeface="Segoe UI"/>
+              </a:defRPr>
+            </a:pPr>
+            <a:r>
+              <a:t>• Giải pháp cấp nguồn 5V ngoài: Dùng module MB102 cấp đủ 5V/GND cho RDM6300; Nối chung mass (Common GND) giữa nguồn 5V và Basys 3 để đồng bộ mức tham chiếu logic.</a:t>
+            </a:r>
+          </a:p>
+          <a:p>
+            <a:pPr>
+              <a:spcBef>
+                <a:spcPts val="300"/>
+              </a:spcBef>
+              <a:spcAft>
+                <a:spcPts val="100"/>
+              </a:spcAft>
+              <a:defRPr sz="880" b="1">
                 <a:solidFill>
                   <a:srgbClr val="E11D48"/>
                 </a:solidFill>
@@ -15793,18 +15810,18 @@
               </a:defRPr>
             </a:pPr>
             <a:r>
-              <a:t>CÁC CHIẾN LƯỢC VẬT LÝ THEN CHỐT</a:t>
-            </a:r>
-          </a:p>
-          <a:p>
-            <a:pPr>
-              <a:lnSpc>
-                <a:spcPct val="115000"/>
-              </a:lnSpc>
-              <a:spcAft>
-                <a:spcPts val="800"/>
-              </a:spcAft>
-              <a:defRPr sz="1050">
+              <a:t>3. TẠI SAO CẦN ĐIỆN TRỞ 1KΩ TRÊN CHÂN TX NỐI BASYS 3?</a:t>
+            </a:r>
+          </a:p>
+          <a:p>
+            <a:pPr>
+              <a:lnSpc>
+                <a:spcPct val="110000"/>
+              </a:lnSpc>
+              <a:spcAft>
+                <a:spcPts val="150"/>
+              </a:spcAft>
+              <a:defRPr sz="780">
                 <a:solidFill>
                   <a:srgbClr val="0F172A"/>
                 </a:solidFill>
@@ -15812,18 +15829,18 @@
               </a:defRPr>
             </a:pPr>
             <a:r>
-              <a:t>• Mật độ diện tích lõi 26% (FP_CORE_UTIL): Khởi tạo mật độ cell 26%, để lại 74% diện tích cho các kênh định tuyến kim loại và chèn diode bảo vệ plasma.</a:t>
-            </a:r>
-          </a:p>
-          <a:p>
-            <a:pPr>
-              <a:lnSpc>
-                <a:spcPct val="115000"/>
-              </a:lnSpc>
-              <a:spcAft>
-                <a:spcPts val="800"/>
-              </a:spcAft>
-              <a:defRPr sz="1050">
+              <a:t>• Chênh lệch mức logic (5V TTL vs 3.3V LVCMOS): Chân TX của RDM6300 xuất tín hiệu UART ở mức 5V, trong khi chân I/O FPGA Artix-7 (PMOD JA1 - Pin J1) chỉ chấp nhận mức áp tối đa 3.3V.</a:t>
+            </a:r>
+          </a:p>
+          <a:p>
+            <a:pPr>
+              <a:lnSpc>
+                <a:spcPct val="110000"/>
+              </a:lnSpc>
+              <a:spcAft>
+                <a:spcPts val="150"/>
+              </a:spcAft>
+              <a:defRPr sz="780">
                 <a:solidFill>
                   <a:srgbClr val="0F172A"/>
                 </a:solidFill>
@@ -15831,18 +15848,37 @@
               </a:defRPr>
             </a:pPr>
             <a:r>
-              <a:t>• Ràng buộc xung nhịp 50 MHz (CLOCK_PERIOD = 20.0 ns): Ràng buộc định thời thống nhất từ khâu tổng hợp logic Yosys, xây dựng cây clock CTS tới khâu phân tích định thời tĩnh STA.</a:t>
-            </a:r>
-          </a:p>
-          <a:p>
-            <a:pPr>
-              <a:lnSpc>
-                <a:spcPct val="115000"/>
-              </a:lnSpc>
-              <a:spcAft>
-                <a:spcPts val="800"/>
-              </a:spcAft>
-              <a:defRPr sz="1050">
+              <a:t>• Bảo vệ chân I/O FPGA Artix-7: Điện trở 1kΩ mắc nối tiếp hạn chế dòng rò đưa vào diode kẹp (clamping diode) của FPGA &lt; 2mA, ngăn chặn quá áp/hỏng chip, giữ dạng sóng UART sắc nét.</a:t>
+            </a:r>
+          </a:p>
+          <a:p>
+            <a:pPr>
+              <a:spcBef>
+                <a:spcPts val="300"/>
+              </a:spcBef>
+              <a:spcAft>
+                <a:spcPts val="100"/>
+              </a:spcAft>
+              <a:defRPr sz="880" b="1">
+                <a:solidFill>
+                  <a:srgbClr val="10B981"/>
+                </a:solidFill>
+                <a:latin typeface="Segoe UI"/>
+              </a:defRPr>
+            </a:pPr>
+            <a:r>
+              <a:t>4. GIAO TIẾP HOST PC &amp; HIỂN THỊ TRỰC QUAN</a:t>
+            </a:r>
+          </a:p>
+          <a:p>
+            <a:pPr>
+              <a:lnSpc>
+                <a:spcPct val="110000"/>
+              </a:lnSpc>
+              <a:spcAft>
+                <a:spcPts val="150"/>
+              </a:spcAft>
+              <a:defRPr sz="780">
                 <a:solidFill>
                   <a:srgbClr val="0F172A"/>
                 </a:solidFill>
@@ -15850,26 +15886,7 @@
               </a:defRPr>
             </a:pPr>
             <a:r>
-              <a:t>• Chèn Diode phỏng đoán (HEURISTIC_ANTENNA_THRESHOLD = 24): Thuật toán tối ưu tự động chèn diode tiêu tán điện tích plasma khi tỷ lệ dây/cực cổng vượt ngưỡng 24, triệt tiêu 100% lỗi Antenna.</a:t>
-            </a:r>
-          </a:p>
-          <a:p>
-            <a:pPr>
-              <a:lnSpc>
-                <a:spcPct val="115000"/>
-              </a:lnSpc>
-              <a:spcAft>
-                <a:spcPts val="800"/>
-              </a:spcAft>
-              <a:defRPr sz="1050">
-                <a:solidFill>
-                  <a:srgbClr val="0F172A"/>
-                </a:solidFill>
-                <a:latin typeface="Segoe UI"/>
-              </a:defRPr>
-            </a:pPr>
-            <a:r>
-              <a:t>• Biên an toàn Hold Guard-band 0.60 ns: Đảm bảo bộ tối ưu hóa tế bào Resizer xử lý sạch sẽ các vi phạm chạy đua dữ liệu (Hold Violations) sau bước đi dây chi tiết.</a:t>
+              <a:t>• Cáp Micro-USB tiêu chuẩn: Vừa cấp nguồn Basys 3 vừa truyền thông với Host Console C qua UART FTDI (9600 bps); LED 7 đoạn hiển thị kết quả PASS/FAIL thời gian thực.</a:t>
             </a:r>
           </a:p>
         </p:txBody>
@@ -16012,7 +16029,7 @@
               </a:defRPr>
             </a:pPr>
             <a:r>
-              <a:t>PHẦN 6: THIẾT KẾ VẬT LÝ ASIC</a:t>
+              <a:t>PHẦN 5: DEMO CHỨC NĂNG SẢN PHẨM</a:t>
             </a:r>
           </a:p>
           <a:p>
@@ -16025,7 +16042,7 @@
               </a:defRPr>
             </a:pPr>
             <a:r>
-              <a:t>Bản Vẽ Layout OpenROAD &amp; Báo Cáo Ký Duyệt Sign-off Toàn Diện</a:t>
+              <a:t>Các Kịch Bản Thực Nghiệm &amp; Giao Diện Quản Trị Host Console</a:t>
             </a:r>
           </a:p>
         </p:txBody>
@@ -16140,7 +16157,7 @@
               </a:defRPr>
             </a:pPr>
             <a:r>
-              <a:t>23 / 24</a:t>
+              <a:t>23 / 26</a:t>
             </a:r>
           </a:p>
         </p:txBody>
@@ -16154,10 +16171,439 @@
         <p:spPr>
           <a:xfrm>
             <a:off x="731520" y="1234440"/>
-            <a:ext cx="5212080" cy="3931920"/>
+            <a:ext cx="5257800" cy="5029200"/>
           </a:xfrm>
           <a:prstGeom prst="roundRect">
-            <a:avLst/>
+            <a:avLst>
+              <a:gd name="adj" fmla="val 2000"/>
+            </a:avLst>
+          </a:prstGeom>
+          <a:solidFill>
+            <a:srgbClr val="0B132B"/>
+          </a:solidFill>
+          <a:ln w="19050">
+            <a:solidFill>
+              <a:srgbClr val="1C2541"/>
+            </a:solidFill>
+          </a:ln>
+        </p:spPr>
+        <p:style>
+          <a:lnRef idx="1">
+            <a:schemeClr val="accent1"/>
+          </a:lnRef>
+          <a:fillRef idx="3">
+            <a:schemeClr val="accent1"/>
+          </a:fillRef>
+          <a:effectRef idx="2">
+            <a:schemeClr val="accent1"/>
+          </a:effectRef>
+          <a:fontRef idx="minor">
+            <a:schemeClr val="lt1"/>
+          </a:fontRef>
+        </p:style>
+        <p:txBody>
+          <a:bodyPr rtlCol="0" anchor="ctr"/>
+          <a:lstStyle/>
+          <a:p>
+            <a:pPr algn="ctr"/>
+          </a:p>
+        </p:txBody>
+      </p:sp>
+      <p:sp>
+        <p:nvSpPr>
+          <p:cNvPr id="9" name="TextBox 8"/>
+          <p:cNvSpPr txBox="1"/>
+          <p:nvPr/>
+        </p:nvSpPr>
+        <p:spPr>
+          <a:xfrm>
+            <a:off x="868680" y="1307592"/>
+            <a:ext cx="4983480" cy="292608"/>
+          </a:xfrm>
+          <a:prstGeom prst="rect">
+            <a:avLst/>
+          </a:prstGeom>
+          <a:noFill/>
+        </p:spPr>
+        <p:txBody>
+          <a:bodyPr wrap="none" lIns="0" tIns="0" rIns="0" bIns="0">
+            <a:spAutoFit/>
+          </a:bodyPr>
+          <a:lstStyle/>
+          <a:p>
+            <a:pPr>
+              <a:defRPr sz="950" b="1">
+                <a:solidFill>
+                  <a:srgbClr val="0EA5E9"/>
+                </a:solidFill>
+                <a:latin typeface="Consolas"/>
+              </a:defRPr>
+            </a:pPr>
+            <a:r>
+              <a:t>&gt;_  Host Console C CLI (rdm6300_manager.exe)</a:t>
+            </a:r>
+          </a:p>
+        </p:txBody>
+      </p:sp>
+      <p:sp>
+        <p:nvSpPr>
+          <p:cNvPr id="10" name="TextBox 9"/>
+          <p:cNvSpPr txBox="1"/>
+          <p:nvPr/>
+        </p:nvSpPr>
+        <p:spPr>
+          <a:xfrm>
+            <a:off x="868680" y="1600200"/>
+            <a:ext cx="4983480" cy="4315968"/>
+          </a:xfrm>
+          <a:prstGeom prst="rect">
+            <a:avLst/>
+          </a:prstGeom>
+          <a:noFill/>
+        </p:spPr>
+        <p:txBody>
+          <a:bodyPr wrap="square" lIns="0" tIns="0" rIns="0" bIns="0">
+            <a:spAutoFit/>
+          </a:bodyPr>
+          <a:lstStyle/>
+          <a:p>
+            <a:pPr>
+              <a:lnSpc>
+                <a:spcPct val="118000"/>
+              </a:lnSpc>
+              <a:spcAft>
+                <a:spcPts val="0"/>
+              </a:spcAft>
+              <a:defRPr sz="880">
+                <a:solidFill>
+                  <a:srgbClr val="FFFFFF"/>
+                </a:solidFill>
+                <a:latin typeface="Consolas"/>
+              </a:defRPr>
+            </a:pPr>
+            <a:r>
+              <a:t>===========================================================</a:t>
+            </a:r>
+          </a:p>
+          <a:p>
+            <a:pPr>
+              <a:lnSpc>
+                <a:spcPct val="118000"/>
+              </a:lnSpc>
+              <a:spcAft>
+                <a:spcPts val="0"/>
+              </a:spcAft>
+              <a:defRPr sz="880">
+                <a:solidFill>
+                  <a:srgbClr val="FFFFFF"/>
+                </a:solidFill>
+                <a:latin typeface="Consolas"/>
+              </a:defRPr>
+            </a:pPr>
+            <a:r>
+              <a:t>    RDM6300 RFID - PICORV32 - BASYS 3 SPI FLASH MANAGER    </a:t>
+            </a:r>
+          </a:p>
+          <a:p>
+            <a:pPr>
+              <a:lnSpc>
+                <a:spcPct val="118000"/>
+              </a:lnSpc>
+              <a:spcAft>
+                <a:spcPts val="0"/>
+              </a:spcAft>
+              <a:defRPr sz="880">
+                <a:solidFill>
+                  <a:srgbClr val="FFFFFF"/>
+                </a:solidFill>
+                <a:latin typeface="Consolas"/>
+              </a:defRPr>
+            </a:pPr>
+            <a:r>
+              <a:t>===========================================================</a:t>
+            </a:r>
+          </a:p>
+          <a:p>
+            <a:pPr>
+              <a:lnSpc>
+                <a:spcPct val="118000"/>
+              </a:lnSpc>
+              <a:spcAft>
+                <a:spcPts val="0"/>
+              </a:spcAft>
+              <a:defRPr sz="880">
+                <a:solidFill>
+                  <a:srgbClr val="FFFFFF"/>
+                </a:solidFill>
+                <a:latin typeface="Consolas"/>
+              </a:defRPr>
+            </a:pPr>
+            <a:r>
+              <a:t>  [1]  Ping Hardware (Kiem tra ket noi PicoRV32)</a:t>
+            </a:r>
+          </a:p>
+          <a:p>
+            <a:pPr>
+              <a:lnSpc>
+                <a:spcPct val="118000"/>
+              </a:lnSpc>
+              <a:spcAft>
+                <a:spcPts val="0"/>
+              </a:spcAft>
+              <a:defRPr sz="880">
+                <a:solidFill>
+                  <a:srgbClr val="FFFFFF"/>
+                </a:solidFill>
+                <a:latin typeface="Consolas"/>
+              </a:defRPr>
+            </a:pPr>
+            <a:r>
+              <a:t>  [2]  Input &amp; Save New RFID Tag (Nhap 10 so in tren the)</a:t>
+            </a:r>
+          </a:p>
+          <a:p>
+            <a:pPr>
+              <a:lnSpc>
+                <a:spcPct val="118000"/>
+              </a:lnSpc>
+              <a:spcAft>
+                <a:spcPts val="0"/>
+              </a:spcAft>
+              <a:defRPr sz="880">
+                <a:solidFill>
+                  <a:srgbClr val="FFFFFF"/>
+                </a:solidFill>
+                <a:latin typeface="Consolas"/>
+              </a:defRPr>
+            </a:pPr>
+            <a:r>
+              <a:t>  [3]  Check RFID Tag in Flash (Kiem tra the da co chua)</a:t>
+            </a:r>
+          </a:p>
+          <a:p>
+            <a:pPr>
+              <a:lnSpc>
+                <a:spcPct val="118000"/>
+              </a:lnSpc>
+              <a:spcAft>
+                <a:spcPts val="0"/>
+              </a:spcAft>
+              <a:defRPr sz="880">
+                <a:solidFill>
+                  <a:srgbClr val="FFFFFF"/>
+                </a:solidFill>
+                <a:latin typeface="Consolas"/>
+              </a:defRPr>
+            </a:pPr>
+            <a:r>
+              <a:t>  [4]  Delete RFID Tag from Flash (Xoa the khoi Flash)</a:t>
+            </a:r>
+          </a:p>
+          <a:p>
+            <a:pPr>
+              <a:lnSpc>
+                <a:spcPct val="118000"/>
+              </a:lnSpc>
+              <a:spcAft>
+                <a:spcPts val="0"/>
+              </a:spcAft>
+              <a:defRPr sz="880">
+                <a:solidFill>
+                  <a:srgbClr val="FFFFFF"/>
+                </a:solidFill>
+                <a:latin typeface="Consolas"/>
+              </a:defRPr>
+            </a:pPr>
+            <a:r>
+              <a:t>  [5]  Virtual Scan (Quet the ao: Nhap 10 so tu ban phim)</a:t>
+            </a:r>
+          </a:p>
+          <a:p>
+            <a:pPr>
+              <a:lnSpc>
+                <a:spcPct val="118000"/>
+              </a:lnSpc>
+              <a:spcAft>
+                <a:spcPts val="0"/>
+              </a:spcAft>
+              <a:defRPr sz="880">
+                <a:solidFill>
+                  <a:srgbClr val="FFFFFF"/>
+                </a:solidFill>
+                <a:latin typeface="Consolas"/>
+              </a:defRPr>
+            </a:pPr>
+            <a:r>
+              <a:t>  [6]  View Access Logs (Xem 512 nhat ky tu Flash 0x310000)</a:t>
+            </a:r>
+          </a:p>
+          <a:p>
+            <a:pPr>
+              <a:lnSpc>
+                <a:spcPct val="118000"/>
+              </a:lnSpc>
+              <a:spcAft>
+                <a:spcPts val="0"/>
+              </a:spcAft>
+              <a:defRPr sz="880">
+                <a:solidFill>
+                  <a:srgbClr val="FFFFFF"/>
+                </a:solidFill>
+                <a:latin typeface="Consolas"/>
+              </a:defRPr>
+            </a:pPr>
+            <a:r>
+              <a:t>  [7]  Erase Access Logs (Backup CSV &amp; xoa nhat ky Flash)</a:t>
+            </a:r>
+          </a:p>
+          <a:p>
+            <a:pPr>
+              <a:lnSpc>
+                <a:spcPct val="118000"/>
+              </a:lnSpc>
+              <a:spcAft>
+                <a:spcPts val="0"/>
+              </a:spcAft>
+              <a:defRPr sz="880">
+                <a:solidFill>
+                  <a:srgbClr val="FFFFFF"/>
+                </a:solidFill>
+                <a:latin typeface="Consolas"/>
+              </a:defRPr>
+            </a:pPr>
+            <a:r>
+              <a:t>  [8]  Export RFID Tags to CSV (Xuat danh sach ra file CSV)</a:t>
+            </a:r>
+          </a:p>
+          <a:p>
+            <a:pPr>
+              <a:lnSpc>
+                <a:spcPct val="118000"/>
+              </a:lnSpc>
+              <a:spcAft>
+                <a:spcPts val="0"/>
+              </a:spcAft>
+              <a:defRPr sz="880">
+                <a:solidFill>
+                  <a:srgbClr val="FFFFFF"/>
+                </a:solidFill>
+                <a:latin typeface="Consolas"/>
+              </a:defRPr>
+            </a:pPr>
+            <a:r>
+              <a:t>  [9]  Import RFID Tags from CSV (Xoa &amp; nap the tu CSV)</a:t>
+            </a:r>
+          </a:p>
+          <a:p>
+            <a:pPr>
+              <a:lnSpc>
+                <a:spcPct val="118000"/>
+              </a:lnSpc>
+              <a:spcAft>
+                <a:spcPts val="0"/>
+              </a:spcAft>
+              <a:defRPr sz="880">
+                <a:solidFill>
+                  <a:srgbClr val="FFFFFF"/>
+                </a:solidFill>
+                <a:latin typeface="Consolas"/>
+              </a:defRPr>
+            </a:pPr>
+            <a:r>
+              <a:t>  [0]  Exit (Ngat ket noi UART va thoat chuong trinh)</a:t>
+            </a:r>
+          </a:p>
+          <a:p>
+            <a:pPr>
+              <a:lnSpc>
+                <a:spcPct val="118000"/>
+              </a:lnSpc>
+              <a:spcAft>
+                <a:spcPts val="0"/>
+              </a:spcAft>
+              <a:defRPr sz="880">
+                <a:solidFill>
+                  <a:srgbClr val="FFFFFF"/>
+                </a:solidFill>
+                <a:latin typeface="Consolas"/>
+              </a:defRPr>
+            </a:pPr>
+            <a:r>
+              <a:t>-----------------------------------------------------------</a:t>
+            </a:r>
+          </a:p>
+          <a:p>
+            <a:pPr>
+              <a:lnSpc>
+                <a:spcPct val="118000"/>
+              </a:lnSpc>
+              <a:spcAft>
+                <a:spcPts val="0"/>
+              </a:spcAft>
+              <a:defRPr sz="880">
+                <a:solidFill>
+                  <a:srgbClr val="FFFFFF"/>
+                </a:solidFill>
+                <a:latin typeface="Consolas"/>
+              </a:defRPr>
+            </a:pPr>
+            <a:r>
+              <a:t>Lua chon cua ban [0-9]: _</a:t>
+            </a:r>
+          </a:p>
+        </p:txBody>
+      </p:sp>
+      <p:sp>
+        <p:nvSpPr>
+          <p:cNvPr id="11" name="TextBox 10"/>
+          <p:cNvSpPr txBox="1"/>
+          <p:nvPr/>
+        </p:nvSpPr>
+        <p:spPr>
+          <a:xfrm>
+            <a:off x="868680" y="5879592"/>
+            <a:ext cx="4983480" cy="274320"/>
+          </a:xfrm>
+          <a:prstGeom prst="rect">
+            <a:avLst/>
+          </a:prstGeom>
+          <a:noFill/>
+        </p:spPr>
+        <p:txBody>
+          <a:bodyPr wrap="none" lIns="0" tIns="0" rIns="0" bIns="0">
+            <a:spAutoFit/>
+          </a:bodyPr>
+          <a:lstStyle/>
+          <a:p>
+            <a:pPr>
+              <a:defRPr sz="819" b="1">
+                <a:solidFill>
+                  <a:srgbClr val="10B981"/>
+                </a:solidFill>
+                <a:latin typeface="Segoe UI"/>
+              </a:defRPr>
+            </a:pPr>
+            <a:r>
+              <a:t>=== UART COM3 @ 9600 bps | 10 CHỨC NĂNG QUẢN TRỊ TOÀN DIỆN ===</a:t>
+            </a:r>
+          </a:p>
+        </p:txBody>
+      </p:sp>
+      <p:sp>
+        <p:nvSpPr>
+          <p:cNvPr id="12" name="Rounded Rectangle 11"/>
+          <p:cNvSpPr/>
+          <p:nvPr/>
+        </p:nvSpPr>
+        <p:spPr>
+          <a:xfrm>
+            <a:off x="6172200" y="1234440"/>
+            <a:ext cx="5285232" cy="5029200"/>
+          </a:xfrm>
+          <a:prstGeom prst="roundRect">
+            <a:avLst>
+              <a:gd name="adj" fmla="val 2000"/>
+            </a:avLst>
           </a:prstGeom>
           <a:solidFill>
             <a:srgbClr val="FFFFFF"/>
@@ -16190,144 +16636,6 @@
           </a:p>
         </p:txBody>
       </p:sp>
-      <p:pic>
-        <p:nvPicPr>
-          <p:cNvPr id="9" name="Picture 8" descr="OpenROAD.png"/>
-          <p:cNvPicPr>
-            <a:picLocks noChangeAspect="1"/>
-          </p:cNvPicPr>
-          <p:nvPr/>
-        </p:nvPicPr>
-        <p:blipFill>
-          <a:blip r:embed="rId2"/>
-          <a:stretch>
-            <a:fillRect/>
-          </a:stretch>
-        </p:blipFill>
-        <p:spPr>
-          <a:xfrm>
-            <a:off x="822960" y="1325880"/>
-            <a:ext cx="5029200" cy="3749039"/>
-          </a:xfrm>
-          <a:prstGeom prst="rect">
-            <a:avLst/>
-          </a:prstGeom>
-        </p:spPr>
-      </p:pic>
-      <p:sp>
-        <p:nvSpPr>
-          <p:cNvPr id="10" name="Rounded Rectangle 9"/>
-          <p:cNvSpPr/>
-          <p:nvPr/>
-        </p:nvSpPr>
-        <p:spPr>
-          <a:xfrm>
-            <a:off x="6217920" y="1234440"/>
-            <a:ext cx="5239512" cy="3931920"/>
-          </a:xfrm>
-          <a:prstGeom prst="roundRect">
-            <a:avLst/>
-          </a:prstGeom>
-          <a:solidFill>
-            <a:srgbClr val="FFFFFF"/>
-          </a:solidFill>
-          <a:ln w="19050">
-            <a:solidFill>
-              <a:srgbClr val="10B981"/>
-            </a:solidFill>
-          </a:ln>
-        </p:spPr>
-        <p:style>
-          <a:lnRef idx="1">
-            <a:schemeClr val="accent1"/>
-          </a:lnRef>
-          <a:fillRef idx="3">
-            <a:schemeClr val="accent1"/>
-          </a:fillRef>
-          <a:effectRef idx="2">
-            <a:schemeClr val="accent1"/>
-          </a:effectRef>
-          <a:fontRef idx="minor">
-            <a:schemeClr val="lt1"/>
-          </a:fontRef>
-        </p:style>
-        <p:txBody>
-          <a:bodyPr rtlCol="0" anchor="ctr"/>
-          <a:lstStyle/>
-          <a:p>
-            <a:pPr algn="ctr"/>
-          </a:p>
-        </p:txBody>
-      </p:sp>
-      <p:pic>
-        <p:nvPicPr>
-          <p:cNvPr id="11" name="Picture 10" descr="AntennaLvsDrc.png"/>
-          <p:cNvPicPr>
-            <a:picLocks noChangeAspect="1"/>
-          </p:cNvPicPr>
-          <p:nvPr/>
-        </p:nvPicPr>
-        <p:blipFill>
-          <a:blip r:embed="rId3"/>
-          <a:stretch>
-            <a:fillRect/>
-          </a:stretch>
-        </p:blipFill>
-        <p:spPr>
-          <a:xfrm>
-            <a:off x="6309360" y="1325880"/>
-            <a:ext cx="5056632" cy="3749039"/>
-          </a:xfrm>
-          <a:prstGeom prst="rect">
-            <a:avLst/>
-          </a:prstGeom>
-        </p:spPr>
-      </p:pic>
-      <p:sp>
-        <p:nvSpPr>
-          <p:cNvPr id="12" name="Rounded Rectangle 11"/>
-          <p:cNvSpPr/>
-          <p:nvPr/>
-        </p:nvSpPr>
-        <p:spPr>
-          <a:xfrm>
-            <a:off x="731520" y="5303520"/>
-            <a:ext cx="10728655" cy="960120"/>
-          </a:xfrm>
-          <a:prstGeom prst="roundRect">
-            <a:avLst/>
-          </a:prstGeom>
-          <a:solidFill>
-            <a:srgbClr val="FFFFFF"/>
-          </a:solidFill>
-          <a:ln w="19050">
-            <a:solidFill>
-              <a:srgbClr val="CBD5E1"/>
-            </a:solidFill>
-          </a:ln>
-        </p:spPr>
-        <p:style>
-          <a:lnRef idx="1">
-            <a:schemeClr val="accent1"/>
-          </a:lnRef>
-          <a:fillRef idx="3">
-            <a:schemeClr val="accent1"/>
-          </a:fillRef>
-          <a:effectRef idx="2">
-            <a:schemeClr val="accent1"/>
-          </a:effectRef>
-          <a:fontRef idx="minor">
-            <a:schemeClr val="lt1"/>
-          </a:fontRef>
-        </p:style>
-        <p:txBody>
-          <a:bodyPr rtlCol="0" anchor="ctr"/>
-          <a:lstStyle/>
-          <a:p>
-            <a:pPr algn="ctr"/>
-          </a:p>
-        </p:txBody>
-      </p:sp>
       <p:sp>
         <p:nvSpPr>
           <p:cNvPr id="13" name="TextBox 12"/>
@@ -16336,8 +16644,8 @@
         </p:nvSpPr>
         <p:spPr>
           <a:xfrm>
-            <a:off x="868680" y="5349240"/>
-            <a:ext cx="10424160" cy="868680"/>
+            <a:off x="6446520" y="1371600"/>
+            <a:ext cx="4800600" cy="4754880"/>
           </a:xfrm>
           <a:prstGeom prst="rect">
             <a:avLst/>
@@ -16345,16 +16653,206 @@
           <a:noFill/>
         </p:spPr>
         <p:txBody>
-          <a:bodyPr wrap="square">
+          <a:bodyPr wrap="square" lIns="0" tIns="0" rIns="0" bIns="0">
             <a:spAutoFit/>
           </a:bodyPr>
           <a:lstStyle/>
           <a:p>
             <a:pPr>
               <a:spcAft>
-                <a:spcPts val="200"/>
-              </a:spcAft>
-              <a:defRPr sz="1100" b="1">
+                <a:spcPts val="400"/>
+              </a:spcAft>
+              <a:defRPr b="1" sz="1150">
+                <a:solidFill>
+                  <a:srgbClr val="2563EB"/>
+                </a:solidFill>
+                <a:latin typeface="Segoe UI"/>
+              </a:defRPr>
+            </a:pPr>
+            <a:r>
+              <a:t>ĐÁNH GIÁ &amp; NHẬN XÉT CÁC CHỨC NĂNG THỰC NGHIỆM</a:t>
+            </a:r>
+          </a:p>
+          <a:p>
+            <a:pPr>
+              <a:spcBef>
+                <a:spcPts val="300"/>
+              </a:spcBef>
+              <a:spcAft>
+                <a:spcPts val="100"/>
+              </a:spcAft>
+              <a:defRPr sz="880" b="1">
+                <a:solidFill>
+                  <a:srgbClr val="2563EB"/>
+                </a:solidFill>
+                <a:latin typeface="Segoe UI"/>
+              </a:defRPr>
+            </a:pPr>
+            <a:r>
+              <a:t>1. NHÓM KIỂM THỬ KẾT NỐI &amp; GIÁM SÁT [MENU 1, 5]</a:t>
+            </a:r>
+          </a:p>
+          <a:p>
+            <a:pPr>
+              <a:lnSpc>
+                <a:spcPct val="110000"/>
+              </a:lnSpc>
+              <a:spcAft>
+                <a:spcPts val="150"/>
+              </a:spcAft>
+              <a:defRPr sz="780">
+                <a:solidFill>
+                  <a:srgbClr val="0F172A"/>
+                </a:solidFill>
+                <a:latin typeface="Segoe UI"/>
+              </a:defRPr>
+            </a:pPr>
+            <a:r>
+              <a:t>• Menu [1] Ping Hardware: Kiểm tra độ trễ phản hồi tức thì qua UART, xác nhận CPU PicoRV32, cầu bus interconnect và UART FIFO 32B hoạt động thông suốt không nghẽn bus.</a:t>
+            </a:r>
+          </a:p>
+          <a:p>
+            <a:pPr>
+              <a:lnSpc>
+                <a:spcPct val="110000"/>
+              </a:lnSpc>
+              <a:spcAft>
+                <a:spcPts val="150"/>
+              </a:spcAft>
+              <a:defRPr sz="780">
+                <a:solidFill>
+                  <a:srgbClr val="0F172A"/>
+                </a:solidFill>
+                <a:latin typeface="Segoe UI"/>
+              </a:defRPr>
+            </a:pPr>
+            <a:r>
+              <a:t>• Menu [5] Virtual Scan: Giả lập quẹt thẻ từ xa qua bàn phím mà không cần đưa thẻ vật lý vào đầu đọc, phục vụ kiểm thử đơn vị (Unit Test) logic phân quyền.</a:t>
+            </a:r>
+          </a:p>
+          <a:p>
+            <a:pPr>
+              <a:spcBef>
+                <a:spcPts val="300"/>
+              </a:spcBef>
+              <a:spcAft>
+                <a:spcPts val="100"/>
+              </a:spcAft>
+              <a:defRPr sz="880" b="1">
+                <a:solidFill>
+                  <a:srgbClr val="D97706"/>
+                </a:solidFill>
+                <a:latin typeface="Segoe UI"/>
+              </a:defRPr>
+            </a:pPr>
+            <a:r>
+              <a:t>2. NHÓM QUẢN TRỊ WHITELIST THẺ [MENU 2, 3, 4]</a:t>
+            </a:r>
+          </a:p>
+          <a:p>
+            <a:pPr>
+              <a:lnSpc>
+                <a:spcPct val="110000"/>
+              </a:lnSpc>
+              <a:spcAft>
+                <a:spcPts val="150"/>
+              </a:spcAft>
+              <a:defRPr sz="780">
+                <a:solidFill>
+                  <a:srgbClr val="0F172A"/>
+                </a:solidFill>
+                <a:latin typeface="Segoe UI"/>
+              </a:defRPr>
+            </a:pPr>
+            <a:r>
+              <a:t>• Menu [2] &amp; [4] Thêm/Xóa Thẻ: Thao tác an toàn trên Flash Sector 48 (0x300000) bằng cơ chế In-SRAM Execution (flashio_worker), bảo đảm không gây treo bus XIP.</a:t>
+            </a:r>
+          </a:p>
+          <a:p>
+            <a:pPr>
+              <a:lnSpc>
+                <a:spcPct val="110000"/>
+              </a:lnSpc>
+              <a:spcAft>
+                <a:spcPts val="150"/>
+              </a:spcAft>
+              <a:defRPr sz="780">
+                <a:solidFill>
+                  <a:srgbClr val="0F172A"/>
+                </a:solidFill>
+                <a:latin typeface="Segoe UI"/>
+              </a:defRPr>
+            </a:pPr>
+            <a:r>
+              <a:t>• Menu [3] Tra Cứu Thẻ: Đọc trực tiếp từ Flash qua XIP với thuật toán dừng sớm (Early Termination), độ trễ xác thực siêu nhỏ (&lt; 10 µs).</a:t>
+            </a:r>
+          </a:p>
+          <a:p>
+            <a:pPr>
+              <a:spcBef>
+                <a:spcPts val="300"/>
+              </a:spcBef>
+              <a:spcAft>
+                <a:spcPts val="100"/>
+              </a:spcAft>
+              <a:defRPr sz="880" b="1">
+                <a:solidFill>
+                  <a:srgbClr val="E11D48"/>
+                </a:solidFill>
+                <a:latin typeface="Segoe UI"/>
+              </a:defRPr>
+            </a:pPr>
+            <a:r>
+              <a:t>3. NHÓM KIỂM TOÁN AN NINH &amp; NHẬT KÝ [MENU 6, 7]</a:t>
+            </a:r>
+          </a:p>
+          <a:p>
+            <a:pPr>
+              <a:lnSpc>
+                <a:spcPct val="110000"/>
+              </a:lnSpc>
+              <a:spcAft>
+                <a:spcPts val="150"/>
+              </a:spcAft>
+              <a:defRPr sz="780">
+                <a:solidFill>
+                  <a:srgbClr val="0F172A"/>
+                </a:solidFill>
+                <a:latin typeface="Segoe UI"/>
+              </a:defRPr>
+            </a:pPr>
+            <a:r>
+              <a:t>• Menu [6] Đọc Access Logs: Đọc và giải mã 512 bản ghi từ Sector 49 (0x310000), hiển thị rõ ràng kết quả PASS/FAIL, UID thẻ và số thứ tự sự kiện.</a:t>
+            </a:r>
+          </a:p>
+          <a:p>
+            <a:pPr>
+              <a:lnSpc>
+                <a:spcPct val="110000"/>
+              </a:lnSpc>
+              <a:spcAft>
+                <a:spcPts val="150"/>
+              </a:spcAft>
+              <a:defRPr sz="780">
+                <a:solidFill>
+                  <a:srgbClr val="0F172A"/>
+                </a:solidFill>
+                <a:latin typeface="Segoe UI"/>
+              </a:defRPr>
+            </a:pPr>
+            <a:r>
+              <a:t>• Menu [7] Xóa Log An Toàn: Tự động sao lưu toàn bộ nhật ký ra file CSV trước khi xóa Sector, đảm bảo không mất mát dữ liệu kiểm toán.</a:t>
+            </a:r>
+          </a:p>
+          <a:p>
+            <a:pPr>
+              <a:spcBef>
+                <a:spcPts val="300"/>
+              </a:spcBef>
+              <a:spcAft>
+                <a:spcPts val="100"/>
+              </a:spcAft>
+              <a:defRPr sz="880" b="1">
                 <a:solidFill>
                   <a:srgbClr val="10B981"/>
                 </a:solidFill>
@@ -16362,12 +16860,18 @@
               </a:defRPr>
             </a:pPr>
             <a:r>
-              <a:t>KẾT QUẢ KÝ DUYỆT TAPE-OUT READY: 0 ANTENNA | 0 LVS | 0 DRC | MET TIMING 50 MHZ</a:t>
-            </a:r>
-          </a:p>
-          <a:p>
-            <a:pPr>
-              <a:defRPr sz="950">
+              <a:t>4. NHÓM ĐỒNG BỘ DỮ LIỆU NGOẠI TUYẾN [MENU 8, 9]</a:t>
+            </a:r>
+          </a:p>
+          <a:p>
+            <a:pPr>
+              <a:lnSpc>
+                <a:spcPct val="110000"/>
+              </a:lnSpc>
+              <a:spcAft>
+                <a:spcPts val="150"/>
+              </a:spcAft>
+              <a:defRPr sz="780">
                 <a:solidFill>
                   <a:srgbClr val="0F172A"/>
                 </a:solidFill>
@@ -16375,11 +16879,7 @@
               </a:defRPr>
             </a:pPr>
             <a:r>
-              <a:t>• Bố cục vật lý: Lưới nguồn PDN met4/met5 dày đặc, phân bổ 31 chân pad đối xứng trên 4 cạnh die, độ sụt áp IR drop &lt; 1.5% an toàn.</a:t>
-            </a:r>
-            <a:br/>
-            <a:r>
-              <a:t>• Định thời &amp; Ký duyệt: WNS &gt;= 0.00 ns tại 50 MHz trên cả 9 góc đo công nghệ từ -40°C đến 100°C; Netgen xác nhận 100% khớp netlist RTL.</a:t>
+              <a:t>• Menu [8] &amp; [9] Export/Import CSV: Sao lưu và phục hồi danh sách 4,096 thẻ nhanh chóng qua cổng UART, rất tiện lợi khi cấu hình hàng loạt cho nhiều trạm kiểm soát.</a:t>
             </a:r>
           </a:p>
         </p:txBody>
@@ -16417,6 +16917,1346 @@
             <a:avLst/>
           </a:prstGeom>
           <a:solidFill>
+            <a:srgbClr val="F8FAFC"/>
+          </a:solidFill>
+          <a:ln>
+            <a:noFill/>
+          </a:ln>
+        </p:spPr>
+        <p:style>
+          <a:lnRef idx="1">
+            <a:schemeClr val="accent1"/>
+          </a:lnRef>
+          <a:fillRef idx="3">
+            <a:schemeClr val="accent1"/>
+          </a:fillRef>
+          <a:effectRef idx="2">
+            <a:schemeClr val="accent1"/>
+          </a:effectRef>
+          <a:fontRef idx="minor">
+            <a:schemeClr val="lt1"/>
+          </a:fontRef>
+        </p:style>
+        <p:txBody>
+          <a:bodyPr rtlCol="0" anchor="ctr"/>
+          <a:lstStyle/>
+          <a:p>
+            <a:pPr algn="ctr"/>
+          </a:p>
+        </p:txBody>
+      </p:sp>
+      <p:sp>
+        <p:nvSpPr>
+          <p:cNvPr id="3" name="Rectangle 2"/>
+          <p:cNvSpPr/>
+          <p:nvPr/>
+        </p:nvSpPr>
+        <p:spPr>
+          <a:xfrm>
+            <a:off x="0" y="0"/>
+            <a:ext cx="12191695" cy="91440"/>
+          </a:xfrm>
+          <a:prstGeom prst="rect">
+            <a:avLst/>
+          </a:prstGeom>
+          <a:solidFill>
+            <a:srgbClr val="2563EB"/>
+          </a:solidFill>
+          <a:ln>
+            <a:noFill/>
+          </a:ln>
+        </p:spPr>
+        <p:style>
+          <a:lnRef idx="1">
+            <a:schemeClr val="accent1"/>
+          </a:lnRef>
+          <a:fillRef idx="3">
+            <a:schemeClr val="accent1"/>
+          </a:fillRef>
+          <a:effectRef idx="2">
+            <a:schemeClr val="accent1"/>
+          </a:effectRef>
+          <a:fontRef idx="minor">
+            <a:schemeClr val="lt1"/>
+          </a:fontRef>
+        </p:style>
+        <p:txBody>
+          <a:bodyPr rtlCol="0" anchor="ctr"/>
+          <a:lstStyle/>
+          <a:p>
+            <a:pPr algn="ctr"/>
+          </a:p>
+        </p:txBody>
+      </p:sp>
+      <p:sp>
+        <p:nvSpPr>
+          <p:cNvPr id="4" name="TextBox 3"/>
+          <p:cNvSpPr txBox="1"/>
+          <p:nvPr/>
+        </p:nvSpPr>
+        <p:spPr>
+          <a:xfrm>
+            <a:off x="731520" y="201168"/>
+            <a:ext cx="10728655" cy="868680"/>
+          </a:xfrm>
+          <a:prstGeom prst="rect">
+            <a:avLst/>
+          </a:prstGeom>
+          <a:noFill/>
+        </p:spPr>
+        <p:txBody>
+          <a:bodyPr wrap="square" lIns="0" tIns="0" rIns="0" bIns="0">
+            <a:spAutoFit/>
+          </a:bodyPr>
+          <a:lstStyle/>
+          <a:p>
+            <a:pPr>
+              <a:spcAft>
+                <a:spcPts val="200"/>
+              </a:spcAft>
+              <a:defRPr sz="1050" b="1">
+                <a:solidFill>
+                  <a:srgbClr val="2563EB"/>
+                </a:solidFill>
+                <a:latin typeface="Segoe UI"/>
+              </a:defRPr>
+            </a:pPr>
+            <a:r>
+              <a:t>PHẦN 6: THIẾT KẾ VẬT LÝ ASIC</a:t>
+            </a:r>
+          </a:p>
+          <a:p>
+            <a:pPr>
+              <a:defRPr sz="1700" b="1">
+                <a:solidFill>
+                  <a:srgbClr val="0F172A"/>
+                </a:solidFill>
+                <a:latin typeface="Segoe UI"/>
+              </a:defRPr>
+            </a:pPr>
+            <a:r>
+              <a:t>Quy Trình Thiết Kế Vật Lý Vi Mạch RTL-to-GDSII Trên OpenLane 2</a:t>
+            </a:r>
+          </a:p>
+        </p:txBody>
+      </p:sp>
+      <p:sp>
+        <p:nvSpPr>
+          <p:cNvPr id="5" name="Rectangle 4"/>
+          <p:cNvSpPr/>
+          <p:nvPr/>
+        </p:nvSpPr>
+        <p:spPr>
+          <a:xfrm>
+            <a:off x="731520" y="6446520"/>
+            <a:ext cx="10728655" cy="18288"/>
+          </a:xfrm>
+          <a:prstGeom prst="rect">
+            <a:avLst/>
+          </a:prstGeom>
+          <a:solidFill>
+            <a:srgbClr val="E2E8F0"/>
+          </a:solidFill>
+          <a:ln>
+            <a:noFill/>
+          </a:ln>
+        </p:spPr>
+        <p:style>
+          <a:lnRef idx="1">
+            <a:schemeClr val="accent1"/>
+          </a:lnRef>
+          <a:fillRef idx="3">
+            <a:schemeClr val="accent1"/>
+          </a:fillRef>
+          <a:effectRef idx="2">
+            <a:schemeClr val="accent1"/>
+          </a:effectRef>
+          <a:fontRef idx="minor">
+            <a:schemeClr val="lt1"/>
+          </a:fontRef>
+        </p:style>
+        <p:txBody>
+          <a:bodyPr rtlCol="0" anchor="ctr"/>
+          <a:lstStyle/>
+          <a:p>
+            <a:pPr algn="ctr"/>
+          </a:p>
+        </p:txBody>
+      </p:sp>
+      <p:sp>
+        <p:nvSpPr>
+          <p:cNvPr id="6" name="TextBox 5"/>
+          <p:cNvSpPr txBox="1"/>
+          <p:nvPr/>
+        </p:nvSpPr>
+        <p:spPr>
+          <a:xfrm>
+            <a:off x="731520" y="6492240"/>
+            <a:ext cx="7315200" cy="274320"/>
+          </a:xfrm>
+          <a:prstGeom prst="rect">
+            <a:avLst/>
+          </a:prstGeom>
+          <a:noFill/>
+        </p:spPr>
+        <p:txBody>
+          <a:bodyPr wrap="none" lIns="0" tIns="0" rIns="0" bIns="0">
+            <a:spAutoFit/>
+          </a:bodyPr>
+          <a:lstStyle/>
+          <a:p>
+            <a:pPr>
+              <a:defRPr sz="950">
+                <a:solidFill>
+                  <a:srgbClr val="475569"/>
+                </a:solidFill>
+                <a:latin typeface="Segoe UI"/>
+              </a:defRPr>
+            </a:pPr>
+            <a:r>
+              <a:t>Đồ Án Tốt Nghiệp: SoC PicoRV32 RFID RDM6300 &amp; SPI Flash | SV: Thái Tuấn Hiệp | GVHD: ThS. Nguyễn Văn Đông</a:t>
+            </a:r>
+          </a:p>
+        </p:txBody>
+      </p:sp>
+      <p:sp>
+        <p:nvSpPr>
+          <p:cNvPr id="7" name="TextBox 6"/>
+          <p:cNvSpPr txBox="1"/>
+          <p:nvPr/>
+        </p:nvSpPr>
+        <p:spPr>
+          <a:xfrm>
+            <a:off x="10058400" y="6492240"/>
+            <a:ext cx="1401775" cy="274320"/>
+          </a:xfrm>
+          <a:prstGeom prst="rect">
+            <a:avLst/>
+          </a:prstGeom>
+          <a:noFill/>
+        </p:spPr>
+        <p:txBody>
+          <a:bodyPr wrap="none" lIns="0" tIns="0" rIns="0" bIns="0">
+            <a:spAutoFit/>
+          </a:bodyPr>
+          <a:lstStyle/>
+          <a:p>
+            <a:pPr algn="r">
+              <a:defRPr sz="950" b="1">
+                <a:solidFill>
+                  <a:srgbClr val="2563EB"/>
+                </a:solidFill>
+                <a:latin typeface="Segoe UI"/>
+              </a:defRPr>
+            </a:pPr>
+            <a:r>
+              <a:t>24 / 26</a:t>
+            </a:r>
+          </a:p>
+        </p:txBody>
+      </p:sp>
+      <p:sp>
+        <p:nvSpPr>
+          <p:cNvPr id="8" name="Rounded Rectangle 7"/>
+          <p:cNvSpPr/>
+          <p:nvPr/>
+        </p:nvSpPr>
+        <p:spPr>
+          <a:xfrm>
+            <a:off x="731520" y="1234440"/>
+            <a:ext cx="5212080" cy="4937760"/>
+          </a:xfrm>
+          <a:prstGeom prst="roundRect">
+            <a:avLst>
+              <a:gd name="adj" fmla="val 2000"/>
+            </a:avLst>
+          </a:prstGeom>
+          <a:solidFill>
+            <a:srgbClr val="0B132B"/>
+          </a:solidFill>
+          <a:ln w="19050">
+            <a:solidFill>
+              <a:srgbClr val="1C2541"/>
+            </a:solidFill>
+          </a:ln>
+        </p:spPr>
+        <p:style>
+          <a:lnRef idx="1">
+            <a:schemeClr val="accent1"/>
+          </a:lnRef>
+          <a:fillRef idx="3">
+            <a:schemeClr val="accent1"/>
+          </a:fillRef>
+          <a:effectRef idx="2">
+            <a:schemeClr val="accent1"/>
+          </a:effectRef>
+          <a:fontRef idx="minor">
+            <a:schemeClr val="lt1"/>
+          </a:fontRef>
+        </p:style>
+        <p:txBody>
+          <a:bodyPr rtlCol="0" anchor="ctr"/>
+          <a:lstStyle/>
+          <a:p>
+            <a:pPr algn="ctr"/>
+          </a:p>
+        </p:txBody>
+      </p:sp>
+      <p:sp>
+        <p:nvSpPr>
+          <p:cNvPr id="9" name="TextBox 8"/>
+          <p:cNvSpPr txBox="1"/>
+          <p:nvPr/>
+        </p:nvSpPr>
+        <p:spPr>
+          <a:xfrm>
+            <a:off x="868680" y="1307592"/>
+            <a:ext cx="4937760" cy="292608"/>
+          </a:xfrm>
+          <a:prstGeom prst="rect">
+            <a:avLst/>
+          </a:prstGeom>
+          <a:noFill/>
+        </p:spPr>
+        <p:txBody>
+          <a:bodyPr wrap="none" lIns="0" tIns="0" rIns="0" bIns="0">
+            <a:spAutoFit/>
+          </a:bodyPr>
+          <a:lstStyle/>
+          <a:p>
+            <a:pPr>
+              <a:defRPr sz="950" b="1">
+                <a:solidFill>
+                  <a:srgbClr val="0EA5E9"/>
+                </a:solidFill>
+                <a:latin typeface="Consolas"/>
+              </a:defRPr>
+            </a:pPr>
+            <a:r>
+              <a:t>&gt;_  Cấu hình config.json chính thức</a:t>
+            </a:r>
+          </a:p>
+        </p:txBody>
+      </p:sp>
+      <p:sp>
+        <p:nvSpPr>
+          <p:cNvPr id="10" name="TextBox 9"/>
+          <p:cNvSpPr txBox="1"/>
+          <p:nvPr/>
+        </p:nvSpPr>
+        <p:spPr>
+          <a:xfrm>
+            <a:off x="868680" y="1600200"/>
+            <a:ext cx="4937760" cy="4526280"/>
+          </a:xfrm>
+          <a:prstGeom prst="rect">
+            <a:avLst/>
+          </a:prstGeom>
+          <a:noFill/>
+        </p:spPr>
+        <p:txBody>
+          <a:bodyPr wrap="square" lIns="0" tIns="0" rIns="0" bIns="0">
+            <a:spAutoFit/>
+          </a:bodyPr>
+          <a:lstStyle/>
+          <a:p>
+            <a:pPr>
+              <a:lnSpc>
+                <a:spcPct val="108000"/>
+              </a:lnSpc>
+              <a:spcAft>
+                <a:spcPts val="0"/>
+              </a:spcAft>
+              <a:defRPr sz="800">
+                <a:solidFill>
+                  <a:srgbClr val="FFFFFF"/>
+                </a:solidFill>
+                <a:latin typeface="Consolas"/>
+              </a:defRPr>
+            </a:pPr>
+            <a:r>
+              <a:t>{</a:t>
+            </a:r>
+          </a:p>
+          <a:p>
+            <a:pPr>
+              <a:lnSpc>
+                <a:spcPct val="108000"/>
+              </a:lnSpc>
+              <a:spcAft>
+                <a:spcPts val="0"/>
+              </a:spcAft>
+              <a:defRPr sz="800">
+                <a:solidFill>
+                  <a:srgbClr val="FFFFFF"/>
+                </a:solidFill>
+                <a:latin typeface="Consolas"/>
+              </a:defRPr>
+            </a:pPr>
+            <a:r>
+              <a:t>  "DESIGN_NAME": "rdm6300_picorv32_soc",</a:t>
+            </a:r>
+          </a:p>
+          <a:p>
+            <a:pPr>
+              <a:lnSpc>
+                <a:spcPct val="108000"/>
+              </a:lnSpc>
+              <a:spcAft>
+                <a:spcPts val="0"/>
+              </a:spcAft>
+              <a:defRPr sz="800">
+                <a:solidFill>
+                  <a:srgbClr val="FFFFFF"/>
+                </a:solidFill>
+                <a:latin typeface="Consolas"/>
+              </a:defRPr>
+            </a:pPr>
+            <a:r>
+              <a:t>  "PDK": "sky130A",</a:t>
+            </a:r>
+          </a:p>
+          <a:p>
+            <a:pPr>
+              <a:lnSpc>
+                <a:spcPct val="108000"/>
+              </a:lnSpc>
+              <a:spcAft>
+                <a:spcPts val="0"/>
+              </a:spcAft>
+              <a:defRPr sz="800">
+                <a:solidFill>
+                  <a:srgbClr val="FFFFFF"/>
+                </a:solidFill>
+                <a:latin typeface="Consolas"/>
+              </a:defRPr>
+            </a:pPr>
+            <a:r>
+              <a:t>  "STD_CELL_LIBRARY": "sky130_fd_sc_hd",</a:t>
+            </a:r>
+          </a:p>
+          <a:p>
+            <a:pPr>
+              <a:lnSpc>
+                <a:spcPct val="108000"/>
+              </a:lnSpc>
+              <a:spcAft>
+                <a:spcPts val="0"/>
+              </a:spcAft>
+              <a:defRPr sz="800">
+                <a:solidFill>
+                  <a:srgbClr val="FFFFFF"/>
+                </a:solidFill>
+                <a:latin typeface="Consolas"/>
+              </a:defRPr>
+            </a:pPr>
+            <a:r>
+              <a:t>  "CLOCK_PORT": "clk",</a:t>
+            </a:r>
+          </a:p>
+          <a:p>
+            <a:pPr>
+              <a:lnSpc>
+                <a:spcPct val="108000"/>
+              </a:lnSpc>
+              <a:spcAft>
+                <a:spcPts val="0"/>
+              </a:spcAft>
+              <a:defRPr sz="800">
+                <a:solidFill>
+                  <a:srgbClr val="FFFFFF"/>
+                </a:solidFill>
+                <a:latin typeface="Consolas"/>
+              </a:defRPr>
+            </a:pPr>
+            <a:r>
+              <a:t>  "CLOCK_PERIOD": 20.0, // 50 MHz</a:t>
+            </a:r>
+          </a:p>
+          <a:p>
+            <a:pPr>
+              <a:lnSpc>
+                <a:spcPct val="108000"/>
+              </a:lnSpc>
+              <a:spcAft>
+                <a:spcPts val="0"/>
+              </a:spcAft>
+              <a:defRPr sz="800">
+                <a:solidFill>
+                  <a:srgbClr val="FFFFFF"/>
+                </a:solidFill>
+                <a:latin typeface="Consolas"/>
+              </a:defRPr>
+            </a:pPr>
+            <a:r>
+              <a:t>  "FP_CORE_UTIL": 26,   // 26% density</a:t>
+            </a:r>
+          </a:p>
+          <a:p>
+            <a:pPr>
+              <a:lnSpc>
+                <a:spcPct val="108000"/>
+              </a:lnSpc>
+              <a:spcAft>
+                <a:spcPts val="0"/>
+              </a:spcAft>
+              <a:defRPr sz="800">
+                <a:solidFill>
+                  <a:srgbClr val="FFFFFF"/>
+                </a:solidFill>
+                <a:latin typeface="Consolas"/>
+              </a:defRPr>
+            </a:pPr>
+            <a:r>
+              <a:t>  "MAX_FANOUT_CONSTRAINT": 12,</a:t>
+            </a:r>
+          </a:p>
+          <a:p>
+            <a:pPr>
+              <a:lnSpc>
+                <a:spcPct val="108000"/>
+              </a:lnSpc>
+              <a:spcAft>
+                <a:spcPts val="0"/>
+              </a:spcAft>
+              <a:defRPr sz="800">
+                <a:solidFill>
+                  <a:srgbClr val="FFFFFF"/>
+                </a:solidFill>
+                <a:latin typeface="Consolas"/>
+              </a:defRPr>
+            </a:pPr>
+            <a:r>
+              <a:t>  "PL_RESIZER_HOLD_SLACK_MARGIN": 0.6,</a:t>
+            </a:r>
+          </a:p>
+          <a:p>
+            <a:pPr>
+              <a:lnSpc>
+                <a:spcPct val="108000"/>
+              </a:lnSpc>
+              <a:spcAft>
+                <a:spcPts val="0"/>
+              </a:spcAft>
+              <a:defRPr sz="800">
+                <a:solidFill>
+                  <a:srgbClr val="FFFFFF"/>
+                </a:solidFill>
+                <a:latin typeface="Consolas"/>
+              </a:defRPr>
+            </a:pPr>
+            <a:r>
+              <a:t>  "RUN_HEURISTIC_DIODE_INSERTION": true,</a:t>
+            </a:r>
+          </a:p>
+          <a:p>
+            <a:pPr>
+              <a:lnSpc>
+                <a:spcPct val="108000"/>
+              </a:lnSpc>
+              <a:spcAft>
+                <a:spcPts val="0"/>
+              </a:spcAft>
+              <a:defRPr sz="800">
+                <a:solidFill>
+                  <a:srgbClr val="FFFFFF"/>
+                </a:solidFill>
+                <a:latin typeface="Consolas"/>
+              </a:defRPr>
+            </a:pPr>
+            <a:r>
+              <a:t>  "HEURISTIC_ANTENNA_THRESHOLD": 24,</a:t>
+            </a:r>
+          </a:p>
+          <a:p>
+            <a:pPr>
+              <a:lnSpc>
+                <a:spcPct val="108000"/>
+              </a:lnSpc>
+              <a:spcAft>
+                <a:spcPts val="0"/>
+              </a:spcAft>
+              <a:defRPr sz="800">
+                <a:solidFill>
+                  <a:srgbClr val="FFFFFF"/>
+                </a:solidFill>
+                <a:latin typeface="Consolas"/>
+              </a:defRPr>
+            </a:pPr>
+            <a:r>
+              <a:t>  "GRT_ANTENNA_ITERS": 35,</a:t>
+            </a:r>
+          </a:p>
+          <a:p>
+            <a:pPr>
+              <a:lnSpc>
+                <a:spcPct val="108000"/>
+              </a:lnSpc>
+              <a:spcAft>
+                <a:spcPts val="0"/>
+              </a:spcAft>
+              <a:defRPr sz="800">
+                <a:solidFill>
+                  <a:srgbClr val="FFFFFF"/>
+                </a:solidFill>
+                <a:latin typeface="Consolas"/>
+              </a:defRPr>
+            </a:pPr>
+            <a:r>
+              <a:t>  "RUN_ANTENNA_REPAIR": true,</a:t>
+            </a:r>
+          </a:p>
+          <a:p>
+            <a:pPr>
+              <a:lnSpc>
+                <a:spcPct val="108000"/>
+              </a:lnSpc>
+              <a:spcAft>
+                <a:spcPts val="0"/>
+              </a:spcAft>
+              <a:defRPr sz="800">
+                <a:solidFill>
+                  <a:srgbClr val="FFFFFF"/>
+                </a:solidFill>
+                <a:latin typeface="Consolas"/>
+              </a:defRPr>
+            </a:pPr>
+            <a:r>
+              <a:t>  "SYNTH_STRATEGY": "AREA 0"</a:t>
+            </a:r>
+          </a:p>
+          <a:p>
+            <a:pPr>
+              <a:lnSpc>
+                <a:spcPct val="108000"/>
+              </a:lnSpc>
+              <a:spcAft>
+                <a:spcPts val="0"/>
+              </a:spcAft>
+              <a:defRPr sz="800">
+                <a:solidFill>
+                  <a:srgbClr val="FFFFFF"/>
+                </a:solidFill>
+                <a:latin typeface="Consolas"/>
+              </a:defRPr>
+            </a:pPr>
+            <a:r>
+              <a:t>}</a:t>
+            </a:r>
+          </a:p>
+        </p:txBody>
+      </p:sp>
+      <p:sp>
+        <p:nvSpPr>
+          <p:cNvPr id="11" name="Rounded Rectangle 10"/>
+          <p:cNvSpPr/>
+          <p:nvPr/>
+        </p:nvSpPr>
+        <p:spPr>
+          <a:xfrm>
+            <a:off x="6217920" y="1234440"/>
+            <a:ext cx="5239512" cy="4937760"/>
+          </a:xfrm>
+          <a:prstGeom prst="roundRect">
+            <a:avLst>
+              <a:gd name="adj" fmla="val 2000"/>
+            </a:avLst>
+          </a:prstGeom>
+          <a:solidFill>
+            <a:srgbClr val="FFFFFF"/>
+          </a:solidFill>
+          <a:ln w="25400">
+            <a:solidFill>
+              <a:srgbClr val="E11D48"/>
+            </a:solidFill>
+          </a:ln>
+        </p:spPr>
+        <p:style>
+          <a:lnRef idx="1">
+            <a:schemeClr val="accent1"/>
+          </a:lnRef>
+          <a:fillRef idx="3">
+            <a:schemeClr val="accent1"/>
+          </a:fillRef>
+          <a:effectRef idx="2">
+            <a:schemeClr val="accent1"/>
+          </a:effectRef>
+          <a:fontRef idx="minor">
+            <a:schemeClr val="lt1"/>
+          </a:fontRef>
+        </p:style>
+        <p:txBody>
+          <a:bodyPr rtlCol="0" anchor="ctr"/>
+          <a:lstStyle/>
+          <a:p>
+            <a:pPr algn="ctr"/>
+          </a:p>
+        </p:txBody>
+      </p:sp>
+      <p:sp>
+        <p:nvSpPr>
+          <p:cNvPr id="12" name="TextBox 11"/>
+          <p:cNvSpPr txBox="1"/>
+          <p:nvPr/>
+        </p:nvSpPr>
+        <p:spPr>
+          <a:xfrm>
+            <a:off x="6400800" y="1371600"/>
+            <a:ext cx="4873752" cy="4663440"/>
+          </a:xfrm>
+          <a:prstGeom prst="rect">
+            <a:avLst/>
+          </a:prstGeom>
+          <a:noFill/>
+        </p:spPr>
+        <p:txBody>
+          <a:bodyPr wrap="square">
+            <a:spAutoFit/>
+          </a:bodyPr>
+          <a:lstStyle/>
+          <a:p>
+            <a:pPr>
+              <a:spcAft>
+                <a:spcPts val="1000"/>
+              </a:spcAft>
+              <a:defRPr sz="1300" b="1">
+                <a:solidFill>
+                  <a:srgbClr val="E11D48"/>
+                </a:solidFill>
+                <a:latin typeface="Segoe UI"/>
+              </a:defRPr>
+            </a:pPr>
+            <a:r>
+              <a:t>CÁC CHIẾN LƯỢC VẬT LÝ THEN CHỐT</a:t>
+            </a:r>
+          </a:p>
+          <a:p>
+            <a:pPr>
+              <a:lnSpc>
+                <a:spcPct val="115000"/>
+              </a:lnSpc>
+              <a:spcAft>
+                <a:spcPts val="800"/>
+              </a:spcAft>
+              <a:defRPr sz="1050">
+                <a:solidFill>
+                  <a:srgbClr val="0F172A"/>
+                </a:solidFill>
+                <a:latin typeface="Segoe UI"/>
+              </a:defRPr>
+            </a:pPr>
+            <a:r>
+              <a:t>• Mật độ diện tích lõi 26% (FP_CORE_UTIL): Khởi tạo mật độ cell 26%, để lại 74% diện tích cho các kênh định tuyến kim loại và chèn diode bảo vệ plasma.</a:t>
+            </a:r>
+          </a:p>
+          <a:p>
+            <a:pPr>
+              <a:lnSpc>
+                <a:spcPct val="115000"/>
+              </a:lnSpc>
+              <a:spcAft>
+                <a:spcPts val="800"/>
+              </a:spcAft>
+              <a:defRPr sz="1050">
+                <a:solidFill>
+                  <a:srgbClr val="0F172A"/>
+                </a:solidFill>
+                <a:latin typeface="Segoe UI"/>
+              </a:defRPr>
+            </a:pPr>
+            <a:r>
+              <a:t>• Ràng buộc xung nhịp 50 MHz (CLOCK_PERIOD = 20.0 ns): Ràng buộc định thời thống nhất từ khâu tổng hợp logic Yosys, xây dựng cây clock CTS tới khâu phân tích định thời tĩnh STA.</a:t>
+            </a:r>
+          </a:p>
+          <a:p>
+            <a:pPr>
+              <a:lnSpc>
+                <a:spcPct val="115000"/>
+              </a:lnSpc>
+              <a:spcAft>
+                <a:spcPts val="800"/>
+              </a:spcAft>
+              <a:defRPr sz="1050">
+                <a:solidFill>
+                  <a:srgbClr val="0F172A"/>
+                </a:solidFill>
+                <a:latin typeface="Segoe UI"/>
+              </a:defRPr>
+            </a:pPr>
+            <a:r>
+              <a:t>• Chèn Diode phỏng đoán (HEURISTIC_ANTENNA_THRESHOLD = 24): Thuật toán tối ưu tự động chèn diode tiêu tán điện tích plasma khi tỷ lệ dây/cực cổng vượt ngưỡng 24, triệt tiêu 100% lỗi Antenna.</a:t>
+            </a:r>
+          </a:p>
+          <a:p>
+            <a:pPr>
+              <a:lnSpc>
+                <a:spcPct val="115000"/>
+              </a:lnSpc>
+              <a:spcAft>
+                <a:spcPts val="800"/>
+              </a:spcAft>
+              <a:defRPr sz="1050">
+                <a:solidFill>
+                  <a:srgbClr val="0F172A"/>
+                </a:solidFill>
+                <a:latin typeface="Segoe UI"/>
+              </a:defRPr>
+            </a:pPr>
+            <a:r>
+              <a:t>• Biên an toàn Hold Guard-band 0.60 ns: Đảm bảo bộ tối ưu hóa tế bào Resizer xử lý sạch sẽ các vi phạm chạy đua dữ liệu (Hold Violations) sau bước đi dây chi tiết.</a:t>
+            </a:r>
+          </a:p>
+        </p:txBody>
+      </p:sp>
+    </p:spTree>
+  </p:cSld>
+  <p:clrMapOvr>
+    <a:masterClrMapping/>
+  </p:clrMapOvr>
+</p:sld>
+</file>
+
+<file path=ppt/slides/slide25.xml><?xml version="1.0" encoding="utf-8"?>
+<p:sld xmlns:a="http://schemas.openxmlformats.org/drawingml/2006/main" xmlns:p="http://schemas.openxmlformats.org/presentationml/2006/main" xmlns:r="http://schemas.openxmlformats.org/officeDocument/2006/relationships">
+  <p:cSld>
+    <p:spTree>
+      <p:nvGrpSpPr>
+        <p:cNvPr id="1" name=""/>
+        <p:cNvGrpSpPr/>
+        <p:nvPr/>
+      </p:nvGrpSpPr>
+      <p:grpSpPr/>
+      <p:sp>
+        <p:nvSpPr>
+          <p:cNvPr id="2" name="Rectangle 1"/>
+          <p:cNvSpPr/>
+          <p:nvPr/>
+        </p:nvSpPr>
+        <p:spPr>
+          <a:xfrm>
+            <a:off x="0" y="0"/>
+            <a:ext cx="12191695" cy="6858000"/>
+          </a:xfrm>
+          <a:prstGeom prst="rect">
+            <a:avLst/>
+          </a:prstGeom>
+          <a:solidFill>
+            <a:srgbClr val="F8FAFC"/>
+          </a:solidFill>
+          <a:ln>
+            <a:noFill/>
+          </a:ln>
+        </p:spPr>
+        <p:style>
+          <a:lnRef idx="1">
+            <a:schemeClr val="accent1"/>
+          </a:lnRef>
+          <a:fillRef idx="3">
+            <a:schemeClr val="accent1"/>
+          </a:fillRef>
+          <a:effectRef idx="2">
+            <a:schemeClr val="accent1"/>
+          </a:effectRef>
+          <a:fontRef idx="minor">
+            <a:schemeClr val="lt1"/>
+          </a:fontRef>
+        </p:style>
+        <p:txBody>
+          <a:bodyPr rtlCol="0" anchor="ctr"/>
+          <a:lstStyle/>
+          <a:p>
+            <a:pPr algn="ctr"/>
+          </a:p>
+        </p:txBody>
+      </p:sp>
+      <p:sp>
+        <p:nvSpPr>
+          <p:cNvPr id="3" name="Rectangle 2"/>
+          <p:cNvSpPr/>
+          <p:nvPr/>
+        </p:nvSpPr>
+        <p:spPr>
+          <a:xfrm>
+            <a:off x="0" y="0"/>
+            <a:ext cx="12191695" cy="91440"/>
+          </a:xfrm>
+          <a:prstGeom prst="rect">
+            <a:avLst/>
+          </a:prstGeom>
+          <a:solidFill>
+            <a:srgbClr val="2563EB"/>
+          </a:solidFill>
+          <a:ln>
+            <a:noFill/>
+          </a:ln>
+        </p:spPr>
+        <p:style>
+          <a:lnRef idx="1">
+            <a:schemeClr val="accent1"/>
+          </a:lnRef>
+          <a:fillRef idx="3">
+            <a:schemeClr val="accent1"/>
+          </a:fillRef>
+          <a:effectRef idx="2">
+            <a:schemeClr val="accent1"/>
+          </a:effectRef>
+          <a:fontRef idx="minor">
+            <a:schemeClr val="lt1"/>
+          </a:fontRef>
+        </p:style>
+        <p:txBody>
+          <a:bodyPr rtlCol="0" anchor="ctr"/>
+          <a:lstStyle/>
+          <a:p>
+            <a:pPr algn="ctr"/>
+          </a:p>
+        </p:txBody>
+      </p:sp>
+      <p:sp>
+        <p:nvSpPr>
+          <p:cNvPr id="4" name="TextBox 3"/>
+          <p:cNvSpPr txBox="1"/>
+          <p:nvPr/>
+        </p:nvSpPr>
+        <p:spPr>
+          <a:xfrm>
+            <a:off x="731520" y="201168"/>
+            <a:ext cx="10728655" cy="868680"/>
+          </a:xfrm>
+          <a:prstGeom prst="rect">
+            <a:avLst/>
+          </a:prstGeom>
+          <a:noFill/>
+        </p:spPr>
+        <p:txBody>
+          <a:bodyPr wrap="square" lIns="0" tIns="0" rIns="0" bIns="0">
+            <a:spAutoFit/>
+          </a:bodyPr>
+          <a:lstStyle/>
+          <a:p>
+            <a:pPr>
+              <a:spcAft>
+                <a:spcPts val="200"/>
+              </a:spcAft>
+              <a:defRPr sz="1050" b="1">
+                <a:solidFill>
+                  <a:srgbClr val="2563EB"/>
+                </a:solidFill>
+                <a:latin typeface="Segoe UI"/>
+              </a:defRPr>
+            </a:pPr>
+            <a:r>
+              <a:t>PHẦN 6: THIẾT KẾ VẬT LÝ ASIC</a:t>
+            </a:r>
+          </a:p>
+          <a:p>
+            <a:pPr>
+              <a:defRPr sz="1700" b="1">
+                <a:solidFill>
+                  <a:srgbClr val="0F172A"/>
+                </a:solidFill>
+                <a:latin typeface="Segoe UI"/>
+              </a:defRPr>
+            </a:pPr>
+            <a:r>
+              <a:t>Bản Vẽ Layout OpenROAD &amp; Báo Cáo Ký Duyệt Sign-off Toàn Diện</a:t>
+            </a:r>
+          </a:p>
+        </p:txBody>
+      </p:sp>
+      <p:sp>
+        <p:nvSpPr>
+          <p:cNvPr id="5" name="Rectangle 4"/>
+          <p:cNvSpPr/>
+          <p:nvPr/>
+        </p:nvSpPr>
+        <p:spPr>
+          <a:xfrm>
+            <a:off x="731520" y="6446520"/>
+            <a:ext cx="10728655" cy="18288"/>
+          </a:xfrm>
+          <a:prstGeom prst="rect">
+            <a:avLst/>
+          </a:prstGeom>
+          <a:solidFill>
+            <a:srgbClr val="E2E8F0"/>
+          </a:solidFill>
+          <a:ln>
+            <a:noFill/>
+          </a:ln>
+        </p:spPr>
+        <p:style>
+          <a:lnRef idx="1">
+            <a:schemeClr val="accent1"/>
+          </a:lnRef>
+          <a:fillRef idx="3">
+            <a:schemeClr val="accent1"/>
+          </a:fillRef>
+          <a:effectRef idx="2">
+            <a:schemeClr val="accent1"/>
+          </a:effectRef>
+          <a:fontRef idx="minor">
+            <a:schemeClr val="lt1"/>
+          </a:fontRef>
+        </p:style>
+        <p:txBody>
+          <a:bodyPr rtlCol="0" anchor="ctr"/>
+          <a:lstStyle/>
+          <a:p>
+            <a:pPr algn="ctr"/>
+          </a:p>
+        </p:txBody>
+      </p:sp>
+      <p:sp>
+        <p:nvSpPr>
+          <p:cNvPr id="6" name="TextBox 5"/>
+          <p:cNvSpPr txBox="1"/>
+          <p:nvPr/>
+        </p:nvSpPr>
+        <p:spPr>
+          <a:xfrm>
+            <a:off x="731520" y="6492240"/>
+            <a:ext cx="7315200" cy="274320"/>
+          </a:xfrm>
+          <a:prstGeom prst="rect">
+            <a:avLst/>
+          </a:prstGeom>
+          <a:noFill/>
+        </p:spPr>
+        <p:txBody>
+          <a:bodyPr wrap="none" lIns="0" tIns="0" rIns="0" bIns="0">
+            <a:spAutoFit/>
+          </a:bodyPr>
+          <a:lstStyle/>
+          <a:p>
+            <a:pPr>
+              <a:defRPr sz="950">
+                <a:solidFill>
+                  <a:srgbClr val="475569"/>
+                </a:solidFill>
+                <a:latin typeface="Segoe UI"/>
+              </a:defRPr>
+            </a:pPr>
+            <a:r>
+              <a:t>Đồ Án Tốt Nghiệp: SoC PicoRV32 RFID RDM6300 &amp; SPI Flash | SV: Thái Tuấn Hiệp | GVHD: ThS. Nguyễn Văn Đông</a:t>
+            </a:r>
+          </a:p>
+        </p:txBody>
+      </p:sp>
+      <p:sp>
+        <p:nvSpPr>
+          <p:cNvPr id="7" name="TextBox 6"/>
+          <p:cNvSpPr txBox="1"/>
+          <p:nvPr/>
+        </p:nvSpPr>
+        <p:spPr>
+          <a:xfrm>
+            <a:off x="10058400" y="6492240"/>
+            <a:ext cx="1401775" cy="274320"/>
+          </a:xfrm>
+          <a:prstGeom prst="rect">
+            <a:avLst/>
+          </a:prstGeom>
+          <a:noFill/>
+        </p:spPr>
+        <p:txBody>
+          <a:bodyPr wrap="none" lIns="0" tIns="0" rIns="0" bIns="0">
+            <a:spAutoFit/>
+          </a:bodyPr>
+          <a:lstStyle/>
+          <a:p>
+            <a:pPr algn="r">
+              <a:defRPr sz="950" b="1">
+                <a:solidFill>
+                  <a:srgbClr val="2563EB"/>
+                </a:solidFill>
+                <a:latin typeface="Segoe UI"/>
+              </a:defRPr>
+            </a:pPr>
+            <a:r>
+              <a:t>25 / 26</a:t>
+            </a:r>
+          </a:p>
+        </p:txBody>
+      </p:sp>
+      <p:sp>
+        <p:nvSpPr>
+          <p:cNvPr id="8" name="Rounded Rectangle 7"/>
+          <p:cNvSpPr/>
+          <p:nvPr/>
+        </p:nvSpPr>
+        <p:spPr>
+          <a:xfrm>
+            <a:off x="731520" y="1234440"/>
+            <a:ext cx="5212080" cy="3931920"/>
+          </a:xfrm>
+          <a:prstGeom prst="roundRect">
+            <a:avLst>
+              <a:gd name="adj" fmla="val 2000"/>
+            </a:avLst>
+          </a:prstGeom>
+          <a:solidFill>
+            <a:srgbClr val="FFFFFF"/>
+          </a:solidFill>
+          <a:ln w="19050">
+            <a:solidFill>
+              <a:srgbClr val="2563EB"/>
+            </a:solidFill>
+          </a:ln>
+        </p:spPr>
+        <p:style>
+          <a:lnRef idx="1">
+            <a:schemeClr val="accent1"/>
+          </a:lnRef>
+          <a:fillRef idx="3">
+            <a:schemeClr val="accent1"/>
+          </a:fillRef>
+          <a:effectRef idx="2">
+            <a:schemeClr val="accent1"/>
+          </a:effectRef>
+          <a:fontRef idx="minor">
+            <a:schemeClr val="lt1"/>
+          </a:fontRef>
+        </p:style>
+        <p:txBody>
+          <a:bodyPr rtlCol="0" anchor="ctr"/>
+          <a:lstStyle/>
+          <a:p>
+            <a:pPr algn="ctr"/>
+          </a:p>
+        </p:txBody>
+      </p:sp>
+      <p:pic>
+        <p:nvPicPr>
+          <p:cNvPr id="9" name="Picture 8" descr="OpenROAD.png"/>
+          <p:cNvPicPr>
+            <a:picLocks noChangeAspect="1"/>
+          </p:cNvPicPr>
+          <p:nvPr/>
+        </p:nvPicPr>
+        <p:blipFill>
+          <a:blip r:embed="rId2"/>
+          <a:stretch>
+            <a:fillRect/>
+          </a:stretch>
+        </p:blipFill>
+        <p:spPr>
+          <a:xfrm>
+            <a:off x="822960" y="1325880"/>
+            <a:ext cx="5029200" cy="3749039"/>
+          </a:xfrm>
+          <a:prstGeom prst="rect">
+            <a:avLst/>
+          </a:prstGeom>
+        </p:spPr>
+      </p:pic>
+      <p:sp>
+        <p:nvSpPr>
+          <p:cNvPr id="10" name="Rounded Rectangle 9"/>
+          <p:cNvSpPr/>
+          <p:nvPr/>
+        </p:nvSpPr>
+        <p:spPr>
+          <a:xfrm>
+            <a:off x="6217920" y="1234440"/>
+            <a:ext cx="5239512" cy="3931920"/>
+          </a:xfrm>
+          <a:prstGeom prst="roundRect">
+            <a:avLst>
+              <a:gd name="adj" fmla="val 2000"/>
+            </a:avLst>
+          </a:prstGeom>
+          <a:solidFill>
+            <a:srgbClr val="FFFFFF"/>
+          </a:solidFill>
+          <a:ln w="19050">
+            <a:solidFill>
+              <a:srgbClr val="10B981"/>
+            </a:solidFill>
+          </a:ln>
+        </p:spPr>
+        <p:style>
+          <a:lnRef idx="1">
+            <a:schemeClr val="accent1"/>
+          </a:lnRef>
+          <a:fillRef idx="3">
+            <a:schemeClr val="accent1"/>
+          </a:fillRef>
+          <a:effectRef idx="2">
+            <a:schemeClr val="accent1"/>
+          </a:effectRef>
+          <a:fontRef idx="minor">
+            <a:schemeClr val="lt1"/>
+          </a:fontRef>
+        </p:style>
+        <p:txBody>
+          <a:bodyPr rtlCol="0" anchor="ctr"/>
+          <a:lstStyle/>
+          <a:p>
+            <a:pPr algn="ctr"/>
+          </a:p>
+        </p:txBody>
+      </p:sp>
+      <p:pic>
+        <p:nvPicPr>
+          <p:cNvPr id="11" name="Picture 10" descr="AntennaLvsDrc.png"/>
+          <p:cNvPicPr>
+            <a:picLocks noChangeAspect="1"/>
+          </p:cNvPicPr>
+          <p:nvPr/>
+        </p:nvPicPr>
+        <p:blipFill>
+          <a:blip r:embed="rId3"/>
+          <a:stretch>
+            <a:fillRect/>
+          </a:stretch>
+        </p:blipFill>
+        <p:spPr>
+          <a:xfrm>
+            <a:off x="6309360" y="1325880"/>
+            <a:ext cx="5056632" cy="3749039"/>
+          </a:xfrm>
+          <a:prstGeom prst="rect">
+            <a:avLst/>
+          </a:prstGeom>
+        </p:spPr>
+      </p:pic>
+      <p:sp>
+        <p:nvSpPr>
+          <p:cNvPr id="12" name="Rounded Rectangle 11"/>
+          <p:cNvSpPr/>
+          <p:nvPr/>
+        </p:nvSpPr>
+        <p:spPr>
+          <a:xfrm>
+            <a:off x="731520" y="5303520"/>
+            <a:ext cx="10728655" cy="960120"/>
+          </a:xfrm>
+          <a:prstGeom prst="roundRect">
+            <a:avLst>
+              <a:gd name="adj" fmla="val 2000"/>
+            </a:avLst>
+          </a:prstGeom>
+          <a:solidFill>
+            <a:srgbClr val="FFFFFF"/>
+          </a:solidFill>
+          <a:ln w="19050">
+            <a:solidFill>
+              <a:srgbClr val="CBD5E1"/>
+            </a:solidFill>
+          </a:ln>
+        </p:spPr>
+        <p:style>
+          <a:lnRef idx="1">
+            <a:schemeClr val="accent1"/>
+          </a:lnRef>
+          <a:fillRef idx="3">
+            <a:schemeClr val="accent1"/>
+          </a:fillRef>
+          <a:effectRef idx="2">
+            <a:schemeClr val="accent1"/>
+          </a:effectRef>
+          <a:fontRef idx="minor">
+            <a:schemeClr val="lt1"/>
+          </a:fontRef>
+        </p:style>
+        <p:txBody>
+          <a:bodyPr rtlCol="0" anchor="ctr"/>
+          <a:lstStyle/>
+          <a:p>
+            <a:pPr algn="ctr"/>
+          </a:p>
+        </p:txBody>
+      </p:sp>
+      <p:sp>
+        <p:nvSpPr>
+          <p:cNvPr id="13" name="TextBox 12"/>
+          <p:cNvSpPr txBox="1"/>
+          <p:nvPr/>
+        </p:nvSpPr>
+        <p:spPr>
+          <a:xfrm>
+            <a:off x="868680" y="5349240"/>
+            <a:ext cx="10424160" cy="868680"/>
+          </a:xfrm>
+          <a:prstGeom prst="rect">
+            <a:avLst/>
+          </a:prstGeom>
+          <a:noFill/>
+        </p:spPr>
+        <p:txBody>
+          <a:bodyPr wrap="square">
+            <a:spAutoFit/>
+          </a:bodyPr>
+          <a:lstStyle/>
+          <a:p>
+            <a:pPr>
+              <a:spcAft>
+                <a:spcPts val="200"/>
+              </a:spcAft>
+              <a:defRPr sz="1100" b="1">
+                <a:solidFill>
+                  <a:srgbClr val="10B981"/>
+                </a:solidFill>
+                <a:latin typeface="Segoe UI"/>
+              </a:defRPr>
+            </a:pPr>
+            <a:r>
+              <a:t>KẾT QUẢ KÝ DUYỆT TAPE-OUT READY: 0 ANTENNA | 0 LVS | 0 DRC | MET TIMING 50 MHZ</a:t>
+            </a:r>
+          </a:p>
+          <a:p>
+            <a:pPr>
+              <a:defRPr sz="950">
+                <a:solidFill>
+                  <a:srgbClr val="0F172A"/>
+                </a:solidFill>
+                <a:latin typeface="Segoe UI"/>
+              </a:defRPr>
+            </a:pPr>
+            <a:r>
+              <a:t>• Bố cục vật lý: Lưới nguồn PDN met4/met5 dày đặc, phân bổ 31 chân pad đối xứng trên 4 cạnh die, độ sụt áp IR drop &lt; 1.5% an toàn.</a:t>
+            </a:r>
+            <a:br/>
+            <a:r>
+              <a:t>• Định thời &amp; Ký duyệt: WNS &gt;= 0.00 ns tại 50 MHz trên cả 9 góc đo công nghệ từ -40°C đến 100°C; Netgen xác nhận 100% khớp netlist RTL.</a:t>
+            </a:r>
+          </a:p>
+        </p:txBody>
+      </p:sp>
+    </p:spTree>
+  </p:cSld>
+  <p:clrMapOvr>
+    <a:masterClrMapping/>
+  </p:clrMapOvr>
+</p:sld>
+</file>
+
+<file path=ppt/slides/slide26.xml><?xml version="1.0" encoding="utf-8"?>
+<p:sld xmlns:a="http://schemas.openxmlformats.org/drawingml/2006/main" xmlns:p="http://schemas.openxmlformats.org/presentationml/2006/main" xmlns:r="http://schemas.openxmlformats.org/officeDocument/2006/relationships">
+  <p:cSld>
+    <p:spTree>
+      <p:nvGrpSpPr>
+        <p:cNvPr id="1" name=""/>
+        <p:cNvGrpSpPr/>
+        <p:nvPr/>
+      </p:nvGrpSpPr>
+      <p:grpSpPr/>
+      <p:sp>
+        <p:nvSpPr>
+          <p:cNvPr id="2" name="Rectangle 1"/>
+          <p:cNvSpPr/>
+          <p:nvPr/>
+        </p:nvSpPr>
+        <p:spPr>
+          <a:xfrm>
+            <a:off x="0" y="0"/>
+            <a:ext cx="12191695" cy="6858000"/>
+          </a:xfrm>
+          <a:prstGeom prst="rect">
+            <a:avLst/>
+          </a:prstGeom>
+          <a:solidFill>
             <a:srgbClr val="0B132B"/>
           </a:solidFill>
           <a:ln>
@@ -16772,7 +18612,7 @@
               </a:defRPr>
             </a:pPr>
             <a:r>
-              <a:t>Thiết Bị Kiểm Soát Ra Vào Offline &amp; Lý Do Lựa Chọn SPI Flash</a:t>
+              <a:t>Hệ Thống Kiểm Soát Ra Vào Offline &amp; Vai Trò Cốt Tử Của SPI Flash</a:t>
             </a:r>
           </a:p>
         </p:txBody>
@@ -16887,7 +18727,7 @@
               </a:defRPr>
             </a:pPr>
             <a:r>
-              <a:t>03 / 24</a:t>
+              <a:t>03 / 26</a:t>
             </a:r>
           </a:p>
         </p:txBody>
@@ -16901,15 +18741,17 @@
         <p:spPr>
           <a:xfrm>
             <a:off x="731520" y="1234440"/>
-            <a:ext cx="5212080" cy="4937760"/>
+            <a:ext cx="5257800" cy="5029200"/>
           </a:xfrm>
           <a:prstGeom prst="roundRect">
-            <a:avLst/>
+            <a:avLst>
+              <a:gd name="adj" fmla="val 2000"/>
+            </a:avLst>
           </a:prstGeom>
           <a:solidFill>
             <a:srgbClr val="FFFFFF"/>
           </a:solidFill>
-          <a:ln w="25400">
+          <a:ln w="19050">
             <a:solidFill>
               <a:srgbClr val="2563EB"/>
             </a:solidFill>
@@ -16945,8 +18787,8 @@
         </p:nvSpPr>
         <p:spPr>
           <a:xfrm>
-            <a:off x="914400" y="1371600"/>
-            <a:ext cx="4846320" cy="4663440"/>
+            <a:off x="868680" y="1371600"/>
+            <a:ext cx="4983480" cy="274320"/>
           </a:xfrm>
           <a:prstGeom prst="rect">
             <a:avLst/>
@@ -16954,16 +18796,13 @@
           <a:noFill/>
         </p:spPr>
         <p:txBody>
-          <a:bodyPr wrap="square">
+          <a:bodyPr wrap="none" lIns="0" tIns="0" rIns="0" bIns="0">
             <a:spAutoFit/>
           </a:bodyPr>
           <a:lstStyle/>
           <a:p>
-            <a:pPr>
-              <a:spcAft>
-                <a:spcPts val="1200"/>
-              </a:spcAft>
-              <a:defRPr sz="1300" b="1">
+            <a:pPr algn="ctr">
+              <a:defRPr sz="1050" b="1">
                 <a:solidFill>
                   <a:srgbClr val="2563EB"/>
                 </a:solidFill>
@@ -16971,88 +18810,57 @@
               </a:defRPr>
             </a:pPr>
             <a:r>
-              <a:t>TÍNH CẤP THIẾT CỦA HỆ THỐNG OFFLINE</a:t>
-            </a:r>
-          </a:p>
-          <a:p>
-            <a:pPr>
-              <a:lnSpc>
-                <a:spcPct val="120000"/>
-              </a:lnSpc>
-              <a:spcAft>
-                <a:spcPts val="1000"/>
-              </a:spcAft>
-              <a:defRPr sz="1050">
-                <a:solidFill>
-                  <a:srgbClr val="0F172A"/>
-                </a:solidFill>
-                <a:latin typeface="Segoe UI"/>
-              </a:defRPr>
-            </a:pPr>
-            <a:r>
-              <a:t>• Hạn chế của Access Control dựa trên Cloud: Phụ thuộc kết nối Internet, độ trễ mạng lớn (vài trăm ms đến vài giây), nguy cơ gián đoạn khi đứt cáp và lộ lọt dữ liệu định danh nhân sự.</a:t>
-            </a:r>
-          </a:p>
-          <a:p>
-            <a:pPr>
-              <a:lnSpc>
-                <a:spcPct val="120000"/>
-              </a:lnSpc>
-              <a:spcAft>
-                <a:spcPts val="1000"/>
-              </a:spcAft>
-              <a:defRPr sz="1050">
-                <a:solidFill>
-                  <a:srgbClr val="0F172A"/>
-                </a:solidFill>
-                <a:latin typeface="Segoe UI"/>
-              </a:defRPr>
-            </a:pPr>
-            <a:r>
-              <a:t>• Định hướng hệ thống Offline Standalone: SoC tự giải mã thẻ và tự đối chiếu phân quyền tại chỗ với độ trễ siêu nhỏ (&lt; 10 µs), vận hành ổn định 24/7 tại các địa bàn biệt lập, bảo mật cao.</a:t>
-            </a:r>
-          </a:p>
-          <a:p>
-            <a:pPr>
-              <a:lnSpc>
-                <a:spcPct val="120000"/>
-              </a:lnSpc>
-              <a:spcAft>
-                <a:spcPts val="1000"/>
-              </a:spcAft>
-              <a:defRPr sz="1050">
-                <a:solidFill>
-                  <a:srgbClr val="0F172A"/>
-                </a:solidFill>
-                <a:latin typeface="Segoe UI"/>
-              </a:defRPr>
-            </a:pPr>
-            <a:r>
-              <a:t>• Nhu cầu tự chủ thiết kế vi mạch ASIC: Loại bỏ hoàn toàn nguy cơ backdoor phần cứng, làm chủ từ kiến trúc RTL đến quy trình chế tạo vi mạch bán dẫn.</a:t>
-            </a:r>
-          </a:p>
-        </p:txBody>
-      </p:sp>
-      <p:sp>
-        <p:nvSpPr>
-          <p:cNvPr id="10" name="Rounded Rectangle 9"/>
+              <a:t>SƠ ĐỒ KHỐI VI HỆ THỐNG TRÊN CHIP (SOC ARCHITECTURE)</a:t>
+            </a:r>
+          </a:p>
+        </p:txBody>
+      </p:sp>
+      <p:pic>
+        <p:nvPicPr>
+          <p:cNvPr id="10" name="Picture 9" descr="fig1_block_diagram.png"/>
+          <p:cNvPicPr>
+            <a:picLocks noChangeAspect="1"/>
+          </p:cNvPicPr>
+          <p:nvPr/>
+        </p:nvPicPr>
+        <p:blipFill>
+          <a:blip r:embed="rId2"/>
+          <a:stretch>
+            <a:fillRect/>
+          </a:stretch>
+        </p:blipFill>
+        <p:spPr>
+          <a:xfrm>
+            <a:off x="868680" y="1682496"/>
+            <a:ext cx="4983480" cy="3593592"/>
+          </a:xfrm>
+          <a:prstGeom prst="rect">
+            <a:avLst/>
+          </a:prstGeom>
+        </p:spPr>
+      </p:pic>
+      <p:sp>
+        <p:nvSpPr>
+          <p:cNvPr id="11" name="Rounded Rectangle 10"/>
           <p:cNvSpPr/>
           <p:nvPr/>
         </p:nvSpPr>
         <p:spPr>
           <a:xfrm>
-            <a:off x="6126480" y="1234440"/>
-            <a:ext cx="5212080" cy="4937760"/>
+            <a:off x="960120" y="5376672"/>
+            <a:ext cx="4800600" cy="749808"/>
           </a:xfrm>
           <a:prstGeom prst="roundRect">
-            <a:avLst/>
+            <a:avLst>
+              <a:gd name="adj" fmla="val 2000"/>
+            </a:avLst>
           </a:prstGeom>
           <a:solidFill>
-            <a:srgbClr val="FFFFFF"/>
+            <a:srgbClr val="F1F5F9"/>
           </a:solidFill>
-          <a:ln w="25400">
+          <a:ln w="12700">
             <a:solidFill>
-              <a:srgbClr val="10B981"/>
+              <a:srgbClr val="CBD5E1"/>
             </a:solidFill>
           </a:ln>
         </p:spPr>
@@ -17080,14 +18888,14 @@
       </p:sp>
       <p:sp>
         <p:nvSpPr>
-          <p:cNvPr id="11" name="TextBox 10"/>
+          <p:cNvPr id="12" name="TextBox 11"/>
           <p:cNvSpPr txBox="1"/>
           <p:nvPr/>
         </p:nvSpPr>
         <p:spPr>
           <a:xfrm>
-            <a:off x="6309360" y="1371600"/>
-            <a:ext cx="4846320" cy="4663440"/>
+            <a:off x="1078992" y="5413248"/>
+            <a:ext cx="4572000" cy="658368"/>
           </a:xfrm>
           <a:prstGeom prst="rect">
             <a:avLst/>
@@ -17095,16 +18903,198 @@
           <a:noFill/>
         </p:spPr>
         <p:txBody>
-          <a:bodyPr wrap="square">
+          <a:bodyPr wrap="square" lIns="0" tIns="0" rIns="0" bIns="0">
             <a:spAutoFit/>
           </a:bodyPr>
           <a:lstStyle/>
           <a:p>
             <a:pPr>
               <a:spcAft>
-                <a:spcPts val="1200"/>
-              </a:spcAft>
-              <a:defRPr sz="1300" b="1">
+                <a:spcPts val="200"/>
+              </a:spcAft>
+              <a:defRPr sz="819" b="1">
+                <a:solidFill>
+                  <a:srgbClr val="2563EB"/>
+                </a:solidFill>
+                <a:latin typeface="Segoe UI"/>
+              </a:defRPr>
+            </a:pPr>
+            <a:r>
+              <a:t>ĐẶC TRƯNG CỐT LÕI CỦA THIẾT KẾ VI MẠCH:</a:t>
+            </a:r>
+          </a:p>
+          <a:p>
+            <a:pPr>
+              <a:lnSpc>
+                <a:spcPct val="115000"/>
+              </a:lnSpc>
+              <a:defRPr sz="780">
+                <a:solidFill>
+                  <a:srgbClr val="0F172A"/>
+                </a:solidFill>
+                <a:latin typeface="Segoe UI"/>
+              </a:defRPr>
+            </a:pPr>
+            <a:r>
+              <a:t>• Tích hợp CPU RV32I, bộ điều khiển SPI Flash XIP, 1KB SRAM &amp; 2 kênh UART FIFO.</a:t>
+            </a:r>
+            <a:br/>
+            <a:r>
+              <a:t>• Tự giải mã và đối chiếu thẻ RFID tại chỗ với độ trễ siêu nhỏ (&lt; 10 µs).</a:t>
+            </a:r>
+          </a:p>
+        </p:txBody>
+      </p:sp>
+      <p:sp>
+        <p:nvSpPr>
+          <p:cNvPr id="13" name="Rounded Rectangle 12"/>
+          <p:cNvSpPr/>
+          <p:nvPr/>
+        </p:nvSpPr>
+        <p:spPr>
+          <a:xfrm>
+            <a:off x="6172200" y="1234440"/>
+            <a:ext cx="5285232" cy="5029200"/>
+          </a:xfrm>
+          <a:prstGeom prst="roundRect">
+            <a:avLst>
+              <a:gd name="adj" fmla="val 2000"/>
+            </a:avLst>
+          </a:prstGeom>
+          <a:solidFill>
+            <a:srgbClr val="FFFFFF"/>
+          </a:solidFill>
+          <a:ln w="19050">
+            <a:solidFill>
+              <a:srgbClr val="2563EB"/>
+            </a:solidFill>
+          </a:ln>
+        </p:spPr>
+        <p:style>
+          <a:lnRef idx="1">
+            <a:schemeClr val="accent1"/>
+          </a:lnRef>
+          <a:fillRef idx="3">
+            <a:schemeClr val="accent1"/>
+          </a:fillRef>
+          <a:effectRef idx="2">
+            <a:schemeClr val="accent1"/>
+          </a:effectRef>
+          <a:fontRef idx="minor">
+            <a:schemeClr val="lt1"/>
+          </a:fontRef>
+        </p:style>
+        <p:txBody>
+          <a:bodyPr rtlCol="0" anchor="ctr"/>
+          <a:lstStyle/>
+          <a:p>
+            <a:pPr algn="ctr"/>
+          </a:p>
+        </p:txBody>
+      </p:sp>
+      <p:sp>
+        <p:nvSpPr>
+          <p:cNvPr id="14" name="TextBox 13"/>
+          <p:cNvSpPr txBox="1"/>
+          <p:nvPr/>
+        </p:nvSpPr>
+        <p:spPr>
+          <a:xfrm>
+            <a:off x="6446520" y="1371600"/>
+            <a:ext cx="4800600" cy="4754880"/>
+          </a:xfrm>
+          <a:prstGeom prst="rect">
+            <a:avLst/>
+          </a:prstGeom>
+          <a:noFill/>
+        </p:spPr>
+        <p:txBody>
+          <a:bodyPr wrap="square" lIns="0" tIns="0" rIns="0" bIns="0">
+            <a:spAutoFit/>
+          </a:bodyPr>
+          <a:lstStyle/>
+          <a:p>
+            <a:pPr>
+              <a:spcAft>
+                <a:spcPts val="400"/>
+              </a:spcAft>
+              <a:defRPr b="1" sz="1150">
+                <a:solidFill>
+                  <a:srgbClr val="2563EB"/>
+                </a:solidFill>
+                <a:latin typeface="Segoe UI"/>
+              </a:defRPr>
+            </a:pPr>
+            <a:r>
+              <a:t>TÍNH CẤP THIẾT &amp; VAI TRÒ CỐT TỬ CỦA BỘ NHỚ SPI FLASH</a:t>
+            </a:r>
+          </a:p>
+          <a:p>
+            <a:pPr>
+              <a:spcBef>
+                <a:spcPts val="300"/>
+              </a:spcBef>
+              <a:spcAft>
+                <a:spcPts val="100"/>
+              </a:spcAft>
+              <a:defRPr sz="880" b="1">
+                <a:solidFill>
+                  <a:srgbClr val="2563EB"/>
+                </a:solidFill>
+                <a:latin typeface="Segoe UI"/>
+              </a:defRPr>
+            </a:pPr>
+            <a:r>
+              <a:t>1. TÍNH CẤP THIẾT CỦA HỆ THỐNG OFFLINE</a:t>
+            </a:r>
+          </a:p>
+          <a:p>
+            <a:pPr>
+              <a:lnSpc>
+                <a:spcPct val="110000"/>
+              </a:lnSpc>
+              <a:spcAft>
+                <a:spcPts val="150"/>
+              </a:spcAft>
+              <a:defRPr sz="780">
+                <a:solidFill>
+                  <a:srgbClr val="0F172A"/>
+                </a:solidFill>
+                <a:latin typeface="Segoe UI"/>
+              </a:defRPr>
+            </a:pPr>
+            <a:r>
+              <a:t>• Loại bỏ phụ thuộc Internet &amp; Cloud: Khắc phục triệt để độ trễ mạng lớn (vài trăm ms đến vài giây), nguy cơ đứt cáp và lộ lọt dữ liệu định danh nhân sự.</a:t>
+            </a:r>
+          </a:p>
+          <a:p>
+            <a:pPr>
+              <a:lnSpc>
+                <a:spcPct val="110000"/>
+              </a:lnSpc>
+              <a:spcAft>
+                <a:spcPts val="150"/>
+              </a:spcAft>
+              <a:defRPr sz="780">
+                <a:solidFill>
+                  <a:srgbClr val="0F172A"/>
+                </a:solidFill>
+                <a:latin typeface="Segoe UI"/>
+              </a:defRPr>
+            </a:pPr>
+            <a:r>
+              <a:t>• Vận hành thời gian thực độc lập 24/7: SoC tự giải mã thẻ và đối chiếu Whitelist tại chỗ với độ trễ siêu nhỏ (&lt; 10 µs), vận hành tin cậy tại địa bàn biệt lập.</a:t>
+            </a:r>
+          </a:p>
+          <a:p>
+            <a:pPr>
+              <a:spcBef>
+                <a:spcPts val="300"/>
+              </a:spcBef>
+              <a:spcAft>
+                <a:spcPts val="100"/>
+              </a:spcAft>
+              <a:defRPr sz="880" b="1">
                 <a:solidFill>
                   <a:srgbClr val="10B981"/>
                 </a:solidFill>
@@ -17112,18 +19102,18 @@
               </a:defRPr>
             </a:pPr>
             <a:r>
-              <a:t>VAI TRÒ CỐT TỬ CỦA BỘ NHỚ SPI FLASH NVM</a:t>
-            </a:r>
-          </a:p>
-          <a:p>
-            <a:pPr>
-              <a:lnSpc>
-                <a:spcPct val="120000"/>
-              </a:lnSpc>
-              <a:spcAft>
-                <a:spcPts val="1000"/>
-              </a:spcAft>
-              <a:defRPr sz="1050">
+              <a:t>2. VAI TRÒ CỐT TỬ CỦA BỘ NHỚ SPI FLASH NVM</a:t>
+            </a:r>
+          </a:p>
+          <a:p>
+            <a:pPr>
+              <a:lnSpc>
+                <a:spcPct val="110000"/>
+              </a:lnSpc>
+              <a:spcAft>
+                <a:spcPts val="150"/>
+              </a:spcAft>
+              <a:defRPr sz="780">
                 <a:solidFill>
                   <a:srgbClr val="0F172A"/>
                 </a:solidFill>
@@ -17131,18 +19121,18 @@
               </a:defRPr>
             </a:pPr>
             <a:r>
-              <a:t>• Lưu trữ bất biến không cần pin nuôi: Khác với RAM mất sạch dữ liệu khi ngắt điện, SPI Flash lưu trữ danh sách thẻ (Whitelist) và nhật ký quẹt thẻ (Access Logs) an toàn trên 20 năm.</a:t>
-            </a:r>
-          </a:p>
-          <a:p>
-            <a:pPr>
-              <a:lnSpc>
-                <a:spcPct val="120000"/>
-              </a:lnSpc>
-              <a:spcAft>
-                <a:spcPts val="1000"/>
-              </a:spcAft>
-              <a:defRPr sz="1050">
+              <a:t>• Lưu trữ bất biến không cần pin nuôi: Lưu trữ 4,096 thẻ Whitelist (Sector 48) và 512 bản ghi Access Logs (Sector 49) an toàn trên 20 năm.</a:t>
+            </a:r>
+          </a:p>
+          <a:p>
+            <a:pPr>
+              <a:lnSpc>
+                <a:spcPct val="110000"/>
+              </a:lnSpc>
+              <a:spcAft>
+                <a:spcPts val="150"/>
+              </a:spcAft>
+              <a:defRPr sz="780">
                 <a:solidFill>
                   <a:srgbClr val="0F172A"/>
                 </a:solidFill>
@@ -17150,18 +19140,18 @@
               </a:defRPr>
             </a:pPr>
             <a:r>
-              <a:t>• Dung lượng lớn với chi phí tối thiểu: Dung lượng 32 Mbit (4MB) cho phép lưu tới 4,096 thẻ người dùng và 512 bản ghi nhật ký kiểm toán với chi phí linh kiện cực rẻ.</a:t>
-            </a:r>
-          </a:p>
-          <a:p>
-            <a:pPr>
-              <a:lnSpc>
-                <a:spcPct val="120000"/>
-              </a:lnSpc>
-              <a:spcAft>
-                <a:spcPts val="1000"/>
-              </a:spcAft>
-              <a:defRPr sz="1050">
+              <a:t>• Thực thi tại chỗ XIP (eXecute-In-Place): CPU kéo trực tiếp opcode từ Flash ngoài 4MB để chạy, chỉ cần 1KB SRAM nội, tiết kiệm &gt; 70% diện tích silicon ASIC.</a:t>
+            </a:r>
+          </a:p>
+          <a:p>
+            <a:pPr>
+              <a:lnSpc>
+                <a:spcPct val="110000"/>
+              </a:lnSpc>
+              <a:spcAft>
+                <a:spcPts val="150"/>
+              </a:spcAft>
+              <a:defRPr sz="780">
                 <a:solidFill>
                   <a:srgbClr val="0F172A"/>
                 </a:solidFill>
@@ -17169,18 +19159,37 @@
               </a:defRPr>
             </a:pPr>
             <a:r>
-              <a:t>• Tiết kiệm chân kết nối ngoại vi ASIC: Chuẩn SPI chỉ dùng 4 chân tín hiệu (CS, SCK, MOSI, MISO), tối ưu hóa số chân pad (chỉ 31 chân toàn vi mạch) và diện tích die silicon.</a:t>
-            </a:r>
-          </a:p>
-          <a:p>
-            <a:pPr>
-              <a:lnSpc>
-                <a:spcPct val="120000"/>
-              </a:lnSpc>
-              <a:spcAft>
-                <a:spcPts val="1000"/>
-              </a:spcAft>
-              <a:defRPr sz="1050">
+              <a:t>• Tiết kiệm chân pad ngoại vi ASIC: Chuẩn SPI chỉ dùng 4 chân (CS, SCK, MOSI, MISO), tối ưu hóa số chân pad (chỉ 31 chân toàn chip) và chi phí đóng gói.</a:t>
+            </a:r>
+          </a:p>
+          <a:p>
+            <a:pPr>
+              <a:spcBef>
+                <a:spcPts val="300"/>
+              </a:spcBef>
+              <a:spcAft>
+                <a:spcPts val="100"/>
+              </a:spcAft>
+              <a:defRPr sz="880" b="1">
+                <a:solidFill>
+                  <a:srgbClr val="7C3AED"/>
+                </a:solidFill>
+                <a:latin typeface="Segoe UI"/>
+              </a:defRPr>
+            </a:pPr>
+            <a:r>
+              <a:t>3. TỰ CHỦ THIẾT KẾ VI MẠCH ASIC</a:t>
+            </a:r>
+          </a:p>
+          <a:p>
+            <a:pPr>
+              <a:lnSpc>
+                <a:spcPct val="110000"/>
+              </a:lnSpc>
+              <a:spcAft>
+                <a:spcPts val="150"/>
+              </a:spcAft>
+              <a:defRPr sz="780">
                 <a:solidFill>
                   <a:srgbClr val="0F172A"/>
                 </a:solidFill>
@@ -17188,7 +19197,7 @@
               </a:defRPr>
             </a:pPr>
             <a:r>
-              <a:t>• Hỗ trợ chế độ thực thi lệnh tại chỗ (XIP): Cho phép CPU PicoRV32 kéo trực tiếp mã lệnh từ Flash chạy mà không cần nạp vào SRAM lớn.</a:t>
+              <a:t>• Loại bỏ backdoor phần cứng: Làm chủ từ mã nguồn RTL Verilog, tối ưu hóa kiến trúc đến layout GDSII trên tiến trình SkyWater 130nm.</a:t>
             </a:r>
           </a:p>
         </p:txBody>
@@ -17459,7 +19468,7 @@
               </a:defRPr>
             </a:pPr>
             <a:r>
-              <a:t>04 / 24</a:t>
+              <a:t>04 / 26</a:t>
             </a:r>
           </a:p>
         </p:txBody>
@@ -17473,17 +19482,19 @@
         <p:spPr>
           <a:xfrm>
             <a:off x="731520" y="1234440"/>
-            <a:ext cx="5212080" cy="4937760"/>
+            <a:ext cx="5257800" cy="5029200"/>
           </a:xfrm>
           <a:prstGeom prst="roundRect">
-            <a:avLst/>
+            <a:avLst>
+              <a:gd name="adj" fmla="val 2000"/>
+            </a:avLst>
           </a:prstGeom>
           <a:solidFill>
             <a:srgbClr val="FFFFFF"/>
           </a:solidFill>
-          <a:ln w="25400">
+          <a:ln w="19050">
             <a:solidFill>
-              <a:srgbClr val="2563EB"/>
+              <a:srgbClr val="D97706"/>
             </a:solidFill>
           </a:ln>
         </p:spPr>
@@ -17517,8 +19528,8 @@
         </p:nvSpPr>
         <p:spPr>
           <a:xfrm>
-            <a:off x="914400" y="1371600"/>
-            <a:ext cx="4846320" cy="4663440"/>
+            <a:off x="868680" y="1371600"/>
+            <a:ext cx="4983480" cy="274320"/>
           </a:xfrm>
           <a:prstGeom prst="rect">
             <a:avLst/>
@@ -17526,124 +19537,71 @@
           <a:noFill/>
         </p:spPr>
         <p:txBody>
-          <a:bodyPr wrap="square">
+          <a:bodyPr wrap="none" lIns="0" tIns="0" rIns="0" bIns="0">
             <a:spAutoFit/>
           </a:bodyPr>
           <a:lstStyle/>
           <a:p>
-            <a:pPr>
-              <a:spcAft>
-                <a:spcPts val="1200"/>
-              </a:spcAft>
-              <a:defRPr sz="1300" b="1">
-                <a:solidFill>
-                  <a:srgbClr val="2563EB"/>
-                </a:solidFill>
-                <a:latin typeface="Segoe UI"/>
-              </a:defRPr>
-            </a:pPr>
-            <a:r>
-              <a:t>NỀN TẢNG FPGA DIGILENT BASYS 3</a:t>
-            </a:r>
-          </a:p>
-          <a:p>
-            <a:pPr>
-              <a:lnSpc>
-                <a:spcPct val="120000"/>
-              </a:lnSpc>
-              <a:spcAft>
-                <a:spcPts val="1000"/>
-              </a:spcAft>
-              <a:defRPr sz="1050">
-                <a:solidFill>
-                  <a:srgbClr val="0F172A"/>
-                </a:solidFill>
-                <a:latin typeface="Segoe UI"/>
-              </a:defRPr>
-            </a:pPr>
-            <a:r>
-              <a:t>• Chip FPGA Xilinx Artix-7 (XC7A35T): 33,280 Logic Cells, 50 Block RAM 36Kb, 90 DSP Slices - nền tảng lý tưởng tạo mẫu SoC.</a:t>
-            </a:r>
-          </a:p>
-          <a:p>
-            <a:pPr>
-              <a:lnSpc>
-                <a:spcPct val="120000"/>
-              </a:lnSpc>
-              <a:spcAft>
-                <a:spcPts val="1000"/>
-              </a:spcAft>
-              <a:defRPr sz="1050">
-                <a:solidFill>
-                  <a:srgbClr val="0F172A"/>
-                </a:solidFill>
-                <a:latin typeface="Segoe UI"/>
-              </a:defRPr>
-            </a:pPr>
-            <a:r>
-              <a:t>• Tích hợp sẵn chip Flash SPI 32Mbit: Chip Spansion S25FL032P giao tiếp qua nguyên thủy STARTUPE2 của Xilinx.</a:t>
-            </a:r>
-          </a:p>
-          <a:p>
-            <a:pPr>
-              <a:lnSpc>
-                <a:spcPct val="120000"/>
-              </a:lnSpc>
-              <a:spcAft>
-                <a:spcPts val="1000"/>
-              </a:spcAft>
-              <a:defRPr sz="1050">
-                <a:solidFill>
-                  <a:srgbClr val="0F172A"/>
-                </a:solidFill>
-                <a:latin typeface="Segoe UI"/>
-              </a:defRPr>
-            </a:pPr>
-            <a:r>
-              <a:t>• Tích hợp mạch nạp &amp; UART FTDI: Cổng micro-USB cung cấp nguồn và kênh UART nối tiếp kết nối trực tiếp với máy tính.</a:t>
-            </a:r>
-          </a:p>
-          <a:p>
-            <a:pPr>
-              <a:lnSpc>
-                <a:spcPct val="120000"/>
-              </a:lnSpc>
-              <a:spcAft>
-                <a:spcPts val="1000"/>
-              </a:spcAft>
-              <a:defRPr sz="1050">
-                <a:solidFill>
-                  <a:srgbClr val="0F172A"/>
-                </a:solidFill>
-                <a:latin typeface="Segoe UI"/>
-              </a:defRPr>
-            </a:pPr>
-            <a:r>
-              <a:t>• Hệ thống hiển thị &amp; chẩn đoán tại chỗ: 16 LED đơn, 16 công tắc gạt (Switch) và 4 nút nhấn phục vụ chẩn đoán trạng thái.</a:t>
-            </a:r>
-          </a:p>
-        </p:txBody>
-      </p:sp>
-      <p:sp>
-        <p:nvSpPr>
-          <p:cNvPr id="10" name="Rounded Rectangle 9"/>
+            <a:pPr algn="ctr">
+              <a:defRPr sz="1050" b="1">
+                <a:solidFill>
+                  <a:srgbClr val="D97706"/>
+                </a:solidFill>
+                <a:latin typeface="Segoe UI"/>
+              </a:defRPr>
+            </a:pPr>
+            <a:r>
+              <a:t>MẠCH PHẦN CỨNG THỰC NGHIỆM (FPGA BASYS 3 &amp; RDM6300)</a:t>
+            </a:r>
+          </a:p>
+        </p:txBody>
+      </p:sp>
+      <p:pic>
+        <p:nvPicPr>
+          <p:cNvPr id="10" name="Picture 9" descr="Device.jpg"/>
+          <p:cNvPicPr>
+            <a:picLocks noChangeAspect="1"/>
+          </p:cNvPicPr>
+          <p:nvPr/>
+        </p:nvPicPr>
+        <p:blipFill>
+          <a:blip r:embed="rId2"/>
+          <a:stretch>
+            <a:fillRect/>
+          </a:stretch>
+        </p:blipFill>
+        <p:spPr>
+          <a:xfrm>
+            <a:off x="960120" y="1682496"/>
+            <a:ext cx="4800600" cy="3593592"/>
+          </a:xfrm>
+          <a:prstGeom prst="rect">
+            <a:avLst/>
+          </a:prstGeom>
+        </p:spPr>
+      </p:pic>
+      <p:sp>
+        <p:nvSpPr>
+          <p:cNvPr id="11" name="Rounded Rectangle 10"/>
           <p:cNvSpPr/>
           <p:nvPr/>
         </p:nvSpPr>
         <p:spPr>
           <a:xfrm>
-            <a:off x="6126480" y="1234440"/>
-            <a:ext cx="5212080" cy="4937760"/>
+            <a:off x="960120" y="5376672"/>
+            <a:ext cx="4800600" cy="749808"/>
           </a:xfrm>
           <a:prstGeom prst="roundRect">
-            <a:avLst/>
+            <a:avLst>
+              <a:gd name="adj" fmla="val 2000"/>
+            </a:avLst>
           </a:prstGeom>
           <a:solidFill>
-            <a:srgbClr val="FFFFFF"/>
+            <a:srgbClr val="F1F5F9"/>
           </a:solidFill>
-          <a:ln w="25400">
+          <a:ln w="12700">
             <a:solidFill>
-              <a:srgbClr val="D97706"/>
+              <a:srgbClr val="CBD5E1"/>
             </a:solidFill>
           </a:ln>
         </p:spPr>
@@ -17671,14 +19629,14 @@
       </p:sp>
       <p:sp>
         <p:nvSpPr>
-          <p:cNvPr id="11" name="TextBox 10"/>
+          <p:cNvPr id="12" name="TextBox 11"/>
           <p:cNvSpPr txBox="1"/>
           <p:nvPr/>
         </p:nvSpPr>
         <p:spPr>
           <a:xfrm>
-            <a:off x="6309360" y="1371600"/>
-            <a:ext cx="4846320" cy="4663440"/>
+            <a:off x="1078992" y="5413248"/>
+            <a:ext cx="4572000" cy="658368"/>
           </a:xfrm>
           <a:prstGeom prst="rect">
             <a:avLst/>
@@ -17686,16 +19644,16 @@
           <a:noFill/>
         </p:spPr>
         <p:txBody>
-          <a:bodyPr wrap="square">
+          <a:bodyPr wrap="square" lIns="0" tIns="0" rIns="0" bIns="0">
             <a:spAutoFit/>
           </a:bodyPr>
           <a:lstStyle/>
           <a:p>
             <a:pPr>
               <a:spcAft>
-                <a:spcPts val="1200"/>
-              </a:spcAft>
-              <a:defRPr sz="1300" b="1">
+                <a:spcPts val="200"/>
+              </a:spcAft>
+              <a:defRPr sz="819" b="1">
                 <a:solidFill>
                   <a:srgbClr val="D97706"/>
                 </a:solidFill>
@@ -17703,18 +19661,15 @@
               </a:defRPr>
             </a:pPr>
             <a:r>
-              <a:t>MODULE ĐẦU ĐỌC RFID RDM6300 125KHZ</a:t>
-            </a:r>
-          </a:p>
-          <a:p>
-            <a:pPr>
-              <a:lnSpc>
-                <a:spcPct val="120000"/>
-              </a:lnSpc>
-              <a:spcAft>
-                <a:spcPts val="1000"/>
-              </a:spcAft>
-              <a:defRPr sz="1050">
+              <a:t>TỔ CHỨC MẠCH GHÉP NỐI NGOẠI VI:</a:t>
+            </a:r>
+          </a:p>
+          <a:p>
+            <a:pPr>
+              <a:lnSpc>
+                <a:spcPct val="115000"/>
+              </a:lnSpc>
+              <a:defRPr sz="780">
                 <a:solidFill>
                   <a:srgbClr val="0F172A"/>
                 </a:solidFill>
@@ -17722,18 +19677,241 @@
               </a:defRPr>
             </a:pPr>
             <a:r>
+              <a:t>• Mạch nguồn MB102 cấp riêng 5V DC cho RDM6300 (PMOD chỉ cấp 3.3V, chung mass GND).</a:t>
+            </a:r>
+            <a:br/>
+            <a:r>
+              <a:t>• Điện trở đệm 1kΩ mắc nối tiếp chân TX RDM6300 sang JA1 Basys 3 bảo vệ I/O 3.3V FPGA.</a:t>
+            </a:r>
+          </a:p>
+        </p:txBody>
+      </p:sp>
+      <p:sp>
+        <p:nvSpPr>
+          <p:cNvPr id="13" name="Rounded Rectangle 12"/>
+          <p:cNvSpPr/>
+          <p:nvPr/>
+        </p:nvSpPr>
+        <p:spPr>
+          <a:xfrm>
+            <a:off x="6172200" y="1234440"/>
+            <a:ext cx="5285232" cy="5029200"/>
+          </a:xfrm>
+          <a:prstGeom prst="roundRect">
+            <a:avLst>
+              <a:gd name="adj" fmla="val 2000"/>
+            </a:avLst>
+          </a:prstGeom>
+          <a:solidFill>
+            <a:srgbClr val="FFFFFF"/>
+          </a:solidFill>
+          <a:ln w="19050">
+            <a:solidFill>
+              <a:srgbClr val="D97706"/>
+            </a:solidFill>
+          </a:ln>
+        </p:spPr>
+        <p:style>
+          <a:lnRef idx="1">
+            <a:schemeClr val="accent1"/>
+          </a:lnRef>
+          <a:fillRef idx="3">
+            <a:schemeClr val="accent1"/>
+          </a:fillRef>
+          <a:effectRef idx="2">
+            <a:schemeClr val="accent1"/>
+          </a:effectRef>
+          <a:fontRef idx="minor">
+            <a:schemeClr val="lt1"/>
+          </a:fontRef>
+        </p:style>
+        <p:txBody>
+          <a:bodyPr rtlCol="0" anchor="ctr"/>
+          <a:lstStyle/>
+          <a:p>
+            <a:pPr algn="ctr"/>
+          </a:p>
+        </p:txBody>
+      </p:sp>
+      <p:sp>
+        <p:nvSpPr>
+          <p:cNvPr id="14" name="TextBox 13"/>
+          <p:cNvSpPr txBox="1"/>
+          <p:nvPr/>
+        </p:nvSpPr>
+        <p:spPr>
+          <a:xfrm>
+            <a:off x="6446520" y="1371600"/>
+            <a:ext cx="4800600" cy="4754880"/>
+          </a:xfrm>
+          <a:prstGeom prst="rect">
+            <a:avLst/>
+          </a:prstGeom>
+          <a:noFill/>
+        </p:spPr>
+        <p:txBody>
+          <a:bodyPr wrap="square" lIns="0" tIns="0" rIns="0" bIns="0">
+            <a:spAutoFit/>
+          </a:bodyPr>
+          <a:lstStyle/>
+          <a:p>
+            <a:pPr>
+              <a:spcAft>
+                <a:spcPts val="400"/>
+              </a:spcAft>
+              <a:defRPr b="1" sz="1150">
+                <a:solidFill>
+                  <a:srgbClr val="D97706"/>
+                </a:solidFill>
+                <a:latin typeface="Segoe UI"/>
+              </a:defRPr>
+            </a:pPr>
+            <a:r>
+              <a:t>ĐẶC TẢ KỸ THUẬT PHẦN CỨNG BASYS 3 &amp; RDM6300</a:t>
+            </a:r>
+          </a:p>
+          <a:p>
+            <a:pPr>
+              <a:spcBef>
+                <a:spcPts val="300"/>
+              </a:spcBef>
+              <a:spcAft>
+                <a:spcPts val="100"/>
+              </a:spcAft>
+              <a:defRPr sz="880" b="1">
+                <a:solidFill>
+                  <a:srgbClr val="2563EB"/>
+                </a:solidFill>
+                <a:latin typeface="Segoe UI"/>
+              </a:defRPr>
+            </a:pPr>
+            <a:r>
+              <a:t>1. BO MẠCH FPGA DIGILENT BASYS 3</a:t>
+            </a:r>
+          </a:p>
+          <a:p>
+            <a:pPr>
+              <a:lnSpc>
+                <a:spcPct val="110000"/>
+              </a:lnSpc>
+              <a:spcAft>
+                <a:spcPts val="150"/>
+              </a:spcAft>
+              <a:defRPr sz="780">
+                <a:solidFill>
+                  <a:srgbClr val="0F172A"/>
+                </a:solidFill>
+                <a:latin typeface="Segoe UI"/>
+              </a:defRPr>
+            </a:pPr>
+            <a:r>
+              <a:t>• Chip FPGA Xilinx Artix-7 (XC7A35T): 33,280 Logic Cells, 50 Block RAM 36Kb, 90 DSP Slices - nền tảng lý tưởng tạo mẫu SoC.</a:t>
+            </a:r>
+          </a:p>
+          <a:p>
+            <a:pPr>
+              <a:lnSpc>
+                <a:spcPct val="110000"/>
+              </a:lnSpc>
+              <a:spcAft>
+                <a:spcPts val="150"/>
+              </a:spcAft>
+              <a:defRPr sz="780">
+                <a:solidFill>
+                  <a:srgbClr val="0F172A"/>
+                </a:solidFill>
+                <a:latin typeface="Segoe UI"/>
+              </a:defRPr>
+            </a:pPr>
+            <a:r>
+              <a:t>• Tích hợp sẵn chip Flash SPI 32Mbit: Chip Spansion S25FL032P giao tiếp qua nguyên thủy STARTUPE2 của Xilinx.</a:t>
+            </a:r>
+          </a:p>
+          <a:p>
+            <a:pPr>
+              <a:lnSpc>
+                <a:spcPct val="110000"/>
+              </a:lnSpc>
+              <a:spcAft>
+                <a:spcPts val="150"/>
+              </a:spcAft>
+              <a:defRPr sz="780">
+                <a:solidFill>
+                  <a:srgbClr val="0F172A"/>
+                </a:solidFill>
+                <a:latin typeface="Segoe UI"/>
+              </a:defRPr>
+            </a:pPr>
+            <a:r>
+              <a:t>• Mạch nạp &amp; UART FTDI tích hợp: Cổng micro-USB cấp nguồn và mở kênh UART nối tiếp kết nối trực tiếp với máy tính.</a:t>
+            </a:r>
+          </a:p>
+          <a:p>
+            <a:pPr>
+              <a:lnSpc>
+                <a:spcPct val="110000"/>
+              </a:lnSpc>
+              <a:spcAft>
+                <a:spcPts val="150"/>
+              </a:spcAft>
+              <a:defRPr sz="780">
+                <a:solidFill>
+                  <a:srgbClr val="0F172A"/>
+                </a:solidFill>
+                <a:latin typeface="Segoe UI"/>
+              </a:defRPr>
+            </a:pPr>
+            <a:r>
+              <a:t>• Hệ thống hiển thị &amp; chẩn đoán: 16 LED đơn, 16 công tắc gạt (Switch) và LED 7 đoạn hiển thị trạng thái quẹt thẻ.</a:t>
+            </a:r>
+          </a:p>
+          <a:p>
+            <a:pPr>
+              <a:spcBef>
+                <a:spcPts val="300"/>
+              </a:spcBef>
+              <a:spcAft>
+                <a:spcPts val="100"/>
+              </a:spcAft>
+              <a:defRPr sz="880" b="1">
+                <a:solidFill>
+                  <a:srgbClr val="D97706"/>
+                </a:solidFill>
+                <a:latin typeface="Segoe UI"/>
+              </a:defRPr>
+            </a:pPr>
+            <a:r>
+              <a:t>2. MODULE ĐẦU ĐỌC RFID RDM6300 125KHZ</a:t>
+            </a:r>
+          </a:p>
+          <a:p>
+            <a:pPr>
+              <a:lnSpc>
+                <a:spcPct val="110000"/>
+              </a:lnSpc>
+              <a:spcAft>
+                <a:spcPts val="150"/>
+              </a:spcAft>
+              <a:defRPr sz="780">
+                <a:solidFill>
+                  <a:srgbClr val="0F172A"/>
+                </a:solidFill>
+                <a:latin typeface="Segoe UI"/>
+              </a:defRPr>
+            </a:pPr>
+            <a:r>
               <a:t>• Tần số sóng mang 125 kHz EM4100: Tần số tiêu chuẩn công nghiệp cho thẻ cảm ứng tầm gần (khoảng cách đọc 20 - 50 mm).</a:t>
             </a:r>
           </a:p>
           <a:p>
             <a:pPr>
               <a:lnSpc>
-                <a:spcPct val="120000"/>
-              </a:lnSpc>
-              <a:spcAft>
-                <a:spcPts val="1000"/>
-              </a:spcAft>
-              <a:defRPr sz="1050">
+                <a:spcPct val="110000"/>
+              </a:lnSpc>
+              <a:spcAft>
+                <a:spcPts val="150"/>
+              </a:spcAft>
+              <a:defRPr sz="780">
                 <a:solidFill>
                   <a:srgbClr val="0F172A"/>
                 </a:solidFill>
@@ -17741,18 +19919,18 @@
               </a:defRPr>
             </a:pPr>
             <a:r>
-              <a:t>• Giao tiếp UART 9600-8-N-1 tự động: Module tự động điều chế và phát ra khung dữ liệu ASCII 14 byte ngay khi phát hiện thẻ.</a:t>
-            </a:r>
-          </a:p>
-          <a:p>
-            <a:pPr>
-              <a:lnSpc>
-                <a:spcPct val="120000"/>
-              </a:lnSpc>
-              <a:spcAft>
-                <a:spcPts val="1000"/>
-              </a:spcAft>
-              <a:defRPr sz="1050">
+              <a:t>• Giao tiếp UART 9600-8-N-1 tự động: Tự động giải mã và phát ra khung dữ liệu ASCII 14 byte (Start 0x02, 10B UID, 2B XOR, Stop 0x03).</a:t>
+            </a:r>
+          </a:p>
+          <a:p>
+            <a:pPr>
+              <a:lnSpc>
+                <a:spcPct val="110000"/>
+              </a:lnSpc>
+              <a:spcAft>
+                <a:spcPts val="150"/>
+              </a:spcAft>
+              <a:defRPr sz="780">
                 <a:solidFill>
                   <a:srgbClr val="0F172A"/>
                 </a:solidFill>
@@ -17760,18 +19938,37 @@
               </a:defRPr>
             </a:pPr>
             <a:r>
-              <a:t>• Cấu trúc khung dữ liệu an toàn: Gồm 1 byte Start (0x02), 10 byte mã thẻ Hex, 2 byte Checksum XOR và 1 byte Stop (0x03).</a:t>
-            </a:r>
-          </a:p>
-          <a:p>
-            <a:pPr>
-              <a:lnSpc>
-                <a:spcPct val="120000"/>
-              </a:lnSpc>
-              <a:spcAft>
-                <a:spcPts val="1000"/>
-              </a:spcAft>
-              <a:defRPr sz="1050">
+              <a:t>• Ăng-ten cuộn cảm rời linh hoạt: Dễ dàng bố trí tại cửa kiểm soát mà không gây can nhiễu từ trường đến mạch số.</a:t>
+            </a:r>
+          </a:p>
+          <a:p>
+            <a:pPr>
+              <a:spcBef>
+                <a:spcPts val="300"/>
+              </a:spcBef>
+              <a:spcAft>
+                <a:spcPts val="100"/>
+              </a:spcAft>
+              <a:defRPr sz="880" b="1">
+                <a:solidFill>
+                  <a:srgbClr val="E11D48"/>
+                </a:solidFill>
+                <a:latin typeface="Segoe UI"/>
+              </a:defRPr>
+            </a:pPr>
+            <a:r>
+              <a:t>3. PHỐI HỢP NGUỒN 5V NGOÀI &amp; ĐIỆN TRỞ 1KΩ</a:t>
+            </a:r>
+          </a:p>
+          <a:p>
+            <a:pPr>
+              <a:lnSpc>
+                <a:spcPct val="110000"/>
+              </a:lnSpc>
+              <a:spcAft>
+                <a:spcPts val="150"/>
+              </a:spcAft>
+              <a:defRPr sz="780">
                 <a:solidFill>
                   <a:srgbClr val="0F172A"/>
                 </a:solidFill>
@@ -17779,7 +19976,26 @@
               </a:defRPr>
             </a:pPr>
             <a:r>
-              <a:t>• Ăng-ten cuộn cảm rời linh hoạt: Dễ dàng lắp đặt tại cửa kiểm soát mà không gây can nhiễu từ trường đến mạch số.</a:t>
+              <a:t>• Mạch nguồn 5V riêng: Module MB102 cấp đủ 5V nuôi cuộn cảm ăng-ten (ở 3.3V không đọc được thẻ); nối chung GND với Basys 3.</a:t>
+            </a:r>
+          </a:p>
+          <a:p>
+            <a:pPr>
+              <a:lnSpc>
+                <a:spcPct val="110000"/>
+              </a:lnSpc>
+              <a:spcAft>
+                <a:spcPts val="150"/>
+              </a:spcAft>
+              <a:defRPr sz="780">
+                <a:solidFill>
+                  <a:srgbClr val="0F172A"/>
+                </a:solidFill>
+                <a:latin typeface="Segoe UI"/>
+              </a:defRPr>
+            </a:pPr>
+            <a:r>
+              <a:t>• Điện trở đệm 1kΩ trên chân TX: Hạn dòng bảo vệ diode kẹp chân I/O 3.3V FPGA Artix-7 khỏi mức áp 5V TTL của RDM6300.</a:t>
             </a:r>
           </a:p>
         </p:txBody>
@@ -18050,7 +20266,7 @@
               </a:defRPr>
             </a:pPr>
             <a:r>
-              <a:t>05 / 24</a:t>
+              <a:t>05 / 26</a:t>
             </a:r>
           </a:p>
         </p:txBody>
@@ -18067,7 +20283,9 @@
             <a:ext cx="3429000" cy="4846320"/>
           </a:xfrm>
           <a:prstGeom prst="roundRect">
-            <a:avLst/>
+            <a:avLst>
+              <a:gd name="adj" fmla="val 2000"/>
+            </a:avLst>
           </a:prstGeom>
           <a:solidFill>
             <a:srgbClr val="FFFFFF"/>
@@ -18208,7 +20426,9 @@
             <a:ext cx="3429000" cy="4846320"/>
           </a:xfrm>
           <a:prstGeom prst="roundRect">
-            <a:avLst/>
+            <a:avLst>
+              <a:gd name="adj" fmla="val 2000"/>
+            </a:avLst>
           </a:prstGeom>
           <a:solidFill>
             <a:srgbClr val="FFFFFF"/>
@@ -18349,7 +20569,9 @@
             <a:ext cx="3429000" cy="4846320"/>
           </a:xfrm>
           <a:prstGeom prst="roundRect">
-            <a:avLst/>
+            <a:avLst>
+              <a:gd name="adj" fmla="val 2000"/>
+            </a:avLst>
           </a:prstGeom>
           <a:solidFill>
             <a:srgbClr val="FFFFFF"/>
@@ -18744,7 +20966,7 @@
               </a:defRPr>
             </a:pPr>
             <a:r>
-              <a:t>06 / 24</a:t>
+              <a:t>06 / 26</a:t>
             </a:r>
           </a:p>
         </p:txBody>
@@ -18761,7 +20983,9 @@
             <a:ext cx="6766560" cy="4937760"/>
           </a:xfrm>
           <a:prstGeom prst="roundRect">
-            <a:avLst/>
+            <a:avLst>
+              <a:gd name="adj" fmla="val 2000"/>
+            </a:avLst>
           </a:prstGeom>
           <a:solidFill>
             <a:srgbClr val="FFFFFF"/>
@@ -18830,7 +21054,9 @@
             <a:ext cx="3776472" cy="4937760"/>
           </a:xfrm>
           <a:prstGeom prst="roundRect">
-            <a:avLst/>
+            <a:avLst>
+              <a:gd name="adj" fmla="val 2000"/>
+            </a:avLst>
           </a:prstGeom>
           <a:solidFill>
             <a:srgbClr val="FFFFFF"/>
@@ -19263,7 +21489,7 @@
               </a:defRPr>
             </a:pPr>
             <a:r>
-              <a:t>07 / 24</a:t>
+              <a:t>07 / 26</a:t>
             </a:r>
           </a:p>
         </p:txBody>
@@ -19280,7 +21506,9 @@
             <a:ext cx="5257800" cy="5029200"/>
           </a:xfrm>
           <a:prstGeom prst="roundRect">
-            <a:avLst/>
+            <a:avLst>
+              <a:gd name="adj" fmla="val 2000"/>
+            </a:avLst>
           </a:prstGeom>
           <a:solidFill>
             <a:srgbClr val="FFFFFF"/>
@@ -19349,7 +21577,9 @@
             <a:ext cx="5285232" cy="5029200"/>
           </a:xfrm>
           <a:prstGeom prst="roundRect">
-            <a:avLst/>
+            <a:avLst>
+              <a:gd name="adj" fmla="val 2000"/>
+            </a:avLst>
           </a:prstGeom>
           <a:solidFill>
             <a:srgbClr val="FFFFFF"/>
@@ -19473,7 +21703,7 @@
               </a:defRPr>
             </a:pPr>
             <a:r>
-              <a:t>• Bổ sung 1KB SRAM nội (data_sram): Do spimemio chỉ hỗ trợ đọc XIP nên KHÔNG THỂ LƯU STACK C! Ta bổ sung 256 words SRAM tĩnh (0x0000_0000 - 0x0000_03FF), phản hồi sram_ready = 1 tức thì trong 1 chu kỳ clock để lưu trữ con trỏ ngăn xếp (sp) và biến cục bộ.</a:t>
+              <a:t>• Bổ sung 1KB SRAM nội (data_sram): Stack C và biến cục bộ bắt buộc phải đặt trong RAM (bộ nhớ Volatile) vì đòi hỏi đọc/ghi ngẫu nhiên liên tục ở 1 chu kỳ clock và độ bền vô hạn (bộ nhớ Non-Volatile như Flash không thể đáp ứng). Do đó, thiết kế tích hợp 256 words SRAM tĩnh (0x0000_0000 - 0x0000_03FF) phản hồi sram_ready = 1 tức thì.</a:t>
             </a:r>
           </a:p>
           <a:p>
@@ -19492,7 +21722,7 @@
               </a:defRPr>
             </a:pPr>
             <a:r>
-              <a:t>• Ý nghĩa kỹ thuật tối thượng: Kết hợp 'Flash ngoài 4MB lưu mã lệnh' + '1KB SRAM nội lưu Stack' giúp tiết kiệm tối đa diện tích silicon ASIC nhưng vẫn chạy được toàn bộ ứng dụng C.</a:t>
+              <a:t>• Ý nghĩa kỹ thuật tối thượng: Phân tầng kiến trúc tối ưu: 'Flash ngoài Non-Volatile lưu mã lệnh XIP' + '1KB SRAM nội Volatile lưu Stack C' giúp tiết kiệm tối đa diện tích silicon ASIC nhưng vẫn chạy trơn tru toàn bộ ứng dụng C.</a:t>
             </a:r>
           </a:p>
           <a:p>
@@ -19779,7 +22009,7 @@
               </a:defRPr>
             </a:pPr>
             <a:r>
-              <a:t>08 / 24</a:t>
+              <a:t>08 / 26</a:t>
             </a:r>
           </a:p>
         </p:txBody>
@@ -19796,7 +22026,9 @@
             <a:ext cx="5257800" cy="5029200"/>
           </a:xfrm>
           <a:prstGeom prst="roundRect">
-            <a:avLst/>
+            <a:avLst>
+              <a:gd name="adj" fmla="val 2000"/>
+            </a:avLst>
           </a:prstGeom>
           <a:solidFill>
             <a:srgbClr val="FFFFFF"/>
@@ -19865,7 +22097,9 @@
             <a:ext cx="5285232" cy="5029200"/>
           </a:xfrm>
           <a:prstGeom prst="roundRect">
-            <a:avLst/>
+            <a:avLst>
+              <a:gd name="adj" fmla="val 2000"/>
+            </a:avLst>
           </a:prstGeom>
           <a:solidFill>
             <a:srgbClr val="FFFFFF"/>
@@ -20315,7 +22549,7 @@
               </a:defRPr>
             </a:pPr>
             <a:r>
-              <a:t>09 / 24</a:t>
+              <a:t>09 / 26</a:t>
             </a:r>
           </a:p>
         </p:txBody>
@@ -20332,7 +22566,9 @@
             <a:ext cx="5257800" cy="5029200"/>
           </a:xfrm>
           <a:prstGeom prst="roundRect">
-            <a:avLst/>
+            <a:avLst>
+              <a:gd name="adj" fmla="val 2000"/>
+            </a:avLst>
           </a:prstGeom>
           <a:solidFill>
             <a:srgbClr val="FFFFFF"/>
@@ -20401,7 +22637,9 @@
             <a:ext cx="5285232" cy="5029200"/>
           </a:xfrm>
           <a:prstGeom prst="roundRect">
-            <a:avLst/>
+            <a:avLst>
+              <a:gd name="adj" fmla="val 2000"/>
+            </a:avLst>
           </a:prstGeom>
           <a:solidFill>
             <a:srgbClr val="FFFFFF"/>

--- a/rdm6300-picorv32-rom-data/document/Bao_Cao_Do_An_RDM6300_PicoRV32_SoC.pptx
+++ b/rdm6300-picorv32-rom-data/document/Bao_Cao_Do_An_RDM6300_PicoRV32_SoC.pptx
@@ -3209,8 +3209,8 @@
         </p:nvSpPr>
         <p:spPr>
           <a:xfrm>
-            <a:off x="1097280" y="960120"/>
-            <a:ext cx="9966960" cy="4937760"/>
+            <a:off x="868680" y="960120"/>
+            <a:ext cx="10469880" cy="4937760"/>
           </a:xfrm>
           <a:prstGeom prst="rect">
             <a:avLst/>
@@ -3218,16 +3218,16 @@
           <a:noFill/>
         </p:spPr>
         <p:txBody>
-          <a:bodyPr wrap="square">
+          <a:bodyPr wrap="square" lIns="45720" rIns="45720">
             <a:spAutoFit/>
           </a:bodyPr>
           <a:lstStyle/>
           <a:p>
             <a:pPr>
               <a:spcAft>
-                <a:spcPts val="1200"/>
-              </a:spcAft>
-              <a:defRPr sz="1200" b="1">
+                <a:spcPts val="1600"/>
+              </a:spcAft>
+              <a:defRPr sz="1350" b="1">
                 <a:solidFill>
                   <a:srgbClr val="0EA5E9"/>
                 </a:solidFill>
@@ -3235,18 +3235,18 @@
               </a:defRPr>
             </a:pPr>
             <a:r>
-              <a:t>TRƯỜNG ĐẠI HỌC BÁCH KHOA HÀ NỘI — KHOA ĐIỆN TỬ VIỄN THÔNG</a:t>
-            </a:r>
-          </a:p>
-          <a:p>
-            <a:pPr>
-              <a:lnSpc>
-                <a:spcPct val="115000"/>
-              </a:lnSpc>
-              <a:spcAft>
-                <a:spcPts val="1400"/>
-              </a:spcAft>
-              <a:defRPr sz="2000" b="1">
+              <a:t>FPT JETKING — CHIP DESIGN</a:t>
+            </a:r>
+          </a:p>
+          <a:p>
+            <a:pPr>
+              <a:lnSpc>
+                <a:spcPct val="125000"/>
+              </a:lnSpc>
+              <a:spcAft>
+                <a:spcPts val="1600"/>
+              </a:spcAft>
+              <a:defRPr sz="1750" b="1">
                 <a:solidFill>
                   <a:srgbClr val="FFFFFF"/>
                 </a:solidFill>
@@ -3254,19 +3254,19 @@
               </a:defRPr>
             </a:pPr>
             <a:r>
-              <a:t>THIẾT KẾ VI HỆ THỐNG TRÊN CHIP (SoC) CHO THIẾT BỊ</a:t>
+              <a:t>THIẾT KẾ HỆ THỐNG XỬ LÝ DỮ LIỆU CỦA THẺ RA VÀO RFID 125KHZ OFFLINE</a:t>
             </a:r>
             <a:br/>
             <a:r>
-              <a:t>KIỂM SOÁT RA VÀO OFFLINE SỬ DỤNG RFID RDM6300 VÀ SPI FLASH</a:t>
-            </a:r>
-          </a:p>
-          <a:p>
-            <a:pPr>
-              <a:spcAft>
-                <a:spcPts val="2200"/>
-              </a:spcAft>
-              <a:defRPr sz="1150">
+              <a:t>TÍCH HỢP CPU RISC-V PICORV32 &amp; XỬ LÝ NGHIỆP VỤ DỮ LIỆU THẺ BẰNG FIRMWARE C</a:t>
+            </a:r>
+          </a:p>
+          <a:p>
+            <a:pPr>
+              <a:spcAft>
+                <a:spcPts val="2400"/>
+              </a:spcAft>
+              <a:defRPr sz="1200">
                 <a:solidFill>
                   <a:srgbClr val="CBD5E1"/>
                 </a:solidFill>
@@ -3274,15 +3274,15 @@
               </a:defRPr>
             </a:pPr>
             <a:r>
-              <a:t>Tích hợp CPU RISC-V PicoRV32 | Kiến trúc Boot Flash XIP | Tạo mẫu Basys 3 FPGA | Ký duyệt ASIC OpenLane 2 (SkyWater 130nm)</a:t>
-            </a:r>
-          </a:p>
-          <a:p>
-            <a:pPr>
-              <a:spcAft>
-                <a:spcPts val="500"/>
-              </a:spcAft>
-              <a:defRPr sz="1200" b="1">
+              <a:t>Giao tiếp RFID RDM6300 | Lưu trữ Whitelist SPI Flash NVM | Tạo mẫu Basys 3 FPGA | Ký duyệt ASIC OpenLane 2 (Sky130)</a:t>
+            </a:r>
+          </a:p>
+          <a:p>
+            <a:pPr>
+              <a:spcAft>
+                <a:spcPts val="600"/>
+              </a:spcAft>
+              <a:defRPr sz="1300" b="1">
                 <a:solidFill>
                   <a:srgbClr val="FFFFFF"/>
                 </a:solidFill>
@@ -3290,15 +3290,15 @@
               </a:defRPr>
             </a:pPr>
             <a:r>
-              <a:t>Sinh viên thực hiện :  Thái Tuấn Hiệp  -  MSSV: 20210328  (Chuyên ngành Kỹ thuật Vi điện tử)</a:t>
-            </a:r>
-          </a:p>
-          <a:p>
-            <a:pPr>
-              <a:spcAft>
-                <a:spcPts val="500"/>
-              </a:spcAft>
-              <a:defRPr sz="1150">
+              <a:t>Học viên thực hiện :  Thái Tuấn Hiệp</a:t>
+            </a:r>
+          </a:p>
+          <a:p>
+            <a:pPr>
+              <a:spcAft>
+                <a:spcPts val="600"/>
+              </a:spcAft>
+              <a:defRPr sz="1250">
                 <a:solidFill>
                   <a:srgbClr val="E2E8F0"/>
                 </a:solidFill>
@@ -3306,12 +3306,12 @@
               </a:defRPr>
             </a:pPr>
             <a:r>
-              <a:t>Giảng viên hướng dẫn :  ThS. Nguyễn Văn Đông  -  Bộ môn Kỹ thuật Máy tính &amp; Vi điện tử</a:t>
-            </a:r>
-          </a:p>
-          <a:p>
-            <a:pPr>
-              <a:defRPr sz="1050" i="1">
+              <a:t>Giảng viên hướng dẫn :  ThS. Nguyễn Văn Đông</a:t>
+            </a:r>
+          </a:p>
+          <a:p>
+            <a:pPr>
+              <a:defRPr sz="1150" i="1">
                 <a:solidFill>
                   <a:srgbClr val="94A3B8"/>
                 </a:solidFill>
@@ -3319,7 +3319,7 @@
               </a:defRPr>
             </a:pPr>
             <a:r>
-              <a:t>Thời gian thực hiện :  Học kỳ 2025.2 - 2026.1  |  Địa điểm: Phòng thí nghiệm Thiết kế Vi mạch VLSI</a:t>
+              <a:t>Học kỳ :  SEM3  |  Chuyên ngành: Thiết kế Vi mạch Bán dẫn (Chip Design)</a:t>
             </a:r>
           </a:p>
         </p:txBody>
@@ -3554,7 +3554,7 @@
               </a:defRPr>
             </a:pPr>
             <a:r>
-              <a:t>Đồ Án Tốt Nghiệp: SoC PicoRV32 RFID RDM6300 &amp; SPI Flash | SV: Thái Tuấn Hiệp | GVHD: ThS. Nguyễn Văn Đông</a:t>
+              <a:t>Đồ Án: SoC PicoRV32 RFID RDM6300 &amp; SPI Flash | FPT Jetking Chip Design - SEM3 | HV: Thái Tuấn Hiệp</a:t>
             </a:r>
           </a:p>
         </p:txBody>
@@ -4093,7 +4093,7 @@
               </a:defRPr>
             </a:pPr>
             <a:r>
-              <a:t>Đồ Án Tốt Nghiệp: SoC PicoRV32 RFID RDM6300 &amp; SPI Flash | SV: Thái Tuấn Hiệp | GVHD: ThS. Nguyễn Văn Đông</a:t>
+              <a:t>Đồ Án: SoC PicoRV32 RFID RDM6300 &amp; SPI Flash | FPT Jetking Chip Design - SEM3 | HV: Thái Tuấn Hiệp</a:t>
             </a:r>
           </a:p>
         </p:txBody>
@@ -4637,7 +4637,7 @@
               </a:defRPr>
             </a:pPr>
             <a:r>
-              <a:t>Đồ Án Tốt Nghiệp: SoC PicoRV32 RFID RDM6300 &amp; SPI Flash | SV: Thái Tuấn Hiệp | GVHD: ThS. Nguyễn Văn Đông</a:t>
+              <a:t>Đồ Án: SoC PicoRV32 RFID RDM6300 &amp; SPI Flash | FPT Jetking Chip Design - SEM3 | HV: Thái Tuấn Hiệp</a:t>
             </a:r>
           </a:p>
         </p:txBody>
@@ -5502,7 +5502,7 @@
               </a:defRPr>
             </a:pPr>
             <a:r>
-              <a:t>Đồ Án Tốt Nghiệp: SoC PicoRV32 RFID RDM6300 &amp; SPI Flash | SV: Thái Tuấn Hiệp | GVHD: ThS. Nguyễn Văn Đông</a:t>
+              <a:t>Đồ Án: SoC PicoRV32 RFID RDM6300 &amp; SPI Flash | FPT Jetking Chip Design - SEM3 | HV: Thái Tuấn Hiệp</a:t>
             </a:r>
           </a:p>
         </p:txBody>
@@ -6177,7 +6177,7 @@
               </a:defRPr>
             </a:pPr>
             <a:r>
-              <a:t>Đồ Án Tốt Nghiệp: SoC PicoRV32 RFID RDM6300 &amp; SPI Flash | SV: Thái Tuấn Hiệp | GVHD: ThS. Nguyễn Văn Đông</a:t>
+              <a:t>Đồ Án: SoC PicoRV32 RFID RDM6300 &amp; SPI Flash | FPT Jetking Chip Design - SEM3 | HV: Thái Tuấn Hiệp</a:t>
             </a:r>
           </a:p>
         </p:txBody>
@@ -7260,7 +7260,7 @@
               </a:defRPr>
             </a:pPr>
             <a:r>
-              <a:t>Đồ Án Tốt Nghiệp: SoC PicoRV32 RFID RDM6300 &amp; SPI Flash | SV: Thái Tuấn Hiệp | GVHD: ThS. Nguyễn Văn Đông</a:t>
+              <a:t>Đồ Án: SoC PicoRV32 RFID RDM6300 &amp; SPI Flash | FPT Jetking Chip Design - SEM3 | HV: Thái Tuấn Hiệp</a:t>
             </a:r>
           </a:p>
         </p:txBody>
@@ -8389,7 +8389,7 @@
               </a:defRPr>
             </a:pPr>
             <a:r>
-              <a:t>Đồ Án Tốt Nghiệp: SoC PicoRV32 RFID RDM6300 &amp; SPI Flash | SV: Thái Tuấn Hiệp | GVHD: ThS. Nguyễn Văn Đông</a:t>
+              <a:t>Đồ Án: SoC PicoRV32 RFID RDM6300 &amp; SPI Flash | FPT Jetking Chip Design - SEM3 | HV: Thái Tuấn Hiệp</a:t>
             </a:r>
           </a:p>
         </p:txBody>
@@ -9442,7 +9442,7 @@
               </a:defRPr>
             </a:pPr>
             <a:r>
-              <a:t>Đồ Án Tốt Nghiệp: SoC PicoRV32 RFID RDM6300 &amp; SPI Flash | SV: Thái Tuấn Hiệp | GVHD: ThS. Nguyễn Văn Đông</a:t>
+              <a:t>Đồ Án: SoC PicoRV32 RFID RDM6300 &amp; SPI Flash | FPT Jetking Chip Design - SEM3 | HV: Thái Tuấn Hiệp</a:t>
             </a:r>
           </a:p>
         </p:txBody>
@@ -10581,7 +10581,7 @@
               </a:defRPr>
             </a:pPr>
             <a:r>
-              <a:t>Đồ Án Tốt Nghiệp: SoC PicoRV32 RFID RDM6300 &amp; SPI Flash | SV: Thái Tuấn Hiệp | GVHD: ThS. Nguyễn Văn Đông</a:t>
+              <a:t>Đồ Án: SoC PicoRV32 RFID RDM6300 &amp; SPI Flash | FPT Jetking Chip Design - SEM3 | HV: Thái Tuấn Hiệp</a:t>
             </a:r>
           </a:p>
         </p:txBody>
@@ -11583,7 +11583,7 @@
               </a:defRPr>
             </a:pPr>
             <a:r>
-              <a:t>Đồ Án Tốt Nghiệp: SoC PicoRV32 RFID RDM6300 &amp; SPI Flash | SV: Thái Tuấn Hiệp | GVHD: ThS. Nguyễn Văn Đông</a:t>
+              <a:t>Đồ Án: SoC PicoRV32 RFID RDM6300 &amp; SPI Flash | FPT Jetking Chip Design - SEM3 | HV: Thái Tuấn Hiệp</a:t>
             </a:r>
           </a:p>
         </p:txBody>
@@ -12532,7 +12532,7 @@
               </a:defRPr>
             </a:pPr>
             <a:r>
-              <a:t>Đồ Án Tốt Nghiệp: SoC PicoRV32 RFID RDM6300 &amp; SPI Flash | SV: Thái Tuấn Hiệp | GVHD: ThS. Nguyễn Văn Đông</a:t>
+              <a:t>Đồ Án: SoC PicoRV32 RFID RDM6300 &amp; SPI Flash | FPT Jetking Chip Design - SEM3 | HV: Thái Tuấn Hiệp</a:t>
             </a:r>
           </a:p>
         </p:txBody>
@@ -13415,7 +13415,7 @@
               </a:defRPr>
             </a:pPr>
             <a:r>
-              <a:t>Đồ Án Tốt Nghiệp: SoC PicoRV32 RFID RDM6300 &amp; SPI Flash | SV: Thái Tuấn Hiệp | GVHD: ThS. Nguyễn Văn Đông</a:t>
+              <a:t>Đồ Án: SoC PicoRV32 RFID RDM6300 &amp; SPI Flash | FPT Jetking Chip Design - SEM3 | HV: Thái Tuấn Hiệp</a:t>
             </a:r>
           </a:p>
         </p:txBody>
@@ -13465,7 +13465,7 @@
         <p:spPr>
           <a:xfrm>
             <a:off x="731520" y="1234440"/>
-            <a:ext cx="5212080" cy="4937760"/>
+            <a:ext cx="5349240" cy="5029200"/>
           </a:xfrm>
           <a:prstGeom prst="roundRect">
             <a:avLst>
@@ -13511,8 +13511,8 @@
         </p:nvSpPr>
         <p:spPr>
           <a:xfrm>
-            <a:off x="914400" y="1371600"/>
-            <a:ext cx="4846320" cy="4663440"/>
+            <a:off x="868680" y="1353312"/>
+            <a:ext cx="5074920" cy="256032"/>
           </a:xfrm>
           <a:prstGeom prst="rect">
             <a:avLst/>
@@ -13520,16 +13520,13 @@
           <a:noFill/>
         </p:spPr>
         <p:txBody>
-          <a:bodyPr wrap="square">
+          <a:bodyPr wrap="none" lIns="0" tIns="0" rIns="0" bIns="0">
             <a:spAutoFit/>
           </a:bodyPr>
           <a:lstStyle/>
           <a:p>
-            <a:pPr>
-              <a:spcAft>
-                <a:spcPts val="1000"/>
-              </a:spcAft>
-              <a:defRPr sz="1300" b="1">
+            <a:pPr algn="ctr">
+              <a:defRPr sz="1050" b="1">
                 <a:solidFill>
                   <a:srgbClr val="2563EB"/>
                 </a:solidFill>
@@ -13537,135 +13534,45 @@
               </a:defRPr>
             </a:pPr>
             <a:r>
-              <a:t>5 KỊCH BẢN KIỂM THỬ UART RTL THUẦN</a:t>
-            </a:r>
-          </a:p>
-          <a:p>
-            <a:pPr>
-              <a:lnSpc>
-                <a:spcPct val="115000"/>
-              </a:lnSpc>
-              <a:spcAft>
-                <a:spcPts val="800"/>
-              </a:spcAft>
-              <a:defRPr sz="1050">
-                <a:solidFill>
-                  <a:srgbClr val="0F172A"/>
-                </a:solidFill>
-                <a:latin typeface="Segoe UI"/>
-              </a:defRPr>
-            </a:pPr>
-            <a:r>
-              <a:t>• Mục tiêu: Xác minh tính đúng đắn phần cứng của uart_mmio.v, sync_fifo.v và simpleuart.v mà không cần CPU.</a:t>
-            </a:r>
-          </a:p>
-          <a:p>
-            <a:pPr>
-              <a:lnSpc>
-                <a:spcPct val="115000"/>
-              </a:lnSpc>
-              <a:spcAft>
-                <a:spcPts val="800"/>
-              </a:spcAft>
-              <a:defRPr sz="1050">
-                <a:solidFill>
-                  <a:srgbClr val="0F172A"/>
-                </a:solidFill>
-                <a:latin typeface="Segoe UI"/>
-              </a:defRPr>
-            </a:pPr>
-            <a:r>
-              <a:t>• 1. Default Divider: Kiểm tra thanh ghi Prescaler tại offset 0x00 nạp đúng giá trị mặc định 5208 (9600 baud @ 50MHz).</a:t>
-            </a:r>
-          </a:p>
-          <a:p>
-            <a:pPr>
-              <a:lnSpc>
-                <a:spcPct val="115000"/>
-              </a:lnSpc>
-              <a:spcAft>
-                <a:spcPts val="800"/>
-              </a:spcAft>
-              <a:defRPr sz="1050">
-                <a:solidFill>
-                  <a:srgbClr val="0F172A"/>
-                </a:solidFill>
-                <a:latin typeface="Segoe UI"/>
-              </a:defRPr>
-            </a:pPr>
-            <a:r>
-              <a:t>• 2. Divider Reconfig: Ghi giá trị chia tần mới và đọc lại qua bus MMIO, xác nhận mạch thanh ghi hoạt động chuẩn xác.</a:t>
-            </a:r>
-          </a:p>
-          <a:p>
-            <a:pPr>
-              <a:lnSpc>
-                <a:spcPct val="115000"/>
-              </a:lnSpc>
-              <a:spcAft>
-                <a:spcPts val="800"/>
-              </a:spcAft>
-              <a:defRPr sz="1050">
-                <a:solidFill>
-                  <a:srgbClr val="0F172A"/>
-                </a:solidFill>
-                <a:latin typeface="Segoe UI"/>
-              </a:defRPr>
-            </a:pPr>
-            <a:r>
-              <a:t>• 3. Serial TX Waveform: Ghi ký tự vào offset 0x04, kiểm tra dạng sóng nối tiếp tx_o (Start bit = 0, 8 data bits LSB-first, Stop bit = 1).</a:t>
-            </a:r>
-          </a:p>
-          <a:p>
-            <a:pPr>
-              <a:lnSpc>
-                <a:spcPct val="115000"/>
-              </a:lnSpc>
-              <a:spcAft>
-                <a:spcPts val="800"/>
-              </a:spcAft>
-              <a:defRPr sz="1050">
-                <a:solidFill>
-                  <a:srgbClr val="0F172A"/>
-                </a:solidFill>
-                <a:latin typeface="Segoe UI"/>
-              </a:defRPr>
-            </a:pPr>
-            <a:r>
-              <a:t>• 4. Serial RX &amp; FIFO: Bắn chuỗi bit vào rx_i, cờ rx_activity_o tích cực, kiểm tra dữ liệu nạp vào FIFO và trả về 0xFFFFFFFF khi rỗng.</a:t>
-            </a:r>
-          </a:p>
-          <a:p>
-            <a:pPr>
-              <a:lnSpc>
-                <a:spcPct val="115000"/>
-              </a:lnSpc>
-              <a:spcAft>
-                <a:spcPts val="800"/>
-              </a:spcAft>
-              <a:defRPr sz="1050">
-                <a:solidFill>
-                  <a:srgbClr val="0F172A"/>
-                </a:solidFill>
-                <a:latin typeface="Segoe UI"/>
-              </a:defRPr>
-            </a:pPr>
-            <a:r>
-              <a:t>• 5. Multi-Byte Burst: Bắn liên tiếp chuỗi byte kiểm tra cơ chế chống tràn của hàng đợi FIFO 32 byte.</a:t>
-            </a:r>
-          </a:p>
-        </p:txBody>
-      </p:sp>
-      <p:sp>
-        <p:nvSpPr>
-          <p:cNvPr id="10" name="Rounded Rectangle 9"/>
+              <a:t>DẠNG SÓNG MÔ PHỎNG VIVADO XSIM (15.275 µs)</a:t>
+            </a:r>
+          </a:p>
+        </p:txBody>
+      </p:sp>
+      <p:pic>
+        <p:nvPicPr>
+          <p:cNvPr id="10" name="Picture 9" descr="waveform_tb_uart_rtl.png"/>
+          <p:cNvPicPr>
+            <a:picLocks noChangeAspect="1"/>
+          </p:cNvPicPr>
+          <p:nvPr/>
+        </p:nvPicPr>
+        <p:blipFill>
+          <a:blip r:embed="rId2"/>
+          <a:stretch>
+            <a:fillRect/>
+          </a:stretch>
+        </p:blipFill>
+        <p:spPr>
+          <a:xfrm>
+            <a:off x="914400" y="1627632"/>
+            <a:ext cx="4983480" cy="2962656"/>
+          </a:xfrm>
+          <a:prstGeom prst="rect">
+            <a:avLst/>
+          </a:prstGeom>
+        </p:spPr>
+      </p:pic>
+      <p:sp>
+        <p:nvSpPr>
+          <p:cNvPr id="11" name="Rounded Rectangle 10"/>
           <p:cNvSpPr/>
           <p:nvPr/>
         </p:nvSpPr>
         <p:spPr>
           <a:xfrm>
-            <a:off x="6217920" y="1234440"/>
-            <a:ext cx="5239512" cy="4937760"/>
+            <a:off x="914400" y="4681728"/>
+            <a:ext cx="4983480" cy="1444752"/>
           </a:xfrm>
           <a:prstGeom prst="roundRect">
             <a:avLst>
@@ -13673,11 +13580,11 @@
             </a:avLst>
           </a:prstGeom>
           <a:solidFill>
-            <a:srgbClr val="0B132B"/>
+            <a:srgbClr val="F1F5F9"/>
           </a:solidFill>
-          <a:ln w="19050">
+          <a:ln w="12700">
             <a:solidFill>
-              <a:srgbClr val="1C2541"/>
+              <a:srgbClr val="CBD5E1"/>
             </a:solidFill>
           </a:ln>
         </p:spPr>
@@ -13705,50 +13612,14 @@
       </p:sp>
       <p:sp>
         <p:nvSpPr>
-          <p:cNvPr id="11" name="TextBox 10"/>
-          <p:cNvSpPr txBox="1"/>
-          <p:nvPr/>
-        </p:nvSpPr>
-        <p:spPr>
-          <a:xfrm>
-            <a:off x="6355080" y="1307592"/>
-            <a:ext cx="4965192" cy="292608"/>
-          </a:xfrm>
-          <a:prstGeom prst="rect">
-            <a:avLst/>
-          </a:prstGeom>
-          <a:noFill/>
-        </p:spPr>
-        <p:txBody>
-          <a:bodyPr wrap="none" lIns="0" tIns="0" rIns="0" bIns="0">
-            <a:spAutoFit/>
-          </a:bodyPr>
-          <a:lstStyle/>
-          <a:p>
-            <a:pPr>
-              <a:defRPr sz="950" b="1">
-                <a:solidFill>
-                  <a:srgbClr val="0EA5E9"/>
-                </a:solidFill>
-                <a:latin typeface="Consolas"/>
-              </a:defRPr>
-            </a:pPr>
-            <a:r>
-              <a:t>&gt;_  tb/run_sim_uart.bat output</a:t>
-            </a:r>
-          </a:p>
-        </p:txBody>
-      </p:sp>
-      <p:sp>
-        <p:nvSpPr>
           <p:cNvPr id="12" name="TextBox 11"/>
           <p:cNvSpPr txBox="1"/>
           <p:nvPr/>
         </p:nvSpPr>
         <p:spPr>
           <a:xfrm>
-            <a:off x="6355080" y="1600200"/>
-            <a:ext cx="4965192" cy="4224528"/>
+            <a:off x="1024128" y="4736592"/>
+            <a:ext cx="4754880" cy="1335024"/>
           </a:xfrm>
           <a:prstGeom prst="rect">
             <a:avLst/>
@@ -13762,355 +13633,143 @@
           <a:lstStyle/>
           <a:p>
             <a:pPr>
-              <a:lnSpc>
-                <a:spcPct val="108000"/>
-              </a:lnSpc>
-              <a:spcAft>
-                <a:spcPts val="0"/>
-              </a:spcAft>
-              <a:defRPr sz="800">
-                <a:solidFill>
-                  <a:srgbClr val="FFFFFF"/>
-                </a:solidFill>
-                <a:latin typeface="Consolas"/>
-              </a:defRPr>
-            </a:pPr>
-            <a:r>
-              <a:t>Vivado Simulator v2025.1 - xelab &amp; xsim</a:t>
-            </a:r>
-          </a:p>
-          <a:p>
-            <a:pPr>
-              <a:lnSpc>
-                <a:spcPct val="108000"/>
-              </a:lnSpc>
-              <a:spcAft>
-                <a:spcPts val="0"/>
-              </a:spcAft>
-              <a:defRPr sz="800">
-                <a:solidFill>
-                  <a:srgbClr val="FFFFFF"/>
-                </a:solidFill>
-                <a:latin typeface="Consolas"/>
-              </a:defRPr>
-            </a:pPr>
-            <a:r>
-              <a:t>Analyzing Verilog file rtl/uart/sync_2ff.v</a:t>
-            </a:r>
-          </a:p>
-          <a:p>
-            <a:pPr>
-              <a:lnSpc>
-                <a:spcPct val="108000"/>
-              </a:lnSpc>
-              <a:spcAft>
-                <a:spcPts val="0"/>
-              </a:spcAft>
-              <a:defRPr sz="800">
-                <a:solidFill>
-                  <a:srgbClr val="93C5FD"/>
-                </a:solidFill>
-                <a:latin typeface="Consolas"/>
-              </a:defRPr>
-            </a:pPr>
-            <a:r>
-              <a:t>Analyzing Verilog file rtl/uart/sync_fifo.v</a:t>
-            </a:r>
-          </a:p>
-          <a:p>
-            <a:pPr>
-              <a:lnSpc>
-                <a:spcPct val="108000"/>
-              </a:lnSpc>
-              <a:spcAft>
-                <a:spcPts val="0"/>
-              </a:spcAft>
-              <a:defRPr sz="800">
-                <a:solidFill>
-                  <a:srgbClr val="FFFFFF"/>
-                </a:solidFill>
-                <a:latin typeface="Consolas"/>
-              </a:defRPr>
-            </a:pPr>
-            <a:r>
-              <a:t>Analyzing Verilog file rtl/uart/simpleuart.v</a:t>
-            </a:r>
-          </a:p>
-          <a:p>
-            <a:pPr>
-              <a:lnSpc>
-                <a:spcPct val="108000"/>
-              </a:lnSpc>
-              <a:spcAft>
-                <a:spcPts val="0"/>
-              </a:spcAft>
-              <a:defRPr sz="800">
-                <a:solidFill>
-                  <a:srgbClr val="FFFFFF"/>
-                </a:solidFill>
-                <a:latin typeface="Consolas"/>
-              </a:defRPr>
-            </a:pPr>
-            <a:r>
-              <a:t>Analyzing Verilog file rtl/uart/uart_mmio.v</a:t>
-            </a:r>
-          </a:p>
-          <a:p>
-            <a:pPr>
-              <a:lnSpc>
-                <a:spcPct val="108000"/>
-              </a:lnSpc>
-              <a:spcAft>
-                <a:spcPts val="0"/>
-              </a:spcAft>
-              <a:defRPr sz="800">
-                <a:solidFill>
-                  <a:srgbClr val="FFFFFF"/>
-                </a:solidFill>
-                <a:latin typeface="Consolas"/>
-              </a:defRPr>
-            </a:pPr>
-            <a:r>
-              <a:t>Analyzing Verilog file tb/tb_uart_rtl.v</a:t>
-            </a:r>
-          </a:p>
-          <a:p>
-            <a:pPr>
-              <a:lnSpc>
-                <a:spcPct val="108000"/>
-              </a:lnSpc>
-              <a:spcAft>
-                <a:spcPts val="0"/>
-              </a:spcAft>
-              <a:defRPr sz="800">
-                <a:solidFill>
-                  <a:srgbClr val="FFFFFF"/>
-                </a:solidFill>
-                <a:latin typeface="Consolas"/>
-              </a:defRPr>
-            </a:pPr>
-          </a:p>
-          <a:p>
-            <a:pPr>
-              <a:lnSpc>
-                <a:spcPct val="108000"/>
-              </a:lnSpc>
-              <a:spcAft>
-                <a:spcPts val="0"/>
-              </a:spcAft>
-              <a:defRPr sz="800" b="1">
-                <a:solidFill>
-                  <a:srgbClr val="0EA5E9"/>
-                </a:solidFill>
-                <a:latin typeface="Consolas"/>
-              </a:defRPr>
-            </a:pPr>
-            <a:r>
-              <a:t>[TEST 1] Checking Default Prescaler Divider...</a:t>
-            </a:r>
-          </a:p>
-          <a:p>
-            <a:pPr>
-              <a:lnSpc>
-                <a:spcPct val="108000"/>
-              </a:lnSpc>
-              <a:spcAft>
-                <a:spcPts val="0"/>
-              </a:spcAft>
-              <a:defRPr sz="800" b="1">
-                <a:solidFill>
-                  <a:srgbClr val="10B981"/>
-                </a:solidFill>
-                <a:latin typeface="Consolas"/>
-              </a:defRPr>
-            </a:pPr>
-            <a:r>
-              <a:t>  [PASS] Prescaler default matches DEFAULT_DIV = 5208</a:t>
-            </a:r>
-          </a:p>
-          <a:p>
-            <a:pPr>
-              <a:lnSpc>
-                <a:spcPct val="108000"/>
-              </a:lnSpc>
-              <a:spcAft>
-                <a:spcPts val="0"/>
-              </a:spcAft>
-              <a:defRPr sz="800" b="1">
-                <a:solidFill>
-                  <a:srgbClr val="0EA5E9"/>
-                </a:solidFill>
-                <a:latin typeface="Consolas"/>
-              </a:defRPr>
-            </a:pPr>
-            <a:r>
-              <a:t>[TEST 2] Reconfiguring Divider to 10416 (4800 baud)...</a:t>
-            </a:r>
-          </a:p>
-          <a:p>
-            <a:pPr>
-              <a:lnSpc>
-                <a:spcPct val="108000"/>
-              </a:lnSpc>
-              <a:spcAft>
-                <a:spcPts val="0"/>
-              </a:spcAft>
-              <a:defRPr sz="800" b="1">
-                <a:solidFill>
-                  <a:srgbClr val="10B981"/>
-                </a:solidFill>
-                <a:latin typeface="Consolas"/>
-              </a:defRPr>
-            </a:pPr>
-            <a:r>
-              <a:t>  [PASS] Read-back matches written value 10416</a:t>
-            </a:r>
-          </a:p>
-          <a:p>
-            <a:pPr>
-              <a:lnSpc>
-                <a:spcPct val="108000"/>
-              </a:lnSpc>
-              <a:spcAft>
-                <a:spcPts val="0"/>
-              </a:spcAft>
-              <a:defRPr sz="800" b="1">
-                <a:solidFill>
-                  <a:srgbClr val="0EA5E9"/>
-                </a:solidFill>
-                <a:latin typeface="Consolas"/>
-              </a:defRPr>
-            </a:pPr>
-            <a:r>
-              <a:t>[TEST 3] Transmitting Byte 0x55 ('U') over TX...</a:t>
-            </a:r>
-          </a:p>
-          <a:p>
-            <a:pPr>
-              <a:lnSpc>
-                <a:spcPct val="108000"/>
-              </a:lnSpc>
-              <a:spcAft>
-                <a:spcPts val="0"/>
-              </a:spcAft>
-              <a:defRPr sz="800" b="1">
-                <a:solidFill>
-                  <a:srgbClr val="10B981"/>
-                </a:solidFill>
-                <a:latin typeface="Consolas"/>
-              </a:defRPr>
-            </a:pPr>
-            <a:r>
-              <a:t>  [PASS] TX Waveform matches 9600-8-N-1 timing!</a:t>
-            </a:r>
-          </a:p>
-          <a:p>
-            <a:pPr>
-              <a:lnSpc>
-                <a:spcPct val="108000"/>
-              </a:lnSpc>
-              <a:spcAft>
-                <a:spcPts val="0"/>
-              </a:spcAft>
-              <a:defRPr sz="800" b="1">
-                <a:solidFill>
-                  <a:srgbClr val="0EA5E9"/>
-                </a:solidFill>
-                <a:latin typeface="Consolas"/>
-              </a:defRPr>
-            </a:pPr>
-            <a:r>
-              <a:t>[TEST 4] Receiving Serial Byte 0xA5 into FIFO...</a:t>
-            </a:r>
-          </a:p>
-          <a:p>
-            <a:pPr>
-              <a:lnSpc>
-                <a:spcPct val="108000"/>
-              </a:lnSpc>
-              <a:spcAft>
-                <a:spcPts val="0"/>
-              </a:spcAft>
-              <a:defRPr sz="800" b="1">
-                <a:solidFill>
-                  <a:srgbClr val="10B981"/>
-                </a:solidFill>
-                <a:latin typeface="Consolas"/>
-              </a:defRPr>
-            </a:pPr>
-            <a:r>
-              <a:t>  [PASS] rx_activity_o asserted! Read 0xA5 cleanly!</a:t>
-            </a:r>
-          </a:p>
-          <a:p>
-            <a:pPr>
-              <a:lnSpc>
-                <a:spcPct val="108000"/>
-              </a:lnSpc>
-              <a:spcAft>
-                <a:spcPts val="0"/>
-              </a:spcAft>
-              <a:defRPr sz="800" b="1">
-                <a:solidFill>
-                  <a:srgbClr val="10B981"/>
-                </a:solidFill>
-                <a:latin typeface="Consolas"/>
-              </a:defRPr>
-            </a:pPr>
-            <a:r>
-              <a:t>  [PASS] FIFO Empty flag returns 0xFFFFFFFF</a:t>
-            </a:r>
-          </a:p>
-          <a:p>
-            <a:pPr>
-              <a:lnSpc>
-                <a:spcPct val="108000"/>
-              </a:lnSpc>
-              <a:spcAft>
-                <a:spcPts val="0"/>
-              </a:spcAft>
-              <a:defRPr sz="800" b="1">
-                <a:solidFill>
-                  <a:srgbClr val="0EA5E9"/>
-                </a:solidFill>
-                <a:latin typeface="Consolas"/>
-              </a:defRPr>
-            </a:pPr>
-            <a:r>
-              <a:t>[TEST 5] Multi-Byte Burst Test (16 bytes)...</a:t>
-            </a:r>
-          </a:p>
-          <a:p>
-            <a:pPr>
-              <a:lnSpc>
-                <a:spcPct val="108000"/>
-              </a:lnSpc>
-              <a:spcAft>
-                <a:spcPts val="0"/>
-              </a:spcAft>
-              <a:defRPr sz="800" b="1">
-                <a:solidFill>
-                  <a:srgbClr val="10B981"/>
-                </a:solidFill>
-                <a:latin typeface="Consolas"/>
-              </a:defRPr>
-            </a:pPr>
-            <a:r>
-              <a:t>  [PASS] All 16 bytes drained without data corruption!</a:t>
-            </a:r>
-          </a:p>
-        </p:txBody>
-      </p:sp>
-      <p:sp>
-        <p:nvSpPr>
-          <p:cNvPr id="13" name="TextBox 12"/>
+              <a:spcAft>
+                <a:spcPts val="200"/>
+              </a:spcAft>
+              <a:defRPr sz="819" b="1">
+                <a:solidFill>
+                  <a:srgbClr val="2563EB"/>
+                </a:solidFill>
+                <a:latin typeface="Segoe UI"/>
+              </a:defRPr>
+            </a:pPr>
+            <a:r>
+              <a:t>ĐẶC TRƯNG TÍN HIỆU TRÊN DẠNG SÓNG (WAVEFORM ANALYSIS):</a:t>
+            </a:r>
+          </a:p>
+          <a:p>
+            <a:pPr>
+              <a:lnSpc>
+                <a:spcPct val="112000"/>
+              </a:lnSpc>
+              <a:defRPr sz="760">
+                <a:solidFill>
+                  <a:srgbClr val="0F172A"/>
+                </a:solidFill>
+                <a:latin typeface="Segoe UI"/>
+              </a:defRPr>
+            </a:pPr>
+            <a:r>
+              <a:t>• clk / rst_n: Chu kỳ xung nhịp 10ns (100MHz), reset giải phóng tại t = 100ns.</a:t>
+            </a:r>
+          </a:p>
+          <a:p>
+            <a:pPr>
+              <a:lnSpc>
+                <a:spcPct val="112000"/>
+              </a:lnSpc>
+              <a:defRPr sz="760">
+                <a:solidFill>
+                  <a:srgbClr val="0F172A"/>
+                </a:solidFill>
+                <a:latin typeface="Segoe UI"/>
+              </a:defRPr>
+            </a:pPr>
+            <a:r>
+              <a:t>• tx_o (Serial TX): Khung truyền 8-N-1 (Start bit 0 -&gt; 8 bit dữ liệu LSB -&gt; Stop bit 1).</a:t>
+            </a:r>
+          </a:p>
+          <a:p>
+            <a:pPr>
+              <a:lnSpc>
+                <a:spcPct val="112000"/>
+              </a:lnSpc>
+              <a:defRPr sz="760">
+                <a:solidFill>
+                  <a:srgbClr val="0F172A"/>
+                </a:solidFill>
+                <a:latin typeface="Segoe UI"/>
+              </a:defRPr>
+            </a:pPr>
+            <a:r>
+              <a:t>• rx_activity_o &amp; FIFO: Bắt chuỗi xung rx_i, nạp sạch vào FIFO và trả về read_val = 75.</a:t>
+            </a:r>
+          </a:p>
+          <a:p>
+            <a:pPr>
+              <a:lnSpc>
+                <a:spcPct val="112000"/>
+              </a:lnSpc>
+              <a:defRPr sz="760">
+                <a:solidFill>
+                  <a:srgbClr val="0F172A"/>
+                </a:solidFill>
+                <a:latin typeface="Segoe UI"/>
+              </a:defRPr>
+            </a:pPr>
+            <a:r>
+              <a:t>• err_count = 0: 5/5 kịch bản tự động Assert thành công, kết thúc an toàn tại 15.275 µs.</a:t>
+            </a:r>
+          </a:p>
+        </p:txBody>
+      </p:sp>
+      <p:sp>
+        <p:nvSpPr>
+          <p:cNvPr id="13" name="Rounded Rectangle 12"/>
+          <p:cNvSpPr/>
+          <p:nvPr/>
+        </p:nvSpPr>
+        <p:spPr>
+          <a:xfrm>
+            <a:off x="6217920" y="1234440"/>
+            <a:ext cx="5239512" cy="5029200"/>
+          </a:xfrm>
+          <a:prstGeom prst="roundRect">
+            <a:avLst>
+              <a:gd name="adj" fmla="val 2000"/>
+            </a:avLst>
+          </a:prstGeom>
+          <a:solidFill>
+            <a:srgbClr val="FFFFFF"/>
+          </a:solidFill>
+          <a:ln w="19050">
+            <a:solidFill>
+              <a:srgbClr val="2563EB"/>
+            </a:solidFill>
+          </a:ln>
+        </p:spPr>
+        <p:style>
+          <a:lnRef idx="1">
+            <a:schemeClr val="accent1"/>
+          </a:lnRef>
+          <a:fillRef idx="3">
+            <a:schemeClr val="accent1"/>
+          </a:fillRef>
+          <a:effectRef idx="2">
+            <a:schemeClr val="accent1"/>
+          </a:effectRef>
+          <a:fontRef idx="minor">
+            <a:schemeClr val="lt1"/>
+          </a:fontRef>
+        </p:style>
+        <p:txBody>
+          <a:bodyPr rtlCol="0" anchor="ctr"/>
+          <a:lstStyle/>
+          <a:p>
+            <a:pPr algn="ctr"/>
+          </a:p>
+        </p:txBody>
+      </p:sp>
+      <p:sp>
+        <p:nvSpPr>
+          <p:cNvPr id="14" name="TextBox 13"/>
           <p:cNvSpPr txBox="1"/>
           <p:nvPr/>
         </p:nvSpPr>
         <p:spPr>
           <a:xfrm>
-            <a:off x="6355080" y="5788152"/>
-            <a:ext cx="4965192" cy="274320"/>
+            <a:off x="6400800" y="1353312"/>
+            <a:ext cx="4873752" cy="3977639"/>
           </a:xfrm>
           <a:prstGeom prst="rect">
             <a:avLst/>
@@ -14118,12 +13777,215 @@
           <a:noFill/>
         </p:spPr>
         <p:txBody>
-          <a:bodyPr wrap="none" lIns="0" tIns="0" rIns="0" bIns="0">
+          <a:bodyPr wrap="square" lIns="0" tIns="0" rIns="0" bIns="0">
             <a:spAutoFit/>
           </a:bodyPr>
           <a:lstStyle/>
           <a:p>
             <a:pPr>
+              <a:spcAft>
+                <a:spcPts val="800"/>
+              </a:spcAft>
+              <a:defRPr sz="1200" b="1">
+                <a:solidFill>
+                  <a:srgbClr val="2563EB"/>
+                </a:solidFill>
+                <a:latin typeface="Segoe UI"/>
+              </a:defRPr>
+            </a:pPr>
+            <a:r>
+              <a:t>5 KỊCH BẢN KIỂM THỬ UART RTL THUẦN (100% PASS)</a:t>
+            </a:r>
+          </a:p>
+          <a:p>
+            <a:pPr>
+              <a:lnSpc>
+                <a:spcPct val="115000"/>
+              </a:lnSpc>
+              <a:spcAft>
+                <a:spcPts val="500"/>
+              </a:spcAft>
+              <a:defRPr sz="930">
+                <a:solidFill>
+                  <a:srgbClr val="0F172A"/>
+                </a:solidFill>
+                <a:latin typeface="Segoe UI"/>
+              </a:defRPr>
+            </a:pPr>
+            <a:r>
+              <a:t>• Mục tiêu: Xác minh tính đúng đắn phần cứng của uart_mmio.v, sync_fifo.v và simpleuart.v mà không cần CPU.</a:t>
+            </a:r>
+          </a:p>
+          <a:p>
+            <a:pPr>
+              <a:lnSpc>
+                <a:spcPct val="115000"/>
+              </a:lnSpc>
+              <a:spcAft>
+                <a:spcPts val="500"/>
+              </a:spcAft>
+              <a:defRPr sz="930">
+                <a:solidFill>
+                  <a:srgbClr val="0F172A"/>
+                </a:solidFill>
+                <a:latin typeface="Segoe UI"/>
+              </a:defRPr>
+            </a:pPr>
+            <a:r>
+              <a:t>• 1. Default Divider: Kiểm tra thanh ghi Prescaler tại offset 0x00 nạp đúng giá trị mặc định TEST_DIV = 16 -&gt; PASS.</a:t>
+            </a:r>
+          </a:p>
+          <a:p>
+            <a:pPr>
+              <a:lnSpc>
+                <a:spcPct val="115000"/>
+              </a:lnSpc>
+              <a:spcAft>
+                <a:spcPts val="500"/>
+              </a:spcAft>
+              <a:defRPr sz="930">
+                <a:solidFill>
+                  <a:srgbClr val="0F172A"/>
+                </a:solidFill>
+                <a:latin typeface="Segoe UI"/>
+              </a:defRPr>
+            </a:pPr>
+            <a:r>
+              <a:t>• 2. Divider Reconfig: Ghi giá trị chia tần mới và đọc lại qua bus MMIO, xác nhận mạch thanh ghi hoạt động chuẩn xác -&gt; PASS.</a:t>
+            </a:r>
+          </a:p>
+          <a:p>
+            <a:pPr>
+              <a:lnSpc>
+                <a:spcPct val="115000"/>
+              </a:lnSpc>
+              <a:spcAft>
+                <a:spcPts val="500"/>
+              </a:spcAft>
+              <a:defRPr sz="930">
+                <a:solidFill>
+                  <a:srgbClr val="0F172A"/>
+                </a:solidFill>
+                <a:latin typeface="Segoe UI"/>
+              </a:defRPr>
+            </a:pPr>
+            <a:r>
+              <a:t>• 3. Serial TX Frame: Ghi ký tự 0x4B ('K' / 75) vào wdata, kiểm tra dạng sóng nối tiếp tx_o đúng chuẩn 8-N-1 -&gt; PASS.</a:t>
+            </a:r>
+          </a:p>
+          <a:p>
+            <a:pPr>
+              <a:lnSpc>
+                <a:spcPct val="115000"/>
+              </a:lnSpc>
+              <a:spcAft>
+                <a:spcPts val="500"/>
+              </a:spcAft>
+              <a:defRPr sz="930">
+                <a:solidFill>
+                  <a:srgbClr val="0F172A"/>
+                </a:solidFill>
+                <a:latin typeface="Segoe UI"/>
+              </a:defRPr>
+            </a:pPr>
+            <a:r>
+              <a:t>• 4. Serial RX &amp; FIFO: Bơm chuỗi bit vào rx_i, cờ rx_activity_o tích cực, dữ liệu nạp sạch vào FIFO và đọc ra read_val = 75 -&gt; PASS.</a:t>
+            </a:r>
+          </a:p>
+          <a:p>
+            <a:pPr>
+              <a:lnSpc>
+                <a:spcPct val="115000"/>
+              </a:lnSpc>
+              <a:spcAft>
+                <a:spcPts val="500"/>
+              </a:spcAft>
+              <a:defRPr sz="930">
+                <a:solidFill>
+                  <a:srgbClr val="0F172A"/>
+                </a:solidFill>
+                <a:latin typeface="Segoe UI"/>
+              </a:defRPr>
+            </a:pPr>
+            <a:r>
+              <a:t>• 5. Multi-Byte Burst: Bắn chuỗi byte kiểm tra cơ chế chống tràn của hàng đợi FIFO, đọc cạn trả về 0xFFFFFFFF (4294967295) -&gt; PASS.</a:t>
+            </a:r>
+          </a:p>
+        </p:txBody>
+      </p:sp>
+      <p:sp>
+        <p:nvSpPr>
+          <p:cNvPr id="15" name="Rounded Rectangle 14"/>
+          <p:cNvSpPr/>
+          <p:nvPr/>
+        </p:nvSpPr>
+        <p:spPr>
+          <a:xfrm>
+            <a:off x="6400800" y="5468112"/>
+            <a:ext cx="4873752" cy="658368"/>
+          </a:xfrm>
+          <a:prstGeom prst="roundRect">
+            <a:avLst>
+              <a:gd name="adj" fmla="val 2000"/>
+            </a:avLst>
+          </a:prstGeom>
+          <a:solidFill>
+            <a:srgbClr val="ECFDF5"/>
+          </a:solidFill>
+          <a:ln w="19050">
+            <a:solidFill>
+              <a:srgbClr val="10B981"/>
+            </a:solidFill>
+          </a:ln>
+        </p:spPr>
+        <p:style>
+          <a:lnRef idx="1">
+            <a:schemeClr val="accent1"/>
+          </a:lnRef>
+          <a:fillRef idx="3">
+            <a:schemeClr val="accent1"/>
+          </a:fillRef>
+          <a:effectRef idx="2">
+            <a:schemeClr val="accent1"/>
+          </a:effectRef>
+          <a:fontRef idx="minor">
+            <a:schemeClr val="lt1"/>
+          </a:fontRef>
+        </p:style>
+        <p:txBody>
+          <a:bodyPr rtlCol="0" anchor="ctr"/>
+          <a:lstStyle/>
+          <a:p>
+            <a:pPr algn="ctr"/>
+          </a:p>
+        </p:txBody>
+      </p:sp>
+      <p:sp>
+        <p:nvSpPr>
+          <p:cNvPr id="16" name="TextBox 15"/>
+          <p:cNvSpPr txBox="1"/>
+          <p:nvPr/>
+        </p:nvSpPr>
+        <p:spPr>
+          <a:xfrm>
+            <a:off x="6492240" y="5522976"/>
+            <a:ext cx="4690872" cy="548640"/>
+          </a:xfrm>
+          <a:prstGeom prst="rect">
+            <a:avLst/>
+          </a:prstGeom>
+          <a:noFill/>
+        </p:spPr>
+        <p:txBody>
+          <a:bodyPr wrap="square" lIns="0" tIns="0" rIns="0" bIns="0">
+            <a:spAutoFit/>
+          </a:bodyPr>
+          <a:lstStyle/>
+          <a:p>
+            <a:pPr>
+              <a:spcAft>
+                <a:spcPts val="100"/>
+              </a:spcAft>
               <a:defRPr sz="819" b="1">
                 <a:solidFill>
                   <a:srgbClr val="10B981"/>
@@ -14132,7 +13994,20 @@
               </a:defRPr>
             </a:pPr>
             <a:r>
-              <a:t>=== UART RTL TESTBENCH: 100% PASS ===</a:t>
+              <a:t>XÁC NHẬN KẾT QUẢ MÔ PHỎNG VIVADO XSIM:</a:t>
+            </a:r>
+          </a:p>
+          <a:p>
+            <a:pPr>
+              <a:defRPr sz="880" b="1">
+                <a:solidFill>
+                  <a:srgbClr val="065F46"/>
+                </a:solidFill>
+                <a:latin typeface="Segoe UI"/>
+              </a:defRPr>
+            </a:pPr>
+            <a:r>
+              <a:t>100% PASS (5/5 TEST SCENARIOS) | RUNTIME: 15,275 ns | SỐ LỖI: 0</a:t>
             </a:r>
           </a:p>
         </p:txBody>
@@ -14367,7 +14242,7 @@
               </a:defRPr>
             </a:pPr>
             <a:r>
-              <a:t>Đồ Án Tốt Nghiệp: SoC PicoRV32 RFID RDM6300 &amp; SPI Flash | SV: Thái Tuấn Hiệp | GVHD: ThS. Nguyễn Văn Đông</a:t>
+              <a:t>Đồ Án: SoC PicoRV32 RFID RDM6300 &amp; SPI Flash | FPT Jetking Chip Design - SEM3 | HV: Thái Tuấn Hiệp</a:t>
             </a:r>
           </a:p>
         </p:txBody>
@@ -14417,7 +14292,583 @@
         <p:spPr>
           <a:xfrm>
             <a:off x="731520" y="1234440"/>
-            <a:ext cx="5212080" cy="4937760"/>
+            <a:ext cx="5349240" cy="5029200"/>
+          </a:xfrm>
+          <a:prstGeom prst="roundRect">
+            <a:avLst>
+              <a:gd name="adj" fmla="val 2000"/>
+            </a:avLst>
+          </a:prstGeom>
+          <a:solidFill>
+            <a:srgbClr val="0B132B"/>
+          </a:solidFill>
+          <a:ln w="19050">
+            <a:solidFill>
+              <a:srgbClr val="1C2541"/>
+            </a:solidFill>
+          </a:ln>
+        </p:spPr>
+        <p:style>
+          <a:lnRef idx="1">
+            <a:schemeClr val="accent1"/>
+          </a:lnRef>
+          <a:fillRef idx="3">
+            <a:schemeClr val="accent1"/>
+          </a:fillRef>
+          <a:effectRef idx="2">
+            <a:schemeClr val="accent1"/>
+          </a:effectRef>
+          <a:fontRef idx="minor">
+            <a:schemeClr val="lt1"/>
+          </a:fontRef>
+        </p:style>
+        <p:txBody>
+          <a:bodyPr rtlCol="0" anchor="ctr"/>
+          <a:lstStyle/>
+          <a:p>
+            <a:pPr algn="ctr"/>
+          </a:p>
+        </p:txBody>
+      </p:sp>
+      <p:sp>
+        <p:nvSpPr>
+          <p:cNvPr id="9" name="TextBox 8"/>
+          <p:cNvSpPr txBox="1"/>
+          <p:nvPr/>
+        </p:nvSpPr>
+        <p:spPr>
+          <a:xfrm>
+            <a:off x="868680" y="1307592"/>
+            <a:ext cx="5074920" cy="292608"/>
+          </a:xfrm>
+          <a:prstGeom prst="rect">
+            <a:avLst/>
+          </a:prstGeom>
+          <a:noFill/>
+        </p:spPr>
+        <p:txBody>
+          <a:bodyPr wrap="none" lIns="0" tIns="0" rIns="0" bIns="0">
+            <a:spAutoFit/>
+          </a:bodyPr>
+          <a:lstStyle/>
+          <a:p>
+            <a:pPr>
+              <a:defRPr sz="950" b="1">
+                <a:solidFill>
+                  <a:srgbClr val="34D399"/>
+                </a:solidFill>
+                <a:latin typeface="Consolas"/>
+              </a:defRPr>
+            </a:pPr>
+            <a:r>
+              <a:t>&gt;_  tb/tb_uart_ping.v [Testbench Code &amp; Sim Log]</a:t>
+            </a:r>
+          </a:p>
+        </p:txBody>
+      </p:sp>
+      <p:sp>
+        <p:nvSpPr>
+          <p:cNvPr id="10" name="TextBox 9"/>
+          <p:cNvSpPr txBox="1"/>
+          <p:nvPr/>
+        </p:nvSpPr>
+        <p:spPr>
+          <a:xfrm>
+            <a:off x="868680" y="1600200"/>
+            <a:ext cx="5074920" cy="4315968"/>
+          </a:xfrm>
+          <a:prstGeom prst="rect">
+            <a:avLst/>
+          </a:prstGeom>
+          <a:noFill/>
+        </p:spPr>
+        <p:txBody>
+          <a:bodyPr wrap="square" lIns="0" tIns="0" rIns="0" bIns="0">
+            <a:spAutoFit/>
+          </a:bodyPr>
+          <a:lstStyle/>
+          <a:p>
+            <a:pPr>
+              <a:lnSpc>
+                <a:spcPct val="110000"/>
+              </a:lnSpc>
+              <a:spcAft>
+                <a:spcPts val="0"/>
+              </a:spcAft>
+              <a:defRPr sz="720">
+                <a:solidFill>
+                  <a:srgbClr val="94A3B8"/>
+                </a:solidFill>
+                <a:latin typeface="Consolas"/>
+              </a:defRPr>
+            </a:pPr>
+            <a:r>
+              <a:t>// tb/tb_uart_ping.v - Kịch bản kiểm thử tích hợp Top SoC</a:t>
+            </a:r>
+          </a:p>
+          <a:p>
+            <a:pPr>
+              <a:lnSpc>
+                <a:spcPct val="110000"/>
+              </a:lnSpc>
+              <a:spcAft>
+                <a:spcPts val="0"/>
+              </a:spcAft>
+              <a:defRPr sz="720">
+                <a:solidFill>
+                  <a:srgbClr val="FFFFFF"/>
+                </a:solidFill>
+                <a:latin typeface="Consolas"/>
+              </a:defRPr>
+            </a:pPr>
+            <a:r>
+              <a:t>initial begin</a:t>
+            </a:r>
+          </a:p>
+          <a:p>
+            <a:pPr>
+              <a:lnSpc>
+                <a:spcPct val="110000"/>
+              </a:lnSpc>
+              <a:spcAft>
+                <a:spcPts val="0"/>
+              </a:spcAft>
+              <a:defRPr sz="720">
+                <a:solidFill>
+                  <a:srgbClr val="FFFFFF"/>
+                </a:solidFill>
+                <a:latin typeface="Consolas"/>
+              </a:defRPr>
+            </a:pPr>
+            <a:r>
+              <a:t>    clk = 0; rst_n = 0; rdm6300_rx_i = 1; uart_rx_i = 1;</a:t>
+            </a:r>
+          </a:p>
+          <a:p>
+            <a:pPr>
+              <a:lnSpc>
+                <a:spcPct val="110000"/>
+              </a:lnSpc>
+              <a:spcAft>
+                <a:spcPts val="0"/>
+              </a:spcAft>
+              <a:defRPr sz="720">
+                <a:solidFill>
+                  <a:srgbClr val="94A3B8"/>
+                </a:solidFill>
+                <a:latin typeface="Consolas"/>
+              </a:defRPr>
+            </a:pPr>
+            <a:r>
+              <a:t>    #200; rst_n = 1; // Release Reset -&gt; Boot Flash 0x250000</a:t>
+            </a:r>
+          </a:p>
+          <a:p>
+            <a:pPr>
+              <a:lnSpc>
+                <a:spcPct val="110000"/>
+              </a:lnSpc>
+              <a:spcAft>
+                <a:spcPts val="0"/>
+              </a:spcAft>
+              <a:defRPr sz="720">
+                <a:solidFill>
+                  <a:srgbClr val="FFFFFF"/>
+                </a:solidFill>
+                <a:latin typeface="Consolas"/>
+              </a:defRPr>
+            </a:pPr>
+            <a:r>
+              <a:t>    wait(ready_matched == 1'b1); // Đợi CPU phát xong Banner C</a:t>
+            </a:r>
+          </a:p>
+          <a:p>
+            <a:pPr>
+              <a:lnSpc>
+                <a:spcPct val="110000"/>
+              </a:lnSpc>
+              <a:spcAft>
+                <a:spcPts val="0"/>
+              </a:spcAft>
+              <a:defRPr sz="720">
+                <a:solidFill>
+                  <a:srgbClr val="94A3B8"/>
+                </a:solidFill>
+                <a:latin typeface="Consolas"/>
+              </a:defRPr>
+            </a:pPr>
+            <a:r>
+              <a:t>    #100000; send_pc_byte("P");  // PC Host gửi lệnh Ping</a:t>
+            </a:r>
+          </a:p>
+          <a:p>
+            <a:pPr>
+              <a:lnSpc>
+                <a:spcPct val="110000"/>
+              </a:lnSpc>
+              <a:spcAft>
+                <a:spcPts val="0"/>
+              </a:spcAft>
+              <a:defRPr sz="720">
+                <a:solidFill>
+                  <a:srgbClr val="FFFFFF"/>
+                </a:solidFill>
+                <a:latin typeface="Consolas"/>
+              </a:defRPr>
+            </a:pPr>
+            <a:r>
+              <a:t>    send_pc_byte(8'h0A);         // Gửi ký tự '\n'</a:t>
+            </a:r>
+          </a:p>
+          <a:p>
+            <a:pPr>
+              <a:lnSpc>
+                <a:spcPct val="110000"/>
+              </a:lnSpc>
+              <a:spcAft>
+                <a:spcPts val="0"/>
+              </a:spcAft>
+              <a:defRPr sz="720">
+                <a:solidFill>
+                  <a:srgbClr val="FFFFFF"/>
+                </a:solidFill>
+                <a:latin typeface="Consolas"/>
+              </a:defRPr>
+            </a:pPr>
+            <a:r>
+              <a:t>    wait(pong_matched == 1'b1);  // Đợi CPU phản hồi chuỗi PONG</a:t>
+            </a:r>
+          </a:p>
+          <a:p>
+            <a:pPr>
+              <a:lnSpc>
+                <a:spcPct val="110000"/>
+              </a:lnSpc>
+              <a:spcAft>
+                <a:spcPts val="0"/>
+              </a:spcAft>
+              <a:defRPr sz="720">
+                <a:solidFill>
+                  <a:srgbClr val="93C5FD"/>
+                </a:solidFill>
+                <a:latin typeface="Consolas"/>
+              </a:defRPr>
+            </a:pPr>
+            <a:r>
+              <a:t>    if (pong_matched &amp;&amp; !cpu_trap)</a:t>
+            </a:r>
+          </a:p>
+          <a:p>
+            <a:pPr>
+              <a:lnSpc>
+                <a:spcPct val="110000"/>
+              </a:lnSpc>
+              <a:spcAft>
+                <a:spcPts val="0"/>
+              </a:spcAft>
+              <a:defRPr sz="720" b="1">
+                <a:solidFill>
+                  <a:srgbClr val="10B981"/>
+                </a:solidFill>
+                <a:latin typeface="Consolas"/>
+              </a:defRPr>
+            </a:pPr>
+            <a:r>
+              <a:t>        $display("  [SUCCESS] PING-PONG TEST PASSED!");</a:t>
+            </a:r>
+          </a:p>
+          <a:p>
+            <a:pPr>
+              <a:lnSpc>
+                <a:spcPct val="110000"/>
+              </a:lnSpc>
+              <a:spcAft>
+                <a:spcPts val="0"/>
+              </a:spcAft>
+              <a:defRPr sz="720">
+                <a:solidFill>
+                  <a:srgbClr val="FFFFFF"/>
+                </a:solidFill>
+                <a:latin typeface="Consolas"/>
+              </a:defRPr>
+            </a:pPr>
+            <a:r>
+              <a:t>end</a:t>
+            </a:r>
+          </a:p>
+          <a:p>
+            <a:pPr>
+              <a:lnSpc>
+                <a:spcPct val="110000"/>
+              </a:lnSpc>
+              <a:spcAft>
+                <a:spcPts val="0"/>
+              </a:spcAft>
+              <a:defRPr sz="720">
+                <a:solidFill>
+                  <a:srgbClr val="FFFFFF"/>
+                </a:solidFill>
+                <a:latin typeface="Consolas"/>
+              </a:defRPr>
+            </a:pPr>
+          </a:p>
+          <a:p>
+            <a:pPr>
+              <a:lnSpc>
+                <a:spcPct val="110000"/>
+              </a:lnSpc>
+              <a:spcAft>
+                <a:spcPts val="0"/>
+              </a:spcAft>
+              <a:defRPr sz="720">
+                <a:solidFill>
+                  <a:srgbClr val="94A3B8"/>
+                </a:solidFill>
+                <a:latin typeface="Consolas"/>
+              </a:defRPr>
+            </a:pPr>
+            <a:r>
+              <a:t>// === VIVADO SIMULATOR (XSIM) EXECUTION OUTPUT LOG ===</a:t>
+            </a:r>
+          </a:p>
+          <a:p>
+            <a:pPr>
+              <a:lnSpc>
+                <a:spcPct val="110000"/>
+              </a:lnSpc>
+              <a:spcAft>
+                <a:spcPts val="0"/>
+              </a:spcAft>
+              <a:defRPr sz="720" b="1">
+                <a:solidFill>
+                  <a:srgbClr val="0EA5E9"/>
+                </a:solidFill>
+                <a:latin typeface="Consolas"/>
+              </a:defRPr>
+            </a:pPr>
+            <a:r>
+              <a:t>[FLASH MODEL] Loaded 2048 words (8192 bytes) from firmware.hex</a:t>
+            </a:r>
+          </a:p>
+          <a:p>
+            <a:pPr>
+              <a:lnSpc>
+                <a:spcPct val="110000"/>
+              </a:lnSpc>
+              <a:spcAft>
+                <a:spcPts val="0"/>
+              </a:spcAft>
+              <a:defRPr sz="720" b="1">
+                <a:solidFill>
+                  <a:srgbClr val="0EA5E9"/>
+                </a:solidFill>
+                <a:latin typeface="Consolas"/>
+              </a:defRPr>
+            </a:pPr>
+            <a:r>
+              <a:t>[TB] System Reset released. PicoRV32 booting from 0x250000...</a:t>
+            </a:r>
+          </a:p>
+          <a:p>
+            <a:pPr>
+              <a:lnSpc>
+                <a:spcPct val="110000"/>
+              </a:lnSpc>
+              <a:spcAft>
+                <a:spcPts val="0"/>
+              </a:spcAft>
+              <a:defRPr sz="720" b="1">
+                <a:solidFill>
+                  <a:srgbClr val="0EA5E9"/>
+                </a:solidFill>
+                <a:latin typeface="Consolas"/>
+              </a:defRPr>
+            </a:pPr>
+            <a:r>
+              <a:t>[UART TX] ================================================</a:t>
+            </a:r>
+          </a:p>
+          <a:p>
+            <a:pPr>
+              <a:lnSpc>
+                <a:spcPct val="110000"/>
+              </a:lnSpc>
+              <a:spcAft>
+                <a:spcPts val="0"/>
+              </a:spcAft>
+              <a:defRPr sz="720" b="1">
+                <a:solidFill>
+                  <a:srgbClr val="0EA5E9"/>
+                </a:solidFill>
+                <a:latin typeface="Consolas"/>
+              </a:defRPr>
+            </a:pPr>
+            <a:r>
+              <a:t>[UART TX]   RDM6300 PICORV32 SOC ACCESS CONTROLLER READY  </a:t>
+            </a:r>
+          </a:p>
+          <a:p>
+            <a:pPr>
+              <a:lnSpc>
+                <a:spcPct val="110000"/>
+              </a:lnSpc>
+              <a:spcAft>
+                <a:spcPts val="0"/>
+              </a:spcAft>
+              <a:defRPr sz="720" b="1">
+                <a:solidFill>
+                  <a:srgbClr val="0EA5E9"/>
+                </a:solidFill>
+                <a:latin typeface="Consolas"/>
+              </a:defRPr>
+            </a:pPr>
+            <a:r>
+              <a:t>[UART TX] ================================================</a:t>
+            </a:r>
+          </a:p>
+          <a:p>
+            <a:pPr>
+              <a:lnSpc>
+                <a:spcPct val="110000"/>
+              </a:lnSpc>
+              <a:spcAft>
+                <a:spcPts val="0"/>
+              </a:spcAft>
+              <a:defRPr sz="720" b="1">
+                <a:solidFill>
+                  <a:srgbClr val="0EA5E9"/>
+                </a:solidFill>
+                <a:latin typeface="Consolas"/>
+              </a:defRPr>
+            </a:pPr>
+            <a:r>
+              <a:t>[TB] Boot banner detected! Sending 'P' (Ping) command...</a:t>
+            </a:r>
+          </a:p>
+          <a:p>
+            <a:pPr>
+              <a:lnSpc>
+                <a:spcPct val="110000"/>
+              </a:lnSpc>
+              <a:spcAft>
+                <a:spcPts val="0"/>
+              </a:spcAft>
+              <a:defRPr sz="720" b="1">
+                <a:solidFill>
+                  <a:srgbClr val="0EA5E9"/>
+                </a:solidFill>
+                <a:latin typeface="Consolas"/>
+              </a:defRPr>
+            </a:pPr>
+            <a:r>
+              <a:t>[HOST -&gt; SOC] Sent Byte: 'P' (0x50), '\n' (0x0A)</a:t>
+            </a:r>
+          </a:p>
+          <a:p>
+            <a:pPr>
+              <a:lnSpc>
+                <a:spcPct val="110000"/>
+              </a:lnSpc>
+              <a:spcAft>
+                <a:spcPts val="0"/>
+              </a:spcAft>
+              <a:defRPr sz="720" b="1">
+                <a:solidFill>
+                  <a:srgbClr val="0EA5E9"/>
+                </a:solidFill>
+                <a:latin typeface="Consolas"/>
+              </a:defRPr>
+            </a:pPr>
+            <a:r>
+              <a:t>[UART TX] PONG: PicoRV32 Active</a:t>
+            </a:r>
+          </a:p>
+          <a:p>
+            <a:pPr>
+              <a:lnSpc>
+                <a:spcPct val="110000"/>
+              </a:lnSpc>
+              <a:spcAft>
+                <a:spcPts val="0"/>
+              </a:spcAft>
+              <a:defRPr sz="720" b="1">
+                <a:solidFill>
+                  <a:srgbClr val="10B981"/>
+                </a:solidFill>
+                <a:latin typeface="Consolas"/>
+              </a:defRPr>
+            </a:pPr>
+            <a:r>
+              <a:t>[SUCCESS] PING-PONG TEST PASSED! PicoRV32 responded with PONG.</a:t>
+            </a:r>
+          </a:p>
+          <a:p>
+            <a:pPr>
+              <a:lnSpc>
+                <a:spcPct val="110000"/>
+              </a:lnSpc>
+              <a:spcAft>
+                <a:spcPts val="0"/>
+              </a:spcAft>
+              <a:defRPr sz="720">
+                <a:solidFill>
+                  <a:srgbClr val="FFFFFF"/>
+                </a:solidFill>
+                <a:latin typeface="Consolas"/>
+              </a:defRPr>
+            </a:pPr>
+            <a:r>
+              <a:t>cpu_trap = 0 (CPU healthy and executing normally)</a:t>
+            </a:r>
+          </a:p>
+        </p:txBody>
+      </p:sp>
+      <p:sp>
+        <p:nvSpPr>
+          <p:cNvPr id="11" name="TextBox 10"/>
+          <p:cNvSpPr txBox="1"/>
+          <p:nvPr/>
+        </p:nvSpPr>
+        <p:spPr>
+          <a:xfrm>
+            <a:off x="868680" y="5879592"/>
+            <a:ext cx="5074920" cy="274320"/>
+          </a:xfrm>
+          <a:prstGeom prst="rect">
+            <a:avLst/>
+          </a:prstGeom>
+          <a:noFill/>
+        </p:spPr>
+        <p:txBody>
+          <a:bodyPr wrap="none" lIns="0" tIns="0" rIns="0" bIns="0">
+            <a:spAutoFit/>
+          </a:bodyPr>
+          <a:lstStyle/>
+          <a:p>
+            <a:pPr>
+              <a:defRPr sz="819" b="1">
+                <a:solidFill>
+                  <a:srgbClr val="10B981"/>
+                </a:solidFill>
+                <a:latin typeface="Segoe UI"/>
+              </a:defRPr>
+            </a:pPr>
+            <a:r>
+              <a:t>=== BOOT FLASH XIP + UART PING-PONG: 100% PASS | RUNTIME: 2,086.555 µs ===</a:t>
+            </a:r>
+          </a:p>
+        </p:txBody>
+      </p:sp>
+      <p:sp>
+        <p:nvSpPr>
+          <p:cNvPr id="12" name="Rounded Rectangle 11"/>
+          <p:cNvSpPr/>
+          <p:nvPr/>
+        </p:nvSpPr>
+        <p:spPr>
+          <a:xfrm>
+            <a:off x="6217920" y="1234440"/>
+            <a:ext cx="5239512" cy="5029200"/>
           </a:xfrm>
           <a:prstGeom prst="roundRect">
             <a:avLst>
@@ -14457,14 +14908,14 @@
       </p:sp>
       <p:sp>
         <p:nvSpPr>
-          <p:cNvPr id="9" name="TextBox 8"/>
+          <p:cNvPr id="13" name="TextBox 12"/>
           <p:cNvSpPr txBox="1"/>
           <p:nvPr/>
         </p:nvSpPr>
         <p:spPr>
           <a:xfrm>
-            <a:off x="914400" y="1371600"/>
-            <a:ext cx="4846320" cy="4663440"/>
+            <a:off x="6400800" y="1353312"/>
+            <a:ext cx="4873752" cy="3977639"/>
           </a:xfrm>
           <a:prstGeom prst="rect">
             <a:avLst/>
@@ -14472,16 +14923,16 @@
           <a:noFill/>
         </p:spPr>
         <p:txBody>
-          <a:bodyPr wrap="square">
+          <a:bodyPr wrap="square" lIns="0" tIns="0" rIns="0" bIns="0">
             <a:spAutoFit/>
           </a:bodyPr>
           <a:lstStyle/>
           <a:p>
             <a:pPr>
               <a:spcAft>
-                <a:spcPts val="1000"/>
-              </a:spcAft>
-              <a:defRPr sz="1300" b="1">
+                <a:spcPts val="800"/>
+              </a:spcAft>
+              <a:defRPr sz="1200" b="1">
                 <a:solidFill>
                   <a:srgbClr val="10B981"/>
                 </a:solidFill>
@@ -14489,7 +14940,7 @@
               </a:defRPr>
             </a:pPr>
             <a:r>
-              <a:t>5 KỊCH BẢN KIỂM THỬ TÍCH HỢP TOP SOC</a:t>
+              <a:t>5 KỊCH BẢN KIỂM THỬ TÍCH HỢP TOP SOC (100% PASS)</a:t>
             </a:r>
           </a:p>
           <a:p>
@@ -14498,9 +14949,9 @@
                 <a:spcPct val="115000"/>
               </a:lnSpc>
               <a:spcAft>
-                <a:spcPts val="800"/>
-              </a:spcAft>
-              <a:defRPr sz="1050">
+                <a:spcPts val="500"/>
+              </a:spcAft>
+              <a:defRPr sz="930">
                 <a:solidFill>
                   <a:srgbClr val="0F172A"/>
                 </a:solidFill>
@@ -14517,9 +14968,9 @@
                 <a:spcPct val="115000"/>
               </a:lnSpc>
               <a:spcAft>
-                <a:spcPts val="800"/>
-              </a:spcAft>
-              <a:defRPr sz="1050">
+                <a:spcPts val="500"/>
+              </a:spcAft>
+              <a:defRPr sz="930">
                 <a:solidFill>
                   <a:srgbClr val="0F172A"/>
                 </a:solidFill>
@@ -14536,9 +14987,9 @@
                 <a:spcPct val="115000"/>
               </a:lnSpc>
               <a:spcAft>
-                <a:spcPts val="800"/>
-              </a:spcAft>
-              <a:defRPr sz="1050">
+                <a:spcPts val="500"/>
+              </a:spcAft>
+              <a:defRPr sz="930">
                 <a:solidFill>
                   <a:srgbClr val="0F172A"/>
                 </a:solidFill>
@@ -14546,7 +14997,7 @@
               </a:defRPr>
             </a:pPr>
             <a:r>
-              <a:t>• 2. C Startup Banner: CPU thực thi mã C trong main.c, khởi tạo ngoại vi và in toàn bộ chuỗi chào mừng ra UART.</a:t>
+              <a:t>• 2. C Startup Banner Output: CPU thực thi mã C main.c, khởi tạo ngoại vi và in chuỗi chào mừng ra UART (ready_matched = 1).</a:t>
             </a:r>
           </a:p>
           <a:p>
@@ -14555,9 +15006,9 @@
                 <a:spcPct val="115000"/>
               </a:lnSpc>
               <a:spcAft>
-                <a:spcPts val="800"/>
-              </a:spcAft>
-              <a:defRPr sz="1050">
+                <a:spcPts val="500"/>
+              </a:spcAft>
+              <a:defRPr sz="930">
                 <a:solidFill>
                   <a:srgbClr val="0F172A"/>
                 </a:solidFill>
@@ -14565,11 +15016,7 @@
               </a:defRPr>
             </a:pPr>
             <a:r>
-              <a:t>• 3. Host Ping Processing: Testbench đóng vai trò PC Host gửi byte lệnh 'P' (0x50) và '</a:t>
-            </a:r>
-            <a:br/>
-            <a:r>
-              <a:t>' (0x0A) qua cổng nối tiếp.</a:t>
+              <a:t>• 3. Host Ping Processing: Testbench đóng vai trò PC Host gửi byte lệnh 'P' (0x50) và '\n' (0x0A) qua chân uart_rx.</a:t>
             </a:r>
           </a:p>
           <a:p>
@@ -14578,9 +15025,9 @@
                 <a:spcPct val="115000"/>
               </a:lnSpc>
               <a:spcAft>
-                <a:spcPts val="800"/>
-              </a:spcAft>
-              <a:defRPr sz="1050">
+                <a:spcPts val="500"/>
+              </a:spcAft>
+              <a:defRPr sz="930">
                 <a:solidFill>
                   <a:srgbClr val="0F172A"/>
                 </a:solidFill>
@@ -14588,7 +15035,7 @@
               </a:defRPr>
             </a:pPr>
             <a:r>
-              <a:t>• 4. Response Verification: CPU phản hồi chuỗi 'PONG: PicoRV32 Active', testbench so khớp từng ký tự.</a:t>
+              <a:t>• 4. Response Verification: CPU nhận dạng lệnh, phản hồi tức thì chuỗi 'PONG: PicoRV32 Active' (pong_matched = 1).</a:t>
             </a:r>
           </a:p>
           <a:p>
@@ -14597,9 +15044,9 @@
                 <a:spcPct val="115000"/>
               </a:lnSpc>
               <a:spcAft>
-                <a:spcPts val="800"/>
-              </a:spcAft>
-              <a:defRPr sz="1050">
+                <a:spcPts val="500"/>
+              </a:spcAft>
+              <a:defRPr sz="930">
                 <a:solidFill>
                   <a:srgbClr val="0F172A"/>
                 </a:solidFill>
@@ -14607,21 +15054,21 @@
               </a:defRPr>
             </a:pPr>
             <a:r>
-              <a:t>• 5. CPU Health &amp; Zero-Trap: Khẳng định tín hiệu cpu_trap == 0 xuyên suốt quá trình chạy, không bị illegal instruction hay tràn RAM.</a:t>
-            </a:r>
-          </a:p>
-        </p:txBody>
-      </p:sp>
-      <p:sp>
-        <p:nvSpPr>
-          <p:cNvPr id="10" name="Rounded Rectangle 9"/>
+              <a:t>• 5. CPU Health &amp; Zero-Trap: Khẳng định tín hiệu trap == 0 xuyên suốt 2,086,555 ns, CPU không bị illegal instruction hay tràn RAM.</a:t>
+            </a:r>
+          </a:p>
+        </p:txBody>
+      </p:sp>
+      <p:sp>
+        <p:nvSpPr>
+          <p:cNvPr id="14" name="Rounded Rectangle 13"/>
           <p:cNvSpPr/>
           <p:nvPr/>
         </p:nvSpPr>
         <p:spPr>
           <a:xfrm>
-            <a:off x="6217920" y="1234440"/>
-            <a:ext cx="5239512" cy="4937760"/>
+            <a:off x="6400800" y="5468112"/>
+            <a:ext cx="4873752" cy="658368"/>
           </a:xfrm>
           <a:prstGeom prst="roundRect">
             <a:avLst>
@@ -14629,11 +15076,11 @@
             </a:avLst>
           </a:prstGeom>
           <a:solidFill>
-            <a:srgbClr val="0B132B"/>
+            <a:srgbClr val="ECFDF5"/>
           </a:solidFill>
           <a:ln w="19050">
             <a:solidFill>
-              <a:srgbClr val="1C2541"/>
+              <a:srgbClr val="10B981"/>
             </a:solidFill>
           </a:ln>
         </p:spPr>
@@ -14661,50 +15108,14 @@
       </p:sp>
       <p:sp>
         <p:nvSpPr>
-          <p:cNvPr id="11" name="TextBox 10"/>
+          <p:cNvPr id="15" name="TextBox 14"/>
           <p:cNvSpPr txBox="1"/>
           <p:nvPr/>
         </p:nvSpPr>
         <p:spPr>
           <a:xfrm>
-            <a:off x="6355080" y="1307592"/>
-            <a:ext cx="4965192" cy="292608"/>
-          </a:xfrm>
-          <a:prstGeom prst="rect">
-            <a:avLst/>
-          </a:prstGeom>
-          <a:noFill/>
-        </p:spPr>
-        <p:txBody>
-          <a:bodyPr wrap="none" lIns="0" tIns="0" rIns="0" bIns="0">
-            <a:spAutoFit/>
-          </a:bodyPr>
-          <a:lstStyle/>
-          <a:p>
-            <a:pPr>
-              <a:defRPr sz="950" b="1">
-                <a:solidFill>
-                  <a:srgbClr val="0EA5E9"/>
-                </a:solidFill>
-                <a:latin typeface="Consolas"/>
-              </a:defRPr>
-            </a:pPr>
-            <a:r>
-              <a:t>&gt;_  tb/run_sim_ping.bat output</a:t>
-            </a:r>
-          </a:p>
-        </p:txBody>
-      </p:sp>
-      <p:sp>
-        <p:nvSpPr>
-          <p:cNvPr id="12" name="TextBox 11"/>
-          <p:cNvSpPr txBox="1"/>
-          <p:nvPr/>
-        </p:nvSpPr>
-        <p:spPr>
-          <a:xfrm>
-            <a:off x="6355080" y="1600200"/>
-            <a:ext cx="4965192" cy="4224528"/>
+            <a:off x="6492240" y="5522976"/>
+            <a:ext cx="4690872" cy="548640"/>
           </a:xfrm>
           <a:prstGeom prst="rect">
             <a:avLst/>
@@ -14718,358 +15129,31 @@
           <a:lstStyle/>
           <a:p>
             <a:pPr>
-              <a:lnSpc>
-                <a:spcPct val="108000"/>
-              </a:lnSpc>
-              <a:spcAft>
-                <a:spcPts val="0"/>
-              </a:spcAft>
-              <a:defRPr sz="800">
-                <a:solidFill>
-                  <a:srgbClr val="FFFFFF"/>
-                </a:solidFill>
-                <a:latin typeface="Consolas"/>
-              </a:defRPr>
-            </a:pPr>
-            <a:r>
-              <a:t>Vivado Simulator v2025.1 - xelab &amp; xsim</a:t>
-            </a:r>
-          </a:p>
-          <a:p>
-            <a:pPr>
-              <a:lnSpc>
-                <a:spcPct val="108000"/>
-              </a:lnSpc>
-              <a:spcAft>
-                <a:spcPts val="0"/>
-              </a:spcAft>
-              <a:defRPr sz="800">
-                <a:solidFill>
-                  <a:srgbClr val="FFFFFF"/>
-                </a:solidFill>
-                <a:latin typeface="Consolas"/>
-              </a:defRPr>
-            </a:pPr>
-            <a:r>
-              <a:t>Analyzing Verilog file rtl/rdm6300_picorv32_soc.v</a:t>
-            </a:r>
-          </a:p>
-          <a:p>
-            <a:pPr>
-              <a:lnSpc>
-                <a:spcPct val="108000"/>
-              </a:lnSpc>
-              <a:spcAft>
-                <a:spcPts val="0"/>
-              </a:spcAft>
-              <a:defRPr sz="800">
-                <a:solidFill>
-                  <a:srgbClr val="FFFFFF"/>
-                </a:solidFill>
-                <a:latin typeface="Consolas"/>
-              </a:defRPr>
-            </a:pPr>
-            <a:r>
-              <a:t>Analyzing Verilog file tb/tb_uart_ping.v</a:t>
-            </a:r>
-          </a:p>
-          <a:p>
-            <a:pPr>
-              <a:lnSpc>
-                <a:spcPct val="108000"/>
-              </a:lnSpc>
-              <a:spcAft>
-                <a:spcPts val="0"/>
-              </a:spcAft>
-              <a:defRPr sz="800">
-                <a:solidFill>
-                  <a:srgbClr val="FFFFFF"/>
-                </a:solidFill>
-                <a:latin typeface="Consolas"/>
-              </a:defRPr>
-            </a:pPr>
-          </a:p>
-          <a:p>
-            <a:pPr>
-              <a:lnSpc>
-                <a:spcPct val="108000"/>
-              </a:lnSpc>
-              <a:spcAft>
-                <a:spcPts val="0"/>
-              </a:spcAft>
-              <a:defRPr sz="800" b="1">
-                <a:solidFill>
-                  <a:srgbClr val="0EA5E9"/>
-                </a:solidFill>
-                <a:latin typeface="Consolas"/>
-              </a:defRPr>
-            </a:pPr>
-            <a:r>
-              <a:t>[BOOT] Releasing CPU Reset...</a:t>
-            </a:r>
-          </a:p>
-          <a:p>
-            <a:pPr>
-              <a:lnSpc>
-                <a:spcPct val="108000"/>
-              </a:lnSpc>
-              <a:spcAft>
-                <a:spcPts val="0"/>
-              </a:spcAft>
-              <a:defRPr sz="800" b="1">
-                <a:solidFill>
-                  <a:srgbClr val="0EA5E9"/>
-                </a:solidFill>
-                <a:latin typeface="Consolas"/>
-              </a:defRPr>
-            </a:pPr>
-            <a:r>
-              <a:t>[BOOT] PicoRV32 woke up at 0x00250000 (Flash XIP)</a:t>
-            </a:r>
-          </a:p>
-          <a:p>
-            <a:pPr>
-              <a:lnSpc>
-                <a:spcPct val="108000"/>
-              </a:lnSpc>
-              <a:spcAft>
-                <a:spcPts val="0"/>
-              </a:spcAft>
-              <a:defRPr sz="800" b="1">
-                <a:solidFill>
-                  <a:srgbClr val="0EA5E9"/>
-                </a:solidFill>
-                <a:latin typeface="Consolas"/>
-              </a:defRPr>
-            </a:pPr>
-            <a:r>
-              <a:t>[EXEC] Loading instructions from firmware.hex...</a:t>
-            </a:r>
-          </a:p>
-          <a:p>
-            <a:pPr>
-              <a:lnSpc>
-                <a:spcPct val="108000"/>
-              </a:lnSpc>
-              <a:spcAft>
-                <a:spcPts val="0"/>
-              </a:spcAft>
-              <a:defRPr sz="800" b="1">
-                <a:solidFill>
-                  <a:srgbClr val="0EA5E9"/>
-                </a:solidFill>
-                <a:latin typeface="Consolas"/>
-              </a:defRPr>
-            </a:pPr>
-            <a:r>
-              <a:t>[UART] Detected Startup Banner:</a:t>
-            </a:r>
-          </a:p>
-          <a:p>
-            <a:pPr>
-              <a:lnSpc>
-                <a:spcPct val="108000"/>
-              </a:lnSpc>
-              <a:spcAft>
-                <a:spcPts val="0"/>
-              </a:spcAft>
-              <a:defRPr sz="800">
-                <a:solidFill>
-                  <a:srgbClr val="FFFFFF"/>
-                </a:solidFill>
-                <a:latin typeface="Consolas"/>
-              </a:defRPr>
-            </a:pPr>
-            <a:r>
-              <a:t>  ================================================</a:t>
-            </a:r>
-          </a:p>
-          <a:p>
-            <a:pPr>
-              <a:lnSpc>
-                <a:spcPct val="108000"/>
-              </a:lnSpc>
-              <a:spcAft>
-                <a:spcPts val="0"/>
-              </a:spcAft>
-              <a:defRPr sz="800">
-                <a:solidFill>
-                  <a:srgbClr val="FFFFFF"/>
-                </a:solidFill>
-                <a:latin typeface="Consolas"/>
-              </a:defRPr>
-            </a:pPr>
-            <a:r>
-              <a:t>    RDM6300 PICORV32 SOC ACCESS CONTROLLER READY  </a:t>
-            </a:r>
-          </a:p>
-          <a:p>
-            <a:pPr>
-              <a:lnSpc>
-                <a:spcPct val="108000"/>
-              </a:lnSpc>
-              <a:spcAft>
-                <a:spcPts val="0"/>
-              </a:spcAft>
-              <a:defRPr sz="800">
-                <a:solidFill>
-                  <a:srgbClr val="FFFFFF"/>
-                </a:solidFill>
-                <a:latin typeface="Consolas"/>
-              </a:defRPr>
-            </a:pPr>
-            <a:r>
-              <a:t>  ================================================</a:t>
-            </a:r>
-          </a:p>
-          <a:p>
-            <a:pPr>
-              <a:lnSpc>
-                <a:spcPct val="108000"/>
-              </a:lnSpc>
-              <a:spcAft>
-                <a:spcPts val="0"/>
-              </a:spcAft>
-              <a:defRPr sz="800" b="1">
-                <a:solidFill>
-                  <a:srgbClr val="0EA5E9"/>
-                </a:solidFill>
-                <a:latin typeface="Consolas"/>
-              </a:defRPr>
-            </a:pPr>
-            <a:r>
-              <a:t>[HOST] Sending Host Command: 'P' (Ping)...</a:t>
-            </a:r>
-          </a:p>
-          <a:p>
-            <a:pPr>
-              <a:lnSpc>
-                <a:spcPct val="108000"/>
-              </a:lnSpc>
-              <a:spcAft>
-                <a:spcPts val="0"/>
-              </a:spcAft>
-              <a:defRPr sz="800">
-                <a:solidFill>
-                  <a:srgbClr val="FFFFFF"/>
-                </a:solidFill>
-                <a:latin typeface="Consolas"/>
-              </a:defRPr>
-            </a:pPr>
-            <a:r>
-              <a:t>[RECV] CPU Response received via UART:</a:t>
-            </a:r>
-          </a:p>
-          <a:p>
-            <a:pPr>
-              <a:lnSpc>
-                <a:spcPct val="108000"/>
-              </a:lnSpc>
-              <a:spcAft>
-                <a:spcPts val="0"/>
-              </a:spcAft>
-              <a:defRPr sz="800">
-                <a:solidFill>
-                  <a:srgbClr val="FFFFFF"/>
-                </a:solidFill>
-                <a:latin typeface="Consolas"/>
-              </a:defRPr>
-            </a:pPr>
-            <a:r>
-              <a:t>  PONG: PicoRV32 Active</a:t>
-            </a:r>
-          </a:p>
-          <a:p>
-            <a:pPr>
-              <a:lnSpc>
-                <a:spcPct val="108000"/>
-              </a:lnSpc>
-              <a:spcAft>
-                <a:spcPts val="0"/>
-              </a:spcAft>
-              <a:defRPr sz="800">
-                <a:solidFill>
-                  <a:srgbClr val="FFFFFF"/>
-                </a:solidFill>
-                <a:latin typeface="Consolas"/>
-              </a:defRPr>
-            </a:pPr>
-            <a:r>
-              <a:t>[VERIFY] String matches expected response!</a:t>
-            </a:r>
-          </a:p>
-          <a:p>
-            <a:pPr>
-              <a:lnSpc>
-                <a:spcPct val="108000"/>
-              </a:lnSpc>
-              <a:spcAft>
-                <a:spcPts val="0"/>
-              </a:spcAft>
-              <a:defRPr sz="800">
-                <a:solidFill>
-                  <a:srgbClr val="FFFFFF"/>
-                </a:solidFill>
-                <a:latin typeface="Consolas"/>
-              </a:defRPr>
-            </a:pPr>
-            <a:r>
-              <a:t>[ASSERT] Checking cpu_trap signal...</a:t>
-            </a:r>
-          </a:p>
-          <a:p>
-            <a:pPr>
-              <a:lnSpc>
-                <a:spcPct val="108000"/>
-              </a:lnSpc>
-              <a:spcAft>
-                <a:spcPts val="0"/>
-              </a:spcAft>
-              <a:defRPr sz="800" b="1">
+              <a:spcAft>
+                <a:spcPts val="100"/>
+              </a:spcAft>
+              <a:defRPr sz="819" b="1">
                 <a:solidFill>
                   <a:srgbClr val="10B981"/>
                 </a:solidFill>
-                <a:latin typeface="Consolas"/>
-              </a:defRPr>
-            </a:pPr>
-            <a:r>
-              <a:t>  cpu_trap == 0 (CONFIRMED: ZERO CPU TRAPS!)</a:t>
-            </a:r>
-          </a:p>
-        </p:txBody>
-      </p:sp>
-      <p:sp>
-        <p:nvSpPr>
-          <p:cNvPr id="13" name="TextBox 12"/>
-          <p:cNvSpPr txBox="1"/>
-          <p:nvPr/>
-        </p:nvSpPr>
-        <p:spPr>
-          <a:xfrm>
-            <a:off x="6355080" y="5788152"/>
-            <a:ext cx="4965192" cy="274320"/>
-          </a:xfrm>
-          <a:prstGeom prst="rect">
-            <a:avLst/>
-          </a:prstGeom>
-          <a:noFill/>
-        </p:spPr>
-        <p:txBody>
-          <a:bodyPr wrap="none" lIns="0" tIns="0" rIns="0" bIns="0">
-            <a:spAutoFit/>
-          </a:bodyPr>
-          <a:lstStyle/>
-          <a:p>
-            <a:pPr>
-              <a:defRPr sz="819" b="1">
-                <a:solidFill>
-                  <a:srgbClr val="10B981"/>
-                </a:solidFill>
-                <a:latin typeface="Segoe UI"/>
-              </a:defRPr>
-            </a:pPr>
-            <a:r>
-              <a:t>=== TOP SOC PING TESTBENCH: 100% PASS ===</a:t>
+                <a:latin typeface="Segoe UI"/>
+              </a:defRPr>
+            </a:pPr>
+            <a:r>
+              <a:t>XÁC NHẬN KẾT QUẢ MÔ PHỎNG VIVADO XSIM:</a:t>
+            </a:r>
+          </a:p>
+          <a:p>
+            <a:pPr>
+              <a:defRPr sz="880" b="1">
+                <a:solidFill>
+                  <a:srgbClr val="065F46"/>
+                </a:solidFill>
+                <a:latin typeface="Segoe UI"/>
+              </a:defRPr>
+            </a:pPr>
+            <a:r>
+              <a:t>100% PASS (BOOT XIP + PING-PONG) | RUNTIME: 2,086.555 µs | TRAP: 0</a:t>
             </a:r>
           </a:p>
         </p:txBody>
@@ -15304,7 +15388,7 @@
               </a:defRPr>
             </a:pPr>
             <a:r>
-              <a:t>Đồ Án Tốt Nghiệp: SoC PicoRV32 RFID RDM6300 &amp; SPI Flash | SV: Thái Tuấn Hiệp | GVHD: ThS. Nguyễn Văn Đông</a:t>
+              <a:t>Đồ Án: SoC PicoRV32 RFID RDM6300 &amp; SPI Flash | FPT Jetking Chip Design - SEM3 | HV: Thái Tuấn Hiệp</a:t>
             </a:r>
           </a:p>
         </p:txBody>
@@ -16121,7 +16205,7 @@
               </a:defRPr>
             </a:pPr>
             <a:r>
-              <a:t>Đồ Án Tốt Nghiệp: SoC PicoRV32 RFID RDM6300 &amp; SPI Flash | SV: Thái Tuấn Hiệp | GVHD: ThS. Nguyễn Văn Đông</a:t>
+              <a:t>Đồ Án: SoC PicoRV32 RFID RDM6300 &amp; SPI Flash | FPT Jetking Chip Design - SEM3 | HV: Thái Tuấn Hiệp</a:t>
             </a:r>
           </a:p>
         </p:txBody>
@@ -17114,7 +17198,7 @@
               </a:defRPr>
             </a:pPr>
             <a:r>
-              <a:t>Đồ Án Tốt Nghiệp: SoC PicoRV32 RFID RDM6300 &amp; SPI Flash | SV: Thái Tuấn Hiệp | GVHD: ThS. Nguyễn Văn Đông</a:t>
+              <a:t>Đồ Án: SoC PicoRV32 RFID RDM6300 &amp; SPI Flash | FPT Jetking Chip Design - SEM3 | HV: Thái Tuấn Hiệp</a:t>
             </a:r>
           </a:p>
         </p:txBody>
@@ -17938,7 +18022,7 @@
               </a:defRPr>
             </a:pPr>
             <a:r>
-              <a:t>Đồ Án Tốt Nghiệp: SoC PicoRV32 RFID RDM6300 &amp; SPI Flash | SV: Thái Tuấn Hiệp | GVHD: ThS. Nguyễn Văn Đông</a:t>
+              <a:t>Đồ Án: SoC PicoRV32 RFID RDM6300 &amp; SPI Flash | FPT Jetking Chip Design - SEM3 | HV: Thái Tuấn Hiệp</a:t>
             </a:r>
           </a:p>
         </p:txBody>
@@ -18691,7 +18775,7 @@
               </a:defRPr>
             </a:pPr>
             <a:r>
-              <a:t>Đồ Án Tốt Nghiệp: SoC PicoRV32 RFID RDM6300 &amp; SPI Flash | SV: Thái Tuấn Hiệp | GVHD: ThS. Nguyễn Văn Đông</a:t>
+              <a:t>Đồ Án: SoC PicoRV32 RFID RDM6300 &amp; SPI Flash | FPT Jetking Chip Design - SEM3 | HV: Thái Tuấn Hiệp</a:t>
             </a:r>
           </a:p>
         </p:txBody>
@@ -19432,7 +19516,7 @@
               </a:defRPr>
             </a:pPr>
             <a:r>
-              <a:t>Đồ Án Tốt Nghiệp: SoC PicoRV32 RFID RDM6300 &amp; SPI Flash | SV: Thái Tuấn Hiệp | GVHD: ThS. Nguyễn Văn Đông</a:t>
+              <a:t>Đồ Án: SoC PicoRV32 RFID RDM6300 &amp; SPI Flash | FPT Jetking Chip Design - SEM3 | HV: Thái Tuấn Hiệp</a:t>
             </a:r>
           </a:p>
         </p:txBody>
@@ -20230,7 +20314,7 @@
               </a:defRPr>
             </a:pPr>
             <a:r>
-              <a:t>Đồ Án Tốt Nghiệp: SoC PicoRV32 RFID RDM6300 &amp; SPI Flash | SV: Thái Tuấn Hiệp | GVHD: ThS. Nguyễn Văn Đông</a:t>
+              <a:t>Đồ Án: SoC PicoRV32 RFID RDM6300 &amp; SPI Flash | FPT Jetking Chip Design - SEM3 | HV: Thái Tuấn Hiệp</a:t>
             </a:r>
           </a:p>
         </p:txBody>
@@ -20930,7 +21014,7 @@
               </a:defRPr>
             </a:pPr>
             <a:r>
-              <a:t>Đồ Án Tốt Nghiệp: SoC PicoRV32 RFID RDM6300 &amp; SPI Flash | SV: Thái Tuấn Hiệp | GVHD: ThS. Nguyễn Văn Đông</a:t>
+              <a:t>Đồ Án: SoC PicoRV32 RFID RDM6300 &amp; SPI Flash | FPT Jetking Chip Design - SEM3 | HV: Thái Tuấn Hiệp</a:t>
             </a:r>
           </a:p>
         </p:txBody>
@@ -21453,7 +21537,7 @@
               </a:defRPr>
             </a:pPr>
             <a:r>
-              <a:t>Đồ Án Tốt Nghiệp: SoC PicoRV32 RFID RDM6300 &amp; SPI Flash | SV: Thái Tuấn Hiệp | GVHD: ThS. Nguyễn Văn Đông</a:t>
+              <a:t>Đồ Án: SoC PicoRV32 RFID RDM6300 &amp; SPI Flash | FPT Jetking Chip Design - SEM3 | HV: Thái Tuấn Hiệp</a:t>
             </a:r>
           </a:p>
         </p:txBody>
@@ -21973,7 +22057,7 @@
               </a:defRPr>
             </a:pPr>
             <a:r>
-              <a:t>Đồ Án Tốt Nghiệp: SoC PicoRV32 RFID RDM6300 &amp; SPI Flash | SV: Thái Tuấn Hiệp | GVHD: ThS. Nguyễn Văn Đông</a:t>
+              <a:t>Đồ Án: SoC PicoRV32 RFID RDM6300 &amp; SPI Flash | FPT Jetking Chip Design - SEM3 | HV: Thái Tuấn Hiệp</a:t>
             </a:r>
           </a:p>
         </p:txBody>
@@ -22513,7 +22597,7 @@
               </a:defRPr>
             </a:pPr>
             <a:r>
-              <a:t>Đồ Án Tốt Nghiệp: SoC PicoRV32 RFID RDM6300 &amp; SPI Flash | SV: Thái Tuấn Hiệp | GVHD: ThS. Nguyễn Văn Đông</a:t>
+              <a:t>Đồ Án: SoC PicoRV32 RFID RDM6300 &amp; SPI Flash | FPT Jetking Chip Design - SEM3 | HV: Thái Tuấn Hiệp</a:t>
             </a:r>
           </a:p>
         </p:txBody>

--- a/rdm6300-picorv32-rom-data/document/Bao_Cao_Do_An_RDM6300_PicoRV32_SoC.pptx
+++ b/rdm6300-picorv32-rom-data/document/Bao_Cao_Do_An_RDM6300_PicoRV32_SoC.pptx
@@ -17,6 +17,7 @@
     <p:sldId id="265" r:id="rId16"/>
     <p:sldId id="266" r:id="rId17"/>
     <p:sldId id="267" r:id="rId18"/>
+    <p:sldId id="268" r:id="rId19"/>
   </p:sldIdLst>
   <p:sldSz cx="12191695" cy="6858000" type="screen4x3"/>
   <p:notesSz cx="6858000" cy="9144000"/>
@@ -3195,8 +3196,8 @@
         </p:nvSpPr>
         <p:spPr>
           <a:xfrm>
-            <a:off x="868680" y="960120"/>
-            <a:ext cx="10469880" cy="4937760"/>
+            <a:off x="960120" y="932688"/>
+            <a:ext cx="10271455" cy="3840480"/>
           </a:xfrm>
           <a:prstGeom prst="rect">
             <a:avLst/>
@@ -3204,14 +3205,14 @@
           <a:noFill/>
         </p:spPr>
         <p:txBody>
-          <a:bodyPr wrap="square" lIns="45720" rIns="45720">
+          <a:bodyPr wrap="square" lIns="0" rIns="0" tIns="0" bIns="0">
             <a:spAutoFit/>
           </a:bodyPr>
           <a:lstStyle/>
           <a:p>
             <a:pPr>
               <a:spcAft>
-                <a:spcPts val="1600"/>
+                <a:spcPts val="1200"/>
               </a:spcAft>
               <a:defRPr sz="1350" b="1">
                 <a:solidFill>
@@ -3230,9 +3231,9 @@
                 <a:spcPct val="125000"/>
               </a:lnSpc>
               <a:spcAft>
-                <a:spcPts val="1600"/>
+                <a:spcPts val="1400"/>
               </a:spcAft>
-              <a:defRPr sz="1750" b="1">
+              <a:defRPr sz="2600" b="1">
                 <a:solidFill>
                   <a:srgbClr val="FFFFFF"/>
                 </a:solidFill>
@@ -3240,17 +3241,17 @@
               </a:defRPr>
             </a:pPr>
             <a:r>
-              <a:t>THIẾT KẾ HỆ THỐNG XỬ LÝ DỮ LIỆU CỦA THẺ RA VÀO RFID 125KHZ OFFLINE</a:t>
+              <a:t>THIẾT KẾ HỆ THỐNG SOC XỬ LÝ DỮ LIỆU THẺ RA VÀO RFID</a:t>
             </a:r>
             <a:br/>
             <a:r>
-              <a:t>TÍCH HỢP CPU RISC-V PICORV32 &amp; XỬ LÝ NGHIỆP VỤ DỮ LIỆU THẺ BẰNG FIRMWARE C</a:t>
+              <a:t>TỐI ƯU RTL TO GDSII TRÊN CHIP ASIC</a:t>
             </a:r>
           </a:p>
           <a:p>
             <a:pPr>
               <a:spcAft>
-                <a:spcPts val="2400"/>
+                <a:spcPts val="1800"/>
               </a:spcAft>
               <a:defRPr sz="1200">
                 <a:solidFill>
@@ -3266,9 +3267,9 @@
           <a:p>
             <a:pPr>
               <a:spcAft>
-                <a:spcPts val="600"/>
+                <a:spcPts val="500"/>
               </a:spcAft>
-              <a:defRPr sz="1300" b="1">
+              <a:defRPr sz="1350" b="1">
                 <a:solidFill>
                   <a:srgbClr val="FFFFFF"/>
                 </a:solidFill>
@@ -3282,7 +3283,7 @@
           <a:p>
             <a:pPr>
               <a:spcAft>
-                <a:spcPts val="600"/>
+                <a:spcPts val="500"/>
               </a:spcAft>
               <a:defRPr sz="1250">
                 <a:solidFill>
@@ -3310,6 +3311,162 @@
           </a:p>
         </p:txBody>
       </p:sp>
+      <p:sp>
+        <p:nvSpPr>
+          <p:cNvPr id="5" name="TextBox 4"/>
+          <p:cNvSpPr txBox="1"/>
+          <p:nvPr/>
+        </p:nvSpPr>
+        <p:spPr>
+          <a:xfrm>
+            <a:off x="960120" y="4864608"/>
+            <a:ext cx="10271455" cy="256032"/>
+          </a:xfrm>
+          <a:prstGeom prst="rect">
+            <a:avLst/>
+          </a:prstGeom>
+          <a:noFill/>
+        </p:spPr>
+        <p:txBody>
+          <a:bodyPr wrap="none" lIns="0" rIns="0" tIns="0" bIns="0">
+            <a:spAutoFit/>
+          </a:bodyPr>
+          <a:lstStyle/>
+          <a:p>
+            <a:pPr>
+              <a:defRPr sz="1050" b="1">
+                <a:solidFill>
+                  <a:srgbClr val="0EA5E9"/>
+                </a:solidFill>
+                <a:latin typeface="Segoe UI"/>
+              </a:defRPr>
+            </a:pPr>
+            <a:r>
+              <a:t>CÔNG CỤ EDA &amp; HỆ SINH THÁI CÔNG NGHỆ SỬ DỤNG TRONG ĐỒ ÁN:</a:t>
+            </a:r>
+          </a:p>
+        </p:txBody>
+      </p:sp>
+      <p:pic>
+        <p:nvPicPr>
+          <p:cNvPr id="6" name="Picture 5" descr="badge_openlane.png"/>
+          <p:cNvPicPr>
+            <a:picLocks noChangeAspect="1"/>
+          </p:cNvPicPr>
+          <p:nvPr/>
+        </p:nvPicPr>
+        <p:blipFill>
+          <a:blip r:embed="rId2"/>
+          <a:stretch>
+            <a:fillRect/>
+          </a:stretch>
+        </p:blipFill>
+        <p:spPr>
+          <a:xfrm>
+            <a:off x="960120" y="5175504"/>
+            <a:ext cx="1869159" cy="658368"/>
+          </a:xfrm>
+          <a:prstGeom prst="rect">
+            <a:avLst/>
+          </a:prstGeom>
+        </p:spPr>
+      </p:pic>
+      <p:pic>
+        <p:nvPicPr>
+          <p:cNvPr id="7" name="Picture 6" descr="badge_vivado.png"/>
+          <p:cNvPicPr>
+            <a:picLocks noChangeAspect="1"/>
+          </p:cNvPicPr>
+          <p:nvPr/>
+        </p:nvPicPr>
+        <p:blipFill>
+          <a:blip r:embed="rId3"/>
+          <a:stretch>
+            <a:fillRect/>
+          </a:stretch>
+        </p:blipFill>
+        <p:spPr>
+          <a:xfrm>
+            <a:off x="2725834" y="5175504"/>
+            <a:ext cx="1816187" cy="658368"/>
+          </a:xfrm>
+          <a:prstGeom prst="rect">
+            <a:avLst/>
+          </a:prstGeom>
+        </p:spPr>
+      </p:pic>
+      <p:pic>
+        <p:nvPicPr>
+          <p:cNvPr id="8" name="Picture 7" descr="badge_fpga.png"/>
+          <p:cNvPicPr>
+            <a:picLocks noChangeAspect="1"/>
+          </p:cNvPicPr>
+          <p:nvPr/>
+        </p:nvPicPr>
+        <p:blipFill>
+          <a:blip r:embed="rId4"/>
+          <a:stretch>
+            <a:fillRect/>
+          </a:stretch>
+        </p:blipFill>
+        <p:spPr>
+          <a:xfrm>
+            <a:off x="4438576" y="5175504"/>
+            <a:ext cx="1922131" cy="658368"/>
+          </a:xfrm>
+          <a:prstGeom prst="rect">
+            <a:avLst/>
+          </a:prstGeom>
+        </p:spPr>
+      </p:pic>
+      <p:pic>
+        <p:nvPicPr>
+          <p:cNvPr id="9" name="Picture 8" descr="badge_riscv.png"/>
+          <p:cNvPicPr>
+            <a:picLocks noChangeAspect="1"/>
+          </p:cNvPicPr>
+          <p:nvPr/>
+        </p:nvPicPr>
+        <p:blipFill>
+          <a:blip r:embed="rId5"/>
+          <a:stretch>
+            <a:fillRect/>
+          </a:stretch>
+        </p:blipFill>
+        <p:spPr>
+          <a:xfrm>
+            <a:off x="6257262" y="5175504"/>
+            <a:ext cx="2883197" cy="658368"/>
+          </a:xfrm>
+          <a:prstGeom prst="rect">
+            <a:avLst/>
+          </a:prstGeom>
+        </p:spPr>
+      </p:pic>
+      <p:pic>
+        <p:nvPicPr>
+          <p:cNvPr id="10" name="Picture 9" descr="badge_skywater.png"/>
+          <p:cNvPicPr>
+            <a:picLocks noChangeAspect="1"/>
+          </p:cNvPicPr>
+          <p:nvPr/>
+        </p:nvPicPr>
+        <p:blipFill>
+          <a:blip r:embed="rId6"/>
+          <a:stretch>
+            <a:fillRect/>
+          </a:stretch>
+        </p:blipFill>
+        <p:spPr>
+          <a:xfrm>
+            <a:off x="9037015" y="5175504"/>
+            <a:ext cx="2194560" cy="658368"/>
+          </a:xfrm>
+          <a:prstGeom prst="rect">
+            <a:avLst/>
+          </a:prstGeom>
+        </p:spPr>
+      </p:pic>
     </p:spTree>
   </p:cSld>
   <p:clrMapOvr>
@@ -3461,7 +3618,7 @@
               </a:defRPr>
             </a:pPr>
             <a:r>
-              <a:t>Tổng Hợp Kết Quả Thiết Kế Vật Lý &amp; Chỉ Số PPA (OpenLane 2 / SkyWater 130nm)</a:t>
+              <a:t>Minh Chứng Ký Duyệt Sign-off, Bản Vẽ OpenROAD &amp; Cấu Hình OpenLane</a:t>
             </a:r>
           </a:p>
         </p:txBody>
@@ -3576,7 +3733,924 @@
               </a:defRPr>
             </a:pPr>
             <a:r>
-              <a:t>10 / 12</a:t>
+              <a:t>10 / 13</a:t>
+            </a:r>
+          </a:p>
+        </p:txBody>
+      </p:sp>
+      <p:sp>
+        <p:nvSpPr>
+          <p:cNvPr id="8" name="Rounded Rectangle 7"/>
+          <p:cNvSpPr/>
+          <p:nvPr/>
+        </p:nvSpPr>
+        <p:spPr>
+          <a:xfrm>
+            <a:off x="731520" y="1188720"/>
+            <a:ext cx="5120640" cy="3291840"/>
+          </a:xfrm>
+          <a:prstGeom prst="roundRect">
+            <a:avLst>
+              <a:gd name="adj" fmla="val 2000"/>
+            </a:avLst>
+          </a:prstGeom>
+          <a:solidFill>
+            <a:srgbClr val="0B132B"/>
+          </a:solidFill>
+          <a:ln w="19050">
+            <a:solidFill>
+              <a:srgbClr val="1C2541"/>
+            </a:solidFill>
+          </a:ln>
+        </p:spPr>
+        <p:style>
+          <a:lnRef idx="1">
+            <a:schemeClr val="accent1"/>
+          </a:lnRef>
+          <a:fillRef idx="3">
+            <a:schemeClr val="accent1"/>
+          </a:fillRef>
+          <a:effectRef idx="2">
+            <a:schemeClr val="accent1"/>
+          </a:effectRef>
+          <a:fontRef idx="minor">
+            <a:schemeClr val="lt1"/>
+          </a:fontRef>
+        </p:style>
+        <p:txBody>
+          <a:bodyPr rtlCol="0" anchor="ctr"/>
+          <a:lstStyle/>
+          <a:p>
+            <a:pPr algn="ctr"/>
+          </a:p>
+        </p:txBody>
+      </p:sp>
+      <p:sp>
+        <p:nvSpPr>
+          <p:cNvPr id="9" name="TextBox 8"/>
+          <p:cNvSpPr txBox="1"/>
+          <p:nvPr/>
+        </p:nvSpPr>
+        <p:spPr>
+          <a:xfrm>
+            <a:off x="868680" y="1261872"/>
+            <a:ext cx="4846320" cy="292608"/>
+          </a:xfrm>
+          <a:prstGeom prst="rect">
+            <a:avLst/>
+          </a:prstGeom>
+          <a:noFill/>
+        </p:spPr>
+        <p:txBody>
+          <a:bodyPr wrap="none" lIns="0" tIns="0" rIns="0" bIns="0">
+            <a:spAutoFit/>
+          </a:bodyPr>
+          <a:lstStyle/>
+          <a:p>
+            <a:pPr>
+              <a:defRPr sz="1050" b="1">
+                <a:solidFill>
+                  <a:srgbClr val="0EA5E9"/>
+                </a:solidFill>
+                <a:latin typeface="Consolas"/>
+              </a:defRPr>
+            </a:pPr>
+            <a:r>
+              <a:t>&gt;_  Cấu hình OpenLane (config.json)</a:t>
+            </a:r>
+          </a:p>
+        </p:txBody>
+      </p:sp>
+      <p:sp>
+        <p:nvSpPr>
+          <p:cNvPr id="10" name="TextBox 9"/>
+          <p:cNvSpPr txBox="1"/>
+          <p:nvPr/>
+        </p:nvSpPr>
+        <p:spPr>
+          <a:xfrm>
+            <a:off x="868680" y="1554480"/>
+            <a:ext cx="4846320" cy="2880360"/>
+          </a:xfrm>
+          <a:prstGeom prst="rect">
+            <a:avLst/>
+          </a:prstGeom>
+          <a:noFill/>
+        </p:spPr>
+        <p:txBody>
+          <a:bodyPr wrap="square" lIns="0" tIns="0" rIns="0" bIns="0">
+            <a:spAutoFit/>
+          </a:bodyPr>
+          <a:lstStyle/>
+          <a:p>
+            <a:pPr>
+              <a:lnSpc>
+                <a:spcPct val="112000"/>
+              </a:lnSpc>
+              <a:spcAft>
+                <a:spcPts val="0"/>
+              </a:spcAft>
+              <a:defRPr sz="1050">
+                <a:solidFill>
+                  <a:srgbClr val="FFFFFF"/>
+                </a:solidFill>
+                <a:latin typeface="Consolas"/>
+              </a:defRPr>
+            </a:pPr>
+            <a:r>
+              <a:t>{</a:t>
+            </a:r>
+          </a:p>
+          <a:p>
+            <a:pPr>
+              <a:lnSpc>
+                <a:spcPct val="112000"/>
+              </a:lnSpc>
+              <a:spcAft>
+                <a:spcPts val="0"/>
+              </a:spcAft>
+              <a:defRPr sz="1050">
+                <a:solidFill>
+                  <a:srgbClr val="FFFFFF"/>
+                </a:solidFill>
+                <a:latin typeface="Consolas"/>
+              </a:defRPr>
+            </a:pPr>
+            <a:r>
+              <a:t>  "DESIGN_NAME": "rdm6300_picorv32_soc",</a:t>
+            </a:r>
+          </a:p>
+          <a:p>
+            <a:pPr>
+              <a:lnSpc>
+                <a:spcPct val="112000"/>
+              </a:lnSpc>
+              <a:spcAft>
+                <a:spcPts val="0"/>
+              </a:spcAft>
+              <a:defRPr sz="1050">
+                <a:solidFill>
+                  <a:srgbClr val="FFFFFF"/>
+                </a:solidFill>
+                <a:latin typeface="Consolas"/>
+              </a:defRPr>
+            </a:pPr>
+            <a:r>
+              <a:t>  "PDK": "sky130A",  "STD_CELL_LIBRARY": "sky130_fd_sc_hd",</a:t>
+            </a:r>
+          </a:p>
+          <a:p>
+            <a:pPr>
+              <a:lnSpc>
+                <a:spcPct val="112000"/>
+              </a:lnSpc>
+              <a:spcAft>
+                <a:spcPts val="0"/>
+              </a:spcAft>
+              <a:defRPr sz="1050">
+                <a:solidFill>
+                  <a:srgbClr val="FFFFFF"/>
+                </a:solidFill>
+                <a:latin typeface="Consolas"/>
+              </a:defRPr>
+            </a:pPr>
+            <a:r>
+              <a:t>  "CLOCK_PERIOD": 20.0, // 50 MHz Clock</a:t>
+            </a:r>
+          </a:p>
+          <a:p>
+            <a:pPr>
+              <a:lnSpc>
+                <a:spcPct val="112000"/>
+              </a:lnSpc>
+              <a:spcAft>
+                <a:spcPts val="0"/>
+              </a:spcAft>
+              <a:defRPr sz="1050">
+                <a:solidFill>
+                  <a:srgbClr val="FFFFFF"/>
+                </a:solidFill>
+                <a:latin typeface="Consolas"/>
+              </a:defRPr>
+            </a:pPr>
+            <a:r>
+              <a:t>  "FP_CORE_UTIL": 26,   // 26% Core Density</a:t>
+            </a:r>
+          </a:p>
+          <a:p>
+            <a:pPr>
+              <a:lnSpc>
+                <a:spcPct val="112000"/>
+              </a:lnSpc>
+              <a:spcAft>
+                <a:spcPts val="0"/>
+              </a:spcAft>
+              <a:defRPr sz="1050">
+                <a:solidFill>
+                  <a:srgbClr val="FFFFFF"/>
+                </a:solidFill>
+                <a:latin typeface="Consolas"/>
+              </a:defRPr>
+            </a:pPr>
+            <a:r>
+              <a:t>  "MAX_FANOUT_CONSTRAINT": 12,</a:t>
+            </a:r>
+          </a:p>
+          <a:p>
+            <a:pPr>
+              <a:lnSpc>
+                <a:spcPct val="112000"/>
+              </a:lnSpc>
+              <a:spcAft>
+                <a:spcPts val="0"/>
+              </a:spcAft>
+              <a:defRPr sz="1050">
+                <a:solidFill>
+                  <a:srgbClr val="FFFFFF"/>
+                </a:solidFill>
+                <a:latin typeface="Consolas"/>
+              </a:defRPr>
+            </a:pPr>
+            <a:r>
+              <a:t>  "PL_RESIZER_HOLD_SLACK_MARGIN": 0.6,</a:t>
+            </a:r>
+          </a:p>
+          <a:p>
+            <a:pPr>
+              <a:lnSpc>
+                <a:spcPct val="112000"/>
+              </a:lnSpc>
+              <a:spcAft>
+                <a:spcPts val="0"/>
+              </a:spcAft>
+              <a:defRPr sz="1050">
+                <a:solidFill>
+                  <a:srgbClr val="FFFFFF"/>
+                </a:solidFill>
+                <a:latin typeface="Consolas"/>
+              </a:defRPr>
+            </a:pPr>
+            <a:r>
+              <a:t>  "RUN_HEURISTIC_DIODE_INSERTION": true,</a:t>
+            </a:r>
+          </a:p>
+          <a:p>
+            <a:pPr>
+              <a:lnSpc>
+                <a:spcPct val="112000"/>
+              </a:lnSpc>
+              <a:spcAft>
+                <a:spcPts val="0"/>
+              </a:spcAft>
+              <a:defRPr sz="1050">
+                <a:solidFill>
+                  <a:srgbClr val="FFFFFF"/>
+                </a:solidFill>
+                <a:latin typeface="Consolas"/>
+              </a:defRPr>
+            </a:pPr>
+            <a:r>
+              <a:t>  "HEURISTIC_ANTENNA_THRESHOLD": 24,</a:t>
+            </a:r>
+          </a:p>
+          <a:p>
+            <a:pPr>
+              <a:lnSpc>
+                <a:spcPct val="112000"/>
+              </a:lnSpc>
+              <a:spcAft>
+                <a:spcPts val="0"/>
+              </a:spcAft>
+              <a:defRPr sz="1050">
+                <a:solidFill>
+                  <a:srgbClr val="FFFFFF"/>
+                </a:solidFill>
+                <a:latin typeface="Consolas"/>
+              </a:defRPr>
+            </a:pPr>
+            <a:r>
+              <a:t>  "GRT_ANTENNA_ITERS": 35,</a:t>
+            </a:r>
+          </a:p>
+          <a:p>
+            <a:pPr>
+              <a:lnSpc>
+                <a:spcPct val="112000"/>
+              </a:lnSpc>
+              <a:spcAft>
+                <a:spcPts val="0"/>
+              </a:spcAft>
+              <a:defRPr sz="1050">
+                <a:solidFill>
+                  <a:srgbClr val="FFFFFF"/>
+                </a:solidFill>
+                <a:latin typeface="Consolas"/>
+              </a:defRPr>
+            </a:pPr>
+            <a:r>
+              <a:t>  "RUN_ANTENNA_REPAIR": true,</a:t>
+            </a:r>
+          </a:p>
+          <a:p>
+            <a:pPr>
+              <a:lnSpc>
+                <a:spcPct val="112000"/>
+              </a:lnSpc>
+              <a:spcAft>
+                <a:spcPts val="0"/>
+              </a:spcAft>
+              <a:defRPr sz="1050">
+                <a:solidFill>
+                  <a:srgbClr val="FFFFFF"/>
+                </a:solidFill>
+                <a:latin typeface="Consolas"/>
+              </a:defRPr>
+            </a:pPr>
+            <a:r>
+              <a:t>  "SYNTH_STRATEGY": "AREA 0"</a:t>
+            </a:r>
+          </a:p>
+          <a:p>
+            <a:pPr>
+              <a:lnSpc>
+                <a:spcPct val="112000"/>
+              </a:lnSpc>
+              <a:spcAft>
+                <a:spcPts val="0"/>
+              </a:spcAft>
+              <a:defRPr sz="1050">
+                <a:solidFill>
+                  <a:srgbClr val="FFFFFF"/>
+                </a:solidFill>
+                <a:latin typeface="Consolas"/>
+              </a:defRPr>
+            </a:pPr>
+            <a:r>
+              <a:t>}</a:t>
+            </a:r>
+          </a:p>
+        </p:txBody>
+      </p:sp>
+      <p:sp>
+        <p:nvSpPr>
+          <p:cNvPr id="11" name="Rounded Rectangle 10"/>
+          <p:cNvSpPr/>
+          <p:nvPr/>
+        </p:nvSpPr>
+        <p:spPr>
+          <a:xfrm>
+            <a:off x="6080760" y="1188720"/>
+            <a:ext cx="5379415" cy="3291840"/>
+          </a:xfrm>
+          <a:prstGeom prst="roundRect">
+            <a:avLst>
+              <a:gd name="adj" fmla="val 2000"/>
+            </a:avLst>
+          </a:prstGeom>
+          <a:solidFill>
+            <a:srgbClr val="FFFFFF"/>
+          </a:solidFill>
+          <a:ln w="19050">
+            <a:solidFill>
+              <a:srgbClr val="2563EB"/>
+            </a:solidFill>
+          </a:ln>
+        </p:spPr>
+        <p:style>
+          <a:lnRef idx="1">
+            <a:schemeClr val="accent1"/>
+          </a:lnRef>
+          <a:fillRef idx="3">
+            <a:schemeClr val="accent1"/>
+          </a:fillRef>
+          <a:effectRef idx="2">
+            <a:schemeClr val="accent1"/>
+          </a:effectRef>
+          <a:fontRef idx="minor">
+            <a:schemeClr val="lt1"/>
+          </a:fontRef>
+        </p:style>
+        <p:txBody>
+          <a:bodyPr rtlCol="0" anchor="ctr"/>
+          <a:lstStyle/>
+          <a:p>
+            <a:pPr algn="ctr"/>
+          </a:p>
+        </p:txBody>
+      </p:sp>
+      <p:sp>
+        <p:nvSpPr>
+          <p:cNvPr id="12" name="TextBox 11"/>
+          <p:cNvSpPr txBox="1"/>
+          <p:nvPr/>
+        </p:nvSpPr>
+        <p:spPr>
+          <a:xfrm>
+            <a:off x="6263640" y="1261872"/>
+            <a:ext cx="5013655" cy="274320"/>
+          </a:xfrm>
+          <a:prstGeom prst="rect">
+            <a:avLst/>
+          </a:prstGeom>
+          <a:noFill/>
+        </p:spPr>
+        <p:txBody>
+          <a:bodyPr wrap="none" lIns="0" tIns="0">
+            <a:spAutoFit/>
+          </a:bodyPr>
+          <a:lstStyle/>
+          <a:p>
+            <a:pPr>
+              <a:defRPr sz="1100" b="1">
+                <a:solidFill>
+                  <a:srgbClr val="2563EB"/>
+                </a:solidFill>
+                <a:latin typeface="Segoe UI"/>
+              </a:defRPr>
+            </a:pPr>
+            <a:r>
+              <a:t>🖼️ Bản Vẽ Layout OpenROAD (Die 1.87 mm² - 1362 x 1373 µm)</a:t>
+            </a:r>
+          </a:p>
+        </p:txBody>
+      </p:sp>
+      <p:pic>
+        <p:nvPicPr>
+          <p:cNvPr id="13" name="Picture 12" descr="OpenROAD.png"/>
+          <p:cNvPicPr>
+            <a:picLocks noChangeAspect="1"/>
+          </p:cNvPicPr>
+          <p:nvPr/>
+        </p:nvPicPr>
+        <p:blipFill>
+          <a:blip r:embed="rId2"/>
+          <a:stretch>
+            <a:fillRect/>
+          </a:stretch>
+        </p:blipFill>
+        <p:spPr>
+          <a:xfrm>
+            <a:off x="6830568" y="1572768"/>
+            <a:ext cx="3886200" cy="2816352"/>
+          </a:xfrm>
+          <a:prstGeom prst="rect">
+            <a:avLst/>
+          </a:prstGeom>
+        </p:spPr>
+      </p:pic>
+      <p:sp>
+        <p:nvSpPr>
+          <p:cNvPr id="14" name="Rounded Rectangle 13"/>
+          <p:cNvSpPr/>
+          <p:nvPr/>
+        </p:nvSpPr>
+        <p:spPr>
+          <a:xfrm>
+            <a:off x="731520" y="4617720"/>
+            <a:ext cx="10728655" cy="1691640"/>
+          </a:xfrm>
+          <a:prstGeom prst="roundRect">
+            <a:avLst>
+              <a:gd name="adj" fmla="val 2000"/>
+            </a:avLst>
+          </a:prstGeom>
+          <a:solidFill>
+            <a:srgbClr val="FFFFFF"/>
+          </a:solidFill>
+          <a:ln w="25400">
+            <a:solidFill>
+              <a:srgbClr val="10B981"/>
+            </a:solidFill>
+          </a:ln>
+        </p:spPr>
+        <p:style>
+          <a:lnRef idx="1">
+            <a:schemeClr val="accent1"/>
+          </a:lnRef>
+          <a:fillRef idx="3">
+            <a:schemeClr val="accent1"/>
+          </a:fillRef>
+          <a:effectRef idx="2">
+            <a:schemeClr val="accent1"/>
+          </a:effectRef>
+          <a:fontRef idx="minor">
+            <a:schemeClr val="lt1"/>
+          </a:fontRef>
+        </p:style>
+        <p:txBody>
+          <a:bodyPr rtlCol="0" anchor="ctr"/>
+          <a:lstStyle/>
+          <a:p>
+            <a:pPr algn="ctr"/>
+          </a:p>
+        </p:txBody>
+      </p:sp>
+      <p:pic>
+        <p:nvPicPr>
+          <p:cNvPr id="15" name="Picture 14" descr="AntennaLvsDrc.png"/>
+          <p:cNvPicPr>
+            <a:picLocks noChangeAspect="1"/>
+          </p:cNvPicPr>
+          <p:nvPr/>
+        </p:nvPicPr>
+        <p:blipFill>
+          <a:blip r:embed="rId3"/>
+          <a:stretch>
+            <a:fillRect/>
+          </a:stretch>
+        </p:blipFill>
+        <p:spPr>
+          <a:xfrm>
+            <a:off x="868680" y="4727448"/>
+            <a:ext cx="6309360" cy="1463040"/>
+          </a:xfrm>
+          <a:prstGeom prst="rect">
+            <a:avLst/>
+          </a:prstGeom>
+        </p:spPr>
+      </p:pic>
+      <p:sp>
+        <p:nvSpPr>
+          <p:cNvPr id="16" name="TextBox 15"/>
+          <p:cNvSpPr txBox="1"/>
+          <p:nvPr/>
+        </p:nvSpPr>
+        <p:spPr>
+          <a:xfrm>
+            <a:off x="7360920" y="4709160"/>
+            <a:ext cx="3977639" cy="1508760"/>
+          </a:xfrm>
+          <a:prstGeom prst="rect">
+            <a:avLst/>
+          </a:prstGeom>
+          <a:noFill/>
+        </p:spPr>
+        <p:txBody>
+          <a:bodyPr wrap="square" lIns="0" tIns="0" rIns="0" bIns="0">
+            <a:spAutoFit/>
+          </a:bodyPr>
+          <a:lstStyle/>
+          <a:p>
+            <a:pPr>
+              <a:spcAft>
+                <a:spcPts val="400"/>
+              </a:spcAft>
+              <a:defRPr sz="1200" b="1">
+                <a:solidFill>
+                  <a:srgbClr val="10B981"/>
+                </a:solidFill>
+                <a:latin typeface="Segoe UI"/>
+              </a:defRPr>
+            </a:pPr>
+            <a:r>
+              <a:t>✅ KÝ DUYỆT TAPE-OUT READY (100% PASS)</a:t>
+            </a:r>
+          </a:p>
+          <a:p>
+            <a:pPr>
+              <a:lnSpc>
+                <a:spcPct val="110000"/>
+              </a:lnSpc>
+              <a:spcAft>
+                <a:spcPts val="150"/>
+              </a:spcAft>
+              <a:defRPr sz="980">
+                <a:solidFill>
+                  <a:srgbClr val="0F172A"/>
+                </a:solidFill>
+                <a:latin typeface="Segoe UI"/>
+              </a:defRPr>
+            </a:pPr>
+            <a:r>
+              <a:t>• Antenna Sign-off: 0 vi phạm (3,471 diodes xả tĩnh điện bảo vệ oxit cổng)</a:t>
+            </a:r>
+          </a:p>
+          <a:p>
+            <a:pPr>
+              <a:lnSpc>
+                <a:spcPct val="110000"/>
+              </a:lnSpc>
+              <a:spcAft>
+                <a:spcPts val="150"/>
+              </a:spcAft>
+              <a:defRPr sz="980">
+                <a:solidFill>
+                  <a:srgbClr val="0F172A"/>
+                </a:solidFill>
+                <a:latin typeface="Segoe UI"/>
+              </a:defRPr>
+            </a:pPr>
+            <a:r>
+              <a:t>• LVS Sign-off (Netgen): 0 lỗi (Netlists match uniquely 100%, 0 unmatched)</a:t>
+            </a:r>
+          </a:p>
+          <a:p>
+            <a:pPr>
+              <a:lnSpc>
+                <a:spcPct val="110000"/>
+              </a:lnSpc>
+              <a:spcAft>
+                <a:spcPts val="150"/>
+              </a:spcAft>
+              <a:defRPr sz="980">
+                <a:solidFill>
+                  <a:srgbClr val="0F172A"/>
+                </a:solidFill>
+                <a:latin typeface="Segoe UI"/>
+              </a:defRPr>
+            </a:pPr>
+            <a:r>
+              <a:t>• DRC Sign-off (Magic/KLayout): 0 lỗi (Zero DRC violations trên toàn bộ 5 lớp kim loại)</a:t>
+            </a:r>
+          </a:p>
+          <a:p>
+            <a:pPr>
+              <a:lnSpc>
+                <a:spcPct val="110000"/>
+              </a:lnSpc>
+              <a:spcAft>
+                <a:spcPts val="150"/>
+              </a:spcAft>
+              <a:defRPr sz="980">
+                <a:solidFill>
+                  <a:srgbClr val="0F172A"/>
+                </a:solidFill>
+                <a:latin typeface="Segoe UI"/>
+              </a:defRPr>
+            </a:pPr>
+            <a:r>
+              <a:t>• PDN &amp; Timing: Worst IR Drop: 1.39 mV (&lt; 0.08% VDD) | WNS = 0.00 ns</a:t>
+            </a:r>
+          </a:p>
+        </p:txBody>
+      </p:sp>
+    </p:spTree>
+  </p:cSld>
+  <p:clrMapOvr>
+    <a:masterClrMapping/>
+  </p:clrMapOvr>
+</p:sld>
+</file>
+
+<file path=ppt/slides/slide11.xml><?xml version="1.0" encoding="utf-8"?>
+<p:sld xmlns:a="http://schemas.openxmlformats.org/drawingml/2006/main" xmlns:p="http://schemas.openxmlformats.org/presentationml/2006/main" xmlns:r="http://schemas.openxmlformats.org/officeDocument/2006/relationships">
+  <p:cSld>
+    <p:spTree>
+      <p:nvGrpSpPr>
+        <p:cNvPr id="1" name=""/>
+        <p:cNvGrpSpPr/>
+        <p:nvPr/>
+      </p:nvGrpSpPr>
+      <p:grpSpPr/>
+      <p:sp>
+        <p:nvSpPr>
+          <p:cNvPr id="2" name="Rectangle 1"/>
+          <p:cNvSpPr/>
+          <p:nvPr/>
+        </p:nvSpPr>
+        <p:spPr>
+          <a:xfrm>
+            <a:off x="0" y="0"/>
+            <a:ext cx="12191695" cy="6858000"/>
+          </a:xfrm>
+          <a:prstGeom prst="rect">
+            <a:avLst/>
+          </a:prstGeom>
+          <a:solidFill>
+            <a:srgbClr val="F8FAFC"/>
+          </a:solidFill>
+          <a:ln>
+            <a:noFill/>
+          </a:ln>
+        </p:spPr>
+        <p:style>
+          <a:lnRef idx="1">
+            <a:schemeClr val="accent1"/>
+          </a:lnRef>
+          <a:fillRef idx="3">
+            <a:schemeClr val="accent1"/>
+          </a:fillRef>
+          <a:effectRef idx="2">
+            <a:schemeClr val="accent1"/>
+          </a:effectRef>
+          <a:fontRef idx="minor">
+            <a:schemeClr val="lt1"/>
+          </a:fontRef>
+        </p:style>
+        <p:txBody>
+          <a:bodyPr rtlCol="0" anchor="ctr"/>
+          <a:lstStyle/>
+          <a:p>
+            <a:pPr algn="ctr"/>
+          </a:p>
+        </p:txBody>
+      </p:sp>
+      <p:sp>
+        <p:nvSpPr>
+          <p:cNvPr id="3" name="Rectangle 2"/>
+          <p:cNvSpPr/>
+          <p:nvPr/>
+        </p:nvSpPr>
+        <p:spPr>
+          <a:xfrm>
+            <a:off x="0" y="0"/>
+            <a:ext cx="12191695" cy="91440"/>
+          </a:xfrm>
+          <a:prstGeom prst="rect">
+            <a:avLst/>
+          </a:prstGeom>
+          <a:solidFill>
+            <a:srgbClr val="2563EB"/>
+          </a:solidFill>
+          <a:ln>
+            <a:noFill/>
+          </a:ln>
+        </p:spPr>
+        <p:style>
+          <a:lnRef idx="1">
+            <a:schemeClr val="accent1"/>
+          </a:lnRef>
+          <a:fillRef idx="3">
+            <a:schemeClr val="accent1"/>
+          </a:fillRef>
+          <a:effectRef idx="2">
+            <a:schemeClr val="accent1"/>
+          </a:effectRef>
+          <a:fontRef idx="minor">
+            <a:schemeClr val="lt1"/>
+          </a:fontRef>
+        </p:style>
+        <p:txBody>
+          <a:bodyPr rtlCol="0" anchor="ctr"/>
+          <a:lstStyle/>
+          <a:p>
+            <a:pPr algn="ctr"/>
+          </a:p>
+        </p:txBody>
+      </p:sp>
+      <p:sp>
+        <p:nvSpPr>
+          <p:cNvPr id="4" name="TextBox 3"/>
+          <p:cNvSpPr txBox="1"/>
+          <p:nvPr/>
+        </p:nvSpPr>
+        <p:spPr>
+          <a:xfrm>
+            <a:off x="731520" y="201168"/>
+            <a:ext cx="10728655" cy="868680"/>
+          </a:xfrm>
+          <a:prstGeom prst="rect">
+            <a:avLst/>
+          </a:prstGeom>
+          <a:noFill/>
+        </p:spPr>
+        <p:txBody>
+          <a:bodyPr wrap="square" lIns="0" tIns="0" rIns="0" bIns="0">
+            <a:spAutoFit/>
+          </a:bodyPr>
+          <a:lstStyle/>
+          <a:p>
+            <a:pPr>
+              <a:spcAft>
+                <a:spcPts val="200"/>
+              </a:spcAft>
+              <a:defRPr sz="1050" b="1">
+                <a:solidFill>
+                  <a:srgbClr val="2563EB"/>
+                </a:solidFill>
+                <a:latin typeface="Segoe UI"/>
+              </a:defRPr>
+            </a:pPr>
+            <a:r>
+              <a:t>PHẦN 6: THIẾT KẾ VẬT LÝ ASIC</a:t>
+            </a:r>
+          </a:p>
+          <a:p>
+            <a:pPr>
+              <a:defRPr sz="1700" b="1">
+                <a:solidFill>
+                  <a:srgbClr val="0F172A"/>
+                </a:solidFill>
+                <a:latin typeface="Segoe UI"/>
+              </a:defRPr>
+            </a:pPr>
+            <a:r>
+              <a:t>Tổng Hợp Kết Quả Thiết Kế Vật Lý &amp; Chỉ Số PPA (OpenLane 2 / SkyWater 130nm)</a:t>
+            </a:r>
+          </a:p>
+        </p:txBody>
+      </p:sp>
+      <p:sp>
+        <p:nvSpPr>
+          <p:cNvPr id="5" name="Rectangle 4"/>
+          <p:cNvSpPr/>
+          <p:nvPr/>
+        </p:nvSpPr>
+        <p:spPr>
+          <a:xfrm>
+            <a:off x="731520" y="6446520"/>
+            <a:ext cx="10728655" cy="18288"/>
+          </a:xfrm>
+          <a:prstGeom prst="rect">
+            <a:avLst/>
+          </a:prstGeom>
+          <a:solidFill>
+            <a:srgbClr val="E2E8F0"/>
+          </a:solidFill>
+          <a:ln>
+            <a:noFill/>
+          </a:ln>
+        </p:spPr>
+        <p:style>
+          <a:lnRef idx="1">
+            <a:schemeClr val="accent1"/>
+          </a:lnRef>
+          <a:fillRef idx="3">
+            <a:schemeClr val="accent1"/>
+          </a:fillRef>
+          <a:effectRef idx="2">
+            <a:schemeClr val="accent1"/>
+          </a:effectRef>
+          <a:fontRef idx="minor">
+            <a:schemeClr val="lt1"/>
+          </a:fontRef>
+        </p:style>
+        <p:txBody>
+          <a:bodyPr rtlCol="0" anchor="ctr"/>
+          <a:lstStyle/>
+          <a:p>
+            <a:pPr algn="ctr"/>
+          </a:p>
+        </p:txBody>
+      </p:sp>
+      <p:sp>
+        <p:nvSpPr>
+          <p:cNvPr id="6" name="TextBox 5"/>
+          <p:cNvSpPr txBox="1"/>
+          <p:nvPr/>
+        </p:nvSpPr>
+        <p:spPr>
+          <a:xfrm>
+            <a:off x="731520" y="6492240"/>
+            <a:ext cx="7315200" cy="274320"/>
+          </a:xfrm>
+          <a:prstGeom prst="rect">
+            <a:avLst/>
+          </a:prstGeom>
+          <a:noFill/>
+        </p:spPr>
+        <p:txBody>
+          <a:bodyPr wrap="none" lIns="0" tIns="0" rIns="0" bIns="0">
+            <a:spAutoFit/>
+          </a:bodyPr>
+          <a:lstStyle/>
+          <a:p>
+            <a:pPr>
+              <a:defRPr sz="950">
+                <a:solidFill>
+                  <a:srgbClr val="475569"/>
+                </a:solidFill>
+                <a:latin typeface="Segoe UI"/>
+              </a:defRPr>
+            </a:pPr>
+            <a:r>
+              <a:t>Đồ Án: SoC PicoRV32 RFID RDM6300 &amp; SPI Flash | FPT Jetking Chip Design - SEM3 | HV: Thái Tuấn Hiệp</a:t>
+            </a:r>
+          </a:p>
+        </p:txBody>
+      </p:sp>
+      <p:sp>
+        <p:nvSpPr>
+          <p:cNvPr id="7" name="TextBox 6"/>
+          <p:cNvSpPr txBox="1"/>
+          <p:nvPr/>
+        </p:nvSpPr>
+        <p:spPr>
+          <a:xfrm>
+            <a:off x="10058400" y="6492240"/>
+            <a:ext cx="1401775" cy="274320"/>
+          </a:xfrm>
+          <a:prstGeom prst="rect">
+            <a:avLst/>
+          </a:prstGeom>
+          <a:noFill/>
+        </p:spPr>
+        <p:txBody>
+          <a:bodyPr wrap="none" lIns="0" tIns="0" rIns="0" bIns="0">
+            <a:spAutoFit/>
+          </a:bodyPr>
+          <a:lstStyle/>
+          <a:p>
+            <a:pPr algn="r">
+              <a:defRPr sz="950" b="1">
+                <a:solidFill>
+                  <a:srgbClr val="2563EB"/>
+                </a:solidFill>
+                <a:latin typeface="Segoe UI"/>
+              </a:defRPr>
+            </a:pPr>
+            <a:r>
+              <a:t>11 / 13</a:t>
             </a:r>
           </a:p>
         </p:txBody>
@@ -4282,7 +5356,7 @@
 </p:sld>
 </file>
 
-<file path=ppt/slides/slide11.xml><?xml version="1.0" encoding="utf-8"?>
+<file path=ppt/slides/slide12.xml><?xml version="1.0" encoding="utf-8"?>
 <p:sld xmlns:a="http://schemas.openxmlformats.org/drawingml/2006/main" xmlns:p="http://schemas.openxmlformats.org/presentationml/2006/main" xmlns:r="http://schemas.openxmlformats.org/officeDocument/2006/relationships">
   <p:cSld>
     <p:spTree>
@@ -4540,7 +5614,7 @@
               </a:defRPr>
             </a:pPr>
             <a:r>
-              <a:t>11 / 12</a:t>
+              <a:t>12 / 13</a:t>
             </a:r>
           </a:p>
         </p:txBody>
@@ -4577,7 +5651,7 @@
                     <a:lstStyle/>
                     <a:p>
                       <a:pPr algn="ctr">
-                        <a:defRPr sz="1100" b="1">
+                        <a:defRPr sz="1150" b="1">
                           <a:solidFill>
                             <a:srgbClr val="FFFFFF"/>
                           </a:solidFill>
@@ -4601,7 +5675,7 @@
                     <a:lstStyle/>
                     <a:p>
                       <a:pPr algn="ctr">
-                        <a:defRPr sz="1100" b="1">
+                        <a:defRPr sz="1150" b="1">
                           <a:solidFill>
                             <a:srgbClr val="FFFFFF"/>
                           </a:solidFill>
@@ -4625,7 +5699,7 @@
                     <a:lstStyle/>
                     <a:p>
                       <a:pPr algn="ctr">
-                        <a:defRPr sz="1100" b="1">
+                        <a:defRPr sz="1150" b="1">
                           <a:solidFill>
                             <a:srgbClr val="FFFFFF"/>
                           </a:solidFill>
@@ -4649,7 +5723,7 @@
                     <a:lstStyle/>
                     <a:p>
                       <a:pPr algn="ctr">
-                        <a:defRPr sz="1100" b="1">
+                        <a:defRPr sz="1150" b="1">
                           <a:solidFill>
                             <a:srgbClr val="FFFFFF"/>
                           </a:solidFill>
@@ -4673,7 +5747,7 @@
                     <a:lstStyle/>
                     <a:p>
                       <a:pPr algn="ctr">
-                        <a:defRPr sz="1100" b="1">
+                        <a:defRPr sz="1150" b="1">
                           <a:solidFill>
                             <a:srgbClr val="FFFFFF"/>
                           </a:solidFill>
@@ -4699,7 +5773,7 @@
                     <a:lstStyle/>
                     <a:p>
                       <a:pPr algn="l">
-                        <a:defRPr sz="1000" b="1">
+                        <a:defRPr sz="1050" b="1">
                           <a:solidFill>
                             <a:srgbClr val="0F172A"/>
                           </a:solidFill>
@@ -4723,7 +5797,7 @@
                     <a:lstStyle/>
                     <a:p>
                       <a:pPr algn="ctr">
-                        <a:defRPr sz="1000" b="1">
+                        <a:defRPr sz="1050" b="1">
                           <a:solidFill>
                             <a:srgbClr val="2563EB"/>
                           </a:solidFill>
@@ -4747,7 +5821,7 @@
                     <a:lstStyle/>
                     <a:p>
                       <a:pPr algn="ctr">
-                        <a:defRPr sz="1000" b="1">
+                        <a:defRPr sz="1050" b="1">
                           <a:solidFill>
                             <a:srgbClr val="2563EB"/>
                           </a:solidFill>
@@ -4771,7 +5845,7 @@
                     <a:lstStyle/>
                     <a:p>
                       <a:pPr algn="ctr">
-                        <a:defRPr sz="1000" b="1">
+                        <a:defRPr sz="1050" b="1">
                           <a:solidFill>
                             <a:srgbClr val="10B981"/>
                           </a:solidFill>
@@ -4795,7 +5869,7 @@
                     <a:lstStyle/>
                     <a:p>
                       <a:pPr algn="l">
-                        <a:defRPr sz="1000" b="1">
+                        <a:defRPr sz="1050" b="1">
                           <a:solidFill>
                             <a:srgbClr val="10B981"/>
                           </a:solidFill>
@@ -4821,7 +5895,7 @@
                     <a:lstStyle/>
                     <a:p>
                       <a:pPr algn="l">
-                        <a:defRPr sz="1000" b="1">
+                        <a:defRPr sz="1050" b="1">
                           <a:solidFill>
                             <a:srgbClr val="0F172A"/>
                           </a:solidFill>
@@ -4845,7 +5919,7 @@
                     <a:lstStyle/>
                     <a:p>
                       <a:pPr algn="ctr">
-                        <a:defRPr sz="1000" b="1">
+                        <a:defRPr sz="1050" b="1">
                           <a:solidFill>
                             <a:srgbClr val="2563EB"/>
                           </a:solidFill>
@@ -4869,7 +5943,7 @@
                     <a:lstStyle/>
                     <a:p>
                       <a:pPr algn="ctr">
-                        <a:defRPr sz="1000" b="1">
+                        <a:defRPr sz="1050" b="1">
                           <a:solidFill>
                             <a:srgbClr val="2563EB"/>
                           </a:solidFill>
@@ -4893,7 +5967,7 @@
                     <a:lstStyle/>
                     <a:p>
                       <a:pPr algn="ctr">
-                        <a:defRPr sz="1000" b="1">
+                        <a:defRPr sz="1050" b="1">
                           <a:solidFill>
                             <a:srgbClr val="10B981"/>
                           </a:solidFill>
@@ -4917,7 +5991,7 @@
                     <a:lstStyle/>
                     <a:p>
                       <a:pPr algn="l">
-                        <a:defRPr sz="1000" b="1">
+                        <a:defRPr sz="1050" b="1">
                           <a:solidFill>
                             <a:srgbClr val="10B981"/>
                           </a:solidFill>
@@ -4943,7 +6017,7 @@
                     <a:lstStyle/>
                     <a:p>
                       <a:pPr algn="l">
-                        <a:defRPr sz="1000" b="1">
+                        <a:defRPr sz="1050" b="1">
                           <a:solidFill>
                             <a:srgbClr val="0F172A"/>
                           </a:solidFill>
@@ -4967,7 +6041,7 @@
                     <a:lstStyle/>
                     <a:p>
                       <a:pPr algn="ctr">
-                        <a:defRPr sz="1000" b="1">
+                        <a:defRPr sz="1050" b="1">
                           <a:solidFill>
                             <a:srgbClr val="2563EB"/>
                           </a:solidFill>
@@ -4991,7 +6065,7 @@
                     <a:lstStyle/>
                     <a:p>
                       <a:pPr algn="ctr">
-                        <a:defRPr sz="1000" b="1">
+                        <a:defRPr sz="1050" b="1">
                           <a:solidFill>
                             <a:srgbClr val="2563EB"/>
                           </a:solidFill>
@@ -5015,7 +6089,7 @@
                     <a:lstStyle/>
                     <a:p>
                       <a:pPr algn="ctr">
-                        <a:defRPr sz="1000" b="1">
+                        <a:defRPr sz="1050" b="1">
                           <a:solidFill>
                             <a:srgbClr val="10B981"/>
                           </a:solidFill>
@@ -5039,7 +6113,7 @@
                     <a:lstStyle/>
                     <a:p>
                       <a:pPr algn="l">
-                        <a:defRPr sz="1000" b="1">
+                        <a:defRPr sz="1050" b="1">
                           <a:solidFill>
                             <a:srgbClr val="10B981"/>
                           </a:solidFill>
@@ -5065,7 +6139,7 @@
                     <a:lstStyle/>
                     <a:p>
                       <a:pPr algn="l">
-                        <a:defRPr sz="1000" b="1">
+                        <a:defRPr sz="1050" b="1">
                           <a:solidFill>
                             <a:srgbClr val="0F172A"/>
                           </a:solidFill>
@@ -5089,7 +6163,7 @@
                     <a:lstStyle/>
                     <a:p>
                       <a:pPr algn="ctr">
-                        <a:defRPr sz="1000" b="1">
+                        <a:defRPr sz="1050" b="1">
                           <a:solidFill>
                             <a:srgbClr val="2563EB"/>
                           </a:solidFill>
@@ -5113,7 +6187,7 @@
                     <a:lstStyle/>
                     <a:p>
                       <a:pPr algn="ctr">
-                        <a:defRPr sz="1000" b="1">
+                        <a:defRPr sz="1050" b="1">
                           <a:solidFill>
                             <a:srgbClr val="2563EB"/>
                           </a:solidFill>
@@ -5137,7 +6211,7 @@
                     <a:lstStyle/>
                     <a:p>
                       <a:pPr algn="ctr">
-                        <a:defRPr sz="1000" b="1">
+                        <a:defRPr sz="1050" b="1">
                           <a:solidFill>
                             <a:srgbClr val="10B981"/>
                           </a:solidFill>
@@ -5161,7 +6235,7 @@
                     <a:lstStyle/>
                     <a:p>
                       <a:pPr algn="l">
-                        <a:defRPr sz="1000" b="1">
+                        <a:defRPr sz="1050" b="1">
                           <a:solidFill>
                             <a:srgbClr val="10B981"/>
                           </a:solidFill>
@@ -5187,7 +6261,7 @@
                     <a:lstStyle/>
                     <a:p>
                       <a:pPr algn="l">
-                        <a:defRPr sz="1000" b="1">
+                        <a:defRPr sz="1050" b="1">
                           <a:solidFill>
                             <a:srgbClr val="0F172A"/>
                           </a:solidFill>
@@ -5211,7 +6285,7 @@
                     <a:lstStyle/>
                     <a:p>
                       <a:pPr algn="ctr">
-                        <a:defRPr sz="1000" b="1">
+                        <a:defRPr sz="1050" b="1">
                           <a:solidFill>
                             <a:srgbClr val="2563EB"/>
                           </a:solidFill>
@@ -5235,7 +6309,7 @@
                     <a:lstStyle/>
                     <a:p>
                       <a:pPr algn="ctr">
-                        <a:defRPr sz="1000" b="1">
+                        <a:defRPr sz="1050" b="1">
                           <a:solidFill>
                             <a:srgbClr val="2563EB"/>
                           </a:solidFill>
@@ -5259,7 +6333,7 @@
                     <a:lstStyle/>
                     <a:p>
                       <a:pPr algn="ctr">
-                        <a:defRPr sz="1000" b="1">
+                        <a:defRPr sz="1050" b="1">
                           <a:solidFill>
                             <a:srgbClr val="10B981"/>
                           </a:solidFill>
@@ -5283,7 +6357,7 @@
                     <a:lstStyle/>
                     <a:p>
                       <a:pPr algn="l">
-                        <a:defRPr sz="1000" b="1">
+                        <a:defRPr sz="1050" b="1">
                           <a:solidFill>
                             <a:srgbClr val="10B981"/>
                           </a:solidFill>
@@ -5379,7 +6453,7 @@
               <a:spcAft>
                 <a:spcPts val="300"/>
               </a:spcAft>
-              <a:defRPr sz="1100" b="1">
+              <a:defRPr sz="1200" b="1">
                 <a:solidFill>
                   <a:srgbClr val="2563EB"/>
                 </a:solidFill>
@@ -5398,7 +6472,7 @@
               <a:spcAft>
                 <a:spcPts val="150"/>
               </a:spcAft>
-              <a:defRPr sz="850">
+              <a:defRPr sz="1050">
                 <a:solidFill>
                   <a:srgbClr val="0F172A"/>
                 </a:solidFill>
@@ -5417,7 +6491,7 @@
               <a:spcAft>
                 <a:spcPts val="150"/>
               </a:spcAft>
-              <a:defRPr sz="850">
+              <a:defRPr sz="1050">
                 <a:solidFill>
                   <a:srgbClr val="0F172A"/>
                 </a:solidFill>
@@ -5436,7 +6510,7 @@
               <a:spcAft>
                 <a:spcPts val="150"/>
               </a:spcAft>
-              <a:defRPr sz="850">
+              <a:defRPr sz="1050">
                 <a:solidFill>
                   <a:srgbClr val="0F172A"/>
                 </a:solidFill>
@@ -5455,7 +6529,7 @@
               <a:spcAft>
                 <a:spcPts val="150"/>
               </a:spcAft>
-              <a:defRPr sz="850">
+              <a:defRPr sz="1050">
                 <a:solidFill>
                   <a:srgbClr val="0F172A"/>
                 </a:solidFill>
@@ -5541,7 +6615,7 @@
               <a:spcAft>
                 <a:spcPts val="300"/>
               </a:spcAft>
-              <a:defRPr sz="1100" b="1">
+              <a:defRPr sz="1200" b="1">
                 <a:solidFill>
                   <a:srgbClr val="10B981"/>
                 </a:solidFill>
@@ -5560,7 +6634,7 @@
               <a:spcAft>
                 <a:spcPts val="150"/>
               </a:spcAft>
-              <a:defRPr sz="850">
+              <a:defRPr sz="1050">
                 <a:solidFill>
                   <a:srgbClr val="0F172A"/>
                 </a:solidFill>
@@ -5579,7 +6653,7 @@
               <a:spcAft>
                 <a:spcPts val="150"/>
               </a:spcAft>
-              <a:defRPr sz="850">
+              <a:defRPr sz="1050">
                 <a:solidFill>
                   <a:srgbClr val="0F172A"/>
                 </a:solidFill>
@@ -5598,7 +6672,7 @@
               <a:spcAft>
                 <a:spcPts val="150"/>
               </a:spcAft>
-              <a:defRPr sz="850">
+              <a:defRPr sz="1050">
                 <a:solidFill>
                   <a:srgbClr val="0F172A"/>
                 </a:solidFill>
@@ -5617,7 +6691,7 @@
               <a:spcAft>
                 <a:spcPts val="150"/>
               </a:spcAft>
-              <a:defRPr sz="850">
+              <a:defRPr sz="1050">
                 <a:solidFill>
                   <a:srgbClr val="0F172A"/>
                 </a:solidFill>
@@ -5638,7 +6712,7 @@
 </p:sld>
 </file>
 
-<file path=ppt/slides/slide12.xml><?xml version="1.0" encoding="utf-8"?>
+<file path=ppt/slides/slide13.xml><?xml version="1.0" encoding="utf-8"?>
 <p:sld xmlns:a="http://schemas.openxmlformats.org/drawingml/2006/main" xmlns:p="http://schemas.openxmlformats.org/presentationml/2006/main" xmlns:r="http://schemas.openxmlformats.org/officeDocument/2006/relationships">
   <p:cSld>
     <p:spTree>
@@ -6169,7 +7243,7 @@
               </a:defRPr>
             </a:pPr>
             <a:r>
-              <a:t>02 / 12</a:t>
+              <a:t>02 / 13</a:t>
             </a:r>
           </a:p>
         </p:txBody>
@@ -6307,7 +7381,7 @@
           </a:p>
           <a:p>
             <a:pPr algn="ctr">
-              <a:defRPr sz="1000" i="1">
+              <a:defRPr sz="1100" i="1">
                 <a:solidFill>
                   <a:srgbClr val="475569"/>
                 </a:solidFill>
@@ -6347,11 +7421,11 @@
                 <a:spcPct val="125000"/>
               </a:lnSpc>
               <a:spcAft>
-                <a:spcPts val="1600"/>
+                <a:spcPts val="1000"/>
               </a:spcAft>
             </a:pPr>
             <a:r>
-              <a:rPr sz="1150" b="1">
+              <a:rPr sz="1200" b="1">
                 <a:solidFill>
                   <a:srgbClr val="0F172A"/>
                 </a:solidFill>
@@ -6360,7 +7434,7 @@
               <a:t>• Triệt tiêu độ trễ mạng: </a:t>
             </a:r>
             <a:r>
-              <a:rPr sz="1050">
+              <a:rPr sz="1150">
                 <a:solidFill>
                   <a:srgbClr val="475569"/>
                 </a:solidFill>
@@ -6375,11 +7449,11 @@
                 <a:spcPct val="125000"/>
               </a:lnSpc>
               <a:spcAft>
-                <a:spcPts val="1600"/>
+                <a:spcPts val="1000"/>
               </a:spcAft>
             </a:pPr>
             <a:r>
-              <a:rPr sz="1150" b="1">
+              <a:rPr sz="1200" b="1">
                 <a:solidFill>
                   <a:srgbClr val="0F172A"/>
                 </a:solidFill>
@@ -6388,7 +7462,7 @@
               <a:t>• Phản hồi tức thì (&lt; 10 µs): </a:t>
             </a:r>
             <a:r>
-              <a:rPr sz="1050">
+              <a:rPr sz="1150">
                 <a:solidFill>
                   <a:srgbClr val="475569"/>
                 </a:solidFill>
@@ -6403,11 +7477,11 @@
                 <a:spcPct val="125000"/>
               </a:lnSpc>
               <a:spcAft>
-                <a:spcPts val="1600"/>
+                <a:spcPts val="1000"/>
               </a:spcAft>
             </a:pPr>
             <a:r>
-              <a:rPr sz="1150" b="1">
+              <a:rPr sz="1200" b="1">
                 <a:solidFill>
                   <a:srgbClr val="0F172A"/>
                 </a:solidFill>
@@ -6416,7 +7490,7 @@
               <a:t>• Bảo mật dữ liệu tuyệt đối: </a:t>
             </a:r>
             <a:r>
-              <a:rPr sz="1050">
+              <a:rPr sz="1150">
                 <a:solidFill>
                   <a:srgbClr val="475569"/>
                 </a:solidFill>
@@ -6431,11 +7505,11 @@
                 <a:spcPct val="125000"/>
               </a:lnSpc>
               <a:spcAft>
-                <a:spcPts val="1600"/>
+                <a:spcPts val="1000"/>
               </a:spcAft>
             </a:pPr>
             <a:r>
-              <a:rPr sz="1150" b="1">
+              <a:rPr sz="1200" b="1">
                 <a:solidFill>
                   <a:srgbClr val="0F172A"/>
                 </a:solidFill>
@@ -6444,7 +7518,7 @@
               <a:t>• Vận hành liên tục 24/7: </a:t>
             </a:r>
             <a:r>
-              <a:rPr sz="1050">
+              <a:rPr sz="1150">
                 <a:solidFill>
                   <a:srgbClr val="475569"/>
                 </a:solidFill>
@@ -6588,7 +7662,7 @@
           </a:p>
           <a:p>
             <a:pPr algn="ctr">
-              <a:defRPr sz="1000" i="1">
+              <a:defRPr sz="1100" i="1">
                 <a:solidFill>
                   <a:srgbClr val="475569"/>
                 </a:solidFill>
@@ -6628,11 +7702,11 @@
                 <a:spcPct val="125000"/>
               </a:lnSpc>
               <a:spcAft>
-                <a:spcPts val="1600"/>
+                <a:spcPts val="1000"/>
               </a:spcAft>
             </a:pPr>
             <a:r>
-              <a:rPr sz="1150" b="1">
+              <a:rPr sz="1200" b="1">
                 <a:solidFill>
                   <a:srgbClr val="0F172A"/>
                 </a:solidFill>
@@ -6641,7 +7715,7 @@
               <a:t>• Lưu trữ bất biến không cần pin: </a:t>
             </a:r>
             <a:r>
-              <a:rPr sz="1050">
+              <a:rPr sz="1150">
                 <a:solidFill>
                   <a:srgbClr val="475569"/>
                 </a:solidFill>
@@ -6656,11 +7730,11 @@
                 <a:spcPct val="125000"/>
               </a:lnSpc>
               <a:spcAft>
-                <a:spcPts val="1600"/>
+                <a:spcPts val="1000"/>
               </a:spcAft>
             </a:pPr>
             <a:r>
-              <a:rPr sz="1150" b="1">
+              <a:rPr sz="1200" b="1">
                 <a:solidFill>
                   <a:srgbClr val="0F172A"/>
                 </a:solidFill>
@@ -6669,7 +7743,7 @@
               <a:t>• Thực thi tại chỗ XIP (eXecute-In-Place): </a:t>
             </a:r>
             <a:r>
-              <a:rPr sz="1050">
+              <a:rPr sz="1150">
                 <a:solidFill>
                   <a:srgbClr val="475569"/>
                 </a:solidFill>
@@ -6684,11 +7758,11 @@
                 <a:spcPct val="125000"/>
               </a:lnSpc>
               <a:spcAft>
-                <a:spcPts val="1600"/>
+                <a:spcPts val="1000"/>
               </a:spcAft>
             </a:pPr>
             <a:r>
-              <a:rPr sz="1150" b="1">
+              <a:rPr sz="1200" b="1">
                 <a:solidFill>
                   <a:srgbClr val="0F172A"/>
                 </a:solidFill>
@@ -6697,7 +7771,7 @@
               <a:t>• Tiết kiệm chân pad ngoại vi: </a:t>
             </a:r>
             <a:r>
-              <a:rPr sz="1050">
+              <a:rPr sz="1150">
                 <a:solidFill>
                   <a:srgbClr val="475569"/>
                 </a:solidFill>
@@ -6712,11 +7786,11 @@
                 <a:spcPct val="125000"/>
               </a:lnSpc>
               <a:spcAft>
-                <a:spcPts val="1600"/>
+                <a:spcPts val="1000"/>
               </a:spcAft>
             </a:pPr>
             <a:r>
-              <a:rPr sz="1150" b="1">
+              <a:rPr sz="1200" b="1">
                 <a:solidFill>
                   <a:srgbClr val="0F172A"/>
                 </a:solidFill>
@@ -6725,7 +7799,7 @@
               <a:t>• Cập nhật In-RAM linh hoạt: </a:t>
             </a:r>
             <a:r>
-              <a:rPr sz="1050">
+              <a:rPr sz="1150">
                 <a:solidFill>
                   <a:srgbClr val="475569"/>
                 </a:solidFill>
@@ -6869,7 +7943,7 @@
           </a:p>
           <a:p>
             <a:pPr algn="ctr">
-              <a:defRPr sz="1000" i="1">
+              <a:defRPr sz="1100" i="1">
                 <a:solidFill>
                   <a:srgbClr val="475569"/>
                 </a:solidFill>
@@ -6909,11 +7983,11 @@
                 <a:spcPct val="125000"/>
               </a:lnSpc>
               <a:spcAft>
-                <a:spcPts val="1600"/>
+                <a:spcPts val="1000"/>
               </a:spcAft>
             </a:pPr>
             <a:r>
-              <a:rPr sz="1150" b="1">
+              <a:rPr sz="1200" b="1">
                 <a:solidFill>
                   <a:srgbClr val="0F172A"/>
                 </a:solidFill>
@@ -6922,7 +7996,7 @@
               <a:t>• Triệt tiêu Backdoor phần cứng: </a:t>
             </a:r>
             <a:r>
-              <a:rPr sz="1050">
+              <a:rPr sz="1150">
                 <a:solidFill>
                   <a:srgbClr val="475569"/>
                 </a:solidFill>
@@ -6937,11 +8011,11 @@
                 <a:spcPct val="125000"/>
               </a:lnSpc>
               <a:spcAft>
-                <a:spcPts val="1600"/>
+                <a:spcPts val="1000"/>
               </a:spcAft>
             </a:pPr>
             <a:r>
-              <a:rPr sz="1150" b="1">
+              <a:rPr sz="1200" b="1">
                 <a:solidFill>
                   <a:srgbClr val="0F172A"/>
                 </a:solidFill>
@@ -6950,7 +8024,7 @@
               <a:t>• Khối UART chuyên biệt cho RFID: </a:t>
             </a:r>
             <a:r>
-              <a:rPr sz="1050">
+              <a:rPr sz="1150">
                 <a:solidFill>
                   <a:srgbClr val="475569"/>
                 </a:solidFill>
@@ -6965,11 +8039,11 @@
                 <a:spcPct val="125000"/>
               </a:lnSpc>
               <a:spcAft>
-                <a:spcPts val="1600"/>
+                <a:spcPts val="1000"/>
               </a:spcAft>
             </a:pPr>
             <a:r>
-              <a:rPr sz="1150" b="1">
+              <a:rPr sz="1200" b="1">
                 <a:solidFill>
                   <a:srgbClr val="0F172A"/>
                 </a:solidFill>
@@ -6978,7 +8052,7 @@
               <a:t>• Ký duyệt Tape-out SkyWater 130nm: </a:t>
             </a:r>
             <a:r>
-              <a:rPr sz="1050">
+              <a:rPr sz="1150">
                 <a:solidFill>
                   <a:srgbClr val="475569"/>
                 </a:solidFill>
@@ -6993,11 +8067,11 @@
                 <a:spcPct val="125000"/>
               </a:lnSpc>
               <a:spcAft>
-                <a:spcPts val="1600"/>
+                <a:spcPts val="1000"/>
               </a:spcAft>
             </a:pPr>
             <a:r>
-              <a:rPr sz="1150" b="1">
+              <a:rPr sz="1200" b="1">
                 <a:solidFill>
                   <a:srgbClr val="0F172A"/>
                 </a:solidFill>
@@ -7006,7 +8080,7 @@
               <a:t>• Hiệu năng cao &amp; Tiết kiệm năng lượng: </a:t>
             </a:r>
             <a:r>
-              <a:rPr sz="1050">
+              <a:rPr sz="1150">
                 <a:solidFill>
                   <a:srgbClr val="475569"/>
                 </a:solidFill>
@@ -7283,7 +8357,7 @@
               </a:defRPr>
             </a:pPr>
             <a:r>
-              <a:t>03 / 12</a:t>
+              <a:t>03 / 13</a:t>
             </a:r>
           </a:p>
         </p:txBody>
@@ -7497,7 +8571,7 @@
               </a:defRPr>
             </a:pPr>
             <a:r>
-              <a:t>PHẦN 3: KIẾN TRÚC KHỐI NGOẠI VI UART</a:t>
+              <a:t>PHẦN 3: KIẾN TRÚC VI HỆ THỐNG SOC</a:t>
             </a:r>
           </a:p>
           <a:p>
@@ -7510,7 +8584,7 @@
               </a:defRPr>
             </a:pPr>
             <a:r>
-              <a:t>Sơ Đồ Khối Kiến Trúc Vi Mạch UART RTL (Draw.io Đen Trắng &amp; Đặc Tả Thiết Kế)</a:t>
+              <a:t>Bảng Tra Cứu Địa Chỉ (Memory Map) &amp; Khai Báo Biến Trong C / RTL</a:t>
             </a:r>
           </a:p>
         </p:txBody>
@@ -7625,7 +8699,7 @@
               </a:defRPr>
             </a:pPr>
             <a:r>
-              <a:t>04 / 12</a:t>
+              <a:t>04 / 13</a:t>
             </a:r>
           </a:p>
         </p:txBody>
@@ -7639,7 +8713,7 @@
         <p:spPr>
           <a:xfrm>
             <a:off x="731520" y="1188720"/>
-            <a:ext cx="5257800" cy="5029200"/>
+            <a:ext cx="10728655" cy="5120640"/>
           </a:xfrm>
           <a:prstGeom prst="roundRect">
             <a:avLst>
@@ -7677,363 +8751,745 @@
           </a:p>
         </p:txBody>
       </p:sp>
-      <p:pic>
-        <p:nvPicPr>
-          <p:cNvPr id="9" name="Picture 8" descr="uart_architecture_bw_diagram.png"/>
-          <p:cNvPicPr>
-            <a:picLocks noChangeAspect="1"/>
-          </p:cNvPicPr>
+      <p:graphicFrame>
+        <p:nvGraphicFramePr>
+          <p:cNvPr id="9" name="Table 8"/>
+          <p:cNvGraphicFramePr>
+            <a:graphicFrameLocks noGrp="1"/>
+          </p:cNvGraphicFramePr>
           <p:nvPr/>
-        </p:nvPicPr>
-        <p:blipFill>
-          <a:blip r:embed="rId2"/>
-          <a:stretch>
-            <a:fillRect/>
-          </a:stretch>
-        </p:blipFill>
-        <p:spPr>
-          <a:xfrm>
-            <a:off x="868680" y="1325880"/>
-            <a:ext cx="4983480" cy="4754880"/>
-          </a:xfrm>
-          <a:prstGeom prst="rect">
-            <a:avLst/>
-          </a:prstGeom>
-        </p:spPr>
-      </p:pic>
-      <p:sp>
-        <p:nvSpPr>
-          <p:cNvPr id="10" name="Rounded Rectangle 9"/>
-          <p:cNvSpPr/>
-          <p:nvPr/>
-        </p:nvSpPr>
-        <p:spPr>
-          <a:xfrm>
-            <a:off x="6172200" y="1188720"/>
-            <a:ext cx="5285232" cy="5029200"/>
-          </a:xfrm>
-          <a:prstGeom prst="roundRect">
-            <a:avLst>
-              <a:gd name="adj" fmla="val 2000"/>
-            </a:avLst>
-          </a:prstGeom>
-          <a:solidFill>
-            <a:srgbClr val="FFFFFF"/>
-          </a:solidFill>
-          <a:ln w="19050">
-            <a:solidFill>
-              <a:srgbClr val="2563EB"/>
-            </a:solidFill>
-          </a:ln>
-        </p:spPr>
-        <p:style>
-          <a:lnRef idx="1">
-            <a:schemeClr val="accent1"/>
-          </a:lnRef>
-          <a:fillRef idx="3">
-            <a:schemeClr val="accent1"/>
-          </a:fillRef>
-          <a:effectRef idx="2">
-            <a:schemeClr val="accent1"/>
-          </a:effectRef>
-          <a:fontRef idx="minor">
-            <a:schemeClr val="lt1"/>
-          </a:fontRef>
-        </p:style>
-        <p:txBody>
-          <a:bodyPr rtlCol="0" anchor="ctr"/>
-          <a:lstStyle/>
-          <a:p>
-            <a:pPr algn="ctr"/>
-          </a:p>
-        </p:txBody>
-      </p:sp>
-      <p:sp>
-        <p:nvSpPr>
-          <p:cNvPr id="11" name="TextBox 10"/>
-          <p:cNvSpPr txBox="1"/>
-          <p:nvPr/>
-        </p:nvSpPr>
-        <p:spPr>
-          <a:xfrm>
-            <a:off x="6355080" y="1325880"/>
-            <a:ext cx="4919472" cy="4754880"/>
-          </a:xfrm>
-          <a:prstGeom prst="rect">
-            <a:avLst/>
-          </a:prstGeom>
-          <a:noFill/>
-        </p:spPr>
-        <p:txBody>
-          <a:bodyPr wrap="square">
-            <a:spAutoFit/>
-          </a:bodyPr>
-          <a:lstStyle/>
-          <a:p>
-            <a:pPr>
-              <a:spcAft>
-                <a:spcPts val="400"/>
-              </a:spcAft>
-              <a:defRPr b="1" sz="1150">
-                <a:solidFill>
-                  <a:srgbClr val="2563EB"/>
-                </a:solidFill>
-                <a:latin typeface="Segoe UI"/>
-              </a:defRPr>
-            </a:pPr>
-            <a:r>
-              <a:t>ĐẶC TẢ THIẾT KẾ 5 TẦNG VI MẠCH NGOẠI VI UART RTL</a:t>
-            </a:r>
-          </a:p>
-          <a:p>
-            <a:pPr>
-              <a:spcBef>
-                <a:spcPts val="300"/>
-              </a:spcBef>
-              <a:spcAft>
-                <a:spcPts val="100"/>
-              </a:spcAft>
-              <a:defRPr sz="860" b="1">
-                <a:solidFill>
-                  <a:srgbClr val="E11D48"/>
-                </a:solidFill>
-                <a:latin typeface="Segoe UI"/>
-              </a:defRPr>
-            </a:pPr>
-            <a:r>
-              <a:t>TẦNG 1: ĐỒNG BỘ HÓA MIỀN XUNG 2-FF CDC (sync_2ff.v)</a:t>
-            </a:r>
-          </a:p>
-          <a:p>
-            <a:pPr>
-              <a:lnSpc>
-                <a:spcPct val="110000"/>
-              </a:lnSpc>
-              <a:spcAft>
-                <a:spcPts val="120"/>
-              </a:spcAft>
-              <a:defRPr sz="760">
-                <a:solidFill>
-                  <a:srgbClr val="0F172A"/>
-                </a:solidFill>
-                <a:latin typeface="Segoe UI"/>
-              </a:defRPr>
-            </a:pPr>
-            <a:r>
-              <a:t>• Ngõ vào không đồng bộ rx_i: Tín hiệu nối tiếp từ đầu đọc RDM6300 125kHz hoặc chip USB FT2232 đi qua 2 tầng Flip-Flop.</a:t>
-            </a:r>
-          </a:p>
-          <a:p>
-            <a:pPr>
-              <a:lnSpc>
-                <a:spcPct val="110000"/>
-              </a:lnSpc>
-              <a:spcAft>
-                <a:spcPts val="120"/>
-              </a:spcAft>
-              <a:defRPr sz="760">
-                <a:solidFill>
-                  <a:srgbClr val="0F172A"/>
-                </a:solidFill>
-                <a:latin typeface="Segoe UI"/>
-              </a:defRPr>
-            </a:pPr>
-            <a:r>
-              <a:t>• Chống hiện tượng siêu ổn định: Bảo đảm thời gian trung bình giữa 2 lỗi MTBF &gt; 1.000 năm trên tiến trình SkyWater 130nm.</a:t>
-            </a:r>
-          </a:p>
-          <a:p>
-            <a:pPr>
-              <a:spcBef>
-                <a:spcPts val="300"/>
-              </a:spcBef>
-              <a:spcAft>
-                <a:spcPts val="100"/>
-              </a:spcAft>
-              <a:defRPr sz="860" b="1">
-                <a:solidFill>
-                  <a:srgbClr val="D97706"/>
-                </a:solidFill>
-                <a:latin typeface="Segoe UI"/>
-              </a:defRPr>
-            </a:pPr>
-            <a:r>
-              <a:t>TẦNG 2 &amp; 3: BỘ TẠO BAUD, LẤY MẪU 16X &amp; RX FSM (simpleuart.v)</a:t>
-            </a:r>
-          </a:p>
-          <a:p>
-            <a:pPr>
-              <a:lnSpc>
-                <a:spcPct val="110000"/>
-              </a:lnSpc>
-              <a:spcAft>
-                <a:spcPts val="120"/>
-              </a:spcAft>
-              <a:defRPr sz="760">
-                <a:solidFill>
-                  <a:srgbClr val="0F172A"/>
-                </a:solidFill>
-                <a:latin typeface="Segoe UI"/>
-              </a:defRPr>
-            </a:pPr>
-            <a:r>
-              <a:t>• Chia tần số chuẩn xác: Thanh ghi cfg_divider = 5208 (50 MHz / 9600 bps) tạo chu kỳ định thời phần cứng chính xác 100%.</a:t>
-            </a:r>
-          </a:p>
-          <a:p>
-            <a:pPr>
-              <a:lnSpc>
-                <a:spcPct val="110000"/>
-              </a:lnSpc>
-              <a:spcAft>
-                <a:spcPts val="120"/>
-              </a:spcAft>
-              <a:defRPr sz="760">
-                <a:solidFill>
-                  <a:srgbClr val="0F172A"/>
-                </a:solidFill>
-                <a:latin typeface="Segoe UI"/>
-              </a:defRPr>
-            </a:pPr>
-            <a:r>
-              <a:t>• Bộ lấy mẫu 16x &amp; Bầu đa số 3 mẫu: Lấy mẫu tại tick 7, 8, 9 ở giữa bit, triệt tiêu xung gai nhiễu glitch.</a:t>
-            </a:r>
-          </a:p>
-          <a:p>
-            <a:pPr>
-              <a:lnSpc>
-                <a:spcPct val="110000"/>
-              </a:lnSpc>
-              <a:spcAft>
-                <a:spcPts val="120"/>
-              </a:spcAft>
-              <a:defRPr sz="760">
-                <a:solidFill>
-                  <a:srgbClr val="0F172A"/>
-                </a:solidFill>
-                <a:latin typeface="Segoe UI"/>
-              </a:defRPr>
-            </a:pPr>
-            <a:r>
-              <a:t>• Máy trạng thái RX FSM: Tự động phát hiện Start bit (0), dịch 8-bit dữ liệu LSB-first và kiểm tra Stop bit (1).</a:t>
-            </a:r>
-          </a:p>
-          <a:p>
-            <a:pPr>
-              <a:spcBef>
-                <a:spcPts val="300"/>
-              </a:spcBef>
-              <a:spcAft>
-                <a:spcPts val="100"/>
-              </a:spcAft>
-              <a:defRPr sz="860" b="1">
-                <a:solidFill>
-                  <a:srgbClr val="2563EB"/>
-                </a:solidFill>
-                <a:latin typeface="Segoe UI"/>
-              </a:defRPr>
-            </a:pPr>
-            <a:r>
-              <a:t>TẦNG 4: HÀNG ĐỢI FIFO 32 BYTES ĐỘC LẬP (sync_fifo.v)</a:t>
-            </a:r>
-          </a:p>
-          <a:p>
-            <a:pPr>
-              <a:lnSpc>
-                <a:spcPct val="110000"/>
-              </a:lnSpc>
-              <a:spcAft>
-                <a:spcPts val="120"/>
-              </a:spcAft>
-              <a:defRPr sz="760">
-                <a:solidFill>
-                  <a:srgbClr val="0F172A"/>
-                </a:solidFill>
-                <a:latin typeface="Segoe UI"/>
-              </a:defRPr>
-            </a:pPr>
-            <a:r>
-              <a:t>• Cơ chế đệm độc lập: Quản lý con trỏ ghi wr_ptr và đọc rd_ptr độc lập trên mảng nhớ 32x8-bit.</a:t>
-            </a:r>
-          </a:p>
-          <a:p>
-            <a:pPr>
-              <a:lnSpc>
-                <a:spcPct val="110000"/>
-              </a:lnSpc>
-              <a:spcAft>
-                <a:spcPts val="120"/>
-              </a:spcAft>
-              <a:defRPr sz="760">
-                <a:solidFill>
-                  <a:srgbClr val="0F172A"/>
-                </a:solidFill>
-                <a:latin typeface="Segoe UI"/>
-              </a:defRPr>
-            </a:pPr>
-            <a:r>
-              <a:t>• Bảo vệ chống tràn khi Flash bận: Đệm trọn vẹn 14 byte chuỗi thẻ RFID ngay cả khi CPU bận chạy flashio_worker ghi Flash.</a:t>
-            </a:r>
-          </a:p>
-          <a:p>
-            <a:pPr>
-              <a:spcBef>
-                <a:spcPts val="300"/>
-              </a:spcBef>
-              <a:spcAft>
-                <a:spcPts val="100"/>
-              </a:spcAft>
-              <a:defRPr sz="860" b="1">
-                <a:solidFill>
-                  <a:srgbClr val="10B981"/>
-                </a:solidFill>
-                <a:latin typeface="Segoe UI"/>
-              </a:defRPr>
-            </a:pPr>
-            <a:r>
-              <a:t>TẦNG 5: GIẢI MÃ BUS MMIO &amp; NON-BLOCKING (uart_mmio.v)</a:t>
-            </a:r>
-          </a:p>
-          <a:p>
-            <a:pPr>
-              <a:lnSpc>
-                <a:spcPct val="110000"/>
-              </a:lnSpc>
-              <a:spcAft>
-                <a:spcPts val="120"/>
-              </a:spcAft>
-              <a:defRPr sz="760">
-                <a:solidFill>
-                  <a:srgbClr val="0F172A"/>
-                </a:solidFill>
-                <a:latin typeface="Segoe UI"/>
-              </a:defRPr>
-            </a:pPr>
-            <a:r>
-              <a:t>• Ánh xạ không gian địa chỉ: 0x1000_0000 (Divider Prescaler) và 0x1000_0004 (RX FIFO Data).</a:t>
-            </a:r>
-          </a:p>
-          <a:p>
-            <a:pPr>
-              <a:lnSpc>
-                <a:spcPct val="110000"/>
-              </a:lnSpc>
-              <a:spcAft>
-                <a:spcPts val="120"/>
-              </a:spcAft>
-              <a:defRPr sz="760">
-                <a:solidFill>
-                  <a:srgbClr val="0F172A"/>
-                </a:solidFill>
-                <a:latin typeface="Segoe UI"/>
-              </a:defRPr>
-            </a:pPr>
-            <a:r>
-              <a:t>• Giao tiếp Non-blocking 1 chu kỳ: Nếu FIFO rỗng, trả về ngay 0xFFFFFFFF trong 20 ns, không bao giờ làm treo bus CPU.</a:t>
-            </a:r>
-          </a:p>
-        </p:txBody>
-      </p:sp>
+        </p:nvGraphicFramePr>
+        <p:xfrm>
+          <a:off x="868680" y="1298448"/>
+          <a:ext cx="10454335" cy="4892040"/>
+        </p:xfrm>
+        <a:graphic>
+          <a:graphicData uri="http://schemas.openxmlformats.org/drawingml/2006/table">
+            <a:tbl>
+              <a:tblPr firstRow="1" bandRow="1">
+                <a:tableStyleId>{5C22544A-7EE6-4342-B048-85BDC9FD1C3A}</a:tableStyleId>
+              </a:tblPr>
+              <a:tblGrid>
+                <a:gridCol w="2057400"/>
+                <a:gridCol w="2926080"/>
+                <a:gridCol w="5470855"/>
+              </a:tblGrid>
+              <a:tr h="698862">
+                <a:tc>
+                  <a:txBody>
+                    <a:bodyPr/>
+                    <a:lstStyle/>
+                    <a:p>
+                      <a:pPr algn="ctr">
+                        <a:defRPr sz="1200" b="1">
+                          <a:solidFill>
+                            <a:srgbClr val="0EA5E9"/>
+                          </a:solidFill>
+                          <a:latin typeface="Segoe UI"/>
+                        </a:defRPr>
+                      </a:pPr>
+                      <a:r>
+                        <a:t>ĐỊA CHỈ VÙNG NHỚ (MMIO / ADDRESS)</a:t>
+                      </a:r>
+                    </a:p>
+                  </a:txBody>
+                  <a:tcPr anchor="ctr" marL="73152" marR="73152" marT="45720" marB="45720">
+                    <a:solidFill>
+                      <a:srgbClr val="0B132B"/>
+                    </a:solidFill>
+                  </a:tcPr>
+                </a:tc>
+                <a:tc>
+                  <a:txBody>
+                    <a:bodyPr/>
+                    <a:lstStyle/>
+                    <a:p>
+                      <a:pPr algn="ctr">
+                        <a:defRPr sz="1200" b="1">
+                          <a:solidFill>
+                            <a:srgbClr val="0EA5E9"/>
+                          </a:solidFill>
+                          <a:latin typeface="Segoe UI"/>
+                        </a:defRPr>
+                      </a:pPr>
+                      <a:r>
+                        <a:t>NƠI KHAI BÁO C &amp; GIAO DIỆN RTL</a:t>
+                      </a:r>
+                    </a:p>
+                  </a:txBody>
+                  <a:tcPr anchor="ctr" marL="73152" marR="73152" marT="45720" marB="45720">
+                    <a:solidFill>
+                      <a:srgbClr val="0B132B"/>
+                    </a:solidFill>
+                  </a:tcPr>
+                </a:tc>
+                <a:tc>
+                  <a:txBody>
+                    <a:bodyPr/>
+                    <a:lstStyle/>
+                    <a:p>
+                      <a:pPr algn="ctr">
+                        <a:defRPr sz="1200" b="1">
+                          <a:solidFill>
+                            <a:srgbClr val="0EA5E9"/>
+                          </a:solidFill>
+                          <a:latin typeface="Segoe UI"/>
+                        </a:defRPr>
+                      </a:pPr>
+                      <a:r>
+                        <a:t>Ý NGHĨA SỬ DỤNG VỚI FIRMWARE C (CÁCH DÙNG ➔ TÁC DÙNG)</a:t>
+                      </a:r>
+                    </a:p>
+                  </a:txBody>
+                  <a:tcPr anchor="ctr" marL="73152" marR="73152" marT="45720" marB="45720">
+                    <a:solidFill>
+                      <a:srgbClr val="0B132B"/>
+                    </a:solidFill>
+                  </a:tcPr>
+                </a:tc>
+              </a:tr>
+              <a:tr h="698862">
+                <a:tc>
+                  <a:txBody>
+                    <a:bodyPr/>
+                    <a:lstStyle/>
+                    <a:p>
+                      <a:pPr algn="ctr">
+                        <a:defRPr sz="1200" b="1">
+                          <a:solidFill>
+                            <a:srgbClr val="2563EB"/>
+                          </a:solidFill>
+                          <a:latin typeface="Consolas"/>
+                        </a:defRPr>
+                      </a:pPr>
+                      <a:r>
+                        <a:t>0x1000_0000</a:t>
+                      </a:r>
+                      <a:br/>
+                      <a:r>
+                        <a:t>0x1000_0004</a:t>
+                      </a:r>
+                    </a:p>
+                  </a:txBody>
+                  <a:tcPr anchor="ctr" marL="73152" marR="73152" marT="27432" marB="27432">
+                    <a:solidFill>
+                      <a:srgbClr val="FFFFFF"/>
+                    </a:solidFill>
+                  </a:tcPr>
+                </a:tc>
+                <a:tc>
+                  <a:txBody>
+                    <a:bodyPr/>
+                    <a:lstStyle/>
+                    <a:p>
+                      <a:pPr>
+                        <a:lnSpc>
+                          <a:spcPct val="118000"/>
+                        </a:lnSpc>
+                        <a:defRPr sz="1080">
+                          <a:solidFill>
+                            <a:srgbClr val="0B132B"/>
+                          </a:solidFill>
+                          <a:latin typeface="Segoe UI"/>
+                        </a:defRPr>
+                      </a:pPr>
+                      <a:r>
+                        <a:t>• C: REG_RFID_UART_DAT / DIV</a:t>
+                      </a:r>
+                      <a:br/>
+                      <a:r>
+                        <a:t>• RTL: uart_mmio.v (u_rfid_uart)</a:t>
+                      </a:r>
+                    </a:p>
+                  </a:txBody>
+                  <a:tcPr anchor="ctr" marL="73152" marR="73152" marT="27432" marB="27432">
+                    <a:solidFill>
+                      <a:srgbClr val="FFFFFF"/>
+                    </a:solidFill>
+                  </a:tcPr>
+                </a:tc>
+                <a:tc>
+                  <a:txBody>
+                    <a:bodyPr wrap="square"/>
+                    <a:lstStyle/>
+                    <a:p>
+                      <a:pPr>
+                        <a:lnSpc>
+                          <a:spcPct val="116000"/>
+                        </a:lnSpc>
+                        <a:spcAft>
+                          <a:spcPts val="300"/>
+                        </a:spcAft>
+                        <a:defRPr sz="1200">
+                          <a:solidFill>
+                            <a:srgbClr val="0F172A"/>
+                          </a:solidFill>
+                          <a:latin typeface="Segoe UI"/>
+                        </a:defRPr>
+                      </a:pPr>
+                      <a:r>
+                        <a:t>👉 Cách dùng: Polling non-blocking thanh ghi DAT.</a:t>
+                      </a:r>
+                    </a:p>
+                    <a:p>
+                      <a:pPr>
+                        <a:lnSpc>
+                          <a:spcPct val="116000"/>
+                        </a:lnSpc>
+                        <a:defRPr sz="1200">
+                          <a:solidFill>
+                            <a:srgbClr val="0F172A"/>
+                          </a:solidFill>
+                          <a:latin typeface="Segoe UI"/>
+                        </a:defRPr>
+                      </a:pPr>
+                      <a:r>
+                        <a:t>🎯 Tác dụng: Nhận 14 byte chuỗi RFID 125kHz không treo CPU.</a:t>
+                      </a:r>
+                    </a:p>
+                  </a:txBody>
+                  <a:tcPr anchor="ctr" marL="73152" marR="73152" marT="27432" marB="27432">
+                    <a:solidFill>
+                      <a:srgbClr val="FFFFFF"/>
+                    </a:solidFill>
+                  </a:tcPr>
+                </a:tc>
+              </a:tr>
+              <a:tr h="698862">
+                <a:tc>
+                  <a:txBody>
+                    <a:bodyPr/>
+                    <a:lstStyle/>
+                    <a:p>
+                      <a:pPr algn="ctr">
+                        <a:defRPr sz="1200" b="1">
+                          <a:solidFill>
+                            <a:srgbClr val="2563EB"/>
+                          </a:solidFill>
+                          <a:latin typeface="Consolas"/>
+                        </a:defRPr>
+                      </a:pPr>
+                      <a:r>
+                        <a:t>0x3000_0000</a:t>
+                      </a:r>
+                      <a:br/>
+                      <a:r>
+                        <a:t>0x3000_0004</a:t>
+                      </a:r>
+                    </a:p>
+                  </a:txBody>
+                  <a:tcPr anchor="ctr" marL="73152" marR="73152" marT="27432" marB="27432">
+                    <a:solidFill>
+                      <a:srgbClr val="F8FAFC"/>
+                    </a:solidFill>
+                  </a:tcPr>
+                </a:tc>
+                <a:tc>
+                  <a:txBody>
+                    <a:bodyPr/>
+                    <a:lstStyle/>
+                    <a:p>
+                      <a:pPr>
+                        <a:lnSpc>
+                          <a:spcPct val="118000"/>
+                        </a:lnSpc>
+                        <a:defRPr sz="1080">
+                          <a:solidFill>
+                            <a:srgbClr val="0B132B"/>
+                          </a:solidFill>
+                          <a:latin typeface="Segoe UI"/>
+                        </a:defRPr>
+                      </a:pPr>
+                      <a:r>
+                        <a:t>• C: REG_PC_UART_DAT / DIV</a:t>
+                      </a:r>
+                      <a:br/>
+                      <a:r>
+                        <a:t>• RTL: uart_mmio.v (u_pc_uart)</a:t>
+                      </a:r>
+                    </a:p>
+                  </a:txBody>
+                  <a:tcPr anchor="ctr" marL="73152" marR="73152" marT="27432" marB="27432">
+                    <a:solidFill>
+                      <a:srgbClr val="F8FAFC"/>
+                    </a:solidFill>
+                  </a:tcPr>
+                </a:tc>
+                <a:tc>
+                  <a:txBody>
+                    <a:bodyPr wrap="square"/>
+                    <a:lstStyle/>
+                    <a:p>
+                      <a:pPr>
+                        <a:lnSpc>
+                          <a:spcPct val="116000"/>
+                        </a:lnSpc>
+                        <a:spcAft>
+                          <a:spcPts val="300"/>
+                        </a:spcAft>
+                        <a:defRPr sz="1200">
+                          <a:solidFill>
+                            <a:srgbClr val="0F172A"/>
+                          </a:solidFill>
+                          <a:latin typeface="Segoe UI"/>
+                        </a:defRPr>
+                      </a:pPr>
+                      <a:r>
+                        <a:t>👉 Cách dùng: Gọi hàm putchar_pc() / getchar_pc().</a:t>
+                      </a:r>
+                    </a:p>
+                    <a:p>
+                      <a:pPr>
+                        <a:lnSpc>
+                          <a:spcPct val="116000"/>
+                        </a:lnSpc>
+                        <a:defRPr sz="1200">
+                          <a:solidFill>
+                            <a:srgbClr val="0F172A"/>
+                          </a:solidFill>
+                          <a:latin typeface="Segoe UI"/>
+                        </a:defRPr>
+                      </a:pPr>
+                      <a:r>
+                        <a:t>🎯 Tác dụng: Giao tiếp Host CLI 9600 bps quản trị SoC.</a:t>
+                      </a:r>
+                    </a:p>
+                  </a:txBody>
+                  <a:tcPr anchor="ctr" marL="73152" marR="73152" marT="27432" marB="27432">
+                    <a:solidFill>
+                      <a:srgbClr val="F8FAFC"/>
+                    </a:solidFill>
+                  </a:tcPr>
+                </a:tc>
+              </a:tr>
+              <a:tr h="698862">
+                <a:tc>
+                  <a:txBody>
+                    <a:bodyPr/>
+                    <a:lstStyle/>
+                    <a:p>
+                      <a:pPr algn="ctr">
+                        <a:defRPr sz="1200" b="1">
+                          <a:solidFill>
+                            <a:srgbClr val="2563EB"/>
+                          </a:solidFill>
+                          <a:latin typeface="Consolas"/>
+                        </a:defRPr>
+                      </a:pPr>
+                      <a:r>
+                        <a:t>0x4000_0000</a:t>
+                      </a:r>
+                    </a:p>
+                  </a:txBody>
+                  <a:tcPr anchor="ctr" marL="73152" marR="73152" marT="27432" marB="27432">
+                    <a:solidFill>
+                      <a:srgbClr val="FFFFFF"/>
+                    </a:solidFill>
+                  </a:tcPr>
+                </a:tc>
+                <a:tc>
+                  <a:txBody>
+                    <a:bodyPr/>
+                    <a:lstStyle/>
+                    <a:p>
+                      <a:pPr>
+                        <a:lnSpc>
+                          <a:spcPct val="118000"/>
+                        </a:lnSpc>
+                        <a:defRPr sz="1080">
+                          <a:solidFill>
+                            <a:srgbClr val="0B132B"/>
+                          </a:solidFill>
+                          <a:latin typeface="Segoe UI"/>
+                        </a:defRPr>
+                      </a:pPr>
+                      <a:r>
+                        <a:t>• C: REG_GPIO_LEDS (0x40000000)</a:t>
+                      </a:r>
+                      <a:br/>
+                      <a:r>
+                        <a:t>• RTL: soc_gpio_mmio.v</a:t>
+                      </a:r>
+                    </a:p>
+                  </a:txBody>
+                  <a:tcPr anchor="ctr" marL="73152" marR="73152" marT="27432" marB="27432">
+                    <a:solidFill>
+                      <a:srgbClr val="FFFFFF"/>
+                    </a:solidFill>
+                  </a:tcPr>
+                </a:tc>
+                <a:tc>
+                  <a:txBody>
+                    <a:bodyPr wrap="square"/>
+                    <a:lstStyle/>
+                    <a:p>
+                      <a:pPr>
+                        <a:lnSpc>
+                          <a:spcPct val="116000"/>
+                        </a:lnSpc>
+                        <a:spcAft>
+                          <a:spcPts val="300"/>
+                        </a:spcAft>
+                        <a:defRPr sz="1200">
+                          <a:solidFill>
+                            <a:srgbClr val="0F172A"/>
+                          </a:solidFill>
+                          <a:latin typeface="Segoe UI"/>
+                        </a:defRPr>
+                      </a:pPr>
+                      <a:r>
+                        <a:t>👉 Cách dùng: Ghi bitmask 16-bit điều khiển I/O.</a:t>
+                      </a:r>
+                    </a:p>
+                    <a:p>
+                      <a:pPr>
+                        <a:lnSpc>
+                          <a:spcPct val="116000"/>
+                        </a:lnSpc>
+                        <a:defRPr sz="1200">
+                          <a:solidFill>
+                            <a:srgbClr val="0F172A"/>
+                          </a:solidFill>
+                          <a:latin typeface="Segoe UI"/>
+                        </a:defRPr>
+                      </a:pPr>
+                      <a:r>
+                        <a:t>🎯 Tác dụng: Báo LED xác thực và đóng/ngắt Relay mở cửa.</a:t>
+                      </a:r>
+                    </a:p>
+                  </a:txBody>
+                  <a:tcPr anchor="ctr" marL="73152" marR="73152" marT="27432" marB="27432">
+                    <a:solidFill>
+                      <a:srgbClr val="FFFFFF"/>
+                    </a:solidFill>
+                  </a:tcPr>
+                </a:tc>
+              </a:tr>
+              <a:tr h="698862">
+                <a:tc>
+                  <a:txBody>
+                    <a:bodyPr/>
+                    <a:lstStyle/>
+                    <a:p>
+                      <a:pPr algn="ctr">
+                        <a:defRPr sz="1200" b="1">
+                          <a:solidFill>
+                            <a:srgbClr val="2563EB"/>
+                          </a:solidFill>
+                          <a:latin typeface="Consolas"/>
+                        </a:defRPr>
+                      </a:pPr>
+                      <a:r>
+                        <a:t>0x0030_0000</a:t>
+                      </a:r>
+                      <a:br/>
+                      <a:r>
+                        <a:t>(Sector 48)</a:t>
+                      </a:r>
+                    </a:p>
+                  </a:txBody>
+                  <a:tcPr anchor="ctr" marL="73152" marR="73152" marT="27432" marB="27432">
+                    <a:solidFill>
+                      <a:srgbClr val="F8FAFC"/>
+                    </a:solidFill>
+                  </a:tcPr>
+                </a:tc>
+                <a:tc>
+                  <a:txBody>
+                    <a:bodyPr/>
+                    <a:lstStyle/>
+                    <a:p>
+                      <a:pPr>
+                        <a:lnSpc>
+                          <a:spcPct val="118000"/>
+                        </a:lnSpc>
+                        <a:defRPr sz="1080">
+                          <a:solidFill>
+                            <a:srgbClr val="0B132B"/>
+                          </a:solidFill>
+                          <a:latin typeface="Segoe UI"/>
+                        </a:defRPr>
+                      </a:pPr>
+                      <a:r>
+                        <a:t>• C: USER_FLASH_ADDR (0x00300000)</a:t>
+                      </a:r>
+                      <a:br/>
+                      <a:r>
+                        <a:t>• NVM: SPI Flash Sector 48</a:t>
+                      </a:r>
+                    </a:p>
+                  </a:txBody>
+                  <a:tcPr anchor="ctr" marL="73152" marR="73152" marT="27432" marB="27432">
+                    <a:solidFill>
+                      <a:srgbClr val="F8FAFC"/>
+                    </a:solidFill>
+                  </a:tcPr>
+                </a:tc>
+                <a:tc>
+                  <a:txBody>
+                    <a:bodyPr wrap="square"/>
+                    <a:lstStyle/>
+                    <a:p>
+                      <a:pPr>
+                        <a:lnSpc>
+                          <a:spcPct val="116000"/>
+                        </a:lnSpc>
+                        <a:spcAft>
+                          <a:spcPts val="300"/>
+                        </a:spcAft>
+                        <a:defRPr sz="1200">
+                          <a:solidFill>
+                            <a:srgbClr val="0F172A"/>
+                          </a:solidFill>
+                          <a:latin typeface="Segoe UI"/>
+                        </a:defRPr>
+                      </a:pPr>
+                      <a:r>
+                        <a:t>👉 Cách dùng: Nạp buffer thẻ ghi vào SPI Flash.</a:t>
+                      </a:r>
+                    </a:p>
+                    <a:p>
+                      <a:pPr>
+                        <a:lnSpc>
+                          <a:spcPct val="116000"/>
+                        </a:lnSpc>
+                        <a:defRPr sz="1200">
+                          <a:solidFill>
+                            <a:srgbClr val="0F172A"/>
+                          </a:solidFill>
+                          <a:latin typeface="Segoe UI"/>
+                        </a:defRPr>
+                      </a:pPr>
+                      <a:r>
+                        <a:t>🎯 Tác dụng: Lưu cố định danh sách Whitelist khi mất nguồn.</a:t>
+                      </a:r>
+                    </a:p>
+                  </a:txBody>
+                  <a:tcPr anchor="ctr" marL="73152" marR="73152" marT="27432" marB="27432">
+                    <a:solidFill>
+                      <a:srgbClr val="F8FAFC"/>
+                    </a:solidFill>
+                  </a:tcPr>
+                </a:tc>
+              </a:tr>
+              <a:tr h="698862">
+                <a:tc>
+                  <a:txBody>
+                    <a:bodyPr/>
+                    <a:lstStyle/>
+                    <a:p>
+                      <a:pPr algn="ctr">
+                        <a:defRPr sz="1200" b="1">
+                          <a:solidFill>
+                            <a:srgbClr val="2563EB"/>
+                          </a:solidFill>
+                          <a:latin typeface="Consolas"/>
+                        </a:defRPr>
+                      </a:pPr>
+                      <a:r>
+                        <a:t>0x0031_0000</a:t>
+                      </a:r>
+                      <a:br/>
+                      <a:r>
+                        <a:t>(Sector 49)</a:t>
+                      </a:r>
+                    </a:p>
+                  </a:txBody>
+                  <a:tcPr anchor="ctr" marL="73152" marR="73152" marT="27432" marB="27432">
+                    <a:solidFill>
+                      <a:srgbClr val="FFFFFF"/>
+                    </a:solidFill>
+                  </a:tcPr>
+                </a:tc>
+                <a:tc>
+                  <a:txBody>
+                    <a:bodyPr/>
+                    <a:lstStyle/>
+                    <a:p>
+                      <a:pPr>
+                        <a:lnSpc>
+                          <a:spcPct val="118000"/>
+                        </a:lnSpc>
+                        <a:defRPr sz="1080">
+                          <a:solidFill>
+                            <a:srgbClr val="0B132B"/>
+                          </a:solidFill>
+                          <a:latin typeface="Segoe UI"/>
+                        </a:defRPr>
+                      </a:pPr>
+                      <a:r>
+                        <a:t>• C: LOG_FLASH_ADDR (0x00310000)</a:t>
+                      </a:r>
+                      <a:br/>
+                      <a:r>
+                        <a:t>• NVM: SPI Flash Sector 49</a:t>
+                      </a:r>
+                    </a:p>
+                  </a:txBody>
+                  <a:tcPr anchor="ctr" marL="73152" marR="73152" marT="27432" marB="27432">
+                    <a:solidFill>
+                      <a:srgbClr val="FFFFFF"/>
+                    </a:solidFill>
+                  </a:tcPr>
+                </a:tc>
+                <a:tc>
+                  <a:txBody>
+                    <a:bodyPr wrap="square"/>
+                    <a:lstStyle/>
+                    <a:p>
+                      <a:pPr>
+                        <a:lnSpc>
+                          <a:spcPct val="116000"/>
+                        </a:lnSpc>
+                        <a:spcAft>
+                          <a:spcPts val="300"/>
+                        </a:spcAft>
+                        <a:defRPr sz="1200">
+                          <a:solidFill>
+                            <a:srgbClr val="0F172A"/>
+                          </a:solidFill>
+                          <a:latin typeface="Segoe UI"/>
+                        </a:defRPr>
+                      </a:pPr>
+                      <a:r>
+                        <a:t>👉 Cách dùng: Ghi nối tiếp bản ghi AccessLog_t.</a:t>
+                      </a:r>
+                    </a:p>
+                    <a:p>
+                      <a:pPr>
+                        <a:lnSpc>
+                          <a:spcPct val="116000"/>
+                        </a:lnSpc>
+                        <a:defRPr sz="1200">
+                          <a:solidFill>
+                            <a:srgbClr val="0F172A"/>
+                          </a:solidFill>
+                          <a:latin typeface="Segoe UI"/>
+                        </a:defRPr>
+                      </a:pPr>
+                      <a:r>
+                        <a:t>🎯 Tác dụng: Lưu vết lịch sử quét thẻ an ninh chống ghi đè.</a:t>
+                      </a:r>
+                    </a:p>
+                  </a:txBody>
+                  <a:tcPr anchor="ctr" marL="73152" marR="73152" marT="27432" marB="27432">
+                    <a:solidFill>
+                      <a:srgbClr val="FFFFFF"/>
+                    </a:solidFill>
+                  </a:tcPr>
+                </a:tc>
+              </a:tr>
+              <a:tr h="698868">
+                <a:tc>
+                  <a:txBody>
+                    <a:bodyPr/>
+                    <a:lstStyle/>
+                    <a:p>
+                      <a:pPr algn="ctr">
+                        <a:defRPr sz="1200" b="1">
+                          <a:solidFill>
+                            <a:srgbClr val="2563EB"/>
+                          </a:solidFill>
+                          <a:latin typeface="Consolas"/>
+                        </a:defRPr>
+                      </a:pPr>
+                      <a:r>
+                        <a:t>0x0200_0000</a:t>
+                      </a:r>
+                      <a:br/>
+                      <a:r>
+                        <a:t>(1KB SRAM)</a:t>
+                      </a:r>
+                    </a:p>
+                  </a:txBody>
+                  <a:tcPr anchor="ctr" marL="73152" marR="73152" marT="27432" marB="27432">
+                    <a:solidFill>
+                      <a:srgbClr val="F8FAFC"/>
+                    </a:solidFill>
+                  </a:tcPr>
+                </a:tc>
+                <a:tc>
+                  <a:txBody>
+                    <a:bodyPr/>
+                    <a:lstStyle/>
+                    <a:p>
+                      <a:pPr>
+                        <a:lnSpc>
+                          <a:spcPct val="118000"/>
+                        </a:lnSpc>
+                        <a:defRPr sz="1080">
+                          <a:solidFill>
+                            <a:srgbClr val="0B132B"/>
+                          </a:solidFill>
+                          <a:latin typeface="Segoe UI"/>
+                        </a:defRPr>
+                      </a:pPr>
+                      <a:r>
+                        <a:t>• LDS: sections.lds (ORIGIN 0x02000000)</a:t>
+                      </a:r>
+                      <a:br/>
+                      <a:r>
+                        <a:t>• RTL: data_sram.v (1KB SPRAM)</a:t>
+                      </a:r>
+                    </a:p>
+                  </a:txBody>
+                  <a:tcPr anchor="ctr" marL="73152" marR="73152" marT="27432" marB="27432">
+                    <a:solidFill>
+                      <a:srgbClr val="F8FAFC"/>
+                    </a:solidFill>
+                  </a:tcPr>
+                </a:tc>
+                <a:tc>
+                  <a:txBody>
+                    <a:bodyPr wrap="square"/>
+                    <a:lstStyle/>
+                    <a:p>
+                      <a:pPr>
+                        <a:lnSpc>
+                          <a:spcPct val="116000"/>
+                        </a:lnSpc>
+                        <a:spcAft>
+                          <a:spcPts val="300"/>
+                        </a:spcAft>
+                        <a:defRPr sz="1200">
+                          <a:solidFill>
+                            <a:srgbClr val="0F172A"/>
+                          </a:solidFill>
+                          <a:latin typeface="Segoe UI"/>
+                        </a:defRPr>
+                      </a:pPr>
+                      <a:r>
+                        <a:t>👉 Cách dùng: Chứa Stack, .data và nạp flashio_worker.</a:t>
+                      </a:r>
+                    </a:p>
+                    <a:p>
+                      <a:pPr>
+                        <a:lnSpc>
+                          <a:spcPct val="116000"/>
+                        </a:lnSpc>
+                        <a:defRPr sz="1200">
+                          <a:solidFill>
+                            <a:srgbClr val="0F172A"/>
+                          </a:solidFill>
+                          <a:latin typeface="Segoe UI"/>
+                        </a:defRPr>
+                      </a:pPr>
+                      <a:r>
+                        <a:t>🎯 Tác dụng: CPU chạy trong RAM khi Flash bận xóa/ghi.</a:t>
+                      </a:r>
+                    </a:p>
+                  </a:txBody>
+                  <a:tcPr anchor="ctr" marL="73152" marR="73152" marT="27432" marB="27432">
+                    <a:solidFill>
+                      <a:srgbClr val="F8FAFC"/>
+                    </a:solidFill>
+                  </a:tcPr>
+                </a:tc>
+              </a:tr>
+            </a:tbl>
+          </a:graphicData>
+        </a:graphic>
+      </p:graphicFrame>
     </p:spTree>
   </p:cSld>
   <p:clrMapOvr>
@@ -8172,7 +9628,7 @@
               </a:defRPr>
             </a:pPr>
             <a:r>
-              <a:t>PHẦN 4: HỆ THỐNG TESTBENCH &amp; MÔ PHỎNG</a:t>
+              <a:t>PHẦN 5: DEMO CHỨC NĂNG SẢN PHẨM</a:t>
             </a:r>
           </a:p>
           <a:p>
@@ -8185,7 +9641,7 @@
               </a:defRPr>
             </a:pPr>
             <a:r>
-              <a:t>Testbench 1: Kiểm Thử Phần Cứng RTL Thuần Cho UART MMIO &amp; FIFO (tb_uart_rtl.v)</a:t>
+              <a:t>Các Kịch Bản Thực Nghiệm &amp; Giao Diện Quản Trị Host Console</a:t>
             </a:r>
           </a:p>
         </p:txBody>
@@ -8300,7 +9756,7 @@
               </a:defRPr>
             </a:pPr>
             <a:r>
-              <a:t>05 / 12</a:t>
+              <a:t>05 / 13</a:t>
             </a:r>
           </a:p>
         </p:txBody>
@@ -8313,8 +9769,435 @@
         </p:nvSpPr>
         <p:spPr>
           <a:xfrm>
-            <a:off x="731520" y="1234440"/>
-            <a:ext cx="5349240" cy="5029200"/>
+            <a:off x="731520" y="1188720"/>
+            <a:ext cx="5349240" cy="5120640"/>
+          </a:xfrm>
+          <a:prstGeom prst="roundRect">
+            <a:avLst>
+              <a:gd name="adj" fmla="val 2000"/>
+            </a:avLst>
+          </a:prstGeom>
+          <a:solidFill>
+            <a:srgbClr val="0B132B"/>
+          </a:solidFill>
+          <a:ln w="19050">
+            <a:solidFill>
+              <a:srgbClr val="1C2541"/>
+            </a:solidFill>
+          </a:ln>
+        </p:spPr>
+        <p:style>
+          <a:lnRef idx="1">
+            <a:schemeClr val="accent1"/>
+          </a:lnRef>
+          <a:fillRef idx="3">
+            <a:schemeClr val="accent1"/>
+          </a:fillRef>
+          <a:effectRef idx="2">
+            <a:schemeClr val="accent1"/>
+          </a:effectRef>
+          <a:fontRef idx="minor">
+            <a:schemeClr val="lt1"/>
+          </a:fontRef>
+        </p:style>
+        <p:txBody>
+          <a:bodyPr rtlCol="0" anchor="ctr"/>
+          <a:lstStyle/>
+          <a:p>
+            <a:pPr algn="ctr"/>
+          </a:p>
+        </p:txBody>
+      </p:sp>
+      <p:sp>
+        <p:nvSpPr>
+          <p:cNvPr id="9" name="TextBox 8"/>
+          <p:cNvSpPr txBox="1"/>
+          <p:nvPr/>
+        </p:nvSpPr>
+        <p:spPr>
+          <a:xfrm>
+            <a:off x="868680" y="1261872"/>
+            <a:ext cx="5074920" cy="292608"/>
+          </a:xfrm>
+          <a:prstGeom prst="rect">
+            <a:avLst/>
+          </a:prstGeom>
+          <a:noFill/>
+        </p:spPr>
+        <p:txBody>
+          <a:bodyPr wrap="none" lIns="0" tIns="0" rIns="0" bIns="0">
+            <a:spAutoFit/>
+          </a:bodyPr>
+          <a:lstStyle/>
+          <a:p>
+            <a:pPr>
+              <a:defRPr sz="1050" b="1">
+                <a:solidFill>
+                  <a:srgbClr val="34D399"/>
+                </a:solidFill>
+                <a:latin typeface="Consolas"/>
+              </a:defRPr>
+            </a:pPr>
+            <a:r>
+              <a:t>&gt;_  Menu Host Console CLI (host/main.c)</a:t>
+            </a:r>
+          </a:p>
+        </p:txBody>
+      </p:sp>
+      <p:sp>
+        <p:nvSpPr>
+          <p:cNvPr id="10" name="TextBox 9"/>
+          <p:cNvSpPr txBox="1"/>
+          <p:nvPr/>
+        </p:nvSpPr>
+        <p:spPr>
+          <a:xfrm>
+            <a:off x="868680" y="1554480"/>
+            <a:ext cx="5074920" cy="4407408"/>
+          </a:xfrm>
+          <a:prstGeom prst="rect">
+            <a:avLst/>
+          </a:prstGeom>
+          <a:noFill/>
+        </p:spPr>
+        <p:txBody>
+          <a:bodyPr wrap="square" lIns="0" tIns="0" rIns="0" bIns="0">
+            <a:spAutoFit/>
+          </a:bodyPr>
+          <a:lstStyle/>
+          <a:p>
+            <a:pPr>
+              <a:lnSpc>
+                <a:spcPct val="155000"/>
+              </a:lnSpc>
+              <a:spcAft>
+                <a:spcPts val="0"/>
+              </a:spcAft>
+              <a:defRPr sz="1050">
+                <a:solidFill>
+                  <a:srgbClr val="FFFFFF"/>
+                </a:solidFill>
+                <a:latin typeface="Consolas"/>
+              </a:defRPr>
+            </a:pPr>
+            <a:r>
+              <a:t>===============================================================</a:t>
+            </a:r>
+          </a:p>
+          <a:p>
+            <a:pPr>
+              <a:lnSpc>
+                <a:spcPct val="155000"/>
+              </a:lnSpc>
+              <a:spcAft>
+                <a:spcPts val="0"/>
+              </a:spcAft>
+              <a:defRPr sz="1050">
+                <a:solidFill>
+                  <a:srgbClr val="FFFFFF"/>
+                </a:solidFill>
+                <a:latin typeface="Consolas"/>
+              </a:defRPr>
+            </a:pPr>
+            <a:r>
+              <a:t>     RDM6300 RFID - PICORV32 - BASYS 3 SPI FLASH MANAGER      </a:t>
+            </a:r>
+          </a:p>
+          <a:p>
+            <a:pPr>
+              <a:lnSpc>
+                <a:spcPct val="155000"/>
+              </a:lnSpc>
+              <a:spcAft>
+                <a:spcPts val="0"/>
+              </a:spcAft>
+              <a:defRPr sz="1050">
+                <a:solidFill>
+                  <a:srgbClr val="FFFFFF"/>
+                </a:solidFill>
+                <a:latin typeface="Consolas"/>
+              </a:defRPr>
+            </a:pPr>
+            <a:r>
+              <a:t>===============================================================</a:t>
+            </a:r>
+          </a:p>
+          <a:p>
+            <a:pPr>
+              <a:lnSpc>
+                <a:spcPct val="155000"/>
+              </a:lnSpc>
+              <a:spcAft>
+                <a:spcPts val="0"/>
+              </a:spcAft>
+              <a:defRPr sz="1050">
+                <a:solidFill>
+                  <a:srgbClr val="FFFFFF"/>
+                </a:solidFill>
+                <a:latin typeface="Consolas"/>
+              </a:defRPr>
+            </a:pPr>
+            <a:r>
+              <a:t>  [1]  Ping Hardware (Kiem tra ket noi PicoRV32)</a:t>
+            </a:r>
+          </a:p>
+          <a:p>
+            <a:pPr>
+              <a:lnSpc>
+                <a:spcPct val="155000"/>
+              </a:lnSpc>
+              <a:spcAft>
+                <a:spcPts val="0"/>
+              </a:spcAft>
+              <a:defRPr sz="1050">
+                <a:solidFill>
+                  <a:srgbClr val="FFFFFF"/>
+                </a:solidFill>
+                <a:latin typeface="Consolas"/>
+              </a:defRPr>
+            </a:pPr>
+            <a:r>
+              <a:t>  [2]  Input &amp; Save New RFID Tag (Nhap 10 so in tren the luu Flash)</a:t>
+            </a:r>
+          </a:p>
+          <a:p>
+            <a:pPr>
+              <a:lnSpc>
+                <a:spcPct val="155000"/>
+              </a:lnSpc>
+              <a:spcAft>
+                <a:spcPts val="0"/>
+              </a:spcAft>
+              <a:defRPr sz="1050">
+                <a:solidFill>
+                  <a:srgbClr val="FFFFFF"/>
+                </a:solidFill>
+                <a:latin typeface="Consolas"/>
+              </a:defRPr>
+            </a:pPr>
+            <a:r>
+              <a:t>  [3]  Check RFID Tag in Flash (Kiem tra the da co trong Flash)</a:t>
+            </a:r>
+          </a:p>
+          <a:p>
+            <a:pPr>
+              <a:lnSpc>
+                <a:spcPct val="155000"/>
+              </a:lnSpc>
+              <a:spcAft>
+                <a:spcPts val="0"/>
+              </a:spcAft>
+              <a:defRPr sz="1050">
+                <a:solidFill>
+                  <a:srgbClr val="FFFFFF"/>
+                </a:solidFill>
+                <a:latin typeface="Consolas"/>
+              </a:defRPr>
+            </a:pPr>
+            <a:r>
+              <a:t>  [4]  Delete RFID Tag from Flash (Nhap 10 so de xoa khoi Flash)</a:t>
+            </a:r>
+          </a:p>
+          <a:p>
+            <a:pPr>
+              <a:lnSpc>
+                <a:spcPct val="155000"/>
+              </a:lnSpc>
+              <a:spcAft>
+                <a:spcPts val="0"/>
+              </a:spcAft>
+              <a:defRPr sz="1050">
+                <a:solidFill>
+                  <a:srgbClr val="FFFFFF"/>
+                </a:solidFill>
+                <a:latin typeface="Consolas"/>
+              </a:defRPr>
+            </a:pPr>
+            <a:r>
+              <a:t>  [5]  Virtual Scan (Quet the ao: Nhap 10 so in tren the)</a:t>
+            </a:r>
+          </a:p>
+          <a:p>
+            <a:pPr>
+              <a:lnSpc>
+                <a:spcPct val="155000"/>
+              </a:lnSpc>
+              <a:spcAft>
+                <a:spcPts val="0"/>
+              </a:spcAft>
+              <a:defRPr sz="1050">
+                <a:solidFill>
+                  <a:srgbClr val="FFFFFF"/>
+                </a:solidFill>
+                <a:latin typeface="Consolas"/>
+              </a:defRPr>
+            </a:pPr>
+            <a:r>
+              <a:t>  [6]  View Access Logs from Flash (Xem nhat ky Flash 0x310000)</a:t>
+            </a:r>
+          </a:p>
+          <a:p>
+            <a:pPr>
+              <a:lnSpc>
+                <a:spcPct val="155000"/>
+              </a:lnSpc>
+              <a:spcAft>
+                <a:spcPts val="0"/>
+              </a:spcAft>
+              <a:defRPr sz="1050">
+                <a:solidFill>
+                  <a:srgbClr val="FFFFFF"/>
+                </a:solidFill>
+                <a:latin typeface="Consolas"/>
+              </a:defRPr>
+            </a:pPr>
+            <a:r>
+              <a:t>  [7]  Erase Access Logs (Sao luu CSV roi xoa nhat ky Flash)</a:t>
+            </a:r>
+          </a:p>
+          <a:p>
+            <a:pPr>
+              <a:lnSpc>
+                <a:spcPct val="155000"/>
+              </a:lnSpc>
+              <a:spcAft>
+                <a:spcPts val="0"/>
+              </a:spcAft>
+              <a:defRPr sz="1050">
+                <a:solidFill>
+                  <a:srgbClr val="FFFFFF"/>
+                </a:solidFill>
+                <a:latin typeface="Consolas"/>
+              </a:defRPr>
+            </a:pPr>
+            <a:r>
+              <a:t>  [8]  Export RFID Tags to CSV (Xuat danh sach the ra file CSV)</a:t>
+            </a:r>
+          </a:p>
+          <a:p>
+            <a:pPr>
+              <a:lnSpc>
+                <a:spcPct val="155000"/>
+              </a:lnSpc>
+              <a:spcAft>
+                <a:spcPts val="0"/>
+              </a:spcAft>
+              <a:defRPr sz="1050">
+                <a:solidFill>
+                  <a:srgbClr val="FFFFFF"/>
+                </a:solidFill>
+                <a:latin typeface="Consolas"/>
+              </a:defRPr>
+            </a:pPr>
+            <a:r>
+              <a:t>  [9]  Import RFID Tags from Latest CSV (Xoa Flash &amp; Nap CSV)</a:t>
+            </a:r>
+          </a:p>
+          <a:p>
+            <a:pPr>
+              <a:lnSpc>
+                <a:spcPct val="155000"/>
+              </a:lnSpc>
+              <a:spcAft>
+                <a:spcPts val="0"/>
+              </a:spcAft>
+              <a:defRPr sz="1050">
+                <a:solidFill>
+                  <a:srgbClr val="FFFFFF"/>
+                </a:solidFill>
+                <a:latin typeface="Consolas"/>
+              </a:defRPr>
+            </a:pPr>
+            <a:r>
+              <a:t>  [0]  Exit (Thoat)</a:t>
+            </a:r>
+          </a:p>
+          <a:p>
+            <a:pPr>
+              <a:lnSpc>
+                <a:spcPct val="155000"/>
+              </a:lnSpc>
+              <a:spcAft>
+                <a:spcPts val="0"/>
+              </a:spcAft>
+              <a:defRPr sz="1050">
+                <a:solidFill>
+                  <a:srgbClr val="FFFFFF"/>
+                </a:solidFill>
+                <a:latin typeface="Consolas"/>
+              </a:defRPr>
+            </a:pPr>
+            <a:r>
+              <a:t>---------------------------------------------------------------</a:t>
+            </a:r>
+          </a:p>
+          <a:p>
+            <a:pPr>
+              <a:lnSpc>
+                <a:spcPct val="155000"/>
+              </a:lnSpc>
+              <a:spcAft>
+                <a:spcPts val="0"/>
+              </a:spcAft>
+              <a:defRPr sz="1050">
+                <a:solidFill>
+                  <a:srgbClr val="FFFFFF"/>
+                </a:solidFill>
+                <a:latin typeface="Consolas"/>
+              </a:defRPr>
+            </a:pPr>
+            <a:r>
+              <a:t>Lua chon cua ban [0-9]: _</a:t>
+            </a:r>
+          </a:p>
+        </p:txBody>
+      </p:sp>
+      <p:sp>
+        <p:nvSpPr>
+          <p:cNvPr id="11" name="TextBox 10"/>
+          <p:cNvSpPr txBox="1"/>
+          <p:nvPr/>
+        </p:nvSpPr>
+        <p:spPr>
+          <a:xfrm>
+            <a:off x="868680" y="5925312"/>
+            <a:ext cx="5074920" cy="274320"/>
+          </a:xfrm>
+          <a:prstGeom prst="rect">
+            <a:avLst/>
+          </a:prstGeom>
+          <a:noFill/>
+        </p:spPr>
+        <p:txBody>
+          <a:bodyPr wrap="none" lIns="0" tIns="0" rIns="0" bIns="0">
+            <a:spAutoFit/>
+          </a:bodyPr>
+          <a:lstStyle/>
+          <a:p>
+            <a:pPr>
+              <a:defRPr sz="950" b="1">
+                <a:solidFill>
+                  <a:srgbClr val="10B981"/>
+                </a:solidFill>
+                <a:latin typeface="Segoe UI"/>
+              </a:defRPr>
+            </a:pPr>
+            <a:r>
+              <a:t>=== GIAO DIỆN QUẢN TRỊ TRÊN HOST PC GIAO TIẾP VỚI PICORV32 ===</a:t>
+            </a:r>
+          </a:p>
+        </p:txBody>
+      </p:sp>
+      <p:sp>
+        <p:nvSpPr>
+          <p:cNvPr id="12" name="Rounded Rectangle 11"/>
+          <p:cNvSpPr/>
+          <p:nvPr/>
+        </p:nvSpPr>
+        <p:spPr>
+          <a:xfrm>
+            <a:off x="6217920" y="1188720"/>
+            <a:ext cx="5239512" cy="5120640"/>
           </a:xfrm>
           <a:prstGeom prst="roundRect">
             <a:avLst>
@@ -8354,14 +10237,14 @@
       </p:sp>
       <p:sp>
         <p:nvSpPr>
-          <p:cNvPr id="9" name="TextBox 8"/>
+          <p:cNvPr id="13" name="TextBox 12"/>
           <p:cNvSpPr txBox="1"/>
           <p:nvPr/>
         </p:nvSpPr>
         <p:spPr>
           <a:xfrm>
-            <a:off x="868680" y="1353312"/>
-            <a:ext cx="5074920" cy="256032"/>
+            <a:off x="6400800" y="1298448"/>
+            <a:ext cx="4873752" cy="4892040"/>
           </a:xfrm>
           <a:prstGeom prst="rect">
             <a:avLst/>
@@ -8369,264 +10252,7 @@
           <a:noFill/>
         </p:spPr>
         <p:txBody>
-          <a:bodyPr wrap="none" lIns="0" tIns="0" rIns="0" bIns="0">
-            <a:spAutoFit/>
-          </a:bodyPr>
-          <a:lstStyle/>
-          <a:p>
-            <a:pPr algn="ctr">
-              <a:defRPr sz="1050" b="1">
-                <a:solidFill>
-                  <a:srgbClr val="2563EB"/>
-                </a:solidFill>
-                <a:latin typeface="Segoe UI"/>
-              </a:defRPr>
-            </a:pPr>
-            <a:r>
-              <a:t>DẠNG SÓNG MÔ PHỎNG VIVADO XSIM (15.275 µs)</a:t>
-            </a:r>
-          </a:p>
-        </p:txBody>
-      </p:sp>
-      <p:pic>
-        <p:nvPicPr>
-          <p:cNvPr id="10" name="Picture 9" descr="waveform_tb_uart_rtl.png"/>
-          <p:cNvPicPr>
-            <a:picLocks noChangeAspect="1"/>
-          </p:cNvPicPr>
-          <p:nvPr/>
-        </p:nvPicPr>
-        <p:blipFill>
-          <a:blip r:embed="rId2"/>
-          <a:stretch>
-            <a:fillRect/>
-          </a:stretch>
-        </p:blipFill>
-        <p:spPr>
-          <a:xfrm>
-            <a:off x="914400" y="1627632"/>
-            <a:ext cx="4983480" cy="2962656"/>
-          </a:xfrm>
-          <a:prstGeom prst="rect">
-            <a:avLst/>
-          </a:prstGeom>
-        </p:spPr>
-      </p:pic>
-      <p:sp>
-        <p:nvSpPr>
-          <p:cNvPr id="11" name="Rounded Rectangle 10"/>
-          <p:cNvSpPr/>
-          <p:nvPr/>
-        </p:nvSpPr>
-        <p:spPr>
-          <a:xfrm>
-            <a:off x="914400" y="4681728"/>
-            <a:ext cx="4983480" cy="1444752"/>
-          </a:xfrm>
-          <a:prstGeom prst="roundRect">
-            <a:avLst>
-              <a:gd name="adj" fmla="val 2000"/>
-            </a:avLst>
-          </a:prstGeom>
-          <a:solidFill>
-            <a:srgbClr val="F1F5F9"/>
-          </a:solidFill>
-          <a:ln w="12700">
-            <a:solidFill>
-              <a:srgbClr val="CBD5E1"/>
-            </a:solidFill>
-          </a:ln>
-        </p:spPr>
-        <p:style>
-          <a:lnRef idx="1">
-            <a:schemeClr val="accent1"/>
-          </a:lnRef>
-          <a:fillRef idx="3">
-            <a:schemeClr val="accent1"/>
-          </a:fillRef>
-          <a:effectRef idx="2">
-            <a:schemeClr val="accent1"/>
-          </a:effectRef>
-          <a:fontRef idx="minor">
-            <a:schemeClr val="lt1"/>
-          </a:fontRef>
-        </p:style>
-        <p:txBody>
-          <a:bodyPr rtlCol="0" anchor="ctr"/>
-          <a:lstStyle/>
-          <a:p>
-            <a:pPr algn="ctr"/>
-          </a:p>
-        </p:txBody>
-      </p:sp>
-      <p:sp>
-        <p:nvSpPr>
-          <p:cNvPr id="12" name="TextBox 11"/>
-          <p:cNvSpPr txBox="1"/>
-          <p:nvPr/>
-        </p:nvSpPr>
-        <p:spPr>
-          <a:xfrm>
-            <a:off x="1024128" y="4736592"/>
-            <a:ext cx="4754880" cy="1335024"/>
-          </a:xfrm>
-          <a:prstGeom prst="rect">
-            <a:avLst/>
-          </a:prstGeom>
-          <a:noFill/>
-        </p:spPr>
-        <p:txBody>
-          <a:bodyPr wrap="square" lIns="0" tIns="0" rIns="0" bIns="0">
-            <a:spAutoFit/>
-          </a:bodyPr>
-          <a:lstStyle/>
-          <a:p>
-            <a:pPr>
-              <a:spcAft>
-                <a:spcPts val="200"/>
-              </a:spcAft>
-              <a:defRPr sz="819" b="1">
-                <a:solidFill>
-                  <a:srgbClr val="2563EB"/>
-                </a:solidFill>
-                <a:latin typeface="Segoe UI"/>
-              </a:defRPr>
-            </a:pPr>
-            <a:r>
-              <a:t>ĐẶC TRƯNG TÍN HIỆU TRÊN DẠNG SÓNG (WAVEFORM ANALYSIS):</a:t>
-            </a:r>
-          </a:p>
-          <a:p>
-            <a:pPr>
-              <a:lnSpc>
-                <a:spcPct val="112000"/>
-              </a:lnSpc>
-              <a:defRPr sz="760">
-                <a:solidFill>
-                  <a:srgbClr val="0F172A"/>
-                </a:solidFill>
-                <a:latin typeface="Segoe UI"/>
-              </a:defRPr>
-            </a:pPr>
-            <a:r>
-              <a:t>• clk / rst_n: Chu kỳ xung nhịp 10ns (100MHz), reset giải phóng tại t = 100ns.</a:t>
-            </a:r>
-          </a:p>
-          <a:p>
-            <a:pPr>
-              <a:lnSpc>
-                <a:spcPct val="112000"/>
-              </a:lnSpc>
-              <a:defRPr sz="760">
-                <a:solidFill>
-                  <a:srgbClr val="0F172A"/>
-                </a:solidFill>
-                <a:latin typeface="Segoe UI"/>
-              </a:defRPr>
-            </a:pPr>
-            <a:r>
-              <a:t>• tx_o (Serial TX): Khung truyền 8-N-1 (Start bit 0 -&gt; 8 bit dữ liệu LSB -&gt; Stop bit 1).</a:t>
-            </a:r>
-          </a:p>
-          <a:p>
-            <a:pPr>
-              <a:lnSpc>
-                <a:spcPct val="112000"/>
-              </a:lnSpc>
-              <a:defRPr sz="760">
-                <a:solidFill>
-                  <a:srgbClr val="0F172A"/>
-                </a:solidFill>
-                <a:latin typeface="Segoe UI"/>
-              </a:defRPr>
-            </a:pPr>
-            <a:r>
-              <a:t>• rx_activity_o &amp; FIFO: Bắt chuỗi xung rx_i, nạp sạch vào FIFO và trả về read_val = 75.</a:t>
-            </a:r>
-          </a:p>
-          <a:p>
-            <a:pPr>
-              <a:lnSpc>
-                <a:spcPct val="112000"/>
-              </a:lnSpc>
-              <a:defRPr sz="760">
-                <a:solidFill>
-                  <a:srgbClr val="0F172A"/>
-                </a:solidFill>
-                <a:latin typeface="Segoe UI"/>
-              </a:defRPr>
-            </a:pPr>
-            <a:r>
-              <a:t>• err_count = 0: 5/5 kịch bản tự động Assert thành công, kết thúc an toàn tại 15.275 µs.</a:t>
-            </a:r>
-          </a:p>
-        </p:txBody>
-      </p:sp>
-      <p:sp>
-        <p:nvSpPr>
-          <p:cNvPr id="13" name="Rounded Rectangle 12"/>
-          <p:cNvSpPr/>
-          <p:nvPr/>
-        </p:nvSpPr>
-        <p:spPr>
-          <a:xfrm>
-            <a:off x="6217920" y="1234440"/>
-            <a:ext cx="5239512" cy="5029200"/>
-          </a:xfrm>
-          <a:prstGeom prst="roundRect">
-            <a:avLst>
-              <a:gd name="adj" fmla="val 2000"/>
-            </a:avLst>
-          </a:prstGeom>
-          <a:solidFill>
-            <a:srgbClr val="FFFFFF"/>
-          </a:solidFill>
-          <a:ln w="19050">
-            <a:solidFill>
-              <a:srgbClr val="2563EB"/>
-            </a:solidFill>
-          </a:ln>
-        </p:spPr>
-        <p:style>
-          <a:lnRef idx="1">
-            <a:schemeClr val="accent1"/>
-          </a:lnRef>
-          <a:fillRef idx="3">
-            <a:schemeClr val="accent1"/>
-          </a:fillRef>
-          <a:effectRef idx="2">
-            <a:schemeClr val="accent1"/>
-          </a:effectRef>
-          <a:fontRef idx="minor">
-            <a:schemeClr val="lt1"/>
-          </a:fontRef>
-        </p:style>
-        <p:txBody>
-          <a:bodyPr rtlCol="0" anchor="ctr"/>
-          <a:lstStyle/>
-          <a:p>
-            <a:pPr algn="ctr"/>
-          </a:p>
-        </p:txBody>
-      </p:sp>
-      <p:sp>
-        <p:nvSpPr>
-          <p:cNvPr id="14" name="TextBox 13"/>
-          <p:cNvSpPr txBox="1"/>
-          <p:nvPr/>
-        </p:nvSpPr>
-        <p:spPr>
-          <a:xfrm>
-            <a:off x="6400800" y="1353312"/>
-            <a:ext cx="4873752" cy="3977639"/>
-          </a:xfrm>
-          <a:prstGeom prst="rect">
-            <a:avLst/>
-          </a:prstGeom>
-          <a:noFill/>
-        </p:spPr>
-        <p:txBody>
-          <a:bodyPr wrap="square" lIns="0" tIns="0" rIns="0" bIns="0">
+          <a:bodyPr wrap="square">
             <a:spAutoFit/>
           </a:bodyPr>
           <a:lstStyle/>
@@ -8635,7 +10261,7 @@
               <a:spcAft>
                 <a:spcPts val="800"/>
               </a:spcAft>
-              <a:defRPr sz="1200" b="1">
+              <a:defRPr sz="1400" b="1">
                 <a:solidFill>
                   <a:srgbClr val="2563EB"/>
                 </a:solidFill>
@@ -8643,7 +10269,7 @@
               </a:defRPr>
             </a:pPr>
             <a:r>
-              <a:t>5 KỊCH BẢN KIỂM THỬ UART RTL THUẦN (100% PASS)</a:t>
+              <a:t>ÁNH XẠ LỆNH HOST VÀO FIRMWARE C (MAIN.C)</a:t>
             </a:r>
           </a:p>
           <a:p>
@@ -8652,9 +10278,9 @@
                 <a:spcPct val="115000"/>
               </a:lnSpc>
               <a:spcAft>
-                <a:spcPts val="500"/>
+                <a:spcPts val="650"/>
               </a:spcAft>
-              <a:defRPr sz="930">
+              <a:defRPr sz="1200">
                 <a:solidFill>
                   <a:srgbClr val="0F172A"/>
                 </a:solidFill>
@@ -8662,7 +10288,7 @@
               </a:defRPr>
             </a:pPr>
             <a:r>
-              <a:t>• Mục tiêu: Xác minh tính đúng đắn phần cứng của uart_mmio.v, sync_fifo.v và simpleuart.v mà không cần CPU.</a:t>
+              <a:t>• [1] Ping Hardware ➔ case 'P': Phản hồi 'PONG: PicoRV32 Active', kiểm tra kết nối CPU &amp; UART.</a:t>
             </a:r>
           </a:p>
           <a:p>
@@ -8671,9 +10297,9 @@
                 <a:spcPct val="115000"/>
               </a:lnSpc>
               <a:spcAft>
-                <a:spcPts val="500"/>
+                <a:spcPts val="650"/>
               </a:spcAft>
-              <a:defRPr sz="930">
+              <a:defRPr sz="1200">
                 <a:solidFill>
                   <a:srgbClr val="0F172A"/>
                 </a:solidFill>
@@ -8681,7 +10307,7 @@
               </a:defRPr>
             </a:pPr>
             <a:r>
-              <a:t>• 1. Default Divider: Kiểm tra thanh ghi Prescaler tại offset 0x00 nạp đúng giá trị mặc định TEST_DIV = 16 -&gt; PASS.</a:t>
+              <a:t>• [2] Save New Tag ➔ case 'N': Nạp 10 số in trên thẻ vào Flash Sector 48 (địa chỉ 0x0030_0000).</a:t>
             </a:r>
           </a:p>
           <a:p>
@@ -8690,9 +10316,9 @@
                 <a:spcPct val="115000"/>
               </a:lnSpc>
               <a:spcAft>
-                <a:spcPts val="500"/>
+                <a:spcPts val="650"/>
               </a:spcAft>
-              <a:defRPr sz="930">
+              <a:defRPr sz="1200">
                 <a:solidFill>
                   <a:srgbClr val="0F172A"/>
                 </a:solidFill>
@@ -8700,7 +10326,7 @@
               </a:defRPr>
             </a:pPr>
             <a:r>
-              <a:t>• 2. Divider Reconfig: Ghi giá trị chia tần mới và đọc lại qua bus MMIO, xác nhận mạch thanh ghi hoạt động chuẩn xác -&gt; PASS.</a:t>
+              <a:t>• [3] Check Tag ➔ case 'C': Tra cứu xem mã thẻ đã tồn tại trong Whitelist SPI Flash hay chưa.</a:t>
             </a:r>
           </a:p>
           <a:p>
@@ -8709,9 +10335,9 @@
                 <a:spcPct val="115000"/>
               </a:lnSpc>
               <a:spcAft>
-                <a:spcPts val="500"/>
+                <a:spcPts val="650"/>
               </a:spcAft>
-              <a:defRPr sz="930">
+              <a:defRPr sz="1200">
                 <a:solidFill>
                   <a:srgbClr val="0F172A"/>
                 </a:solidFill>
@@ -8719,7 +10345,7 @@
               </a:defRPr>
             </a:pPr>
             <a:r>
-              <a:t>• 3. Serial TX Frame: Ghi ký tự 0x4B ('K' / 75) vào wdata, kiểm tra dạng sóng nối tiếp tx_o đúng chuẩn 8-N-1 -&gt; PASS.</a:t>
+              <a:t>• [4] Delete Tag ➔ case 'K': Xóa thẻ chỉ định ra khỏi danh sách Whitelist lưu trong Flash.</a:t>
             </a:r>
           </a:p>
           <a:p>
@@ -8728,9 +10354,9 @@
                 <a:spcPct val="115000"/>
               </a:lnSpc>
               <a:spcAft>
-                <a:spcPts val="500"/>
+                <a:spcPts val="650"/>
               </a:spcAft>
-              <a:defRPr sz="930">
+              <a:defRPr sz="1200">
                 <a:solidFill>
                   <a:srgbClr val="0F172A"/>
                 </a:solidFill>
@@ -8738,7 +10364,7 @@
               </a:defRPr>
             </a:pPr>
             <a:r>
-              <a:t>• 4. Serial RX &amp; FIFO: Bơm chuỗi bit vào rx_i, cờ rx_activity_o tích cực, dữ liệu nạp sạch vào FIFO và đọc ra read_val = 75 -&gt; PASS.</a:t>
+              <a:t>• [5] Virtual Scan ➔ case 'V': Mô phỏng quẹt thẻ ảo từ terminal máy tính để kiểm tra xác thực.</a:t>
             </a:r>
           </a:p>
           <a:p>
@@ -8747,9 +10373,9 @@
                 <a:spcPct val="115000"/>
               </a:lnSpc>
               <a:spcAft>
-                <a:spcPts val="500"/>
+                <a:spcPts val="650"/>
               </a:spcAft>
-              <a:defRPr sz="930">
+              <a:defRPr sz="1200">
                 <a:solidFill>
                   <a:srgbClr val="0F172A"/>
                 </a:solidFill>
@@ -8757,106 +10383,45 @@
               </a:defRPr>
             </a:pPr>
             <a:r>
-              <a:t>• 5. Multi-Byte Burst: Bắn chuỗi byte kiểm tra cơ chế chống tràn của hàng đợi FIFO, đọc cạn trả về 0xFFFFFFFF (4294967295) -&gt; PASS.</a:t>
-            </a:r>
-          </a:p>
-        </p:txBody>
-      </p:sp>
-      <p:sp>
-        <p:nvSpPr>
-          <p:cNvPr id="15" name="Rounded Rectangle 14"/>
-          <p:cNvSpPr/>
-          <p:nvPr/>
-        </p:nvSpPr>
-        <p:spPr>
-          <a:xfrm>
-            <a:off x="6400800" y="5468112"/>
-            <a:ext cx="4873752" cy="658368"/>
-          </a:xfrm>
-          <a:prstGeom prst="roundRect">
-            <a:avLst>
-              <a:gd name="adj" fmla="val 2000"/>
-            </a:avLst>
-          </a:prstGeom>
-          <a:solidFill>
-            <a:srgbClr val="ECFDF5"/>
-          </a:solidFill>
-          <a:ln w="19050">
-            <a:solidFill>
-              <a:srgbClr val="10B981"/>
-            </a:solidFill>
-          </a:ln>
-        </p:spPr>
-        <p:style>
-          <a:lnRef idx="1">
-            <a:schemeClr val="accent1"/>
-          </a:lnRef>
-          <a:fillRef idx="3">
-            <a:schemeClr val="accent1"/>
-          </a:fillRef>
-          <a:effectRef idx="2">
-            <a:schemeClr val="accent1"/>
-          </a:effectRef>
-          <a:fontRef idx="minor">
-            <a:schemeClr val="lt1"/>
-          </a:fontRef>
-        </p:style>
-        <p:txBody>
-          <a:bodyPr rtlCol="0" anchor="ctr"/>
-          <a:lstStyle/>
-          <a:p>
-            <a:pPr algn="ctr"/>
-          </a:p>
-        </p:txBody>
-      </p:sp>
-      <p:sp>
-        <p:nvSpPr>
-          <p:cNvPr id="16" name="TextBox 15"/>
-          <p:cNvSpPr txBox="1"/>
-          <p:nvPr/>
-        </p:nvSpPr>
-        <p:spPr>
-          <a:xfrm>
-            <a:off x="6492240" y="5522976"/>
-            <a:ext cx="4690872" cy="548640"/>
-          </a:xfrm>
-          <a:prstGeom prst="rect">
-            <a:avLst/>
-          </a:prstGeom>
-          <a:noFill/>
-        </p:spPr>
-        <p:txBody>
-          <a:bodyPr wrap="square" lIns="0" tIns="0" rIns="0" bIns="0">
-            <a:spAutoFit/>
-          </a:bodyPr>
-          <a:lstStyle/>
-          <a:p>
-            <a:pPr>
+              <a:t>• [6] View Logs ➔ case 'L': Đọc toàn bộ lịch sử quét thẻ từ Flash Sector 49 (địa chỉ 0x0031_0000).</a:t>
+            </a:r>
+          </a:p>
+          <a:p>
+            <a:pPr>
+              <a:lnSpc>
+                <a:spcPct val="115000"/>
+              </a:lnSpc>
               <a:spcAft>
-                <a:spcPts val="100"/>
+                <a:spcPts val="650"/>
               </a:spcAft>
-              <a:defRPr sz="819" b="1">
-                <a:solidFill>
-                  <a:srgbClr val="10B981"/>
-                </a:solidFill>
-                <a:latin typeface="Segoe UI"/>
-              </a:defRPr>
-            </a:pPr>
-            <a:r>
-              <a:t>XÁC NHẬN KẾT QUẢ MÔ PHỎNG VIVADO XSIM:</a:t>
-            </a:r>
-          </a:p>
-          <a:p>
-            <a:pPr>
-              <a:defRPr sz="880" b="1">
-                <a:solidFill>
-                  <a:srgbClr val="065F46"/>
-                </a:solidFill>
-                <a:latin typeface="Segoe UI"/>
-              </a:defRPr>
-            </a:pPr>
-            <a:r>
-              <a:t>100% PASS (5/5 TEST SCENARIOS) | RUNTIME: 15,275 ns | SỐ LỖI: 0</a:t>
+              <a:defRPr sz="1200">
+                <a:solidFill>
+                  <a:srgbClr val="0F172A"/>
+                </a:solidFill>
+                <a:latin typeface="Segoe UI"/>
+              </a:defRPr>
+            </a:pPr>
+            <a:r>
+              <a:t>• [7] Erase Logs ➔ case 'X': Tự động sao lưu CSV trên PC rồi xóa trắng nhật ký trong Flash.</a:t>
+            </a:r>
+          </a:p>
+          <a:p>
+            <a:pPr>
+              <a:lnSpc>
+                <a:spcPct val="115000"/>
+              </a:lnSpc>
+              <a:spcAft>
+                <a:spcPts val="650"/>
+              </a:spcAft>
+              <a:defRPr sz="1200">
+                <a:solidFill>
+                  <a:srgbClr val="0F172A"/>
+                </a:solidFill>
+                <a:latin typeface="Segoe UI"/>
+              </a:defRPr>
+            </a:pPr>
+            <a:r>
+              <a:t>• [8] &amp; [9] Export/Import CSV: Dùng lệnh 'F' (đọc tất cả thẻ) &amp; 'E' (xóa thẻ) để đồng bộ hóa CSV.</a:t>
             </a:r>
           </a:p>
         </p:txBody>
@@ -8999,7 +10564,7 @@
               </a:defRPr>
             </a:pPr>
             <a:r>
-              <a:t>PHẦN 4: HỆ THỐNG TESTBENCH &amp; MÔ PHỎNG</a:t>
+              <a:t>PHẦN 3: KIẾN TRÚC KHỐI NGOẠI VI UART</a:t>
             </a:r>
           </a:p>
           <a:p>
@@ -9012,7 +10577,7 @@
               </a:defRPr>
             </a:pPr>
             <a:r>
-              <a:t>Testbench 2: Kiểm Thử Tích Hợp Toàn Diện Top SoC Boot Flash &amp; Ping (tb_uart_ping.v)</a:t>
+              <a:t>Sơ Đồ Khối Kiến Trúc Vi Mạch UART RTL (Draw.io Đen Trắng &amp; Đặc Tả Thiết Kế)</a:t>
             </a:r>
           </a:p>
         </p:txBody>
@@ -9127,7 +10692,7 @@
               </a:defRPr>
             </a:pPr>
             <a:r>
-              <a:t>06 / 12</a:t>
+              <a:t>06 / 13</a:t>
             </a:r>
           </a:p>
         </p:txBody>
@@ -9140,8 +10705,8 @@
         </p:nvSpPr>
         <p:spPr>
           <a:xfrm>
-            <a:off x="731520" y="1234440"/>
-            <a:ext cx="5349240" cy="5029200"/>
+            <a:off x="731520" y="1188720"/>
+            <a:ext cx="5257800" cy="5120640"/>
           </a:xfrm>
           <a:prstGeom prst="roundRect">
             <a:avLst>
@@ -9149,11 +10714,11 @@
             </a:avLst>
           </a:prstGeom>
           <a:solidFill>
-            <a:srgbClr val="0B132B"/>
+            <a:srgbClr val="FFFFFF"/>
           </a:solidFill>
           <a:ln w="19050">
             <a:solidFill>
-              <a:srgbClr val="1C2541"/>
+              <a:srgbClr val="2563EB"/>
             </a:solidFill>
           </a:ln>
         </p:spPr>
@@ -9179,545 +10744,40 @@
           </a:p>
         </p:txBody>
       </p:sp>
-      <p:sp>
-        <p:nvSpPr>
-          <p:cNvPr id="9" name="TextBox 8"/>
-          <p:cNvSpPr txBox="1"/>
+      <p:pic>
+        <p:nvPicPr>
+          <p:cNvPr id="9" name="Picture 8" descr="uart_architecture_bw_diagram.png"/>
+          <p:cNvPicPr>
+            <a:picLocks noChangeAspect="1"/>
+          </p:cNvPicPr>
           <p:nvPr/>
-        </p:nvSpPr>
-        <p:spPr>
-          <a:xfrm>
-            <a:off x="868680" y="1307592"/>
-            <a:ext cx="5074920" cy="292608"/>
+        </p:nvPicPr>
+        <p:blipFill>
+          <a:blip r:embed="rId2"/>
+          <a:stretch>
+            <a:fillRect/>
+          </a:stretch>
+        </p:blipFill>
+        <p:spPr>
+          <a:xfrm>
+            <a:off x="868680" y="1325880"/>
+            <a:ext cx="4983480" cy="4846320"/>
           </a:xfrm>
           <a:prstGeom prst="rect">
             <a:avLst/>
           </a:prstGeom>
-          <a:noFill/>
-        </p:spPr>
-        <p:txBody>
-          <a:bodyPr wrap="none" lIns="0" tIns="0" rIns="0" bIns="0">
-            <a:spAutoFit/>
-          </a:bodyPr>
-          <a:lstStyle/>
-          <a:p>
-            <a:pPr>
-              <a:defRPr sz="950" b="1">
-                <a:solidFill>
-                  <a:srgbClr val="34D399"/>
-                </a:solidFill>
-                <a:latin typeface="Consolas"/>
-              </a:defRPr>
-            </a:pPr>
-            <a:r>
-              <a:t>&gt;_  tb/tb_uart_ping.v [Testbench Code &amp; Sim Log]</a:t>
-            </a:r>
-          </a:p>
-        </p:txBody>
-      </p:sp>
-      <p:sp>
-        <p:nvSpPr>
-          <p:cNvPr id="10" name="TextBox 9"/>
-          <p:cNvSpPr txBox="1"/>
-          <p:nvPr/>
-        </p:nvSpPr>
-        <p:spPr>
-          <a:xfrm>
-            <a:off x="868680" y="1600200"/>
-            <a:ext cx="5074920" cy="4315968"/>
-          </a:xfrm>
-          <a:prstGeom prst="rect">
-            <a:avLst/>
-          </a:prstGeom>
-          <a:noFill/>
-        </p:spPr>
-        <p:txBody>
-          <a:bodyPr wrap="square" lIns="0" tIns="0" rIns="0" bIns="0">
-            <a:spAutoFit/>
-          </a:bodyPr>
-          <a:lstStyle/>
-          <a:p>
-            <a:pPr>
-              <a:lnSpc>
-                <a:spcPct val="110000"/>
-              </a:lnSpc>
-              <a:spcAft>
-                <a:spcPts val="0"/>
-              </a:spcAft>
-              <a:defRPr sz="720">
-                <a:solidFill>
-                  <a:srgbClr val="94A3B8"/>
-                </a:solidFill>
-                <a:latin typeface="Consolas"/>
-              </a:defRPr>
-            </a:pPr>
-            <a:r>
-              <a:t>// tb/tb_uart_ping.v - Kịch bản kiểm thử tích hợp Top SoC</a:t>
-            </a:r>
-          </a:p>
-          <a:p>
-            <a:pPr>
-              <a:lnSpc>
-                <a:spcPct val="110000"/>
-              </a:lnSpc>
-              <a:spcAft>
-                <a:spcPts val="0"/>
-              </a:spcAft>
-              <a:defRPr sz="720">
-                <a:solidFill>
-                  <a:srgbClr val="FFFFFF"/>
-                </a:solidFill>
-                <a:latin typeface="Consolas"/>
-              </a:defRPr>
-            </a:pPr>
-            <a:r>
-              <a:t>initial begin</a:t>
-            </a:r>
-          </a:p>
-          <a:p>
-            <a:pPr>
-              <a:lnSpc>
-                <a:spcPct val="110000"/>
-              </a:lnSpc>
-              <a:spcAft>
-                <a:spcPts val="0"/>
-              </a:spcAft>
-              <a:defRPr sz="720">
-                <a:solidFill>
-                  <a:srgbClr val="FFFFFF"/>
-                </a:solidFill>
-                <a:latin typeface="Consolas"/>
-              </a:defRPr>
-            </a:pPr>
-            <a:r>
-              <a:t>    clk = 0; rst_n = 0; rdm6300_rx_i = 1; uart_rx_i = 1;</a:t>
-            </a:r>
-          </a:p>
-          <a:p>
-            <a:pPr>
-              <a:lnSpc>
-                <a:spcPct val="110000"/>
-              </a:lnSpc>
-              <a:spcAft>
-                <a:spcPts val="0"/>
-              </a:spcAft>
-              <a:defRPr sz="720">
-                <a:solidFill>
-                  <a:srgbClr val="94A3B8"/>
-                </a:solidFill>
-                <a:latin typeface="Consolas"/>
-              </a:defRPr>
-            </a:pPr>
-            <a:r>
-              <a:t>    #200; rst_n = 1; // Release Reset -&gt; Boot Flash 0x250000</a:t>
-            </a:r>
-          </a:p>
-          <a:p>
-            <a:pPr>
-              <a:lnSpc>
-                <a:spcPct val="110000"/>
-              </a:lnSpc>
-              <a:spcAft>
-                <a:spcPts val="0"/>
-              </a:spcAft>
-              <a:defRPr sz="720">
-                <a:solidFill>
-                  <a:srgbClr val="FFFFFF"/>
-                </a:solidFill>
-                <a:latin typeface="Consolas"/>
-              </a:defRPr>
-            </a:pPr>
-            <a:r>
-              <a:t>    wait(ready_matched == 1'b1); // Đợi CPU phát xong Banner C</a:t>
-            </a:r>
-          </a:p>
-          <a:p>
-            <a:pPr>
-              <a:lnSpc>
-                <a:spcPct val="110000"/>
-              </a:lnSpc>
-              <a:spcAft>
-                <a:spcPts val="0"/>
-              </a:spcAft>
-              <a:defRPr sz="720">
-                <a:solidFill>
-                  <a:srgbClr val="94A3B8"/>
-                </a:solidFill>
-                <a:latin typeface="Consolas"/>
-              </a:defRPr>
-            </a:pPr>
-            <a:r>
-              <a:t>    #100000; send_pc_byte("P");  // PC Host gửi lệnh Ping</a:t>
-            </a:r>
-          </a:p>
-          <a:p>
-            <a:pPr>
-              <a:lnSpc>
-                <a:spcPct val="110000"/>
-              </a:lnSpc>
-              <a:spcAft>
-                <a:spcPts val="0"/>
-              </a:spcAft>
-              <a:defRPr sz="720">
-                <a:solidFill>
-                  <a:srgbClr val="FFFFFF"/>
-                </a:solidFill>
-                <a:latin typeface="Consolas"/>
-              </a:defRPr>
-            </a:pPr>
-            <a:r>
-              <a:t>    send_pc_byte(8'h0A);         // Gửi ký tự '\n'</a:t>
-            </a:r>
-          </a:p>
-          <a:p>
-            <a:pPr>
-              <a:lnSpc>
-                <a:spcPct val="110000"/>
-              </a:lnSpc>
-              <a:spcAft>
-                <a:spcPts val="0"/>
-              </a:spcAft>
-              <a:defRPr sz="720">
-                <a:solidFill>
-                  <a:srgbClr val="FFFFFF"/>
-                </a:solidFill>
-                <a:latin typeface="Consolas"/>
-              </a:defRPr>
-            </a:pPr>
-            <a:r>
-              <a:t>    wait(pong_matched == 1'b1);  // Đợi CPU phản hồi chuỗi PONG</a:t>
-            </a:r>
-          </a:p>
-          <a:p>
-            <a:pPr>
-              <a:lnSpc>
-                <a:spcPct val="110000"/>
-              </a:lnSpc>
-              <a:spcAft>
-                <a:spcPts val="0"/>
-              </a:spcAft>
-              <a:defRPr sz="720">
-                <a:solidFill>
-                  <a:srgbClr val="93C5FD"/>
-                </a:solidFill>
-                <a:latin typeface="Consolas"/>
-              </a:defRPr>
-            </a:pPr>
-            <a:r>
-              <a:t>    if (pong_matched &amp;&amp; !cpu_trap)</a:t>
-            </a:r>
-          </a:p>
-          <a:p>
-            <a:pPr>
-              <a:lnSpc>
-                <a:spcPct val="110000"/>
-              </a:lnSpc>
-              <a:spcAft>
-                <a:spcPts val="0"/>
-              </a:spcAft>
-              <a:defRPr sz="720" b="1">
-                <a:solidFill>
-                  <a:srgbClr val="10B981"/>
-                </a:solidFill>
-                <a:latin typeface="Consolas"/>
-              </a:defRPr>
-            </a:pPr>
-            <a:r>
-              <a:t>        $display("  [SUCCESS] PING-PONG TEST PASSED!");</a:t>
-            </a:r>
-          </a:p>
-          <a:p>
-            <a:pPr>
-              <a:lnSpc>
-                <a:spcPct val="110000"/>
-              </a:lnSpc>
-              <a:spcAft>
-                <a:spcPts val="0"/>
-              </a:spcAft>
-              <a:defRPr sz="720">
-                <a:solidFill>
-                  <a:srgbClr val="FFFFFF"/>
-                </a:solidFill>
-                <a:latin typeface="Consolas"/>
-              </a:defRPr>
-            </a:pPr>
-            <a:r>
-              <a:t>end</a:t>
-            </a:r>
-          </a:p>
-          <a:p>
-            <a:pPr>
-              <a:lnSpc>
-                <a:spcPct val="110000"/>
-              </a:lnSpc>
-              <a:spcAft>
-                <a:spcPts val="0"/>
-              </a:spcAft>
-              <a:defRPr sz="720">
-                <a:solidFill>
-                  <a:srgbClr val="FFFFFF"/>
-                </a:solidFill>
-                <a:latin typeface="Consolas"/>
-              </a:defRPr>
-            </a:pPr>
-          </a:p>
-          <a:p>
-            <a:pPr>
-              <a:lnSpc>
-                <a:spcPct val="110000"/>
-              </a:lnSpc>
-              <a:spcAft>
-                <a:spcPts val="0"/>
-              </a:spcAft>
-              <a:defRPr sz="720">
-                <a:solidFill>
-                  <a:srgbClr val="94A3B8"/>
-                </a:solidFill>
-                <a:latin typeface="Consolas"/>
-              </a:defRPr>
-            </a:pPr>
-            <a:r>
-              <a:t>// === VIVADO SIMULATOR (XSIM) EXECUTION OUTPUT LOG ===</a:t>
-            </a:r>
-          </a:p>
-          <a:p>
-            <a:pPr>
-              <a:lnSpc>
-                <a:spcPct val="110000"/>
-              </a:lnSpc>
-              <a:spcAft>
-                <a:spcPts val="0"/>
-              </a:spcAft>
-              <a:defRPr sz="720" b="1">
-                <a:solidFill>
-                  <a:srgbClr val="0EA5E9"/>
-                </a:solidFill>
-                <a:latin typeface="Consolas"/>
-              </a:defRPr>
-            </a:pPr>
-            <a:r>
-              <a:t>[FLASH MODEL] Loaded 2048 words (8192 bytes) from firmware.hex</a:t>
-            </a:r>
-          </a:p>
-          <a:p>
-            <a:pPr>
-              <a:lnSpc>
-                <a:spcPct val="110000"/>
-              </a:lnSpc>
-              <a:spcAft>
-                <a:spcPts val="0"/>
-              </a:spcAft>
-              <a:defRPr sz="720" b="1">
-                <a:solidFill>
-                  <a:srgbClr val="0EA5E9"/>
-                </a:solidFill>
-                <a:latin typeface="Consolas"/>
-              </a:defRPr>
-            </a:pPr>
-            <a:r>
-              <a:t>[TB] System Reset released. PicoRV32 booting from 0x250000...</a:t>
-            </a:r>
-          </a:p>
-          <a:p>
-            <a:pPr>
-              <a:lnSpc>
-                <a:spcPct val="110000"/>
-              </a:lnSpc>
-              <a:spcAft>
-                <a:spcPts val="0"/>
-              </a:spcAft>
-              <a:defRPr sz="720" b="1">
-                <a:solidFill>
-                  <a:srgbClr val="0EA5E9"/>
-                </a:solidFill>
-                <a:latin typeface="Consolas"/>
-              </a:defRPr>
-            </a:pPr>
-            <a:r>
-              <a:t>[UART TX] ================================================</a:t>
-            </a:r>
-          </a:p>
-          <a:p>
-            <a:pPr>
-              <a:lnSpc>
-                <a:spcPct val="110000"/>
-              </a:lnSpc>
-              <a:spcAft>
-                <a:spcPts val="0"/>
-              </a:spcAft>
-              <a:defRPr sz="720" b="1">
-                <a:solidFill>
-                  <a:srgbClr val="0EA5E9"/>
-                </a:solidFill>
-                <a:latin typeface="Consolas"/>
-              </a:defRPr>
-            </a:pPr>
-            <a:r>
-              <a:t>[UART TX]   RDM6300 PICORV32 SOC ACCESS CONTROLLER READY  </a:t>
-            </a:r>
-          </a:p>
-          <a:p>
-            <a:pPr>
-              <a:lnSpc>
-                <a:spcPct val="110000"/>
-              </a:lnSpc>
-              <a:spcAft>
-                <a:spcPts val="0"/>
-              </a:spcAft>
-              <a:defRPr sz="720" b="1">
-                <a:solidFill>
-                  <a:srgbClr val="0EA5E9"/>
-                </a:solidFill>
-                <a:latin typeface="Consolas"/>
-              </a:defRPr>
-            </a:pPr>
-            <a:r>
-              <a:t>[UART TX] ================================================</a:t>
-            </a:r>
-          </a:p>
-          <a:p>
-            <a:pPr>
-              <a:lnSpc>
-                <a:spcPct val="110000"/>
-              </a:lnSpc>
-              <a:spcAft>
-                <a:spcPts val="0"/>
-              </a:spcAft>
-              <a:defRPr sz="720" b="1">
-                <a:solidFill>
-                  <a:srgbClr val="0EA5E9"/>
-                </a:solidFill>
-                <a:latin typeface="Consolas"/>
-              </a:defRPr>
-            </a:pPr>
-            <a:r>
-              <a:t>[TB] Boot banner detected! Sending 'P' (Ping) command...</a:t>
-            </a:r>
-          </a:p>
-          <a:p>
-            <a:pPr>
-              <a:lnSpc>
-                <a:spcPct val="110000"/>
-              </a:lnSpc>
-              <a:spcAft>
-                <a:spcPts val="0"/>
-              </a:spcAft>
-              <a:defRPr sz="720" b="1">
-                <a:solidFill>
-                  <a:srgbClr val="0EA5E9"/>
-                </a:solidFill>
-                <a:latin typeface="Consolas"/>
-              </a:defRPr>
-            </a:pPr>
-            <a:r>
-              <a:t>[HOST -&gt; SOC] Sent Byte: 'P' (0x50), '\n' (0x0A)</a:t>
-            </a:r>
-          </a:p>
-          <a:p>
-            <a:pPr>
-              <a:lnSpc>
-                <a:spcPct val="110000"/>
-              </a:lnSpc>
-              <a:spcAft>
-                <a:spcPts val="0"/>
-              </a:spcAft>
-              <a:defRPr sz="720" b="1">
-                <a:solidFill>
-                  <a:srgbClr val="0EA5E9"/>
-                </a:solidFill>
-                <a:latin typeface="Consolas"/>
-              </a:defRPr>
-            </a:pPr>
-            <a:r>
-              <a:t>[UART TX] PONG: PicoRV32 Active</a:t>
-            </a:r>
-          </a:p>
-          <a:p>
-            <a:pPr>
-              <a:lnSpc>
-                <a:spcPct val="110000"/>
-              </a:lnSpc>
-              <a:spcAft>
-                <a:spcPts val="0"/>
-              </a:spcAft>
-              <a:defRPr sz="720" b="1">
-                <a:solidFill>
-                  <a:srgbClr val="10B981"/>
-                </a:solidFill>
-                <a:latin typeface="Consolas"/>
-              </a:defRPr>
-            </a:pPr>
-            <a:r>
-              <a:t>[SUCCESS] PING-PONG TEST PASSED! PicoRV32 responded with PONG.</a:t>
-            </a:r>
-          </a:p>
-          <a:p>
-            <a:pPr>
-              <a:lnSpc>
-                <a:spcPct val="110000"/>
-              </a:lnSpc>
-              <a:spcAft>
-                <a:spcPts val="0"/>
-              </a:spcAft>
-              <a:defRPr sz="720">
-                <a:solidFill>
-                  <a:srgbClr val="FFFFFF"/>
-                </a:solidFill>
-                <a:latin typeface="Consolas"/>
-              </a:defRPr>
-            </a:pPr>
-            <a:r>
-              <a:t>cpu_trap = 0 (CPU healthy and executing normally)</a:t>
-            </a:r>
-          </a:p>
-        </p:txBody>
-      </p:sp>
-      <p:sp>
-        <p:nvSpPr>
-          <p:cNvPr id="11" name="TextBox 10"/>
-          <p:cNvSpPr txBox="1"/>
-          <p:nvPr/>
-        </p:nvSpPr>
-        <p:spPr>
-          <a:xfrm>
-            <a:off x="868680" y="5879592"/>
-            <a:ext cx="5074920" cy="274320"/>
-          </a:xfrm>
-          <a:prstGeom prst="rect">
-            <a:avLst/>
-          </a:prstGeom>
-          <a:noFill/>
-        </p:spPr>
-        <p:txBody>
-          <a:bodyPr wrap="none" lIns="0" tIns="0" rIns="0" bIns="0">
-            <a:spAutoFit/>
-          </a:bodyPr>
-          <a:lstStyle/>
-          <a:p>
-            <a:pPr>
-              <a:defRPr sz="819" b="1">
-                <a:solidFill>
-                  <a:srgbClr val="10B981"/>
-                </a:solidFill>
-                <a:latin typeface="Segoe UI"/>
-              </a:defRPr>
-            </a:pPr>
-            <a:r>
-              <a:t>=== BOOT FLASH XIP + UART PING-PONG: 100% PASS | RUNTIME: 2,086.555 µs ===</a:t>
-            </a:r>
-          </a:p>
-        </p:txBody>
-      </p:sp>
-      <p:sp>
-        <p:nvSpPr>
-          <p:cNvPr id="12" name="Rounded Rectangle 11"/>
+        </p:spPr>
+      </p:pic>
+      <p:sp>
+        <p:nvSpPr>
+          <p:cNvPr id="10" name="Rounded Rectangle 9"/>
           <p:cNvSpPr/>
           <p:nvPr/>
         </p:nvSpPr>
         <p:spPr>
           <a:xfrm>
-            <a:off x="6217920" y="1234440"/>
-            <a:ext cx="5239512" cy="5029200"/>
+            <a:off x="6172200" y="1188720"/>
+            <a:ext cx="5285232" cy="5120640"/>
           </a:xfrm>
           <a:prstGeom prst="roundRect">
             <a:avLst>
@@ -9729,7 +10789,7 @@
           </a:solidFill>
           <a:ln w="19050">
             <a:solidFill>
-              <a:srgbClr val="10B981"/>
+              <a:srgbClr val="2563EB"/>
             </a:solidFill>
           </a:ln>
         </p:spPr>
@@ -9757,14 +10817,14 @@
       </p:sp>
       <p:sp>
         <p:nvSpPr>
-          <p:cNvPr id="13" name="TextBox 12"/>
+          <p:cNvPr id="11" name="TextBox 10"/>
           <p:cNvSpPr txBox="1"/>
           <p:nvPr/>
         </p:nvSpPr>
         <p:spPr>
           <a:xfrm>
-            <a:off x="6400800" y="1353312"/>
-            <a:ext cx="4873752" cy="3977639"/>
+            <a:off x="6355080" y="1298448"/>
+            <a:ext cx="4919472" cy="4892040"/>
           </a:xfrm>
           <a:prstGeom prst="rect">
             <a:avLst/>
@@ -9772,24 +10832,43 @@
           <a:noFill/>
         </p:spPr>
         <p:txBody>
-          <a:bodyPr wrap="square" lIns="0" tIns="0" rIns="0" bIns="0">
+          <a:bodyPr wrap="square">
             <a:spAutoFit/>
           </a:bodyPr>
           <a:lstStyle/>
           <a:p>
             <a:pPr>
               <a:spcAft>
+                <a:spcPts val="1000"/>
+              </a:spcAft>
+              <a:defRPr b="1" sz="1450">
+                <a:solidFill>
+                  <a:srgbClr val="2563EB"/>
+                </a:solidFill>
+                <a:latin typeface="Segoe UI"/>
+              </a:defRPr>
+            </a:pPr>
+            <a:r>
+              <a:t>ĐẶC TẢ THIẾT KẾ 5 TẦNG PHẦN CỨNG UART RTL</a:t>
+            </a:r>
+          </a:p>
+          <a:p>
+            <a:pPr>
+              <a:spcBef>
                 <a:spcPts val="800"/>
+              </a:spcBef>
+              <a:spcAft>
+                <a:spcPts val="200"/>
               </a:spcAft>
-              <a:defRPr sz="1200" b="1">
-                <a:solidFill>
-                  <a:srgbClr val="10B981"/>
-                </a:solidFill>
-                <a:latin typeface="Segoe UI"/>
-              </a:defRPr>
-            </a:pPr>
-            <a:r>
-              <a:t>5 KỊCH BẢN KIỂM THỬ TÍCH HỢP TOP SOC (100% PASS)</a:t>
+              <a:defRPr sz="1250" b="1">
+                <a:solidFill>
+                  <a:srgbClr val="E11D48"/>
+                </a:solidFill>
+                <a:latin typeface="Segoe UI"/>
+              </a:defRPr>
+            </a:pPr>
+            <a:r>
+              <a:t>TẦNG 1: ĐỒNG BỘ 2-FF CDC (sync_2ff.v)</a:t>
             </a:r>
           </a:p>
           <a:p>
@@ -9798,9 +10877,9 @@
                 <a:spcPct val="115000"/>
               </a:lnSpc>
               <a:spcAft>
-                <a:spcPts val="500"/>
+                <a:spcPts val="600"/>
               </a:spcAft>
-              <a:defRPr sz="930">
+              <a:defRPr sz="1200">
                 <a:solidFill>
                   <a:srgbClr val="0F172A"/>
                 </a:solidFill>
@@ -9808,7 +10887,26 @@
               </a:defRPr>
             </a:pPr>
             <a:r>
-              <a:t>• Mục tiêu: Xác minh hệ thống Top-level hoàn chỉnh gồm CPU PicoRV32, spimemio, 1KB SRAM, Interconnect và UART.</a:t>
+              <a:t>• Khử siêu ổn định (Metastability) tín hiệu rx_i 125kHz; MTBF &gt; 1.000 năm trên SkyWater 130nm.</a:t>
+            </a:r>
+          </a:p>
+          <a:p>
+            <a:pPr>
+              <a:spcBef>
+                <a:spcPts val="800"/>
+              </a:spcBef>
+              <a:spcAft>
+                <a:spcPts val="200"/>
+              </a:spcAft>
+              <a:defRPr sz="1250" b="1">
+                <a:solidFill>
+                  <a:srgbClr val="D97706"/>
+                </a:solidFill>
+                <a:latin typeface="Segoe UI"/>
+              </a:defRPr>
+            </a:pPr>
+            <a:r>
+              <a:t>TẦNG 2 &amp; 3: TẠO BAUD &amp; MÁY TRẠNG THÁI RX (simpleuart.v)</a:t>
             </a:r>
           </a:p>
           <a:p>
@@ -9817,9 +10915,9 @@
                 <a:spcPct val="115000"/>
               </a:lnSpc>
               <a:spcAft>
-                <a:spcPts val="500"/>
+                <a:spcPts val="600"/>
               </a:spcAft>
-              <a:defRPr sz="930">
+              <a:defRPr sz="1200">
                 <a:solidFill>
                   <a:srgbClr val="0F172A"/>
                 </a:solidFill>
@@ -9827,7 +10925,26 @@
               </a:defRPr>
             </a:pPr>
             <a:r>
-              <a:t>• 1. Power-On Reset &amp; Boot Flash: PicoRV32 thức dậy tại 0x0025_0000, spimemio kéo từng từ lệnh mã C từ firmware.hex qua XIP.</a:t>
+              <a:t>• Chia tần số cfg_divider = 5208 (9600 bps); Lấy mẫu 16x bầu đa số 3 mẫu &amp; bắt khung 8-N-1.</a:t>
+            </a:r>
+          </a:p>
+          <a:p>
+            <a:pPr>
+              <a:spcBef>
+                <a:spcPts val="800"/>
+              </a:spcBef>
+              <a:spcAft>
+                <a:spcPts val="200"/>
+              </a:spcAft>
+              <a:defRPr sz="1250" b="1">
+                <a:solidFill>
+                  <a:srgbClr val="2563EB"/>
+                </a:solidFill>
+                <a:latin typeface="Segoe UI"/>
+              </a:defRPr>
+            </a:pPr>
+            <a:r>
+              <a:t>TẦNG 4: HÀNG ĐỢI FIFO 32 BYTES ĐỘC LẬP (sync_fifo.v)</a:t>
             </a:r>
           </a:p>
           <a:p>
@@ -9836,9 +10953,9 @@
                 <a:spcPct val="115000"/>
               </a:lnSpc>
               <a:spcAft>
-                <a:spcPts val="500"/>
+                <a:spcPts val="600"/>
               </a:spcAft>
-              <a:defRPr sz="930">
+              <a:defRPr sz="1200">
                 <a:solidFill>
                   <a:srgbClr val="0F172A"/>
                 </a:solidFill>
@@ -9846,7 +10963,26 @@
               </a:defRPr>
             </a:pPr>
             <a:r>
-              <a:t>• 2. C Startup Banner Output: CPU thực thi mã C main.c, khởi tạo ngoại vi và in chuỗi chào mừng ra UART (ready_matched = 1).</a:t>
+              <a:t>• Đệm trọn vẹn 14 byte chuỗi thẻ RFID, chống tràn dữ liệu tuyệt đối khi CPU bận ghi Flash.</a:t>
+            </a:r>
+          </a:p>
+          <a:p>
+            <a:pPr>
+              <a:spcBef>
+                <a:spcPts val="800"/>
+              </a:spcBef>
+              <a:spcAft>
+                <a:spcPts val="200"/>
+              </a:spcAft>
+              <a:defRPr sz="1250" b="1">
+                <a:solidFill>
+                  <a:srgbClr val="10B981"/>
+                </a:solidFill>
+                <a:latin typeface="Segoe UI"/>
+              </a:defRPr>
+            </a:pPr>
+            <a:r>
+              <a:t>TẦNG 5: GIẢI MÃ BUS MMIO NON-BLOCKING (uart_mmio.v)</a:t>
             </a:r>
           </a:p>
           <a:p>
@@ -9855,9 +10991,9 @@
                 <a:spcPct val="115000"/>
               </a:lnSpc>
               <a:spcAft>
-                <a:spcPts val="500"/>
+                <a:spcPts val="600"/>
               </a:spcAft>
-              <a:defRPr sz="930">
+              <a:defRPr sz="1200">
                 <a:solidFill>
                   <a:srgbClr val="0F172A"/>
                 </a:solidFill>
@@ -9865,144 +11001,7 @@
               </a:defRPr>
             </a:pPr>
             <a:r>
-              <a:t>• 3. Host Ping Processing: Testbench đóng vai trò PC Host gửi byte lệnh 'P' (0x50) và '\n' (0x0A) qua chân uart_rx.</a:t>
-            </a:r>
-          </a:p>
-          <a:p>
-            <a:pPr>
-              <a:lnSpc>
-                <a:spcPct val="115000"/>
-              </a:lnSpc>
-              <a:spcAft>
-                <a:spcPts val="500"/>
-              </a:spcAft>
-              <a:defRPr sz="930">
-                <a:solidFill>
-                  <a:srgbClr val="0F172A"/>
-                </a:solidFill>
-                <a:latin typeface="Segoe UI"/>
-              </a:defRPr>
-            </a:pPr>
-            <a:r>
-              <a:t>• 4. Response Verification: CPU nhận dạng lệnh, phản hồi tức thì chuỗi 'PONG: PicoRV32 Active' (pong_matched = 1).</a:t>
-            </a:r>
-          </a:p>
-          <a:p>
-            <a:pPr>
-              <a:lnSpc>
-                <a:spcPct val="115000"/>
-              </a:lnSpc>
-              <a:spcAft>
-                <a:spcPts val="500"/>
-              </a:spcAft>
-              <a:defRPr sz="930">
-                <a:solidFill>
-                  <a:srgbClr val="0F172A"/>
-                </a:solidFill>
-                <a:latin typeface="Segoe UI"/>
-              </a:defRPr>
-            </a:pPr>
-            <a:r>
-              <a:t>• 5. CPU Health &amp; Zero-Trap: Khẳng định tín hiệu trap == 0 xuyên suốt 2,086,555 ns, CPU không bị illegal instruction hay tràn RAM.</a:t>
-            </a:r>
-          </a:p>
-        </p:txBody>
-      </p:sp>
-      <p:sp>
-        <p:nvSpPr>
-          <p:cNvPr id="14" name="Rounded Rectangle 13"/>
-          <p:cNvSpPr/>
-          <p:nvPr/>
-        </p:nvSpPr>
-        <p:spPr>
-          <a:xfrm>
-            <a:off x="6400800" y="5468112"/>
-            <a:ext cx="4873752" cy="658368"/>
-          </a:xfrm>
-          <a:prstGeom prst="roundRect">
-            <a:avLst>
-              <a:gd name="adj" fmla="val 2000"/>
-            </a:avLst>
-          </a:prstGeom>
-          <a:solidFill>
-            <a:srgbClr val="ECFDF5"/>
-          </a:solidFill>
-          <a:ln w="19050">
-            <a:solidFill>
-              <a:srgbClr val="10B981"/>
-            </a:solidFill>
-          </a:ln>
-        </p:spPr>
-        <p:style>
-          <a:lnRef idx="1">
-            <a:schemeClr val="accent1"/>
-          </a:lnRef>
-          <a:fillRef idx="3">
-            <a:schemeClr val="accent1"/>
-          </a:fillRef>
-          <a:effectRef idx="2">
-            <a:schemeClr val="accent1"/>
-          </a:effectRef>
-          <a:fontRef idx="minor">
-            <a:schemeClr val="lt1"/>
-          </a:fontRef>
-        </p:style>
-        <p:txBody>
-          <a:bodyPr rtlCol="0" anchor="ctr"/>
-          <a:lstStyle/>
-          <a:p>
-            <a:pPr algn="ctr"/>
-          </a:p>
-        </p:txBody>
-      </p:sp>
-      <p:sp>
-        <p:nvSpPr>
-          <p:cNvPr id="15" name="TextBox 14"/>
-          <p:cNvSpPr txBox="1"/>
-          <p:nvPr/>
-        </p:nvSpPr>
-        <p:spPr>
-          <a:xfrm>
-            <a:off x="6492240" y="5522976"/>
-            <a:ext cx="4690872" cy="548640"/>
-          </a:xfrm>
-          <a:prstGeom prst="rect">
-            <a:avLst/>
-          </a:prstGeom>
-          <a:noFill/>
-        </p:spPr>
-        <p:txBody>
-          <a:bodyPr wrap="square" lIns="0" tIns="0" rIns="0" bIns="0">
-            <a:spAutoFit/>
-          </a:bodyPr>
-          <a:lstStyle/>
-          <a:p>
-            <a:pPr>
-              <a:spcAft>
-                <a:spcPts val="100"/>
-              </a:spcAft>
-              <a:defRPr sz="819" b="1">
-                <a:solidFill>
-                  <a:srgbClr val="10B981"/>
-                </a:solidFill>
-                <a:latin typeface="Segoe UI"/>
-              </a:defRPr>
-            </a:pPr>
-            <a:r>
-              <a:t>XÁC NHẬN KẾT QUẢ MÔ PHỎNG VIVADO XSIM:</a:t>
-            </a:r>
-          </a:p>
-          <a:p>
-            <a:pPr>
-              <a:defRPr sz="880" b="1">
-                <a:solidFill>
-                  <a:srgbClr val="065F46"/>
-                </a:solidFill>
-                <a:latin typeface="Segoe UI"/>
-              </a:defRPr>
-            </a:pPr>
-            <a:r>
-              <a:t>100% PASS (BOOT XIP + PING-PONG) | RUNTIME: 2,086.555 µs | TRAP: 0</a:t>
+              <a:t>• Ánh xạ 0x1000_0000 / 0x1000_0004; Phản hồi trong 1 chu kỳ 20ns, không bao giờ treo CPU.</a:t>
             </a:r>
           </a:p>
         </p:txBody>
@@ -10145,7 +11144,7 @@
               </a:defRPr>
             </a:pPr>
             <a:r>
-              <a:t>PHẦN 5: DEMO CHỨC NĂNG SẢN PHẨM</a:t>
+              <a:t>PHẦN 4: HỆ THỐNG TESTBENCH &amp; MÔ PHỎNG</a:t>
             </a:r>
           </a:p>
           <a:p>
@@ -10158,7 +11157,7 @@
               </a:defRPr>
             </a:pPr>
             <a:r>
-              <a:t>Danh Sách Thiết Bị &amp; Thiết Lập Kết Nối Phần Cứng FPGA Basys 3</a:t>
+              <a:t>Testbench 1: Kiểm Thử Phần Cứng RTL Thuần Cho UART MMIO &amp; FIFO (tb_uart_rtl.v)</a:t>
             </a:r>
           </a:p>
         </p:txBody>
@@ -10273,7 +11272,7 @@
               </a:defRPr>
             </a:pPr>
             <a:r>
-              <a:t>07 / 12</a:t>
+              <a:t>07 / 13</a:t>
             </a:r>
           </a:p>
         </p:txBody>
@@ -10286,8 +11285,8 @@
         </p:nvSpPr>
         <p:spPr>
           <a:xfrm>
-            <a:off x="731520" y="1234440"/>
-            <a:ext cx="5257800" cy="5029200"/>
+            <a:off x="731520" y="1188720"/>
+            <a:ext cx="10728655" cy="3822191"/>
           </a:xfrm>
           <a:prstGeom prst="roundRect">
             <a:avLst>
@@ -10333,8 +11332,8 @@
         </p:nvSpPr>
         <p:spPr>
           <a:xfrm>
-            <a:off x="868680" y="1371600"/>
-            <a:ext cx="4983480" cy="274320"/>
+            <a:off x="868680" y="1243584"/>
+            <a:ext cx="10454335" cy="237744"/>
           </a:xfrm>
           <a:prstGeom prst="rect">
             <a:avLst/>
@@ -10348,7 +11347,7 @@
           <a:lstStyle/>
           <a:p>
             <a:pPr algn="ctr">
-              <a:defRPr sz="1100" b="1">
+              <a:defRPr sz="1200" b="1">
                 <a:solidFill>
                   <a:srgbClr val="2563EB"/>
                 </a:solidFill>
@@ -10356,14 +11355,14 @@
               </a:defRPr>
             </a:pPr>
             <a:r>
-              <a:t>HỆ THỐNG THỰC NGHIỆM THỰC TẾ (DEVICE SETUP)</a:t>
+              <a:t>DẠNG SÓNG MÔ PHỎNG TIMELINE VIVADO XSIM (15.275 µs)</a:t>
             </a:r>
           </a:p>
         </p:txBody>
       </p:sp>
       <p:pic>
         <p:nvPicPr>
-          <p:cNvPr id="10" name="Picture 9" descr="Device.jpg"/>
+          <p:cNvPr id="10" name="Picture 9" descr="waveform_tb_uart_rtl.png"/>
           <p:cNvPicPr>
             <a:picLocks noChangeAspect="1"/>
           </p:cNvPicPr>
@@ -10377,8 +11376,8 @@
         </p:blipFill>
         <p:spPr>
           <a:xfrm>
-            <a:off x="960120" y="1682496"/>
-            <a:ext cx="4800600" cy="3593592"/>
+            <a:off x="1700784" y="1508760"/>
+            <a:ext cx="8778240" cy="3401568"/>
           </a:xfrm>
           <a:prstGeom prst="rect">
             <a:avLst/>
@@ -10393,114 +11392,8 @@
         </p:nvSpPr>
         <p:spPr>
           <a:xfrm>
-            <a:off x="960120" y="5376672"/>
-            <a:ext cx="4800600" cy="749808"/>
-          </a:xfrm>
-          <a:prstGeom prst="roundRect">
-            <a:avLst>
-              <a:gd name="adj" fmla="val 2000"/>
-            </a:avLst>
-          </a:prstGeom>
-          <a:solidFill>
-            <a:srgbClr val="F1F5F9"/>
-          </a:solidFill>
-          <a:ln w="12700">
-            <a:solidFill>
-              <a:srgbClr val="CBD5E1"/>
-            </a:solidFill>
-          </a:ln>
-        </p:spPr>
-        <p:style>
-          <a:lnRef idx="1">
-            <a:schemeClr val="accent1"/>
-          </a:lnRef>
-          <a:fillRef idx="3">
-            <a:schemeClr val="accent1"/>
-          </a:fillRef>
-          <a:effectRef idx="2">
-            <a:schemeClr val="accent1"/>
-          </a:effectRef>
-          <a:fontRef idx="minor">
-            <a:schemeClr val="lt1"/>
-          </a:fontRef>
-        </p:style>
-        <p:txBody>
-          <a:bodyPr rtlCol="0" anchor="ctr"/>
-          <a:lstStyle/>
-          <a:p>
-            <a:pPr algn="ctr"/>
-          </a:p>
-        </p:txBody>
-      </p:sp>
-      <p:sp>
-        <p:nvSpPr>
-          <p:cNvPr id="12" name="TextBox 11"/>
-          <p:cNvSpPr txBox="1"/>
-          <p:nvPr/>
-        </p:nvSpPr>
-        <p:spPr>
-          <a:xfrm>
-            <a:off x="1078992" y="5413248"/>
-            <a:ext cx="4572000" cy="658368"/>
-          </a:xfrm>
-          <a:prstGeom prst="rect">
-            <a:avLst/>
-          </a:prstGeom>
-          <a:noFill/>
-        </p:spPr>
-        <p:txBody>
-          <a:bodyPr wrap="square" lIns="0" tIns="0" rIns="0" bIns="0">
-            <a:spAutoFit/>
-          </a:bodyPr>
-          <a:lstStyle/>
-          <a:p>
-            <a:pPr>
-              <a:spcAft>
-                <a:spcPts val="200"/>
-              </a:spcAft>
-              <a:defRPr sz="819" b="1">
-                <a:solidFill>
-                  <a:srgbClr val="2563EB"/>
-                </a:solidFill>
-                <a:latin typeface="Segoe UI"/>
-              </a:defRPr>
-            </a:pPr>
-            <a:r>
-              <a:t>ĐIỂM NỔI BẬT TRONG THIẾT KẾ PHẦN CỨNG THỰC TẾ:</a:t>
-            </a:r>
-          </a:p>
-          <a:p>
-            <a:pPr>
-              <a:lnSpc>
-                <a:spcPct val="115000"/>
-              </a:lnSpc>
-              <a:defRPr sz="780">
-                <a:solidFill>
-                  <a:srgbClr val="0F172A"/>
-                </a:solidFill>
-                <a:latin typeface="Segoe UI"/>
-              </a:defRPr>
-            </a:pPr>
-            <a:r>
-              <a:t>• Mạch nguồn MB102 cấp riêng 5V DC cho RDM6300 (PMOD chỉ có 3.3V, chung mass GND).</a:t>
-            </a:r>
-            <a:br/>
-            <a:r>
-              <a:t>• Điện trở đệm 1kΩ mắc nối tiếp chân TX RDM6300 sang JA1 Basys 3 bảo vệ I/O 3.3V FPGA.</a:t>
-            </a:r>
-          </a:p>
-        </p:txBody>
-      </p:sp>
-      <p:sp>
-        <p:nvSpPr>
-          <p:cNvPr id="13" name="Rounded Rectangle 12"/>
-          <p:cNvSpPr/>
-          <p:nvPr/>
-        </p:nvSpPr>
-        <p:spPr>
-          <a:xfrm>
-            <a:off x="6172200" y="1234440"/>
-            <a:ext cx="5285232" cy="5029200"/>
+            <a:off x="731520" y="5102352"/>
+            <a:ext cx="7589520" cy="1207008"/>
           </a:xfrm>
           <a:prstGeom prst="roundRect">
             <a:avLst>
@@ -10540,14 +11433,195 @@
       </p:sp>
       <p:sp>
         <p:nvSpPr>
+          <p:cNvPr id="12" name="TextBox 11"/>
+          <p:cNvSpPr txBox="1"/>
+          <p:nvPr/>
+        </p:nvSpPr>
+        <p:spPr>
+          <a:xfrm>
+            <a:off x="868680" y="5157216"/>
+            <a:ext cx="7315200" cy="1097280"/>
+          </a:xfrm>
+          <a:prstGeom prst="rect">
+            <a:avLst/>
+          </a:prstGeom>
+          <a:noFill/>
+        </p:spPr>
+        <p:txBody>
+          <a:bodyPr wrap="square" lIns="0" tIns="0" rIns="0" bIns="0">
+            <a:spAutoFit/>
+          </a:bodyPr>
+          <a:lstStyle/>
+          <a:p>
+            <a:pPr>
+              <a:spcAft>
+                <a:spcPts val="200"/>
+              </a:spcAft>
+              <a:defRPr sz="1100" b="1">
+                <a:solidFill>
+                  <a:srgbClr val="2563EB"/>
+                </a:solidFill>
+                <a:latin typeface="Segoe UI"/>
+              </a:defRPr>
+            </a:pPr>
+            <a:r>
+              <a:t>5 KỊCH BẢN KIỂM THỬ RTL THUẦN (XÁC MINH PHẦN CỨNG 100% PASS):</a:t>
+            </a:r>
+          </a:p>
+          <a:p>
+            <a:pPr>
+              <a:lnSpc>
+                <a:spcPct val="105000"/>
+              </a:lnSpc>
+              <a:spcAft>
+                <a:spcPts val="120"/>
+              </a:spcAft>
+              <a:defRPr sz="1050">
+                <a:solidFill>
+                  <a:srgbClr val="0F172A"/>
+                </a:solidFill>
+                <a:latin typeface="Segoe UI"/>
+              </a:defRPr>
+            </a:pPr>
+            <a:r>
+              <a:t>• 1. Divider Mặc Định: Prescaler nạp đúng TEST_DIV = 16 ➔ PASS</a:t>
+            </a:r>
+          </a:p>
+          <a:p>
+            <a:pPr>
+              <a:lnSpc>
+                <a:spcPct val="105000"/>
+              </a:lnSpc>
+              <a:spcAft>
+                <a:spcPts val="120"/>
+              </a:spcAft>
+              <a:defRPr sz="1050">
+                <a:solidFill>
+                  <a:srgbClr val="0F172A"/>
+                </a:solidFill>
+                <a:latin typeface="Segoe UI"/>
+              </a:defRPr>
+            </a:pPr>
+            <a:r>
+              <a:t>• 2. Tái Cấu Hình: Ghi giá trị chia tần mới qua MMIO tức thì ➔ PASS</a:t>
+            </a:r>
+          </a:p>
+          <a:p>
+            <a:pPr>
+              <a:lnSpc>
+                <a:spcPct val="105000"/>
+              </a:lnSpc>
+              <a:spcAft>
+                <a:spcPts val="120"/>
+              </a:spcAft>
+              <a:defRPr sz="1050">
+                <a:solidFill>
+                  <a:srgbClr val="0F172A"/>
+                </a:solidFill>
+                <a:latin typeface="Segoe UI"/>
+              </a:defRPr>
+            </a:pPr>
+            <a:r>
+              <a:t>• 3. Phát Khung TX: Ký tự 0x4B ('K') xuất chuẩn UART 8-N-1 ➔ PASS</a:t>
+            </a:r>
+          </a:p>
+          <a:p>
+            <a:pPr>
+              <a:lnSpc>
+                <a:spcPct val="105000"/>
+              </a:lnSpc>
+              <a:spcAft>
+                <a:spcPts val="120"/>
+              </a:spcAft>
+              <a:defRPr sz="1050">
+                <a:solidFill>
+                  <a:srgbClr val="0F172A"/>
+                </a:solidFill>
+                <a:latin typeface="Segoe UI"/>
+              </a:defRPr>
+            </a:pPr>
+            <a:r>
+              <a:t>• 4. Nhận Khung RX: Bắt chuỗi xung rx_i, nạp sạch FIFO (read_val = 75) ➔ PASS</a:t>
+            </a:r>
+          </a:p>
+          <a:p>
+            <a:pPr>
+              <a:lnSpc>
+                <a:spcPct val="105000"/>
+              </a:lnSpc>
+              <a:spcAft>
+                <a:spcPts val="120"/>
+              </a:spcAft>
+              <a:defRPr sz="1050">
+                <a:solidFill>
+                  <a:srgbClr val="0F172A"/>
+                </a:solidFill>
+                <a:latin typeface="Segoe UI"/>
+              </a:defRPr>
+            </a:pPr>
+            <a:r>
+              <a:t>• 5. Xả Tràn FIFO: Đệm liên tục nhiều byte, đọc cạn trả về 0xFFFFFFFF ➔ PASS</a:t>
+            </a:r>
+          </a:p>
+        </p:txBody>
+      </p:sp>
+      <p:sp>
+        <p:nvSpPr>
+          <p:cNvPr id="13" name="Rounded Rectangle 12"/>
+          <p:cNvSpPr/>
+          <p:nvPr/>
+        </p:nvSpPr>
+        <p:spPr>
+          <a:xfrm>
+            <a:off x="8412480" y="5102352"/>
+            <a:ext cx="3047695" cy="1207008"/>
+          </a:xfrm>
+          <a:prstGeom prst="roundRect">
+            <a:avLst>
+              <a:gd name="adj" fmla="val 2000"/>
+            </a:avLst>
+          </a:prstGeom>
+          <a:solidFill>
+            <a:srgbClr val="ECFDF5"/>
+          </a:solidFill>
+          <a:ln w="19050">
+            <a:solidFill>
+              <a:srgbClr val="10B981"/>
+            </a:solidFill>
+          </a:ln>
+        </p:spPr>
+        <p:style>
+          <a:lnRef idx="1">
+            <a:schemeClr val="accent1"/>
+          </a:lnRef>
+          <a:fillRef idx="3">
+            <a:schemeClr val="accent1"/>
+          </a:fillRef>
+          <a:effectRef idx="2">
+            <a:schemeClr val="accent1"/>
+          </a:effectRef>
+          <a:fontRef idx="minor">
+            <a:schemeClr val="lt1"/>
+          </a:fontRef>
+        </p:style>
+        <p:txBody>
+          <a:bodyPr rtlCol="0" anchor="ctr"/>
+          <a:lstStyle/>
+          <a:p>
+            <a:pPr algn="ctr"/>
+          </a:p>
+        </p:txBody>
+      </p:sp>
+      <p:sp>
+        <p:nvSpPr>
           <p:cNvPr id="14" name="TextBox 13"/>
           <p:cNvSpPr txBox="1"/>
           <p:nvPr/>
         </p:nvSpPr>
         <p:spPr>
           <a:xfrm>
-            <a:off x="6446520" y="1371600"/>
-            <a:ext cx="4800600" cy="4754880"/>
+            <a:off x="8522208" y="5193792"/>
+            <a:ext cx="2834640" cy="1024128"/>
           </a:xfrm>
           <a:prstGeom prst="rect">
             <a:avLst/>
@@ -10562,264 +11636,37 @@
           <a:p>
             <a:pPr>
               <a:spcAft>
-                <a:spcPts val="400"/>
+                <a:spcPts val="200"/>
               </a:spcAft>
-              <a:defRPr b="1" sz="1150">
-                <a:solidFill>
-                  <a:srgbClr val="2563EB"/>
-                </a:solidFill>
-                <a:latin typeface="Segoe UI"/>
-              </a:defRPr>
-            </a:pPr>
-            <a:r>
-              <a:t>DANH SÁCH THIẾT BỊ &amp; NGUYÊN LÝ PHỐI HỢP MỨC ĐIỆN ÁP</a:t>
-            </a:r>
-          </a:p>
-          <a:p>
-            <a:pPr>
-              <a:spcBef>
-                <a:spcPts val="300"/>
-              </a:spcBef>
-              <a:spcAft>
-                <a:spcPts val="100"/>
-              </a:spcAft>
-              <a:defRPr sz="880" b="1">
-                <a:solidFill>
-                  <a:srgbClr val="1C2541"/>
-                </a:solidFill>
-                <a:latin typeface="Segoe UI"/>
-              </a:defRPr>
-            </a:pPr>
-            <a:r>
-              <a:t>1. DANH SÁCH THIẾT BỊ THỰC NGHIỆM (BOM)</a:t>
+              <a:defRPr sz="1100" b="1">
+                <a:solidFill>
+                  <a:srgbClr val="10B981"/>
+                </a:solidFill>
+                <a:latin typeface="Segoe UI"/>
+              </a:defRPr>
+            </a:pPr>
+            <a:r>
+              <a:t>XÁC NHẬN VIVADO XSIM:</a:t>
             </a:r>
           </a:p>
           <a:p>
             <a:pPr>
               <a:lnSpc>
-                <a:spcPct val="110000"/>
+                <a:spcPct val="115000"/>
               </a:lnSpc>
-              <a:spcAft>
-                <a:spcPts val="150"/>
-              </a:spcAft>
-              <a:defRPr sz="780">
-                <a:solidFill>
-                  <a:srgbClr val="0F172A"/>
-                </a:solidFill>
-                <a:latin typeface="Segoe UI"/>
-              </a:defRPr>
-            </a:pPr>
-            <a:r>
-              <a:t>• Bo mạch FPGA Digilent Basys 3: Xilinx Artix-7 XC7A35T, 32Mbit SPI Flash S25FL032P, mạch nạp &amp; UART FTDI qua cổng Micro-USB.</a:t>
-            </a:r>
-          </a:p>
-          <a:p>
-            <a:pPr>
-              <a:lnSpc>
-                <a:spcPct val="110000"/>
-              </a:lnSpc>
-              <a:spcAft>
-                <a:spcPts val="150"/>
-              </a:spcAft>
-              <a:defRPr sz="780">
-                <a:solidFill>
-                  <a:srgbClr val="0F172A"/>
-                </a:solidFill>
-                <a:latin typeface="Segoe UI"/>
-              </a:defRPr>
-            </a:pPr>
-            <a:r>
-              <a:t>• Module RFID RDM6300 (125 kHz): Giải mã thẻ EM4100, kèm cuộn cảm ăng-ten rời phát sóng điện từ 125 kHz.</a:t>
-            </a:r>
-          </a:p>
-          <a:p>
-            <a:pPr>
-              <a:lnSpc>
-                <a:spcPct val="110000"/>
-              </a:lnSpc>
-              <a:spcAft>
-                <a:spcPts val="150"/>
-              </a:spcAft>
-              <a:defRPr sz="780">
-                <a:solidFill>
-                  <a:srgbClr val="0F172A"/>
-                </a:solidFill>
-                <a:latin typeface="Segoe UI"/>
-              </a:defRPr>
-            </a:pPr>
-            <a:r>
-              <a:t>• Mạch nguồn 5V DC độc lập: Module nguồn Breadboard MB102 + Adapter DC ngoài cung cấp nguồn 5V ổn định cho RDM6300.</a:t>
-            </a:r>
-          </a:p>
-          <a:p>
-            <a:pPr>
-              <a:lnSpc>
-                <a:spcPct val="110000"/>
-              </a:lnSpc>
-              <a:spcAft>
-                <a:spcPts val="150"/>
-              </a:spcAft>
-              <a:defRPr sz="780">
-                <a:solidFill>
-                  <a:srgbClr val="0F172A"/>
-                </a:solidFill>
-                <a:latin typeface="Segoe UI"/>
-              </a:defRPr>
-            </a:pPr>
-            <a:r>
-              <a:t>• Điện trở bảo vệ 1kΩ &amp; Phụ kiện: Điện trở 1kΩ hạn dòng, Breadboard mini, tập dây nối cắm mạch và thẻ từ RFID 125 kHz mẫu.</a:t>
-            </a:r>
-          </a:p>
-          <a:p>
-            <a:pPr>
-              <a:spcBef>
-                <a:spcPts val="300"/>
-              </a:spcBef>
-              <a:spcAft>
-                <a:spcPts val="100"/>
-              </a:spcAft>
-              <a:defRPr sz="880" b="1">
-                <a:solidFill>
-                  <a:srgbClr val="D97706"/>
-                </a:solidFill>
-                <a:latin typeface="Segoe UI"/>
-              </a:defRPr>
-            </a:pPr>
-            <a:r>
-              <a:t>2. TẠI SAO CẦN MẠCH NGUỒN 5V RIÊNG CHO RDM6300?</a:t>
-            </a:r>
-          </a:p>
-          <a:p>
-            <a:pPr>
-              <a:lnSpc>
-                <a:spcPct val="110000"/>
-              </a:lnSpc>
-              <a:spcAft>
-                <a:spcPts val="150"/>
-              </a:spcAft>
-              <a:defRPr sz="780">
-                <a:solidFill>
-                  <a:srgbClr val="0F172A"/>
-                </a:solidFill>
-                <a:latin typeface="Segoe UI"/>
-              </a:defRPr>
-            </a:pPr>
-            <a:r>
-              <a:t>• PMOD Basys 3 chỉ cấp 3.3V: Không đủ điện áp để mạch dao động LC trên RDM6300 phát từ trường kích hoạt chip thẻ RFID (ở 3.3V module hoàn toàn không nhận diện được thẻ).</a:t>
-            </a:r>
-          </a:p>
-          <a:p>
-            <a:pPr>
-              <a:lnSpc>
-                <a:spcPct val="110000"/>
-              </a:lnSpc>
-              <a:spcAft>
-                <a:spcPts val="150"/>
-              </a:spcAft>
-              <a:defRPr sz="780">
-                <a:solidFill>
-                  <a:srgbClr val="0F172A"/>
-                </a:solidFill>
-                <a:latin typeface="Segoe UI"/>
-              </a:defRPr>
-            </a:pPr>
-            <a:r>
-              <a:t>• Giải pháp cấp nguồn 5V ngoài: Dùng module MB102 cấp đủ 5V/GND cho RDM6300; Nối chung mass (Common GND) giữa nguồn 5V và Basys 3 để đồng bộ mức tham chiếu logic.</a:t>
-            </a:r>
-          </a:p>
-          <a:p>
-            <a:pPr>
-              <a:spcBef>
-                <a:spcPts val="300"/>
-              </a:spcBef>
-              <a:spcAft>
-                <a:spcPts val="100"/>
-              </a:spcAft>
-              <a:defRPr sz="880" b="1">
-                <a:solidFill>
-                  <a:srgbClr val="E11D48"/>
-                </a:solidFill>
-                <a:latin typeface="Segoe UI"/>
-              </a:defRPr>
-            </a:pPr>
-            <a:r>
-              <a:t>3. TẠI SAO CẦN ĐIỆN TRỞ 1KΩ TRÊN CHÂN TX NỐI BASYS 3?</a:t>
-            </a:r>
-          </a:p>
-          <a:p>
-            <a:pPr>
-              <a:lnSpc>
-                <a:spcPct val="110000"/>
-              </a:lnSpc>
-              <a:spcAft>
-                <a:spcPts val="150"/>
-              </a:spcAft>
-              <a:defRPr sz="780">
-                <a:solidFill>
-                  <a:srgbClr val="0F172A"/>
-                </a:solidFill>
-                <a:latin typeface="Segoe UI"/>
-              </a:defRPr>
-            </a:pPr>
-            <a:r>
-              <a:t>• Chênh lệch mức logic (5V TTL vs 3.3V LVCMOS): Chân TX của RDM6300 xuất tín hiệu UART ở mức 5V, trong khi chân I/O FPGA Artix-7 (PMOD JA1 - Pin J1) chỉ chấp nhận mức áp tối đa 3.3V.</a:t>
-            </a:r>
-          </a:p>
-          <a:p>
-            <a:pPr>
-              <a:lnSpc>
-                <a:spcPct val="110000"/>
-              </a:lnSpc>
-              <a:spcAft>
-                <a:spcPts val="150"/>
-              </a:spcAft>
-              <a:defRPr sz="780">
-                <a:solidFill>
-                  <a:srgbClr val="0F172A"/>
-                </a:solidFill>
-                <a:latin typeface="Segoe UI"/>
-              </a:defRPr>
-            </a:pPr>
-            <a:r>
-              <a:t>• Bảo vệ chân I/O FPGA Artix-7: Điện trở 1kΩ mắc nối tiếp hạn chế dòng rò đưa vào diode kẹp (clamping diode) của FPGA &lt; 2mA, ngăn chặn quá áp/hỏng chip, giữ dạng sóng UART sắc nét.</a:t>
-            </a:r>
-          </a:p>
-          <a:p>
-            <a:pPr>
-              <a:spcBef>
-                <a:spcPts val="300"/>
-              </a:spcBef>
-              <a:spcAft>
-                <a:spcPts val="100"/>
-              </a:spcAft>
-              <a:defRPr sz="880" b="1">
-                <a:solidFill>
-                  <a:srgbClr val="10B981"/>
-                </a:solidFill>
-                <a:latin typeface="Segoe UI"/>
-              </a:defRPr>
-            </a:pPr>
-            <a:r>
-              <a:t>4. GIAO TIẾP HOST PC &amp; HIỂN THỊ TRỰC QUAN</a:t>
-            </a:r>
-          </a:p>
-          <a:p>
-            <a:pPr>
-              <a:lnSpc>
-                <a:spcPct val="110000"/>
-              </a:lnSpc>
-              <a:spcAft>
-                <a:spcPts val="150"/>
-              </a:spcAft>
-              <a:defRPr sz="780">
-                <a:solidFill>
-                  <a:srgbClr val="0F172A"/>
-                </a:solidFill>
-                <a:latin typeface="Segoe UI"/>
-              </a:defRPr>
-            </a:pPr>
-            <a:r>
-              <a:t>• Cáp Micro-USB tiêu chuẩn: Vừa cấp nguồn Basys 3 vừa truyền thông với Host Console C qua UART FTDI (9600 bps); LED 7 đoạn hiển thị kết quả PASS/FAIL thời gian thực.</a:t>
+              <a:defRPr sz="1050" b="1">
+                <a:solidFill>
+                  <a:srgbClr val="065F46"/>
+                </a:solidFill>
+                <a:latin typeface="Segoe UI"/>
+              </a:defRPr>
+            </a:pPr>
+            <a:r>
+              <a:t>100% PASS (5/5 TEST SCENARIOS)</a:t>
+            </a:r>
+            <a:br/>
+            <a:r>
+              <a:t>RUNTIME: 15.275 µs | SỐ LỖI: 0</a:t>
             </a:r>
           </a:p>
         </p:txBody>
@@ -10962,7 +11809,7 @@
               </a:defRPr>
             </a:pPr>
             <a:r>
-              <a:t>PHẦN 5: DEMO CHỨC NĂNG SẢN PHẨM</a:t>
+              <a:t>PHẦN 4: HỆ THỐNG TESTBENCH &amp; MÔ PHỎNG</a:t>
             </a:r>
           </a:p>
           <a:p>
@@ -10975,7 +11822,7 @@
               </a:defRPr>
             </a:pPr>
             <a:r>
-              <a:t>Các Kịch Bản Thực Nghiệm &amp; Giao Diện Quản Trị Host Console</a:t>
+              <a:t>Testbench 2: Kiểm Thử Tích Hợp Toàn Diện Top SoC Boot Flash &amp; Ping (tb_uart_ping.v)</a:t>
             </a:r>
           </a:p>
         </p:txBody>
@@ -11090,7 +11937,7 @@
               </a:defRPr>
             </a:pPr>
             <a:r>
-              <a:t>08 / 12</a:t>
+              <a:t>08 / 13</a:t>
             </a:r>
           </a:p>
         </p:txBody>
@@ -11103,8 +11950,8 @@
         </p:nvSpPr>
         <p:spPr>
           <a:xfrm>
-            <a:off x="731520" y="1234440"/>
-            <a:ext cx="5257800" cy="5029200"/>
+            <a:off x="731520" y="1188720"/>
+            <a:ext cx="10728655" cy="5120640"/>
           </a:xfrm>
           <a:prstGeom prst="roundRect">
             <a:avLst>
@@ -11150,8 +11997,8 @@
         </p:nvSpPr>
         <p:spPr>
           <a:xfrm>
-            <a:off x="868680" y="1307592"/>
-            <a:ext cx="4983480" cy="292608"/>
+            <a:off x="868680" y="1261872"/>
+            <a:ext cx="10454335" cy="292608"/>
           </a:xfrm>
           <a:prstGeom prst="rect">
             <a:avLst/>
@@ -11165,15 +12012,15 @@
           <a:lstStyle/>
           <a:p>
             <a:pPr>
-              <a:defRPr sz="950" b="1">
-                <a:solidFill>
-                  <a:srgbClr val="0EA5E9"/>
+              <a:defRPr sz="1050" b="1">
+                <a:solidFill>
+                  <a:srgbClr val="34D399"/>
                 </a:solidFill>
                 <a:latin typeface="Consolas"/>
               </a:defRPr>
             </a:pPr>
             <a:r>
-              <a:t>&gt;_  Host Console C CLI (rdm6300_manager.exe)</a:t>
+              <a:t>&gt;_  tb/tb_uart_ping.v [Mã Nguồn Testbench &amp; Nhật Ký Mô Phỏng Vivado XSim]</a:t>
             </a:r>
           </a:p>
         </p:txBody>
@@ -11186,8 +12033,8 @@
         </p:nvSpPr>
         <p:spPr>
           <a:xfrm>
-            <a:off x="868680" y="1600200"/>
-            <a:ext cx="4983480" cy="4315968"/>
+            <a:off x="868680" y="1554480"/>
+            <a:ext cx="10454335" cy="4407408"/>
           </a:xfrm>
           <a:prstGeom prst="rect">
             <a:avLst/>
@@ -11202,31 +12049,31 @@
           <a:p>
             <a:pPr>
               <a:lnSpc>
-                <a:spcPct val="118000"/>
+                <a:spcPct val="100000"/>
               </a:lnSpc>
               <a:spcAft>
                 <a:spcPts val="0"/>
               </a:spcAft>
-              <a:defRPr sz="880">
-                <a:solidFill>
-                  <a:srgbClr val="FFFFFF"/>
+              <a:defRPr sz="1150">
+                <a:solidFill>
+                  <a:srgbClr val="94A3B8"/>
                 </a:solidFill>
                 <a:latin typeface="Consolas"/>
               </a:defRPr>
             </a:pPr>
             <a:r>
-              <a:t>===========================================================</a:t>
+              <a:t>// === tb/tb_uart_ping.v: KỊCH BẢN KIỂM THỬ TÍCH HỢP TOÀN DIỆN TOP SOC ===</a:t>
             </a:r>
           </a:p>
           <a:p>
             <a:pPr>
               <a:lnSpc>
-                <a:spcPct val="118000"/>
+                <a:spcPct val="100000"/>
               </a:lnSpc>
               <a:spcAft>
                 <a:spcPts val="0"/>
               </a:spcAft>
-              <a:defRPr sz="880">
+              <a:defRPr sz="1150">
                 <a:solidFill>
                   <a:srgbClr val="FFFFFF"/>
                 </a:solidFill>
@@ -11234,18 +12081,18 @@
               </a:defRPr>
             </a:pPr>
             <a:r>
-              <a:t>    RDM6300 RFID - PICORV32 - BASYS 3 SPI FLASH MANAGER    </a:t>
+              <a:t>initial begin</a:t>
             </a:r>
           </a:p>
           <a:p>
             <a:pPr>
               <a:lnSpc>
-                <a:spcPct val="118000"/>
+                <a:spcPct val="100000"/>
               </a:lnSpc>
               <a:spcAft>
                 <a:spcPts val="0"/>
               </a:spcAft>
-              <a:defRPr sz="880">
+              <a:defRPr sz="1150">
                 <a:solidFill>
                   <a:srgbClr val="FFFFFF"/>
                 </a:solidFill>
@@ -11253,37 +12100,37 @@
               </a:defRPr>
             </a:pPr>
             <a:r>
-              <a:t>===========================================================</a:t>
+              <a:t>    clk = 0; rst_n = 0; rdm6300_rx_i = 1; uart_rx_i = 1;</a:t>
             </a:r>
           </a:p>
           <a:p>
             <a:pPr>
               <a:lnSpc>
-                <a:spcPct val="118000"/>
+                <a:spcPct val="100000"/>
               </a:lnSpc>
               <a:spcAft>
                 <a:spcPts val="0"/>
               </a:spcAft>
-              <a:defRPr sz="880">
-                <a:solidFill>
-                  <a:srgbClr val="FFFFFF"/>
+              <a:defRPr sz="1150">
+                <a:solidFill>
+                  <a:srgbClr val="94A3B8"/>
                 </a:solidFill>
                 <a:latin typeface="Consolas"/>
               </a:defRPr>
             </a:pPr>
             <a:r>
-              <a:t>  [1]  Ping Hardware (Kiem tra ket noi PicoRV32)</a:t>
+              <a:t>    #200; rst_n = 1;                 // Giải phóng Reset ➔ CPU thức dậy &amp; Boot Flash 0x250000</a:t>
             </a:r>
           </a:p>
           <a:p>
             <a:pPr>
               <a:lnSpc>
-                <a:spcPct val="118000"/>
+                <a:spcPct val="100000"/>
               </a:lnSpc>
               <a:spcAft>
                 <a:spcPts val="0"/>
               </a:spcAft>
-              <a:defRPr sz="880">
+              <a:defRPr sz="1150">
                 <a:solidFill>
                   <a:srgbClr val="FFFFFF"/>
                 </a:solidFill>
@@ -11291,37 +12138,37 @@
               </a:defRPr>
             </a:pPr>
             <a:r>
-              <a:t>  [2]  Input &amp; Save New RFID Tag (Nhap 10 so in tren the)</a:t>
+              <a:t>    wait(ready_matched == 1'b1);     // Đợi CPU PicoRV32 thực thi xong Banner C</a:t>
             </a:r>
           </a:p>
           <a:p>
             <a:pPr>
               <a:lnSpc>
-                <a:spcPct val="118000"/>
+                <a:spcPct val="100000"/>
               </a:lnSpc>
               <a:spcAft>
                 <a:spcPts val="0"/>
               </a:spcAft>
-              <a:defRPr sz="880">
-                <a:solidFill>
-                  <a:srgbClr val="FFFFFF"/>
+              <a:defRPr sz="1150">
+                <a:solidFill>
+                  <a:srgbClr val="94A3B8"/>
                 </a:solidFill>
                 <a:latin typeface="Consolas"/>
               </a:defRPr>
             </a:pPr>
             <a:r>
-              <a:t>  [3]  Check RFID Tag in Flash (Kiem tra the da co chua)</a:t>
+              <a:t>    #100000; send_pc_byte("P");      // Host PC gửi byte lệnh Ping ('P' = 0x50)</a:t>
             </a:r>
           </a:p>
           <a:p>
             <a:pPr>
               <a:lnSpc>
-                <a:spcPct val="118000"/>
+                <a:spcPct val="100000"/>
               </a:lnSpc>
               <a:spcAft>
                 <a:spcPts val="0"/>
               </a:spcAft>
-              <a:defRPr sz="880">
+              <a:defRPr sz="1150">
                 <a:solidFill>
                   <a:srgbClr val="FFFFFF"/>
                 </a:solidFill>
@@ -11329,18 +12176,18 @@
               </a:defRPr>
             </a:pPr>
             <a:r>
-              <a:t>  [4]  Delete RFID Tag from Flash (Xoa the khoi Flash)</a:t>
+              <a:t>    send_pc_byte(8'h0A);             // Gửi ký tự kết thúc dòng '\n' (0x0A)</a:t>
             </a:r>
           </a:p>
           <a:p>
             <a:pPr>
               <a:lnSpc>
-                <a:spcPct val="118000"/>
+                <a:spcPct val="100000"/>
               </a:lnSpc>
               <a:spcAft>
                 <a:spcPts val="0"/>
               </a:spcAft>
-              <a:defRPr sz="880">
+              <a:defRPr sz="1150">
                 <a:solidFill>
                   <a:srgbClr val="FFFFFF"/>
                 </a:solidFill>
@@ -11348,37 +12195,37 @@
               </a:defRPr>
             </a:pPr>
             <a:r>
-              <a:t>  [5]  Virtual Scan (Quet the ao: Nhap 10 so tu ban phim)</a:t>
+              <a:t>    wait(pong_matched == 1'b1);      // Đợi CPU nhận diện và phản hồi chuỗi PONG</a:t>
             </a:r>
           </a:p>
           <a:p>
             <a:pPr>
               <a:lnSpc>
-                <a:spcPct val="118000"/>
+                <a:spcPct val="100000"/>
               </a:lnSpc>
               <a:spcAft>
                 <a:spcPts val="0"/>
               </a:spcAft>
-              <a:defRPr sz="880">
-                <a:solidFill>
-                  <a:srgbClr val="FFFFFF"/>
+              <a:defRPr sz="1150" b="1">
+                <a:solidFill>
+                  <a:srgbClr val="10B981"/>
                 </a:solidFill>
                 <a:latin typeface="Consolas"/>
               </a:defRPr>
             </a:pPr>
             <a:r>
-              <a:t>  [6]  View Access Logs (Xem 512 nhat ky tu Flash 0x310000)</a:t>
+              <a:t>    if (pong_matched &amp;&amp; !cpu_trap)   $display("  [SUCCESS] PING-PONG TEST PASSED!");</a:t>
             </a:r>
           </a:p>
           <a:p>
             <a:pPr>
               <a:lnSpc>
-                <a:spcPct val="118000"/>
+                <a:spcPct val="100000"/>
               </a:lnSpc>
               <a:spcAft>
                 <a:spcPts val="0"/>
               </a:spcAft>
-              <a:defRPr sz="880">
+              <a:defRPr sz="1150">
                 <a:solidFill>
                   <a:srgbClr val="FFFFFF"/>
                 </a:solidFill>
@@ -11386,94 +12233,224 @@
               </a:defRPr>
             </a:pPr>
             <a:r>
-              <a:t>  [7]  Erase Access Logs (Backup CSV &amp; xoa nhat ky Flash)</a:t>
+              <a:t>end</a:t>
             </a:r>
           </a:p>
           <a:p>
             <a:pPr>
               <a:lnSpc>
-                <a:spcPct val="118000"/>
+                <a:spcPct val="100000"/>
               </a:lnSpc>
               <a:spcAft>
                 <a:spcPts val="0"/>
               </a:spcAft>
-              <a:defRPr sz="880">
+              <a:defRPr sz="1150">
                 <a:solidFill>
                   <a:srgbClr val="FFFFFF"/>
                 </a:solidFill>
                 <a:latin typeface="Consolas"/>
               </a:defRPr>
             </a:pPr>
-            <a:r>
-              <a:t>  [8]  Export RFID Tags to CSV (Xuat danh sach ra file CSV)</a:t>
-            </a:r>
           </a:p>
           <a:p>
             <a:pPr>
               <a:lnSpc>
-                <a:spcPct val="118000"/>
+                <a:spcPct val="100000"/>
               </a:lnSpc>
               <a:spcAft>
                 <a:spcPts val="0"/>
               </a:spcAft>
-              <a:defRPr sz="880">
-                <a:solidFill>
-                  <a:srgbClr val="FFFFFF"/>
+              <a:defRPr sz="1150">
+                <a:solidFill>
+                  <a:srgbClr val="94A3B8"/>
                 </a:solidFill>
                 <a:latin typeface="Consolas"/>
               </a:defRPr>
             </a:pPr>
             <a:r>
-              <a:t>  [9]  Import RFID Tags from CSV (Xoa &amp; nap the tu CSV)</a:t>
+              <a:t>// === VIVADO SIMULATOR (XSIM) EXECUTION OUTPUT LOG ===</a:t>
             </a:r>
           </a:p>
           <a:p>
             <a:pPr>
               <a:lnSpc>
-                <a:spcPct val="118000"/>
+                <a:spcPct val="100000"/>
               </a:lnSpc>
               <a:spcAft>
                 <a:spcPts val="0"/>
               </a:spcAft>
-              <a:defRPr sz="880">
-                <a:solidFill>
-                  <a:srgbClr val="FFFFFF"/>
+              <a:defRPr sz="1150" b="1">
+                <a:solidFill>
+                  <a:srgbClr val="0EA5E9"/>
                 </a:solidFill>
                 <a:latin typeface="Consolas"/>
               </a:defRPr>
             </a:pPr>
             <a:r>
-              <a:t>  [0]  Exit (Ngat ket noi UART va thoat chuong trinh)</a:t>
+              <a:t>[FLASH MODEL] Loaded 2048 words (8192 bytes) from firmware.hex</a:t>
             </a:r>
           </a:p>
           <a:p>
             <a:pPr>
               <a:lnSpc>
-                <a:spcPct val="118000"/>
+                <a:spcPct val="100000"/>
               </a:lnSpc>
               <a:spcAft>
                 <a:spcPts val="0"/>
               </a:spcAft>
-              <a:defRPr sz="880">
-                <a:solidFill>
-                  <a:srgbClr val="FFFFFF"/>
+              <a:defRPr sz="1150" b="1">
+                <a:solidFill>
+                  <a:srgbClr val="0EA5E9"/>
                 </a:solidFill>
                 <a:latin typeface="Consolas"/>
               </a:defRPr>
             </a:pPr>
             <a:r>
-              <a:t>-----------------------------------------------------------</a:t>
+              <a:t>[TB] System Reset released. PicoRV32 booting from 0x250000...</a:t>
             </a:r>
           </a:p>
           <a:p>
             <a:pPr>
               <a:lnSpc>
-                <a:spcPct val="118000"/>
+                <a:spcPct val="100000"/>
               </a:lnSpc>
               <a:spcAft>
                 <a:spcPts val="0"/>
               </a:spcAft>
-              <a:defRPr sz="880">
+              <a:defRPr sz="1150" b="1">
+                <a:solidFill>
+                  <a:srgbClr val="0EA5E9"/>
+                </a:solidFill>
+                <a:latin typeface="Consolas"/>
+              </a:defRPr>
+            </a:pPr>
+            <a:r>
+              <a:t>[UART TX] ========================================================================</a:t>
+            </a:r>
+          </a:p>
+          <a:p>
+            <a:pPr>
+              <a:lnSpc>
+                <a:spcPct val="100000"/>
+              </a:lnSpc>
+              <a:spcAft>
+                <a:spcPts val="0"/>
+              </a:spcAft>
+              <a:defRPr sz="1150" b="1">
+                <a:solidFill>
+                  <a:srgbClr val="0EA5E9"/>
+                </a:solidFill>
+                <a:latin typeface="Consolas"/>
+              </a:defRPr>
+            </a:pPr>
+            <a:r>
+              <a:t>[UART TX]            RDM6300 PICORV32 SOC ACCESS CONTROLLER READY                 </a:t>
+            </a:r>
+          </a:p>
+          <a:p>
+            <a:pPr>
+              <a:lnSpc>
+                <a:spcPct val="100000"/>
+              </a:lnSpc>
+              <a:spcAft>
+                <a:spcPts val="0"/>
+              </a:spcAft>
+              <a:defRPr sz="1150" b="1">
+                <a:solidFill>
+                  <a:srgbClr val="0EA5E9"/>
+                </a:solidFill>
+                <a:latin typeface="Consolas"/>
+              </a:defRPr>
+            </a:pPr>
+            <a:r>
+              <a:t>[UART TX] ========================================================================</a:t>
+            </a:r>
+          </a:p>
+          <a:p>
+            <a:pPr>
+              <a:lnSpc>
+                <a:spcPct val="100000"/>
+              </a:lnSpc>
+              <a:spcAft>
+                <a:spcPts val="0"/>
+              </a:spcAft>
+              <a:defRPr sz="1150" b="1">
+                <a:solidFill>
+                  <a:srgbClr val="0EA5E9"/>
+                </a:solidFill>
+                <a:latin typeface="Consolas"/>
+              </a:defRPr>
+            </a:pPr>
+            <a:r>
+              <a:t>[TB] Boot banner detected! Sending 'P' (Ping) command to SoC...</a:t>
+            </a:r>
+          </a:p>
+          <a:p>
+            <a:pPr>
+              <a:lnSpc>
+                <a:spcPct val="100000"/>
+              </a:lnSpc>
+              <a:spcAft>
+                <a:spcPts val="0"/>
+              </a:spcAft>
+              <a:defRPr sz="1150" b="1">
+                <a:solidFill>
+                  <a:srgbClr val="0EA5E9"/>
+                </a:solidFill>
+                <a:latin typeface="Consolas"/>
+              </a:defRPr>
+            </a:pPr>
+            <a:r>
+              <a:t>[HOST -&gt; SOC] Sent Byte: 'P' (0x50), '\n' (0x0A)</a:t>
+            </a:r>
+          </a:p>
+          <a:p>
+            <a:pPr>
+              <a:lnSpc>
+                <a:spcPct val="100000"/>
+              </a:lnSpc>
+              <a:spcAft>
+                <a:spcPts val="0"/>
+              </a:spcAft>
+              <a:defRPr sz="1150" b="1">
+                <a:solidFill>
+                  <a:srgbClr val="0EA5E9"/>
+                </a:solidFill>
+                <a:latin typeface="Consolas"/>
+              </a:defRPr>
+            </a:pPr>
+            <a:r>
+              <a:t>[UART TX] PONG: PicoRV32 Active</a:t>
+            </a:r>
+          </a:p>
+          <a:p>
+            <a:pPr>
+              <a:lnSpc>
+                <a:spcPct val="100000"/>
+              </a:lnSpc>
+              <a:spcAft>
+                <a:spcPts val="0"/>
+              </a:spcAft>
+              <a:defRPr sz="1150" b="1">
+                <a:solidFill>
+                  <a:srgbClr val="10B981"/>
+                </a:solidFill>
+                <a:latin typeface="Consolas"/>
+              </a:defRPr>
+            </a:pPr>
+            <a:r>
+              <a:t>[SUCCESS] PING-PONG TEST PASSED! PicoRV32 responded with PONG.</a:t>
+            </a:r>
+          </a:p>
+          <a:p>
+            <a:pPr>
+              <a:lnSpc>
+                <a:spcPct val="100000"/>
+              </a:lnSpc>
+              <a:spcAft>
+                <a:spcPts val="0"/>
+              </a:spcAft>
+              <a:defRPr sz="1150">
                 <a:solidFill>
                   <a:srgbClr val="FFFFFF"/>
                 </a:solidFill>
@@ -11481,7 +12458,7 @@
               </a:defRPr>
             </a:pPr>
             <a:r>
-              <a:t>Lua chon cua ban [0-9]: _</a:t>
+              <a:t>cpu_trap = 0 (CPU healthy, no illegal instructions, no stack overflow)</a:t>
             </a:r>
           </a:p>
         </p:txBody>
@@ -11494,8 +12471,8 @@
         </p:nvSpPr>
         <p:spPr>
           <a:xfrm>
-            <a:off x="868680" y="5879592"/>
-            <a:ext cx="4983480" cy="274320"/>
+            <a:off x="868680" y="5925312"/>
+            <a:ext cx="10454335" cy="274320"/>
           </a:xfrm>
           <a:prstGeom prst="rect">
             <a:avLst/>
@@ -11509,7 +12486,7 @@
           <a:lstStyle/>
           <a:p>
             <a:pPr>
-              <a:defRPr sz="819" b="1">
+              <a:defRPr sz="950" b="1">
                 <a:solidFill>
                   <a:srgbClr val="10B981"/>
                 </a:solidFill>
@@ -11517,302 +12494,7 @@
               </a:defRPr>
             </a:pPr>
             <a:r>
-              <a:t>=== UART COM3 @ 9600 bps | 10 CHỨC NĂNG QUẢN TRỊ TOÀN DIỆN ===</a:t>
-            </a:r>
-          </a:p>
-        </p:txBody>
-      </p:sp>
-      <p:sp>
-        <p:nvSpPr>
-          <p:cNvPr id="12" name="Rounded Rectangle 11"/>
-          <p:cNvSpPr/>
-          <p:nvPr/>
-        </p:nvSpPr>
-        <p:spPr>
-          <a:xfrm>
-            <a:off x="6172200" y="1234440"/>
-            <a:ext cx="5285232" cy="5029200"/>
-          </a:xfrm>
-          <a:prstGeom prst="roundRect">
-            <a:avLst>
-              <a:gd name="adj" fmla="val 2000"/>
-            </a:avLst>
-          </a:prstGeom>
-          <a:solidFill>
-            <a:srgbClr val="FFFFFF"/>
-          </a:solidFill>
-          <a:ln w="19050">
-            <a:solidFill>
-              <a:srgbClr val="2563EB"/>
-            </a:solidFill>
-          </a:ln>
-        </p:spPr>
-        <p:style>
-          <a:lnRef idx="1">
-            <a:schemeClr val="accent1"/>
-          </a:lnRef>
-          <a:fillRef idx="3">
-            <a:schemeClr val="accent1"/>
-          </a:fillRef>
-          <a:effectRef idx="2">
-            <a:schemeClr val="accent1"/>
-          </a:effectRef>
-          <a:fontRef idx="minor">
-            <a:schemeClr val="lt1"/>
-          </a:fontRef>
-        </p:style>
-        <p:txBody>
-          <a:bodyPr rtlCol="0" anchor="ctr"/>
-          <a:lstStyle/>
-          <a:p>
-            <a:pPr algn="ctr"/>
-          </a:p>
-        </p:txBody>
-      </p:sp>
-      <p:sp>
-        <p:nvSpPr>
-          <p:cNvPr id="13" name="TextBox 12"/>
-          <p:cNvSpPr txBox="1"/>
-          <p:nvPr/>
-        </p:nvSpPr>
-        <p:spPr>
-          <a:xfrm>
-            <a:off x="6446520" y="1371600"/>
-            <a:ext cx="4800600" cy="4754880"/>
-          </a:xfrm>
-          <a:prstGeom prst="rect">
-            <a:avLst/>
-          </a:prstGeom>
-          <a:noFill/>
-        </p:spPr>
-        <p:txBody>
-          <a:bodyPr wrap="square" lIns="0" tIns="0" rIns="0" bIns="0">
-            <a:spAutoFit/>
-          </a:bodyPr>
-          <a:lstStyle/>
-          <a:p>
-            <a:pPr>
-              <a:spcAft>
-                <a:spcPts val="400"/>
-              </a:spcAft>
-              <a:defRPr b="1" sz="1150">
-                <a:solidFill>
-                  <a:srgbClr val="2563EB"/>
-                </a:solidFill>
-                <a:latin typeface="Segoe UI"/>
-              </a:defRPr>
-            </a:pPr>
-            <a:r>
-              <a:t>ĐÁNH GIÁ &amp; NHẬN XÉT CÁC CHỨC NĂNG THỰC NGHIỆM</a:t>
-            </a:r>
-          </a:p>
-          <a:p>
-            <a:pPr>
-              <a:spcBef>
-                <a:spcPts val="300"/>
-              </a:spcBef>
-              <a:spcAft>
-                <a:spcPts val="100"/>
-              </a:spcAft>
-              <a:defRPr sz="880" b="1">
-                <a:solidFill>
-                  <a:srgbClr val="2563EB"/>
-                </a:solidFill>
-                <a:latin typeface="Segoe UI"/>
-              </a:defRPr>
-            </a:pPr>
-            <a:r>
-              <a:t>1. NHÓM KIỂM THỬ KẾT NỐI &amp; GIÁM SÁT [MENU 1, 5]</a:t>
-            </a:r>
-          </a:p>
-          <a:p>
-            <a:pPr>
-              <a:lnSpc>
-                <a:spcPct val="110000"/>
-              </a:lnSpc>
-              <a:spcAft>
-                <a:spcPts val="150"/>
-              </a:spcAft>
-              <a:defRPr sz="780">
-                <a:solidFill>
-                  <a:srgbClr val="0F172A"/>
-                </a:solidFill>
-                <a:latin typeface="Segoe UI"/>
-              </a:defRPr>
-            </a:pPr>
-            <a:r>
-              <a:t>• Menu [1] Ping Hardware: Kiểm tra độ trễ phản hồi tức thì qua UART, xác nhận CPU PicoRV32, cầu bus interconnect và UART FIFO 32B hoạt động thông suốt không nghẽn bus.</a:t>
-            </a:r>
-          </a:p>
-          <a:p>
-            <a:pPr>
-              <a:lnSpc>
-                <a:spcPct val="110000"/>
-              </a:lnSpc>
-              <a:spcAft>
-                <a:spcPts val="150"/>
-              </a:spcAft>
-              <a:defRPr sz="780">
-                <a:solidFill>
-                  <a:srgbClr val="0F172A"/>
-                </a:solidFill>
-                <a:latin typeface="Segoe UI"/>
-              </a:defRPr>
-            </a:pPr>
-            <a:r>
-              <a:t>• Menu [5] Virtual Scan: Giả lập quẹt thẻ từ xa qua bàn phím mà không cần đưa thẻ vật lý vào đầu đọc, phục vụ kiểm thử đơn vị (Unit Test) logic phân quyền.</a:t>
-            </a:r>
-          </a:p>
-          <a:p>
-            <a:pPr>
-              <a:spcBef>
-                <a:spcPts val="300"/>
-              </a:spcBef>
-              <a:spcAft>
-                <a:spcPts val="100"/>
-              </a:spcAft>
-              <a:defRPr sz="880" b="1">
-                <a:solidFill>
-                  <a:srgbClr val="D97706"/>
-                </a:solidFill>
-                <a:latin typeface="Segoe UI"/>
-              </a:defRPr>
-            </a:pPr>
-            <a:r>
-              <a:t>2. NHÓM QUẢN TRỊ WHITELIST THẺ [MENU 2, 3, 4]</a:t>
-            </a:r>
-          </a:p>
-          <a:p>
-            <a:pPr>
-              <a:lnSpc>
-                <a:spcPct val="110000"/>
-              </a:lnSpc>
-              <a:spcAft>
-                <a:spcPts val="150"/>
-              </a:spcAft>
-              <a:defRPr sz="780">
-                <a:solidFill>
-                  <a:srgbClr val="0F172A"/>
-                </a:solidFill>
-                <a:latin typeface="Segoe UI"/>
-              </a:defRPr>
-            </a:pPr>
-            <a:r>
-              <a:t>• Menu [2] &amp; [4] Thêm/Xóa Thẻ: Thao tác an toàn trên Flash Sector 48 (0x300000) bằng cơ chế In-SRAM Execution (flashio_worker), bảo đảm không gây treo bus XIP.</a:t>
-            </a:r>
-          </a:p>
-          <a:p>
-            <a:pPr>
-              <a:lnSpc>
-                <a:spcPct val="110000"/>
-              </a:lnSpc>
-              <a:spcAft>
-                <a:spcPts val="150"/>
-              </a:spcAft>
-              <a:defRPr sz="780">
-                <a:solidFill>
-                  <a:srgbClr val="0F172A"/>
-                </a:solidFill>
-                <a:latin typeface="Segoe UI"/>
-              </a:defRPr>
-            </a:pPr>
-            <a:r>
-              <a:t>• Menu [3] Tra Cứu Thẻ: Đọc trực tiếp từ Flash qua XIP với thuật toán dừng sớm (Early Termination), độ trễ xác thực siêu nhỏ (&lt; 10 µs).</a:t>
-            </a:r>
-          </a:p>
-          <a:p>
-            <a:pPr>
-              <a:spcBef>
-                <a:spcPts val="300"/>
-              </a:spcBef>
-              <a:spcAft>
-                <a:spcPts val="100"/>
-              </a:spcAft>
-              <a:defRPr sz="880" b="1">
-                <a:solidFill>
-                  <a:srgbClr val="E11D48"/>
-                </a:solidFill>
-                <a:latin typeface="Segoe UI"/>
-              </a:defRPr>
-            </a:pPr>
-            <a:r>
-              <a:t>3. NHÓM KIỂM TOÁN AN NINH &amp; NHẬT KÝ [MENU 6, 7]</a:t>
-            </a:r>
-          </a:p>
-          <a:p>
-            <a:pPr>
-              <a:lnSpc>
-                <a:spcPct val="110000"/>
-              </a:lnSpc>
-              <a:spcAft>
-                <a:spcPts val="150"/>
-              </a:spcAft>
-              <a:defRPr sz="780">
-                <a:solidFill>
-                  <a:srgbClr val="0F172A"/>
-                </a:solidFill>
-                <a:latin typeface="Segoe UI"/>
-              </a:defRPr>
-            </a:pPr>
-            <a:r>
-              <a:t>• Menu [6] Đọc Access Logs: Đọc và giải mã 512 bản ghi từ Sector 49 (0x310000), hiển thị rõ ràng kết quả PASS/FAIL, UID thẻ và số thứ tự sự kiện.</a:t>
-            </a:r>
-          </a:p>
-          <a:p>
-            <a:pPr>
-              <a:lnSpc>
-                <a:spcPct val="110000"/>
-              </a:lnSpc>
-              <a:spcAft>
-                <a:spcPts val="150"/>
-              </a:spcAft>
-              <a:defRPr sz="780">
-                <a:solidFill>
-                  <a:srgbClr val="0F172A"/>
-                </a:solidFill>
-                <a:latin typeface="Segoe UI"/>
-              </a:defRPr>
-            </a:pPr>
-            <a:r>
-              <a:t>• Menu [7] Xóa Log An Toàn: Tự động sao lưu toàn bộ nhật ký ra file CSV trước khi xóa Sector, đảm bảo không mất mát dữ liệu kiểm toán.</a:t>
-            </a:r>
-          </a:p>
-          <a:p>
-            <a:pPr>
-              <a:spcBef>
-                <a:spcPts val="300"/>
-              </a:spcBef>
-              <a:spcAft>
-                <a:spcPts val="100"/>
-              </a:spcAft>
-              <a:defRPr sz="880" b="1">
-                <a:solidFill>
-                  <a:srgbClr val="10B981"/>
-                </a:solidFill>
-                <a:latin typeface="Segoe UI"/>
-              </a:defRPr>
-            </a:pPr>
-            <a:r>
-              <a:t>4. NHÓM ĐỒNG BỘ DỮ LIỆU NGOẠI TUYẾN [MENU 8, 9]</a:t>
-            </a:r>
-          </a:p>
-          <a:p>
-            <a:pPr>
-              <a:lnSpc>
-                <a:spcPct val="110000"/>
-              </a:lnSpc>
-              <a:spcAft>
-                <a:spcPts val="150"/>
-              </a:spcAft>
-              <a:defRPr sz="780">
-                <a:solidFill>
-                  <a:srgbClr val="0F172A"/>
-                </a:solidFill>
-                <a:latin typeface="Segoe UI"/>
-              </a:defRPr>
-            </a:pPr>
-            <a:r>
-              <a:t>• Menu [8] &amp; [9] Export/Import CSV: Sao lưu và phục hồi danh sách 4,096 thẻ nhanh chóng qua cổng UART, rất tiện lợi khi cấu hình hàng loạt cho nhiều trạm kiểm soát.</a:t>
+              <a:t>=== XÁC NHẬN: BOOT FLASH XIP + UART PING-PONG 100% PASS | RUNTIME: 2,086.555 µs | TRAP = 0 ===</a:t>
             </a:r>
           </a:p>
         </p:txBody>
@@ -11955,7 +12637,7 @@
               </a:defRPr>
             </a:pPr>
             <a:r>
-              <a:t>PHẦN 6: THIẾT KẾ VẬT LÝ ASIC</a:t>
+              <a:t>PHẦN 5: DEMO CHỨC NĂNG SẢN PHẨM</a:t>
             </a:r>
           </a:p>
           <a:p>
@@ -11968,7 +12650,7 @@
               </a:defRPr>
             </a:pPr>
             <a:r>
-              <a:t>Minh Chứng Ký Duyệt Sign-off, Bản Vẽ OpenROAD &amp; Cấu Hình OpenLane</a:t>
+              <a:t>Danh Sách Thiết Bị &amp; Thiết Lập Kết Nối Phần Cứng FPGA Basys 3</a:t>
             </a:r>
           </a:p>
         </p:txBody>
@@ -12083,7 +12765,7 @@
               </a:defRPr>
             </a:pPr>
             <a:r>
-              <a:t>09 / 12</a:t>
+              <a:t>09 / 13</a:t>
             </a:r>
           </a:p>
         </p:txBody>
@@ -12097,360 +12779,7 @@
         <p:spPr>
           <a:xfrm>
             <a:off x="731520" y="1188720"/>
-            <a:ext cx="5120640" cy="3291840"/>
-          </a:xfrm>
-          <a:prstGeom prst="roundRect">
-            <a:avLst>
-              <a:gd name="adj" fmla="val 2000"/>
-            </a:avLst>
-          </a:prstGeom>
-          <a:solidFill>
-            <a:srgbClr val="0B132B"/>
-          </a:solidFill>
-          <a:ln w="19050">
-            <a:solidFill>
-              <a:srgbClr val="1C2541"/>
-            </a:solidFill>
-          </a:ln>
-        </p:spPr>
-        <p:style>
-          <a:lnRef idx="1">
-            <a:schemeClr val="accent1"/>
-          </a:lnRef>
-          <a:fillRef idx="3">
-            <a:schemeClr val="accent1"/>
-          </a:fillRef>
-          <a:effectRef idx="2">
-            <a:schemeClr val="accent1"/>
-          </a:effectRef>
-          <a:fontRef idx="minor">
-            <a:schemeClr val="lt1"/>
-          </a:fontRef>
-        </p:style>
-        <p:txBody>
-          <a:bodyPr rtlCol="0" anchor="ctr"/>
-          <a:lstStyle/>
-          <a:p>
-            <a:pPr algn="ctr"/>
-          </a:p>
-        </p:txBody>
-      </p:sp>
-      <p:sp>
-        <p:nvSpPr>
-          <p:cNvPr id="9" name="TextBox 8"/>
-          <p:cNvSpPr txBox="1"/>
-          <p:nvPr/>
-        </p:nvSpPr>
-        <p:spPr>
-          <a:xfrm>
-            <a:off x="868680" y="1261872"/>
-            <a:ext cx="4846320" cy="292608"/>
-          </a:xfrm>
-          <a:prstGeom prst="rect">
-            <a:avLst/>
-          </a:prstGeom>
-          <a:noFill/>
-        </p:spPr>
-        <p:txBody>
-          <a:bodyPr wrap="none" lIns="0" tIns="0" rIns="0" bIns="0">
-            <a:spAutoFit/>
-          </a:bodyPr>
-          <a:lstStyle/>
-          <a:p>
-            <a:pPr>
-              <a:defRPr sz="950" b="1">
-                <a:solidFill>
-                  <a:srgbClr val="0EA5E9"/>
-                </a:solidFill>
-                <a:latin typeface="Consolas"/>
-              </a:defRPr>
-            </a:pPr>
-            <a:r>
-              <a:t>&gt;_  Cấu hình OpenLane (config.json)</a:t>
-            </a:r>
-          </a:p>
-        </p:txBody>
-      </p:sp>
-      <p:sp>
-        <p:nvSpPr>
-          <p:cNvPr id="10" name="TextBox 9"/>
-          <p:cNvSpPr txBox="1"/>
-          <p:nvPr/>
-        </p:nvSpPr>
-        <p:spPr>
-          <a:xfrm>
-            <a:off x="868680" y="1554480"/>
-            <a:ext cx="4846320" cy="2880360"/>
-          </a:xfrm>
-          <a:prstGeom prst="rect">
-            <a:avLst/>
-          </a:prstGeom>
-          <a:noFill/>
-        </p:spPr>
-        <p:txBody>
-          <a:bodyPr wrap="square" lIns="0" tIns="0" rIns="0" bIns="0">
-            <a:spAutoFit/>
-          </a:bodyPr>
-          <a:lstStyle/>
-          <a:p>
-            <a:pPr>
-              <a:lnSpc>
-                <a:spcPct val="108000"/>
-              </a:lnSpc>
-              <a:spcAft>
-                <a:spcPts val="0"/>
-              </a:spcAft>
-              <a:defRPr sz="819">
-                <a:solidFill>
-                  <a:srgbClr val="FFFFFF"/>
-                </a:solidFill>
-                <a:latin typeface="Consolas"/>
-              </a:defRPr>
-            </a:pPr>
-            <a:r>
-              <a:t>{</a:t>
-            </a:r>
-          </a:p>
-          <a:p>
-            <a:pPr>
-              <a:lnSpc>
-                <a:spcPct val="108000"/>
-              </a:lnSpc>
-              <a:spcAft>
-                <a:spcPts val="0"/>
-              </a:spcAft>
-              <a:defRPr sz="819">
-                <a:solidFill>
-                  <a:srgbClr val="FFFFFF"/>
-                </a:solidFill>
-                <a:latin typeface="Consolas"/>
-              </a:defRPr>
-            </a:pPr>
-            <a:r>
-              <a:t>  "DESIGN_NAME": "rdm6300_picorv32_soc",</a:t>
-            </a:r>
-          </a:p>
-          <a:p>
-            <a:pPr>
-              <a:lnSpc>
-                <a:spcPct val="108000"/>
-              </a:lnSpc>
-              <a:spcAft>
-                <a:spcPts val="0"/>
-              </a:spcAft>
-              <a:defRPr sz="819">
-                <a:solidFill>
-                  <a:srgbClr val="FFFFFF"/>
-                </a:solidFill>
-                <a:latin typeface="Consolas"/>
-              </a:defRPr>
-            </a:pPr>
-            <a:r>
-              <a:t>  "PDK": "sky130A",  "STD_CELL_LIBRARY": "sky130_fd_sc_hd",</a:t>
-            </a:r>
-          </a:p>
-          <a:p>
-            <a:pPr>
-              <a:lnSpc>
-                <a:spcPct val="108000"/>
-              </a:lnSpc>
-              <a:spcAft>
-                <a:spcPts val="0"/>
-              </a:spcAft>
-              <a:defRPr sz="819">
-                <a:solidFill>
-                  <a:srgbClr val="FFFFFF"/>
-                </a:solidFill>
-                <a:latin typeface="Consolas"/>
-              </a:defRPr>
-            </a:pPr>
-            <a:r>
-              <a:t>  "CLOCK_PERIOD": 20.0, // 50 MHz Clock</a:t>
-            </a:r>
-          </a:p>
-          <a:p>
-            <a:pPr>
-              <a:lnSpc>
-                <a:spcPct val="108000"/>
-              </a:lnSpc>
-              <a:spcAft>
-                <a:spcPts val="0"/>
-              </a:spcAft>
-              <a:defRPr sz="819">
-                <a:solidFill>
-                  <a:srgbClr val="FFFFFF"/>
-                </a:solidFill>
-                <a:latin typeface="Consolas"/>
-              </a:defRPr>
-            </a:pPr>
-            <a:r>
-              <a:t>  "FP_CORE_UTIL": 26,   // 26% Core Density</a:t>
-            </a:r>
-          </a:p>
-          <a:p>
-            <a:pPr>
-              <a:lnSpc>
-                <a:spcPct val="108000"/>
-              </a:lnSpc>
-              <a:spcAft>
-                <a:spcPts val="0"/>
-              </a:spcAft>
-              <a:defRPr sz="819">
-                <a:solidFill>
-                  <a:srgbClr val="FFFFFF"/>
-                </a:solidFill>
-                <a:latin typeface="Consolas"/>
-              </a:defRPr>
-            </a:pPr>
-            <a:r>
-              <a:t>  "MAX_FANOUT_CONSTRAINT": 12,</a:t>
-            </a:r>
-          </a:p>
-          <a:p>
-            <a:pPr>
-              <a:lnSpc>
-                <a:spcPct val="108000"/>
-              </a:lnSpc>
-              <a:spcAft>
-                <a:spcPts val="0"/>
-              </a:spcAft>
-              <a:defRPr sz="819">
-                <a:solidFill>
-                  <a:srgbClr val="FFFFFF"/>
-                </a:solidFill>
-                <a:latin typeface="Consolas"/>
-              </a:defRPr>
-            </a:pPr>
-            <a:r>
-              <a:t>  "PL_RESIZER_HOLD_SLACK_MARGIN": 0.6,</a:t>
-            </a:r>
-          </a:p>
-          <a:p>
-            <a:pPr>
-              <a:lnSpc>
-                <a:spcPct val="108000"/>
-              </a:lnSpc>
-              <a:spcAft>
-                <a:spcPts val="0"/>
-              </a:spcAft>
-              <a:defRPr sz="819">
-                <a:solidFill>
-                  <a:srgbClr val="FFFFFF"/>
-                </a:solidFill>
-                <a:latin typeface="Consolas"/>
-              </a:defRPr>
-            </a:pPr>
-            <a:r>
-              <a:t>  "RUN_HEURISTIC_DIODE_INSERTION": true,</a:t>
-            </a:r>
-          </a:p>
-          <a:p>
-            <a:pPr>
-              <a:lnSpc>
-                <a:spcPct val="108000"/>
-              </a:lnSpc>
-              <a:spcAft>
-                <a:spcPts val="0"/>
-              </a:spcAft>
-              <a:defRPr sz="819">
-                <a:solidFill>
-                  <a:srgbClr val="FFFFFF"/>
-                </a:solidFill>
-                <a:latin typeface="Consolas"/>
-              </a:defRPr>
-            </a:pPr>
-            <a:r>
-              <a:t>  "HEURISTIC_ANTENNA_THRESHOLD": 24,</a:t>
-            </a:r>
-          </a:p>
-          <a:p>
-            <a:pPr>
-              <a:lnSpc>
-                <a:spcPct val="108000"/>
-              </a:lnSpc>
-              <a:spcAft>
-                <a:spcPts val="0"/>
-              </a:spcAft>
-              <a:defRPr sz="819">
-                <a:solidFill>
-                  <a:srgbClr val="FFFFFF"/>
-                </a:solidFill>
-                <a:latin typeface="Consolas"/>
-              </a:defRPr>
-            </a:pPr>
-            <a:r>
-              <a:t>  "GRT_ANTENNA_ITERS": 35,</a:t>
-            </a:r>
-          </a:p>
-          <a:p>
-            <a:pPr>
-              <a:lnSpc>
-                <a:spcPct val="108000"/>
-              </a:lnSpc>
-              <a:spcAft>
-                <a:spcPts val="0"/>
-              </a:spcAft>
-              <a:defRPr sz="819">
-                <a:solidFill>
-                  <a:srgbClr val="FFFFFF"/>
-                </a:solidFill>
-                <a:latin typeface="Consolas"/>
-              </a:defRPr>
-            </a:pPr>
-            <a:r>
-              <a:t>  "RUN_ANTENNA_REPAIR": true,</a:t>
-            </a:r>
-          </a:p>
-          <a:p>
-            <a:pPr>
-              <a:lnSpc>
-                <a:spcPct val="108000"/>
-              </a:lnSpc>
-              <a:spcAft>
-                <a:spcPts val="0"/>
-              </a:spcAft>
-              <a:defRPr sz="819">
-                <a:solidFill>
-                  <a:srgbClr val="FFFFFF"/>
-                </a:solidFill>
-                <a:latin typeface="Consolas"/>
-              </a:defRPr>
-            </a:pPr>
-            <a:r>
-              <a:t>  "SYNTH_STRATEGY": "AREA 0"</a:t>
-            </a:r>
-          </a:p>
-          <a:p>
-            <a:pPr>
-              <a:lnSpc>
-                <a:spcPct val="108000"/>
-              </a:lnSpc>
-              <a:spcAft>
-                <a:spcPts val="0"/>
-              </a:spcAft>
-              <a:defRPr sz="819">
-                <a:solidFill>
-                  <a:srgbClr val="FFFFFF"/>
-                </a:solidFill>
-                <a:latin typeface="Consolas"/>
-              </a:defRPr>
-            </a:pPr>
-            <a:r>
-              <a:t>}</a:t>
-            </a:r>
-          </a:p>
-        </p:txBody>
-      </p:sp>
-      <p:sp>
-        <p:nvSpPr>
-          <p:cNvPr id="11" name="Rounded Rectangle 10"/>
-          <p:cNvSpPr/>
-          <p:nvPr/>
-        </p:nvSpPr>
-        <p:spPr>
-          <a:xfrm>
-            <a:off x="6080760" y="1188720"/>
-            <a:ext cx="5379415" cy="3291840"/>
+            <a:ext cx="5257800" cy="5120640"/>
           </a:xfrm>
           <a:prstGeom prst="roundRect">
             <a:avLst>
@@ -12490,14 +12819,14 @@
       </p:sp>
       <p:sp>
         <p:nvSpPr>
-          <p:cNvPr id="12" name="TextBox 11"/>
+          <p:cNvPr id="9" name="TextBox 8"/>
           <p:cNvSpPr txBox="1"/>
           <p:nvPr/>
         </p:nvSpPr>
         <p:spPr>
           <a:xfrm>
-            <a:off x="6263640" y="1261872"/>
-            <a:ext cx="5013655" cy="274320"/>
+            <a:off x="868680" y="1298448"/>
+            <a:ext cx="4983480" cy="292608"/>
           </a:xfrm>
           <a:prstGeom prst="rect">
             <a:avLst/>
@@ -12505,13 +12834,13 @@
           <a:noFill/>
         </p:spPr>
         <p:txBody>
-          <a:bodyPr wrap="none" lIns="0" tIns="0">
+          <a:bodyPr wrap="none" lIns="0" tIns="0" rIns="0" bIns="0">
             <a:spAutoFit/>
           </a:bodyPr>
           <a:lstStyle/>
           <a:p>
-            <a:pPr>
-              <a:defRPr sz="1050" b="1">
+            <a:pPr algn="ctr">
+              <a:defRPr sz="1300" b="1">
                 <a:solidFill>
                   <a:srgbClr val="2563EB"/>
                 </a:solidFill>
@@ -12519,14 +12848,14 @@
               </a:defRPr>
             </a:pPr>
             <a:r>
-              <a:t>🖼️ Bản Vẽ Layout OpenROAD (Die 1.87 mm² - 1362 x 1373 µm)</a:t>
+              <a:t>HỆ THỐNG THỰC NGHIỆM THỰC TẾ</a:t>
             </a:r>
           </a:p>
         </p:txBody>
       </p:sp>
       <p:pic>
         <p:nvPicPr>
-          <p:cNvPr id="13" name="Picture 12" descr="OpenROAD.png"/>
+          <p:cNvPr id="10" name="Picture 9" descr="Device.jpg"/>
           <p:cNvPicPr>
             <a:picLocks noChangeAspect="1"/>
           </p:cNvPicPr>
@@ -12540,8 +12869,8 @@
         </p:blipFill>
         <p:spPr>
           <a:xfrm>
-            <a:off x="6830568" y="1572768"/>
-            <a:ext cx="3886200" cy="2816352"/>
+            <a:off x="868680" y="1691640"/>
+            <a:ext cx="4983480" cy="3730752"/>
           </a:xfrm>
           <a:prstGeom prst="rect">
             <a:avLst/>
@@ -12550,14 +12879,53 @@
       </p:pic>
       <p:sp>
         <p:nvSpPr>
-          <p:cNvPr id="14" name="Rounded Rectangle 13"/>
+          <p:cNvPr id="11" name="TextBox 10"/>
+          <p:cNvSpPr txBox="1"/>
+          <p:nvPr/>
+        </p:nvSpPr>
+        <p:spPr>
+          <a:xfrm>
+            <a:off x="868680" y="5532120"/>
+            <a:ext cx="4983480" cy="685800"/>
+          </a:xfrm>
+          <a:prstGeom prst="rect">
+            <a:avLst/>
+          </a:prstGeom>
+          <a:noFill/>
+        </p:spPr>
+        <p:txBody>
+          <a:bodyPr wrap="square" lIns="0" tIns="0" rIns="0" bIns="0">
+            <a:spAutoFit/>
+          </a:bodyPr>
+          <a:lstStyle/>
+          <a:p>
+            <a:pPr algn="ctr">
+              <a:lnSpc>
+                <a:spcPct val="115000"/>
+              </a:lnSpc>
+              <a:defRPr sz="1100" i="1">
+                <a:solidFill>
+                  <a:srgbClr val="475569"/>
+                </a:solidFill>
+                <a:latin typeface="Segoe UI"/>
+              </a:defRPr>
+            </a:pPr>
+            <a:r>
+              <a:t>Nguồn 5V riêng cho RDM6300 (chung GND) • Trở 1kΩ nối tiếp TX ➔ JA1 bảo vệ I/O 3.3V</a:t>
+            </a:r>
+          </a:p>
+        </p:txBody>
+      </p:sp>
+      <p:sp>
+        <p:nvSpPr>
+          <p:cNvPr id="12" name="Rounded Rectangle 11"/>
           <p:cNvSpPr/>
           <p:nvPr/>
         </p:nvSpPr>
         <p:spPr>
           <a:xfrm>
-            <a:off x="731520" y="4617720"/>
-            <a:ext cx="10728655" cy="1691640"/>
+            <a:off x="6172200" y="1188720"/>
+            <a:ext cx="5285232" cy="5120640"/>
           </a:xfrm>
           <a:prstGeom prst="roundRect">
             <a:avLst>
@@ -12567,9 +12935,9 @@
           <a:solidFill>
             <a:srgbClr val="FFFFFF"/>
           </a:solidFill>
-          <a:ln w="25400">
+          <a:ln w="19050">
             <a:solidFill>
-              <a:srgbClr val="10B981"/>
+              <a:srgbClr val="2563EB"/>
             </a:solidFill>
           </a:ln>
         </p:spPr>
@@ -12595,40 +12963,16 @@
           </a:p>
         </p:txBody>
       </p:sp>
-      <p:pic>
-        <p:nvPicPr>
-          <p:cNvPr id="15" name="Picture 14" descr="AntennaLvsDrc.png"/>
-          <p:cNvPicPr>
-            <a:picLocks noChangeAspect="1"/>
-          </p:cNvPicPr>
-          <p:nvPr/>
-        </p:nvPicPr>
-        <p:blipFill>
-          <a:blip r:embed="rId3"/>
-          <a:stretch>
-            <a:fillRect/>
-          </a:stretch>
-        </p:blipFill>
-        <p:spPr>
-          <a:xfrm>
-            <a:off x="868680" y="4727448"/>
-            <a:ext cx="6309360" cy="1463040"/>
-          </a:xfrm>
-          <a:prstGeom prst="rect">
-            <a:avLst/>
-          </a:prstGeom>
-        </p:spPr>
-      </p:pic>
-      <p:sp>
-        <p:nvSpPr>
-          <p:cNvPr id="16" name="TextBox 15"/>
+      <p:sp>
+        <p:nvSpPr>
+          <p:cNvPr id="13" name="TextBox 12"/>
           <p:cNvSpPr txBox="1"/>
           <p:nvPr/>
         </p:nvSpPr>
         <p:spPr>
           <a:xfrm>
-            <a:off x="7360920" y="4709160"/>
-            <a:ext cx="3977639" cy="1508760"/>
+            <a:off x="6400800" y="1325880"/>
+            <a:ext cx="4828032" cy="4892040"/>
           </a:xfrm>
           <a:prstGeom prst="rect">
             <a:avLst/>
@@ -12643,28 +12987,25 @@
           <a:p>
             <a:pPr>
               <a:spcAft>
-                <a:spcPts val="400"/>
+                <a:spcPts val="1000"/>
               </a:spcAft>
-              <a:defRPr sz="1150" b="1">
-                <a:solidFill>
-                  <a:srgbClr val="10B981"/>
-                </a:solidFill>
-                <a:latin typeface="Segoe UI"/>
-              </a:defRPr>
-            </a:pPr>
-            <a:r>
-              <a:t>✅ KÝ DUYỆT TAPE-OUT READY (100% PASS)</a:t>
-            </a:r>
-          </a:p>
-          <a:p>
-            <a:pPr>
-              <a:lnSpc>
-                <a:spcPct val="110000"/>
-              </a:lnSpc>
-              <a:spcAft>
-                <a:spcPts val="150"/>
-              </a:spcAft>
-              <a:defRPr sz="850">
+              <a:defRPr b="1" sz="1500">
+                <a:solidFill>
+                  <a:srgbClr val="2563EB"/>
+                </a:solidFill>
+                <a:latin typeface="Segoe UI"/>
+              </a:defRPr>
+            </a:pPr>
+            <a:r>
+              <a:t>DANH SÁCH THIẾT BỊ THỰC NGHIỆM</a:t>
+            </a:r>
+          </a:p>
+          <a:p>
+            <a:pPr>
+              <a:spcBef>
+                <a:spcPts val="700"/>
+              </a:spcBef>
+              <a:defRPr sz="1500" b="1">
                 <a:solidFill>
                   <a:srgbClr val="0F172A"/>
                 </a:solidFill>
@@ -12672,18 +13013,28 @@
               </a:defRPr>
             </a:pPr>
             <a:r>
-              <a:t>• Antenna Sign-off: 0 vi phạm (3,471 diodes xả tĩnh điện bảo vệ oxit cổng)</a:t>
-            </a:r>
-          </a:p>
-          <a:p>
-            <a:pPr>
-              <a:lnSpc>
-                <a:spcPct val="110000"/>
-              </a:lnSpc>
-              <a:spcAft>
-                <a:spcPts val="150"/>
-              </a:spcAft>
-              <a:defRPr sz="850">
+              <a:t>1. Bo mạch FPGA Digilent Basys 3</a:t>
+            </a:r>
+          </a:p>
+          <a:p>
+            <a:pPr>
+              <a:defRPr sz="1250">
+                <a:solidFill>
+                  <a:srgbClr val="475569"/>
+                </a:solidFill>
+                <a:latin typeface="Segoe UI"/>
+              </a:defRPr>
+            </a:pPr>
+            <a:r>
+              <a:t>     Artix-7 XC7A35T, SPI Flash 32Mbit</a:t>
+            </a:r>
+          </a:p>
+          <a:p>
+            <a:pPr>
+              <a:spcBef>
+                <a:spcPts val="700"/>
+              </a:spcBef>
+              <a:defRPr sz="1500" b="1">
                 <a:solidFill>
                   <a:srgbClr val="0F172A"/>
                 </a:solidFill>
@@ -12691,18 +13042,28 @@
               </a:defRPr>
             </a:pPr>
             <a:r>
-              <a:t>• LVS Sign-off (Netgen): 0 lỗi (Netlists match uniquely 100%, 0 unmatched)</a:t>
-            </a:r>
-          </a:p>
-          <a:p>
-            <a:pPr>
-              <a:lnSpc>
-                <a:spcPct val="110000"/>
-              </a:lnSpc>
-              <a:spcAft>
-                <a:spcPts val="150"/>
-              </a:spcAft>
-              <a:defRPr sz="850">
+              <a:t>2. Module RFID RDM6300</a:t>
+            </a:r>
+          </a:p>
+          <a:p>
+            <a:pPr>
+              <a:defRPr sz="1250">
+                <a:solidFill>
+                  <a:srgbClr val="475569"/>
+                </a:solidFill>
+                <a:latin typeface="Segoe UI"/>
+              </a:defRPr>
+            </a:pPr>
+            <a:r>
+              <a:t>     125 kHz, kèm ăng-ten cuộn dây</a:t>
+            </a:r>
+          </a:p>
+          <a:p>
+            <a:pPr>
+              <a:spcBef>
+                <a:spcPts val="700"/>
+              </a:spcBef>
+              <a:defRPr sz="1500" b="1">
                 <a:solidFill>
                   <a:srgbClr val="0F172A"/>
                 </a:solidFill>
@@ -12710,18 +13071,28 @@
               </a:defRPr>
             </a:pPr>
             <a:r>
-              <a:t>• DRC Sign-off (Magic/KLayout): 0 lỗi (Zero DRC violations trên toàn bộ 5 lớp kim loại)</a:t>
-            </a:r>
-          </a:p>
-          <a:p>
-            <a:pPr>
-              <a:lnSpc>
-                <a:spcPct val="110000"/>
-              </a:lnSpc>
-              <a:spcAft>
-                <a:spcPts val="150"/>
-              </a:spcAft>
-              <a:defRPr sz="850">
+              <a:t>3. Thẻ RFID EM4100</a:t>
+            </a:r>
+          </a:p>
+          <a:p>
+            <a:pPr>
+              <a:defRPr sz="1250">
+                <a:solidFill>
+                  <a:srgbClr val="475569"/>
+                </a:solidFill>
+                <a:latin typeface="Segoe UI"/>
+              </a:defRPr>
+            </a:pPr>
+            <a:r>
+              <a:t>     Thẻ từ 125 kHz mẫu</a:t>
+            </a:r>
+          </a:p>
+          <a:p>
+            <a:pPr>
+              <a:spcBef>
+                <a:spcPts val="700"/>
+              </a:spcBef>
+              <a:defRPr sz="1500" b="1">
                 <a:solidFill>
                   <a:srgbClr val="0F172A"/>
                 </a:solidFill>
@@ -12729,7 +13100,136 @@
               </a:defRPr>
             </a:pPr>
             <a:r>
-              <a:t>• PDN &amp; Timing: Worst IR Drop: 1.39 mV (&lt; 0.08% VDD) | WNS = 0.00 ns</a:t>
+              <a:t>4. Module nguồn MB102 + Adapter DC</a:t>
+            </a:r>
+          </a:p>
+          <a:p>
+            <a:pPr>
+              <a:defRPr sz="1250">
+                <a:solidFill>
+                  <a:srgbClr val="475569"/>
+                </a:solidFill>
+                <a:latin typeface="Segoe UI"/>
+              </a:defRPr>
+            </a:pPr>
+            <a:r>
+              <a:t>     Cấp 5V cho RDM6300</a:t>
+            </a:r>
+          </a:p>
+          <a:p>
+            <a:pPr>
+              <a:spcBef>
+                <a:spcPts val="700"/>
+              </a:spcBef>
+              <a:defRPr sz="1500" b="1">
+                <a:solidFill>
+                  <a:srgbClr val="0F172A"/>
+                </a:solidFill>
+                <a:latin typeface="Segoe UI"/>
+              </a:defRPr>
+            </a:pPr>
+            <a:r>
+              <a:t>5. Điện trở 1kΩ</a:t>
+            </a:r>
+          </a:p>
+          <a:p>
+            <a:pPr>
+              <a:defRPr sz="1250">
+                <a:solidFill>
+                  <a:srgbClr val="475569"/>
+                </a:solidFill>
+                <a:latin typeface="Segoe UI"/>
+              </a:defRPr>
+            </a:pPr>
+            <a:r>
+              <a:t>     Nối tiếp chân TX RDM6300 ➔ JA1</a:t>
+            </a:r>
+          </a:p>
+          <a:p>
+            <a:pPr>
+              <a:spcBef>
+                <a:spcPts val="700"/>
+              </a:spcBef>
+              <a:defRPr sz="1500" b="1">
+                <a:solidFill>
+                  <a:srgbClr val="0F172A"/>
+                </a:solidFill>
+                <a:latin typeface="Segoe UI"/>
+              </a:defRPr>
+            </a:pPr>
+            <a:r>
+              <a:t>6. Breadboard &amp; dây cắm</a:t>
+            </a:r>
+          </a:p>
+          <a:p>
+            <a:pPr>
+              <a:defRPr sz="1250">
+                <a:solidFill>
+                  <a:srgbClr val="475569"/>
+                </a:solidFill>
+                <a:latin typeface="Segoe UI"/>
+              </a:defRPr>
+            </a:pPr>
+            <a:r>
+              <a:t>     Đấu nối mạch thử nghiệm</a:t>
+            </a:r>
+          </a:p>
+          <a:p>
+            <a:pPr>
+              <a:spcBef>
+                <a:spcPts val="700"/>
+              </a:spcBef>
+              <a:defRPr sz="1500" b="1">
+                <a:solidFill>
+                  <a:srgbClr val="0F172A"/>
+                </a:solidFill>
+                <a:latin typeface="Segoe UI"/>
+              </a:defRPr>
+            </a:pPr>
+            <a:r>
+              <a:t>7. Cáp Micro-USB</a:t>
+            </a:r>
+          </a:p>
+          <a:p>
+            <a:pPr>
+              <a:defRPr sz="1250">
+                <a:solidFill>
+                  <a:srgbClr val="475569"/>
+                </a:solidFill>
+                <a:latin typeface="Segoe UI"/>
+              </a:defRPr>
+            </a:pPr>
+            <a:r>
+              <a:t>     Nạp FPGA &amp; UART 9600 bps</a:t>
+            </a:r>
+          </a:p>
+          <a:p>
+            <a:pPr>
+              <a:spcBef>
+                <a:spcPts val="700"/>
+              </a:spcBef>
+              <a:defRPr sz="1500" b="1">
+                <a:solidFill>
+                  <a:srgbClr val="0F172A"/>
+                </a:solidFill>
+                <a:latin typeface="Segoe UI"/>
+              </a:defRPr>
+            </a:pPr>
+            <a:r>
+              <a:t>8. Máy tính Host PC</a:t>
+            </a:r>
+          </a:p>
+          <a:p>
+            <a:pPr>
+              <a:defRPr sz="1250">
+                <a:solidFill>
+                  <a:srgbClr val="475569"/>
+                </a:solidFill>
+                <a:latin typeface="Segoe UI"/>
+              </a:defRPr>
+            </a:pPr>
+            <a:r>
+              <a:t>     Chạy chương trình Host Console</a:t>
             </a:r>
           </a:p>
         </p:txBody>

--- a/rdm6300-picorv32-rom-data/document/Bao_Cao_Do_An_RDM6300_PicoRV32_SoC.pptx
+++ b/rdm6300-picorv32-rom-data/document/Bao_Cao_Do_An_RDM6300_PicoRV32_SoC.pptx
@@ -3196,8 +3196,8 @@
         </p:nvSpPr>
         <p:spPr>
           <a:xfrm>
-            <a:off x="960120" y="932688"/>
-            <a:ext cx="10271455" cy="3840480"/>
+            <a:off x="960120" y="896112"/>
+            <a:ext cx="10271455" cy="1417320"/>
           </a:xfrm>
           <a:prstGeom prst="rect">
             <a:avLst/>
@@ -3212,7 +3212,7 @@
           <a:p>
             <a:pPr>
               <a:spcAft>
-                <a:spcPts val="1200"/>
+                <a:spcPts val="800"/>
               </a:spcAft>
               <a:defRPr sz="1350" b="1">
                 <a:solidFill>
@@ -3225,6 +3225,49 @@
               <a:t>FPT JETKING — CHIP DESIGN</a:t>
             </a:r>
           </a:p>
+          <a:p>
+            <a:pPr>
+              <a:lnSpc>
+                <a:spcPct val="122000"/>
+              </a:lnSpc>
+              <a:defRPr sz="2500" b="1">
+                <a:solidFill>
+                  <a:srgbClr val="FFFFFF"/>
+                </a:solidFill>
+                <a:latin typeface="Segoe UI"/>
+              </a:defRPr>
+            </a:pPr>
+            <a:r>
+              <a:t>THIẾT KẾ HỆ THỐNG SOC XỬ LÝ DỮ LIỆU THẺ RA VÀO RFID</a:t>
+            </a:r>
+            <a:br/>
+            <a:r>
+              <a:t>TỐI ƯU RTL TO GDSII TRÊN CHIP ASIC</a:t>
+            </a:r>
+          </a:p>
+        </p:txBody>
+      </p:sp>
+      <p:sp>
+        <p:nvSpPr>
+          <p:cNvPr id="5" name="TextBox 4"/>
+          <p:cNvSpPr txBox="1"/>
+          <p:nvPr/>
+        </p:nvSpPr>
+        <p:spPr>
+          <a:xfrm>
+            <a:off x="960120" y="2487168"/>
+            <a:ext cx="6766560" cy="2240280"/>
+          </a:xfrm>
+          <a:prstGeom prst="rect">
+            <a:avLst/>
+          </a:prstGeom>
+          <a:noFill/>
+        </p:spPr>
+        <p:txBody>
+          <a:bodyPr wrap="square" lIns="0" rIns="0" tIns="0" bIns="0">
+            <a:spAutoFit/>
+          </a:bodyPr>
+          <a:lstStyle/>
           <a:p>
             <a:pPr>
               <a:lnSpc>
@@ -3233,41 +3276,25 @@
               <a:spcAft>
                 <a:spcPts val="1400"/>
               </a:spcAft>
-              <a:defRPr sz="2600" b="1">
-                <a:solidFill>
-                  <a:srgbClr val="FFFFFF"/>
-                </a:solidFill>
-                <a:latin typeface="Segoe UI"/>
-              </a:defRPr>
-            </a:pPr>
-            <a:r>
-              <a:t>THIẾT KẾ HỆ THỐNG SOC XỬ LÝ DỮ LIỆU THẺ RA VÀO RFID</a:t>
+              <a:defRPr sz="1200">
+                <a:solidFill>
+                  <a:srgbClr val="CBD5E1"/>
+                </a:solidFill>
+                <a:latin typeface="Segoe UI"/>
+              </a:defRPr>
+            </a:pPr>
+            <a:r>
+              <a:t>Giao tiếp RFID RDM6300 | Lưu trữ Whitelist SPI Flash NVM</a:t>
             </a:r>
             <a:br/>
             <a:r>
-              <a:t>TỐI ƯU RTL TO GDSII TRÊN CHIP ASIC</a:t>
+              <a:t>Tạo mẫu Basys 3 FPGA | Ký duyệt ASIC OpenLane 2 (SkyWater 130nm)</a:t>
             </a:r>
           </a:p>
           <a:p>
             <a:pPr>
               <a:spcAft>
-                <a:spcPts val="1800"/>
-              </a:spcAft>
-              <a:defRPr sz="1200">
-                <a:solidFill>
-                  <a:srgbClr val="CBD5E1"/>
-                </a:solidFill>
-                <a:latin typeface="Segoe UI"/>
-              </a:defRPr>
-            </a:pPr>
-            <a:r>
-              <a:t>Giao tiếp RFID RDM6300 | Lưu trữ Whitelist SPI Flash NVM | Tạo mẫu Basys 3 FPGA | Ký duyệt ASIC OpenLane 2 (Sky130)</a:t>
-            </a:r>
-          </a:p>
-          <a:p>
-            <a:pPr>
-              <a:spcAft>
-                <a:spcPts val="500"/>
+                <a:spcPts val="600"/>
               </a:spcAft>
               <a:defRPr sz="1350" b="1">
                 <a:solidFill>
@@ -3283,7 +3310,7 @@
           <a:p>
             <a:pPr>
               <a:spcAft>
-                <a:spcPts val="500"/>
+                <a:spcPts val="600"/>
               </a:spcAft>
               <a:defRPr sz="1250">
                 <a:solidFill>
@@ -3313,43 +3340,54 @@
       </p:sp>
       <p:sp>
         <p:nvSpPr>
-          <p:cNvPr id="5" name="TextBox 4"/>
-          <p:cNvSpPr txBox="1"/>
-          <p:nvPr/>
-        </p:nvSpPr>
-        <p:spPr>
-          <a:xfrm>
-            <a:off x="960120" y="4864608"/>
-            <a:ext cx="10271455" cy="256032"/>
-          </a:xfrm>
-          <a:prstGeom prst="rect">
-            <a:avLst/>
-          </a:prstGeom>
-          <a:noFill/>
-        </p:spPr>
-        <p:txBody>
-          <a:bodyPr wrap="none" lIns="0" rIns="0" tIns="0" bIns="0">
-            <a:spAutoFit/>
-          </a:bodyPr>
-          <a:lstStyle/>
-          <a:p>
-            <a:pPr>
-              <a:defRPr sz="1050" b="1">
-                <a:solidFill>
-                  <a:srgbClr val="0EA5E9"/>
-                </a:solidFill>
-                <a:latin typeface="Segoe UI"/>
-              </a:defRPr>
-            </a:pPr>
-            <a:r>
-              <a:t>CÔNG CỤ EDA &amp; HỆ SINH THÁI CÔNG NGHỆ SỬ DỤNG TRONG ĐỒ ÁN:</a:t>
-            </a:r>
+          <p:cNvPr id="6" name="Rounded Rectangle 5"/>
+          <p:cNvSpPr/>
+          <p:nvPr/>
+        </p:nvSpPr>
+        <p:spPr>
+          <a:xfrm>
+            <a:off x="7955279" y="2423160"/>
+            <a:ext cx="3273552" cy="2331720"/>
+          </a:xfrm>
+          <a:prstGeom prst="roundRect">
+            <a:avLst>
+              <a:gd name="adj" fmla="val 4000"/>
+            </a:avLst>
+          </a:prstGeom>
+          <a:solidFill>
+            <a:srgbClr val="0F172A"/>
+          </a:solidFill>
+          <a:ln w="19050">
+            <a:solidFill>
+              <a:srgbClr val="0EA5E9"/>
+            </a:solidFill>
+          </a:ln>
+        </p:spPr>
+        <p:style>
+          <a:lnRef idx="1">
+            <a:schemeClr val="accent1"/>
+          </a:lnRef>
+          <a:fillRef idx="3">
+            <a:schemeClr val="accent1"/>
+          </a:fillRef>
+          <a:effectRef idx="2">
+            <a:schemeClr val="accent1"/>
+          </a:effectRef>
+          <a:fontRef idx="minor">
+            <a:schemeClr val="lt1"/>
+          </a:fontRef>
+        </p:style>
+        <p:txBody>
+          <a:bodyPr rtlCol="0" anchor="ctr"/>
+          <a:lstStyle/>
+          <a:p>
+            <a:pPr algn="ctr"/>
           </a:p>
         </p:txBody>
       </p:sp>
       <p:pic>
         <p:nvPicPr>
-          <p:cNvPr id="6" name="Picture 5" descr="badge_openlane.png"/>
+          <p:cNvPr id="7" name="Picture 6" descr="rfid_card_rounded.png"/>
           <p:cNvPicPr>
             <a:picLocks noChangeAspect="1"/>
           </p:cNvPicPr>
@@ -3363,17 +3401,89 @@
         </p:blipFill>
         <p:spPr>
           <a:xfrm>
-            <a:off x="960120" y="5175504"/>
-            <a:ext cx="1869159" cy="658368"/>
+            <a:off x="8028431" y="2487168"/>
+            <a:ext cx="3127248" cy="2011680"/>
           </a:xfrm>
           <a:prstGeom prst="rect">
             <a:avLst/>
           </a:prstGeom>
         </p:spPr>
       </p:pic>
+      <p:sp>
+        <p:nvSpPr>
+          <p:cNvPr id="8" name="TextBox 7"/>
+          <p:cNvSpPr txBox="1"/>
+          <p:nvPr/>
+        </p:nvSpPr>
+        <p:spPr>
+          <a:xfrm>
+            <a:off x="7955279" y="4480560"/>
+            <a:ext cx="3273552" cy="256032"/>
+          </a:xfrm>
+          <a:prstGeom prst="rect">
+            <a:avLst/>
+          </a:prstGeom>
+          <a:noFill/>
+        </p:spPr>
+        <p:txBody>
+          <a:bodyPr wrap="none" lIns="0" rIns="0" tIns="0" bIns="0">
+            <a:spAutoFit/>
+          </a:bodyPr>
+          <a:lstStyle/>
+          <a:p>
+            <a:pPr algn="ctr">
+              <a:defRPr sz="950" b="1">
+                <a:solidFill>
+                  <a:srgbClr val="93C5FD"/>
+                </a:solidFill>
+                <a:latin typeface="Segoe UI"/>
+              </a:defRPr>
+            </a:pPr>
+            <a:r>
+              <a:t>Đầu đọc RDM6300 &amp; Thẻ RFID 125kHz (EM4100)</a:t>
+            </a:r>
+          </a:p>
+        </p:txBody>
+      </p:sp>
+      <p:sp>
+        <p:nvSpPr>
+          <p:cNvPr id="9" name="TextBox 8"/>
+          <p:cNvSpPr txBox="1"/>
+          <p:nvPr/>
+        </p:nvSpPr>
+        <p:spPr>
+          <a:xfrm>
+            <a:off x="960120" y="4864608"/>
+            <a:ext cx="10271455" cy="256032"/>
+          </a:xfrm>
+          <a:prstGeom prst="rect">
+            <a:avLst/>
+          </a:prstGeom>
+          <a:noFill/>
+        </p:spPr>
+        <p:txBody>
+          <a:bodyPr wrap="none" lIns="0" rIns="0" tIns="0" bIns="0">
+            <a:spAutoFit/>
+          </a:bodyPr>
+          <a:lstStyle/>
+          <a:p>
+            <a:pPr>
+              <a:defRPr sz="1050" b="1">
+                <a:solidFill>
+                  <a:srgbClr val="0EA5E9"/>
+                </a:solidFill>
+                <a:latin typeface="Segoe UI"/>
+              </a:defRPr>
+            </a:pPr>
+            <a:r>
+              <a:t>CÔNG CỤ EDA &amp; HỆ SINH THÁI CÔNG NGHỆ SỬ DỤNG TRONG ĐỒ ÁN:</a:t>
+            </a:r>
+          </a:p>
+        </p:txBody>
+      </p:sp>
       <p:pic>
         <p:nvPicPr>
-          <p:cNvPr id="7" name="Picture 6" descr="badge_vivado.png"/>
+          <p:cNvPr id="10" name="Picture 9" descr="badge_openlane.png"/>
           <p:cNvPicPr>
             <a:picLocks noChangeAspect="1"/>
           </p:cNvPicPr>
@@ -3387,8 +3497,8 @@
         </p:blipFill>
         <p:spPr>
           <a:xfrm>
-            <a:off x="2725834" y="5175504"/>
-            <a:ext cx="1816187" cy="658368"/>
+            <a:off x="960120" y="5175504"/>
+            <a:ext cx="1869159" cy="658368"/>
           </a:xfrm>
           <a:prstGeom prst="rect">
             <a:avLst/>
@@ -3397,7 +3507,7 @@
       </p:pic>
       <p:pic>
         <p:nvPicPr>
-          <p:cNvPr id="8" name="Picture 7" descr="badge_fpga.png"/>
+          <p:cNvPr id="11" name="Picture 10" descr="badge_vivado.png"/>
           <p:cNvPicPr>
             <a:picLocks noChangeAspect="1"/>
           </p:cNvPicPr>
@@ -3411,8 +3521,8 @@
         </p:blipFill>
         <p:spPr>
           <a:xfrm>
-            <a:off x="4438576" y="5175504"/>
-            <a:ext cx="1922131" cy="658368"/>
+            <a:off x="2725834" y="5175504"/>
+            <a:ext cx="1816187" cy="658368"/>
           </a:xfrm>
           <a:prstGeom prst="rect">
             <a:avLst/>
@@ -3421,7 +3531,7 @@
       </p:pic>
       <p:pic>
         <p:nvPicPr>
-          <p:cNvPr id="9" name="Picture 8" descr="badge_riscv.png"/>
+          <p:cNvPr id="12" name="Picture 11" descr="badge_fpga.png"/>
           <p:cNvPicPr>
             <a:picLocks noChangeAspect="1"/>
           </p:cNvPicPr>
@@ -3435,8 +3545,8 @@
         </p:blipFill>
         <p:spPr>
           <a:xfrm>
-            <a:off x="6257262" y="5175504"/>
-            <a:ext cx="2883197" cy="658368"/>
+            <a:off x="4438576" y="5175504"/>
+            <a:ext cx="1922131" cy="658368"/>
           </a:xfrm>
           <a:prstGeom prst="rect">
             <a:avLst/>
@@ -3445,7 +3555,7 @@
       </p:pic>
       <p:pic>
         <p:nvPicPr>
-          <p:cNvPr id="10" name="Picture 9" descr="badge_skywater.png"/>
+          <p:cNvPr id="13" name="Picture 12" descr="badge_riscv.png"/>
           <p:cNvPicPr>
             <a:picLocks noChangeAspect="1"/>
           </p:cNvPicPr>
@@ -3453,6 +3563,30 @@
         </p:nvPicPr>
         <p:blipFill>
           <a:blip r:embed="rId6"/>
+          <a:stretch>
+            <a:fillRect/>
+          </a:stretch>
+        </p:blipFill>
+        <p:spPr>
+          <a:xfrm>
+            <a:off x="6257262" y="5175504"/>
+            <a:ext cx="2883197" cy="658368"/>
+          </a:xfrm>
+          <a:prstGeom prst="rect">
+            <a:avLst/>
+          </a:prstGeom>
+        </p:spPr>
+      </p:pic>
+      <p:pic>
+        <p:nvPicPr>
+          <p:cNvPr id="14" name="Picture 13" descr="badge_skywater.png"/>
+          <p:cNvPicPr>
+            <a:picLocks noChangeAspect="1"/>
+          </p:cNvPicPr>
+          <p:nvPr/>
+        </p:nvPicPr>
+        <p:blipFill>
+          <a:blip r:embed="rId7"/>
           <a:stretch>
             <a:fillRect/>
           </a:stretch>
@@ -6962,7 +7096,23 @@
           <a:p>
             <a:pPr>
               <a:spcBef>
-                <a:spcPts val="2800"/>
+                <a:spcPts val="1400"/>
+              </a:spcBef>
+              <a:defRPr sz="1400">
+                <a:solidFill>
+                  <a:srgbClr val="93C5FD"/>
+                </a:solidFill>
+                <a:latin typeface="Segoe UI"/>
+              </a:defRPr>
+            </a:pPr>
+            <a:r>
+              <a:t>🔗 GitHub Repository: https://github.com/thaituanhiep/uart-fifo-rfid-asic/tree/rfid_flash_firmware_optimize</a:t>
+            </a:r>
+          </a:p>
+          <a:p>
+            <a:pPr>
+              <a:spcBef>
+                <a:spcPts val="1800"/>
               </a:spcBef>
               <a:defRPr sz="2200" b="1">
                 <a:solidFill>
@@ -6972,7 +7122,7 @@
               </a:defRPr>
             </a:pPr>
             <a:r>
-              <a:t>XIN TRÂN TRỌNG CẢM ƠN THẦY CÔ VÀ HỘI ĐỒNG ĐÃ LẮNG NGHE!</a:t>
+              <a:t>XIN TRÂN TRỌNG CẢM ƠN QUÝ THẦY CÔ ĐÃ LẮNG NGHE!</a:t>
             </a:r>
           </a:p>
         </p:txBody>
@@ -10345,7 +10495,7 @@
               </a:defRPr>
             </a:pPr>
             <a:r>
-              <a:t>• [4] Delete Tag ➔ case 'K': Xóa thẻ chỉ định ra khỏi danh sách Whitelist lưu trong Flash.</a:t>
+              <a:t>• [4] Delete Tag ➔ case 'K': Xóa duy nhất 1 thẻ chỉ định trong Flash bằng cách ghi đè Magic word.</a:t>
             </a:r>
           </a:p>
           <a:p>
@@ -10402,7 +10552,7 @@
               </a:defRPr>
             </a:pPr>
             <a:r>
-              <a:t>• [7] Erase Logs ➔ case 'X': Tự động sao lưu CSV trên PC rồi xóa trắng nhật ký trong Flash.</a:t>
+              <a:t>• [7] Erase Logs ➔ case 'X': Firmware xóa trắng Sector 49 (Host tự gửi 'L' sao lưu CSV trên PC trước).</a:t>
             </a:r>
           </a:p>
           <a:p>
@@ -10421,7 +10571,7 @@
               </a:defRPr>
             </a:pPr>
             <a:r>
-              <a:t>• [8] &amp; [9] Export/Import CSV: Dùng lệnh 'F' (đọc tất cả thẻ) &amp; 'E' (xóa thẻ) để đồng bộ hóa CSV.</a:t>
+              <a:t>• [8] &amp; [9] Quản lý CSV (Host PC): Host tự xử lý file CSV; gửi lệnh 'F' (đọc thẻ) hoặc 'E'+'N' (nạp thẻ) sang SoC.</a:t>
             </a:r>
           </a:p>
         </p:txBody>

--- a/rdm6300-picorv32-rom-data/document/Bao_Cao_Do_An_RDM6300_PicoRV32_SoC.pptx
+++ b/rdm6300-picorv32-rom-data/document/Bao_Cao_Do_An_RDM6300_PicoRV32_SoC.pptx
@@ -18,6 +18,7 @@
     <p:sldId id="266" r:id="rId17"/>
     <p:sldId id="267" r:id="rId18"/>
     <p:sldId id="268" r:id="rId19"/>
+    <p:sldId id="269" r:id="rId20"/>
   </p:sldIdLst>
   <p:sldSz cx="12191695" cy="6858000" type="screen4x3"/>
   <p:notesSz cx="6858000" cy="9144000"/>
@@ -3739,7 +3740,7 @@
               </a:defRPr>
             </a:pPr>
             <a:r>
-              <a:t>PHẦN 6: THIẾT KẾ VẬT LÝ ASIC</a:t>
+              <a:t>PHẦN 5: DEMO CHỨC NĂNG SẢN PHẨM</a:t>
             </a:r>
           </a:p>
           <a:p>
@@ -3752,7 +3753,7 @@
               </a:defRPr>
             </a:pPr>
             <a:r>
-              <a:t>Minh Chứng Ký Duyệt Sign-off, Bản Vẽ OpenROAD &amp; Cấu Hình OpenLane</a:t>
+              <a:t>Danh Sách Thiết Bị &amp; Thiết Lập Kết Nối Phần Cứng FPGA Basys 3</a:t>
             </a:r>
           </a:p>
         </p:txBody>
@@ -3867,7 +3868,7 @@
               </a:defRPr>
             </a:pPr>
             <a:r>
-              <a:t>10 / 13</a:t>
+              <a:t>10 / 14</a:t>
             </a:r>
           </a:p>
         </p:txBody>
@@ -3881,360 +3882,7 @@
         <p:spPr>
           <a:xfrm>
             <a:off x="731520" y="1188720"/>
-            <a:ext cx="5120640" cy="3291840"/>
-          </a:xfrm>
-          <a:prstGeom prst="roundRect">
-            <a:avLst>
-              <a:gd name="adj" fmla="val 2000"/>
-            </a:avLst>
-          </a:prstGeom>
-          <a:solidFill>
-            <a:srgbClr val="0B132B"/>
-          </a:solidFill>
-          <a:ln w="19050">
-            <a:solidFill>
-              <a:srgbClr val="1C2541"/>
-            </a:solidFill>
-          </a:ln>
-        </p:spPr>
-        <p:style>
-          <a:lnRef idx="1">
-            <a:schemeClr val="accent1"/>
-          </a:lnRef>
-          <a:fillRef idx="3">
-            <a:schemeClr val="accent1"/>
-          </a:fillRef>
-          <a:effectRef idx="2">
-            <a:schemeClr val="accent1"/>
-          </a:effectRef>
-          <a:fontRef idx="minor">
-            <a:schemeClr val="lt1"/>
-          </a:fontRef>
-        </p:style>
-        <p:txBody>
-          <a:bodyPr rtlCol="0" anchor="ctr"/>
-          <a:lstStyle/>
-          <a:p>
-            <a:pPr algn="ctr"/>
-          </a:p>
-        </p:txBody>
-      </p:sp>
-      <p:sp>
-        <p:nvSpPr>
-          <p:cNvPr id="9" name="TextBox 8"/>
-          <p:cNvSpPr txBox="1"/>
-          <p:nvPr/>
-        </p:nvSpPr>
-        <p:spPr>
-          <a:xfrm>
-            <a:off x="868680" y="1261872"/>
-            <a:ext cx="4846320" cy="292608"/>
-          </a:xfrm>
-          <a:prstGeom prst="rect">
-            <a:avLst/>
-          </a:prstGeom>
-          <a:noFill/>
-        </p:spPr>
-        <p:txBody>
-          <a:bodyPr wrap="none" lIns="0" tIns="0" rIns="0" bIns="0">
-            <a:spAutoFit/>
-          </a:bodyPr>
-          <a:lstStyle/>
-          <a:p>
-            <a:pPr>
-              <a:defRPr sz="1050" b="1">
-                <a:solidFill>
-                  <a:srgbClr val="0EA5E9"/>
-                </a:solidFill>
-                <a:latin typeface="Consolas"/>
-              </a:defRPr>
-            </a:pPr>
-            <a:r>
-              <a:t>&gt;_  Cấu hình OpenLane (config.json)</a:t>
-            </a:r>
-          </a:p>
-        </p:txBody>
-      </p:sp>
-      <p:sp>
-        <p:nvSpPr>
-          <p:cNvPr id="10" name="TextBox 9"/>
-          <p:cNvSpPr txBox="1"/>
-          <p:nvPr/>
-        </p:nvSpPr>
-        <p:spPr>
-          <a:xfrm>
-            <a:off x="868680" y="1554480"/>
-            <a:ext cx="4846320" cy="2880360"/>
-          </a:xfrm>
-          <a:prstGeom prst="rect">
-            <a:avLst/>
-          </a:prstGeom>
-          <a:noFill/>
-        </p:spPr>
-        <p:txBody>
-          <a:bodyPr wrap="square" lIns="0" tIns="0" rIns="0" bIns="0">
-            <a:spAutoFit/>
-          </a:bodyPr>
-          <a:lstStyle/>
-          <a:p>
-            <a:pPr>
-              <a:lnSpc>
-                <a:spcPct val="112000"/>
-              </a:lnSpc>
-              <a:spcAft>
-                <a:spcPts val="0"/>
-              </a:spcAft>
-              <a:defRPr sz="1050">
-                <a:solidFill>
-                  <a:srgbClr val="FFFFFF"/>
-                </a:solidFill>
-                <a:latin typeface="Consolas"/>
-              </a:defRPr>
-            </a:pPr>
-            <a:r>
-              <a:t>{</a:t>
-            </a:r>
-          </a:p>
-          <a:p>
-            <a:pPr>
-              <a:lnSpc>
-                <a:spcPct val="112000"/>
-              </a:lnSpc>
-              <a:spcAft>
-                <a:spcPts val="0"/>
-              </a:spcAft>
-              <a:defRPr sz="1050">
-                <a:solidFill>
-                  <a:srgbClr val="FFFFFF"/>
-                </a:solidFill>
-                <a:latin typeface="Consolas"/>
-              </a:defRPr>
-            </a:pPr>
-            <a:r>
-              <a:t>  "DESIGN_NAME": "rdm6300_picorv32_soc",</a:t>
-            </a:r>
-          </a:p>
-          <a:p>
-            <a:pPr>
-              <a:lnSpc>
-                <a:spcPct val="112000"/>
-              </a:lnSpc>
-              <a:spcAft>
-                <a:spcPts val="0"/>
-              </a:spcAft>
-              <a:defRPr sz="1050">
-                <a:solidFill>
-                  <a:srgbClr val="FFFFFF"/>
-                </a:solidFill>
-                <a:latin typeface="Consolas"/>
-              </a:defRPr>
-            </a:pPr>
-            <a:r>
-              <a:t>  "PDK": "sky130A",  "STD_CELL_LIBRARY": "sky130_fd_sc_hd",</a:t>
-            </a:r>
-          </a:p>
-          <a:p>
-            <a:pPr>
-              <a:lnSpc>
-                <a:spcPct val="112000"/>
-              </a:lnSpc>
-              <a:spcAft>
-                <a:spcPts val="0"/>
-              </a:spcAft>
-              <a:defRPr sz="1050">
-                <a:solidFill>
-                  <a:srgbClr val="FFFFFF"/>
-                </a:solidFill>
-                <a:latin typeface="Consolas"/>
-              </a:defRPr>
-            </a:pPr>
-            <a:r>
-              <a:t>  "CLOCK_PERIOD": 20.0, // 50 MHz Clock</a:t>
-            </a:r>
-          </a:p>
-          <a:p>
-            <a:pPr>
-              <a:lnSpc>
-                <a:spcPct val="112000"/>
-              </a:lnSpc>
-              <a:spcAft>
-                <a:spcPts val="0"/>
-              </a:spcAft>
-              <a:defRPr sz="1050">
-                <a:solidFill>
-                  <a:srgbClr val="FFFFFF"/>
-                </a:solidFill>
-                <a:latin typeface="Consolas"/>
-              </a:defRPr>
-            </a:pPr>
-            <a:r>
-              <a:t>  "FP_CORE_UTIL": 26,   // 26% Core Density</a:t>
-            </a:r>
-          </a:p>
-          <a:p>
-            <a:pPr>
-              <a:lnSpc>
-                <a:spcPct val="112000"/>
-              </a:lnSpc>
-              <a:spcAft>
-                <a:spcPts val="0"/>
-              </a:spcAft>
-              <a:defRPr sz="1050">
-                <a:solidFill>
-                  <a:srgbClr val="FFFFFF"/>
-                </a:solidFill>
-                <a:latin typeface="Consolas"/>
-              </a:defRPr>
-            </a:pPr>
-            <a:r>
-              <a:t>  "MAX_FANOUT_CONSTRAINT": 12,</a:t>
-            </a:r>
-          </a:p>
-          <a:p>
-            <a:pPr>
-              <a:lnSpc>
-                <a:spcPct val="112000"/>
-              </a:lnSpc>
-              <a:spcAft>
-                <a:spcPts val="0"/>
-              </a:spcAft>
-              <a:defRPr sz="1050">
-                <a:solidFill>
-                  <a:srgbClr val="FFFFFF"/>
-                </a:solidFill>
-                <a:latin typeface="Consolas"/>
-              </a:defRPr>
-            </a:pPr>
-            <a:r>
-              <a:t>  "PL_RESIZER_HOLD_SLACK_MARGIN": 0.6,</a:t>
-            </a:r>
-          </a:p>
-          <a:p>
-            <a:pPr>
-              <a:lnSpc>
-                <a:spcPct val="112000"/>
-              </a:lnSpc>
-              <a:spcAft>
-                <a:spcPts val="0"/>
-              </a:spcAft>
-              <a:defRPr sz="1050">
-                <a:solidFill>
-                  <a:srgbClr val="FFFFFF"/>
-                </a:solidFill>
-                <a:latin typeface="Consolas"/>
-              </a:defRPr>
-            </a:pPr>
-            <a:r>
-              <a:t>  "RUN_HEURISTIC_DIODE_INSERTION": true,</a:t>
-            </a:r>
-          </a:p>
-          <a:p>
-            <a:pPr>
-              <a:lnSpc>
-                <a:spcPct val="112000"/>
-              </a:lnSpc>
-              <a:spcAft>
-                <a:spcPts val="0"/>
-              </a:spcAft>
-              <a:defRPr sz="1050">
-                <a:solidFill>
-                  <a:srgbClr val="FFFFFF"/>
-                </a:solidFill>
-                <a:latin typeface="Consolas"/>
-              </a:defRPr>
-            </a:pPr>
-            <a:r>
-              <a:t>  "HEURISTIC_ANTENNA_THRESHOLD": 24,</a:t>
-            </a:r>
-          </a:p>
-          <a:p>
-            <a:pPr>
-              <a:lnSpc>
-                <a:spcPct val="112000"/>
-              </a:lnSpc>
-              <a:spcAft>
-                <a:spcPts val="0"/>
-              </a:spcAft>
-              <a:defRPr sz="1050">
-                <a:solidFill>
-                  <a:srgbClr val="FFFFFF"/>
-                </a:solidFill>
-                <a:latin typeface="Consolas"/>
-              </a:defRPr>
-            </a:pPr>
-            <a:r>
-              <a:t>  "GRT_ANTENNA_ITERS": 35,</a:t>
-            </a:r>
-          </a:p>
-          <a:p>
-            <a:pPr>
-              <a:lnSpc>
-                <a:spcPct val="112000"/>
-              </a:lnSpc>
-              <a:spcAft>
-                <a:spcPts val="0"/>
-              </a:spcAft>
-              <a:defRPr sz="1050">
-                <a:solidFill>
-                  <a:srgbClr val="FFFFFF"/>
-                </a:solidFill>
-                <a:latin typeface="Consolas"/>
-              </a:defRPr>
-            </a:pPr>
-            <a:r>
-              <a:t>  "RUN_ANTENNA_REPAIR": true,</a:t>
-            </a:r>
-          </a:p>
-          <a:p>
-            <a:pPr>
-              <a:lnSpc>
-                <a:spcPct val="112000"/>
-              </a:lnSpc>
-              <a:spcAft>
-                <a:spcPts val="0"/>
-              </a:spcAft>
-              <a:defRPr sz="1050">
-                <a:solidFill>
-                  <a:srgbClr val="FFFFFF"/>
-                </a:solidFill>
-                <a:latin typeface="Consolas"/>
-              </a:defRPr>
-            </a:pPr>
-            <a:r>
-              <a:t>  "SYNTH_STRATEGY": "AREA 0"</a:t>
-            </a:r>
-          </a:p>
-          <a:p>
-            <a:pPr>
-              <a:lnSpc>
-                <a:spcPct val="112000"/>
-              </a:lnSpc>
-              <a:spcAft>
-                <a:spcPts val="0"/>
-              </a:spcAft>
-              <a:defRPr sz="1050">
-                <a:solidFill>
-                  <a:srgbClr val="FFFFFF"/>
-                </a:solidFill>
-                <a:latin typeface="Consolas"/>
-              </a:defRPr>
-            </a:pPr>
-            <a:r>
-              <a:t>}</a:t>
-            </a:r>
-          </a:p>
-        </p:txBody>
-      </p:sp>
-      <p:sp>
-        <p:nvSpPr>
-          <p:cNvPr id="11" name="Rounded Rectangle 10"/>
-          <p:cNvSpPr/>
-          <p:nvPr/>
-        </p:nvSpPr>
-        <p:spPr>
-          <a:xfrm>
-            <a:off x="6080760" y="1188720"/>
-            <a:ext cx="5379415" cy="3291840"/>
+            <a:ext cx="5257800" cy="5120640"/>
           </a:xfrm>
           <a:prstGeom prst="roundRect">
             <a:avLst>
@@ -4274,14 +3922,14 @@
       </p:sp>
       <p:sp>
         <p:nvSpPr>
-          <p:cNvPr id="12" name="TextBox 11"/>
+          <p:cNvPr id="9" name="TextBox 8"/>
           <p:cNvSpPr txBox="1"/>
           <p:nvPr/>
         </p:nvSpPr>
         <p:spPr>
           <a:xfrm>
-            <a:off x="6263640" y="1261872"/>
-            <a:ext cx="5013655" cy="274320"/>
+            <a:off x="868680" y="1298448"/>
+            <a:ext cx="4983480" cy="292608"/>
           </a:xfrm>
           <a:prstGeom prst="rect">
             <a:avLst/>
@@ -4289,13 +3937,13 @@
           <a:noFill/>
         </p:spPr>
         <p:txBody>
-          <a:bodyPr wrap="none" lIns="0" tIns="0">
+          <a:bodyPr wrap="none" lIns="0" tIns="0" rIns="0" bIns="0">
             <a:spAutoFit/>
           </a:bodyPr>
           <a:lstStyle/>
           <a:p>
-            <a:pPr>
-              <a:defRPr sz="1100" b="1">
+            <a:pPr algn="ctr">
+              <a:defRPr sz="1300" b="1">
                 <a:solidFill>
                   <a:srgbClr val="2563EB"/>
                 </a:solidFill>
@@ -4303,14 +3951,14 @@
               </a:defRPr>
             </a:pPr>
             <a:r>
-              <a:t>🖼️ Bản Vẽ Layout OpenROAD (Die 1.87 mm² - 1362 x 1373 µm)</a:t>
+              <a:t>HỆ THỐNG THỰC NGHIỆM THỰC TẾ</a:t>
             </a:r>
           </a:p>
         </p:txBody>
       </p:sp>
       <p:pic>
         <p:nvPicPr>
-          <p:cNvPr id="13" name="Picture 12" descr="OpenROAD.png"/>
+          <p:cNvPr id="10" name="Picture 9" descr="Device.jpg"/>
           <p:cNvPicPr>
             <a:picLocks noChangeAspect="1"/>
           </p:cNvPicPr>
@@ -4324,8 +3972,8 @@
         </p:blipFill>
         <p:spPr>
           <a:xfrm>
-            <a:off x="6830568" y="1572768"/>
-            <a:ext cx="3886200" cy="2816352"/>
+            <a:off x="868680" y="1691640"/>
+            <a:ext cx="4983480" cy="3730752"/>
           </a:xfrm>
           <a:prstGeom prst="rect">
             <a:avLst/>
@@ -4334,14 +3982,53 @@
       </p:pic>
       <p:sp>
         <p:nvSpPr>
-          <p:cNvPr id="14" name="Rounded Rectangle 13"/>
+          <p:cNvPr id="11" name="TextBox 10"/>
+          <p:cNvSpPr txBox="1"/>
+          <p:nvPr/>
+        </p:nvSpPr>
+        <p:spPr>
+          <a:xfrm>
+            <a:off x="868680" y="5532120"/>
+            <a:ext cx="4983480" cy="685800"/>
+          </a:xfrm>
+          <a:prstGeom prst="rect">
+            <a:avLst/>
+          </a:prstGeom>
+          <a:noFill/>
+        </p:spPr>
+        <p:txBody>
+          <a:bodyPr wrap="square" lIns="0" tIns="0" rIns="0" bIns="0">
+            <a:spAutoFit/>
+          </a:bodyPr>
+          <a:lstStyle/>
+          <a:p>
+            <a:pPr algn="ctr">
+              <a:lnSpc>
+                <a:spcPct val="115000"/>
+              </a:lnSpc>
+              <a:defRPr sz="1100" i="1">
+                <a:solidFill>
+                  <a:srgbClr val="475569"/>
+                </a:solidFill>
+                <a:latin typeface="Segoe UI"/>
+              </a:defRPr>
+            </a:pPr>
+            <a:r>
+              <a:t>Nguồn 5V riêng cho RDM6300 (chung GND) • Trở 1kΩ nối tiếp TX ➔ JA1 bảo vệ I/O 3.3V</a:t>
+            </a:r>
+          </a:p>
+        </p:txBody>
+      </p:sp>
+      <p:sp>
+        <p:nvSpPr>
+          <p:cNvPr id="12" name="Rounded Rectangle 11"/>
           <p:cNvSpPr/>
           <p:nvPr/>
         </p:nvSpPr>
         <p:spPr>
           <a:xfrm>
-            <a:off x="731520" y="4617720"/>
-            <a:ext cx="10728655" cy="1691640"/>
+            <a:off x="6172200" y="1188720"/>
+            <a:ext cx="5285232" cy="5120640"/>
           </a:xfrm>
           <a:prstGeom prst="roundRect">
             <a:avLst>
@@ -4351,9 +4038,9 @@
           <a:solidFill>
             <a:srgbClr val="FFFFFF"/>
           </a:solidFill>
-          <a:ln w="25400">
+          <a:ln w="19050">
             <a:solidFill>
-              <a:srgbClr val="10B981"/>
+              <a:srgbClr val="2563EB"/>
             </a:solidFill>
           </a:ln>
         </p:spPr>
@@ -4379,40 +4066,16 @@
           </a:p>
         </p:txBody>
       </p:sp>
-      <p:pic>
-        <p:nvPicPr>
-          <p:cNvPr id="15" name="Picture 14" descr="AntennaLvsDrc.png"/>
-          <p:cNvPicPr>
-            <a:picLocks noChangeAspect="1"/>
-          </p:cNvPicPr>
-          <p:nvPr/>
-        </p:nvPicPr>
-        <p:blipFill>
-          <a:blip r:embed="rId3"/>
-          <a:stretch>
-            <a:fillRect/>
-          </a:stretch>
-        </p:blipFill>
-        <p:spPr>
-          <a:xfrm>
-            <a:off x="868680" y="4727448"/>
-            <a:ext cx="6309360" cy="1463040"/>
-          </a:xfrm>
-          <a:prstGeom prst="rect">
-            <a:avLst/>
-          </a:prstGeom>
-        </p:spPr>
-      </p:pic>
-      <p:sp>
-        <p:nvSpPr>
-          <p:cNvPr id="16" name="TextBox 15"/>
+      <p:sp>
+        <p:nvSpPr>
+          <p:cNvPr id="13" name="TextBox 12"/>
           <p:cNvSpPr txBox="1"/>
           <p:nvPr/>
         </p:nvSpPr>
         <p:spPr>
           <a:xfrm>
-            <a:off x="7360920" y="4709160"/>
-            <a:ext cx="3977639" cy="1508760"/>
+            <a:off x="6400800" y="1325880"/>
+            <a:ext cx="4828032" cy="4892040"/>
           </a:xfrm>
           <a:prstGeom prst="rect">
             <a:avLst/>
@@ -4427,28 +4090,25 @@
           <a:p>
             <a:pPr>
               <a:spcAft>
-                <a:spcPts val="400"/>
+                <a:spcPts val="1000"/>
               </a:spcAft>
-              <a:defRPr sz="1200" b="1">
-                <a:solidFill>
-                  <a:srgbClr val="10B981"/>
-                </a:solidFill>
-                <a:latin typeface="Segoe UI"/>
-              </a:defRPr>
-            </a:pPr>
-            <a:r>
-              <a:t>✅ KÝ DUYỆT TAPE-OUT READY (100% PASS)</a:t>
-            </a:r>
-          </a:p>
-          <a:p>
-            <a:pPr>
-              <a:lnSpc>
-                <a:spcPct val="110000"/>
-              </a:lnSpc>
-              <a:spcAft>
-                <a:spcPts val="150"/>
-              </a:spcAft>
-              <a:defRPr sz="980">
+              <a:defRPr b="1" sz="1500">
+                <a:solidFill>
+                  <a:srgbClr val="2563EB"/>
+                </a:solidFill>
+                <a:latin typeface="Segoe UI"/>
+              </a:defRPr>
+            </a:pPr>
+            <a:r>
+              <a:t>DANH SÁCH THIẾT BỊ THỰC NGHIỆM</a:t>
+            </a:r>
+          </a:p>
+          <a:p>
+            <a:pPr>
+              <a:spcBef>
+                <a:spcPts val="700"/>
+              </a:spcBef>
+              <a:defRPr sz="1500" b="1">
                 <a:solidFill>
                   <a:srgbClr val="0F172A"/>
                 </a:solidFill>
@@ -4456,18 +4116,28 @@
               </a:defRPr>
             </a:pPr>
             <a:r>
-              <a:t>• Antenna Sign-off: 0 vi phạm (3,471 diodes xả tĩnh điện bảo vệ oxit cổng)</a:t>
-            </a:r>
-          </a:p>
-          <a:p>
-            <a:pPr>
-              <a:lnSpc>
-                <a:spcPct val="110000"/>
-              </a:lnSpc>
-              <a:spcAft>
-                <a:spcPts val="150"/>
-              </a:spcAft>
-              <a:defRPr sz="980">
+              <a:t>1. Bo mạch FPGA Digilent Basys 3</a:t>
+            </a:r>
+          </a:p>
+          <a:p>
+            <a:pPr>
+              <a:defRPr sz="1250">
+                <a:solidFill>
+                  <a:srgbClr val="475569"/>
+                </a:solidFill>
+                <a:latin typeface="Segoe UI"/>
+              </a:defRPr>
+            </a:pPr>
+            <a:r>
+              <a:t>     Artix-7 XC7A35T, SPI Flash 32Mbit</a:t>
+            </a:r>
+          </a:p>
+          <a:p>
+            <a:pPr>
+              <a:spcBef>
+                <a:spcPts val="700"/>
+              </a:spcBef>
+              <a:defRPr sz="1500" b="1">
                 <a:solidFill>
                   <a:srgbClr val="0F172A"/>
                 </a:solidFill>
@@ -4475,18 +4145,28 @@
               </a:defRPr>
             </a:pPr>
             <a:r>
-              <a:t>• LVS Sign-off (Netgen): 0 lỗi (Netlists match uniquely 100%, 0 unmatched)</a:t>
-            </a:r>
-          </a:p>
-          <a:p>
-            <a:pPr>
-              <a:lnSpc>
-                <a:spcPct val="110000"/>
-              </a:lnSpc>
-              <a:spcAft>
-                <a:spcPts val="150"/>
-              </a:spcAft>
-              <a:defRPr sz="980">
+              <a:t>2. Module RFID RDM6300</a:t>
+            </a:r>
+          </a:p>
+          <a:p>
+            <a:pPr>
+              <a:defRPr sz="1250">
+                <a:solidFill>
+                  <a:srgbClr val="475569"/>
+                </a:solidFill>
+                <a:latin typeface="Segoe UI"/>
+              </a:defRPr>
+            </a:pPr>
+            <a:r>
+              <a:t>     125 kHz, kèm ăng-ten cuộn dây</a:t>
+            </a:r>
+          </a:p>
+          <a:p>
+            <a:pPr>
+              <a:spcBef>
+                <a:spcPts val="700"/>
+              </a:spcBef>
+              <a:defRPr sz="1500" b="1">
                 <a:solidFill>
                   <a:srgbClr val="0F172A"/>
                 </a:solidFill>
@@ -4494,18 +4174,28 @@
               </a:defRPr>
             </a:pPr>
             <a:r>
-              <a:t>• DRC Sign-off (Magic/KLayout): 0 lỗi (Zero DRC violations trên toàn bộ 5 lớp kim loại)</a:t>
-            </a:r>
-          </a:p>
-          <a:p>
-            <a:pPr>
-              <a:lnSpc>
-                <a:spcPct val="110000"/>
-              </a:lnSpc>
-              <a:spcAft>
-                <a:spcPts val="150"/>
-              </a:spcAft>
-              <a:defRPr sz="980">
+              <a:t>3. Thẻ RFID EM4100</a:t>
+            </a:r>
+          </a:p>
+          <a:p>
+            <a:pPr>
+              <a:defRPr sz="1250">
+                <a:solidFill>
+                  <a:srgbClr val="475569"/>
+                </a:solidFill>
+                <a:latin typeface="Segoe UI"/>
+              </a:defRPr>
+            </a:pPr>
+            <a:r>
+              <a:t>     Thẻ từ 125 kHz mẫu</a:t>
+            </a:r>
+          </a:p>
+          <a:p>
+            <a:pPr>
+              <a:spcBef>
+                <a:spcPts val="700"/>
+              </a:spcBef>
+              <a:defRPr sz="1500" b="1">
                 <a:solidFill>
                   <a:srgbClr val="0F172A"/>
                 </a:solidFill>
@@ -4513,7 +4203,136 @@
               </a:defRPr>
             </a:pPr>
             <a:r>
-              <a:t>• PDN &amp; Timing: Worst IR Drop: 1.39 mV (&lt; 0.08% VDD) | WNS = 0.00 ns</a:t>
+              <a:t>4. Module nguồn MB102 + Adapter DC</a:t>
+            </a:r>
+          </a:p>
+          <a:p>
+            <a:pPr>
+              <a:defRPr sz="1250">
+                <a:solidFill>
+                  <a:srgbClr val="475569"/>
+                </a:solidFill>
+                <a:latin typeface="Segoe UI"/>
+              </a:defRPr>
+            </a:pPr>
+            <a:r>
+              <a:t>     Cấp 5V cho RDM6300</a:t>
+            </a:r>
+          </a:p>
+          <a:p>
+            <a:pPr>
+              <a:spcBef>
+                <a:spcPts val="700"/>
+              </a:spcBef>
+              <a:defRPr sz="1500" b="1">
+                <a:solidFill>
+                  <a:srgbClr val="0F172A"/>
+                </a:solidFill>
+                <a:latin typeface="Segoe UI"/>
+              </a:defRPr>
+            </a:pPr>
+            <a:r>
+              <a:t>5. Điện trở 1kΩ</a:t>
+            </a:r>
+          </a:p>
+          <a:p>
+            <a:pPr>
+              <a:defRPr sz="1250">
+                <a:solidFill>
+                  <a:srgbClr val="475569"/>
+                </a:solidFill>
+                <a:latin typeface="Segoe UI"/>
+              </a:defRPr>
+            </a:pPr>
+            <a:r>
+              <a:t>     Nối tiếp chân TX RDM6300 ➔ JA1</a:t>
+            </a:r>
+          </a:p>
+          <a:p>
+            <a:pPr>
+              <a:spcBef>
+                <a:spcPts val="700"/>
+              </a:spcBef>
+              <a:defRPr sz="1500" b="1">
+                <a:solidFill>
+                  <a:srgbClr val="0F172A"/>
+                </a:solidFill>
+                <a:latin typeface="Segoe UI"/>
+              </a:defRPr>
+            </a:pPr>
+            <a:r>
+              <a:t>6. Breadboard &amp; dây cắm</a:t>
+            </a:r>
+          </a:p>
+          <a:p>
+            <a:pPr>
+              <a:defRPr sz="1250">
+                <a:solidFill>
+                  <a:srgbClr val="475569"/>
+                </a:solidFill>
+                <a:latin typeface="Segoe UI"/>
+              </a:defRPr>
+            </a:pPr>
+            <a:r>
+              <a:t>     Đấu nối mạch thử nghiệm</a:t>
+            </a:r>
+          </a:p>
+          <a:p>
+            <a:pPr>
+              <a:spcBef>
+                <a:spcPts val="700"/>
+              </a:spcBef>
+              <a:defRPr sz="1500" b="1">
+                <a:solidFill>
+                  <a:srgbClr val="0F172A"/>
+                </a:solidFill>
+                <a:latin typeface="Segoe UI"/>
+              </a:defRPr>
+            </a:pPr>
+            <a:r>
+              <a:t>7. Cáp Micro-USB</a:t>
+            </a:r>
+          </a:p>
+          <a:p>
+            <a:pPr>
+              <a:defRPr sz="1250">
+                <a:solidFill>
+                  <a:srgbClr val="475569"/>
+                </a:solidFill>
+                <a:latin typeface="Segoe UI"/>
+              </a:defRPr>
+            </a:pPr>
+            <a:r>
+              <a:t>     Nạp FPGA &amp; UART 9600 bps</a:t>
+            </a:r>
+          </a:p>
+          <a:p>
+            <a:pPr>
+              <a:spcBef>
+                <a:spcPts val="700"/>
+              </a:spcBef>
+              <a:defRPr sz="1500" b="1">
+                <a:solidFill>
+                  <a:srgbClr val="0F172A"/>
+                </a:solidFill>
+                <a:latin typeface="Segoe UI"/>
+              </a:defRPr>
+            </a:pPr>
+            <a:r>
+              <a:t>8. Máy tính Host PC</a:t>
+            </a:r>
+          </a:p>
+          <a:p>
+            <a:pPr>
+              <a:defRPr sz="1250">
+                <a:solidFill>
+                  <a:srgbClr val="475569"/>
+                </a:solidFill>
+                <a:latin typeface="Segoe UI"/>
+              </a:defRPr>
+            </a:pPr>
+            <a:r>
+              <a:t>     Chạy chương trình Host Console</a:t>
             </a:r>
           </a:p>
         </p:txBody>
@@ -4669,7 +4488,7 @@
               </a:defRPr>
             </a:pPr>
             <a:r>
-              <a:t>Tổng Hợp Kết Quả Thiết Kế Vật Lý &amp; Chỉ Số PPA (OpenLane 2 / SkyWater 130nm)</a:t>
+              <a:t>Minh Chứng Ký Duyệt Sign-off, Bản Vẽ OpenROAD &amp; Cấu Hình OpenLane</a:t>
             </a:r>
           </a:p>
         </p:txBody>
@@ -4784,7 +4603,924 @@
               </a:defRPr>
             </a:pPr>
             <a:r>
-              <a:t>11 / 13</a:t>
+              <a:t>11 / 14</a:t>
+            </a:r>
+          </a:p>
+        </p:txBody>
+      </p:sp>
+      <p:sp>
+        <p:nvSpPr>
+          <p:cNvPr id="8" name="Rounded Rectangle 7"/>
+          <p:cNvSpPr/>
+          <p:nvPr/>
+        </p:nvSpPr>
+        <p:spPr>
+          <a:xfrm>
+            <a:off x="731520" y="1188720"/>
+            <a:ext cx="5120640" cy="3291840"/>
+          </a:xfrm>
+          <a:prstGeom prst="roundRect">
+            <a:avLst>
+              <a:gd name="adj" fmla="val 2000"/>
+            </a:avLst>
+          </a:prstGeom>
+          <a:solidFill>
+            <a:srgbClr val="0B132B"/>
+          </a:solidFill>
+          <a:ln w="19050">
+            <a:solidFill>
+              <a:srgbClr val="1C2541"/>
+            </a:solidFill>
+          </a:ln>
+        </p:spPr>
+        <p:style>
+          <a:lnRef idx="1">
+            <a:schemeClr val="accent1"/>
+          </a:lnRef>
+          <a:fillRef idx="3">
+            <a:schemeClr val="accent1"/>
+          </a:fillRef>
+          <a:effectRef idx="2">
+            <a:schemeClr val="accent1"/>
+          </a:effectRef>
+          <a:fontRef idx="minor">
+            <a:schemeClr val="lt1"/>
+          </a:fontRef>
+        </p:style>
+        <p:txBody>
+          <a:bodyPr rtlCol="0" anchor="ctr"/>
+          <a:lstStyle/>
+          <a:p>
+            <a:pPr algn="ctr"/>
+          </a:p>
+        </p:txBody>
+      </p:sp>
+      <p:sp>
+        <p:nvSpPr>
+          <p:cNvPr id="9" name="TextBox 8"/>
+          <p:cNvSpPr txBox="1"/>
+          <p:nvPr/>
+        </p:nvSpPr>
+        <p:spPr>
+          <a:xfrm>
+            <a:off x="868680" y="1261872"/>
+            <a:ext cx="4846320" cy="292608"/>
+          </a:xfrm>
+          <a:prstGeom prst="rect">
+            <a:avLst/>
+          </a:prstGeom>
+          <a:noFill/>
+        </p:spPr>
+        <p:txBody>
+          <a:bodyPr wrap="none" lIns="0" tIns="0" rIns="0" bIns="0">
+            <a:spAutoFit/>
+          </a:bodyPr>
+          <a:lstStyle/>
+          <a:p>
+            <a:pPr>
+              <a:defRPr sz="1050" b="1">
+                <a:solidFill>
+                  <a:srgbClr val="0EA5E9"/>
+                </a:solidFill>
+                <a:latin typeface="Consolas"/>
+              </a:defRPr>
+            </a:pPr>
+            <a:r>
+              <a:t>&gt;_  Cấu hình OpenLane (config.json)</a:t>
+            </a:r>
+          </a:p>
+        </p:txBody>
+      </p:sp>
+      <p:sp>
+        <p:nvSpPr>
+          <p:cNvPr id="10" name="TextBox 9"/>
+          <p:cNvSpPr txBox="1"/>
+          <p:nvPr/>
+        </p:nvSpPr>
+        <p:spPr>
+          <a:xfrm>
+            <a:off x="868680" y="1554480"/>
+            <a:ext cx="4846320" cy="2880360"/>
+          </a:xfrm>
+          <a:prstGeom prst="rect">
+            <a:avLst/>
+          </a:prstGeom>
+          <a:noFill/>
+        </p:spPr>
+        <p:txBody>
+          <a:bodyPr wrap="square" lIns="0" tIns="0" rIns="0" bIns="0">
+            <a:spAutoFit/>
+          </a:bodyPr>
+          <a:lstStyle/>
+          <a:p>
+            <a:pPr>
+              <a:lnSpc>
+                <a:spcPct val="112000"/>
+              </a:lnSpc>
+              <a:spcAft>
+                <a:spcPts val="0"/>
+              </a:spcAft>
+              <a:defRPr sz="1050">
+                <a:solidFill>
+                  <a:srgbClr val="FFFFFF"/>
+                </a:solidFill>
+                <a:latin typeface="Consolas"/>
+              </a:defRPr>
+            </a:pPr>
+            <a:r>
+              <a:t>{</a:t>
+            </a:r>
+          </a:p>
+          <a:p>
+            <a:pPr>
+              <a:lnSpc>
+                <a:spcPct val="112000"/>
+              </a:lnSpc>
+              <a:spcAft>
+                <a:spcPts val="0"/>
+              </a:spcAft>
+              <a:defRPr sz="1050">
+                <a:solidFill>
+                  <a:srgbClr val="FFFFFF"/>
+                </a:solidFill>
+                <a:latin typeface="Consolas"/>
+              </a:defRPr>
+            </a:pPr>
+            <a:r>
+              <a:t>  "DESIGN_NAME": "rdm6300_picorv32_soc",</a:t>
+            </a:r>
+          </a:p>
+          <a:p>
+            <a:pPr>
+              <a:lnSpc>
+                <a:spcPct val="112000"/>
+              </a:lnSpc>
+              <a:spcAft>
+                <a:spcPts val="0"/>
+              </a:spcAft>
+              <a:defRPr sz="1050">
+                <a:solidFill>
+                  <a:srgbClr val="FFFFFF"/>
+                </a:solidFill>
+                <a:latin typeface="Consolas"/>
+              </a:defRPr>
+            </a:pPr>
+            <a:r>
+              <a:t>  "PDK": "sky130A",  "STD_CELL_LIBRARY": "sky130_fd_sc_hd",</a:t>
+            </a:r>
+          </a:p>
+          <a:p>
+            <a:pPr>
+              <a:lnSpc>
+                <a:spcPct val="112000"/>
+              </a:lnSpc>
+              <a:spcAft>
+                <a:spcPts val="0"/>
+              </a:spcAft>
+              <a:defRPr sz="1050">
+                <a:solidFill>
+                  <a:srgbClr val="FFFFFF"/>
+                </a:solidFill>
+                <a:latin typeface="Consolas"/>
+              </a:defRPr>
+            </a:pPr>
+            <a:r>
+              <a:t>  "CLOCK_PERIOD": 20.0, // 50 MHz Clock</a:t>
+            </a:r>
+          </a:p>
+          <a:p>
+            <a:pPr>
+              <a:lnSpc>
+                <a:spcPct val="112000"/>
+              </a:lnSpc>
+              <a:spcAft>
+                <a:spcPts val="0"/>
+              </a:spcAft>
+              <a:defRPr sz="1050">
+                <a:solidFill>
+                  <a:srgbClr val="FFFFFF"/>
+                </a:solidFill>
+                <a:latin typeface="Consolas"/>
+              </a:defRPr>
+            </a:pPr>
+            <a:r>
+              <a:t>  "FP_CORE_UTIL": 26,   // 26% Core Density</a:t>
+            </a:r>
+          </a:p>
+          <a:p>
+            <a:pPr>
+              <a:lnSpc>
+                <a:spcPct val="112000"/>
+              </a:lnSpc>
+              <a:spcAft>
+                <a:spcPts val="0"/>
+              </a:spcAft>
+              <a:defRPr sz="1050">
+                <a:solidFill>
+                  <a:srgbClr val="FFFFFF"/>
+                </a:solidFill>
+                <a:latin typeface="Consolas"/>
+              </a:defRPr>
+            </a:pPr>
+            <a:r>
+              <a:t>  "MAX_FANOUT_CONSTRAINT": 12,</a:t>
+            </a:r>
+          </a:p>
+          <a:p>
+            <a:pPr>
+              <a:lnSpc>
+                <a:spcPct val="112000"/>
+              </a:lnSpc>
+              <a:spcAft>
+                <a:spcPts val="0"/>
+              </a:spcAft>
+              <a:defRPr sz="1050">
+                <a:solidFill>
+                  <a:srgbClr val="FFFFFF"/>
+                </a:solidFill>
+                <a:latin typeface="Consolas"/>
+              </a:defRPr>
+            </a:pPr>
+            <a:r>
+              <a:t>  "PL_RESIZER_HOLD_SLACK_MARGIN": 0.6,</a:t>
+            </a:r>
+          </a:p>
+          <a:p>
+            <a:pPr>
+              <a:lnSpc>
+                <a:spcPct val="112000"/>
+              </a:lnSpc>
+              <a:spcAft>
+                <a:spcPts val="0"/>
+              </a:spcAft>
+              <a:defRPr sz="1050">
+                <a:solidFill>
+                  <a:srgbClr val="FFFFFF"/>
+                </a:solidFill>
+                <a:latin typeface="Consolas"/>
+              </a:defRPr>
+            </a:pPr>
+            <a:r>
+              <a:t>  "RUN_HEURISTIC_DIODE_INSERTION": true,</a:t>
+            </a:r>
+          </a:p>
+          <a:p>
+            <a:pPr>
+              <a:lnSpc>
+                <a:spcPct val="112000"/>
+              </a:lnSpc>
+              <a:spcAft>
+                <a:spcPts val="0"/>
+              </a:spcAft>
+              <a:defRPr sz="1050">
+                <a:solidFill>
+                  <a:srgbClr val="FFFFFF"/>
+                </a:solidFill>
+                <a:latin typeface="Consolas"/>
+              </a:defRPr>
+            </a:pPr>
+            <a:r>
+              <a:t>  "HEURISTIC_ANTENNA_THRESHOLD": 24,</a:t>
+            </a:r>
+          </a:p>
+          <a:p>
+            <a:pPr>
+              <a:lnSpc>
+                <a:spcPct val="112000"/>
+              </a:lnSpc>
+              <a:spcAft>
+                <a:spcPts val="0"/>
+              </a:spcAft>
+              <a:defRPr sz="1050">
+                <a:solidFill>
+                  <a:srgbClr val="FFFFFF"/>
+                </a:solidFill>
+                <a:latin typeface="Consolas"/>
+              </a:defRPr>
+            </a:pPr>
+            <a:r>
+              <a:t>  "GRT_ANTENNA_ITERS": 35,</a:t>
+            </a:r>
+          </a:p>
+          <a:p>
+            <a:pPr>
+              <a:lnSpc>
+                <a:spcPct val="112000"/>
+              </a:lnSpc>
+              <a:spcAft>
+                <a:spcPts val="0"/>
+              </a:spcAft>
+              <a:defRPr sz="1050">
+                <a:solidFill>
+                  <a:srgbClr val="FFFFFF"/>
+                </a:solidFill>
+                <a:latin typeface="Consolas"/>
+              </a:defRPr>
+            </a:pPr>
+            <a:r>
+              <a:t>  "RUN_ANTENNA_REPAIR": true,</a:t>
+            </a:r>
+          </a:p>
+          <a:p>
+            <a:pPr>
+              <a:lnSpc>
+                <a:spcPct val="112000"/>
+              </a:lnSpc>
+              <a:spcAft>
+                <a:spcPts val="0"/>
+              </a:spcAft>
+              <a:defRPr sz="1050">
+                <a:solidFill>
+                  <a:srgbClr val="FFFFFF"/>
+                </a:solidFill>
+                <a:latin typeface="Consolas"/>
+              </a:defRPr>
+            </a:pPr>
+            <a:r>
+              <a:t>  "SYNTH_STRATEGY": "AREA 0"</a:t>
+            </a:r>
+          </a:p>
+          <a:p>
+            <a:pPr>
+              <a:lnSpc>
+                <a:spcPct val="112000"/>
+              </a:lnSpc>
+              <a:spcAft>
+                <a:spcPts val="0"/>
+              </a:spcAft>
+              <a:defRPr sz="1050">
+                <a:solidFill>
+                  <a:srgbClr val="FFFFFF"/>
+                </a:solidFill>
+                <a:latin typeface="Consolas"/>
+              </a:defRPr>
+            </a:pPr>
+            <a:r>
+              <a:t>}</a:t>
+            </a:r>
+          </a:p>
+        </p:txBody>
+      </p:sp>
+      <p:sp>
+        <p:nvSpPr>
+          <p:cNvPr id="11" name="Rounded Rectangle 10"/>
+          <p:cNvSpPr/>
+          <p:nvPr/>
+        </p:nvSpPr>
+        <p:spPr>
+          <a:xfrm>
+            <a:off x="6080760" y="1188720"/>
+            <a:ext cx="5379415" cy="3291840"/>
+          </a:xfrm>
+          <a:prstGeom prst="roundRect">
+            <a:avLst>
+              <a:gd name="adj" fmla="val 2000"/>
+            </a:avLst>
+          </a:prstGeom>
+          <a:solidFill>
+            <a:srgbClr val="FFFFFF"/>
+          </a:solidFill>
+          <a:ln w="19050">
+            <a:solidFill>
+              <a:srgbClr val="2563EB"/>
+            </a:solidFill>
+          </a:ln>
+        </p:spPr>
+        <p:style>
+          <a:lnRef idx="1">
+            <a:schemeClr val="accent1"/>
+          </a:lnRef>
+          <a:fillRef idx="3">
+            <a:schemeClr val="accent1"/>
+          </a:fillRef>
+          <a:effectRef idx="2">
+            <a:schemeClr val="accent1"/>
+          </a:effectRef>
+          <a:fontRef idx="minor">
+            <a:schemeClr val="lt1"/>
+          </a:fontRef>
+        </p:style>
+        <p:txBody>
+          <a:bodyPr rtlCol="0" anchor="ctr"/>
+          <a:lstStyle/>
+          <a:p>
+            <a:pPr algn="ctr"/>
+          </a:p>
+        </p:txBody>
+      </p:sp>
+      <p:sp>
+        <p:nvSpPr>
+          <p:cNvPr id="12" name="TextBox 11"/>
+          <p:cNvSpPr txBox="1"/>
+          <p:nvPr/>
+        </p:nvSpPr>
+        <p:spPr>
+          <a:xfrm>
+            <a:off x="6263640" y="1261872"/>
+            <a:ext cx="5013655" cy="274320"/>
+          </a:xfrm>
+          <a:prstGeom prst="rect">
+            <a:avLst/>
+          </a:prstGeom>
+          <a:noFill/>
+        </p:spPr>
+        <p:txBody>
+          <a:bodyPr wrap="none" lIns="0" tIns="0">
+            <a:spAutoFit/>
+          </a:bodyPr>
+          <a:lstStyle/>
+          <a:p>
+            <a:pPr>
+              <a:defRPr sz="1100" b="1">
+                <a:solidFill>
+                  <a:srgbClr val="2563EB"/>
+                </a:solidFill>
+                <a:latin typeface="Segoe UI"/>
+              </a:defRPr>
+            </a:pPr>
+            <a:r>
+              <a:t>🖼️ Bản Vẽ Layout OpenROAD (Die 1.87 mm² - 1362 x 1373 µm)</a:t>
+            </a:r>
+          </a:p>
+        </p:txBody>
+      </p:sp>
+      <p:pic>
+        <p:nvPicPr>
+          <p:cNvPr id="13" name="Picture 12" descr="OpenROAD.png"/>
+          <p:cNvPicPr>
+            <a:picLocks noChangeAspect="1"/>
+          </p:cNvPicPr>
+          <p:nvPr/>
+        </p:nvPicPr>
+        <p:blipFill>
+          <a:blip r:embed="rId2"/>
+          <a:stretch>
+            <a:fillRect/>
+          </a:stretch>
+        </p:blipFill>
+        <p:spPr>
+          <a:xfrm>
+            <a:off x="6830568" y="1572768"/>
+            <a:ext cx="3886200" cy="2816352"/>
+          </a:xfrm>
+          <a:prstGeom prst="rect">
+            <a:avLst/>
+          </a:prstGeom>
+        </p:spPr>
+      </p:pic>
+      <p:sp>
+        <p:nvSpPr>
+          <p:cNvPr id="14" name="Rounded Rectangle 13"/>
+          <p:cNvSpPr/>
+          <p:nvPr/>
+        </p:nvSpPr>
+        <p:spPr>
+          <a:xfrm>
+            <a:off x="731520" y="4617720"/>
+            <a:ext cx="10728655" cy="1691640"/>
+          </a:xfrm>
+          <a:prstGeom prst="roundRect">
+            <a:avLst>
+              <a:gd name="adj" fmla="val 2000"/>
+            </a:avLst>
+          </a:prstGeom>
+          <a:solidFill>
+            <a:srgbClr val="FFFFFF"/>
+          </a:solidFill>
+          <a:ln w="25400">
+            <a:solidFill>
+              <a:srgbClr val="10B981"/>
+            </a:solidFill>
+          </a:ln>
+        </p:spPr>
+        <p:style>
+          <a:lnRef idx="1">
+            <a:schemeClr val="accent1"/>
+          </a:lnRef>
+          <a:fillRef idx="3">
+            <a:schemeClr val="accent1"/>
+          </a:fillRef>
+          <a:effectRef idx="2">
+            <a:schemeClr val="accent1"/>
+          </a:effectRef>
+          <a:fontRef idx="minor">
+            <a:schemeClr val="lt1"/>
+          </a:fontRef>
+        </p:style>
+        <p:txBody>
+          <a:bodyPr rtlCol="0" anchor="ctr"/>
+          <a:lstStyle/>
+          <a:p>
+            <a:pPr algn="ctr"/>
+          </a:p>
+        </p:txBody>
+      </p:sp>
+      <p:pic>
+        <p:nvPicPr>
+          <p:cNvPr id="15" name="Picture 14" descr="AntennaLvsDrc.png"/>
+          <p:cNvPicPr>
+            <a:picLocks noChangeAspect="1"/>
+          </p:cNvPicPr>
+          <p:nvPr/>
+        </p:nvPicPr>
+        <p:blipFill>
+          <a:blip r:embed="rId3"/>
+          <a:stretch>
+            <a:fillRect/>
+          </a:stretch>
+        </p:blipFill>
+        <p:spPr>
+          <a:xfrm>
+            <a:off x="868680" y="4727448"/>
+            <a:ext cx="6309360" cy="1463040"/>
+          </a:xfrm>
+          <a:prstGeom prst="rect">
+            <a:avLst/>
+          </a:prstGeom>
+        </p:spPr>
+      </p:pic>
+      <p:sp>
+        <p:nvSpPr>
+          <p:cNvPr id="16" name="TextBox 15"/>
+          <p:cNvSpPr txBox="1"/>
+          <p:nvPr/>
+        </p:nvSpPr>
+        <p:spPr>
+          <a:xfrm>
+            <a:off x="7360920" y="4709160"/>
+            <a:ext cx="3977639" cy="1508760"/>
+          </a:xfrm>
+          <a:prstGeom prst="rect">
+            <a:avLst/>
+          </a:prstGeom>
+          <a:noFill/>
+        </p:spPr>
+        <p:txBody>
+          <a:bodyPr wrap="square" lIns="0" tIns="0" rIns="0" bIns="0">
+            <a:spAutoFit/>
+          </a:bodyPr>
+          <a:lstStyle/>
+          <a:p>
+            <a:pPr>
+              <a:spcAft>
+                <a:spcPts val="400"/>
+              </a:spcAft>
+              <a:defRPr sz="1200" b="1">
+                <a:solidFill>
+                  <a:srgbClr val="10B981"/>
+                </a:solidFill>
+                <a:latin typeface="Segoe UI"/>
+              </a:defRPr>
+            </a:pPr>
+            <a:r>
+              <a:t>✅ KÝ DUYỆT TAPE-OUT READY (100% PASS)</a:t>
+            </a:r>
+          </a:p>
+          <a:p>
+            <a:pPr>
+              <a:lnSpc>
+                <a:spcPct val="110000"/>
+              </a:lnSpc>
+              <a:spcAft>
+                <a:spcPts val="150"/>
+              </a:spcAft>
+              <a:defRPr sz="980">
+                <a:solidFill>
+                  <a:srgbClr val="0F172A"/>
+                </a:solidFill>
+                <a:latin typeface="Segoe UI"/>
+              </a:defRPr>
+            </a:pPr>
+            <a:r>
+              <a:t>• Antenna Sign-off: 0 vi phạm (3,471 diodes xả tĩnh điện bảo vệ oxit cổng)</a:t>
+            </a:r>
+          </a:p>
+          <a:p>
+            <a:pPr>
+              <a:lnSpc>
+                <a:spcPct val="110000"/>
+              </a:lnSpc>
+              <a:spcAft>
+                <a:spcPts val="150"/>
+              </a:spcAft>
+              <a:defRPr sz="980">
+                <a:solidFill>
+                  <a:srgbClr val="0F172A"/>
+                </a:solidFill>
+                <a:latin typeface="Segoe UI"/>
+              </a:defRPr>
+            </a:pPr>
+            <a:r>
+              <a:t>• LVS Sign-off (Netgen): 0 lỗi (Netlists match uniquely 100%, 0 unmatched)</a:t>
+            </a:r>
+          </a:p>
+          <a:p>
+            <a:pPr>
+              <a:lnSpc>
+                <a:spcPct val="110000"/>
+              </a:lnSpc>
+              <a:spcAft>
+                <a:spcPts val="150"/>
+              </a:spcAft>
+              <a:defRPr sz="980">
+                <a:solidFill>
+                  <a:srgbClr val="0F172A"/>
+                </a:solidFill>
+                <a:latin typeface="Segoe UI"/>
+              </a:defRPr>
+            </a:pPr>
+            <a:r>
+              <a:t>• DRC Sign-off (Magic/KLayout): 0 lỗi (Zero DRC violations trên toàn bộ 5 lớp kim loại)</a:t>
+            </a:r>
+          </a:p>
+          <a:p>
+            <a:pPr>
+              <a:lnSpc>
+                <a:spcPct val="110000"/>
+              </a:lnSpc>
+              <a:spcAft>
+                <a:spcPts val="150"/>
+              </a:spcAft>
+              <a:defRPr sz="980">
+                <a:solidFill>
+                  <a:srgbClr val="0F172A"/>
+                </a:solidFill>
+                <a:latin typeface="Segoe UI"/>
+              </a:defRPr>
+            </a:pPr>
+            <a:r>
+              <a:t>• PDN &amp; Timing: Worst IR Drop: 1.39 mV (&lt; 0.08% VDD) | WNS = 0.00 ns</a:t>
+            </a:r>
+          </a:p>
+        </p:txBody>
+      </p:sp>
+    </p:spTree>
+  </p:cSld>
+  <p:clrMapOvr>
+    <a:masterClrMapping/>
+  </p:clrMapOvr>
+</p:sld>
+</file>
+
+<file path=ppt/slides/slide12.xml><?xml version="1.0" encoding="utf-8"?>
+<p:sld xmlns:a="http://schemas.openxmlformats.org/drawingml/2006/main" xmlns:p="http://schemas.openxmlformats.org/presentationml/2006/main" xmlns:r="http://schemas.openxmlformats.org/officeDocument/2006/relationships">
+  <p:cSld>
+    <p:spTree>
+      <p:nvGrpSpPr>
+        <p:cNvPr id="1" name=""/>
+        <p:cNvGrpSpPr/>
+        <p:nvPr/>
+      </p:nvGrpSpPr>
+      <p:grpSpPr/>
+      <p:sp>
+        <p:nvSpPr>
+          <p:cNvPr id="2" name="Rectangle 1"/>
+          <p:cNvSpPr/>
+          <p:nvPr/>
+        </p:nvSpPr>
+        <p:spPr>
+          <a:xfrm>
+            <a:off x="0" y="0"/>
+            <a:ext cx="12191695" cy="6858000"/>
+          </a:xfrm>
+          <a:prstGeom prst="rect">
+            <a:avLst/>
+          </a:prstGeom>
+          <a:solidFill>
+            <a:srgbClr val="F8FAFC"/>
+          </a:solidFill>
+          <a:ln>
+            <a:noFill/>
+          </a:ln>
+        </p:spPr>
+        <p:style>
+          <a:lnRef idx="1">
+            <a:schemeClr val="accent1"/>
+          </a:lnRef>
+          <a:fillRef idx="3">
+            <a:schemeClr val="accent1"/>
+          </a:fillRef>
+          <a:effectRef idx="2">
+            <a:schemeClr val="accent1"/>
+          </a:effectRef>
+          <a:fontRef idx="minor">
+            <a:schemeClr val="lt1"/>
+          </a:fontRef>
+        </p:style>
+        <p:txBody>
+          <a:bodyPr rtlCol="0" anchor="ctr"/>
+          <a:lstStyle/>
+          <a:p>
+            <a:pPr algn="ctr"/>
+          </a:p>
+        </p:txBody>
+      </p:sp>
+      <p:sp>
+        <p:nvSpPr>
+          <p:cNvPr id="3" name="Rectangle 2"/>
+          <p:cNvSpPr/>
+          <p:nvPr/>
+        </p:nvSpPr>
+        <p:spPr>
+          <a:xfrm>
+            <a:off x="0" y="0"/>
+            <a:ext cx="12191695" cy="91440"/>
+          </a:xfrm>
+          <a:prstGeom prst="rect">
+            <a:avLst/>
+          </a:prstGeom>
+          <a:solidFill>
+            <a:srgbClr val="2563EB"/>
+          </a:solidFill>
+          <a:ln>
+            <a:noFill/>
+          </a:ln>
+        </p:spPr>
+        <p:style>
+          <a:lnRef idx="1">
+            <a:schemeClr val="accent1"/>
+          </a:lnRef>
+          <a:fillRef idx="3">
+            <a:schemeClr val="accent1"/>
+          </a:fillRef>
+          <a:effectRef idx="2">
+            <a:schemeClr val="accent1"/>
+          </a:effectRef>
+          <a:fontRef idx="minor">
+            <a:schemeClr val="lt1"/>
+          </a:fontRef>
+        </p:style>
+        <p:txBody>
+          <a:bodyPr rtlCol="0" anchor="ctr"/>
+          <a:lstStyle/>
+          <a:p>
+            <a:pPr algn="ctr"/>
+          </a:p>
+        </p:txBody>
+      </p:sp>
+      <p:sp>
+        <p:nvSpPr>
+          <p:cNvPr id="4" name="TextBox 3"/>
+          <p:cNvSpPr txBox="1"/>
+          <p:nvPr/>
+        </p:nvSpPr>
+        <p:spPr>
+          <a:xfrm>
+            <a:off x="731520" y="201168"/>
+            <a:ext cx="10728655" cy="868680"/>
+          </a:xfrm>
+          <a:prstGeom prst="rect">
+            <a:avLst/>
+          </a:prstGeom>
+          <a:noFill/>
+        </p:spPr>
+        <p:txBody>
+          <a:bodyPr wrap="square" lIns="0" tIns="0" rIns="0" bIns="0">
+            <a:spAutoFit/>
+          </a:bodyPr>
+          <a:lstStyle/>
+          <a:p>
+            <a:pPr>
+              <a:spcAft>
+                <a:spcPts val="200"/>
+              </a:spcAft>
+              <a:defRPr sz="1050" b="1">
+                <a:solidFill>
+                  <a:srgbClr val="2563EB"/>
+                </a:solidFill>
+                <a:latin typeface="Segoe UI"/>
+              </a:defRPr>
+            </a:pPr>
+            <a:r>
+              <a:t>PHẦN 6: THIẾT KẾ VẬT LÝ ASIC</a:t>
+            </a:r>
+          </a:p>
+          <a:p>
+            <a:pPr>
+              <a:defRPr sz="1700" b="1">
+                <a:solidFill>
+                  <a:srgbClr val="0F172A"/>
+                </a:solidFill>
+                <a:latin typeface="Segoe UI"/>
+              </a:defRPr>
+            </a:pPr>
+            <a:r>
+              <a:t>Tổng Hợp Kết Quả Thiết Kế Vật Lý &amp; Chỉ Số PPA (OpenLane 2 / SkyWater 130nm)</a:t>
+            </a:r>
+          </a:p>
+        </p:txBody>
+      </p:sp>
+      <p:sp>
+        <p:nvSpPr>
+          <p:cNvPr id="5" name="Rectangle 4"/>
+          <p:cNvSpPr/>
+          <p:nvPr/>
+        </p:nvSpPr>
+        <p:spPr>
+          <a:xfrm>
+            <a:off x="731520" y="6446520"/>
+            <a:ext cx="10728655" cy="18288"/>
+          </a:xfrm>
+          <a:prstGeom prst="rect">
+            <a:avLst/>
+          </a:prstGeom>
+          <a:solidFill>
+            <a:srgbClr val="E2E8F0"/>
+          </a:solidFill>
+          <a:ln>
+            <a:noFill/>
+          </a:ln>
+        </p:spPr>
+        <p:style>
+          <a:lnRef idx="1">
+            <a:schemeClr val="accent1"/>
+          </a:lnRef>
+          <a:fillRef idx="3">
+            <a:schemeClr val="accent1"/>
+          </a:fillRef>
+          <a:effectRef idx="2">
+            <a:schemeClr val="accent1"/>
+          </a:effectRef>
+          <a:fontRef idx="minor">
+            <a:schemeClr val="lt1"/>
+          </a:fontRef>
+        </p:style>
+        <p:txBody>
+          <a:bodyPr rtlCol="0" anchor="ctr"/>
+          <a:lstStyle/>
+          <a:p>
+            <a:pPr algn="ctr"/>
+          </a:p>
+        </p:txBody>
+      </p:sp>
+      <p:sp>
+        <p:nvSpPr>
+          <p:cNvPr id="6" name="TextBox 5"/>
+          <p:cNvSpPr txBox="1"/>
+          <p:nvPr/>
+        </p:nvSpPr>
+        <p:spPr>
+          <a:xfrm>
+            <a:off x="731520" y="6492240"/>
+            <a:ext cx="7315200" cy="274320"/>
+          </a:xfrm>
+          <a:prstGeom prst="rect">
+            <a:avLst/>
+          </a:prstGeom>
+          <a:noFill/>
+        </p:spPr>
+        <p:txBody>
+          <a:bodyPr wrap="none" lIns="0" tIns="0" rIns="0" bIns="0">
+            <a:spAutoFit/>
+          </a:bodyPr>
+          <a:lstStyle/>
+          <a:p>
+            <a:pPr>
+              <a:defRPr sz="950">
+                <a:solidFill>
+                  <a:srgbClr val="475569"/>
+                </a:solidFill>
+                <a:latin typeface="Segoe UI"/>
+              </a:defRPr>
+            </a:pPr>
+            <a:r>
+              <a:t>Đồ Án: SoC PicoRV32 RFID RDM6300 &amp; SPI Flash | FPT Jetking Chip Design - SEM3 | HV: Thái Tuấn Hiệp</a:t>
+            </a:r>
+          </a:p>
+        </p:txBody>
+      </p:sp>
+      <p:sp>
+        <p:nvSpPr>
+          <p:cNvPr id="7" name="TextBox 6"/>
+          <p:cNvSpPr txBox="1"/>
+          <p:nvPr/>
+        </p:nvSpPr>
+        <p:spPr>
+          <a:xfrm>
+            <a:off x="10058400" y="6492240"/>
+            <a:ext cx="1401775" cy="274320"/>
+          </a:xfrm>
+          <a:prstGeom prst="rect">
+            <a:avLst/>
+          </a:prstGeom>
+          <a:noFill/>
+        </p:spPr>
+        <p:txBody>
+          <a:bodyPr wrap="none" lIns="0" tIns="0" rIns="0" bIns="0">
+            <a:spAutoFit/>
+          </a:bodyPr>
+          <a:lstStyle/>
+          <a:p>
+            <a:pPr algn="r">
+              <a:defRPr sz="950" b="1">
+                <a:solidFill>
+                  <a:srgbClr val="2563EB"/>
+                </a:solidFill>
+                <a:latin typeface="Segoe UI"/>
+              </a:defRPr>
+            </a:pPr>
+            <a:r>
+              <a:t>12 / 14</a:t>
             </a:r>
           </a:p>
         </p:txBody>
@@ -5490,7 +6226,7 @@
 </p:sld>
 </file>
 
-<file path=ppt/slides/slide12.xml><?xml version="1.0" encoding="utf-8"?>
+<file path=ppt/slides/slide13.xml><?xml version="1.0" encoding="utf-8"?>
 <p:sld xmlns:a="http://schemas.openxmlformats.org/drawingml/2006/main" xmlns:p="http://schemas.openxmlformats.org/presentationml/2006/main" xmlns:r="http://schemas.openxmlformats.org/officeDocument/2006/relationships">
   <p:cSld>
     <p:spTree>
@@ -5748,7 +6484,7 @@
               </a:defRPr>
             </a:pPr>
             <a:r>
-              <a:t>12 / 13</a:t>
+              <a:t>13 / 14</a:t>
             </a:r>
           </a:p>
         </p:txBody>
@@ -6846,7 +7582,7 @@
 </p:sld>
 </file>
 
-<file path=ppt/slides/slide13.xml><?xml version="1.0" encoding="utf-8"?>
+<file path=ppt/slides/slide14.xml><?xml version="1.0" encoding="utf-8"?>
 <p:sld xmlns:a="http://schemas.openxmlformats.org/drawingml/2006/main" xmlns:p="http://schemas.openxmlformats.org/presentationml/2006/main" xmlns:r="http://schemas.openxmlformats.org/officeDocument/2006/relationships">
   <p:cSld>
     <p:spTree>
@@ -6968,7 +7704,7 @@
           <a:p>
             <a:pPr>
               <a:spcAft>
-                <a:spcPts val="2600"/>
+                <a:spcPts val="1600"/>
               </a:spcAft>
               <a:defRPr sz="2800" b="1">
                 <a:solidFill>
@@ -6984,14 +7720,14 @@
           <a:p>
             <a:pPr>
               <a:lnSpc>
-                <a:spcPct val="125000"/>
+                <a:spcPct val="118000"/>
               </a:lnSpc>
               <a:spcAft>
-                <a:spcPts val="2000"/>
+                <a:spcPts val="1300"/>
               </a:spcAft>
             </a:pPr>
             <a:r>
-              <a:rPr sz="1750" b="1">
+              <a:rPr sz="1600" b="1">
                 <a:solidFill>
                   <a:srgbClr val="38BDF8"/>
                 </a:solidFill>
@@ -7000,7 +7736,7 @@
               <a:t>1. Tự chủ kiến trúc SoC:</a:t>
             </a:r>
             <a:r>
-              <a:rPr sz="1650">
+              <a:rPr sz="1500">
                 <a:solidFill>
                   <a:srgbClr val="F1F5F9"/>
                 </a:solidFill>
@@ -7012,14 +7748,14 @@
           <a:p>
             <a:pPr>
               <a:lnSpc>
-                <a:spcPct val="125000"/>
+                <a:spcPct val="118000"/>
               </a:lnSpc>
               <a:spcAft>
-                <a:spcPts val="2000"/>
+                <a:spcPts val="1300"/>
               </a:spcAft>
             </a:pPr>
             <a:r>
-              <a:rPr sz="1750" b="1">
+              <a:rPr sz="1600" b="1">
                 <a:solidFill>
                   <a:srgbClr val="38BDF8"/>
                 </a:solidFill>
@@ -7028,7 +7764,7 @@
               <a:t>2. Tối ưu thực thi nhúng:</a:t>
             </a:r>
             <a:r>
-              <a:rPr sz="1650">
+              <a:rPr sz="1500">
                 <a:solidFill>
                   <a:srgbClr val="F1F5F9"/>
                 </a:solidFill>
@@ -7040,14 +7776,14 @@
           <a:p>
             <a:pPr>
               <a:lnSpc>
-                <a:spcPct val="125000"/>
+                <a:spcPct val="118000"/>
               </a:lnSpc>
               <a:spcAft>
-                <a:spcPts val="2000"/>
+                <a:spcPts val="1300"/>
               </a:spcAft>
             </a:pPr>
             <a:r>
-              <a:rPr sz="1750" b="1">
+              <a:rPr sz="1600" b="1">
                 <a:solidFill>
                   <a:srgbClr val="38BDF8"/>
                 </a:solidFill>
@@ -7056,7 +7792,7 @@
               <a:t>3. Kiểm chứng thực tế 100%:</a:t>
             </a:r>
             <a:r>
-              <a:rPr sz="1650">
+              <a:rPr sz="1500">
                 <a:solidFill>
                   <a:srgbClr val="F1F5F9"/>
                 </a:solidFill>
@@ -7068,14 +7804,14 @@
           <a:p>
             <a:pPr>
               <a:lnSpc>
-                <a:spcPct val="125000"/>
+                <a:spcPct val="118000"/>
               </a:lnSpc>
               <a:spcAft>
-                <a:spcPts val="2000"/>
+                <a:spcPts val="1300"/>
               </a:spcAft>
             </a:pPr>
             <a:r>
-              <a:rPr sz="1750" b="1">
+              <a:rPr sz="1600" b="1">
                 <a:solidFill>
                   <a:srgbClr val="38BDF8"/>
                 </a:solidFill>
@@ -7084,7 +7820,7 @@
               <a:t>4. Đạt chuẩn ASIC Tape-out:</a:t>
             </a:r>
             <a:r>
-              <a:rPr sz="1650">
+              <a:rPr sz="1500">
                 <a:solidFill>
                   <a:srgbClr val="F1F5F9"/>
                 </a:solidFill>
@@ -7096,7 +7832,7 @@
           <a:p>
             <a:pPr>
               <a:spcBef>
-                <a:spcPts val="1400"/>
+                <a:spcPts val="1000"/>
               </a:spcBef>
               <a:defRPr sz="1400">
                 <a:solidFill>
@@ -7112,9 +7848,9 @@
           <a:p>
             <a:pPr>
               <a:spcBef>
-                <a:spcPts val="1800"/>
+                <a:spcPts val="1200"/>
               </a:spcBef>
-              <a:defRPr sz="2200" b="1">
+              <a:defRPr sz="2000" b="1">
                 <a:solidFill>
                   <a:srgbClr val="FFFFFF"/>
                 </a:solidFill>
@@ -7393,7 +8129,7 @@
               </a:defRPr>
             </a:pPr>
             <a:r>
-              <a:t>02 / 13</a:t>
+              <a:t>02 / 14</a:t>
             </a:r>
           </a:p>
         </p:txBody>
@@ -8507,7 +9243,7 @@
               </a:defRPr>
             </a:pPr>
             <a:r>
-              <a:t>03 / 13</a:t>
+              <a:t>03 / 14</a:t>
             </a:r>
           </a:p>
         </p:txBody>
@@ -8721,7 +9457,7 @@
               </a:defRPr>
             </a:pPr>
             <a:r>
-              <a:t>PHẦN 3: KIẾN TRÚC VI HỆ THỐNG SOC</a:t>
+              <a:t>PHẦN 1: GIỚI THIỆU DỰ ÁN</a:t>
             </a:r>
           </a:p>
           <a:p>
@@ -8734,7 +9470,7 @@
               </a:defRPr>
             </a:pPr>
             <a:r>
-              <a:t>Bảng Tra Cứu Địa Chỉ (Memory Map) &amp; Khai Báo Biến Trong C / RTL</a:t>
+              <a:t>Tổng Quan Những Gì Sản Phẩm Đã Thực Hiện Thành Công</a:t>
             </a:r>
           </a:p>
         </p:txBody>
@@ -8849,7 +9585,1226 @@
               </a:defRPr>
             </a:pPr>
             <a:r>
-              <a:t>04 / 13</a:t>
+              <a:t>04 / 14</a:t>
+            </a:r>
+          </a:p>
+        </p:txBody>
+      </p:sp>
+      <p:sp>
+        <p:nvSpPr>
+          <p:cNvPr id="8" name="Rounded Rectangle 7"/>
+          <p:cNvSpPr/>
+          <p:nvPr/>
+        </p:nvSpPr>
+        <p:spPr>
+          <a:xfrm>
+            <a:off x="731520" y="1152144"/>
+            <a:ext cx="5230368" cy="2487168"/>
+          </a:xfrm>
+          <a:prstGeom prst="roundRect">
+            <a:avLst>
+              <a:gd name="adj" fmla="val 2000"/>
+            </a:avLst>
+          </a:prstGeom>
+          <a:solidFill>
+            <a:srgbClr val="FFFFFF"/>
+          </a:solidFill>
+          <a:ln w="19050">
+            <a:solidFill>
+              <a:srgbClr val="2563EB"/>
+            </a:solidFill>
+          </a:ln>
+        </p:spPr>
+        <p:style>
+          <a:lnRef idx="1">
+            <a:schemeClr val="accent1"/>
+          </a:lnRef>
+          <a:fillRef idx="3">
+            <a:schemeClr val="accent1"/>
+          </a:fillRef>
+          <a:effectRef idx="2">
+            <a:schemeClr val="accent1"/>
+          </a:effectRef>
+          <a:fontRef idx="minor">
+            <a:schemeClr val="lt1"/>
+          </a:fontRef>
+        </p:style>
+        <p:txBody>
+          <a:bodyPr rtlCol="0" anchor="ctr"/>
+          <a:lstStyle/>
+          <a:p>
+            <a:pPr algn="ctr"/>
+          </a:p>
+        </p:txBody>
+      </p:sp>
+      <p:sp>
+        <p:nvSpPr>
+          <p:cNvPr id="9" name="Rounded Rectangle 8"/>
+          <p:cNvSpPr/>
+          <p:nvPr/>
+        </p:nvSpPr>
+        <p:spPr>
+          <a:xfrm>
+            <a:off x="841248" y="1243584"/>
+            <a:ext cx="5010912" cy="384048"/>
+          </a:xfrm>
+          <a:prstGeom prst="roundRect">
+            <a:avLst>
+              <a:gd name="adj" fmla="val 8000"/>
+            </a:avLst>
+          </a:prstGeom>
+          <a:solidFill>
+            <a:srgbClr val="EFF6FF"/>
+          </a:solidFill>
+          <a:ln w="15240">
+            <a:solidFill>
+              <a:srgbClr val="2563EB"/>
+            </a:solidFill>
+          </a:ln>
+        </p:spPr>
+        <p:style>
+          <a:lnRef idx="1">
+            <a:schemeClr val="accent1"/>
+          </a:lnRef>
+          <a:fillRef idx="3">
+            <a:schemeClr val="accent1"/>
+          </a:fillRef>
+          <a:effectRef idx="2">
+            <a:schemeClr val="accent1"/>
+          </a:effectRef>
+          <a:fontRef idx="minor">
+            <a:schemeClr val="lt1"/>
+          </a:fontRef>
+        </p:style>
+        <p:txBody>
+          <a:bodyPr rtlCol="0" anchor="ctr"/>
+          <a:lstStyle/>
+          <a:p>
+            <a:pPr algn="ctr"/>
+          </a:p>
+        </p:txBody>
+      </p:sp>
+      <p:sp>
+        <p:nvSpPr>
+          <p:cNvPr id="10" name="TextBox 9"/>
+          <p:cNvSpPr txBox="1"/>
+          <p:nvPr/>
+        </p:nvSpPr>
+        <p:spPr>
+          <a:xfrm>
+            <a:off x="877824" y="1252728"/>
+            <a:ext cx="4937760" cy="347472"/>
+          </a:xfrm>
+          <a:prstGeom prst="rect">
+            <a:avLst/>
+          </a:prstGeom>
+          <a:noFill/>
+        </p:spPr>
+        <p:txBody>
+          <a:bodyPr wrap="none" lIns="0" tIns="0" rIns="0" bIns="0">
+            <a:spAutoFit/>
+          </a:bodyPr>
+          <a:lstStyle/>
+          <a:p>
+            <a:pPr algn="l">
+              <a:defRPr sz="1280" b="1">
+                <a:solidFill>
+                  <a:srgbClr val="2563EB"/>
+                </a:solidFill>
+                <a:latin typeface="Segoe UI"/>
+              </a:defRPr>
+            </a:pPr>
+            <a:r>
+              <a:t>💻  [01]  THIẾT KẾ VI MẠCH RTL &amp; NỀN TẢNG SOC MỞ</a:t>
+            </a:r>
+          </a:p>
+        </p:txBody>
+      </p:sp>
+      <p:sp>
+        <p:nvSpPr>
+          <p:cNvPr id="11" name="TextBox 10"/>
+          <p:cNvSpPr txBox="1"/>
+          <p:nvPr/>
+        </p:nvSpPr>
+        <p:spPr>
+          <a:xfrm>
+            <a:off x="896112" y="1700784"/>
+            <a:ext cx="4901184" cy="1865376"/>
+          </a:xfrm>
+          <a:prstGeom prst="rect">
+            <a:avLst/>
+          </a:prstGeom>
+          <a:noFill/>
+        </p:spPr>
+        <p:txBody>
+          <a:bodyPr wrap="square" lIns="0" tIns="0" rIns="0" bIns="0">
+            <a:spAutoFit/>
+          </a:bodyPr>
+          <a:lstStyle/>
+          <a:p>
+            <a:pPr>
+              <a:lnSpc>
+                <a:spcPct val="115000"/>
+              </a:lnSpc>
+              <a:spcAft>
+                <a:spcPts val="550"/>
+              </a:spcAft>
+            </a:pPr>
+            <a:r>
+              <a:rPr sz="1250" b="1">
+                <a:solidFill>
+                  <a:srgbClr val="0F172A"/>
+                </a:solidFill>
+                <a:latin typeface="Segoe UI"/>
+              </a:rPr>
+              <a:t>• Thực thi Firmware C mượt mà: </a:t>
+            </a:r>
+            <a:r>
+              <a:rPr sz="1200">
+                <a:solidFill>
+                  <a:srgbClr val="334155"/>
+                </a:solidFill>
+                <a:latin typeface="Segoe UI"/>
+              </a:rPr>
+              <a:t>RTL tích hợp CPU RISC-V PicoRV32 (RV32I), kéo lệnh và chạy trực tiếp code C bare-metal.</a:t>
+            </a:r>
+          </a:p>
+          <a:p>
+            <a:pPr>
+              <a:lnSpc>
+                <a:spcPct val="115000"/>
+              </a:lnSpc>
+              <a:spcAft>
+                <a:spcPts val="550"/>
+              </a:spcAft>
+            </a:pPr>
+            <a:r>
+              <a:rPr sz="1250" b="1">
+                <a:solidFill>
+                  <a:srgbClr val="0F172A"/>
+                </a:solidFill>
+                <a:latin typeface="Segoe UI"/>
+              </a:rPr>
+              <a:t>• Thao tác SPI Flash &amp; LED GPIO: </a:t>
+            </a:r>
+            <a:r>
+              <a:rPr sz="1200">
+                <a:solidFill>
+                  <a:srgbClr val="334155"/>
+                </a:solidFill>
+                <a:latin typeface="Segoe UI"/>
+              </a:rPr>
+              <a:t>RTL cung cấp bus MMIO cho phép C đọc/ghi/xóa dữ liệu Flash và điều khiển chớp nháy LED.</a:t>
+            </a:r>
+          </a:p>
+          <a:p>
+            <a:pPr>
+              <a:lnSpc>
+                <a:spcPct val="115000"/>
+              </a:lnSpc>
+              <a:spcAft>
+                <a:spcPts val="550"/>
+              </a:spcAft>
+            </a:pPr>
+            <a:r>
+              <a:rPr sz="1250" b="1">
+                <a:solidFill>
+                  <a:srgbClr val="0F172A"/>
+                </a:solidFill>
+                <a:latin typeface="Segoe UI"/>
+              </a:rPr>
+              <a:t>• Kiến trúc mở rộng linh hoạt: </a:t>
+            </a:r>
+            <a:r>
+              <a:rPr sz="1200">
+                <a:solidFill>
+                  <a:srgbClr val="334155"/>
+                </a:solidFill>
+                <a:latin typeface="Segoe UI"/>
+              </a:rPr>
+              <a:t>Dễ dàng nạp lại firmware C để làm các nghiệp vụ nhúng khác, không chỉ quản lý thẻ RFID.</a:t>
+            </a:r>
+          </a:p>
+        </p:txBody>
+      </p:sp>
+      <p:sp>
+        <p:nvSpPr>
+          <p:cNvPr id="12" name="Rounded Rectangle 11"/>
+          <p:cNvSpPr/>
+          <p:nvPr/>
+        </p:nvSpPr>
+        <p:spPr>
+          <a:xfrm>
+            <a:off x="6227064" y="1152144"/>
+            <a:ext cx="5230368" cy="2487168"/>
+          </a:xfrm>
+          <a:prstGeom prst="roundRect">
+            <a:avLst>
+              <a:gd name="adj" fmla="val 2000"/>
+            </a:avLst>
+          </a:prstGeom>
+          <a:solidFill>
+            <a:srgbClr val="FFFFFF"/>
+          </a:solidFill>
+          <a:ln w="19050">
+            <a:solidFill>
+              <a:srgbClr val="10B981"/>
+            </a:solidFill>
+          </a:ln>
+        </p:spPr>
+        <p:style>
+          <a:lnRef idx="1">
+            <a:schemeClr val="accent1"/>
+          </a:lnRef>
+          <a:fillRef idx="3">
+            <a:schemeClr val="accent1"/>
+          </a:fillRef>
+          <a:effectRef idx="2">
+            <a:schemeClr val="accent1"/>
+          </a:effectRef>
+          <a:fontRef idx="minor">
+            <a:schemeClr val="lt1"/>
+          </a:fontRef>
+        </p:style>
+        <p:txBody>
+          <a:bodyPr rtlCol="0" anchor="ctr"/>
+          <a:lstStyle/>
+          <a:p>
+            <a:pPr algn="ctr"/>
+          </a:p>
+        </p:txBody>
+      </p:sp>
+      <p:sp>
+        <p:nvSpPr>
+          <p:cNvPr id="13" name="Rounded Rectangle 12"/>
+          <p:cNvSpPr/>
+          <p:nvPr/>
+        </p:nvSpPr>
+        <p:spPr>
+          <a:xfrm>
+            <a:off x="6336792" y="1243584"/>
+            <a:ext cx="5010912" cy="384048"/>
+          </a:xfrm>
+          <a:prstGeom prst="roundRect">
+            <a:avLst>
+              <a:gd name="adj" fmla="val 8000"/>
+            </a:avLst>
+          </a:prstGeom>
+          <a:solidFill>
+            <a:srgbClr val="F0FDF4"/>
+          </a:solidFill>
+          <a:ln w="15240">
+            <a:solidFill>
+              <a:srgbClr val="10B981"/>
+            </a:solidFill>
+          </a:ln>
+        </p:spPr>
+        <p:style>
+          <a:lnRef idx="1">
+            <a:schemeClr val="accent1"/>
+          </a:lnRef>
+          <a:fillRef idx="3">
+            <a:schemeClr val="accent1"/>
+          </a:fillRef>
+          <a:effectRef idx="2">
+            <a:schemeClr val="accent1"/>
+          </a:effectRef>
+          <a:fontRef idx="minor">
+            <a:schemeClr val="lt1"/>
+          </a:fontRef>
+        </p:style>
+        <p:txBody>
+          <a:bodyPr rtlCol="0" anchor="ctr"/>
+          <a:lstStyle/>
+          <a:p>
+            <a:pPr algn="ctr"/>
+          </a:p>
+        </p:txBody>
+      </p:sp>
+      <p:sp>
+        <p:nvSpPr>
+          <p:cNvPr id="14" name="TextBox 13"/>
+          <p:cNvSpPr txBox="1"/>
+          <p:nvPr/>
+        </p:nvSpPr>
+        <p:spPr>
+          <a:xfrm>
+            <a:off x="6373368" y="1252728"/>
+            <a:ext cx="4937760" cy="347472"/>
+          </a:xfrm>
+          <a:prstGeom prst="rect">
+            <a:avLst/>
+          </a:prstGeom>
+          <a:noFill/>
+        </p:spPr>
+        <p:txBody>
+          <a:bodyPr wrap="none" lIns="0" tIns="0" rIns="0" bIns="0">
+            <a:spAutoFit/>
+          </a:bodyPr>
+          <a:lstStyle/>
+          <a:p>
+            <a:pPr algn="l">
+              <a:defRPr sz="1280" b="1">
+                <a:solidFill>
+                  <a:srgbClr val="10B981"/>
+                </a:solidFill>
+                <a:latin typeface="Segoe UI"/>
+              </a:defRPr>
+            </a:pPr>
+            <a:r>
+              <a:t>⚙️  [02]  FIRMWARE C THỰC THI TRỰC TIẾP TRÊN CHIP</a:t>
+            </a:r>
+          </a:p>
+        </p:txBody>
+      </p:sp>
+      <p:sp>
+        <p:nvSpPr>
+          <p:cNvPr id="15" name="TextBox 14"/>
+          <p:cNvSpPr txBox="1"/>
+          <p:nvPr/>
+        </p:nvSpPr>
+        <p:spPr>
+          <a:xfrm>
+            <a:off x="6391656" y="1700784"/>
+            <a:ext cx="4901184" cy="1865376"/>
+          </a:xfrm>
+          <a:prstGeom prst="rect">
+            <a:avLst/>
+          </a:prstGeom>
+          <a:noFill/>
+        </p:spPr>
+        <p:txBody>
+          <a:bodyPr wrap="square" lIns="0" tIns="0" rIns="0" bIns="0">
+            <a:spAutoFit/>
+          </a:bodyPr>
+          <a:lstStyle/>
+          <a:p>
+            <a:pPr>
+              <a:lnSpc>
+                <a:spcPct val="115000"/>
+              </a:lnSpc>
+              <a:spcAft>
+                <a:spcPts val="550"/>
+              </a:spcAft>
+            </a:pPr>
+            <a:r>
+              <a:rPr sz="1250" b="1">
+                <a:solidFill>
+                  <a:srgbClr val="0F172A"/>
+                </a:solidFill>
+                <a:latin typeface="Segoe UI"/>
+              </a:rPr>
+              <a:t>• Xử lý thẻ an ninh tại chỗ: </a:t>
+            </a:r>
+            <a:r>
+              <a:rPr sz="1200">
+                <a:solidFill>
+                  <a:srgbClr val="334155"/>
+                </a:solidFill>
+                <a:latin typeface="Segoe UI"/>
+              </a:rPr>
+              <a:t>Thuật toán C giải mã chuỗi RFID RDM6300, đối chiếu Whitelist tức thì (&lt; 10 µs), ghi log Flash.</a:t>
+            </a:r>
+          </a:p>
+          <a:p>
+            <a:pPr>
+              <a:lnSpc>
+                <a:spcPct val="115000"/>
+              </a:lnSpc>
+              <a:spcAft>
+                <a:spcPts val="550"/>
+              </a:spcAft>
+            </a:pPr>
+            <a:r>
+              <a:rPr sz="1250" b="1">
+                <a:solidFill>
+                  <a:srgbClr val="0F172A"/>
+                </a:solidFill>
+                <a:latin typeface="Segoe UI"/>
+              </a:rPr>
+              <a:t>• Thực thi code C ngay trên chip: </a:t>
+            </a:r>
+            <a:r>
+              <a:rPr sz="1200">
+                <a:solidFill>
+                  <a:srgbClr val="334155"/>
+                </a:solidFill>
+                <a:latin typeface="Segoe UI"/>
+              </a:rPr>
+              <a:t>Cơ chế XIP kéo lệnh từ Flash kết hợp nạp worker vào 1KB SRAM để xóa/ghi Flash an toàn.</a:t>
+            </a:r>
+          </a:p>
+          <a:p>
+            <a:pPr>
+              <a:lnSpc>
+                <a:spcPct val="115000"/>
+              </a:lnSpc>
+              <a:spcAft>
+                <a:spcPts val="550"/>
+              </a:spcAft>
+            </a:pPr>
+            <a:r>
+              <a:rPr sz="1250" b="1">
+                <a:solidFill>
+                  <a:srgbClr val="0F172A"/>
+                </a:solidFill>
+                <a:latin typeface="Segoe UI"/>
+              </a:rPr>
+              <a:t>• Tối ưu hóa Bare-metal độc lập: </a:t>
+            </a:r>
+            <a:r>
+              <a:rPr sz="1200">
+                <a:solidFill>
+                  <a:srgbClr val="334155"/>
+                </a:solidFill>
+                <a:latin typeface="Segoe UI"/>
+              </a:rPr>
+              <a:t>Vận hành tin cậy không cần hệ điều hành (RTOS/Linux), khởi động tức thì và tiết kiệm bộ nhớ.</a:t>
+            </a:r>
+          </a:p>
+        </p:txBody>
+      </p:sp>
+      <p:sp>
+        <p:nvSpPr>
+          <p:cNvPr id="16" name="Rounded Rectangle 15"/>
+          <p:cNvSpPr/>
+          <p:nvPr/>
+        </p:nvSpPr>
+        <p:spPr>
+          <a:xfrm>
+            <a:off x="731520" y="3822191"/>
+            <a:ext cx="5230368" cy="2487168"/>
+          </a:xfrm>
+          <a:prstGeom prst="roundRect">
+            <a:avLst>
+              <a:gd name="adj" fmla="val 2000"/>
+            </a:avLst>
+          </a:prstGeom>
+          <a:solidFill>
+            <a:srgbClr val="FFFFFF"/>
+          </a:solidFill>
+          <a:ln w="19050">
+            <a:solidFill>
+              <a:srgbClr val="D97706"/>
+            </a:solidFill>
+          </a:ln>
+        </p:spPr>
+        <p:style>
+          <a:lnRef idx="1">
+            <a:schemeClr val="accent1"/>
+          </a:lnRef>
+          <a:fillRef idx="3">
+            <a:schemeClr val="accent1"/>
+          </a:fillRef>
+          <a:effectRef idx="2">
+            <a:schemeClr val="accent1"/>
+          </a:effectRef>
+          <a:fontRef idx="minor">
+            <a:schemeClr val="lt1"/>
+          </a:fontRef>
+        </p:style>
+        <p:txBody>
+          <a:bodyPr rtlCol="0" anchor="ctr"/>
+          <a:lstStyle/>
+          <a:p>
+            <a:pPr algn="ctr"/>
+          </a:p>
+        </p:txBody>
+      </p:sp>
+      <p:sp>
+        <p:nvSpPr>
+          <p:cNvPr id="17" name="Rounded Rectangle 16"/>
+          <p:cNvSpPr/>
+          <p:nvPr/>
+        </p:nvSpPr>
+        <p:spPr>
+          <a:xfrm>
+            <a:off x="841248" y="3913631"/>
+            <a:ext cx="5010912" cy="384048"/>
+          </a:xfrm>
+          <a:prstGeom prst="roundRect">
+            <a:avLst>
+              <a:gd name="adj" fmla="val 8000"/>
+            </a:avLst>
+          </a:prstGeom>
+          <a:solidFill>
+            <a:srgbClr val="FEF3C7"/>
+          </a:solidFill>
+          <a:ln w="15240">
+            <a:solidFill>
+              <a:srgbClr val="D97706"/>
+            </a:solidFill>
+          </a:ln>
+        </p:spPr>
+        <p:style>
+          <a:lnRef idx="1">
+            <a:schemeClr val="accent1"/>
+          </a:lnRef>
+          <a:fillRef idx="3">
+            <a:schemeClr val="accent1"/>
+          </a:fillRef>
+          <a:effectRef idx="2">
+            <a:schemeClr val="accent1"/>
+          </a:effectRef>
+          <a:fontRef idx="minor">
+            <a:schemeClr val="lt1"/>
+          </a:fontRef>
+        </p:style>
+        <p:txBody>
+          <a:bodyPr rtlCol="0" anchor="ctr"/>
+          <a:lstStyle/>
+          <a:p>
+            <a:pPr algn="ctr"/>
+          </a:p>
+        </p:txBody>
+      </p:sp>
+      <p:sp>
+        <p:nvSpPr>
+          <p:cNvPr id="18" name="TextBox 17"/>
+          <p:cNvSpPr txBox="1"/>
+          <p:nvPr/>
+        </p:nvSpPr>
+        <p:spPr>
+          <a:xfrm>
+            <a:off x="877824" y="3922775"/>
+            <a:ext cx="4937760" cy="347472"/>
+          </a:xfrm>
+          <a:prstGeom prst="rect">
+            <a:avLst/>
+          </a:prstGeom>
+          <a:noFill/>
+        </p:spPr>
+        <p:txBody>
+          <a:bodyPr wrap="none" lIns="0" tIns="0" rIns="0" bIns="0">
+            <a:spAutoFit/>
+          </a:bodyPr>
+          <a:lstStyle/>
+          <a:p>
+            <a:pPr algn="l">
+              <a:defRPr sz="1280" b="1">
+                <a:solidFill>
+                  <a:srgbClr val="D97706"/>
+                </a:solidFill>
+                <a:latin typeface="Segoe UI"/>
+              </a:defRPr>
+            </a:pPr>
+            <a:r>
+              <a:t>🎯  [03]  TRIỂN KHAI THỰC TẾ BO MẠCH FPGA BASYS 3</a:t>
+            </a:r>
+          </a:p>
+        </p:txBody>
+      </p:sp>
+      <p:sp>
+        <p:nvSpPr>
+          <p:cNvPr id="19" name="TextBox 18"/>
+          <p:cNvSpPr txBox="1"/>
+          <p:nvPr/>
+        </p:nvSpPr>
+        <p:spPr>
+          <a:xfrm>
+            <a:off x="896112" y="4370831"/>
+            <a:ext cx="4901184" cy="1865376"/>
+          </a:xfrm>
+          <a:prstGeom prst="rect">
+            <a:avLst/>
+          </a:prstGeom>
+          <a:noFill/>
+        </p:spPr>
+        <p:txBody>
+          <a:bodyPr wrap="square" lIns="0" tIns="0" rIns="0" bIns="0">
+            <a:spAutoFit/>
+          </a:bodyPr>
+          <a:lstStyle/>
+          <a:p>
+            <a:pPr>
+              <a:lnSpc>
+                <a:spcPct val="115000"/>
+              </a:lnSpc>
+              <a:spcAft>
+                <a:spcPts val="550"/>
+              </a:spcAft>
+            </a:pPr>
+            <a:r>
+              <a:rPr sz="1250" b="1">
+                <a:solidFill>
+                  <a:srgbClr val="0F172A"/>
+                </a:solidFill>
+                <a:latin typeface="Segoe UI"/>
+              </a:rPr>
+              <a:t>• Hiện thực hóa trên phần cứng thật: </a:t>
+            </a:r>
+            <a:r>
+              <a:rPr sz="1200">
+                <a:solidFill>
+                  <a:srgbClr val="334155"/>
+                </a:solidFill>
+                <a:latin typeface="Segoe UI"/>
+              </a:rPr>
+              <a:t>Tổng hợp bitstream Vivado và nạp chạy ổn định 100% trên bo mạch FPGA Digilent Basys 3.</a:t>
+            </a:r>
+          </a:p>
+          <a:p>
+            <a:pPr>
+              <a:lnSpc>
+                <a:spcPct val="115000"/>
+              </a:lnSpc>
+              <a:spcAft>
+                <a:spcPts val="550"/>
+              </a:spcAft>
+            </a:pPr>
+            <a:r>
+              <a:rPr sz="1250" b="1">
+                <a:solidFill>
+                  <a:srgbClr val="0F172A"/>
+                </a:solidFill>
+                <a:latin typeface="Segoe UI"/>
+              </a:rPr>
+              <a:t>• Ghép nối ngoại vi hoàn chỉnh: </a:t>
+            </a:r>
+            <a:r>
+              <a:rPr sz="1200">
+                <a:solidFill>
+                  <a:srgbClr val="334155"/>
+                </a:solidFill>
+                <a:latin typeface="Segoe UI"/>
+              </a:rPr>
+              <a:t>Kết nối vật lý với module RFID RDM6300 125kHz, nguồn MB102 5V và trở đệm 1kΩ bảo vệ I/O.</a:t>
+            </a:r>
+          </a:p>
+          <a:p>
+            <a:pPr>
+              <a:lnSpc>
+                <a:spcPct val="115000"/>
+              </a:lnSpc>
+              <a:spcAft>
+                <a:spcPts val="550"/>
+              </a:spcAft>
+            </a:pPr>
+            <a:r>
+              <a:rPr sz="1250" b="1">
+                <a:solidFill>
+                  <a:srgbClr val="0F172A"/>
+                </a:solidFill>
+                <a:latin typeface="Segoe UI"/>
+              </a:rPr>
+              <a:t>• Kiểm chứng thực nghiệm thành công: </a:t>
+            </a:r>
+            <a:r>
+              <a:rPr sz="1200">
+                <a:solidFill>
+                  <a:srgbClr val="334155"/>
+                </a:solidFill>
+                <a:latin typeface="Segoe UI"/>
+              </a:rPr>
+              <a:t>Quẹt thẻ RFID thật phản hồi tức thì, còi/LED báo hiệu chính xác và lưu bền vững vào Flash.</a:t>
+            </a:r>
+          </a:p>
+        </p:txBody>
+      </p:sp>
+      <p:sp>
+        <p:nvSpPr>
+          <p:cNvPr id="20" name="Rounded Rectangle 19"/>
+          <p:cNvSpPr/>
+          <p:nvPr/>
+        </p:nvSpPr>
+        <p:spPr>
+          <a:xfrm>
+            <a:off x="6227064" y="3822191"/>
+            <a:ext cx="5230368" cy="2487168"/>
+          </a:xfrm>
+          <a:prstGeom prst="roundRect">
+            <a:avLst>
+              <a:gd name="adj" fmla="val 2000"/>
+            </a:avLst>
+          </a:prstGeom>
+          <a:solidFill>
+            <a:srgbClr val="FFFFFF"/>
+          </a:solidFill>
+          <a:ln w="19050">
+            <a:solidFill>
+              <a:srgbClr val="9333EA"/>
+            </a:solidFill>
+          </a:ln>
+        </p:spPr>
+        <p:style>
+          <a:lnRef idx="1">
+            <a:schemeClr val="accent1"/>
+          </a:lnRef>
+          <a:fillRef idx="3">
+            <a:schemeClr val="accent1"/>
+          </a:fillRef>
+          <a:effectRef idx="2">
+            <a:schemeClr val="accent1"/>
+          </a:effectRef>
+          <a:fontRef idx="minor">
+            <a:schemeClr val="lt1"/>
+          </a:fontRef>
+        </p:style>
+        <p:txBody>
+          <a:bodyPr rtlCol="0" anchor="ctr"/>
+          <a:lstStyle/>
+          <a:p>
+            <a:pPr algn="ctr"/>
+          </a:p>
+        </p:txBody>
+      </p:sp>
+      <p:sp>
+        <p:nvSpPr>
+          <p:cNvPr id="21" name="Rounded Rectangle 20"/>
+          <p:cNvSpPr/>
+          <p:nvPr/>
+        </p:nvSpPr>
+        <p:spPr>
+          <a:xfrm>
+            <a:off x="6336792" y="3913631"/>
+            <a:ext cx="5010912" cy="384048"/>
+          </a:xfrm>
+          <a:prstGeom prst="roundRect">
+            <a:avLst>
+              <a:gd name="adj" fmla="val 8000"/>
+            </a:avLst>
+          </a:prstGeom>
+          <a:solidFill>
+            <a:srgbClr val="FAF5FF"/>
+          </a:solidFill>
+          <a:ln w="15240">
+            <a:solidFill>
+              <a:srgbClr val="9333EA"/>
+            </a:solidFill>
+          </a:ln>
+        </p:spPr>
+        <p:style>
+          <a:lnRef idx="1">
+            <a:schemeClr val="accent1"/>
+          </a:lnRef>
+          <a:fillRef idx="3">
+            <a:schemeClr val="accent1"/>
+          </a:fillRef>
+          <a:effectRef idx="2">
+            <a:schemeClr val="accent1"/>
+          </a:effectRef>
+          <a:fontRef idx="minor">
+            <a:schemeClr val="lt1"/>
+          </a:fontRef>
+        </p:style>
+        <p:txBody>
+          <a:bodyPr rtlCol="0" anchor="ctr"/>
+          <a:lstStyle/>
+          <a:p>
+            <a:pPr algn="ctr"/>
+          </a:p>
+        </p:txBody>
+      </p:sp>
+      <p:sp>
+        <p:nvSpPr>
+          <p:cNvPr id="22" name="TextBox 21"/>
+          <p:cNvSpPr txBox="1"/>
+          <p:nvPr/>
+        </p:nvSpPr>
+        <p:spPr>
+          <a:xfrm>
+            <a:off x="6373368" y="3922775"/>
+            <a:ext cx="4937760" cy="347472"/>
+          </a:xfrm>
+          <a:prstGeom prst="rect">
+            <a:avLst/>
+          </a:prstGeom>
+          <a:noFill/>
+        </p:spPr>
+        <p:txBody>
+          <a:bodyPr wrap="none" lIns="0" tIns="0" rIns="0" bIns="0">
+            <a:spAutoFit/>
+          </a:bodyPr>
+          <a:lstStyle/>
+          <a:p>
+            <a:pPr algn="l">
+              <a:defRPr sz="1280" b="1">
+                <a:solidFill>
+                  <a:srgbClr val="9333EA"/>
+                </a:solidFill>
+                <a:latin typeface="Segoe UI"/>
+              </a:defRPr>
+            </a:pPr>
+            <a:r>
+              <a:t>🏭  [04]  LUỒNG ASIC OPENLANE ĐẠT CHUẨN TAPE-OUT</a:t>
+            </a:r>
+          </a:p>
+        </p:txBody>
+      </p:sp>
+      <p:sp>
+        <p:nvSpPr>
+          <p:cNvPr id="23" name="TextBox 22"/>
+          <p:cNvSpPr txBox="1"/>
+          <p:nvPr/>
+        </p:nvSpPr>
+        <p:spPr>
+          <a:xfrm>
+            <a:off x="6391656" y="4370831"/>
+            <a:ext cx="4901184" cy="1865376"/>
+          </a:xfrm>
+          <a:prstGeom prst="rect">
+            <a:avLst/>
+          </a:prstGeom>
+          <a:noFill/>
+        </p:spPr>
+        <p:txBody>
+          <a:bodyPr wrap="square" lIns="0" tIns="0" rIns="0" bIns="0">
+            <a:spAutoFit/>
+          </a:bodyPr>
+          <a:lstStyle/>
+          <a:p>
+            <a:pPr>
+              <a:lnSpc>
+                <a:spcPct val="115000"/>
+              </a:lnSpc>
+              <a:spcAft>
+                <a:spcPts val="550"/>
+              </a:spcAft>
+            </a:pPr>
+            <a:r>
+              <a:rPr sz="1250" b="1">
+                <a:solidFill>
+                  <a:srgbClr val="0F172A"/>
+                </a:solidFill>
+                <a:latin typeface="Segoe UI"/>
+              </a:rPr>
+              <a:t>• Tự động hóa RTL-to-GDSII: </a:t>
+            </a:r>
+            <a:r>
+              <a:rPr sz="1200">
+                <a:solidFill>
+                  <a:srgbClr val="334155"/>
+                </a:solidFill>
+                <a:latin typeface="Segoe UI"/>
+              </a:rPr>
+              <a:t>Ứng dụng OpenLane 2 trên SkyWater 130nm, thiết kế vật lý tự động và chuyển sang GDSII nhanh chóng.</a:t>
+            </a:r>
+          </a:p>
+          <a:p>
+            <a:pPr>
+              <a:lnSpc>
+                <a:spcPct val="115000"/>
+              </a:lnSpc>
+              <a:spcAft>
+                <a:spcPts val="550"/>
+              </a:spcAft>
+            </a:pPr>
+            <a:r>
+              <a:rPr sz="1250" b="1">
+                <a:solidFill>
+                  <a:srgbClr val="0F172A"/>
+                </a:solidFill>
+                <a:latin typeface="Segoe UI"/>
+              </a:rPr>
+              <a:t>• Ký duyệt Sign-off sạch hoàn toàn: </a:t>
+            </a:r>
+            <a:r>
+              <a:rPr sz="1200">
+                <a:solidFill>
+                  <a:srgbClr val="334155"/>
+                </a:solidFill>
+                <a:latin typeface="Segoe UI"/>
+              </a:rPr>
+              <a:t>Đạt 100% tiêu chuẩn nhà máy: 0 DRC, 0 LVS, 0 Antenna violations trên toàn bộ 5 lớp kim loại.</a:t>
+            </a:r>
+          </a:p>
+          <a:p>
+            <a:pPr>
+              <a:lnSpc>
+                <a:spcPct val="115000"/>
+              </a:lnSpc>
+              <a:spcAft>
+                <a:spcPts val="550"/>
+              </a:spcAft>
+            </a:pPr>
+            <a:r>
+              <a:rPr sz="1250" b="1">
+                <a:solidFill>
+                  <a:srgbClr val="0F172A"/>
+                </a:solidFill>
+                <a:latin typeface="Segoe UI"/>
+              </a:rPr>
+              <a:t>• Sẵn sàng Tape-out xuất xưởng: </a:t>
+            </a:r>
+            <a:r>
+              <a:rPr sz="1200">
+                <a:solidFill>
+                  <a:srgbClr val="334155"/>
+                </a:solidFill>
+                <a:latin typeface="Segoe UI"/>
+              </a:rPr>
+              <a:t>Die 1.87 mm², 164K cells, Fmax = 92.81 MHz (vượt 85% mục tiêu), đủ chuẩn gia công nhà máy.</a:t>
+            </a:r>
+          </a:p>
+        </p:txBody>
+      </p:sp>
+    </p:spTree>
+  </p:cSld>
+  <p:clrMapOvr>
+    <a:masterClrMapping/>
+  </p:clrMapOvr>
+</p:sld>
+</file>
+
+<file path=ppt/slides/slide5.xml><?xml version="1.0" encoding="utf-8"?>
+<p:sld xmlns:a="http://schemas.openxmlformats.org/drawingml/2006/main" xmlns:p="http://schemas.openxmlformats.org/presentationml/2006/main" xmlns:r="http://schemas.openxmlformats.org/officeDocument/2006/relationships">
+  <p:cSld>
+    <p:spTree>
+      <p:nvGrpSpPr>
+        <p:cNvPr id="1" name=""/>
+        <p:cNvGrpSpPr/>
+        <p:nvPr/>
+      </p:nvGrpSpPr>
+      <p:grpSpPr/>
+      <p:sp>
+        <p:nvSpPr>
+          <p:cNvPr id="2" name="Rectangle 1"/>
+          <p:cNvSpPr/>
+          <p:nvPr/>
+        </p:nvSpPr>
+        <p:spPr>
+          <a:xfrm>
+            <a:off x="0" y="0"/>
+            <a:ext cx="12191695" cy="6858000"/>
+          </a:xfrm>
+          <a:prstGeom prst="rect">
+            <a:avLst/>
+          </a:prstGeom>
+          <a:solidFill>
+            <a:srgbClr val="F8FAFC"/>
+          </a:solidFill>
+          <a:ln>
+            <a:noFill/>
+          </a:ln>
+        </p:spPr>
+        <p:style>
+          <a:lnRef idx="1">
+            <a:schemeClr val="accent1"/>
+          </a:lnRef>
+          <a:fillRef idx="3">
+            <a:schemeClr val="accent1"/>
+          </a:fillRef>
+          <a:effectRef idx="2">
+            <a:schemeClr val="accent1"/>
+          </a:effectRef>
+          <a:fontRef idx="minor">
+            <a:schemeClr val="lt1"/>
+          </a:fontRef>
+        </p:style>
+        <p:txBody>
+          <a:bodyPr rtlCol="0" anchor="ctr"/>
+          <a:lstStyle/>
+          <a:p>
+            <a:pPr algn="ctr"/>
+          </a:p>
+        </p:txBody>
+      </p:sp>
+      <p:sp>
+        <p:nvSpPr>
+          <p:cNvPr id="3" name="Rectangle 2"/>
+          <p:cNvSpPr/>
+          <p:nvPr/>
+        </p:nvSpPr>
+        <p:spPr>
+          <a:xfrm>
+            <a:off x="0" y="0"/>
+            <a:ext cx="12191695" cy="91440"/>
+          </a:xfrm>
+          <a:prstGeom prst="rect">
+            <a:avLst/>
+          </a:prstGeom>
+          <a:solidFill>
+            <a:srgbClr val="2563EB"/>
+          </a:solidFill>
+          <a:ln>
+            <a:noFill/>
+          </a:ln>
+        </p:spPr>
+        <p:style>
+          <a:lnRef idx="1">
+            <a:schemeClr val="accent1"/>
+          </a:lnRef>
+          <a:fillRef idx="3">
+            <a:schemeClr val="accent1"/>
+          </a:fillRef>
+          <a:effectRef idx="2">
+            <a:schemeClr val="accent1"/>
+          </a:effectRef>
+          <a:fontRef idx="minor">
+            <a:schemeClr val="lt1"/>
+          </a:fontRef>
+        </p:style>
+        <p:txBody>
+          <a:bodyPr rtlCol="0" anchor="ctr"/>
+          <a:lstStyle/>
+          <a:p>
+            <a:pPr algn="ctr"/>
+          </a:p>
+        </p:txBody>
+      </p:sp>
+      <p:sp>
+        <p:nvSpPr>
+          <p:cNvPr id="4" name="TextBox 3"/>
+          <p:cNvSpPr txBox="1"/>
+          <p:nvPr/>
+        </p:nvSpPr>
+        <p:spPr>
+          <a:xfrm>
+            <a:off x="731520" y="201168"/>
+            <a:ext cx="10728655" cy="868680"/>
+          </a:xfrm>
+          <a:prstGeom prst="rect">
+            <a:avLst/>
+          </a:prstGeom>
+          <a:noFill/>
+        </p:spPr>
+        <p:txBody>
+          <a:bodyPr wrap="square" lIns="0" tIns="0" rIns="0" bIns="0">
+            <a:spAutoFit/>
+          </a:bodyPr>
+          <a:lstStyle/>
+          <a:p>
+            <a:pPr>
+              <a:spcAft>
+                <a:spcPts val="200"/>
+              </a:spcAft>
+              <a:defRPr sz="1050" b="1">
+                <a:solidFill>
+                  <a:srgbClr val="2563EB"/>
+                </a:solidFill>
+                <a:latin typeface="Segoe UI"/>
+              </a:defRPr>
+            </a:pPr>
+            <a:r>
+              <a:t>PHẦN 3: KIẾN TRÚC VI HỆ THỐNG SOC</a:t>
+            </a:r>
+          </a:p>
+          <a:p>
+            <a:pPr>
+              <a:defRPr sz="1700" b="1">
+                <a:solidFill>
+                  <a:srgbClr val="0F172A"/>
+                </a:solidFill>
+                <a:latin typeface="Segoe UI"/>
+              </a:defRPr>
+            </a:pPr>
+            <a:r>
+              <a:t>Bảng Tra Cứu Địa Chỉ (Memory Map) &amp; Khai Báo Biến Trong C / RTL</a:t>
+            </a:r>
+          </a:p>
+        </p:txBody>
+      </p:sp>
+      <p:sp>
+        <p:nvSpPr>
+          <p:cNvPr id="5" name="Rectangle 4"/>
+          <p:cNvSpPr/>
+          <p:nvPr/>
+        </p:nvSpPr>
+        <p:spPr>
+          <a:xfrm>
+            <a:off x="731520" y="6446520"/>
+            <a:ext cx="10728655" cy="18288"/>
+          </a:xfrm>
+          <a:prstGeom prst="rect">
+            <a:avLst/>
+          </a:prstGeom>
+          <a:solidFill>
+            <a:srgbClr val="E2E8F0"/>
+          </a:solidFill>
+          <a:ln>
+            <a:noFill/>
+          </a:ln>
+        </p:spPr>
+        <p:style>
+          <a:lnRef idx="1">
+            <a:schemeClr val="accent1"/>
+          </a:lnRef>
+          <a:fillRef idx="3">
+            <a:schemeClr val="accent1"/>
+          </a:fillRef>
+          <a:effectRef idx="2">
+            <a:schemeClr val="accent1"/>
+          </a:effectRef>
+          <a:fontRef idx="minor">
+            <a:schemeClr val="lt1"/>
+          </a:fontRef>
+        </p:style>
+        <p:txBody>
+          <a:bodyPr rtlCol="0" anchor="ctr"/>
+          <a:lstStyle/>
+          <a:p>
+            <a:pPr algn="ctr"/>
+          </a:p>
+        </p:txBody>
+      </p:sp>
+      <p:sp>
+        <p:nvSpPr>
+          <p:cNvPr id="6" name="TextBox 5"/>
+          <p:cNvSpPr txBox="1"/>
+          <p:nvPr/>
+        </p:nvSpPr>
+        <p:spPr>
+          <a:xfrm>
+            <a:off x="731520" y="6492240"/>
+            <a:ext cx="7315200" cy="274320"/>
+          </a:xfrm>
+          <a:prstGeom prst="rect">
+            <a:avLst/>
+          </a:prstGeom>
+          <a:noFill/>
+        </p:spPr>
+        <p:txBody>
+          <a:bodyPr wrap="none" lIns="0" tIns="0" rIns="0" bIns="0">
+            <a:spAutoFit/>
+          </a:bodyPr>
+          <a:lstStyle/>
+          <a:p>
+            <a:pPr>
+              <a:defRPr sz="950">
+                <a:solidFill>
+                  <a:srgbClr val="475569"/>
+                </a:solidFill>
+                <a:latin typeface="Segoe UI"/>
+              </a:defRPr>
+            </a:pPr>
+            <a:r>
+              <a:t>Đồ Án: SoC PicoRV32 RFID RDM6300 &amp; SPI Flash | FPT Jetking Chip Design - SEM3 | HV: Thái Tuấn Hiệp</a:t>
+            </a:r>
+          </a:p>
+        </p:txBody>
+      </p:sp>
+      <p:sp>
+        <p:nvSpPr>
+          <p:cNvPr id="7" name="TextBox 6"/>
+          <p:cNvSpPr txBox="1"/>
+          <p:nvPr/>
+        </p:nvSpPr>
+        <p:spPr>
+          <a:xfrm>
+            <a:off x="10058400" y="6492240"/>
+            <a:ext cx="1401775" cy="274320"/>
+          </a:xfrm>
+          <a:prstGeom prst="rect">
+            <a:avLst/>
+          </a:prstGeom>
+          <a:noFill/>
+        </p:spPr>
+        <p:txBody>
+          <a:bodyPr wrap="none" lIns="0" tIns="0" rIns="0" bIns="0">
+            <a:spAutoFit/>
+          </a:bodyPr>
+          <a:lstStyle/>
+          <a:p>
+            <a:pPr algn="r">
+              <a:defRPr sz="950" b="1">
+                <a:solidFill>
+                  <a:srgbClr val="2563EB"/>
+                </a:solidFill>
+                <a:latin typeface="Segoe UI"/>
+              </a:defRPr>
+            </a:pPr>
+            <a:r>
+              <a:t>05 / 14</a:t>
             </a:r>
           </a:p>
         </p:txBody>
@@ -9648,942 +11603,6 @@
 </p:sld>
 </file>
 
-<file path=ppt/slides/slide5.xml><?xml version="1.0" encoding="utf-8"?>
-<p:sld xmlns:a="http://schemas.openxmlformats.org/drawingml/2006/main" xmlns:p="http://schemas.openxmlformats.org/presentationml/2006/main" xmlns:r="http://schemas.openxmlformats.org/officeDocument/2006/relationships">
-  <p:cSld>
-    <p:spTree>
-      <p:nvGrpSpPr>
-        <p:cNvPr id="1" name=""/>
-        <p:cNvGrpSpPr/>
-        <p:nvPr/>
-      </p:nvGrpSpPr>
-      <p:grpSpPr/>
-      <p:sp>
-        <p:nvSpPr>
-          <p:cNvPr id="2" name="Rectangle 1"/>
-          <p:cNvSpPr/>
-          <p:nvPr/>
-        </p:nvSpPr>
-        <p:spPr>
-          <a:xfrm>
-            <a:off x="0" y="0"/>
-            <a:ext cx="12191695" cy="6858000"/>
-          </a:xfrm>
-          <a:prstGeom prst="rect">
-            <a:avLst/>
-          </a:prstGeom>
-          <a:solidFill>
-            <a:srgbClr val="F8FAFC"/>
-          </a:solidFill>
-          <a:ln>
-            <a:noFill/>
-          </a:ln>
-        </p:spPr>
-        <p:style>
-          <a:lnRef idx="1">
-            <a:schemeClr val="accent1"/>
-          </a:lnRef>
-          <a:fillRef idx="3">
-            <a:schemeClr val="accent1"/>
-          </a:fillRef>
-          <a:effectRef idx="2">
-            <a:schemeClr val="accent1"/>
-          </a:effectRef>
-          <a:fontRef idx="minor">
-            <a:schemeClr val="lt1"/>
-          </a:fontRef>
-        </p:style>
-        <p:txBody>
-          <a:bodyPr rtlCol="0" anchor="ctr"/>
-          <a:lstStyle/>
-          <a:p>
-            <a:pPr algn="ctr"/>
-          </a:p>
-        </p:txBody>
-      </p:sp>
-      <p:sp>
-        <p:nvSpPr>
-          <p:cNvPr id="3" name="Rectangle 2"/>
-          <p:cNvSpPr/>
-          <p:nvPr/>
-        </p:nvSpPr>
-        <p:spPr>
-          <a:xfrm>
-            <a:off x="0" y="0"/>
-            <a:ext cx="12191695" cy="91440"/>
-          </a:xfrm>
-          <a:prstGeom prst="rect">
-            <a:avLst/>
-          </a:prstGeom>
-          <a:solidFill>
-            <a:srgbClr val="2563EB"/>
-          </a:solidFill>
-          <a:ln>
-            <a:noFill/>
-          </a:ln>
-        </p:spPr>
-        <p:style>
-          <a:lnRef idx="1">
-            <a:schemeClr val="accent1"/>
-          </a:lnRef>
-          <a:fillRef idx="3">
-            <a:schemeClr val="accent1"/>
-          </a:fillRef>
-          <a:effectRef idx="2">
-            <a:schemeClr val="accent1"/>
-          </a:effectRef>
-          <a:fontRef idx="minor">
-            <a:schemeClr val="lt1"/>
-          </a:fontRef>
-        </p:style>
-        <p:txBody>
-          <a:bodyPr rtlCol="0" anchor="ctr"/>
-          <a:lstStyle/>
-          <a:p>
-            <a:pPr algn="ctr"/>
-          </a:p>
-        </p:txBody>
-      </p:sp>
-      <p:sp>
-        <p:nvSpPr>
-          <p:cNvPr id="4" name="TextBox 3"/>
-          <p:cNvSpPr txBox="1"/>
-          <p:nvPr/>
-        </p:nvSpPr>
-        <p:spPr>
-          <a:xfrm>
-            <a:off x="731520" y="201168"/>
-            <a:ext cx="10728655" cy="868680"/>
-          </a:xfrm>
-          <a:prstGeom prst="rect">
-            <a:avLst/>
-          </a:prstGeom>
-          <a:noFill/>
-        </p:spPr>
-        <p:txBody>
-          <a:bodyPr wrap="square" lIns="0" tIns="0" rIns="0" bIns="0">
-            <a:spAutoFit/>
-          </a:bodyPr>
-          <a:lstStyle/>
-          <a:p>
-            <a:pPr>
-              <a:spcAft>
-                <a:spcPts val="200"/>
-              </a:spcAft>
-              <a:defRPr sz="1050" b="1">
-                <a:solidFill>
-                  <a:srgbClr val="2563EB"/>
-                </a:solidFill>
-                <a:latin typeface="Segoe UI"/>
-              </a:defRPr>
-            </a:pPr>
-            <a:r>
-              <a:t>PHẦN 5: DEMO CHỨC NĂNG SẢN PHẨM</a:t>
-            </a:r>
-          </a:p>
-          <a:p>
-            <a:pPr>
-              <a:defRPr sz="1700" b="1">
-                <a:solidFill>
-                  <a:srgbClr val="0F172A"/>
-                </a:solidFill>
-                <a:latin typeface="Segoe UI"/>
-              </a:defRPr>
-            </a:pPr>
-            <a:r>
-              <a:t>Các Kịch Bản Thực Nghiệm &amp; Giao Diện Quản Trị Host Console</a:t>
-            </a:r>
-          </a:p>
-        </p:txBody>
-      </p:sp>
-      <p:sp>
-        <p:nvSpPr>
-          <p:cNvPr id="5" name="Rectangle 4"/>
-          <p:cNvSpPr/>
-          <p:nvPr/>
-        </p:nvSpPr>
-        <p:spPr>
-          <a:xfrm>
-            <a:off x="731520" y="6446520"/>
-            <a:ext cx="10728655" cy="18288"/>
-          </a:xfrm>
-          <a:prstGeom prst="rect">
-            <a:avLst/>
-          </a:prstGeom>
-          <a:solidFill>
-            <a:srgbClr val="E2E8F0"/>
-          </a:solidFill>
-          <a:ln>
-            <a:noFill/>
-          </a:ln>
-        </p:spPr>
-        <p:style>
-          <a:lnRef idx="1">
-            <a:schemeClr val="accent1"/>
-          </a:lnRef>
-          <a:fillRef idx="3">
-            <a:schemeClr val="accent1"/>
-          </a:fillRef>
-          <a:effectRef idx="2">
-            <a:schemeClr val="accent1"/>
-          </a:effectRef>
-          <a:fontRef idx="minor">
-            <a:schemeClr val="lt1"/>
-          </a:fontRef>
-        </p:style>
-        <p:txBody>
-          <a:bodyPr rtlCol="0" anchor="ctr"/>
-          <a:lstStyle/>
-          <a:p>
-            <a:pPr algn="ctr"/>
-          </a:p>
-        </p:txBody>
-      </p:sp>
-      <p:sp>
-        <p:nvSpPr>
-          <p:cNvPr id="6" name="TextBox 5"/>
-          <p:cNvSpPr txBox="1"/>
-          <p:nvPr/>
-        </p:nvSpPr>
-        <p:spPr>
-          <a:xfrm>
-            <a:off x="731520" y="6492240"/>
-            <a:ext cx="7315200" cy="274320"/>
-          </a:xfrm>
-          <a:prstGeom prst="rect">
-            <a:avLst/>
-          </a:prstGeom>
-          <a:noFill/>
-        </p:spPr>
-        <p:txBody>
-          <a:bodyPr wrap="none" lIns="0" tIns="0" rIns="0" bIns="0">
-            <a:spAutoFit/>
-          </a:bodyPr>
-          <a:lstStyle/>
-          <a:p>
-            <a:pPr>
-              <a:defRPr sz="950">
-                <a:solidFill>
-                  <a:srgbClr val="475569"/>
-                </a:solidFill>
-                <a:latin typeface="Segoe UI"/>
-              </a:defRPr>
-            </a:pPr>
-            <a:r>
-              <a:t>Đồ Án: SoC PicoRV32 RFID RDM6300 &amp; SPI Flash | FPT Jetking Chip Design - SEM3 | HV: Thái Tuấn Hiệp</a:t>
-            </a:r>
-          </a:p>
-        </p:txBody>
-      </p:sp>
-      <p:sp>
-        <p:nvSpPr>
-          <p:cNvPr id="7" name="TextBox 6"/>
-          <p:cNvSpPr txBox="1"/>
-          <p:nvPr/>
-        </p:nvSpPr>
-        <p:spPr>
-          <a:xfrm>
-            <a:off x="10058400" y="6492240"/>
-            <a:ext cx="1401775" cy="274320"/>
-          </a:xfrm>
-          <a:prstGeom prst="rect">
-            <a:avLst/>
-          </a:prstGeom>
-          <a:noFill/>
-        </p:spPr>
-        <p:txBody>
-          <a:bodyPr wrap="none" lIns="0" tIns="0" rIns="0" bIns="0">
-            <a:spAutoFit/>
-          </a:bodyPr>
-          <a:lstStyle/>
-          <a:p>
-            <a:pPr algn="r">
-              <a:defRPr sz="950" b="1">
-                <a:solidFill>
-                  <a:srgbClr val="2563EB"/>
-                </a:solidFill>
-                <a:latin typeface="Segoe UI"/>
-              </a:defRPr>
-            </a:pPr>
-            <a:r>
-              <a:t>05 / 13</a:t>
-            </a:r>
-          </a:p>
-        </p:txBody>
-      </p:sp>
-      <p:sp>
-        <p:nvSpPr>
-          <p:cNvPr id="8" name="Rounded Rectangle 7"/>
-          <p:cNvSpPr/>
-          <p:nvPr/>
-        </p:nvSpPr>
-        <p:spPr>
-          <a:xfrm>
-            <a:off x="731520" y="1188720"/>
-            <a:ext cx="5349240" cy="5120640"/>
-          </a:xfrm>
-          <a:prstGeom prst="roundRect">
-            <a:avLst>
-              <a:gd name="adj" fmla="val 2000"/>
-            </a:avLst>
-          </a:prstGeom>
-          <a:solidFill>
-            <a:srgbClr val="0B132B"/>
-          </a:solidFill>
-          <a:ln w="19050">
-            <a:solidFill>
-              <a:srgbClr val="1C2541"/>
-            </a:solidFill>
-          </a:ln>
-        </p:spPr>
-        <p:style>
-          <a:lnRef idx="1">
-            <a:schemeClr val="accent1"/>
-          </a:lnRef>
-          <a:fillRef idx="3">
-            <a:schemeClr val="accent1"/>
-          </a:fillRef>
-          <a:effectRef idx="2">
-            <a:schemeClr val="accent1"/>
-          </a:effectRef>
-          <a:fontRef idx="minor">
-            <a:schemeClr val="lt1"/>
-          </a:fontRef>
-        </p:style>
-        <p:txBody>
-          <a:bodyPr rtlCol="0" anchor="ctr"/>
-          <a:lstStyle/>
-          <a:p>
-            <a:pPr algn="ctr"/>
-          </a:p>
-        </p:txBody>
-      </p:sp>
-      <p:sp>
-        <p:nvSpPr>
-          <p:cNvPr id="9" name="TextBox 8"/>
-          <p:cNvSpPr txBox="1"/>
-          <p:nvPr/>
-        </p:nvSpPr>
-        <p:spPr>
-          <a:xfrm>
-            <a:off x="868680" y="1261872"/>
-            <a:ext cx="5074920" cy="292608"/>
-          </a:xfrm>
-          <a:prstGeom prst="rect">
-            <a:avLst/>
-          </a:prstGeom>
-          <a:noFill/>
-        </p:spPr>
-        <p:txBody>
-          <a:bodyPr wrap="none" lIns="0" tIns="0" rIns="0" bIns="0">
-            <a:spAutoFit/>
-          </a:bodyPr>
-          <a:lstStyle/>
-          <a:p>
-            <a:pPr>
-              <a:defRPr sz="1050" b="1">
-                <a:solidFill>
-                  <a:srgbClr val="34D399"/>
-                </a:solidFill>
-                <a:latin typeface="Consolas"/>
-              </a:defRPr>
-            </a:pPr>
-            <a:r>
-              <a:t>&gt;_  Menu Host Console CLI (host/main.c)</a:t>
-            </a:r>
-          </a:p>
-        </p:txBody>
-      </p:sp>
-      <p:sp>
-        <p:nvSpPr>
-          <p:cNvPr id="10" name="TextBox 9"/>
-          <p:cNvSpPr txBox="1"/>
-          <p:nvPr/>
-        </p:nvSpPr>
-        <p:spPr>
-          <a:xfrm>
-            <a:off x="868680" y="1554480"/>
-            <a:ext cx="5074920" cy="4407408"/>
-          </a:xfrm>
-          <a:prstGeom prst="rect">
-            <a:avLst/>
-          </a:prstGeom>
-          <a:noFill/>
-        </p:spPr>
-        <p:txBody>
-          <a:bodyPr wrap="square" lIns="0" tIns="0" rIns="0" bIns="0">
-            <a:spAutoFit/>
-          </a:bodyPr>
-          <a:lstStyle/>
-          <a:p>
-            <a:pPr>
-              <a:lnSpc>
-                <a:spcPct val="155000"/>
-              </a:lnSpc>
-              <a:spcAft>
-                <a:spcPts val="0"/>
-              </a:spcAft>
-              <a:defRPr sz="1050">
-                <a:solidFill>
-                  <a:srgbClr val="FFFFFF"/>
-                </a:solidFill>
-                <a:latin typeface="Consolas"/>
-              </a:defRPr>
-            </a:pPr>
-            <a:r>
-              <a:t>===============================================================</a:t>
-            </a:r>
-          </a:p>
-          <a:p>
-            <a:pPr>
-              <a:lnSpc>
-                <a:spcPct val="155000"/>
-              </a:lnSpc>
-              <a:spcAft>
-                <a:spcPts val="0"/>
-              </a:spcAft>
-              <a:defRPr sz="1050">
-                <a:solidFill>
-                  <a:srgbClr val="FFFFFF"/>
-                </a:solidFill>
-                <a:latin typeface="Consolas"/>
-              </a:defRPr>
-            </a:pPr>
-            <a:r>
-              <a:t>     RDM6300 RFID - PICORV32 - BASYS 3 SPI FLASH MANAGER      </a:t>
-            </a:r>
-          </a:p>
-          <a:p>
-            <a:pPr>
-              <a:lnSpc>
-                <a:spcPct val="155000"/>
-              </a:lnSpc>
-              <a:spcAft>
-                <a:spcPts val="0"/>
-              </a:spcAft>
-              <a:defRPr sz="1050">
-                <a:solidFill>
-                  <a:srgbClr val="FFFFFF"/>
-                </a:solidFill>
-                <a:latin typeface="Consolas"/>
-              </a:defRPr>
-            </a:pPr>
-            <a:r>
-              <a:t>===============================================================</a:t>
-            </a:r>
-          </a:p>
-          <a:p>
-            <a:pPr>
-              <a:lnSpc>
-                <a:spcPct val="155000"/>
-              </a:lnSpc>
-              <a:spcAft>
-                <a:spcPts val="0"/>
-              </a:spcAft>
-              <a:defRPr sz="1050">
-                <a:solidFill>
-                  <a:srgbClr val="FFFFFF"/>
-                </a:solidFill>
-                <a:latin typeface="Consolas"/>
-              </a:defRPr>
-            </a:pPr>
-            <a:r>
-              <a:t>  [1]  Ping Hardware (Kiem tra ket noi PicoRV32)</a:t>
-            </a:r>
-          </a:p>
-          <a:p>
-            <a:pPr>
-              <a:lnSpc>
-                <a:spcPct val="155000"/>
-              </a:lnSpc>
-              <a:spcAft>
-                <a:spcPts val="0"/>
-              </a:spcAft>
-              <a:defRPr sz="1050">
-                <a:solidFill>
-                  <a:srgbClr val="FFFFFF"/>
-                </a:solidFill>
-                <a:latin typeface="Consolas"/>
-              </a:defRPr>
-            </a:pPr>
-            <a:r>
-              <a:t>  [2]  Input &amp; Save New RFID Tag (Nhap 10 so in tren the luu Flash)</a:t>
-            </a:r>
-          </a:p>
-          <a:p>
-            <a:pPr>
-              <a:lnSpc>
-                <a:spcPct val="155000"/>
-              </a:lnSpc>
-              <a:spcAft>
-                <a:spcPts val="0"/>
-              </a:spcAft>
-              <a:defRPr sz="1050">
-                <a:solidFill>
-                  <a:srgbClr val="FFFFFF"/>
-                </a:solidFill>
-                <a:latin typeface="Consolas"/>
-              </a:defRPr>
-            </a:pPr>
-            <a:r>
-              <a:t>  [3]  Check RFID Tag in Flash (Kiem tra the da co trong Flash)</a:t>
-            </a:r>
-          </a:p>
-          <a:p>
-            <a:pPr>
-              <a:lnSpc>
-                <a:spcPct val="155000"/>
-              </a:lnSpc>
-              <a:spcAft>
-                <a:spcPts val="0"/>
-              </a:spcAft>
-              <a:defRPr sz="1050">
-                <a:solidFill>
-                  <a:srgbClr val="FFFFFF"/>
-                </a:solidFill>
-                <a:latin typeface="Consolas"/>
-              </a:defRPr>
-            </a:pPr>
-            <a:r>
-              <a:t>  [4]  Delete RFID Tag from Flash (Nhap 10 so de xoa khoi Flash)</a:t>
-            </a:r>
-          </a:p>
-          <a:p>
-            <a:pPr>
-              <a:lnSpc>
-                <a:spcPct val="155000"/>
-              </a:lnSpc>
-              <a:spcAft>
-                <a:spcPts val="0"/>
-              </a:spcAft>
-              <a:defRPr sz="1050">
-                <a:solidFill>
-                  <a:srgbClr val="FFFFFF"/>
-                </a:solidFill>
-                <a:latin typeface="Consolas"/>
-              </a:defRPr>
-            </a:pPr>
-            <a:r>
-              <a:t>  [5]  Virtual Scan (Quet the ao: Nhap 10 so in tren the)</a:t>
-            </a:r>
-          </a:p>
-          <a:p>
-            <a:pPr>
-              <a:lnSpc>
-                <a:spcPct val="155000"/>
-              </a:lnSpc>
-              <a:spcAft>
-                <a:spcPts val="0"/>
-              </a:spcAft>
-              <a:defRPr sz="1050">
-                <a:solidFill>
-                  <a:srgbClr val="FFFFFF"/>
-                </a:solidFill>
-                <a:latin typeface="Consolas"/>
-              </a:defRPr>
-            </a:pPr>
-            <a:r>
-              <a:t>  [6]  View Access Logs from Flash (Xem nhat ky Flash 0x310000)</a:t>
-            </a:r>
-          </a:p>
-          <a:p>
-            <a:pPr>
-              <a:lnSpc>
-                <a:spcPct val="155000"/>
-              </a:lnSpc>
-              <a:spcAft>
-                <a:spcPts val="0"/>
-              </a:spcAft>
-              <a:defRPr sz="1050">
-                <a:solidFill>
-                  <a:srgbClr val="FFFFFF"/>
-                </a:solidFill>
-                <a:latin typeface="Consolas"/>
-              </a:defRPr>
-            </a:pPr>
-            <a:r>
-              <a:t>  [7]  Erase Access Logs (Sao luu CSV roi xoa nhat ky Flash)</a:t>
-            </a:r>
-          </a:p>
-          <a:p>
-            <a:pPr>
-              <a:lnSpc>
-                <a:spcPct val="155000"/>
-              </a:lnSpc>
-              <a:spcAft>
-                <a:spcPts val="0"/>
-              </a:spcAft>
-              <a:defRPr sz="1050">
-                <a:solidFill>
-                  <a:srgbClr val="FFFFFF"/>
-                </a:solidFill>
-                <a:latin typeface="Consolas"/>
-              </a:defRPr>
-            </a:pPr>
-            <a:r>
-              <a:t>  [8]  Export RFID Tags to CSV (Xuat danh sach the ra file CSV)</a:t>
-            </a:r>
-          </a:p>
-          <a:p>
-            <a:pPr>
-              <a:lnSpc>
-                <a:spcPct val="155000"/>
-              </a:lnSpc>
-              <a:spcAft>
-                <a:spcPts val="0"/>
-              </a:spcAft>
-              <a:defRPr sz="1050">
-                <a:solidFill>
-                  <a:srgbClr val="FFFFFF"/>
-                </a:solidFill>
-                <a:latin typeface="Consolas"/>
-              </a:defRPr>
-            </a:pPr>
-            <a:r>
-              <a:t>  [9]  Import RFID Tags from Latest CSV (Xoa Flash &amp; Nap CSV)</a:t>
-            </a:r>
-          </a:p>
-          <a:p>
-            <a:pPr>
-              <a:lnSpc>
-                <a:spcPct val="155000"/>
-              </a:lnSpc>
-              <a:spcAft>
-                <a:spcPts val="0"/>
-              </a:spcAft>
-              <a:defRPr sz="1050">
-                <a:solidFill>
-                  <a:srgbClr val="FFFFFF"/>
-                </a:solidFill>
-                <a:latin typeface="Consolas"/>
-              </a:defRPr>
-            </a:pPr>
-            <a:r>
-              <a:t>  [0]  Exit (Thoat)</a:t>
-            </a:r>
-          </a:p>
-          <a:p>
-            <a:pPr>
-              <a:lnSpc>
-                <a:spcPct val="155000"/>
-              </a:lnSpc>
-              <a:spcAft>
-                <a:spcPts val="0"/>
-              </a:spcAft>
-              <a:defRPr sz="1050">
-                <a:solidFill>
-                  <a:srgbClr val="FFFFFF"/>
-                </a:solidFill>
-                <a:latin typeface="Consolas"/>
-              </a:defRPr>
-            </a:pPr>
-            <a:r>
-              <a:t>---------------------------------------------------------------</a:t>
-            </a:r>
-          </a:p>
-          <a:p>
-            <a:pPr>
-              <a:lnSpc>
-                <a:spcPct val="155000"/>
-              </a:lnSpc>
-              <a:spcAft>
-                <a:spcPts val="0"/>
-              </a:spcAft>
-              <a:defRPr sz="1050">
-                <a:solidFill>
-                  <a:srgbClr val="FFFFFF"/>
-                </a:solidFill>
-                <a:latin typeface="Consolas"/>
-              </a:defRPr>
-            </a:pPr>
-            <a:r>
-              <a:t>Lua chon cua ban [0-9]: _</a:t>
-            </a:r>
-          </a:p>
-        </p:txBody>
-      </p:sp>
-      <p:sp>
-        <p:nvSpPr>
-          <p:cNvPr id="11" name="TextBox 10"/>
-          <p:cNvSpPr txBox="1"/>
-          <p:nvPr/>
-        </p:nvSpPr>
-        <p:spPr>
-          <a:xfrm>
-            <a:off x="868680" y="5925312"/>
-            <a:ext cx="5074920" cy="274320"/>
-          </a:xfrm>
-          <a:prstGeom prst="rect">
-            <a:avLst/>
-          </a:prstGeom>
-          <a:noFill/>
-        </p:spPr>
-        <p:txBody>
-          <a:bodyPr wrap="none" lIns="0" tIns="0" rIns="0" bIns="0">
-            <a:spAutoFit/>
-          </a:bodyPr>
-          <a:lstStyle/>
-          <a:p>
-            <a:pPr>
-              <a:defRPr sz="950" b="1">
-                <a:solidFill>
-                  <a:srgbClr val="10B981"/>
-                </a:solidFill>
-                <a:latin typeface="Segoe UI"/>
-              </a:defRPr>
-            </a:pPr>
-            <a:r>
-              <a:t>=== GIAO DIỆN QUẢN TRỊ TRÊN HOST PC GIAO TIẾP VỚI PICORV32 ===</a:t>
-            </a:r>
-          </a:p>
-        </p:txBody>
-      </p:sp>
-      <p:sp>
-        <p:nvSpPr>
-          <p:cNvPr id="12" name="Rounded Rectangle 11"/>
-          <p:cNvSpPr/>
-          <p:nvPr/>
-        </p:nvSpPr>
-        <p:spPr>
-          <a:xfrm>
-            <a:off x="6217920" y="1188720"/>
-            <a:ext cx="5239512" cy="5120640"/>
-          </a:xfrm>
-          <a:prstGeom prst="roundRect">
-            <a:avLst>
-              <a:gd name="adj" fmla="val 2000"/>
-            </a:avLst>
-          </a:prstGeom>
-          <a:solidFill>
-            <a:srgbClr val="FFFFFF"/>
-          </a:solidFill>
-          <a:ln w="19050">
-            <a:solidFill>
-              <a:srgbClr val="2563EB"/>
-            </a:solidFill>
-          </a:ln>
-        </p:spPr>
-        <p:style>
-          <a:lnRef idx="1">
-            <a:schemeClr val="accent1"/>
-          </a:lnRef>
-          <a:fillRef idx="3">
-            <a:schemeClr val="accent1"/>
-          </a:fillRef>
-          <a:effectRef idx="2">
-            <a:schemeClr val="accent1"/>
-          </a:effectRef>
-          <a:fontRef idx="minor">
-            <a:schemeClr val="lt1"/>
-          </a:fontRef>
-        </p:style>
-        <p:txBody>
-          <a:bodyPr rtlCol="0" anchor="ctr"/>
-          <a:lstStyle/>
-          <a:p>
-            <a:pPr algn="ctr"/>
-          </a:p>
-        </p:txBody>
-      </p:sp>
-      <p:sp>
-        <p:nvSpPr>
-          <p:cNvPr id="13" name="TextBox 12"/>
-          <p:cNvSpPr txBox="1"/>
-          <p:nvPr/>
-        </p:nvSpPr>
-        <p:spPr>
-          <a:xfrm>
-            <a:off x="6400800" y="1298448"/>
-            <a:ext cx="4873752" cy="4892040"/>
-          </a:xfrm>
-          <a:prstGeom prst="rect">
-            <a:avLst/>
-          </a:prstGeom>
-          <a:noFill/>
-        </p:spPr>
-        <p:txBody>
-          <a:bodyPr wrap="square">
-            <a:spAutoFit/>
-          </a:bodyPr>
-          <a:lstStyle/>
-          <a:p>
-            <a:pPr>
-              <a:spcAft>
-                <a:spcPts val="800"/>
-              </a:spcAft>
-              <a:defRPr sz="1400" b="1">
-                <a:solidFill>
-                  <a:srgbClr val="2563EB"/>
-                </a:solidFill>
-                <a:latin typeface="Segoe UI"/>
-              </a:defRPr>
-            </a:pPr>
-            <a:r>
-              <a:t>ÁNH XẠ LỆNH HOST VÀO FIRMWARE C (MAIN.C)</a:t>
-            </a:r>
-          </a:p>
-          <a:p>
-            <a:pPr>
-              <a:lnSpc>
-                <a:spcPct val="115000"/>
-              </a:lnSpc>
-              <a:spcAft>
-                <a:spcPts val="650"/>
-              </a:spcAft>
-              <a:defRPr sz="1200">
-                <a:solidFill>
-                  <a:srgbClr val="0F172A"/>
-                </a:solidFill>
-                <a:latin typeface="Segoe UI"/>
-              </a:defRPr>
-            </a:pPr>
-            <a:r>
-              <a:t>• [1] Ping Hardware ➔ case 'P': Phản hồi 'PONG: PicoRV32 Active', kiểm tra kết nối CPU &amp; UART.</a:t>
-            </a:r>
-          </a:p>
-          <a:p>
-            <a:pPr>
-              <a:lnSpc>
-                <a:spcPct val="115000"/>
-              </a:lnSpc>
-              <a:spcAft>
-                <a:spcPts val="650"/>
-              </a:spcAft>
-              <a:defRPr sz="1200">
-                <a:solidFill>
-                  <a:srgbClr val="0F172A"/>
-                </a:solidFill>
-                <a:latin typeface="Segoe UI"/>
-              </a:defRPr>
-            </a:pPr>
-            <a:r>
-              <a:t>• [2] Save New Tag ➔ case 'N': Nạp 10 số in trên thẻ vào Flash Sector 48 (địa chỉ 0x0030_0000).</a:t>
-            </a:r>
-          </a:p>
-          <a:p>
-            <a:pPr>
-              <a:lnSpc>
-                <a:spcPct val="115000"/>
-              </a:lnSpc>
-              <a:spcAft>
-                <a:spcPts val="650"/>
-              </a:spcAft>
-              <a:defRPr sz="1200">
-                <a:solidFill>
-                  <a:srgbClr val="0F172A"/>
-                </a:solidFill>
-                <a:latin typeface="Segoe UI"/>
-              </a:defRPr>
-            </a:pPr>
-            <a:r>
-              <a:t>• [3] Check Tag ➔ case 'C': Tra cứu xem mã thẻ đã tồn tại trong Whitelist SPI Flash hay chưa.</a:t>
-            </a:r>
-          </a:p>
-          <a:p>
-            <a:pPr>
-              <a:lnSpc>
-                <a:spcPct val="115000"/>
-              </a:lnSpc>
-              <a:spcAft>
-                <a:spcPts val="650"/>
-              </a:spcAft>
-              <a:defRPr sz="1200">
-                <a:solidFill>
-                  <a:srgbClr val="0F172A"/>
-                </a:solidFill>
-                <a:latin typeface="Segoe UI"/>
-              </a:defRPr>
-            </a:pPr>
-            <a:r>
-              <a:t>• [4] Delete Tag ➔ case 'K': Xóa duy nhất 1 thẻ chỉ định trong Flash bằng cách ghi đè Magic word.</a:t>
-            </a:r>
-          </a:p>
-          <a:p>
-            <a:pPr>
-              <a:lnSpc>
-                <a:spcPct val="115000"/>
-              </a:lnSpc>
-              <a:spcAft>
-                <a:spcPts val="650"/>
-              </a:spcAft>
-              <a:defRPr sz="1200">
-                <a:solidFill>
-                  <a:srgbClr val="0F172A"/>
-                </a:solidFill>
-                <a:latin typeface="Segoe UI"/>
-              </a:defRPr>
-            </a:pPr>
-            <a:r>
-              <a:t>• [5] Virtual Scan ➔ case 'V': Mô phỏng quẹt thẻ ảo từ terminal máy tính để kiểm tra xác thực.</a:t>
-            </a:r>
-          </a:p>
-          <a:p>
-            <a:pPr>
-              <a:lnSpc>
-                <a:spcPct val="115000"/>
-              </a:lnSpc>
-              <a:spcAft>
-                <a:spcPts val="650"/>
-              </a:spcAft>
-              <a:defRPr sz="1200">
-                <a:solidFill>
-                  <a:srgbClr val="0F172A"/>
-                </a:solidFill>
-                <a:latin typeface="Segoe UI"/>
-              </a:defRPr>
-            </a:pPr>
-            <a:r>
-              <a:t>• [6] View Logs ➔ case 'L': Đọc toàn bộ lịch sử quét thẻ từ Flash Sector 49 (địa chỉ 0x0031_0000).</a:t>
-            </a:r>
-          </a:p>
-          <a:p>
-            <a:pPr>
-              <a:lnSpc>
-                <a:spcPct val="115000"/>
-              </a:lnSpc>
-              <a:spcAft>
-                <a:spcPts val="650"/>
-              </a:spcAft>
-              <a:defRPr sz="1200">
-                <a:solidFill>
-                  <a:srgbClr val="0F172A"/>
-                </a:solidFill>
-                <a:latin typeface="Segoe UI"/>
-              </a:defRPr>
-            </a:pPr>
-            <a:r>
-              <a:t>• [7] Erase Logs ➔ case 'X': Firmware xóa trắng Sector 49 (Host tự gửi 'L' sao lưu CSV trên PC trước).</a:t>
-            </a:r>
-          </a:p>
-          <a:p>
-            <a:pPr>
-              <a:lnSpc>
-                <a:spcPct val="115000"/>
-              </a:lnSpc>
-              <a:spcAft>
-                <a:spcPts val="650"/>
-              </a:spcAft>
-              <a:defRPr sz="1200">
-                <a:solidFill>
-                  <a:srgbClr val="0F172A"/>
-                </a:solidFill>
-                <a:latin typeface="Segoe UI"/>
-              </a:defRPr>
-            </a:pPr>
-            <a:r>
-              <a:t>• [8] &amp; [9] Quản lý CSV (Host PC): Host tự xử lý file CSV; gửi lệnh 'F' (đọc thẻ) hoặc 'E'+'N' (nạp thẻ) sang SoC.</a:t>
-            </a:r>
-          </a:p>
-        </p:txBody>
-      </p:sp>
-    </p:spTree>
-  </p:cSld>
-  <p:clrMapOvr>
-    <a:masterClrMapping/>
-  </p:clrMapOvr>
-</p:sld>
-</file>
-
 <file path=ppt/slides/slide6.xml><?xml version="1.0" encoding="utf-8"?>
 <p:sld xmlns:a="http://schemas.openxmlformats.org/drawingml/2006/main" xmlns:p="http://schemas.openxmlformats.org/presentationml/2006/main" xmlns:r="http://schemas.openxmlformats.org/officeDocument/2006/relationships">
   <p:cSld>
@@ -10714,7 +11733,7 @@
               </a:defRPr>
             </a:pPr>
             <a:r>
-              <a:t>PHẦN 3: KIẾN TRÚC KHỐI NGOẠI VI UART</a:t>
+              <a:t>PHẦN 5: DEMO CHỨC NĂNG SẢN PHẨM</a:t>
             </a:r>
           </a:p>
           <a:p>
@@ -10727,7 +11746,7 @@
               </a:defRPr>
             </a:pPr>
             <a:r>
-              <a:t>Sơ Đồ Khối Kiến Trúc Vi Mạch UART RTL (Draw.io Đen Trắng &amp; Đặc Tả Thiết Kế)</a:t>
+              <a:t>Các Kịch Bản Thực Nghiệm &amp; Giao Diện Quản Trị Host Console</a:t>
             </a:r>
           </a:p>
         </p:txBody>
@@ -10842,7 +11861,7 @@
               </a:defRPr>
             </a:pPr>
             <a:r>
-              <a:t>06 / 13</a:t>
+              <a:t>06 / 14</a:t>
             </a:r>
           </a:p>
         </p:txBody>
@@ -10856,7 +11875,434 @@
         <p:spPr>
           <a:xfrm>
             <a:off x="731520" y="1188720"/>
-            <a:ext cx="5257800" cy="5120640"/>
+            <a:ext cx="5349240" cy="5120640"/>
+          </a:xfrm>
+          <a:prstGeom prst="roundRect">
+            <a:avLst>
+              <a:gd name="adj" fmla="val 2000"/>
+            </a:avLst>
+          </a:prstGeom>
+          <a:solidFill>
+            <a:srgbClr val="0B132B"/>
+          </a:solidFill>
+          <a:ln w="19050">
+            <a:solidFill>
+              <a:srgbClr val="1C2541"/>
+            </a:solidFill>
+          </a:ln>
+        </p:spPr>
+        <p:style>
+          <a:lnRef idx="1">
+            <a:schemeClr val="accent1"/>
+          </a:lnRef>
+          <a:fillRef idx="3">
+            <a:schemeClr val="accent1"/>
+          </a:fillRef>
+          <a:effectRef idx="2">
+            <a:schemeClr val="accent1"/>
+          </a:effectRef>
+          <a:fontRef idx="minor">
+            <a:schemeClr val="lt1"/>
+          </a:fontRef>
+        </p:style>
+        <p:txBody>
+          <a:bodyPr rtlCol="0" anchor="ctr"/>
+          <a:lstStyle/>
+          <a:p>
+            <a:pPr algn="ctr"/>
+          </a:p>
+        </p:txBody>
+      </p:sp>
+      <p:sp>
+        <p:nvSpPr>
+          <p:cNvPr id="9" name="TextBox 8"/>
+          <p:cNvSpPr txBox="1"/>
+          <p:nvPr/>
+        </p:nvSpPr>
+        <p:spPr>
+          <a:xfrm>
+            <a:off x="868680" y="1261872"/>
+            <a:ext cx="5074920" cy="292608"/>
+          </a:xfrm>
+          <a:prstGeom prst="rect">
+            <a:avLst/>
+          </a:prstGeom>
+          <a:noFill/>
+        </p:spPr>
+        <p:txBody>
+          <a:bodyPr wrap="none" lIns="0" tIns="0" rIns="0" bIns="0">
+            <a:spAutoFit/>
+          </a:bodyPr>
+          <a:lstStyle/>
+          <a:p>
+            <a:pPr>
+              <a:defRPr sz="1050" b="1">
+                <a:solidFill>
+                  <a:srgbClr val="34D399"/>
+                </a:solidFill>
+                <a:latin typeface="Consolas"/>
+              </a:defRPr>
+            </a:pPr>
+            <a:r>
+              <a:t>&gt;_  Menu Host Console CLI (host/main.c)</a:t>
+            </a:r>
+          </a:p>
+        </p:txBody>
+      </p:sp>
+      <p:sp>
+        <p:nvSpPr>
+          <p:cNvPr id="10" name="TextBox 9"/>
+          <p:cNvSpPr txBox="1"/>
+          <p:nvPr/>
+        </p:nvSpPr>
+        <p:spPr>
+          <a:xfrm>
+            <a:off x="868680" y="1554480"/>
+            <a:ext cx="5074920" cy="4407408"/>
+          </a:xfrm>
+          <a:prstGeom prst="rect">
+            <a:avLst/>
+          </a:prstGeom>
+          <a:noFill/>
+        </p:spPr>
+        <p:txBody>
+          <a:bodyPr wrap="square" lIns="0" tIns="0" rIns="0" bIns="0">
+            <a:spAutoFit/>
+          </a:bodyPr>
+          <a:lstStyle/>
+          <a:p>
+            <a:pPr>
+              <a:lnSpc>
+                <a:spcPct val="155000"/>
+              </a:lnSpc>
+              <a:spcAft>
+                <a:spcPts val="0"/>
+              </a:spcAft>
+              <a:defRPr sz="1050">
+                <a:solidFill>
+                  <a:srgbClr val="FFFFFF"/>
+                </a:solidFill>
+                <a:latin typeface="Consolas"/>
+              </a:defRPr>
+            </a:pPr>
+            <a:r>
+              <a:t>===============================================================</a:t>
+            </a:r>
+          </a:p>
+          <a:p>
+            <a:pPr>
+              <a:lnSpc>
+                <a:spcPct val="155000"/>
+              </a:lnSpc>
+              <a:spcAft>
+                <a:spcPts val="0"/>
+              </a:spcAft>
+              <a:defRPr sz="1050">
+                <a:solidFill>
+                  <a:srgbClr val="FFFFFF"/>
+                </a:solidFill>
+                <a:latin typeface="Consolas"/>
+              </a:defRPr>
+            </a:pPr>
+            <a:r>
+              <a:t>     RDM6300 RFID - PICORV32 - BASYS 3 SPI FLASH MANAGER      </a:t>
+            </a:r>
+          </a:p>
+          <a:p>
+            <a:pPr>
+              <a:lnSpc>
+                <a:spcPct val="155000"/>
+              </a:lnSpc>
+              <a:spcAft>
+                <a:spcPts val="0"/>
+              </a:spcAft>
+              <a:defRPr sz="1050">
+                <a:solidFill>
+                  <a:srgbClr val="FFFFFF"/>
+                </a:solidFill>
+                <a:latin typeface="Consolas"/>
+              </a:defRPr>
+            </a:pPr>
+            <a:r>
+              <a:t>===============================================================</a:t>
+            </a:r>
+          </a:p>
+          <a:p>
+            <a:pPr>
+              <a:lnSpc>
+                <a:spcPct val="155000"/>
+              </a:lnSpc>
+              <a:spcAft>
+                <a:spcPts val="0"/>
+              </a:spcAft>
+              <a:defRPr sz="1050">
+                <a:solidFill>
+                  <a:srgbClr val="FFFFFF"/>
+                </a:solidFill>
+                <a:latin typeface="Consolas"/>
+              </a:defRPr>
+            </a:pPr>
+            <a:r>
+              <a:t>  [1]  Ping Hardware (Kiem tra ket noi PicoRV32)</a:t>
+            </a:r>
+          </a:p>
+          <a:p>
+            <a:pPr>
+              <a:lnSpc>
+                <a:spcPct val="155000"/>
+              </a:lnSpc>
+              <a:spcAft>
+                <a:spcPts val="0"/>
+              </a:spcAft>
+              <a:defRPr sz="1050">
+                <a:solidFill>
+                  <a:srgbClr val="FFFFFF"/>
+                </a:solidFill>
+                <a:latin typeface="Consolas"/>
+              </a:defRPr>
+            </a:pPr>
+            <a:r>
+              <a:t>  [2]  Input &amp; Save New RFID Tag (Nhap 10 so in tren the luu Flash)</a:t>
+            </a:r>
+          </a:p>
+          <a:p>
+            <a:pPr>
+              <a:lnSpc>
+                <a:spcPct val="155000"/>
+              </a:lnSpc>
+              <a:spcAft>
+                <a:spcPts val="0"/>
+              </a:spcAft>
+              <a:defRPr sz="1050">
+                <a:solidFill>
+                  <a:srgbClr val="FFFFFF"/>
+                </a:solidFill>
+                <a:latin typeface="Consolas"/>
+              </a:defRPr>
+            </a:pPr>
+            <a:r>
+              <a:t>  [3]  Check RFID Tag in Flash (Kiem tra the da co trong Flash)</a:t>
+            </a:r>
+          </a:p>
+          <a:p>
+            <a:pPr>
+              <a:lnSpc>
+                <a:spcPct val="155000"/>
+              </a:lnSpc>
+              <a:spcAft>
+                <a:spcPts val="0"/>
+              </a:spcAft>
+              <a:defRPr sz="1050">
+                <a:solidFill>
+                  <a:srgbClr val="FFFFFF"/>
+                </a:solidFill>
+                <a:latin typeface="Consolas"/>
+              </a:defRPr>
+            </a:pPr>
+            <a:r>
+              <a:t>  [4]  Delete RFID Tag from Flash (Nhap 10 so de xoa khoi Flash)</a:t>
+            </a:r>
+          </a:p>
+          <a:p>
+            <a:pPr>
+              <a:lnSpc>
+                <a:spcPct val="155000"/>
+              </a:lnSpc>
+              <a:spcAft>
+                <a:spcPts val="0"/>
+              </a:spcAft>
+              <a:defRPr sz="1050">
+                <a:solidFill>
+                  <a:srgbClr val="FFFFFF"/>
+                </a:solidFill>
+                <a:latin typeface="Consolas"/>
+              </a:defRPr>
+            </a:pPr>
+            <a:r>
+              <a:t>  [5]  Virtual Scan (Quet the ao: Nhap 10 so in tren the)</a:t>
+            </a:r>
+          </a:p>
+          <a:p>
+            <a:pPr>
+              <a:lnSpc>
+                <a:spcPct val="155000"/>
+              </a:lnSpc>
+              <a:spcAft>
+                <a:spcPts val="0"/>
+              </a:spcAft>
+              <a:defRPr sz="1050">
+                <a:solidFill>
+                  <a:srgbClr val="FFFFFF"/>
+                </a:solidFill>
+                <a:latin typeface="Consolas"/>
+              </a:defRPr>
+            </a:pPr>
+            <a:r>
+              <a:t>  [6]  View Access Logs from Flash (Xem nhat ky Flash 0x310000)</a:t>
+            </a:r>
+          </a:p>
+          <a:p>
+            <a:pPr>
+              <a:lnSpc>
+                <a:spcPct val="155000"/>
+              </a:lnSpc>
+              <a:spcAft>
+                <a:spcPts val="0"/>
+              </a:spcAft>
+              <a:defRPr sz="1050">
+                <a:solidFill>
+                  <a:srgbClr val="FFFFFF"/>
+                </a:solidFill>
+                <a:latin typeface="Consolas"/>
+              </a:defRPr>
+            </a:pPr>
+            <a:r>
+              <a:t>  [7]  Erase Access Logs (Sao luu CSV roi xoa nhat ky Flash)</a:t>
+            </a:r>
+          </a:p>
+          <a:p>
+            <a:pPr>
+              <a:lnSpc>
+                <a:spcPct val="155000"/>
+              </a:lnSpc>
+              <a:spcAft>
+                <a:spcPts val="0"/>
+              </a:spcAft>
+              <a:defRPr sz="1050">
+                <a:solidFill>
+                  <a:srgbClr val="FFFFFF"/>
+                </a:solidFill>
+                <a:latin typeface="Consolas"/>
+              </a:defRPr>
+            </a:pPr>
+            <a:r>
+              <a:t>  [8]  Export RFID Tags to CSV (Xuat danh sach the ra file CSV)</a:t>
+            </a:r>
+          </a:p>
+          <a:p>
+            <a:pPr>
+              <a:lnSpc>
+                <a:spcPct val="155000"/>
+              </a:lnSpc>
+              <a:spcAft>
+                <a:spcPts val="0"/>
+              </a:spcAft>
+              <a:defRPr sz="1050">
+                <a:solidFill>
+                  <a:srgbClr val="FFFFFF"/>
+                </a:solidFill>
+                <a:latin typeface="Consolas"/>
+              </a:defRPr>
+            </a:pPr>
+            <a:r>
+              <a:t>  [9]  Import RFID Tags from Latest CSV (Xoa Flash &amp; Nap CSV)</a:t>
+            </a:r>
+          </a:p>
+          <a:p>
+            <a:pPr>
+              <a:lnSpc>
+                <a:spcPct val="155000"/>
+              </a:lnSpc>
+              <a:spcAft>
+                <a:spcPts val="0"/>
+              </a:spcAft>
+              <a:defRPr sz="1050">
+                <a:solidFill>
+                  <a:srgbClr val="FFFFFF"/>
+                </a:solidFill>
+                <a:latin typeface="Consolas"/>
+              </a:defRPr>
+            </a:pPr>
+            <a:r>
+              <a:t>  [0]  Exit (Thoat)</a:t>
+            </a:r>
+          </a:p>
+          <a:p>
+            <a:pPr>
+              <a:lnSpc>
+                <a:spcPct val="155000"/>
+              </a:lnSpc>
+              <a:spcAft>
+                <a:spcPts val="0"/>
+              </a:spcAft>
+              <a:defRPr sz="1050">
+                <a:solidFill>
+                  <a:srgbClr val="FFFFFF"/>
+                </a:solidFill>
+                <a:latin typeface="Consolas"/>
+              </a:defRPr>
+            </a:pPr>
+            <a:r>
+              <a:t>---------------------------------------------------------------</a:t>
+            </a:r>
+          </a:p>
+          <a:p>
+            <a:pPr>
+              <a:lnSpc>
+                <a:spcPct val="155000"/>
+              </a:lnSpc>
+              <a:spcAft>
+                <a:spcPts val="0"/>
+              </a:spcAft>
+              <a:defRPr sz="1050">
+                <a:solidFill>
+                  <a:srgbClr val="FFFFFF"/>
+                </a:solidFill>
+                <a:latin typeface="Consolas"/>
+              </a:defRPr>
+            </a:pPr>
+            <a:r>
+              <a:t>Lua chon cua ban [0-9]: _</a:t>
+            </a:r>
+          </a:p>
+        </p:txBody>
+      </p:sp>
+      <p:sp>
+        <p:nvSpPr>
+          <p:cNvPr id="11" name="TextBox 10"/>
+          <p:cNvSpPr txBox="1"/>
+          <p:nvPr/>
+        </p:nvSpPr>
+        <p:spPr>
+          <a:xfrm>
+            <a:off x="868680" y="5925312"/>
+            <a:ext cx="5074920" cy="274320"/>
+          </a:xfrm>
+          <a:prstGeom prst="rect">
+            <a:avLst/>
+          </a:prstGeom>
+          <a:noFill/>
+        </p:spPr>
+        <p:txBody>
+          <a:bodyPr wrap="none" lIns="0" tIns="0" rIns="0" bIns="0">
+            <a:spAutoFit/>
+          </a:bodyPr>
+          <a:lstStyle/>
+          <a:p>
+            <a:pPr>
+              <a:defRPr sz="950" b="1">
+                <a:solidFill>
+                  <a:srgbClr val="10B981"/>
+                </a:solidFill>
+                <a:latin typeface="Segoe UI"/>
+              </a:defRPr>
+            </a:pPr>
+            <a:r>
+              <a:t>=== GIAO DIỆN QUẢN TRỊ TRÊN HOST PC GIAO TIẾP VỚI PICORV32 ===</a:t>
+            </a:r>
+          </a:p>
+        </p:txBody>
+      </p:sp>
+      <p:sp>
+        <p:nvSpPr>
+          <p:cNvPr id="12" name="Rounded Rectangle 11"/>
+          <p:cNvSpPr/>
+          <p:nvPr/>
+        </p:nvSpPr>
+        <p:spPr>
+          <a:xfrm>
+            <a:off x="6217920" y="1188720"/>
+            <a:ext cx="5239512" cy="5120640"/>
           </a:xfrm>
           <a:prstGeom prst="roundRect">
             <a:avLst>
@@ -10894,87 +12340,16 @@
           </a:p>
         </p:txBody>
       </p:sp>
-      <p:pic>
-        <p:nvPicPr>
-          <p:cNvPr id="9" name="Picture 8" descr="uart_architecture_bw_diagram.png"/>
-          <p:cNvPicPr>
-            <a:picLocks noChangeAspect="1"/>
-          </p:cNvPicPr>
-          <p:nvPr/>
-        </p:nvPicPr>
-        <p:blipFill>
-          <a:blip r:embed="rId2"/>
-          <a:stretch>
-            <a:fillRect/>
-          </a:stretch>
-        </p:blipFill>
-        <p:spPr>
-          <a:xfrm>
-            <a:off x="868680" y="1325880"/>
-            <a:ext cx="4983480" cy="4846320"/>
-          </a:xfrm>
-          <a:prstGeom prst="rect">
-            <a:avLst/>
-          </a:prstGeom>
-        </p:spPr>
-      </p:pic>
-      <p:sp>
-        <p:nvSpPr>
-          <p:cNvPr id="10" name="Rounded Rectangle 9"/>
-          <p:cNvSpPr/>
-          <p:nvPr/>
-        </p:nvSpPr>
-        <p:spPr>
-          <a:xfrm>
-            <a:off x="6172200" y="1188720"/>
-            <a:ext cx="5285232" cy="5120640"/>
-          </a:xfrm>
-          <a:prstGeom prst="roundRect">
-            <a:avLst>
-              <a:gd name="adj" fmla="val 2000"/>
-            </a:avLst>
-          </a:prstGeom>
-          <a:solidFill>
-            <a:srgbClr val="FFFFFF"/>
-          </a:solidFill>
-          <a:ln w="19050">
-            <a:solidFill>
-              <a:srgbClr val="2563EB"/>
-            </a:solidFill>
-          </a:ln>
-        </p:spPr>
-        <p:style>
-          <a:lnRef idx="1">
-            <a:schemeClr val="accent1"/>
-          </a:lnRef>
-          <a:fillRef idx="3">
-            <a:schemeClr val="accent1"/>
-          </a:fillRef>
-          <a:effectRef idx="2">
-            <a:schemeClr val="accent1"/>
-          </a:effectRef>
-          <a:fontRef idx="minor">
-            <a:schemeClr val="lt1"/>
-          </a:fontRef>
-        </p:style>
-        <p:txBody>
-          <a:bodyPr rtlCol="0" anchor="ctr"/>
-          <a:lstStyle/>
-          <a:p>
-            <a:pPr algn="ctr"/>
-          </a:p>
-        </p:txBody>
-      </p:sp>
-      <p:sp>
-        <p:nvSpPr>
-          <p:cNvPr id="11" name="TextBox 10"/>
+      <p:sp>
+        <p:nvSpPr>
+          <p:cNvPr id="13" name="TextBox 12"/>
           <p:cNvSpPr txBox="1"/>
           <p:nvPr/>
         </p:nvSpPr>
         <p:spPr>
           <a:xfrm>
-            <a:off x="6355080" y="1298448"/>
-            <a:ext cx="4919472" cy="4892040"/>
+            <a:off x="6400800" y="1298448"/>
+            <a:ext cx="4873752" cy="4892040"/>
           </a:xfrm>
           <a:prstGeom prst="rect">
             <a:avLst/>
@@ -10989,9 +12364,9 @@
           <a:p>
             <a:pPr>
               <a:spcAft>
-                <a:spcPts val="1000"/>
+                <a:spcPts val="800"/>
               </a:spcAft>
-              <a:defRPr b="1" sz="1450">
+              <a:defRPr sz="1400" b="1">
                 <a:solidFill>
                   <a:srgbClr val="2563EB"/>
                 </a:solidFill>
@@ -10999,26 +12374,7 @@
               </a:defRPr>
             </a:pPr>
             <a:r>
-              <a:t>ĐẶC TẢ THIẾT KẾ 5 TẦNG PHẦN CỨNG UART RTL</a:t>
-            </a:r>
-          </a:p>
-          <a:p>
-            <a:pPr>
-              <a:spcBef>
-                <a:spcPts val="800"/>
-              </a:spcBef>
-              <a:spcAft>
-                <a:spcPts val="200"/>
-              </a:spcAft>
-              <a:defRPr sz="1250" b="1">
-                <a:solidFill>
-                  <a:srgbClr val="E11D48"/>
-                </a:solidFill>
-                <a:latin typeface="Segoe UI"/>
-              </a:defRPr>
-            </a:pPr>
-            <a:r>
-              <a:t>TẦNG 1: ĐỒNG BỘ 2-FF CDC (sync_2ff.v)</a:t>
+              <a:t>ÁNH XẠ LỆNH HOST VÀO FIRMWARE C (MAIN.C)</a:t>
             </a:r>
           </a:p>
           <a:p>
@@ -11027,7 +12383,7 @@
                 <a:spcPct val="115000"/>
               </a:lnSpc>
               <a:spcAft>
-                <a:spcPts val="600"/>
+                <a:spcPts val="650"/>
               </a:spcAft>
               <a:defRPr sz="1200">
                 <a:solidFill>
@@ -11037,26 +12393,7 @@
               </a:defRPr>
             </a:pPr>
             <a:r>
-              <a:t>• Khử siêu ổn định (Metastability) tín hiệu rx_i 125kHz; MTBF &gt; 1.000 năm trên SkyWater 130nm.</a:t>
-            </a:r>
-          </a:p>
-          <a:p>
-            <a:pPr>
-              <a:spcBef>
-                <a:spcPts val="800"/>
-              </a:spcBef>
-              <a:spcAft>
-                <a:spcPts val="200"/>
-              </a:spcAft>
-              <a:defRPr sz="1250" b="1">
-                <a:solidFill>
-                  <a:srgbClr val="D97706"/>
-                </a:solidFill>
-                <a:latin typeface="Segoe UI"/>
-              </a:defRPr>
-            </a:pPr>
-            <a:r>
-              <a:t>TẦNG 2 &amp; 3: TẠO BAUD &amp; MÁY TRẠNG THÁI RX (simpleuart.v)</a:t>
+              <a:t>• [1] Ping Hardware ➔ case 'P': Phản hồi 'PONG: PicoRV32 Active', kiểm tra kết nối CPU &amp; UART.</a:t>
             </a:r>
           </a:p>
           <a:p>
@@ -11065,7 +12402,7 @@
                 <a:spcPct val="115000"/>
               </a:lnSpc>
               <a:spcAft>
-                <a:spcPts val="600"/>
+                <a:spcPts val="650"/>
               </a:spcAft>
               <a:defRPr sz="1200">
                 <a:solidFill>
@@ -11075,26 +12412,7 @@
               </a:defRPr>
             </a:pPr>
             <a:r>
-              <a:t>• Chia tần số cfg_divider = 5208 (9600 bps); Lấy mẫu 16x bầu đa số 3 mẫu &amp; bắt khung 8-N-1.</a:t>
-            </a:r>
-          </a:p>
-          <a:p>
-            <a:pPr>
-              <a:spcBef>
-                <a:spcPts val="800"/>
-              </a:spcBef>
-              <a:spcAft>
-                <a:spcPts val="200"/>
-              </a:spcAft>
-              <a:defRPr sz="1250" b="1">
-                <a:solidFill>
-                  <a:srgbClr val="2563EB"/>
-                </a:solidFill>
-                <a:latin typeface="Segoe UI"/>
-              </a:defRPr>
-            </a:pPr>
-            <a:r>
-              <a:t>TẦNG 4: HÀNG ĐỢI FIFO 32 BYTES ĐỘC LẬP (sync_fifo.v)</a:t>
+              <a:t>• [2] Save New Tag ➔ case 'N': Nạp 10 số in trên thẻ vào Flash Sector 48 (địa chỉ 0x0030_0000).</a:t>
             </a:r>
           </a:p>
           <a:p>
@@ -11103,7 +12421,7 @@
                 <a:spcPct val="115000"/>
               </a:lnSpc>
               <a:spcAft>
-                <a:spcPts val="600"/>
+                <a:spcPts val="650"/>
               </a:spcAft>
               <a:defRPr sz="1200">
                 <a:solidFill>
@@ -11113,26 +12431,7 @@
               </a:defRPr>
             </a:pPr>
             <a:r>
-              <a:t>• Đệm trọn vẹn 14 byte chuỗi thẻ RFID, chống tràn dữ liệu tuyệt đối khi CPU bận ghi Flash.</a:t>
-            </a:r>
-          </a:p>
-          <a:p>
-            <a:pPr>
-              <a:spcBef>
-                <a:spcPts val="800"/>
-              </a:spcBef>
-              <a:spcAft>
-                <a:spcPts val="200"/>
-              </a:spcAft>
-              <a:defRPr sz="1250" b="1">
-                <a:solidFill>
-                  <a:srgbClr val="10B981"/>
-                </a:solidFill>
-                <a:latin typeface="Segoe UI"/>
-              </a:defRPr>
-            </a:pPr>
-            <a:r>
-              <a:t>TẦNG 5: GIẢI MÃ BUS MMIO NON-BLOCKING (uart_mmio.v)</a:t>
+              <a:t>• [3] Check Tag ➔ case 'C': Tra cứu xem mã thẻ đã tồn tại trong Whitelist SPI Flash hay chưa.</a:t>
             </a:r>
           </a:p>
           <a:p>
@@ -11141,7 +12440,7 @@
                 <a:spcPct val="115000"/>
               </a:lnSpc>
               <a:spcAft>
-                <a:spcPts val="600"/>
+                <a:spcPts val="650"/>
               </a:spcAft>
               <a:defRPr sz="1200">
                 <a:solidFill>
@@ -11151,7 +12450,83 @@
               </a:defRPr>
             </a:pPr>
             <a:r>
-              <a:t>• Ánh xạ 0x1000_0000 / 0x1000_0004; Phản hồi trong 1 chu kỳ 20ns, không bao giờ treo CPU.</a:t>
+              <a:t>• [4] Delete Tag ➔ case 'K': Xóa duy nhất 1 thẻ chỉ định trong Flash bằng cách ghi đè Magic word.</a:t>
+            </a:r>
+          </a:p>
+          <a:p>
+            <a:pPr>
+              <a:lnSpc>
+                <a:spcPct val="115000"/>
+              </a:lnSpc>
+              <a:spcAft>
+                <a:spcPts val="650"/>
+              </a:spcAft>
+              <a:defRPr sz="1200">
+                <a:solidFill>
+                  <a:srgbClr val="0F172A"/>
+                </a:solidFill>
+                <a:latin typeface="Segoe UI"/>
+              </a:defRPr>
+            </a:pPr>
+            <a:r>
+              <a:t>• [5] Virtual Scan ➔ case 'V': Mô phỏng quẹt thẻ ảo từ terminal máy tính để kiểm tra xác thực.</a:t>
+            </a:r>
+          </a:p>
+          <a:p>
+            <a:pPr>
+              <a:lnSpc>
+                <a:spcPct val="115000"/>
+              </a:lnSpc>
+              <a:spcAft>
+                <a:spcPts val="650"/>
+              </a:spcAft>
+              <a:defRPr sz="1200">
+                <a:solidFill>
+                  <a:srgbClr val="0F172A"/>
+                </a:solidFill>
+                <a:latin typeface="Segoe UI"/>
+              </a:defRPr>
+            </a:pPr>
+            <a:r>
+              <a:t>• [6] View Logs ➔ case 'L': Đọc toàn bộ lịch sử quét thẻ từ Flash Sector 49 (địa chỉ 0x0031_0000).</a:t>
+            </a:r>
+          </a:p>
+          <a:p>
+            <a:pPr>
+              <a:lnSpc>
+                <a:spcPct val="115000"/>
+              </a:lnSpc>
+              <a:spcAft>
+                <a:spcPts val="650"/>
+              </a:spcAft>
+              <a:defRPr sz="1200">
+                <a:solidFill>
+                  <a:srgbClr val="0F172A"/>
+                </a:solidFill>
+                <a:latin typeface="Segoe UI"/>
+              </a:defRPr>
+            </a:pPr>
+            <a:r>
+              <a:t>• [7] Erase Logs ➔ case 'X': Firmware xóa trắng Sector 49 (Host tự gửi 'L' sao lưu CSV trên PC trước).</a:t>
+            </a:r>
+          </a:p>
+          <a:p>
+            <a:pPr>
+              <a:lnSpc>
+                <a:spcPct val="115000"/>
+              </a:lnSpc>
+              <a:spcAft>
+                <a:spcPts val="650"/>
+              </a:spcAft>
+              <a:defRPr sz="1200">
+                <a:solidFill>
+                  <a:srgbClr val="0F172A"/>
+                </a:solidFill>
+                <a:latin typeface="Segoe UI"/>
+              </a:defRPr>
+            </a:pPr>
+            <a:r>
+              <a:t>• [8] &amp; [9] Quản lý CSV (Host PC): Host tự xử lý file CSV; gửi lệnh 'F' (đọc thẻ) hoặc 'E'+'N' (nạp thẻ) sang SoC.</a:t>
             </a:r>
           </a:p>
         </p:txBody>
@@ -11294,7 +12669,7 @@
               </a:defRPr>
             </a:pPr>
             <a:r>
-              <a:t>PHẦN 4: HỆ THỐNG TESTBENCH &amp; MÔ PHỎNG</a:t>
+              <a:t>PHẦN 3: KIẾN TRÚC KHỐI NGOẠI VI UART</a:t>
             </a:r>
           </a:p>
           <a:p>
@@ -11307,7 +12682,7 @@
               </a:defRPr>
             </a:pPr>
             <a:r>
-              <a:t>Testbench 1: Kiểm Thử Phần Cứng RTL Thuần Cho UART MMIO &amp; FIFO (tb_uart_rtl.v)</a:t>
+              <a:t>Sơ Đồ Khối Kiến Trúc Vi Mạch UART RTL (Draw.io Đen Trắng &amp; Đặc Tả Thiết Kế)</a:t>
             </a:r>
           </a:p>
         </p:txBody>
@@ -11422,7 +12797,7 @@
               </a:defRPr>
             </a:pPr>
             <a:r>
-              <a:t>07 / 13</a:t>
+              <a:t>07 / 14</a:t>
             </a:r>
           </a:p>
         </p:txBody>
@@ -11436,7 +12811,7 @@
         <p:spPr>
           <a:xfrm>
             <a:off x="731520" y="1188720"/>
-            <a:ext cx="10728655" cy="3822191"/>
+            <a:ext cx="5257800" cy="5120640"/>
           </a:xfrm>
           <a:prstGeom prst="roundRect">
             <a:avLst>
@@ -11474,45 +12849,9 @@
           </a:p>
         </p:txBody>
       </p:sp>
-      <p:sp>
-        <p:nvSpPr>
-          <p:cNvPr id="9" name="TextBox 8"/>
-          <p:cNvSpPr txBox="1"/>
-          <p:nvPr/>
-        </p:nvSpPr>
-        <p:spPr>
-          <a:xfrm>
-            <a:off x="868680" y="1243584"/>
-            <a:ext cx="10454335" cy="237744"/>
-          </a:xfrm>
-          <a:prstGeom prst="rect">
-            <a:avLst/>
-          </a:prstGeom>
-          <a:noFill/>
-        </p:spPr>
-        <p:txBody>
-          <a:bodyPr wrap="none" lIns="0" tIns="0" rIns="0" bIns="0">
-            <a:spAutoFit/>
-          </a:bodyPr>
-          <a:lstStyle/>
-          <a:p>
-            <a:pPr algn="ctr">
-              <a:defRPr sz="1200" b="1">
-                <a:solidFill>
-                  <a:srgbClr val="2563EB"/>
-                </a:solidFill>
-                <a:latin typeface="Segoe UI"/>
-              </a:defRPr>
-            </a:pPr>
-            <a:r>
-              <a:t>DẠNG SÓNG MÔ PHỎNG TIMELINE VIVADO XSIM (15.275 µs)</a:t>
-            </a:r>
-          </a:p>
-        </p:txBody>
-      </p:sp>
       <p:pic>
         <p:nvPicPr>
-          <p:cNvPr id="10" name="Picture 9" descr="waveform_tb_uart_rtl.png"/>
+          <p:cNvPr id="9" name="Picture 8" descr="uart_architecture_bw_diagram.png"/>
           <p:cNvPicPr>
             <a:picLocks noChangeAspect="1"/>
           </p:cNvPicPr>
@@ -11526,8 +12865,8 @@
         </p:blipFill>
         <p:spPr>
           <a:xfrm>
-            <a:off x="1700784" y="1508760"/>
-            <a:ext cx="8778240" cy="3401568"/>
+            <a:off x="868680" y="1325880"/>
+            <a:ext cx="4983480" cy="4846320"/>
           </a:xfrm>
           <a:prstGeom prst="rect">
             <a:avLst/>
@@ -11536,14 +12875,14 @@
       </p:pic>
       <p:sp>
         <p:nvSpPr>
-          <p:cNvPr id="11" name="Rounded Rectangle 10"/>
+          <p:cNvPr id="10" name="Rounded Rectangle 9"/>
           <p:cNvSpPr/>
           <p:nvPr/>
         </p:nvSpPr>
         <p:spPr>
           <a:xfrm>
-            <a:off x="731520" y="5102352"/>
-            <a:ext cx="7589520" cy="1207008"/>
+            <a:off x="6172200" y="1188720"/>
+            <a:ext cx="5285232" cy="5120640"/>
           </a:xfrm>
           <a:prstGeom prst="roundRect">
             <a:avLst>
@@ -11583,14 +12922,14 @@
       </p:sp>
       <p:sp>
         <p:nvSpPr>
-          <p:cNvPr id="12" name="TextBox 11"/>
+          <p:cNvPr id="11" name="TextBox 10"/>
           <p:cNvSpPr txBox="1"/>
           <p:nvPr/>
         </p:nvSpPr>
         <p:spPr>
           <a:xfrm>
-            <a:off x="868680" y="5157216"/>
-            <a:ext cx="7315200" cy="1097280"/>
+            <a:off x="6355080" y="1298448"/>
+            <a:ext cx="4919472" cy="4892040"/>
           </a:xfrm>
           <a:prstGeom prst="rect">
             <a:avLst/>
@@ -11598,35 +12937,54 @@
           <a:noFill/>
         </p:spPr>
         <p:txBody>
-          <a:bodyPr wrap="square" lIns="0" tIns="0" rIns="0" bIns="0">
+          <a:bodyPr wrap="square">
             <a:spAutoFit/>
           </a:bodyPr>
           <a:lstStyle/>
           <a:p>
             <a:pPr>
+              <a:spcAft>
+                <a:spcPts val="1000"/>
+              </a:spcAft>
+              <a:defRPr b="1" sz="1450">
+                <a:solidFill>
+                  <a:srgbClr val="2563EB"/>
+                </a:solidFill>
+                <a:latin typeface="Segoe UI"/>
+              </a:defRPr>
+            </a:pPr>
+            <a:r>
+              <a:t>ĐẶC TẢ THIẾT KẾ 5 TẦNG PHẦN CỨNG UART RTL</a:t>
+            </a:r>
+          </a:p>
+          <a:p>
+            <a:pPr>
+              <a:spcBef>
+                <a:spcPts val="800"/>
+              </a:spcBef>
               <a:spcAft>
                 <a:spcPts val="200"/>
               </a:spcAft>
-              <a:defRPr sz="1100" b="1">
-                <a:solidFill>
-                  <a:srgbClr val="2563EB"/>
-                </a:solidFill>
-                <a:latin typeface="Segoe UI"/>
-              </a:defRPr>
-            </a:pPr>
-            <a:r>
-              <a:t>5 KỊCH BẢN KIỂM THỬ RTL THUẦN (XÁC MINH PHẦN CỨNG 100% PASS):</a:t>
+              <a:defRPr sz="1250" b="1">
+                <a:solidFill>
+                  <a:srgbClr val="E11D48"/>
+                </a:solidFill>
+                <a:latin typeface="Segoe UI"/>
+              </a:defRPr>
+            </a:pPr>
+            <a:r>
+              <a:t>TẦNG 1: ĐỒNG BỘ 2-FF CDC (sync_2ff.v)</a:t>
             </a:r>
           </a:p>
           <a:p>
             <a:pPr>
               <a:lnSpc>
-                <a:spcPct val="105000"/>
+                <a:spcPct val="115000"/>
               </a:lnSpc>
               <a:spcAft>
-                <a:spcPts val="120"/>
+                <a:spcPts val="600"/>
               </a:spcAft>
-              <a:defRPr sz="1050">
+              <a:defRPr sz="1200">
                 <a:solidFill>
                   <a:srgbClr val="0F172A"/>
                 </a:solidFill>
@@ -11634,169 +12992,26 @@
               </a:defRPr>
             </a:pPr>
             <a:r>
-              <a:t>• 1. Divider Mặc Định: Prescaler nạp đúng TEST_DIV = 16 ➔ PASS</a:t>
-            </a:r>
-          </a:p>
-          <a:p>
-            <a:pPr>
-              <a:lnSpc>
-                <a:spcPct val="105000"/>
-              </a:lnSpc>
-              <a:spcAft>
-                <a:spcPts val="120"/>
-              </a:spcAft>
-              <a:defRPr sz="1050">
-                <a:solidFill>
-                  <a:srgbClr val="0F172A"/>
-                </a:solidFill>
-                <a:latin typeface="Segoe UI"/>
-              </a:defRPr>
-            </a:pPr>
-            <a:r>
-              <a:t>• 2. Tái Cấu Hình: Ghi giá trị chia tần mới qua MMIO tức thì ➔ PASS</a:t>
-            </a:r>
-          </a:p>
-          <a:p>
-            <a:pPr>
-              <a:lnSpc>
-                <a:spcPct val="105000"/>
-              </a:lnSpc>
-              <a:spcAft>
-                <a:spcPts val="120"/>
-              </a:spcAft>
-              <a:defRPr sz="1050">
-                <a:solidFill>
-                  <a:srgbClr val="0F172A"/>
-                </a:solidFill>
-                <a:latin typeface="Segoe UI"/>
-              </a:defRPr>
-            </a:pPr>
-            <a:r>
-              <a:t>• 3. Phát Khung TX: Ký tự 0x4B ('K') xuất chuẩn UART 8-N-1 ➔ PASS</a:t>
-            </a:r>
-          </a:p>
-          <a:p>
-            <a:pPr>
-              <a:lnSpc>
-                <a:spcPct val="105000"/>
-              </a:lnSpc>
-              <a:spcAft>
-                <a:spcPts val="120"/>
-              </a:spcAft>
-              <a:defRPr sz="1050">
-                <a:solidFill>
-                  <a:srgbClr val="0F172A"/>
-                </a:solidFill>
-                <a:latin typeface="Segoe UI"/>
-              </a:defRPr>
-            </a:pPr>
-            <a:r>
-              <a:t>• 4. Nhận Khung RX: Bắt chuỗi xung rx_i, nạp sạch FIFO (read_val = 75) ➔ PASS</a:t>
-            </a:r>
-          </a:p>
-          <a:p>
-            <a:pPr>
-              <a:lnSpc>
-                <a:spcPct val="105000"/>
-              </a:lnSpc>
-              <a:spcAft>
-                <a:spcPts val="120"/>
-              </a:spcAft>
-              <a:defRPr sz="1050">
-                <a:solidFill>
-                  <a:srgbClr val="0F172A"/>
-                </a:solidFill>
-                <a:latin typeface="Segoe UI"/>
-              </a:defRPr>
-            </a:pPr>
-            <a:r>
-              <a:t>• 5. Xả Tràn FIFO: Đệm liên tục nhiều byte, đọc cạn trả về 0xFFFFFFFF ➔ PASS</a:t>
-            </a:r>
-          </a:p>
-        </p:txBody>
-      </p:sp>
-      <p:sp>
-        <p:nvSpPr>
-          <p:cNvPr id="13" name="Rounded Rectangle 12"/>
-          <p:cNvSpPr/>
-          <p:nvPr/>
-        </p:nvSpPr>
-        <p:spPr>
-          <a:xfrm>
-            <a:off x="8412480" y="5102352"/>
-            <a:ext cx="3047695" cy="1207008"/>
-          </a:xfrm>
-          <a:prstGeom prst="roundRect">
-            <a:avLst>
-              <a:gd name="adj" fmla="val 2000"/>
-            </a:avLst>
-          </a:prstGeom>
-          <a:solidFill>
-            <a:srgbClr val="ECFDF5"/>
-          </a:solidFill>
-          <a:ln w="19050">
-            <a:solidFill>
-              <a:srgbClr val="10B981"/>
-            </a:solidFill>
-          </a:ln>
-        </p:spPr>
-        <p:style>
-          <a:lnRef idx="1">
-            <a:schemeClr val="accent1"/>
-          </a:lnRef>
-          <a:fillRef idx="3">
-            <a:schemeClr val="accent1"/>
-          </a:fillRef>
-          <a:effectRef idx="2">
-            <a:schemeClr val="accent1"/>
-          </a:effectRef>
-          <a:fontRef idx="minor">
-            <a:schemeClr val="lt1"/>
-          </a:fontRef>
-        </p:style>
-        <p:txBody>
-          <a:bodyPr rtlCol="0" anchor="ctr"/>
-          <a:lstStyle/>
-          <a:p>
-            <a:pPr algn="ctr"/>
-          </a:p>
-        </p:txBody>
-      </p:sp>
-      <p:sp>
-        <p:nvSpPr>
-          <p:cNvPr id="14" name="TextBox 13"/>
-          <p:cNvSpPr txBox="1"/>
-          <p:nvPr/>
-        </p:nvSpPr>
-        <p:spPr>
-          <a:xfrm>
-            <a:off x="8522208" y="5193792"/>
-            <a:ext cx="2834640" cy="1024128"/>
-          </a:xfrm>
-          <a:prstGeom prst="rect">
-            <a:avLst/>
-          </a:prstGeom>
-          <a:noFill/>
-        </p:spPr>
-        <p:txBody>
-          <a:bodyPr wrap="square" lIns="0" tIns="0" rIns="0" bIns="0">
-            <a:spAutoFit/>
-          </a:bodyPr>
-          <a:lstStyle/>
-          <a:p>
-            <a:pPr>
+              <a:t>• Khử siêu ổn định (Metastability) tín hiệu rx_i 125kHz; MTBF &gt; 1.000 năm trên SkyWater 130nm.</a:t>
+            </a:r>
+          </a:p>
+          <a:p>
+            <a:pPr>
+              <a:spcBef>
+                <a:spcPts val="800"/>
+              </a:spcBef>
               <a:spcAft>
                 <a:spcPts val="200"/>
               </a:spcAft>
-              <a:defRPr sz="1100" b="1">
-                <a:solidFill>
-                  <a:srgbClr val="10B981"/>
-                </a:solidFill>
-                <a:latin typeface="Segoe UI"/>
-              </a:defRPr>
-            </a:pPr>
-            <a:r>
-              <a:t>XÁC NHẬN VIVADO XSIM:</a:t>
+              <a:defRPr sz="1250" b="1">
+                <a:solidFill>
+                  <a:srgbClr val="D97706"/>
+                </a:solidFill>
+                <a:latin typeface="Segoe UI"/>
+              </a:defRPr>
+            </a:pPr>
+            <a:r>
+              <a:t>TẦNG 2 &amp; 3: TẠO BAUD &amp; MÁY TRẠNG THÁI RX (simpleuart.v)</a:t>
             </a:r>
           </a:p>
           <a:p>
@@ -11804,19 +13019,94 @@
               <a:lnSpc>
                 <a:spcPct val="115000"/>
               </a:lnSpc>
-              <a:defRPr sz="1050" b="1">
-                <a:solidFill>
-                  <a:srgbClr val="065F46"/>
-                </a:solidFill>
-                <a:latin typeface="Segoe UI"/>
-              </a:defRPr>
-            </a:pPr>
-            <a:r>
-              <a:t>100% PASS (5/5 TEST SCENARIOS)</a:t>
-            </a:r>
-            <a:br/>
-            <a:r>
-              <a:t>RUNTIME: 15.275 µs | SỐ LỖI: 0</a:t>
+              <a:spcAft>
+                <a:spcPts val="600"/>
+              </a:spcAft>
+              <a:defRPr sz="1200">
+                <a:solidFill>
+                  <a:srgbClr val="0F172A"/>
+                </a:solidFill>
+                <a:latin typeface="Segoe UI"/>
+              </a:defRPr>
+            </a:pPr>
+            <a:r>
+              <a:t>• Chia tần số cfg_divider = 5208 (9600 bps); Lấy mẫu 16x bầu đa số 3 mẫu &amp; bắt khung 8-N-1.</a:t>
+            </a:r>
+          </a:p>
+          <a:p>
+            <a:pPr>
+              <a:spcBef>
+                <a:spcPts val="800"/>
+              </a:spcBef>
+              <a:spcAft>
+                <a:spcPts val="200"/>
+              </a:spcAft>
+              <a:defRPr sz="1250" b="1">
+                <a:solidFill>
+                  <a:srgbClr val="2563EB"/>
+                </a:solidFill>
+                <a:latin typeface="Segoe UI"/>
+              </a:defRPr>
+            </a:pPr>
+            <a:r>
+              <a:t>TẦNG 4: HÀNG ĐỢI FIFO 32 BYTES ĐỘC LẬP (sync_fifo.v)</a:t>
+            </a:r>
+          </a:p>
+          <a:p>
+            <a:pPr>
+              <a:lnSpc>
+                <a:spcPct val="115000"/>
+              </a:lnSpc>
+              <a:spcAft>
+                <a:spcPts val="600"/>
+              </a:spcAft>
+              <a:defRPr sz="1200">
+                <a:solidFill>
+                  <a:srgbClr val="0F172A"/>
+                </a:solidFill>
+                <a:latin typeface="Segoe UI"/>
+              </a:defRPr>
+            </a:pPr>
+            <a:r>
+              <a:t>• Đệm trọn vẹn 14 byte chuỗi thẻ RFID, chống tràn dữ liệu tuyệt đối khi CPU bận ghi Flash.</a:t>
+            </a:r>
+          </a:p>
+          <a:p>
+            <a:pPr>
+              <a:spcBef>
+                <a:spcPts val="800"/>
+              </a:spcBef>
+              <a:spcAft>
+                <a:spcPts val="200"/>
+              </a:spcAft>
+              <a:defRPr sz="1250" b="1">
+                <a:solidFill>
+                  <a:srgbClr val="10B981"/>
+                </a:solidFill>
+                <a:latin typeface="Segoe UI"/>
+              </a:defRPr>
+            </a:pPr>
+            <a:r>
+              <a:t>TẦNG 5: GIẢI MÃ BUS MMIO NON-BLOCKING (uart_mmio.v)</a:t>
+            </a:r>
+          </a:p>
+          <a:p>
+            <a:pPr>
+              <a:lnSpc>
+                <a:spcPct val="115000"/>
+              </a:lnSpc>
+              <a:spcAft>
+                <a:spcPts val="600"/>
+              </a:spcAft>
+              <a:defRPr sz="1200">
+                <a:solidFill>
+                  <a:srgbClr val="0F172A"/>
+                </a:solidFill>
+                <a:latin typeface="Segoe UI"/>
+              </a:defRPr>
+            </a:pPr>
+            <a:r>
+              <a:t>• Ánh xạ 0x1000_0000 / 0x1000_0004; Phản hồi trong 1 chu kỳ 20ns, không bao giờ treo CPU.</a:t>
             </a:r>
           </a:p>
         </p:txBody>
@@ -11972,7 +13262,7 @@
               </a:defRPr>
             </a:pPr>
             <a:r>
-              <a:t>Testbench 2: Kiểm Thử Tích Hợp Toàn Diện Top SoC Boot Flash &amp; Ping (tb_uart_ping.v)</a:t>
+              <a:t>Testbench 1: Kiểm Thử Phần Cứng RTL Thuần Cho UART MMIO &amp; FIFO (tb_uart_rtl.v)</a:t>
             </a:r>
           </a:p>
         </p:txBody>
@@ -12087,7 +13377,7 @@
               </a:defRPr>
             </a:pPr>
             <a:r>
-              <a:t>08 / 13</a:t>
+              <a:t>08 / 14</a:t>
             </a:r>
           </a:p>
         </p:txBody>
@@ -12101,7 +13391,7 @@
         <p:spPr>
           <a:xfrm>
             <a:off x="731520" y="1188720"/>
-            <a:ext cx="10728655" cy="5120640"/>
+            <a:ext cx="10728655" cy="3822191"/>
           </a:xfrm>
           <a:prstGeom prst="roundRect">
             <a:avLst>
@@ -12109,11 +13399,11 @@
             </a:avLst>
           </a:prstGeom>
           <a:solidFill>
-            <a:srgbClr val="0B132B"/>
+            <a:srgbClr val="FFFFFF"/>
           </a:solidFill>
           <a:ln w="19050">
             <a:solidFill>
-              <a:srgbClr val="1C2541"/>
+              <a:srgbClr val="2563EB"/>
             </a:solidFill>
           </a:ln>
         </p:spPr>
@@ -12147,8 +13437,8 @@
         </p:nvSpPr>
         <p:spPr>
           <a:xfrm>
-            <a:off x="868680" y="1261872"/>
-            <a:ext cx="10454335" cy="292608"/>
+            <a:off x="868680" y="1243584"/>
+            <a:ext cx="10454335" cy="237744"/>
           </a:xfrm>
           <a:prstGeom prst="rect">
             <a:avLst/>
@@ -12161,30 +13451,101 @@
           </a:bodyPr>
           <a:lstStyle/>
           <a:p>
-            <a:pPr>
-              <a:defRPr sz="1050" b="1">
-                <a:solidFill>
-                  <a:srgbClr val="34D399"/>
-                </a:solidFill>
-                <a:latin typeface="Consolas"/>
-              </a:defRPr>
-            </a:pPr>
-            <a:r>
-              <a:t>&gt;_  tb/tb_uart_ping.v [Mã Nguồn Testbench &amp; Nhật Ký Mô Phỏng Vivado XSim]</a:t>
-            </a:r>
-          </a:p>
-        </p:txBody>
-      </p:sp>
-      <p:sp>
-        <p:nvSpPr>
-          <p:cNvPr id="10" name="TextBox 9"/>
+            <a:pPr algn="ctr">
+              <a:defRPr sz="1200" b="1">
+                <a:solidFill>
+                  <a:srgbClr val="2563EB"/>
+                </a:solidFill>
+                <a:latin typeface="Segoe UI"/>
+              </a:defRPr>
+            </a:pPr>
+            <a:r>
+              <a:t>DẠNG SÓNG MÔ PHỎNG TIMELINE VIVADO XSIM (15.275 µs)</a:t>
+            </a:r>
+          </a:p>
+        </p:txBody>
+      </p:sp>
+      <p:pic>
+        <p:nvPicPr>
+          <p:cNvPr id="10" name="Picture 9" descr="waveform_tb_uart_rtl.png"/>
+          <p:cNvPicPr>
+            <a:picLocks noChangeAspect="1"/>
+          </p:cNvPicPr>
+          <p:nvPr/>
+        </p:nvPicPr>
+        <p:blipFill>
+          <a:blip r:embed="rId2"/>
+          <a:stretch>
+            <a:fillRect/>
+          </a:stretch>
+        </p:blipFill>
+        <p:spPr>
+          <a:xfrm>
+            <a:off x="1700784" y="1508760"/>
+            <a:ext cx="8778240" cy="3401568"/>
+          </a:xfrm>
+          <a:prstGeom prst="rect">
+            <a:avLst/>
+          </a:prstGeom>
+        </p:spPr>
+      </p:pic>
+      <p:sp>
+        <p:nvSpPr>
+          <p:cNvPr id="11" name="Rounded Rectangle 10"/>
+          <p:cNvSpPr/>
+          <p:nvPr/>
+        </p:nvSpPr>
+        <p:spPr>
+          <a:xfrm>
+            <a:off x="731520" y="5102352"/>
+            <a:ext cx="7589520" cy="1207008"/>
+          </a:xfrm>
+          <a:prstGeom prst="roundRect">
+            <a:avLst>
+              <a:gd name="adj" fmla="val 2000"/>
+            </a:avLst>
+          </a:prstGeom>
+          <a:solidFill>
+            <a:srgbClr val="FFFFFF"/>
+          </a:solidFill>
+          <a:ln w="19050">
+            <a:solidFill>
+              <a:srgbClr val="2563EB"/>
+            </a:solidFill>
+          </a:ln>
+        </p:spPr>
+        <p:style>
+          <a:lnRef idx="1">
+            <a:schemeClr val="accent1"/>
+          </a:lnRef>
+          <a:fillRef idx="3">
+            <a:schemeClr val="accent1"/>
+          </a:fillRef>
+          <a:effectRef idx="2">
+            <a:schemeClr val="accent1"/>
+          </a:effectRef>
+          <a:fontRef idx="minor">
+            <a:schemeClr val="lt1"/>
+          </a:fontRef>
+        </p:style>
+        <p:txBody>
+          <a:bodyPr rtlCol="0" anchor="ctr"/>
+          <a:lstStyle/>
+          <a:p>
+            <a:pPr algn="ctr"/>
+          </a:p>
+        </p:txBody>
+      </p:sp>
+      <p:sp>
+        <p:nvSpPr>
+          <p:cNvPr id="12" name="TextBox 11"/>
           <p:cNvSpPr txBox="1"/>
           <p:nvPr/>
         </p:nvSpPr>
         <p:spPr>
           <a:xfrm>
-            <a:off x="868680" y="1554480"/>
-            <a:ext cx="10454335" cy="4407408"/>
+            <a:off x="868680" y="5157216"/>
+            <a:ext cx="7315200" cy="1097280"/>
           </a:xfrm>
           <a:prstGeom prst="rect">
             <a:avLst/>
@@ -12198,431 +13559,174 @@
           <a:lstStyle/>
           <a:p>
             <a:pPr>
+              <a:spcAft>
+                <a:spcPts val="200"/>
+              </a:spcAft>
+              <a:defRPr sz="1100" b="1">
+                <a:solidFill>
+                  <a:srgbClr val="2563EB"/>
+                </a:solidFill>
+                <a:latin typeface="Segoe UI"/>
+              </a:defRPr>
+            </a:pPr>
+            <a:r>
+              <a:t>5 KỊCH BẢN KIỂM THỬ RTL THUẦN (XÁC MINH PHẦN CỨNG 100% PASS):</a:t>
+            </a:r>
+          </a:p>
+          <a:p>
+            <a:pPr>
               <a:lnSpc>
-                <a:spcPct val="100000"/>
+                <a:spcPct val="105000"/>
               </a:lnSpc>
               <a:spcAft>
-                <a:spcPts val="0"/>
+                <a:spcPts val="120"/>
               </a:spcAft>
-              <a:defRPr sz="1150">
-                <a:solidFill>
-                  <a:srgbClr val="94A3B8"/>
-                </a:solidFill>
-                <a:latin typeface="Consolas"/>
-              </a:defRPr>
-            </a:pPr>
-            <a:r>
-              <a:t>// === tb/tb_uart_ping.v: KỊCH BẢN KIỂM THỬ TÍCH HỢP TOÀN DIỆN TOP SOC ===</a:t>
+              <a:defRPr sz="1050">
+                <a:solidFill>
+                  <a:srgbClr val="0F172A"/>
+                </a:solidFill>
+                <a:latin typeface="Segoe UI"/>
+              </a:defRPr>
+            </a:pPr>
+            <a:r>
+              <a:t>• 1. Divider Mặc Định: Prescaler nạp đúng TEST_DIV = 16 ➔ PASS</a:t>
             </a:r>
           </a:p>
           <a:p>
             <a:pPr>
               <a:lnSpc>
-                <a:spcPct val="100000"/>
+                <a:spcPct val="105000"/>
               </a:lnSpc>
               <a:spcAft>
-                <a:spcPts val="0"/>
+                <a:spcPts val="120"/>
               </a:spcAft>
-              <a:defRPr sz="1150">
-                <a:solidFill>
-                  <a:srgbClr val="FFFFFF"/>
-                </a:solidFill>
-                <a:latin typeface="Consolas"/>
-              </a:defRPr>
-            </a:pPr>
-            <a:r>
-              <a:t>initial begin</a:t>
+              <a:defRPr sz="1050">
+                <a:solidFill>
+                  <a:srgbClr val="0F172A"/>
+                </a:solidFill>
+                <a:latin typeface="Segoe UI"/>
+              </a:defRPr>
+            </a:pPr>
+            <a:r>
+              <a:t>• 2. Tái Cấu Hình: Ghi giá trị chia tần mới qua MMIO tức thì ➔ PASS</a:t>
             </a:r>
           </a:p>
           <a:p>
             <a:pPr>
               <a:lnSpc>
-                <a:spcPct val="100000"/>
+                <a:spcPct val="105000"/>
               </a:lnSpc>
               <a:spcAft>
-                <a:spcPts val="0"/>
+                <a:spcPts val="120"/>
               </a:spcAft>
-              <a:defRPr sz="1150">
-                <a:solidFill>
-                  <a:srgbClr val="FFFFFF"/>
-                </a:solidFill>
-                <a:latin typeface="Consolas"/>
-              </a:defRPr>
-            </a:pPr>
-            <a:r>
-              <a:t>    clk = 0; rst_n = 0; rdm6300_rx_i = 1; uart_rx_i = 1;</a:t>
+              <a:defRPr sz="1050">
+                <a:solidFill>
+                  <a:srgbClr val="0F172A"/>
+                </a:solidFill>
+                <a:latin typeface="Segoe UI"/>
+              </a:defRPr>
+            </a:pPr>
+            <a:r>
+              <a:t>• 3. Phát Khung TX: Ký tự 0x4B ('K') xuất chuẩn UART 8-N-1 ➔ PASS</a:t>
             </a:r>
           </a:p>
           <a:p>
             <a:pPr>
               <a:lnSpc>
-                <a:spcPct val="100000"/>
+                <a:spcPct val="105000"/>
               </a:lnSpc>
               <a:spcAft>
-                <a:spcPts val="0"/>
+                <a:spcPts val="120"/>
               </a:spcAft>
-              <a:defRPr sz="1150">
-                <a:solidFill>
-                  <a:srgbClr val="94A3B8"/>
-                </a:solidFill>
-                <a:latin typeface="Consolas"/>
-              </a:defRPr>
-            </a:pPr>
-            <a:r>
-              <a:t>    #200; rst_n = 1;                 // Giải phóng Reset ➔ CPU thức dậy &amp; Boot Flash 0x250000</a:t>
+              <a:defRPr sz="1050">
+                <a:solidFill>
+                  <a:srgbClr val="0F172A"/>
+                </a:solidFill>
+                <a:latin typeface="Segoe UI"/>
+              </a:defRPr>
+            </a:pPr>
+            <a:r>
+              <a:t>• 4. Nhận Khung RX: Bắt chuỗi xung rx_i, nạp sạch FIFO (read_val = 75) ➔ PASS</a:t>
             </a:r>
           </a:p>
           <a:p>
             <a:pPr>
               <a:lnSpc>
-                <a:spcPct val="100000"/>
+                <a:spcPct val="105000"/>
               </a:lnSpc>
               <a:spcAft>
-                <a:spcPts val="0"/>
+                <a:spcPts val="120"/>
               </a:spcAft>
-              <a:defRPr sz="1150">
-                <a:solidFill>
-                  <a:srgbClr val="FFFFFF"/>
-                </a:solidFill>
-                <a:latin typeface="Consolas"/>
-              </a:defRPr>
-            </a:pPr>
-            <a:r>
-              <a:t>    wait(ready_matched == 1'b1);     // Đợi CPU PicoRV32 thực thi xong Banner C</a:t>
-            </a:r>
-          </a:p>
-          <a:p>
-            <a:pPr>
-              <a:lnSpc>
-                <a:spcPct val="100000"/>
-              </a:lnSpc>
-              <a:spcAft>
-                <a:spcPts val="0"/>
-              </a:spcAft>
-              <a:defRPr sz="1150">
-                <a:solidFill>
-                  <a:srgbClr val="94A3B8"/>
-                </a:solidFill>
-                <a:latin typeface="Consolas"/>
-              </a:defRPr>
-            </a:pPr>
-            <a:r>
-              <a:t>    #100000; send_pc_byte("P");      // Host PC gửi byte lệnh Ping ('P' = 0x50)</a:t>
-            </a:r>
-          </a:p>
-          <a:p>
-            <a:pPr>
-              <a:lnSpc>
-                <a:spcPct val="100000"/>
-              </a:lnSpc>
-              <a:spcAft>
-                <a:spcPts val="0"/>
-              </a:spcAft>
-              <a:defRPr sz="1150">
-                <a:solidFill>
-                  <a:srgbClr val="FFFFFF"/>
-                </a:solidFill>
-                <a:latin typeface="Consolas"/>
-              </a:defRPr>
-            </a:pPr>
-            <a:r>
-              <a:t>    send_pc_byte(8'h0A);             // Gửi ký tự kết thúc dòng '\n' (0x0A)</a:t>
-            </a:r>
-          </a:p>
-          <a:p>
-            <a:pPr>
-              <a:lnSpc>
-                <a:spcPct val="100000"/>
-              </a:lnSpc>
-              <a:spcAft>
-                <a:spcPts val="0"/>
-              </a:spcAft>
-              <a:defRPr sz="1150">
-                <a:solidFill>
-                  <a:srgbClr val="FFFFFF"/>
-                </a:solidFill>
-                <a:latin typeface="Consolas"/>
-              </a:defRPr>
-            </a:pPr>
-            <a:r>
-              <a:t>    wait(pong_matched == 1'b1);      // Đợi CPU nhận diện và phản hồi chuỗi PONG</a:t>
-            </a:r>
-          </a:p>
-          <a:p>
-            <a:pPr>
-              <a:lnSpc>
-                <a:spcPct val="100000"/>
-              </a:lnSpc>
-              <a:spcAft>
-                <a:spcPts val="0"/>
-              </a:spcAft>
-              <a:defRPr sz="1150" b="1">
-                <a:solidFill>
-                  <a:srgbClr val="10B981"/>
-                </a:solidFill>
-                <a:latin typeface="Consolas"/>
-              </a:defRPr>
-            </a:pPr>
-            <a:r>
-              <a:t>    if (pong_matched &amp;&amp; !cpu_trap)   $display("  [SUCCESS] PING-PONG TEST PASSED!");</a:t>
-            </a:r>
-          </a:p>
-          <a:p>
-            <a:pPr>
-              <a:lnSpc>
-                <a:spcPct val="100000"/>
-              </a:lnSpc>
-              <a:spcAft>
-                <a:spcPts val="0"/>
-              </a:spcAft>
-              <a:defRPr sz="1150">
-                <a:solidFill>
-                  <a:srgbClr val="FFFFFF"/>
-                </a:solidFill>
-                <a:latin typeface="Consolas"/>
-              </a:defRPr>
-            </a:pPr>
-            <a:r>
-              <a:t>end</a:t>
-            </a:r>
-          </a:p>
-          <a:p>
-            <a:pPr>
-              <a:lnSpc>
-                <a:spcPct val="100000"/>
-              </a:lnSpc>
-              <a:spcAft>
-                <a:spcPts val="0"/>
-              </a:spcAft>
-              <a:defRPr sz="1150">
-                <a:solidFill>
-                  <a:srgbClr val="FFFFFF"/>
-                </a:solidFill>
-                <a:latin typeface="Consolas"/>
-              </a:defRPr>
-            </a:pPr>
-          </a:p>
-          <a:p>
-            <a:pPr>
-              <a:lnSpc>
-                <a:spcPct val="100000"/>
-              </a:lnSpc>
-              <a:spcAft>
-                <a:spcPts val="0"/>
-              </a:spcAft>
-              <a:defRPr sz="1150">
-                <a:solidFill>
-                  <a:srgbClr val="94A3B8"/>
-                </a:solidFill>
-                <a:latin typeface="Consolas"/>
-              </a:defRPr>
-            </a:pPr>
-            <a:r>
-              <a:t>// === VIVADO SIMULATOR (XSIM) EXECUTION OUTPUT LOG ===</a:t>
-            </a:r>
-          </a:p>
-          <a:p>
-            <a:pPr>
-              <a:lnSpc>
-                <a:spcPct val="100000"/>
-              </a:lnSpc>
-              <a:spcAft>
-                <a:spcPts val="0"/>
-              </a:spcAft>
-              <a:defRPr sz="1150" b="1">
-                <a:solidFill>
-                  <a:srgbClr val="0EA5E9"/>
-                </a:solidFill>
-                <a:latin typeface="Consolas"/>
-              </a:defRPr>
-            </a:pPr>
-            <a:r>
-              <a:t>[FLASH MODEL] Loaded 2048 words (8192 bytes) from firmware.hex</a:t>
-            </a:r>
-          </a:p>
-          <a:p>
-            <a:pPr>
-              <a:lnSpc>
-                <a:spcPct val="100000"/>
-              </a:lnSpc>
-              <a:spcAft>
-                <a:spcPts val="0"/>
-              </a:spcAft>
-              <a:defRPr sz="1150" b="1">
-                <a:solidFill>
-                  <a:srgbClr val="0EA5E9"/>
-                </a:solidFill>
-                <a:latin typeface="Consolas"/>
-              </a:defRPr>
-            </a:pPr>
-            <a:r>
-              <a:t>[TB] System Reset released. PicoRV32 booting from 0x250000...</a:t>
-            </a:r>
-          </a:p>
-          <a:p>
-            <a:pPr>
-              <a:lnSpc>
-                <a:spcPct val="100000"/>
-              </a:lnSpc>
-              <a:spcAft>
-                <a:spcPts val="0"/>
-              </a:spcAft>
-              <a:defRPr sz="1150" b="1">
-                <a:solidFill>
-                  <a:srgbClr val="0EA5E9"/>
-                </a:solidFill>
-                <a:latin typeface="Consolas"/>
-              </a:defRPr>
-            </a:pPr>
-            <a:r>
-              <a:t>[UART TX] ========================================================================</a:t>
-            </a:r>
-          </a:p>
-          <a:p>
-            <a:pPr>
-              <a:lnSpc>
-                <a:spcPct val="100000"/>
-              </a:lnSpc>
-              <a:spcAft>
-                <a:spcPts val="0"/>
-              </a:spcAft>
-              <a:defRPr sz="1150" b="1">
-                <a:solidFill>
-                  <a:srgbClr val="0EA5E9"/>
-                </a:solidFill>
-                <a:latin typeface="Consolas"/>
-              </a:defRPr>
-            </a:pPr>
-            <a:r>
-              <a:t>[UART TX]            RDM6300 PICORV32 SOC ACCESS CONTROLLER READY                 </a:t>
-            </a:r>
-          </a:p>
-          <a:p>
-            <a:pPr>
-              <a:lnSpc>
-                <a:spcPct val="100000"/>
-              </a:lnSpc>
-              <a:spcAft>
-                <a:spcPts val="0"/>
-              </a:spcAft>
-              <a:defRPr sz="1150" b="1">
-                <a:solidFill>
-                  <a:srgbClr val="0EA5E9"/>
-                </a:solidFill>
-                <a:latin typeface="Consolas"/>
-              </a:defRPr>
-            </a:pPr>
-            <a:r>
-              <a:t>[UART TX] ========================================================================</a:t>
-            </a:r>
-          </a:p>
-          <a:p>
-            <a:pPr>
-              <a:lnSpc>
-                <a:spcPct val="100000"/>
-              </a:lnSpc>
-              <a:spcAft>
-                <a:spcPts val="0"/>
-              </a:spcAft>
-              <a:defRPr sz="1150" b="1">
-                <a:solidFill>
-                  <a:srgbClr val="0EA5E9"/>
-                </a:solidFill>
-                <a:latin typeface="Consolas"/>
-              </a:defRPr>
-            </a:pPr>
-            <a:r>
-              <a:t>[TB] Boot banner detected! Sending 'P' (Ping) command to SoC...</a:t>
-            </a:r>
-          </a:p>
-          <a:p>
-            <a:pPr>
-              <a:lnSpc>
-                <a:spcPct val="100000"/>
-              </a:lnSpc>
-              <a:spcAft>
-                <a:spcPts val="0"/>
-              </a:spcAft>
-              <a:defRPr sz="1150" b="1">
-                <a:solidFill>
-                  <a:srgbClr val="0EA5E9"/>
-                </a:solidFill>
-                <a:latin typeface="Consolas"/>
-              </a:defRPr>
-            </a:pPr>
-            <a:r>
-              <a:t>[HOST -&gt; SOC] Sent Byte: 'P' (0x50), '\n' (0x0A)</a:t>
-            </a:r>
-          </a:p>
-          <a:p>
-            <a:pPr>
-              <a:lnSpc>
-                <a:spcPct val="100000"/>
-              </a:lnSpc>
-              <a:spcAft>
-                <a:spcPts val="0"/>
-              </a:spcAft>
-              <a:defRPr sz="1150" b="1">
-                <a:solidFill>
-                  <a:srgbClr val="0EA5E9"/>
-                </a:solidFill>
-                <a:latin typeface="Consolas"/>
-              </a:defRPr>
-            </a:pPr>
-            <a:r>
-              <a:t>[UART TX] PONG: PicoRV32 Active</a:t>
-            </a:r>
-          </a:p>
-          <a:p>
-            <a:pPr>
-              <a:lnSpc>
-                <a:spcPct val="100000"/>
-              </a:lnSpc>
-              <a:spcAft>
-                <a:spcPts val="0"/>
-              </a:spcAft>
-              <a:defRPr sz="1150" b="1">
-                <a:solidFill>
-                  <a:srgbClr val="10B981"/>
-                </a:solidFill>
-                <a:latin typeface="Consolas"/>
-              </a:defRPr>
-            </a:pPr>
-            <a:r>
-              <a:t>[SUCCESS] PING-PONG TEST PASSED! PicoRV32 responded with PONG.</a:t>
-            </a:r>
-          </a:p>
-          <a:p>
-            <a:pPr>
-              <a:lnSpc>
-                <a:spcPct val="100000"/>
-              </a:lnSpc>
-              <a:spcAft>
-                <a:spcPts val="0"/>
-              </a:spcAft>
-              <a:defRPr sz="1150">
-                <a:solidFill>
-                  <a:srgbClr val="FFFFFF"/>
-                </a:solidFill>
-                <a:latin typeface="Consolas"/>
-              </a:defRPr>
-            </a:pPr>
-            <a:r>
-              <a:t>cpu_trap = 0 (CPU healthy, no illegal instructions, no stack overflow)</a:t>
-            </a:r>
-          </a:p>
-        </p:txBody>
-      </p:sp>
-      <p:sp>
-        <p:nvSpPr>
-          <p:cNvPr id="11" name="TextBox 10"/>
+              <a:defRPr sz="1050">
+                <a:solidFill>
+                  <a:srgbClr val="0F172A"/>
+                </a:solidFill>
+                <a:latin typeface="Segoe UI"/>
+              </a:defRPr>
+            </a:pPr>
+            <a:r>
+              <a:t>• 5. Xả Tràn FIFO: Đệm liên tục nhiều byte, đọc cạn trả về 0xFFFFFFFF ➔ PASS</a:t>
+            </a:r>
+          </a:p>
+        </p:txBody>
+      </p:sp>
+      <p:sp>
+        <p:nvSpPr>
+          <p:cNvPr id="13" name="Rounded Rectangle 12"/>
+          <p:cNvSpPr/>
+          <p:nvPr/>
+        </p:nvSpPr>
+        <p:spPr>
+          <a:xfrm>
+            <a:off x="8412480" y="5102352"/>
+            <a:ext cx="3047695" cy="1207008"/>
+          </a:xfrm>
+          <a:prstGeom prst="roundRect">
+            <a:avLst>
+              <a:gd name="adj" fmla="val 2000"/>
+            </a:avLst>
+          </a:prstGeom>
+          <a:solidFill>
+            <a:srgbClr val="ECFDF5"/>
+          </a:solidFill>
+          <a:ln w="19050">
+            <a:solidFill>
+              <a:srgbClr val="10B981"/>
+            </a:solidFill>
+          </a:ln>
+        </p:spPr>
+        <p:style>
+          <a:lnRef idx="1">
+            <a:schemeClr val="accent1"/>
+          </a:lnRef>
+          <a:fillRef idx="3">
+            <a:schemeClr val="accent1"/>
+          </a:fillRef>
+          <a:effectRef idx="2">
+            <a:schemeClr val="accent1"/>
+          </a:effectRef>
+          <a:fontRef idx="minor">
+            <a:schemeClr val="lt1"/>
+          </a:fontRef>
+        </p:style>
+        <p:txBody>
+          <a:bodyPr rtlCol="0" anchor="ctr"/>
+          <a:lstStyle/>
+          <a:p>
+            <a:pPr algn="ctr"/>
+          </a:p>
+        </p:txBody>
+      </p:sp>
+      <p:sp>
+        <p:nvSpPr>
+          <p:cNvPr id="14" name="TextBox 13"/>
           <p:cNvSpPr txBox="1"/>
           <p:nvPr/>
         </p:nvSpPr>
         <p:spPr>
           <a:xfrm>
-            <a:off x="868680" y="5925312"/>
-            <a:ext cx="10454335" cy="274320"/>
+            <a:off x="8522208" y="5193792"/>
+            <a:ext cx="2834640" cy="1024128"/>
           </a:xfrm>
           <a:prstGeom prst="rect">
             <a:avLst/>
@@ -12630,13 +13734,16 @@
           <a:noFill/>
         </p:spPr>
         <p:txBody>
-          <a:bodyPr wrap="none" lIns="0" tIns="0" rIns="0" bIns="0">
+          <a:bodyPr wrap="square" lIns="0" tIns="0" rIns="0" bIns="0">
             <a:spAutoFit/>
           </a:bodyPr>
           <a:lstStyle/>
           <a:p>
             <a:pPr>
-              <a:defRPr sz="950" b="1">
+              <a:spcAft>
+                <a:spcPts val="200"/>
+              </a:spcAft>
+              <a:defRPr sz="1100" b="1">
                 <a:solidFill>
                   <a:srgbClr val="10B981"/>
                 </a:solidFill>
@@ -12644,7 +13751,27 @@
               </a:defRPr>
             </a:pPr>
             <a:r>
-              <a:t>=== XÁC NHẬN: BOOT FLASH XIP + UART PING-PONG 100% PASS | RUNTIME: 2,086.555 µs | TRAP = 0 ===</a:t>
+              <a:t>XÁC NHẬN VIVADO XSIM:</a:t>
+            </a:r>
+          </a:p>
+          <a:p>
+            <a:pPr>
+              <a:lnSpc>
+                <a:spcPct val="115000"/>
+              </a:lnSpc>
+              <a:defRPr sz="1050" b="1">
+                <a:solidFill>
+                  <a:srgbClr val="065F46"/>
+                </a:solidFill>
+                <a:latin typeface="Segoe UI"/>
+              </a:defRPr>
+            </a:pPr>
+            <a:r>
+              <a:t>100% PASS (5/5 TEST SCENARIOS)</a:t>
+            </a:r>
+            <a:br/>
+            <a:r>
+              <a:t>RUNTIME: 15.275 µs | SỐ LỖI: 0</a:t>
             </a:r>
           </a:p>
         </p:txBody>
@@ -12787,7 +13914,7 @@
               </a:defRPr>
             </a:pPr>
             <a:r>
-              <a:t>PHẦN 5: DEMO CHỨC NĂNG SẢN PHẨM</a:t>
+              <a:t>PHẦN 4: HỆ THỐNG TESTBENCH &amp; MÔ PHỎNG</a:t>
             </a:r>
           </a:p>
           <a:p>
@@ -12800,7 +13927,7 @@
               </a:defRPr>
             </a:pPr>
             <a:r>
-              <a:t>Danh Sách Thiết Bị &amp; Thiết Lập Kết Nối Phần Cứng FPGA Basys 3</a:t>
+              <a:t>Testbench 2: Kiểm Thử Tích Hợp Toàn Diện Top SoC Boot Flash &amp; Ping (tb_uart_ping.v)</a:t>
             </a:r>
           </a:p>
         </p:txBody>
@@ -12915,7 +14042,7 @@
               </a:defRPr>
             </a:pPr>
             <a:r>
-              <a:t>09 / 13</a:t>
+              <a:t>09 / 14</a:t>
             </a:r>
           </a:p>
         </p:txBody>
@@ -12929,7 +14056,7 @@
         <p:spPr>
           <a:xfrm>
             <a:off x="731520" y="1188720"/>
-            <a:ext cx="5257800" cy="5120640"/>
+            <a:ext cx="10728655" cy="5120640"/>
           </a:xfrm>
           <a:prstGeom prst="roundRect">
             <a:avLst>
@@ -12937,11 +14064,11 @@
             </a:avLst>
           </a:prstGeom>
           <a:solidFill>
-            <a:srgbClr val="FFFFFF"/>
+            <a:srgbClr val="0B132B"/>
           </a:solidFill>
           <a:ln w="19050">
             <a:solidFill>
-              <a:srgbClr val="2563EB"/>
+              <a:srgbClr val="1C2541"/>
             </a:solidFill>
           </a:ln>
         </p:spPr>
@@ -12975,8 +14102,8 @@
         </p:nvSpPr>
         <p:spPr>
           <a:xfrm>
-            <a:off x="868680" y="1298448"/>
-            <a:ext cx="4983480" cy="292608"/>
+            <a:off x="868680" y="1261872"/>
+            <a:ext cx="10454335" cy="292608"/>
           </a:xfrm>
           <a:prstGeom prst="rect">
             <a:avLst/>
@@ -12989,54 +14116,30 @@
           </a:bodyPr>
           <a:lstStyle/>
           <a:p>
-            <a:pPr algn="ctr">
-              <a:defRPr sz="1300" b="1">
-                <a:solidFill>
-                  <a:srgbClr val="2563EB"/>
-                </a:solidFill>
-                <a:latin typeface="Segoe UI"/>
-              </a:defRPr>
-            </a:pPr>
-            <a:r>
-              <a:t>HỆ THỐNG THỰC NGHIỆM THỰC TẾ</a:t>
-            </a:r>
-          </a:p>
-        </p:txBody>
-      </p:sp>
-      <p:pic>
-        <p:nvPicPr>
-          <p:cNvPr id="10" name="Picture 9" descr="Device.jpg"/>
-          <p:cNvPicPr>
-            <a:picLocks noChangeAspect="1"/>
-          </p:cNvPicPr>
-          <p:nvPr/>
-        </p:nvPicPr>
-        <p:blipFill>
-          <a:blip r:embed="rId2"/>
-          <a:stretch>
-            <a:fillRect/>
-          </a:stretch>
-        </p:blipFill>
-        <p:spPr>
-          <a:xfrm>
-            <a:off x="868680" y="1691640"/>
-            <a:ext cx="4983480" cy="3730752"/>
-          </a:xfrm>
-          <a:prstGeom prst="rect">
-            <a:avLst/>
-          </a:prstGeom>
-        </p:spPr>
-      </p:pic>
-      <p:sp>
-        <p:nvSpPr>
-          <p:cNvPr id="11" name="TextBox 10"/>
+            <a:pPr>
+              <a:defRPr sz="1050" b="1">
+                <a:solidFill>
+                  <a:srgbClr val="34D399"/>
+                </a:solidFill>
+                <a:latin typeface="Consolas"/>
+              </a:defRPr>
+            </a:pPr>
+            <a:r>
+              <a:t>&gt;_  tb/tb_uart_ping.v [Mã Nguồn Testbench &amp; Nhật Ký Mô Phỏng Vivado XSim]</a:t>
+            </a:r>
+          </a:p>
+        </p:txBody>
+      </p:sp>
+      <p:sp>
+        <p:nvSpPr>
+          <p:cNvPr id="10" name="TextBox 9"/>
           <p:cNvSpPr txBox="1"/>
           <p:nvPr/>
         </p:nvSpPr>
         <p:spPr>
           <a:xfrm>
-            <a:off x="868680" y="5532120"/>
-            <a:ext cx="4983480" cy="685800"/>
+            <a:off x="868680" y="1554480"/>
+            <a:ext cx="10454335" cy="4407408"/>
           </a:xfrm>
           <a:prstGeom prst="rect">
             <a:avLst/>
@@ -13049,80 +14152,432 @@
           </a:bodyPr>
           <a:lstStyle/>
           <a:p>
-            <a:pPr algn="ctr">
+            <a:pPr>
               <a:lnSpc>
-                <a:spcPct val="115000"/>
+                <a:spcPct val="100000"/>
               </a:lnSpc>
-              <a:defRPr sz="1100" i="1">
-                <a:solidFill>
-                  <a:srgbClr val="475569"/>
-                </a:solidFill>
-                <a:latin typeface="Segoe UI"/>
-              </a:defRPr>
-            </a:pPr>
-            <a:r>
-              <a:t>Nguồn 5V riêng cho RDM6300 (chung GND) • Trở 1kΩ nối tiếp TX ➔ JA1 bảo vệ I/O 3.3V</a:t>
-            </a:r>
-          </a:p>
-        </p:txBody>
-      </p:sp>
-      <p:sp>
-        <p:nvSpPr>
-          <p:cNvPr id="12" name="Rounded Rectangle 11"/>
-          <p:cNvSpPr/>
-          <p:nvPr/>
-        </p:nvSpPr>
-        <p:spPr>
-          <a:xfrm>
-            <a:off x="6172200" y="1188720"/>
-            <a:ext cx="5285232" cy="5120640"/>
-          </a:xfrm>
-          <a:prstGeom prst="roundRect">
-            <a:avLst>
-              <a:gd name="adj" fmla="val 2000"/>
-            </a:avLst>
-          </a:prstGeom>
-          <a:solidFill>
-            <a:srgbClr val="FFFFFF"/>
-          </a:solidFill>
-          <a:ln w="19050">
-            <a:solidFill>
-              <a:srgbClr val="2563EB"/>
-            </a:solidFill>
-          </a:ln>
-        </p:spPr>
-        <p:style>
-          <a:lnRef idx="1">
-            <a:schemeClr val="accent1"/>
-          </a:lnRef>
-          <a:fillRef idx="3">
-            <a:schemeClr val="accent1"/>
-          </a:fillRef>
-          <a:effectRef idx="2">
-            <a:schemeClr val="accent1"/>
-          </a:effectRef>
-          <a:fontRef idx="minor">
-            <a:schemeClr val="lt1"/>
-          </a:fontRef>
-        </p:style>
-        <p:txBody>
-          <a:bodyPr rtlCol="0" anchor="ctr"/>
-          <a:lstStyle/>
-          <a:p>
-            <a:pPr algn="ctr"/>
-          </a:p>
-        </p:txBody>
-      </p:sp>
-      <p:sp>
-        <p:nvSpPr>
-          <p:cNvPr id="13" name="TextBox 12"/>
+              <a:spcAft>
+                <a:spcPts val="0"/>
+              </a:spcAft>
+              <a:defRPr sz="1150">
+                <a:solidFill>
+                  <a:srgbClr val="94A3B8"/>
+                </a:solidFill>
+                <a:latin typeface="Consolas"/>
+              </a:defRPr>
+            </a:pPr>
+            <a:r>
+              <a:t>// === tb/tb_uart_ping.v: KỊCH BẢN KIỂM THỬ TÍCH HỢP TOÀN DIỆN TOP SOC ===</a:t>
+            </a:r>
+          </a:p>
+          <a:p>
+            <a:pPr>
+              <a:lnSpc>
+                <a:spcPct val="100000"/>
+              </a:lnSpc>
+              <a:spcAft>
+                <a:spcPts val="0"/>
+              </a:spcAft>
+              <a:defRPr sz="1150">
+                <a:solidFill>
+                  <a:srgbClr val="FFFFFF"/>
+                </a:solidFill>
+                <a:latin typeface="Consolas"/>
+              </a:defRPr>
+            </a:pPr>
+            <a:r>
+              <a:t>initial begin</a:t>
+            </a:r>
+          </a:p>
+          <a:p>
+            <a:pPr>
+              <a:lnSpc>
+                <a:spcPct val="100000"/>
+              </a:lnSpc>
+              <a:spcAft>
+                <a:spcPts val="0"/>
+              </a:spcAft>
+              <a:defRPr sz="1150">
+                <a:solidFill>
+                  <a:srgbClr val="FFFFFF"/>
+                </a:solidFill>
+                <a:latin typeface="Consolas"/>
+              </a:defRPr>
+            </a:pPr>
+            <a:r>
+              <a:t>    clk = 0; rst_n = 0; rdm6300_rx_i = 1; uart_rx_i = 1;</a:t>
+            </a:r>
+          </a:p>
+          <a:p>
+            <a:pPr>
+              <a:lnSpc>
+                <a:spcPct val="100000"/>
+              </a:lnSpc>
+              <a:spcAft>
+                <a:spcPts val="0"/>
+              </a:spcAft>
+              <a:defRPr sz="1150">
+                <a:solidFill>
+                  <a:srgbClr val="94A3B8"/>
+                </a:solidFill>
+                <a:latin typeface="Consolas"/>
+              </a:defRPr>
+            </a:pPr>
+            <a:r>
+              <a:t>    #200; rst_n = 1;                 // Giải phóng Reset ➔ CPU thức dậy &amp; Boot Flash 0x250000</a:t>
+            </a:r>
+          </a:p>
+          <a:p>
+            <a:pPr>
+              <a:lnSpc>
+                <a:spcPct val="100000"/>
+              </a:lnSpc>
+              <a:spcAft>
+                <a:spcPts val="0"/>
+              </a:spcAft>
+              <a:defRPr sz="1150">
+                <a:solidFill>
+                  <a:srgbClr val="FFFFFF"/>
+                </a:solidFill>
+                <a:latin typeface="Consolas"/>
+              </a:defRPr>
+            </a:pPr>
+            <a:r>
+              <a:t>    wait(ready_matched == 1'b1);     // Đợi CPU PicoRV32 thực thi xong Banner C</a:t>
+            </a:r>
+          </a:p>
+          <a:p>
+            <a:pPr>
+              <a:lnSpc>
+                <a:spcPct val="100000"/>
+              </a:lnSpc>
+              <a:spcAft>
+                <a:spcPts val="0"/>
+              </a:spcAft>
+              <a:defRPr sz="1150">
+                <a:solidFill>
+                  <a:srgbClr val="94A3B8"/>
+                </a:solidFill>
+                <a:latin typeface="Consolas"/>
+              </a:defRPr>
+            </a:pPr>
+            <a:r>
+              <a:t>    #100000; send_pc_byte("P");      // Host PC gửi byte lệnh Ping ('P' = 0x50)</a:t>
+            </a:r>
+          </a:p>
+          <a:p>
+            <a:pPr>
+              <a:lnSpc>
+                <a:spcPct val="100000"/>
+              </a:lnSpc>
+              <a:spcAft>
+                <a:spcPts val="0"/>
+              </a:spcAft>
+              <a:defRPr sz="1150">
+                <a:solidFill>
+                  <a:srgbClr val="FFFFFF"/>
+                </a:solidFill>
+                <a:latin typeface="Consolas"/>
+              </a:defRPr>
+            </a:pPr>
+            <a:r>
+              <a:t>    send_pc_byte(8'h0A);             // Gửi ký tự kết thúc dòng '\n' (0x0A)</a:t>
+            </a:r>
+          </a:p>
+          <a:p>
+            <a:pPr>
+              <a:lnSpc>
+                <a:spcPct val="100000"/>
+              </a:lnSpc>
+              <a:spcAft>
+                <a:spcPts val="0"/>
+              </a:spcAft>
+              <a:defRPr sz="1150">
+                <a:solidFill>
+                  <a:srgbClr val="FFFFFF"/>
+                </a:solidFill>
+                <a:latin typeface="Consolas"/>
+              </a:defRPr>
+            </a:pPr>
+            <a:r>
+              <a:t>    wait(pong_matched == 1'b1);      // Đợi CPU nhận diện và phản hồi chuỗi PONG</a:t>
+            </a:r>
+          </a:p>
+          <a:p>
+            <a:pPr>
+              <a:lnSpc>
+                <a:spcPct val="100000"/>
+              </a:lnSpc>
+              <a:spcAft>
+                <a:spcPts val="0"/>
+              </a:spcAft>
+              <a:defRPr sz="1150" b="1">
+                <a:solidFill>
+                  <a:srgbClr val="10B981"/>
+                </a:solidFill>
+                <a:latin typeface="Consolas"/>
+              </a:defRPr>
+            </a:pPr>
+            <a:r>
+              <a:t>    if (pong_matched &amp;&amp; !cpu_trap)   $display("  [SUCCESS] PING-PONG TEST PASSED!");</a:t>
+            </a:r>
+          </a:p>
+          <a:p>
+            <a:pPr>
+              <a:lnSpc>
+                <a:spcPct val="100000"/>
+              </a:lnSpc>
+              <a:spcAft>
+                <a:spcPts val="0"/>
+              </a:spcAft>
+              <a:defRPr sz="1150">
+                <a:solidFill>
+                  <a:srgbClr val="FFFFFF"/>
+                </a:solidFill>
+                <a:latin typeface="Consolas"/>
+              </a:defRPr>
+            </a:pPr>
+            <a:r>
+              <a:t>end</a:t>
+            </a:r>
+          </a:p>
+          <a:p>
+            <a:pPr>
+              <a:lnSpc>
+                <a:spcPct val="100000"/>
+              </a:lnSpc>
+              <a:spcAft>
+                <a:spcPts val="0"/>
+              </a:spcAft>
+              <a:defRPr sz="1150">
+                <a:solidFill>
+                  <a:srgbClr val="FFFFFF"/>
+                </a:solidFill>
+                <a:latin typeface="Consolas"/>
+              </a:defRPr>
+            </a:pPr>
+          </a:p>
+          <a:p>
+            <a:pPr>
+              <a:lnSpc>
+                <a:spcPct val="100000"/>
+              </a:lnSpc>
+              <a:spcAft>
+                <a:spcPts val="0"/>
+              </a:spcAft>
+              <a:defRPr sz="1150">
+                <a:solidFill>
+                  <a:srgbClr val="94A3B8"/>
+                </a:solidFill>
+                <a:latin typeface="Consolas"/>
+              </a:defRPr>
+            </a:pPr>
+            <a:r>
+              <a:t>// === VIVADO SIMULATOR (XSIM) EXECUTION OUTPUT LOG ===</a:t>
+            </a:r>
+          </a:p>
+          <a:p>
+            <a:pPr>
+              <a:lnSpc>
+                <a:spcPct val="100000"/>
+              </a:lnSpc>
+              <a:spcAft>
+                <a:spcPts val="0"/>
+              </a:spcAft>
+              <a:defRPr sz="1150" b="1">
+                <a:solidFill>
+                  <a:srgbClr val="0EA5E9"/>
+                </a:solidFill>
+                <a:latin typeface="Consolas"/>
+              </a:defRPr>
+            </a:pPr>
+            <a:r>
+              <a:t>[FLASH MODEL] Loaded 2048 words (8192 bytes) from firmware.hex</a:t>
+            </a:r>
+          </a:p>
+          <a:p>
+            <a:pPr>
+              <a:lnSpc>
+                <a:spcPct val="100000"/>
+              </a:lnSpc>
+              <a:spcAft>
+                <a:spcPts val="0"/>
+              </a:spcAft>
+              <a:defRPr sz="1150" b="1">
+                <a:solidFill>
+                  <a:srgbClr val="0EA5E9"/>
+                </a:solidFill>
+                <a:latin typeface="Consolas"/>
+              </a:defRPr>
+            </a:pPr>
+            <a:r>
+              <a:t>[TB] System Reset released. PicoRV32 booting from 0x250000...</a:t>
+            </a:r>
+          </a:p>
+          <a:p>
+            <a:pPr>
+              <a:lnSpc>
+                <a:spcPct val="100000"/>
+              </a:lnSpc>
+              <a:spcAft>
+                <a:spcPts val="0"/>
+              </a:spcAft>
+              <a:defRPr sz="1150" b="1">
+                <a:solidFill>
+                  <a:srgbClr val="0EA5E9"/>
+                </a:solidFill>
+                <a:latin typeface="Consolas"/>
+              </a:defRPr>
+            </a:pPr>
+            <a:r>
+              <a:t>[UART TX] ========================================================================</a:t>
+            </a:r>
+          </a:p>
+          <a:p>
+            <a:pPr>
+              <a:lnSpc>
+                <a:spcPct val="100000"/>
+              </a:lnSpc>
+              <a:spcAft>
+                <a:spcPts val="0"/>
+              </a:spcAft>
+              <a:defRPr sz="1150" b="1">
+                <a:solidFill>
+                  <a:srgbClr val="0EA5E9"/>
+                </a:solidFill>
+                <a:latin typeface="Consolas"/>
+              </a:defRPr>
+            </a:pPr>
+            <a:r>
+              <a:t>[UART TX]            RDM6300 PICORV32 SOC ACCESS CONTROLLER READY                 </a:t>
+            </a:r>
+          </a:p>
+          <a:p>
+            <a:pPr>
+              <a:lnSpc>
+                <a:spcPct val="100000"/>
+              </a:lnSpc>
+              <a:spcAft>
+                <a:spcPts val="0"/>
+              </a:spcAft>
+              <a:defRPr sz="1150" b="1">
+                <a:solidFill>
+                  <a:srgbClr val="0EA5E9"/>
+                </a:solidFill>
+                <a:latin typeface="Consolas"/>
+              </a:defRPr>
+            </a:pPr>
+            <a:r>
+              <a:t>[UART TX] ========================================================================</a:t>
+            </a:r>
+          </a:p>
+          <a:p>
+            <a:pPr>
+              <a:lnSpc>
+                <a:spcPct val="100000"/>
+              </a:lnSpc>
+              <a:spcAft>
+                <a:spcPts val="0"/>
+              </a:spcAft>
+              <a:defRPr sz="1150" b="1">
+                <a:solidFill>
+                  <a:srgbClr val="0EA5E9"/>
+                </a:solidFill>
+                <a:latin typeface="Consolas"/>
+              </a:defRPr>
+            </a:pPr>
+            <a:r>
+              <a:t>[TB] Boot banner detected! Sending 'P' (Ping) command to SoC...</a:t>
+            </a:r>
+          </a:p>
+          <a:p>
+            <a:pPr>
+              <a:lnSpc>
+                <a:spcPct val="100000"/>
+              </a:lnSpc>
+              <a:spcAft>
+                <a:spcPts val="0"/>
+              </a:spcAft>
+              <a:defRPr sz="1150" b="1">
+                <a:solidFill>
+                  <a:srgbClr val="0EA5E9"/>
+                </a:solidFill>
+                <a:latin typeface="Consolas"/>
+              </a:defRPr>
+            </a:pPr>
+            <a:r>
+              <a:t>[HOST -&gt; SOC] Sent Byte: 'P' (0x50), '\n' (0x0A)</a:t>
+            </a:r>
+          </a:p>
+          <a:p>
+            <a:pPr>
+              <a:lnSpc>
+                <a:spcPct val="100000"/>
+              </a:lnSpc>
+              <a:spcAft>
+                <a:spcPts val="0"/>
+              </a:spcAft>
+              <a:defRPr sz="1150" b="1">
+                <a:solidFill>
+                  <a:srgbClr val="0EA5E9"/>
+                </a:solidFill>
+                <a:latin typeface="Consolas"/>
+              </a:defRPr>
+            </a:pPr>
+            <a:r>
+              <a:t>[UART TX] PONG: PicoRV32 Active</a:t>
+            </a:r>
+          </a:p>
+          <a:p>
+            <a:pPr>
+              <a:lnSpc>
+                <a:spcPct val="100000"/>
+              </a:lnSpc>
+              <a:spcAft>
+                <a:spcPts val="0"/>
+              </a:spcAft>
+              <a:defRPr sz="1150" b="1">
+                <a:solidFill>
+                  <a:srgbClr val="10B981"/>
+                </a:solidFill>
+                <a:latin typeface="Consolas"/>
+              </a:defRPr>
+            </a:pPr>
+            <a:r>
+              <a:t>[SUCCESS] PING-PONG TEST PASSED! PicoRV32 responded with PONG.</a:t>
+            </a:r>
+          </a:p>
+          <a:p>
+            <a:pPr>
+              <a:lnSpc>
+                <a:spcPct val="100000"/>
+              </a:lnSpc>
+              <a:spcAft>
+                <a:spcPts val="0"/>
+              </a:spcAft>
+              <a:defRPr sz="1150">
+                <a:solidFill>
+                  <a:srgbClr val="FFFFFF"/>
+                </a:solidFill>
+                <a:latin typeface="Consolas"/>
+              </a:defRPr>
+            </a:pPr>
+            <a:r>
+              <a:t>cpu_trap = 0 (CPU healthy, no illegal instructions, no stack overflow)</a:t>
+            </a:r>
+          </a:p>
+        </p:txBody>
+      </p:sp>
+      <p:sp>
+        <p:nvSpPr>
+          <p:cNvPr id="11" name="TextBox 10"/>
           <p:cNvSpPr txBox="1"/>
           <p:nvPr/>
         </p:nvSpPr>
         <p:spPr>
           <a:xfrm>
-            <a:off x="6400800" y="1325880"/>
-            <a:ext cx="4828032" cy="4892040"/>
+            <a:off x="868680" y="5925312"/>
+            <a:ext cx="10454335" cy="274320"/>
           </a:xfrm>
           <a:prstGeom prst="rect">
             <a:avLst/>
@@ -13130,256 +14585,21 @@
           <a:noFill/>
         </p:spPr>
         <p:txBody>
-          <a:bodyPr wrap="square" lIns="0" tIns="0" rIns="0" bIns="0">
+          <a:bodyPr wrap="none" lIns="0" tIns="0" rIns="0" bIns="0">
             <a:spAutoFit/>
           </a:bodyPr>
           <a:lstStyle/>
           <a:p>
             <a:pPr>
-              <a:spcAft>
-                <a:spcPts val="1000"/>
-              </a:spcAft>
-              <a:defRPr b="1" sz="1500">
-                <a:solidFill>
-                  <a:srgbClr val="2563EB"/>
-                </a:solidFill>
-                <a:latin typeface="Segoe UI"/>
-              </a:defRPr>
-            </a:pPr>
-            <a:r>
-              <a:t>DANH SÁCH THIẾT BỊ THỰC NGHIỆM</a:t>
-            </a:r>
-          </a:p>
-          <a:p>
-            <a:pPr>
-              <a:spcBef>
-                <a:spcPts val="700"/>
-              </a:spcBef>
-              <a:defRPr sz="1500" b="1">
-                <a:solidFill>
-                  <a:srgbClr val="0F172A"/>
-                </a:solidFill>
-                <a:latin typeface="Segoe UI"/>
-              </a:defRPr>
-            </a:pPr>
-            <a:r>
-              <a:t>1. Bo mạch FPGA Digilent Basys 3</a:t>
-            </a:r>
-          </a:p>
-          <a:p>
-            <a:pPr>
-              <a:defRPr sz="1250">
-                <a:solidFill>
-                  <a:srgbClr val="475569"/>
-                </a:solidFill>
-                <a:latin typeface="Segoe UI"/>
-              </a:defRPr>
-            </a:pPr>
-            <a:r>
-              <a:t>     Artix-7 XC7A35T, SPI Flash 32Mbit</a:t>
-            </a:r>
-          </a:p>
-          <a:p>
-            <a:pPr>
-              <a:spcBef>
-                <a:spcPts val="700"/>
-              </a:spcBef>
-              <a:defRPr sz="1500" b="1">
-                <a:solidFill>
-                  <a:srgbClr val="0F172A"/>
-                </a:solidFill>
-                <a:latin typeface="Segoe UI"/>
-              </a:defRPr>
-            </a:pPr>
-            <a:r>
-              <a:t>2. Module RFID RDM6300</a:t>
-            </a:r>
-          </a:p>
-          <a:p>
-            <a:pPr>
-              <a:defRPr sz="1250">
-                <a:solidFill>
-                  <a:srgbClr val="475569"/>
-                </a:solidFill>
-                <a:latin typeface="Segoe UI"/>
-              </a:defRPr>
-            </a:pPr>
-            <a:r>
-              <a:t>     125 kHz, kèm ăng-ten cuộn dây</a:t>
-            </a:r>
-          </a:p>
-          <a:p>
-            <a:pPr>
-              <a:spcBef>
-                <a:spcPts val="700"/>
-              </a:spcBef>
-              <a:defRPr sz="1500" b="1">
-                <a:solidFill>
-                  <a:srgbClr val="0F172A"/>
-                </a:solidFill>
-                <a:latin typeface="Segoe UI"/>
-              </a:defRPr>
-            </a:pPr>
-            <a:r>
-              <a:t>3. Thẻ RFID EM4100</a:t>
-            </a:r>
-          </a:p>
-          <a:p>
-            <a:pPr>
-              <a:defRPr sz="1250">
-                <a:solidFill>
-                  <a:srgbClr val="475569"/>
-                </a:solidFill>
-                <a:latin typeface="Segoe UI"/>
-              </a:defRPr>
-            </a:pPr>
-            <a:r>
-              <a:t>     Thẻ từ 125 kHz mẫu</a:t>
-            </a:r>
-          </a:p>
-          <a:p>
-            <a:pPr>
-              <a:spcBef>
-                <a:spcPts val="700"/>
-              </a:spcBef>
-              <a:defRPr sz="1500" b="1">
-                <a:solidFill>
-                  <a:srgbClr val="0F172A"/>
-                </a:solidFill>
-                <a:latin typeface="Segoe UI"/>
-              </a:defRPr>
-            </a:pPr>
-            <a:r>
-              <a:t>4. Module nguồn MB102 + Adapter DC</a:t>
-            </a:r>
-          </a:p>
-          <a:p>
-            <a:pPr>
-              <a:defRPr sz="1250">
-                <a:solidFill>
-                  <a:srgbClr val="475569"/>
-                </a:solidFill>
-                <a:latin typeface="Segoe UI"/>
-              </a:defRPr>
-            </a:pPr>
-            <a:r>
-              <a:t>     Cấp 5V cho RDM6300</a:t>
-            </a:r>
-          </a:p>
-          <a:p>
-            <a:pPr>
-              <a:spcBef>
-                <a:spcPts val="700"/>
-              </a:spcBef>
-              <a:defRPr sz="1500" b="1">
-                <a:solidFill>
-                  <a:srgbClr val="0F172A"/>
-                </a:solidFill>
-                <a:latin typeface="Segoe UI"/>
-              </a:defRPr>
-            </a:pPr>
-            <a:r>
-              <a:t>5. Điện trở 1kΩ</a:t>
-            </a:r>
-          </a:p>
-          <a:p>
-            <a:pPr>
-              <a:defRPr sz="1250">
-                <a:solidFill>
-                  <a:srgbClr val="475569"/>
-                </a:solidFill>
-                <a:latin typeface="Segoe UI"/>
-              </a:defRPr>
-            </a:pPr>
-            <a:r>
-              <a:t>     Nối tiếp chân TX RDM6300 ➔ JA1</a:t>
-            </a:r>
-          </a:p>
-          <a:p>
-            <a:pPr>
-              <a:spcBef>
-                <a:spcPts val="700"/>
-              </a:spcBef>
-              <a:defRPr sz="1500" b="1">
-                <a:solidFill>
-                  <a:srgbClr val="0F172A"/>
-                </a:solidFill>
-                <a:latin typeface="Segoe UI"/>
-              </a:defRPr>
-            </a:pPr>
-            <a:r>
-              <a:t>6. Breadboard &amp; dây cắm</a:t>
-            </a:r>
-          </a:p>
-          <a:p>
-            <a:pPr>
-              <a:defRPr sz="1250">
-                <a:solidFill>
-                  <a:srgbClr val="475569"/>
-                </a:solidFill>
-                <a:latin typeface="Segoe UI"/>
-              </a:defRPr>
-            </a:pPr>
-            <a:r>
-              <a:t>     Đấu nối mạch thử nghiệm</a:t>
-            </a:r>
-          </a:p>
-          <a:p>
-            <a:pPr>
-              <a:spcBef>
-                <a:spcPts val="700"/>
-              </a:spcBef>
-              <a:defRPr sz="1500" b="1">
-                <a:solidFill>
-                  <a:srgbClr val="0F172A"/>
-                </a:solidFill>
-                <a:latin typeface="Segoe UI"/>
-              </a:defRPr>
-            </a:pPr>
-            <a:r>
-              <a:t>7. Cáp Micro-USB</a:t>
-            </a:r>
-          </a:p>
-          <a:p>
-            <a:pPr>
-              <a:defRPr sz="1250">
-                <a:solidFill>
-                  <a:srgbClr val="475569"/>
-                </a:solidFill>
-                <a:latin typeface="Segoe UI"/>
-              </a:defRPr>
-            </a:pPr>
-            <a:r>
-              <a:t>     Nạp FPGA &amp; UART 9600 bps</a:t>
-            </a:r>
-          </a:p>
-          <a:p>
-            <a:pPr>
-              <a:spcBef>
-                <a:spcPts val="700"/>
-              </a:spcBef>
-              <a:defRPr sz="1500" b="1">
-                <a:solidFill>
-                  <a:srgbClr val="0F172A"/>
-                </a:solidFill>
-                <a:latin typeface="Segoe UI"/>
-              </a:defRPr>
-            </a:pPr>
-            <a:r>
-              <a:t>8. Máy tính Host PC</a:t>
-            </a:r>
-          </a:p>
-          <a:p>
-            <a:pPr>
-              <a:defRPr sz="1250">
-                <a:solidFill>
-                  <a:srgbClr val="475569"/>
-                </a:solidFill>
-                <a:latin typeface="Segoe UI"/>
-              </a:defRPr>
-            </a:pPr>
-            <a:r>
-              <a:t>     Chạy chương trình Host Console</a:t>
+              <a:defRPr sz="950" b="1">
+                <a:solidFill>
+                  <a:srgbClr val="10B981"/>
+                </a:solidFill>
+                <a:latin typeface="Segoe UI"/>
+              </a:defRPr>
+            </a:pPr>
+            <a:r>
+              <a:t>=== XÁC NHẬN: BOOT FLASH XIP + UART PING-PONG 100% PASS | RUNTIME: 2,086.555 µs | TRAP = 0 ===</a:t>
             </a:r>
           </a:p>
         </p:txBody>
